--- a/docs/LEON_intro_for_non_specialists.pptx
+++ b/docs/LEON_intro_for_non_specialists.pptx
@@ -13,6 +13,11 @@
     <p:sldId id="261" r:id="rId13"/>
     <p:sldId id="262" r:id="rId14"/>
     <p:sldId id="263" r:id="rId15"/>
+    <p:sldId id="264" r:id="rId16"/>
+    <p:sldId id="265" r:id="rId17"/>
+    <p:sldId id="266" r:id="rId18"/>
+    <p:sldId id="267" r:id="rId19"/>
+    <p:sldId id="268" r:id="rId20"/>
   </p:sldIdLst>
   <p:sldSz cx="12191695" cy="6858000" type="screen4x3"/>
   <p:notesSz cx="6858000" cy="9144000"/>
@@ -509,12 +514,292 @@
           <a:lstStyle/>
           <a:p>
             <a:r>
-              <a:t>Open by saying LEON is a reading assistant for supplier files, not a science project.</a:t>
-            </a:r>
-          </a:p>
-          <a:p>
-            <a:r>
-              <a:t>The rest of the deck never uses the words model, algorithm or prompt.</a:t>
+              <a:t>Bonjour. This is my first meeting with you.</a:t>
+            </a:r>
+          </a:p>
+          <a:p>
+            <a:r>
+              <a:t>I will present the work I am doing on LEON, the people I work with on the mechatronics side, the next step (deployment), the AI training, and two points of availability I would like to confirm with you.</a:t>
+            </a:r>
+          </a:p>
+        </p:txBody>
+      </p:sp>
+      <p:sp>
+        <p:nvSpPr>
+          <p:cNvPr id="4" name="Slide Number Placeholder 3"/>
+          <p:cNvSpPr>
+            <a:spLocks noGrp="1"/>
+          </p:cNvSpPr>
+          <p:nvPr>
+            <p:ph type="sldNum" idx="5" sz="quarter"/>
+          </p:nvPr>
+        </p:nvSpPr>
+        <p:spPr/>
+      </p:sp>
+    </p:spTree>
+  </p:cSld>
+  <p:clrMapOvr>
+    <a:masterClrMapping/>
+  </p:clrMapOvr>
+</p:notes>
+</file>
+
+<file path=ppt/notesSlides/notesSlide10.xml><?xml version="1.0" encoding="utf-8"?>
+<p:notes xmlns:a="http://schemas.openxmlformats.org/drawingml/2006/main" xmlns:p="http://schemas.openxmlformats.org/presentationml/2006/main" xmlns:r="http://schemas.openxmlformats.org/officeDocument/2006/relationships">
+  <p:cSld>
+    <p:spTree>
+      <p:nvGrpSpPr>
+        <p:cNvPr id="1" name=""/>
+        <p:cNvGrpSpPr/>
+        <p:nvPr/>
+      </p:nvGrpSpPr>
+      <p:grpSpPr>
+        <a:xfrm>
+          <a:off x="0" y="0"/>
+          <a:ext cx="0" cy="0"/>
+          <a:chOff x="0" y="0"/>
+          <a:chExt cx="0" cy="0"/>
+        </a:xfrm>
+      </p:grpSpPr>
+      <p:sp>
+        <p:nvSpPr>
+          <p:cNvPr id="2" name="Slide Image Placeholder 1"/>
+          <p:cNvSpPr>
+            <a:spLocks noGrp="1"/>
+          </p:cNvSpPr>
+          <p:nvPr>
+            <p:ph type="sldImg" idx="2"/>
+          </p:nvPr>
+        </p:nvSpPr>
+        <p:spPr/>
+      </p:sp>
+      <p:sp>
+        <p:nvSpPr>
+          <p:cNvPr id="3" name="Notes Placeholder 2"/>
+          <p:cNvSpPr>
+            <a:spLocks noGrp="1"/>
+          </p:cNvSpPr>
+          <p:nvPr>
+            <p:ph type="body" idx="3" sz="quarter"/>
+          </p:nvPr>
+        </p:nvSpPr>
+        <p:spPr/>
+        <p:txBody>
+          <a:bodyPr/>
+          <a:lstStyle/>
+          <a:p>
+            <a:r>
+              <a:t>Thank Imane and Patrick by name. Make clear you are the builder, they are the mechatronics experts. The manager should see you are not isolated.</a:t>
+            </a:r>
+          </a:p>
+        </p:txBody>
+      </p:sp>
+      <p:sp>
+        <p:nvSpPr>
+          <p:cNvPr id="4" name="Slide Number Placeholder 3"/>
+          <p:cNvSpPr>
+            <a:spLocks noGrp="1"/>
+          </p:cNvSpPr>
+          <p:nvPr>
+            <p:ph type="sldNum" idx="5" sz="quarter"/>
+          </p:nvPr>
+        </p:nvSpPr>
+        <p:spPr/>
+      </p:sp>
+    </p:spTree>
+  </p:cSld>
+  <p:clrMapOvr>
+    <a:masterClrMapping/>
+  </p:clrMapOvr>
+</p:notes>
+</file>
+
+<file path=ppt/notesSlides/notesSlide11.xml><?xml version="1.0" encoding="utf-8"?>
+<p:notes xmlns:a="http://schemas.openxmlformats.org/drawingml/2006/main" xmlns:p="http://schemas.openxmlformats.org/presentationml/2006/main" xmlns:r="http://schemas.openxmlformats.org/officeDocument/2006/relationships">
+  <p:cSld>
+    <p:spTree>
+      <p:nvGrpSpPr>
+        <p:cNvPr id="1" name=""/>
+        <p:cNvGrpSpPr/>
+        <p:nvPr/>
+      </p:nvGrpSpPr>
+      <p:grpSpPr>
+        <a:xfrm>
+          <a:off x="0" y="0"/>
+          <a:ext cx="0" cy="0"/>
+          <a:chOff x="0" y="0"/>
+          <a:chExt cx="0" cy="0"/>
+        </a:xfrm>
+      </p:grpSpPr>
+      <p:sp>
+        <p:nvSpPr>
+          <p:cNvPr id="2" name="Slide Image Placeholder 1"/>
+          <p:cNvSpPr>
+            <a:spLocks noGrp="1"/>
+          </p:cNvSpPr>
+          <p:nvPr>
+            <p:ph type="sldImg" idx="2"/>
+          </p:nvPr>
+        </p:nvSpPr>
+        <p:spPr/>
+      </p:sp>
+      <p:sp>
+        <p:nvSpPr>
+          <p:cNvPr id="3" name="Notes Placeholder 2"/>
+          <p:cNvSpPr>
+            <a:spLocks noGrp="1"/>
+          </p:cNvSpPr>
+          <p:nvPr>
+            <p:ph type="body" idx="3" sz="quarter"/>
+          </p:nvPr>
+        </p:nvSpPr>
+        <p:spPr/>
+        <p:txBody>
+          <a:bodyPr/>
+          <a:lstStyle/>
+          <a:p>
+            <a:r>
+              <a:t>Be clear: it is not live for everyone yet. Do not promise a date you do not have. The commitment is: finish this task, then deploy.</a:t>
+            </a:r>
+          </a:p>
+        </p:txBody>
+      </p:sp>
+      <p:sp>
+        <p:nvSpPr>
+          <p:cNvPr id="4" name="Slide Number Placeholder 3"/>
+          <p:cNvSpPr>
+            <a:spLocks noGrp="1"/>
+          </p:cNvSpPr>
+          <p:nvPr>
+            <p:ph type="sldNum" idx="5" sz="quarter"/>
+          </p:nvPr>
+        </p:nvSpPr>
+        <p:spPr/>
+      </p:sp>
+    </p:spTree>
+  </p:cSld>
+  <p:clrMapOvr>
+    <a:masterClrMapping/>
+  </p:clrMapOvr>
+</p:notes>
+</file>
+
+<file path=ppt/notesSlides/notesSlide12.xml><?xml version="1.0" encoding="utf-8"?>
+<p:notes xmlns:a="http://schemas.openxmlformats.org/drawingml/2006/main" xmlns:p="http://schemas.openxmlformats.org/presentationml/2006/main" xmlns:r="http://schemas.openxmlformats.org/officeDocument/2006/relationships">
+  <p:cSld>
+    <p:spTree>
+      <p:nvGrpSpPr>
+        <p:cNvPr id="1" name=""/>
+        <p:cNvGrpSpPr/>
+        <p:nvPr/>
+      </p:nvGrpSpPr>
+      <p:grpSpPr>
+        <a:xfrm>
+          <a:off x="0" y="0"/>
+          <a:ext cx="0" cy="0"/>
+          <a:chOff x="0" y="0"/>
+          <a:chExt cx="0" cy="0"/>
+        </a:xfrm>
+      </p:grpSpPr>
+      <p:sp>
+        <p:nvSpPr>
+          <p:cNvPr id="2" name="Slide Image Placeholder 1"/>
+          <p:cNvSpPr>
+            <a:spLocks noGrp="1"/>
+          </p:cNvSpPr>
+          <p:nvPr>
+            <p:ph type="sldImg" idx="2"/>
+          </p:nvPr>
+        </p:nvSpPr>
+        <p:spPr/>
+      </p:sp>
+      <p:sp>
+        <p:nvSpPr>
+          <p:cNvPr id="3" name="Notes Placeholder 2"/>
+          <p:cNvSpPr>
+            <a:spLocks noGrp="1"/>
+          </p:cNvSpPr>
+          <p:nvPr>
+            <p:ph type="body" idx="3" sz="quarter"/>
+          </p:nvPr>
+        </p:nvSpPr>
+        <p:spPr/>
+        <p:txBody>
+          <a:bodyPr/>
+          <a:lstStyle/>
+          <a:p>
+            <a:r>
+              <a:t>If the manager asks for the date or the provider, say you will confirm — do not invent a catalogue name. The message is: the team will be trained to use AI on our work, with the engineer remaining responsible.</a:t>
+            </a:r>
+          </a:p>
+        </p:txBody>
+      </p:sp>
+      <p:sp>
+        <p:nvSpPr>
+          <p:cNvPr id="4" name="Slide Number Placeholder 3"/>
+          <p:cNvSpPr>
+            <a:spLocks noGrp="1"/>
+          </p:cNvSpPr>
+          <p:nvPr>
+            <p:ph type="sldNum" idx="5" sz="quarter"/>
+          </p:nvPr>
+        </p:nvSpPr>
+        <p:spPr/>
+      </p:sp>
+    </p:spTree>
+  </p:cSld>
+  <p:clrMapOvr>
+    <a:masterClrMapping/>
+  </p:clrMapOvr>
+</p:notes>
+</file>
+
+<file path=ppt/notesSlides/notesSlide13.xml><?xml version="1.0" encoding="utf-8"?>
+<p:notes xmlns:a="http://schemas.openxmlformats.org/drawingml/2006/main" xmlns:p="http://schemas.openxmlformats.org/presentationml/2006/main" xmlns:r="http://schemas.openxmlformats.org/officeDocument/2006/relationships">
+  <p:cSld>
+    <p:spTree>
+      <p:nvGrpSpPr>
+        <p:cNvPr id="1" name=""/>
+        <p:cNvGrpSpPr/>
+        <p:nvPr/>
+      </p:nvGrpSpPr>
+      <p:grpSpPr>
+        <a:xfrm>
+          <a:off x="0" y="0"/>
+          <a:ext cx="0" cy="0"/>
+          <a:chOff x="0" y="0"/>
+          <a:chExt cx="0" cy="0"/>
+        </a:xfrm>
+      </p:grpSpPr>
+      <p:sp>
+        <p:nvSpPr>
+          <p:cNvPr id="2" name="Slide Image Placeholder 1"/>
+          <p:cNvSpPr>
+            <a:spLocks noGrp="1"/>
+          </p:cNvSpPr>
+          <p:nvPr>
+            <p:ph type="sldImg" idx="2"/>
+          </p:nvPr>
+        </p:nvSpPr>
+        <p:spPr/>
+      </p:sp>
+      <p:sp>
+        <p:nvSpPr>
+          <p:cNvPr id="3" name="Notes Placeholder 2"/>
+          <p:cNvSpPr>
+            <a:spLocks noGrp="1"/>
+          </p:cNvSpPr>
+          <p:nvPr>
+            <p:ph type="body" idx="3" sz="quarter"/>
+          </p:nvPr>
+        </p:nvSpPr>
+        <p:spPr/>
+        <p:txBody>
+          <a:bodyPr/>
+          <a:lstStyle/>
+          <a:p>
+            <a:r>
+              <a:t>Ask clearly for confirmation. Do not rush. TT = mercredi et vendredi. Next two weeks = first school period. Then thank the manager for the time.</a:t>
             </a:r>
           </a:p>
         </p:txBody>
@@ -584,12 +869,7 @@
           <a:lstStyle/>
           <a:p>
             <a:r>
-              <a:t>Spend time here. Most confusion later comes from mixing these three names.</a:t>
-            </a:r>
-          </a:p>
-          <a:p>
-            <a:r>
-              <a:t>SPEC = us. MATRIX = their checklist. TDR = their technical brochure.</a:t>
+              <a:t>Walk the agenda in 20 seconds. Then go to the three documents.</a:t>
             </a:r>
           </a:p>
         </p:txBody>
@@ -659,7 +939,12 @@
           <a:lstStyle/>
           <a:p>
             <a:r>
-              <a:t>The punchline: we are not replacing the engineer. We are catching the misses.</a:t>
+              <a:t>Spend time here. Most confusion later comes from mixing these three names.</a:t>
+            </a:r>
+          </a:p>
+          <a:p>
+            <a:r>
+              <a:t>SPEC = us. MATRIX = their checklist. TDR = their technical brochure.</a:t>
             </a:r>
           </a:p>
         </p:txBody>
@@ -729,7 +1014,7 @@
           <a:lstStyle/>
           <a:p>
             <a:r>
-              <a:t>If someone asks “is it AI?”, answer: it is a reading assistant. Some checks are simple rules (count the sections, compare two numbers). A person always remains responsible.</a:t>
+              <a:t>The punchline: we are not replacing the engineer. We are catching the misses.</a:t>
             </a:r>
           </a:p>
         </p:txBody>
@@ -799,12 +1084,7 @@
           <a:lstStyle/>
           <a:p>
             <a:r>
-              <a:t>Walk the tabs left to right as the project timeline:</a:t>
-            </a:r>
-          </a:p>
-          <a:p>
-            <a:r>
-              <a:t>write spec → send matrix → receive filled matrix + TDR → compare suppliers → track versions.</a:t>
+              <a:t>If someone asks “is it AI?”, answer: it is a reading assistant. Some checks are simple rules (count the sections, compare two numbers). A person always remains responsible.</a:t>
             </a:r>
           </a:p>
         </p:txBody>
@@ -874,7 +1154,12 @@
           <a:lstStyle/>
           <a:p>
             <a:r>
-              <a:t>Demo path: drop a matrix, show the pie, then open one red “point of attention”.</a:t>
+              <a:t>Walk the tabs left to right as the project timeline:</a:t>
+            </a:r>
+          </a:p>
+          <a:p>
+            <a:r>
+              <a:t>write spec → send matrix → receive filled matrix + TDR → compare suppliers → track versions.</a:t>
             </a:r>
           </a:p>
         </p:txBody>
@@ -944,12 +1229,7 @@
           <a:lstStyle/>
           <a:p>
             <a:r>
-              <a:t>Stress the example. Non-specialists remember one number (400 vs 380) better than a process.</a:t>
-            </a:r>
-          </a:p>
-          <a:p>
-            <a:r>
-              <a:t>Mention Version Delta only if asked: it shows NOK→OK between two Excel versions.</a:t>
+              <a:t>Demo path: drop a matrix, show the pie, then open one red “point of attention”.</a:t>
             </a:r>
           </a:p>
         </p:txBody>
@@ -1019,12 +1299,82 @@
           <a:lstStyle/>
           <a:p>
             <a:r>
-              <a:t>Close: happy to open the live page and drop a sample matrix if there are 5 minutes left.</a:t>
-            </a:r>
-          </a:p>
-          <a:p>
-            <a:r>
-              <a:t>Do not oversell accuracy. The product is a first reading plus a human decision.</a:t>
+              <a:t>Stress the example. Non-specialists remember one number (400 vs 380) better than a process.</a:t>
+            </a:r>
+          </a:p>
+          <a:p>
+            <a:r>
+              <a:t>Mention Version Delta only if asked: it shows NOK→OK between two Excel versions.</a:t>
+            </a:r>
+          </a:p>
+        </p:txBody>
+      </p:sp>
+      <p:sp>
+        <p:nvSpPr>
+          <p:cNvPr id="4" name="Slide Number Placeholder 3"/>
+          <p:cNvSpPr>
+            <a:spLocks noGrp="1"/>
+          </p:cNvSpPr>
+          <p:nvPr>
+            <p:ph type="sldNum" idx="5" sz="quarter"/>
+          </p:nvPr>
+        </p:nvSpPr>
+        <p:spPr/>
+      </p:sp>
+    </p:spTree>
+  </p:cSld>
+  <p:clrMapOvr>
+    <a:masterClrMapping/>
+  </p:clrMapOvr>
+</p:notes>
+</file>
+
+<file path=ppt/notesSlides/notesSlide9.xml><?xml version="1.0" encoding="utf-8"?>
+<p:notes xmlns:a="http://schemas.openxmlformats.org/drawingml/2006/main" xmlns:p="http://schemas.openxmlformats.org/presentationml/2006/main" xmlns:r="http://schemas.openxmlformats.org/officeDocument/2006/relationships">
+  <p:cSld>
+    <p:spTree>
+      <p:nvGrpSpPr>
+        <p:cNvPr id="1" name=""/>
+        <p:cNvGrpSpPr/>
+        <p:nvPr/>
+      </p:nvGrpSpPr>
+      <p:grpSpPr>
+        <a:xfrm>
+          <a:off x="0" y="0"/>
+          <a:ext cx="0" cy="0"/>
+          <a:chOff x="0" y="0"/>
+          <a:chExt cx="0" cy="0"/>
+        </a:xfrm>
+      </p:grpSpPr>
+      <p:sp>
+        <p:nvSpPr>
+          <p:cNvPr id="2" name="Slide Image Placeholder 1"/>
+          <p:cNvSpPr>
+            <a:spLocks noGrp="1"/>
+          </p:cNvSpPr>
+          <p:nvPr>
+            <p:ph type="sldImg" idx="2"/>
+          </p:nvPr>
+        </p:nvSpPr>
+        <p:spPr/>
+      </p:sp>
+      <p:sp>
+        <p:nvSpPr>
+          <p:cNvPr id="3" name="Notes Placeholder 2"/>
+          <p:cNvSpPr>
+            <a:spLocks noGrp="1"/>
+          </p:cNvSpPr>
+          <p:nvPr>
+            <p:ph type="body" idx="3" sz="quarter"/>
+          </p:nvPr>
+        </p:nvSpPr>
+        <p:spPr/>
+        <p:txBody>
+          <a:bodyPr/>
+          <a:lstStyle/>
+          <a:p>
+            <a:r>
+              <a:t>This is the close of the product part. Next slides: people, status, training, availability.</a:t>
             </a:r>
           </a:p>
         </p:txBody>
@@ -4167,8 +4517,8 @@
         </p:nvSpPr>
         <p:spPr>
           <a:xfrm>
-            <a:off x="640080" y="1417320"/>
-            <a:ext cx="10515600" cy="320040"/>
+            <a:off x="640080" y="777240"/>
+            <a:ext cx="10515600" cy="292608"/>
           </a:xfrm>
           <a:prstGeom prst="rect">
             <a:avLst/>
@@ -4200,8 +4550,8 @@
         </p:nvSpPr>
         <p:spPr>
           <a:xfrm>
-            <a:off x="640080" y="1828800"/>
-            <a:ext cx="10972800" cy="914400"/>
+            <a:off x="640080" y="1188720"/>
+            <a:ext cx="10515600" cy="292608"/>
           </a:xfrm>
           <a:prstGeom prst="rect">
             <a:avLst/>
@@ -4214,13 +4564,13 @@
           <a:p>
             <a:pPr algn="l"/>
             <a:r>
-              <a:rPr sz="6000" b="1">
-                <a:solidFill>
-                  <a:srgbClr val="FFFFFF"/>
+              <a:rPr sz="1300" b="1">
+                <a:solidFill>
+                  <a:srgbClr val="1D4ED8"/>
                 </a:solidFill>
                 <a:latin typeface="Calibri"/>
               </a:rPr>
-              <a:t>LEON</a:t>
+              <a:t>FIRST MEETING</a:t>
             </a:r>
           </a:p>
         </p:txBody>
@@ -4233,8 +4583,8 @@
         </p:nvSpPr>
         <p:spPr>
           <a:xfrm>
-            <a:off x="640080" y="2788920"/>
-            <a:ext cx="10515600" cy="822960"/>
+            <a:off x="640080" y="1481328"/>
+            <a:ext cx="10972800" cy="640080"/>
           </a:xfrm>
           <a:prstGeom prst="rect">
             <a:avLst/>
@@ -4247,13 +4597,13 @@
           <a:p>
             <a:pPr algn="l"/>
             <a:r>
-              <a:rPr sz="2600" b="0">
-                <a:solidFill>
-                  <a:srgbClr val="E8EEFB"/>
+              <a:rPr sz="4000" b="1">
+                <a:solidFill>
+                  <a:srgbClr val="FFFFFF"/>
                 </a:solidFill>
                 <a:latin typeface="Calibri"/>
               </a:rPr>
-              <a:t>A short briefing: how we review supplier documents</a:t>
+              <a:t>Khadija Benhamida</a:t>
             </a:r>
           </a:p>
         </p:txBody>
@@ -4266,8 +4616,8 @@
         </p:nvSpPr>
         <p:spPr>
           <a:xfrm>
-            <a:off x="640080" y="3703320"/>
-            <a:ext cx="10515600" cy="822960"/>
+            <a:off x="640080" y="2194560"/>
+            <a:ext cx="10972800" cy="640080"/>
           </a:xfrm>
           <a:prstGeom prst="rect">
             <a:avLst/>
@@ -4280,28 +4630,61 @@
           <a:p>
             <a:pPr algn="l"/>
             <a:r>
-              <a:rPr sz="1600" b="0">
-                <a:solidFill>
-                  <a:srgbClr val="C5D4E8"/>
+              <a:rPr sz="2800" b="1">
+                <a:solidFill>
+                  <a:srgbClr val="E8EEFB"/>
                 </a:solidFill>
                 <a:latin typeface="Calibri"/>
               </a:rPr>
-              <a:t>No AI background needed. This is about three papers that must tell the same story:
-what we ask, what the supplier claims, and what their technical file actually shows.</a:t>
-            </a:r>
-          </a:p>
-        </p:txBody>
-      </p:sp>
-      <p:sp>
-        <p:nvSpPr>
-          <p:cNvPr id="9" name="Rectangle 8"/>
+              <a:t>LEON — Quality Analysis</a:t>
+            </a:r>
+          </a:p>
+        </p:txBody>
+      </p:sp>
+      <p:sp>
+        <p:nvSpPr>
+          <p:cNvPr id="9" name="TextBox 8"/>
+          <p:cNvSpPr txBox="1"/>
+          <p:nvPr/>
+        </p:nvSpPr>
+        <p:spPr>
+          <a:xfrm>
+            <a:off x="640080" y="2880360"/>
+            <a:ext cx="10789920" cy="640080"/>
+          </a:xfrm>
+          <a:prstGeom prst="rect">
+            <a:avLst/>
+          </a:prstGeom>
+          <a:noFill/>
+        </p:spPr>
+        <p:txBody>
+          <a:bodyPr wrap="square" anchor="t"/>
+          <a:lstStyle/>
+          <a:p>
+            <a:pPr algn="l"/>
+            <a:r>
+              <a:rPr sz="1600" b="0">
+                <a:solidFill>
+                  <a:srgbClr val="C5D4E8"/>
+                </a:solidFill>
+                <a:latin typeface="Calibri"/>
+              </a:rPr>
+              <a:t>Review of specifications, conformity matrices and technical dossiers (TDR)
+for the Mechatronics team.</a:t>
+            </a:r>
+          </a:p>
+        </p:txBody>
+      </p:sp>
+      <p:sp>
+        <p:nvSpPr>
+          <p:cNvPr id="10" name="Rectangle 9"/>
           <p:cNvSpPr/>
           <p:nvPr/>
         </p:nvSpPr>
         <p:spPr>
           <a:xfrm>
-            <a:off x="640080" y="4892040"/>
-            <a:ext cx="3108960" cy="73152"/>
+            <a:off x="640080" y="3703320"/>
+            <a:ext cx="3108960" cy="64008"/>
           </a:xfrm>
           <a:prstGeom prst="rect">
             <a:avLst/>
@@ -4337,14 +4720,14 @@
       </p:sp>
       <p:sp>
         <p:nvSpPr>
-          <p:cNvPr id="10" name="TextBox 9"/>
+          <p:cNvPr id="11" name="TextBox 10"/>
           <p:cNvSpPr txBox="1"/>
           <p:nvPr/>
         </p:nvSpPr>
         <p:spPr>
           <a:xfrm>
-            <a:off x="640080" y="5074920"/>
-            <a:ext cx="10515600" cy="320040"/>
+            <a:off x="640080" y="3913632"/>
+            <a:ext cx="10789920" cy="640080"/>
           </a:xfrm>
           <a:prstGeom prst="rect">
             <a:avLst/>
@@ -4357,27 +4740,28 @@
           <a:p>
             <a:pPr algn="l"/>
             <a:r>
-              <a:rPr sz="1400" b="0">
+              <a:rPr sz="1500" b="0">
                 <a:solidFill>
                   <a:srgbClr val="A9BCD4"/>
                 </a:solidFill>
                 <a:latin typeface="Calibri"/>
               </a:rPr>
-              <a:t>Internal  ·  8 slides  ·  For managers, quality, purchasing and engineering partners</a:t>
-            </a:r>
-          </a:p>
-        </p:txBody>
-      </p:sp>
-      <p:sp>
-        <p:nvSpPr>
-          <p:cNvPr id="11" name="Rounded Rectangle 10"/>
+              <a:t>In collaboration with Imane El Brouji and Patrick Garcia
+October 2026</a:t>
+            </a:r>
+          </a:p>
+        </p:txBody>
+      </p:sp>
+      <p:sp>
+        <p:nvSpPr>
+          <p:cNvPr id="12" name="Rounded Rectangle 11"/>
           <p:cNvSpPr/>
           <p:nvPr/>
         </p:nvSpPr>
         <p:spPr>
           <a:xfrm>
-            <a:off x="640080" y="5577840"/>
-            <a:ext cx="3108960" cy="777240"/>
+            <a:off x="640080" y="4892040"/>
+            <a:ext cx="3108960" cy="1051560"/>
           </a:xfrm>
           <a:prstGeom prst="roundRect">
             <a:avLst>
@@ -4415,14 +4799,14 @@
       </p:sp>
       <p:sp>
         <p:nvSpPr>
-          <p:cNvPr id="12" name="Rectangle 11"/>
+          <p:cNvPr id="13" name="Rectangle 12"/>
           <p:cNvSpPr/>
           <p:nvPr/>
         </p:nvSpPr>
         <p:spPr>
           <a:xfrm>
-            <a:off x="640080" y="5577840"/>
-            <a:ext cx="91440" cy="777240"/>
+            <a:off x="640080" y="4892040"/>
+            <a:ext cx="91440" cy="1051560"/>
           </a:xfrm>
           <a:prstGeom prst="rect">
             <a:avLst/>
@@ -4458,14 +4842,14 @@
       </p:sp>
       <p:sp>
         <p:nvSpPr>
-          <p:cNvPr id="13" name="TextBox 12"/>
+          <p:cNvPr id="14" name="TextBox 13"/>
           <p:cNvSpPr txBox="1"/>
           <p:nvPr/>
         </p:nvSpPr>
         <p:spPr>
           <a:xfrm>
-            <a:off x="896112" y="5632704"/>
-            <a:ext cx="2743200" cy="347472"/>
+            <a:off x="896112" y="5010912"/>
+            <a:ext cx="2743200" cy="384048"/>
           </a:xfrm>
           <a:prstGeom prst="rect">
             <a:avLst/>
@@ -4478,7 +4862,7 @@
           <a:p>
             <a:pPr algn="l"/>
             <a:r>
-              <a:rPr sz="1600" b="1">
+              <a:rPr sz="1800" b="1">
                 <a:solidFill>
                   <a:srgbClr val="FFFFFF"/>
                 </a:solidFill>
@@ -4491,14 +4875,14 @@
       </p:sp>
       <p:sp>
         <p:nvSpPr>
-          <p:cNvPr id="14" name="TextBox 13"/>
+          <p:cNvPr id="15" name="TextBox 14"/>
           <p:cNvSpPr txBox="1"/>
           <p:nvPr/>
         </p:nvSpPr>
         <p:spPr>
           <a:xfrm>
-            <a:off x="896112" y="5943600"/>
-            <a:ext cx="2743200" cy="320040"/>
+            <a:off x="896112" y="5413248"/>
+            <a:ext cx="2743200" cy="365760"/>
           </a:xfrm>
           <a:prstGeom prst="rect">
             <a:avLst/>
@@ -4511,7 +4895,7 @@
           <a:p>
             <a:pPr algn="l"/>
             <a:r>
-              <a:rPr sz="1300" b="0">
+              <a:rPr sz="1400" b="0">
                 <a:solidFill>
                   <a:srgbClr val="A9BCD4"/>
                 </a:solidFill>
@@ -4524,14 +4908,14 @@
       </p:sp>
       <p:sp>
         <p:nvSpPr>
-          <p:cNvPr id="15" name="Rounded Rectangle 14"/>
+          <p:cNvPr id="16" name="Rounded Rectangle 15"/>
           <p:cNvSpPr/>
           <p:nvPr/>
         </p:nvSpPr>
         <p:spPr>
           <a:xfrm>
-            <a:off x="3977640" y="5577840"/>
-            <a:ext cx="3108960" cy="777240"/>
+            <a:off x="3977640" y="4892040"/>
+            <a:ext cx="3108960" cy="1051560"/>
           </a:xfrm>
           <a:prstGeom prst="roundRect">
             <a:avLst>
@@ -4569,14 +4953,14 @@
       </p:sp>
       <p:sp>
         <p:nvSpPr>
-          <p:cNvPr id="16" name="Rectangle 15"/>
+          <p:cNvPr id="17" name="Rectangle 16"/>
           <p:cNvSpPr/>
           <p:nvPr/>
         </p:nvSpPr>
         <p:spPr>
           <a:xfrm>
-            <a:off x="3977640" y="5577840"/>
-            <a:ext cx="91440" cy="777240"/>
+            <a:off x="3977640" y="4892040"/>
+            <a:ext cx="91440" cy="1051560"/>
           </a:xfrm>
           <a:prstGeom prst="rect">
             <a:avLst/>
@@ -4612,14 +4996,14 @@
       </p:sp>
       <p:sp>
         <p:nvSpPr>
-          <p:cNvPr id="17" name="TextBox 16"/>
+          <p:cNvPr id="18" name="TextBox 17"/>
           <p:cNvSpPr txBox="1"/>
           <p:nvPr/>
         </p:nvSpPr>
         <p:spPr>
           <a:xfrm>
-            <a:off x="4233672" y="5632704"/>
-            <a:ext cx="2743200" cy="347472"/>
+            <a:off x="4233672" y="5010912"/>
+            <a:ext cx="2743200" cy="384048"/>
           </a:xfrm>
           <a:prstGeom prst="rect">
             <a:avLst/>
@@ -4632,7 +5016,7 @@
           <a:p>
             <a:pPr algn="l"/>
             <a:r>
-              <a:rPr sz="1600" b="1">
+              <a:rPr sz="1800" b="1">
                 <a:solidFill>
                   <a:srgbClr val="FFFFFF"/>
                 </a:solidFill>
@@ -4645,14 +5029,14 @@
       </p:sp>
       <p:sp>
         <p:nvSpPr>
-          <p:cNvPr id="18" name="TextBox 17"/>
+          <p:cNvPr id="19" name="TextBox 18"/>
           <p:cNvSpPr txBox="1"/>
           <p:nvPr/>
         </p:nvSpPr>
         <p:spPr>
           <a:xfrm>
-            <a:off x="4233672" y="5943600"/>
-            <a:ext cx="2743200" cy="320040"/>
+            <a:off x="4233672" y="5413248"/>
+            <a:ext cx="2743200" cy="365760"/>
           </a:xfrm>
           <a:prstGeom prst="rect">
             <a:avLst/>
@@ -4665,7 +5049,7 @@
           <a:p>
             <a:pPr algn="l"/>
             <a:r>
-              <a:rPr sz="1300" b="0">
+              <a:rPr sz="1400" b="0">
                 <a:solidFill>
                   <a:srgbClr val="A9BCD4"/>
                 </a:solidFill>
@@ -4678,14 +5062,14 @@
       </p:sp>
       <p:sp>
         <p:nvSpPr>
-          <p:cNvPr id="19" name="Rounded Rectangle 18"/>
+          <p:cNvPr id="20" name="Rounded Rectangle 19"/>
           <p:cNvSpPr/>
           <p:nvPr/>
         </p:nvSpPr>
         <p:spPr>
           <a:xfrm>
-            <a:off x="7315200" y="5577840"/>
-            <a:ext cx="3108960" cy="777240"/>
+            <a:off x="7315200" y="4892040"/>
+            <a:ext cx="3108960" cy="1051560"/>
           </a:xfrm>
           <a:prstGeom prst="roundRect">
             <a:avLst>
@@ -4723,14 +5107,14 @@
       </p:sp>
       <p:sp>
         <p:nvSpPr>
-          <p:cNvPr id="20" name="Rectangle 19"/>
+          <p:cNvPr id="21" name="Rectangle 20"/>
           <p:cNvSpPr/>
           <p:nvPr/>
         </p:nvSpPr>
         <p:spPr>
           <a:xfrm>
-            <a:off x="7315200" y="5577840"/>
-            <a:ext cx="91440" cy="777240"/>
+            <a:off x="7315200" y="4892040"/>
+            <a:ext cx="91440" cy="1051560"/>
           </a:xfrm>
           <a:prstGeom prst="rect">
             <a:avLst/>
@@ -4766,14 +5150,14 @@
       </p:sp>
       <p:sp>
         <p:nvSpPr>
-          <p:cNvPr id="21" name="TextBox 20"/>
+          <p:cNvPr id="22" name="TextBox 21"/>
           <p:cNvSpPr txBox="1"/>
           <p:nvPr/>
         </p:nvSpPr>
         <p:spPr>
           <a:xfrm>
-            <a:off x="7571232" y="5632704"/>
-            <a:ext cx="2743200" cy="347472"/>
+            <a:off x="7571232" y="5010912"/>
+            <a:ext cx="2743200" cy="384048"/>
           </a:xfrm>
           <a:prstGeom prst="rect">
             <a:avLst/>
@@ -4786,7 +5170,7 @@
           <a:p>
             <a:pPr algn="l"/>
             <a:r>
-              <a:rPr sz="1600" b="1">
+              <a:rPr sz="1800" b="1">
                 <a:solidFill>
                   <a:srgbClr val="FFFFFF"/>
                 </a:solidFill>
@@ -4799,14 +5183,14 @@
       </p:sp>
       <p:sp>
         <p:nvSpPr>
-          <p:cNvPr id="22" name="TextBox 21"/>
+          <p:cNvPr id="23" name="TextBox 22"/>
           <p:cNvSpPr txBox="1"/>
           <p:nvPr/>
         </p:nvSpPr>
         <p:spPr>
           <a:xfrm>
-            <a:off x="7571232" y="5943600"/>
-            <a:ext cx="2743200" cy="320040"/>
+            <a:off x="7571232" y="5413248"/>
+            <a:ext cx="2743200" cy="365760"/>
           </a:xfrm>
           <a:prstGeom prst="rect">
             <a:avLst/>
@@ -4819,13 +5203,3396 @@
           <a:p>
             <a:pPr algn="l"/>
             <a:r>
-              <a:rPr sz="1300" b="0">
+              <a:rPr sz="1400" b="0">
                 <a:solidFill>
                   <a:srgbClr val="A9BCD4"/>
                 </a:solidFill>
                 <a:latin typeface="Calibri"/>
               </a:rPr>
               <a:t>What they prove</a:t>
+            </a:r>
+          </a:p>
+        </p:txBody>
+      </p:sp>
+      <p:sp>
+        <p:nvSpPr>
+          <p:cNvPr id="24" name="TextBox 23"/>
+          <p:cNvSpPr txBox="1"/>
+          <p:nvPr/>
+        </p:nvSpPr>
+        <p:spPr>
+          <a:xfrm>
+            <a:off x="640080" y="6126480"/>
+            <a:ext cx="10789920" cy="320040"/>
+          </a:xfrm>
+          <a:prstGeom prst="rect">
+            <a:avLst/>
+          </a:prstGeom>
+          <a:noFill/>
+        </p:spPr>
+        <p:txBody>
+          <a:bodyPr wrap="square" anchor="t"/>
+          <a:lstStyle/>
+          <a:p>
+            <a:pPr algn="l"/>
+            <a:r>
+              <a:rPr sz="1300" b="0">
+                <a:solidFill>
+                  <a:srgbClr val="A9BCD4"/>
+                </a:solidFill>
+                <a:latin typeface="Calibri"/>
+              </a:rPr>
+              <a:t>Project in progress  ·  Deployment for the whole team once this step is finished</a:t>
+            </a:r>
+          </a:p>
+        </p:txBody>
+      </p:sp>
+    </p:spTree>
+  </p:cSld>
+  <p:clrMapOvr>
+    <a:masterClrMapping/>
+  </p:clrMapOvr>
+</p:sld>
+</file>
+
+<file path=ppt/slides/slide10.xml><?xml version="1.0" encoding="utf-8"?>
+<p:sld xmlns:a="http://schemas.openxmlformats.org/drawingml/2006/main" xmlns:p="http://schemas.openxmlformats.org/presentationml/2006/main" xmlns:r="http://schemas.openxmlformats.org/officeDocument/2006/relationships">
+  <p:cSld>
+    <p:spTree>
+      <p:nvGrpSpPr>
+        <p:cNvPr id="1" name=""/>
+        <p:cNvGrpSpPr/>
+        <p:nvPr/>
+      </p:nvGrpSpPr>
+      <p:grpSpPr/>
+      <p:sp>
+        <p:nvSpPr>
+          <p:cNvPr id="2" name="Rectangle 1"/>
+          <p:cNvSpPr/>
+          <p:nvPr/>
+        </p:nvSpPr>
+        <p:spPr>
+          <a:xfrm>
+            <a:off x="0" y="0"/>
+            <a:ext cx="12191695" cy="6858000"/>
+          </a:xfrm>
+          <a:prstGeom prst="rect">
+            <a:avLst/>
+          </a:prstGeom>
+          <a:solidFill>
+            <a:srgbClr val="F4F7FB"/>
+          </a:solidFill>
+          <a:ln>
+            <a:noFill/>
+          </a:ln>
+        </p:spPr>
+        <p:style>
+          <a:lnRef idx="1">
+            <a:schemeClr val="accent1"/>
+          </a:lnRef>
+          <a:fillRef idx="3">
+            <a:schemeClr val="accent1"/>
+          </a:fillRef>
+          <a:effectRef idx="2">
+            <a:schemeClr val="accent1"/>
+          </a:effectRef>
+          <a:fontRef idx="minor">
+            <a:schemeClr val="lt1"/>
+          </a:fontRef>
+        </p:style>
+        <p:txBody>
+          <a:bodyPr rtlCol="0" anchor="ctr"/>
+          <a:lstStyle/>
+          <a:p>
+            <a:pPr algn="ctr"/>
+          </a:p>
+        </p:txBody>
+      </p:sp>
+      <p:sp>
+        <p:nvSpPr>
+          <p:cNvPr id="3" name="Rectangle 2"/>
+          <p:cNvSpPr/>
+          <p:nvPr/>
+        </p:nvSpPr>
+        <p:spPr>
+          <a:xfrm>
+            <a:off x="0" y="0"/>
+            <a:ext cx="12191695" cy="1078992"/>
+          </a:xfrm>
+          <a:prstGeom prst="rect">
+            <a:avLst/>
+          </a:prstGeom>
+          <a:solidFill>
+            <a:srgbClr val="0B2545"/>
+          </a:solidFill>
+          <a:ln>
+            <a:noFill/>
+          </a:ln>
+        </p:spPr>
+        <p:style>
+          <a:lnRef idx="1">
+            <a:schemeClr val="accent1"/>
+          </a:lnRef>
+          <a:fillRef idx="3">
+            <a:schemeClr val="accent1"/>
+          </a:fillRef>
+          <a:effectRef idx="2">
+            <a:schemeClr val="accent1"/>
+          </a:effectRef>
+          <a:fontRef idx="minor">
+            <a:schemeClr val="lt1"/>
+          </a:fontRef>
+        </p:style>
+        <p:txBody>
+          <a:bodyPr rtlCol="0" anchor="ctr"/>
+          <a:lstStyle/>
+          <a:p>
+            <a:pPr algn="ctr"/>
+          </a:p>
+        </p:txBody>
+      </p:sp>
+      <p:sp>
+        <p:nvSpPr>
+          <p:cNvPr id="4" name="Rectangle 3"/>
+          <p:cNvSpPr/>
+          <p:nvPr/>
+        </p:nvSpPr>
+        <p:spPr>
+          <a:xfrm>
+            <a:off x="0" y="1078992"/>
+            <a:ext cx="12191695" cy="54864"/>
+          </a:xfrm>
+          <a:prstGeom prst="rect">
+            <a:avLst/>
+          </a:prstGeom>
+          <a:solidFill>
+            <a:srgbClr val="1D4ED8"/>
+          </a:solidFill>
+          <a:ln>
+            <a:noFill/>
+          </a:ln>
+        </p:spPr>
+        <p:style>
+          <a:lnRef idx="1">
+            <a:schemeClr val="accent1"/>
+          </a:lnRef>
+          <a:fillRef idx="3">
+            <a:schemeClr val="accent1"/>
+          </a:fillRef>
+          <a:effectRef idx="2">
+            <a:schemeClr val="accent1"/>
+          </a:effectRef>
+          <a:fontRef idx="minor">
+            <a:schemeClr val="lt1"/>
+          </a:fontRef>
+        </p:style>
+        <p:txBody>
+          <a:bodyPr rtlCol="0" anchor="ctr"/>
+          <a:lstStyle/>
+          <a:p>
+            <a:pPr algn="ctr"/>
+          </a:p>
+        </p:txBody>
+      </p:sp>
+      <p:sp>
+        <p:nvSpPr>
+          <p:cNvPr id="5" name="TextBox 4"/>
+          <p:cNvSpPr txBox="1"/>
+          <p:nvPr/>
+        </p:nvSpPr>
+        <p:spPr>
+          <a:xfrm>
+            <a:off x="457200" y="91440"/>
+            <a:ext cx="11247120" cy="256032"/>
+          </a:xfrm>
+          <a:prstGeom prst="rect">
+            <a:avLst/>
+          </a:prstGeom>
+          <a:noFill/>
+        </p:spPr>
+        <p:txBody>
+          <a:bodyPr wrap="square" anchor="t"/>
+          <a:lstStyle/>
+          <a:p>
+            <a:pPr algn="l"/>
+            <a:r>
+              <a:rPr sz="1100" b="1">
+                <a:solidFill>
+                  <a:srgbClr val="A9BCD4"/>
+                </a:solidFill>
+                <a:latin typeface="Calibri"/>
+              </a:rPr>
+              <a:t>COLLABORATION</a:t>
+            </a:r>
+          </a:p>
+        </p:txBody>
+      </p:sp>
+      <p:sp>
+        <p:nvSpPr>
+          <p:cNvPr id="6" name="TextBox 5"/>
+          <p:cNvSpPr txBox="1"/>
+          <p:nvPr/>
+        </p:nvSpPr>
+        <p:spPr>
+          <a:xfrm>
+            <a:off x="457200" y="310896"/>
+            <a:ext cx="11247120" cy="384048"/>
+          </a:xfrm>
+          <a:prstGeom prst="rect">
+            <a:avLst/>
+          </a:prstGeom>
+          <a:noFill/>
+        </p:spPr>
+        <p:txBody>
+          <a:bodyPr wrap="square" anchor="t"/>
+          <a:lstStyle/>
+          <a:p>
+            <a:pPr algn="l"/>
+            <a:r>
+              <a:rPr sz="2600" b="1">
+                <a:solidFill>
+                  <a:srgbClr val="FFFFFF"/>
+                </a:solidFill>
+                <a:latin typeface="Calibri"/>
+              </a:rPr>
+              <a:t>I do not work on this alone.</a:t>
+            </a:r>
+          </a:p>
+        </p:txBody>
+      </p:sp>
+      <p:sp>
+        <p:nvSpPr>
+          <p:cNvPr id="7" name="TextBox 6"/>
+          <p:cNvSpPr txBox="1"/>
+          <p:nvPr/>
+        </p:nvSpPr>
+        <p:spPr>
+          <a:xfrm>
+            <a:off x="457200" y="713232"/>
+            <a:ext cx="11247120" cy="292608"/>
+          </a:xfrm>
+          <a:prstGeom prst="rect">
+            <a:avLst/>
+          </a:prstGeom>
+          <a:noFill/>
+        </p:spPr>
+        <p:txBody>
+          <a:bodyPr wrap="square" anchor="t"/>
+          <a:lstStyle/>
+          <a:p>
+            <a:pPr algn="l"/>
+            <a:r>
+              <a:rPr sz="1300" b="0">
+                <a:solidFill>
+                  <a:srgbClr val="C5D4E8"/>
+                </a:solidFill>
+                <a:latin typeface="Calibri"/>
+              </a:rPr>
+              <a:t>Imane El Brouji and Patrick Garcia bring the mechatronics side. I turn it into LEON.</a:t>
+            </a:r>
+          </a:p>
+        </p:txBody>
+      </p:sp>
+      <p:sp>
+        <p:nvSpPr>
+          <p:cNvPr id="8" name="Rounded Rectangle 7"/>
+          <p:cNvSpPr/>
+          <p:nvPr/>
+        </p:nvSpPr>
+        <p:spPr>
+          <a:xfrm>
+            <a:off x="411480" y="1389888"/>
+            <a:ext cx="5532120" cy="3246120"/>
+          </a:xfrm>
+          <a:prstGeom prst="roundRect">
+            <a:avLst>
+              <a:gd name="adj" fmla="val 8000"/>
+            </a:avLst>
+          </a:prstGeom>
+          <a:solidFill>
+            <a:srgbClr val="FFFFFF"/>
+          </a:solidFill>
+          <a:ln w="12700">
+            <a:solidFill>
+              <a:srgbClr val="DDE3EC"/>
+            </a:solidFill>
+          </a:ln>
+        </p:spPr>
+        <p:style>
+          <a:lnRef idx="1">
+            <a:schemeClr val="accent1"/>
+          </a:lnRef>
+          <a:fillRef idx="3">
+            <a:schemeClr val="accent1"/>
+          </a:fillRef>
+          <a:effectRef idx="2">
+            <a:schemeClr val="accent1"/>
+          </a:effectRef>
+          <a:fontRef idx="minor">
+            <a:schemeClr val="lt1"/>
+          </a:fontRef>
+        </p:style>
+        <p:txBody>
+          <a:bodyPr rtlCol="0" anchor="ctr"/>
+          <a:lstStyle/>
+          <a:p>
+            <a:pPr algn="ctr"/>
+          </a:p>
+        </p:txBody>
+      </p:sp>
+      <p:sp>
+        <p:nvSpPr>
+          <p:cNvPr id="9" name="Rectangle 8"/>
+          <p:cNvSpPr/>
+          <p:nvPr/>
+        </p:nvSpPr>
+        <p:spPr>
+          <a:xfrm>
+            <a:off x="411480" y="1389888"/>
+            <a:ext cx="5532120" cy="109728"/>
+          </a:xfrm>
+          <a:prstGeom prst="rect">
+            <a:avLst/>
+          </a:prstGeom>
+          <a:solidFill>
+            <a:srgbClr val="1D4ED8"/>
+          </a:solidFill>
+          <a:ln>
+            <a:noFill/>
+          </a:ln>
+        </p:spPr>
+        <p:style>
+          <a:lnRef idx="1">
+            <a:schemeClr val="accent1"/>
+          </a:lnRef>
+          <a:fillRef idx="3">
+            <a:schemeClr val="accent1"/>
+          </a:fillRef>
+          <a:effectRef idx="2">
+            <a:schemeClr val="accent1"/>
+          </a:effectRef>
+          <a:fontRef idx="minor">
+            <a:schemeClr val="lt1"/>
+          </a:fontRef>
+        </p:style>
+        <p:txBody>
+          <a:bodyPr rtlCol="0" anchor="ctr"/>
+          <a:lstStyle/>
+          <a:p>
+            <a:pPr algn="ctr"/>
+          </a:p>
+        </p:txBody>
+      </p:sp>
+      <p:sp>
+        <p:nvSpPr>
+          <p:cNvPr id="10" name="TextBox 9"/>
+          <p:cNvSpPr txBox="1"/>
+          <p:nvPr/>
+        </p:nvSpPr>
+        <p:spPr>
+          <a:xfrm>
+            <a:off x="640080" y="1645920"/>
+            <a:ext cx="5074920" cy="365760"/>
+          </a:xfrm>
+          <a:prstGeom prst="rect">
+            <a:avLst/>
+          </a:prstGeom>
+          <a:noFill/>
+        </p:spPr>
+        <p:txBody>
+          <a:bodyPr wrap="square" anchor="t"/>
+          <a:lstStyle/>
+          <a:p>
+            <a:pPr algn="l"/>
+            <a:r>
+              <a:rPr sz="2200" b="1">
+                <a:solidFill>
+                  <a:srgbClr val="0B2545"/>
+                </a:solidFill>
+                <a:latin typeface="Calibri"/>
+              </a:rPr>
+              <a:t>Imane El Brouji</a:t>
+            </a:r>
+          </a:p>
+        </p:txBody>
+      </p:sp>
+      <p:sp>
+        <p:nvSpPr>
+          <p:cNvPr id="11" name="TextBox 10"/>
+          <p:cNvSpPr txBox="1"/>
+          <p:nvPr/>
+        </p:nvSpPr>
+        <p:spPr>
+          <a:xfrm>
+            <a:off x="640080" y="2084831"/>
+            <a:ext cx="5074920" cy="292608"/>
+          </a:xfrm>
+          <a:prstGeom prst="rect">
+            <a:avLst/>
+          </a:prstGeom>
+          <a:noFill/>
+        </p:spPr>
+        <p:txBody>
+          <a:bodyPr wrap="square" anchor="t"/>
+          <a:lstStyle/>
+          <a:p>
+            <a:pPr algn="l"/>
+            <a:r>
+              <a:rPr sz="1400" b="1">
+                <a:solidFill>
+                  <a:srgbClr val="1D4ED8"/>
+                </a:solidFill>
+                <a:latin typeface="Calibri"/>
+              </a:rPr>
+              <a:t>Mechatronics Engineering</a:t>
+            </a:r>
+          </a:p>
+        </p:txBody>
+      </p:sp>
+      <p:sp>
+        <p:nvSpPr>
+          <p:cNvPr id="12" name="TextBox 11"/>
+          <p:cNvSpPr txBox="1"/>
+          <p:nvPr/>
+        </p:nvSpPr>
+        <p:spPr>
+          <a:xfrm>
+            <a:off x="640080" y="2514600"/>
+            <a:ext cx="5074920" cy="1828800"/>
+          </a:xfrm>
+          <a:prstGeom prst="rect">
+            <a:avLst/>
+          </a:prstGeom>
+          <a:noFill/>
+        </p:spPr>
+        <p:txBody>
+          <a:bodyPr wrap="square" anchor="t"/>
+          <a:lstStyle/>
+          <a:p>
+            <a:pPr algn="l"/>
+            <a:r>
+              <a:rPr sz="1500" b="0">
+                <a:solidFill>
+                  <a:srgbClr val="1C2B3A"/>
+                </a:solidFill>
+                <a:latin typeface="Calibri"/>
+              </a:rPr>
+              <a:t>Shares the needs of the team, the real documents we receive, and the ideas of what would actually help an engineer in a review.</a:t>
+            </a:r>
+          </a:p>
+        </p:txBody>
+      </p:sp>
+      <p:sp>
+        <p:nvSpPr>
+          <p:cNvPr id="13" name="Rounded Rectangle 12"/>
+          <p:cNvSpPr/>
+          <p:nvPr/>
+        </p:nvSpPr>
+        <p:spPr>
+          <a:xfrm>
+            <a:off x="6172200" y="1389888"/>
+            <a:ext cx="5532120" cy="3246120"/>
+          </a:xfrm>
+          <a:prstGeom prst="roundRect">
+            <a:avLst>
+              <a:gd name="adj" fmla="val 8000"/>
+            </a:avLst>
+          </a:prstGeom>
+          <a:solidFill>
+            <a:srgbClr val="FFFFFF"/>
+          </a:solidFill>
+          <a:ln w="12700">
+            <a:solidFill>
+              <a:srgbClr val="DDE3EC"/>
+            </a:solidFill>
+          </a:ln>
+        </p:spPr>
+        <p:style>
+          <a:lnRef idx="1">
+            <a:schemeClr val="accent1"/>
+          </a:lnRef>
+          <a:fillRef idx="3">
+            <a:schemeClr val="accent1"/>
+          </a:fillRef>
+          <a:effectRef idx="2">
+            <a:schemeClr val="accent1"/>
+          </a:effectRef>
+          <a:fontRef idx="minor">
+            <a:schemeClr val="lt1"/>
+          </a:fontRef>
+        </p:style>
+        <p:txBody>
+          <a:bodyPr rtlCol="0" anchor="ctr"/>
+          <a:lstStyle/>
+          <a:p>
+            <a:pPr algn="ctr"/>
+          </a:p>
+        </p:txBody>
+      </p:sp>
+      <p:sp>
+        <p:nvSpPr>
+          <p:cNvPr id="14" name="Rectangle 13"/>
+          <p:cNvSpPr/>
+          <p:nvPr/>
+        </p:nvSpPr>
+        <p:spPr>
+          <a:xfrm>
+            <a:off x="6172200" y="1389888"/>
+            <a:ext cx="5532120" cy="109728"/>
+          </a:xfrm>
+          <a:prstGeom prst="rect">
+            <a:avLst/>
+          </a:prstGeom>
+          <a:solidFill>
+            <a:srgbClr val="157347"/>
+          </a:solidFill>
+          <a:ln>
+            <a:noFill/>
+          </a:ln>
+        </p:spPr>
+        <p:style>
+          <a:lnRef idx="1">
+            <a:schemeClr val="accent1"/>
+          </a:lnRef>
+          <a:fillRef idx="3">
+            <a:schemeClr val="accent1"/>
+          </a:fillRef>
+          <a:effectRef idx="2">
+            <a:schemeClr val="accent1"/>
+          </a:effectRef>
+          <a:fontRef idx="minor">
+            <a:schemeClr val="lt1"/>
+          </a:fontRef>
+        </p:style>
+        <p:txBody>
+          <a:bodyPr rtlCol="0" anchor="ctr"/>
+          <a:lstStyle/>
+          <a:p>
+            <a:pPr algn="ctr"/>
+          </a:p>
+        </p:txBody>
+      </p:sp>
+      <p:sp>
+        <p:nvSpPr>
+          <p:cNvPr id="15" name="TextBox 14"/>
+          <p:cNvSpPr txBox="1"/>
+          <p:nvPr/>
+        </p:nvSpPr>
+        <p:spPr>
+          <a:xfrm>
+            <a:off x="6400800" y="1645920"/>
+            <a:ext cx="5074920" cy="365760"/>
+          </a:xfrm>
+          <a:prstGeom prst="rect">
+            <a:avLst/>
+          </a:prstGeom>
+          <a:noFill/>
+        </p:spPr>
+        <p:txBody>
+          <a:bodyPr wrap="square" anchor="t"/>
+          <a:lstStyle/>
+          <a:p>
+            <a:pPr algn="l"/>
+            <a:r>
+              <a:rPr sz="2200" b="1">
+                <a:solidFill>
+                  <a:srgbClr val="0B2545"/>
+                </a:solidFill>
+                <a:latin typeface="Calibri"/>
+              </a:rPr>
+              <a:t>Patrick Garcia</a:t>
+            </a:r>
+          </a:p>
+        </p:txBody>
+      </p:sp>
+      <p:sp>
+        <p:nvSpPr>
+          <p:cNvPr id="16" name="TextBox 15"/>
+          <p:cNvSpPr txBox="1"/>
+          <p:nvPr/>
+        </p:nvSpPr>
+        <p:spPr>
+          <a:xfrm>
+            <a:off x="6400800" y="2084831"/>
+            <a:ext cx="5074920" cy="292608"/>
+          </a:xfrm>
+          <a:prstGeom prst="rect">
+            <a:avLst/>
+          </a:prstGeom>
+          <a:noFill/>
+        </p:spPr>
+        <p:txBody>
+          <a:bodyPr wrap="square" anchor="t"/>
+          <a:lstStyle/>
+          <a:p>
+            <a:pPr algn="l"/>
+            <a:r>
+              <a:rPr sz="1400" b="1">
+                <a:solidFill>
+                  <a:srgbClr val="157347"/>
+                </a:solidFill>
+                <a:latin typeface="Calibri"/>
+              </a:rPr>
+              <a:t>Mechatronics Engineering</a:t>
+            </a:r>
+          </a:p>
+        </p:txBody>
+      </p:sp>
+      <p:sp>
+        <p:nvSpPr>
+          <p:cNvPr id="17" name="TextBox 16"/>
+          <p:cNvSpPr txBox="1"/>
+          <p:nvPr/>
+        </p:nvSpPr>
+        <p:spPr>
+          <a:xfrm>
+            <a:off x="6400800" y="2514600"/>
+            <a:ext cx="5074920" cy="1828800"/>
+          </a:xfrm>
+          <a:prstGeom prst="rect">
+            <a:avLst/>
+          </a:prstGeom>
+          <a:noFill/>
+        </p:spPr>
+        <p:txBody>
+          <a:bodyPr wrap="square" anchor="t"/>
+          <a:lstStyle/>
+          <a:p>
+            <a:pPr algn="l"/>
+            <a:r>
+              <a:rPr sz="1500" b="0">
+                <a:solidFill>
+                  <a:srgbClr val="1C2B3A"/>
+                </a:solidFill>
+                <a:latin typeface="Calibri"/>
+              </a:rPr>
+              <a:t>Explains the mechatronics context: how a spec, a matrix and a TDR are used in the team, and what a good review must look like.</a:t>
+            </a:r>
+          </a:p>
+        </p:txBody>
+      </p:sp>
+      <p:sp>
+        <p:nvSpPr>
+          <p:cNvPr id="18" name="Rounded Rectangle 17"/>
+          <p:cNvSpPr/>
+          <p:nvPr/>
+        </p:nvSpPr>
+        <p:spPr>
+          <a:xfrm>
+            <a:off x="411480" y="4800600"/>
+            <a:ext cx="11292840" cy="1554480"/>
+          </a:xfrm>
+          <a:prstGeom prst="roundRect">
+            <a:avLst>
+              <a:gd name="adj" fmla="val 8000"/>
+            </a:avLst>
+          </a:prstGeom>
+          <a:solidFill>
+            <a:srgbClr val="FFFFFF"/>
+          </a:solidFill>
+          <a:ln w="12700">
+            <a:solidFill>
+              <a:srgbClr val="DDE3EC"/>
+            </a:solidFill>
+          </a:ln>
+        </p:spPr>
+        <p:style>
+          <a:lnRef idx="1">
+            <a:schemeClr val="accent1"/>
+          </a:lnRef>
+          <a:fillRef idx="3">
+            <a:schemeClr val="accent1"/>
+          </a:fillRef>
+          <a:effectRef idx="2">
+            <a:schemeClr val="accent1"/>
+          </a:effectRef>
+          <a:fontRef idx="minor">
+            <a:schemeClr val="lt1"/>
+          </a:fontRef>
+        </p:style>
+        <p:txBody>
+          <a:bodyPr rtlCol="0" anchor="ctr"/>
+          <a:lstStyle/>
+          <a:p>
+            <a:pPr algn="ctr"/>
+          </a:p>
+        </p:txBody>
+      </p:sp>
+      <p:sp>
+        <p:nvSpPr>
+          <p:cNvPr id="19" name="Rectangle 18"/>
+          <p:cNvSpPr/>
+          <p:nvPr/>
+        </p:nvSpPr>
+        <p:spPr>
+          <a:xfrm>
+            <a:off x="411480" y="4800600"/>
+            <a:ext cx="109728" cy="1554480"/>
+          </a:xfrm>
+          <a:prstGeom prst="rect">
+            <a:avLst/>
+          </a:prstGeom>
+          <a:solidFill>
+            <a:srgbClr val="123061"/>
+          </a:solidFill>
+          <a:ln>
+            <a:noFill/>
+          </a:ln>
+        </p:spPr>
+        <p:style>
+          <a:lnRef idx="1">
+            <a:schemeClr val="accent1"/>
+          </a:lnRef>
+          <a:fillRef idx="3">
+            <a:schemeClr val="accent1"/>
+          </a:fillRef>
+          <a:effectRef idx="2">
+            <a:schemeClr val="accent1"/>
+          </a:effectRef>
+          <a:fontRef idx="minor">
+            <a:schemeClr val="lt1"/>
+          </a:fontRef>
+        </p:style>
+        <p:txBody>
+          <a:bodyPr rtlCol="0" anchor="ctr"/>
+          <a:lstStyle/>
+          <a:p>
+            <a:pPr algn="ctr"/>
+          </a:p>
+        </p:txBody>
+      </p:sp>
+      <p:sp>
+        <p:nvSpPr>
+          <p:cNvPr id="20" name="TextBox 19"/>
+          <p:cNvSpPr txBox="1"/>
+          <p:nvPr/>
+        </p:nvSpPr>
+        <p:spPr>
+          <a:xfrm>
+            <a:off x="731520" y="4937760"/>
+            <a:ext cx="10698480" cy="329184"/>
+          </a:xfrm>
+          <a:prstGeom prst="rect">
+            <a:avLst/>
+          </a:prstGeom>
+          <a:noFill/>
+        </p:spPr>
+        <p:txBody>
+          <a:bodyPr wrap="square" anchor="t"/>
+          <a:lstStyle/>
+          <a:p>
+            <a:pPr algn="l"/>
+            <a:r>
+              <a:rPr sz="1600" b="1">
+                <a:solidFill>
+                  <a:srgbClr val="0B2545"/>
+                </a:solidFill>
+                <a:latin typeface="Calibri"/>
+              </a:rPr>
+              <a:t>How we work together</a:t>
+            </a:r>
+          </a:p>
+        </p:txBody>
+      </p:sp>
+      <p:sp>
+        <p:nvSpPr>
+          <p:cNvPr id="21" name="TextBox 20"/>
+          <p:cNvSpPr txBox="1"/>
+          <p:nvPr/>
+        </p:nvSpPr>
+        <p:spPr>
+          <a:xfrm>
+            <a:off x="731520" y="5321808"/>
+            <a:ext cx="10698480" cy="822960"/>
+          </a:xfrm>
+          <a:prstGeom prst="rect">
+            <a:avLst/>
+          </a:prstGeom>
+          <a:noFill/>
+        </p:spPr>
+        <p:txBody>
+          <a:bodyPr wrap="square" anchor="t"/>
+          <a:lstStyle/>
+          <a:p>
+            <a:pPr algn="l"/>
+            <a:r>
+              <a:rPr sz="1500" b="0">
+                <a:solidFill>
+                  <a:srgbClr val="1C2B3A"/>
+                </a:solidFill>
+                <a:latin typeface="Calibri"/>
+              </a:rPr>
+              <a:t>They give the ideas and the technical meaning. I build and iterate on LEON. Nothing in the tool is designed without that mechatronics input — so the result stays useful for the team, not only for an IT exercise.</a:t>
+            </a:r>
+          </a:p>
+        </p:txBody>
+      </p:sp>
+      <p:sp>
+        <p:nvSpPr>
+          <p:cNvPr id="22" name="Rectangle 21"/>
+          <p:cNvSpPr/>
+          <p:nvPr/>
+        </p:nvSpPr>
+        <p:spPr>
+          <a:xfrm>
+            <a:off x="0" y="6601968"/>
+            <a:ext cx="12191695" cy="256032"/>
+          </a:xfrm>
+          <a:prstGeom prst="rect">
+            <a:avLst/>
+          </a:prstGeom>
+          <a:solidFill>
+            <a:srgbClr val="0B2545"/>
+          </a:solidFill>
+          <a:ln>
+            <a:noFill/>
+          </a:ln>
+        </p:spPr>
+        <p:style>
+          <a:lnRef idx="1">
+            <a:schemeClr val="accent1"/>
+          </a:lnRef>
+          <a:fillRef idx="3">
+            <a:schemeClr val="accent1"/>
+          </a:fillRef>
+          <a:effectRef idx="2">
+            <a:schemeClr val="accent1"/>
+          </a:effectRef>
+          <a:fontRef idx="minor">
+            <a:schemeClr val="lt1"/>
+          </a:fontRef>
+        </p:style>
+        <p:txBody>
+          <a:bodyPr rtlCol="0" anchor="ctr"/>
+          <a:lstStyle/>
+          <a:p>
+            <a:pPr algn="ctr"/>
+          </a:p>
+        </p:txBody>
+      </p:sp>
+      <p:sp>
+        <p:nvSpPr>
+          <p:cNvPr id="23" name="TextBox 22"/>
+          <p:cNvSpPr txBox="1"/>
+          <p:nvPr/>
+        </p:nvSpPr>
+        <p:spPr>
+          <a:xfrm>
+            <a:off x="365760" y="6601968"/>
+            <a:ext cx="9144000" cy="256032"/>
+          </a:xfrm>
+          <a:prstGeom prst="rect">
+            <a:avLst/>
+          </a:prstGeom>
+          <a:noFill/>
+        </p:spPr>
+        <p:txBody>
+          <a:bodyPr wrap="square" anchor="ctr"/>
+          <a:lstStyle/>
+          <a:p>
+            <a:pPr algn="l"/>
+            <a:r>
+              <a:rPr sz="1100" b="0">
+                <a:solidFill>
+                  <a:srgbClr val="A9BCD4"/>
+                </a:solidFill>
+                <a:latin typeface="Calibri"/>
+              </a:rPr>
+              <a:t>Khadija Benhamida  ·  Mechatronics Engineering  ·  First meeting</a:t>
+            </a:r>
+          </a:p>
+        </p:txBody>
+      </p:sp>
+      <p:sp>
+        <p:nvSpPr>
+          <p:cNvPr id="24" name="TextBox 23"/>
+          <p:cNvSpPr txBox="1"/>
+          <p:nvPr/>
+        </p:nvSpPr>
+        <p:spPr>
+          <a:xfrm>
+            <a:off x="10424160" y="6601968"/>
+            <a:ext cx="1371600" cy="256032"/>
+          </a:xfrm>
+          <a:prstGeom prst="rect">
+            <a:avLst/>
+          </a:prstGeom>
+          <a:noFill/>
+        </p:spPr>
+        <p:txBody>
+          <a:bodyPr wrap="square" anchor="ctr"/>
+          <a:lstStyle/>
+          <a:p>
+            <a:pPr algn="r"/>
+            <a:r>
+              <a:rPr sz="1100" b="0">
+                <a:solidFill>
+                  <a:srgbClr val="FFFFFF"/>
+                </a:solidFill>
+                <a:latin typeface="Calibri"/>
+              </a:rPr>
+              <a:t>10  /  13</a:t>
+            </a:r>
+          </a:p>
+        </p:txBody>
+      </p:sp>
+    </p:spTree>
+  </p:cSld>
+  <p:clrMapOvr>
+    <a:masterClrMapping/>
+  </p:clrMapOvr>
+</p:sld>
+</file>
+
+<file path=ppt/slides/slide11.xml><?xml version="1.0" encoding="utf-8"?>
+<p:sld xmlns:a="http://schemas.openxmlformats.org/drawingml/2006/main" xmlns:p="http://schemas.openxmlformats.org/presentationml/2006/main" xmlns:r="http://schemas.openxmlformats.org/officeDocument/2006/relationships">
+  <p:cSld>
+    <p:spTree>
+      <p:nvGrpSpPr>
+        <p:cNvPr id="1" name=""/>
+        <p:cNvGrpSpPr/>
+        <p:nvPr/>
+      </p:nvGrpSpPr>
+      <p:grpSpPr/>
+      <p:sp>
+        <p:nvSpPr>
+          <p:cNvPr id="2" name="Rectangle 1"/>
+          <p:cNvSpPr/>
+          <p:nvPr/>
+        </p:nvSpPr>
+        <p:spPr>
+          <a:xfrm>
+            <a:off x="0" y="0"/>
+            <a:ext cx="12191695" cy="6858000"/>
+          </a:xfrm>
+          <a:prstGeom prst="rect">
+            <a:avLst/>
+          </a:prstGeom>
+          <a:solidFill>
+            <a:srgbClr val="F4F7FB"/>
+          </a:solidFill>
+          <a:ln>
+            <a:noFill/>
+          </a:ln>
+        </p:spPr>
+        <p:style>
+          <a:lnRef idx="1">
+            <a:schemeClr val="accent1"/>
+          </a:lnRef>
+          <a:fillRef idx="3">
+            <a:schemeClr val="accent1"/>
+          </a:fillRef>
+          <a:effectRef idx="2">
+            <a:schemeClr val="accent1"/>
+          </a:effectRef>
+          <a:fontRef idx="minor">
+            <a:schemeClr val="lt1"/>
+          </a:fontRef>
+        </p:style>
+        <p:txBody>
+          <a:bodyPr rtlCol="0" anchor="ctr"/>
+          <a:lstStyle/>
+          <a:p>
+            <a:pPr algn="ctr"/>
+          </a:p>
+        </p:txBody>
+      </p:sp>
+      <p:sp>
+        <p:nvSpPr>
+          <p:cNvPr id="3" name="Rectangle 2"/>
+          <p:cNvSpPr/>
+          <p:nvPr/>
+        </p:nvSpPr>
+        <p:spPr>
+          <a:xfrm>
+            <a:off x="0" y="0"/>
+            <a:ext cx="12191695" cy="1078992"/>
+          </a:xfrm>
+          <a:prstGeom prst="rect">
+            <a:avLst/>
+          </a:prstGeom>
+          <a:solidFill>
+            <a:srgbClr val="0B2545"/>
+          </a:solidFill>
+          <a:ln>
+            <a:noFill/>
+          </a:ln>
+        </p:spPr>
+        <p:style>
+          <a:lnRef idx="1">
+            <a:schemeClr val="accent1"/>
+          </a:lnRef>
+          <a:fillRef idx="3">
+            <a:schemeClr val="accent1"/>
+          </a:fillRef>
+          <a:effectRef idx="2">
+            <a:schemeClr val="accent1"/>
+          </a:effectRef>
+          <a:fontRef idx="minor">
+            <a:schemeClr val="lt1"/>
+          </a:fontRef>
+        </p:style>
+        <p:txBody>
+          <a:bodyPr rtlCol="0" anchor="ctr"/>
+          <a:lstStyle/>
+          <a:p>
+            <a:pPr algn="ctr"/>
+          </a:p>
+        </p:txBody>
+      </p:sp>
+      <p:sp>
+        <p:nvSpPr>
+          <p:cNvPr id="4" name="Rectangle 3"/>
+          <p:cNvSpPr/>
+          <p:nvPr/>
+        </p:nvSpPr>
+        <p:spPr>
+          <a:xfrm>
+            <a:off x="0" y="1078992"/>
+            <a:ext cx="12191695" cy="54864"/>
+          </a:xfrm>
+          <a:prstGeom prst="rect">
+            <a:avLst/>
+          </a:prstGeom>
+          <a:solidFill>
+            <a:srgbClr val="1D4ED8"/>
+          </a:solidFill>
+          <a:ln>
+            <a:noFill/>
+          </a:ln>
+        </p:spPr>
+        <p:style>
+          <a:lnRef idx="1">
+            <a:schemeClr val="accent1"/>
+          </a:lnRef>
+          <a:fillRef idx="3">
+            <a:schemeClr val="accent1"/>
+          </a:fillRef>
+          <a:effectRef idx="2">
+            <a:schemeClr val="accent1"/>
+          </a:effectRef>
+          <a:fontRef idx="minor">
+            <a:schemeClr val="lt1"/>
+          </a:fontRef>
+        </p:style>
+        <p:txBody>
+          <a:bodyPr rtlCol="0" anchor="ctr"/>
+          <a:lstStyle/>
+          <a:p>
+            <a:pPr algn="ctr"/>
+          </a:p>
+        </p:txBody>
+      </p:sp>
+      <p:sp>
+        <p:nvSpPr>
+          <p:cNvPr id="5" name="TextBox 4"/>
+          <p:cNvSpPr txBox="1"/>
+          <p:nvPr/>
+        </p:nvSpPr>
+        <p:spPr>
+          <a:xfrm>
+            <a:off x="457200" y="91440"/>
+            <a:ext cx="11247120" cy="256032"/>
+          </a:xfrm>
+          <a:prstGeom prst="rect">
+            <a:avLst/>
+          </a:prstGeom>
+          <a:noFill/>
+        </p:spPr>
+        <p:txBody>
+          <a:bodyPr wrap="square" anchor="t"/>
+          <a:lstStyle/>
+          <a:p>
+            <a:pPr algn="l"/>
+            <a:r>
+              <a:rPr sz="1100" b="1">
+                <a:solidFill>
+                  <a:srgbClr val="A9BCD4"/>
+                </a:solidFill>
+                <a:latin typeface="Calibri"/>
+              </a:rPr>
+              <a:t>STATUS AND NEXT STEP</a:t>
+            </a:r>
+          </a:p>
+        </p:txBody>
+      </p:sp>
+      <p:sp>
+        <p:nvSpPr>
+          <p:cNvPr id="6" name="TextBox 5"/>
+          <p:cNvSpPr txBox="1"/>
+          <p:nvPr/>
+        </p:nvSpPr>
+        <p:spPr>
+          <a:xfrm>
+            <a:off x="457200" y="310896"/>
+            <a:ext cx="11247120" cy="384048"/>
+          </a:xfrm>
+          <a:prstGeom prst="rect">
+            <a:avLst/>
+          </a:prstGeom>
+          <a:noFill/>
+        </p:spPr>
+        <p:txBody>
+          <a:bodyPr wrap="square" anchor="t"/>
+          <a:lstStyle/>
+          <a:p>
+            <a:pPr algn="l"/>
+            <a:r>
+              <a:rPr sz="2600" b="1">
+                <a:solidFill>
+                  <a:srgbClr val="FFFFFF"/>
+                </a:solidFill>
+                <a:latin typeface="Calibri"/>
+              </a:rPr>
+              <a:t>The work is in progress. Deployment comes after.</a:t>
+            </a:r>
+          </a:p>
+        </p:txBody>
+      </p:sp>
+      <p:sp>
+        <p:nvSpPr>
+          <p:cNvPr id="7" name="TextBox 6"/>
+          <p:cNvSpPr txBox="1"/>
+          <p:nvPr/>
+        </p:nvSpPr>
+        <p:spPr>
+          <a:xfrm>
+            <a:off x="457200" y="713232"/>
+            <a:ext cx="11247120" cy="292608"/>
+          </a:xfrm>
+          <a:prstGeom prst="rect">
+            <a:avLst/>
+          </a:prstGeom>
+          <a:noFill/>
+        </p:spPr>
+        <p:txBody>
+          <a:bodyPr wrap="square" anchor="t"/>
+          <a:lstStyle/>
+          <a:p>
+            <a:pPr algn="l"/>
+            <a:r>
+              <a:rPr sz="1300" b="0">
+                <a:solidFill>
+                  <a:srgbClr val="C5D4E8"/>
+                </a:solidFill>
+                <a:latin typeface="Calibri"/>
+              </a:rPr>
+              <a:t>The whole team will have access once this step is finished.</a:t>
+            </a:r>
+          </a:p>
+        </p:txBody>
+      </p:sp>
+      <p:sp>
+        <p:nvSpPr>
+          <p:cNvPr id="8" name="Rounded Rectangle 7"/>
+          <p:cNvSpPr/>
+          <p:nvPr/>
+        </p:nvSpPr>
+        <p:spPr>
+          <a:xfrm>
+            <a:off x="411480" y="1417320"/>
+            <a:ext cx="3703320" cy="3703320"/>
+          </a:xfrm>
+          <a:prstGeom prst="roundRect">
+            <a:avLst>
+              <a:gd name="adj" fmla="val 8000"/>
+            </a:avLst>
+          </a:prstGeom>
+          <a:solidFill>
+            <a:srgbClr val="FFFFFF"/>
+          </a:solidFill>
+          <a:ln w="12700">
+            <a:solidFill>
+              <a:srgbClr val="DDE3EC"/>
+            </a:solidFill>
+          </a:ln>
+        </p:spPr>
+        <p:style>
+          <a:lnRef idx="1">
+            <a:schemeClr val="accent1"/>
+          </a:lnRef>
+          <a:fillRef idx="3">
+            <a:schemeClr val="accent1"/>
+          </a:fillRef>
+          <a:effectRef idx="2">
+            <a:schemeClr val="accent1"/>
+          </a:effectRef>
+          <a:fontRef idx="minor">
+            <a:schemeClr val="lt1"/>
+          </a:fontRef>
+        </p:style>
+        <p:txBody>
+          <a:bodyPr rtlCol="0" anchor="ctr"/>
+          <a:lstStyle/>
+          <a:p>
+            <a:pPr algn="ctr"/>
+          </a:p>
+        </p:txBody>
+      </p:sp>
+      <p:sp>
+        <p:nvSpPr>
+          <p:cNvPr id="9" name="Rectangle 8"/>
+          <p:cNvSpPr/>
+          <p:nvPr/>
+        </p:nvSpPr>
+        <p:spPr>
+          <a:xfrm>
+            <a:off x="411480" y="1417320"/>
+            <a:ext cx="3703320" cy="109728"/>
+          </a:xfrm>
+          <a:prstGeom prst="rect">
+            <a:avLst/>
+          </a:prstGeom>
+          <a:solidFill>
+            <a:srgbClr val="1D4ED8"/>
+          </a:solidFill>
+          <a:ln>
+            <a:noFill/>
+          </a:ln>
+        </p:spPr>
+        <p:style>
+          <a:lnRef idx="1">
+            <a:schemeClr val="accent1"/>
+          </a:lnRef>
+          <a:fillRef idx="3">
+            <a:schemeClr val="accent1"/>
+          </a:fillRef>
+          <a:effectRef idx="2">
+            <a:schemeClr val="accent1"/>
+          </a:effectRef>
+          <a:fontRef idx="minor">
+            <a:schemeClr val="lt1"/>
+          </a:fontRef>
+        </p:style>
+        <p:txBody>
+          <a:bodyPr rtlCol="0" anchor="ctr"/>
+          <a:lstStyle/>
+          <a:p>
+            <a:pPr algn="ctr"/>
+          </a:p>
+        </p:txBody>
+      </p:sp>
+      <p:sp>
+        <p:nvSpPr>
+          <p:cNvPr id="10" name="TextBox 9"/>
+          <p:cNvSpPr txBox="1"/>
+          <p:nvPr/>
+        </p:nvSpPr>
+        <p:spPr>
+          <a:xfrm>
+            <a:off x="640080" y="1691640"/>
+            <a:ext cx="3246120" cy="329184"/>
+          </a:xfrm>
+          <a:prstGeom prst="rect">
+            <a:avLst/>
+          </a:prstGeom>
+          <a:noFill/>
+        </p:spPr>
+        <p:txBody>
+          <a:bodyPr wrap="square" anchor="t"/>
+          <a:lstStyle/>
+          <a:p>
+            <a:pPr algn="l"/>
+            <a:r>
+              <a:rPr sz="1300" b="1">
+                <a:solidFill>
+                  <a:srgbClr val="1D4ED8"/>
+                </a:solidFill>
+                <a:latin typeface="Calibri"/>
+              </a:rPr>
+              <a:t>01  Now</a:t>
+            </a:r>
+          </a:p>
+        </p:txBody>
+      </p:sp>
+      <p:sp>
+        <p:nvSpPr>
+          <p:cNvPr id="11" name="TextBox 10"/>
+          <p:cNvSpPr txBox="1"/>
+          <p:nvPr/>
+        </p:nvSpPr>
+        <p:spPr>
+          <a:xfrm>
+            <a:off x="640080" y="2084831"/>
+            <a:ext cx="3246120" cy="731520"/>
+          </a:xfrm>
+          <a:prstGeom prst="rect">
+            <a:avLst/>
+          </a:prstGeom>
+          <a:noFill/>
+        </p:spPr>
+        <p:txBody>
+          <a:bodyPr wrap="square" anchor="t"/>
+          <a:lstStyle/>
+          <a:p>
+            <a:pPr algn="l"/>
+            <a:r>
+              <a:rPr sz="2200" b="1">
+                <a:solidFill>
+                  <a:srgbClr val="0B2545"/>
+                </a:solidFill>
+                <a:latin typeface="Calibri"/>
+              </a:rPr>
+              <a:t>In progress</a:t>
+            </a:r>
+          </a:p>
+        </p:txBody>
+      </p:sp>
+      <p:sp>
+        <p:nvSpPr>
+          <p:cNvPr id="12" name="TextBox 11"/>
+          <p:cNvSpPr txBox="1"/>
+          <p:nvPr/>
+        </p:nvSpPr>
+        <p:spPr>
+          <a:xfrm>
+            <a:off x="640080" y="2926080"/>
+            <a:ext cx="3246120" cy="1920240"/>
+          </a:xfrm>
+          <a:prstGeom prst="rect">
+            <a:avLst/>
+          </a:prstGeom>
+          <a:noFill/>
+        </p:spPr>
+        <p:txBody>
+          <a:bodyPr wrap="square" anchor="t"/>
+          <a:lstStyle/>
+          <a:p>
+            <a:pPr algn="l"/>
+            <a:r>
+              <a:rPr sz="1500" b="0">
+                <a:solidFill>
+                  <a:srgbClr val="1C2B3A"/>
+                </a:solidFill>
+                <a:latin typeface="Calibri"/>
+              </a:rPr>
+              <a:t>I am finishing the LEON functions you just saw: spec, matrix, TDR cross-check and benchmark.</a:t>
+            </a:r>
+          </a:p>
+        </p:txBody>
+      </p:sp>
+      <p:sp>
+        <p:nvSpPr>
+          <p:cNvPr id="13" name="Rounded Rectangle 12"/>
+          <p:cNvSpPr/>
+          <p:nvPr/>
+        </p:nvSpPr>
+        <p:spPr>
+          <a:xfrm>
+            <a:off x="4251960" y="1417320"/>
+            <a:ext cx="3703320" cy="3703320"/>
+          </a:xfrm>
+          <a:prstGeom prst="roundRect">
+            <a:avLst>
+              <a:gd name="adj" fmla="val 8000"/>
+            </a:avLst>
+          </a:prstGeom>
+          <a:solidFill>
+            <a:srgbClr val="FFFFFF"/>
+          </a:solidFill>
+          <a:ln w="12700">
+            <a:solidFill>
+              <a:srgbClr val="DDE3EC"/>
+            </a:solidFill>
+          </a:ln>
+        </p:spPr>
+        <p:style>
+          <a:lnRef idx="1">
+            <a:schemeClr val="accent1"/>
+          </a:lnRef>
+          <a:fillRef idx="3">
+            <a:schemeClr val="accent1"/>
+          </a:fillRef>
+          <a:effectRef idx="2">
+            <a:schemeClr val="accent1"/>
+          </a:effectRef>
+          <a:fontRef idx="minor">
+            <a:schemeClr val="lt1"/>
+          </a:fontRef>
+        </p:style>
+        <p:txBody>
+          <a:bodyPr rtlCol="0" anchor="ctr"/>
+          <a:lstStyle/>
+          <a:p>
+            <a:pPr algn="ctr"/>
+          </a:p>
+        </p:txBody>
+      </p:sp>
+      <p:sp>
+        <p:nvSpPr>
+          <p:cNvPr id="14" name="Rectangle 13"/>
+          <p:cNvSpPr/>
+          <p:nvPr/>
+        </p:nvSpPr>
+        <p:spPr>
+          <a:xfrm>
+            <a:off x="4251960" y="1417320"/>
+            <a:ext cx="3703320" cy="109728"/>
+          </a:xfrm>
+          <a:prstGeom prst="rect">
+            <a:avLst/>
+          </a:prstGeom>
+          <a:solidFill>
+            <a:srgbClr val="9A5B00"/>
+          </a:solidFill>
+          <a:ln>
+            <a:noFill/>
+          </a:ln>
+        </p:spPr>
+        <p:style>
+          <a:lnRef idx="1">
+            <a:schemeClr val="accent1"/>
+          </a:lnRef>
+          <a:fillRef idx="3">
+            <a:schemeClr val="accent1"/>
+          </a:fillRef>
+          <a:effectRef idx="2">
+            <a:schemeClr val="accent1"/>
+          </a:effectRef>
+          <a:fontRef idx="minor">
+            <a:schemeClr val="lt1"/>
+          </a:fontRef>
+        </p:style>
+        <p:txBody>
+          <a:bodyPr rtlCol="0" anchor="ctr"/>
+          <a:lstStyle/>
+          <a:p>
+            <a:pPr algn="ctr"/>
+          </a:p>
+        </p:txBody>
+      </p:sp>
+      <p:sp>
+        <p:nvSpPr>
+          <p:cNvPr id="15" name="TextBox 14"/>
+          <p:cNvSpPr txBox="1"/>
+          <p:nvPr/>
+        </p:nvSpPr>
+        <p:spPr>
+          <a:xfrm>
+            <a:off x="4480560" y="1691640"/>
+            <a:ext cx="3246120" cy="329184"/>
+          </a:xfrm>
+          <a:prstGeom prst="rect">
+            <a:avLst/>
+          </a:prstGeom>
+          <a:noFill/>
+        </p:spPr>
+        <p:txBody>
+          <a:bodyPr wrap="square" anchor="t"/>
+          <a:lstStyle/>
+          <a:p>
+            <a:pPr algn="l"/>
+            <a:r>
+              <a:rPr sz="1300" b="1">
+                <a:solidFill>
+                  <a:srgbClr val="9A5B00"/>
+                </a:solidFill>
+                <a:latin typeface="Calibri"/>
+              </a:rPr>
+              <a:t>02  Next</a:t>
+            </a:r>
+          </a:p>
+        </p:txBody>
+      </p:sp>
+      <p:sp>
+        <p:nvSpPr>
+          <p:cNvPr id="16" name="TextBox 15"/>
+          <p:cNvSpPr txBox="1"/>
+          <p:nvPr/>
+        </p:nvSpPr>
+        <p:spPr>
+          <a:xfrm>
+            <a:off x="4480560" y="2084831"/>
+            <a:ext cx="3246120" cy="731520"/>
+          </a:xfrm>
+          <a:prstGeom prst="rect">
+            <a:avLst/>
+          </a:prstGeom>
+          <a:noFill/>
+        </p:spPr>
+        <p:txBody>
+          <a:bodyPr wrap="square" anchor="t"/>
+          <a:lstStyle/>
+          <a:p>
+            <a:pPr algn="l"/>
+            <a:r>
+              <a:rPr sz="2200" b="1">
+                <a:solidFill>
+                  <a:srgbClr val="0B2545"/>
+                </a:solidFill>
+                <a:latin typeface="Calibri"/>
+              </a:rPr>
+              <a:t>Finish this task</a:t>
+            </a:r>
+          </a:p>
+        </p:txBody>
+      </p:sp>
+      <p:sp>
+        <p:nvSpPr>
+          <p:cNvPr id="17" name="TextBox 16"/>
+          <p:cNvSpPr txBox="1"/>
+          <p:nvPr/>
+        </p:nvSpPr>
+        <p:spPr>
+          <a:xfrm>
+            <a:off x="4480560" y="2926080"/>
+            <a:ext cx="3246120" cy="1920240"/>
+          </a:xfrm>
+          <a:prstGeom prst="rect">
+            <a:avLst/>
+          </a:prstGeom>
+          <a:noFill/>
+        </p:spPr>
+        <p:txBody>
+          <a:bodyPr wrap="square" anchor="t"/>
+          <a:lstStyle/>
+          <a:p>
+            <a:pPr algn="l"/>
+            <a:r>
+              <a:rPr sz="1500" b="0">
+                <a:solidFill>
+                  <a:srgbClr val="1C2B3A"/>
+                </a:solidFill>
+                <a:latin typeface="Calibri"/>
+              </a:rPr>
+              <a:t>Close the remaining work, test with real mechatronics files, and align with Imane and Patrick.</a:t>
+            </a:r>
+          </a:p>
+        </p:txBody>
+      </p:sp>
+      <p:sp>
+        <p:nvSpPr>
+          <p:cNvPr id="18" name="Rounded Rectangle 17"/>
+          <p:cNvSpPr/>
+          <p:nvPr/>
+        </p:nvSpPr>
+        <p:spPr>
+          <a:xfrm>
+            <a:off x="8092440" y="1417320"/>
+            <a:ext cx="3703320" cy="3703320"/>
+          </a:xfrm>
+          <a:prstGeom prst="roundRect">
+            <a:avLst>
+              <a:gd name="adj" fmla="val 8000"/>
+            </a:avLst>
+          </a:prstGeom>
+          <a:solidFill>
+            <a:srgbClr val="FFFFFF"/>
+          </a:solidFill>
+          <a:ln w="12700">
+            <a:solidFill>
+              <a:srgbClr val="DDE3EC"/>
+            </a:solidFill>
+          </a:ln>
+        </p:spPr>
+        <p:style>
+          <a:lnRef idx="1">
+            <a:schemeClr val="accent1"/>
+          </a:lnRef>
+          <a:fillRef idx="3">
+            <a:schemeClr val="accent1"/>
+          </a:fillRef>
+          <a:effectRef idx="2">
+            <a:schemeClr val="accent1"/>
+          </a:effectRef>
+          <a:fontRef idx="minor">
+            <a:schemeClr val="lt1"/>
+          </a:fontRef>
+        </p:style>
+        <p:txBody>
+          <a:bodyPr rtlCol="0" anchor="ctr"/>
+          <a:lstStyle/>
+          <a:p>
+            <a:pPr algn="ctr"/>
+          </a:p>
+        </p:txBody>
+      </p:sp>
+      <p:sp>
+        <p:nvSpPr>
+          <p:cNvPr id="19" name="Rectangle 18"/>
+          <p:cNvSpPr/>
+          <p:nvPr/>
+        </p:nvSpPr>
+        <p:spPr>
+          <a:xfrm>
+            <a:off x="8092440" y="1417320"/>
+            <a:ext cx="3703320" cy="109728"/>
+          </a:xfrm>
+          <a:prstGeom prst="rect">
+            <a:avLst/>
+          </a:prstGeom>
+          <a:solidFill>
+            <a:srgbClr val="157347"/>
+          </a:solidFill>
+          <a:ln>
+            <a:noFill/>
+          </a:ln>
+        </p:spPr>
+        <p:style>
+          <a:lnRef idx="1">
+            <a:schemeClr val="accent1"/>
+          </a:lnRef>
+          <a:fillRef idx="3">
+            <a:schemeClr val="accent1"/>
+          </a:fillRef>
+          <a:effectRef idx="2">
+            <a:schemeClr val="accent1"/>
+          </a:effectRef>
+          <a:fontRef idx="minor">
+            <a:schemeClr val="lt1"/>
+          </a:fontRef>
+        </p:style>
+        <p:txBody>
+          <a:bodyPr rtlCol="0" anchor="ctr"/>
+          <a:lstStyle/>
+          <a:p>
+            <a:pPr algn="ctr"/>
+          </a:p>
+        </p:txBody>
+      </p:sp>
+      <p:sp>
+        <p:nvSpPr>
+          <p:cNvPr id="20" name="TextBox 19"/>
+          <p:cNvSpPr txBox="1"/>
+          <p:nvPr/>
+        </p:nvSpPr>
+        <p:spPr>
+          <a:xfrm>
+            <a:off x="8321040" y="1691640"/>
+            <a:ext cx="3246120" cy="329184"/>
+          </a:xfrm>
+          <a:prstGeom prst="rect">
+            <a:avLst/>
+          </a:prstGeom>
+          <a:noFill/>
+        </p:spPr>
+        <p:txBody>
+          <a:bodyPr wrap="square" anchor="t"/>
+          <a:lstStyle/>
+          <a:p>
+            <a:pPr algn="l"/>
+            <a:r>
+              <a:rPr sz="1300" b="1">
+                <a:solidFill>
+                  <a:srgbClr val="157347"/>
+                </a:solidFill>
+                <a:latin typeface="Calibri"/>
+              </a:rPr>
+              <a:t>03  Then</a:t>
+            </a:r>
+          </a:p>
+        </p:txBody>
+      </p:sp>
+      <p:sp>
+        <p:nvSpPr>
+          <p:cNvPr id="21" name="TextBox 20"/>
+          <p:cNvSpPr txBox="1"/>
+          <p:nvPr/>
+        </p:nvSpPr>
+        <p:spPr>
+          <a:xfrm>
+            <a:off x="8321040" y="2084831"/>
+            <a:ext cx="3246120" cy="731520"/>
+          </a:xfrm>
+          <a:prstGeom prst="rect">
+            <a:avLst/>
+          </a:prstGeom>
+          <a:noFill/>
+        </p:spPr>
+        <p:txBody>
+          <a:bodyPr wrap="square" anchor="t"/>
+          <a:lstStyle/>
+          <a:p>
+            <a:pPr algn="l"/>
+            <a:r>
+              <a:rPr sz="2200" b="1">
+                <a:solidFill>
+                  <a:srgbClr val="0B2545"/>
+                </a:solidFill>
+                <a:latin typeface="Calibri"/>
+              </a:rPr>
+              <a:t>Deployment for the team</a:t>
+            </a:r>
+          </a:p>
+        </p:txBody>
+      </p:sp>
+      <p:sp>
+        <p:nvSpPr>
+          <p:cNvPr id="22" name="TextBox 21"/>
+          <p:cNvSpPr txBox="1"/>
+          <p:nvPr/>
+        </p:nvSpPr>
+        <p:spPr>
+          <a:xfrm>
+            <a:off x="8321040" y="2926080"/>
+            <a:ext cx="3246120" cy="1920240"/>
+          </a:xfrm>
+          <a:prstGeom prst="rect">
+            <a:avLst/>
+          </a:prstGeom>
+          <a:noFill/>
+        </p:spPr>
+        <p:txBody>
+          <a:bodyPr wrap="square" anchor="t"/>
+          <a:lstStyle/>
+          <a:p>
+            <a:pPr algn="l"/>
+            <a:r>
+              <a:rPr sz="1500" b="0">
+                <a:solidFill>
+                  <a:srgbClr val="1C2B3A"/>
+                </a:solidFill>
+                <a:latin typeface="Calibri"/>
+              </a:rPr>
+              <a:t>Once this task is finished, we start the deployment so the whole Mechatronics team can open LEON in a browser, with no installation.</a:t>
+            </a:r>
+          </a:p>
+        </p:txBody>
+      </p:sp>
+      <p:sp>
+        <p:nvSpPr>
+          <p:cNvPr id="23" name="Rounded Rectangle 22"/>
+          <p:cNvSpPr/>
+          <p:nvPr/>
+        </p:nvSpPr>
+        <p:spPr>
+          <a:xfrm>
+            <a:off x="411480" y="5303520"/>
+            <a:ext cx="11292840" cy="1078992"/>
+          </a:xfrm>
+          <a:prstGeom prst="roundRect">
+            <a:avLst>
+              <a:gd name="adj" fmla="val 8000"/>
+            </a:avLst>
+          </a:prstGeom>
+          <a:solidFill>
+            <a:srgbClr val="E8F5EE"/>
+          </a:solidFill>
+          <a:ln w="12700">
+            <a:solidFill>
+              <a:srgbClr val="157347"/>
+            </a:solidFill>
+          </a:ln>
+        </p:spPr>
+        <p:style>
+          <a:lnRef idx="1">
+            <a:schemeClr val="accent1"/>
+          </a:lnRef>
+          <a:fillRef idx="3">
+            <a:schemeClr val="accent1"/>
+          </a:fillRef>
+          <a:effectRef idx="2">
+            <a:schemeClr val="accent1"/>
+          </a:effectRef>
+          <a:fontRef idx="minor">
+            <a:schemeClr val="lt1"/>
+          </a:fontRef>
+        </p:style>
+        <p:txBody>
+          <a:bodyPr rtlCol="0" anchor="ctr"/>
+          <a:lstStyle/>
+          <a:p>
+            <a:pPr algn="ctr"/>
+          </a:p>
+        </p:txBody>
+      </p:sp>
+      <p:sp>
+        <p:nvSpPr>
+          <p:cNvPr id="24" name="TextBox 23"/>
+          <p:cNvSpPr txBox="1"/>
+          <p:nvPr/>
+        </p:nvSpPr>
+        <p:spPr>
+          <a:xfrm>
+            <a:off x="640080" y="5440680"/>
+            <a:ext cx="10881360" cy="822960"/>
+          </a:xfrm>
+          <a:prstGeom prst="rect">
+            <a:avLst/>
+          </a:prstGeom>
+          <a:noFill/>
+        </p:spPr>
+        <p:txBody>
+          <a:bodyPr wrap="square" anchor="t"/>
+          <a:lstStyle/>
+          <a:p>
+            <a:pPr algn="l"/>
+            <a:r>
+              <a:rPr sz="1600" b="1">
+                <a:solidFill>
+                  <a:srgbClr val="0B2545"/>
+                </a:solidFill>
+                <a:latin typeface="Calibri"/>
+              </a:rPr>
+              <a:t>Objective: every colleague who reviews a spec, a matrix or a TDR can use LEON — not only the people building it today.</a:t>
+            </a:r>
+          </a:p>
+        </p:txBody>
+      </p:sp>
+      <p:sp>
+        <p:nvSpPr>
+          <p:cNvPr id="25" name="Rectangle 24"/>
+          <p:cNvSpPr/>
+          <p:nvPr/>
+        </p:nvSpPr>
+        <p:spPr>
+          <a:xfrm>
+            <a:off x="0" y="6601968"/>
+            <a:ext cx="12191695" cy="256032"/>
+          </a:xfrm>
+          <a:prstGeom prst="rect">
+            <a:avLst/>
+          </a:prstGeom>
+          <a:solidFill>
+            <a:srgbClr val="0B2545"/>
+          </a:solidFill>
+          <a:ln>
+            <a:noFill/>
+          </a:ln>
+        </p:spPr>
+        <p:style>
+          <a:lnRef idx="1">
+            <a:schemeClr val="accent1"/>
+          </a:lnRef>
+          <a:fillRef idx="3">
+            <a:schemeClr val="accent1"/>
+          </a:fillRef>
+          <a:effectRef idx="2">
+            <a:schemeClr val="accent1"/>
+          </a:effectRef>
+          <a:fontRef idx="minor">
+            <a:schemeClr val="lt1"/>
+          </a:fontRef>
+        </p:style>
+        <p:txBody>
+          <a:bodyPr rtlCol="0" anchor="ctr"/>
+          <a:lstStyle/>
+          <a:p>
+            <a:pPr algn="ctr"/>
+          </a:p>
+        </p:txBody>
+      </p:sp>
+      <p:sp>
+        <p:nvSpPr>
+          <p:cNvPr id="26" name="TextBox 25"/>
+          <p:cNvSpPr txBox="1"/>
+          <p:nvPr/>
+        </p:nvSpPr>
+        <p:spPr>
+          <a:xfrm>
+            <a:off x="365760" y="6601968"/>
+            <a:ext cx="9144000" cy="256032"/>
+          </a:xfrm>
+          <a:prstGeom prst="rect">
+            <a:avLst/>
+          </a:prstGeom>
+          <a:noFill/>
+        </p:spPr>
+        <p:txBody>
+          <a:bodyPr wrap="square" anchor="ctr"/>
+          <a:lstStyle/>
+          <a:p>
+            <a:pPr algn="l"/>
+            <a:r>
+              <a:rPr sz="1100" b="0">
+                <a:solidFill>
+                  <a:srgbClr val="A9BCD4"/>
+                </a:solidFill>
+                <a:latin typeface="Calibri"/>
+              </a:rPr>
+              <a:t>Khadija Benhamida  ·  Mechatronics Engineering  ·  First meeting</a:t>
+            </a:r>
+          </a:p>
+        </p:txBody>
+      </p:sp>
+      <p:sp>
+        <p:nvSpPr>
+          <p:cNvPr id="27" name="TextBox 26"/>
+          <p:cNvSpPr txBox="1"/>
+          <p:nvPr/>
+        </p:nvSpPr>
+        <p:spPr>
+          <a:xfrm>
+            <a:off x="10424160" y="6601968"/>
+            <a:ext cx="1371600" cy="256032"/>
+          </a:xfrm>
+          <a:prstGeom prst="rect">
+            <a:avLst/>
+          </a:prstGeom>
+          <a:noFill/>
+        </p:spPr>
+        <p:txBody>
+          <a:bodyPr wrap="square" anchor="ctr"/>
+          <a:lstStyle/>
+          <a:p>
+            <a:pPr algn="r"/>
+            <a:r>
+              <a:rPr sz="1100" b="0">
+                <a:solidFill>
+                  <a:srgbClr val="FFFFFF"/>
+                </a:solidFill>
+                <a:latin typeface="Calibri"/>
+              </a:rPr>
+              <a:t>11  /  13</a:t>
+            </a:r>
+          </a:p>
+        </p:txBody>
+      </p:sp>
+    </p:spTree>
+  </p:cSld>
+  <p:clrMapOvr>
+    <a:masterClrMapping/>
+  </p:clrMapOvr>
+</p:sld>
+</file>
+
+<file path=ppt/slides/slide12.xml><?xml version="1.0" encoding="utf-8"?>
+<p:sld xmlns:a="http://schemas.openxmlformats.org/drawingml/2006/main" xmlns:p="http://schemas.openxmlformats.org/presentationml/2006/main" xmlns:r="http://schemas.openxmlformats.org/officeDocument/2006/relationships">
+  <p:cSld>
+    <p:spTree>
+      <p:nvGrpSpPr>
+        <p:cNvPr id="1" name=""/>
+        <p:cNvGrpSpPr/>
+        <p:nvPr/>
+      </p:nvGrpSpPr>
+      <p:grpSpPr/>
+      <p:sp>
+        <p:nvSpPr>
+          <p:cNvPr id="2" name="Rectangle 1"/>
+          <p:cNvSpPr/>
+          <p:nvPr/>
+        </p:nvSpPr>
+        <p:spPr>
+          <a:xfrm>
+            <a:off x="0" y="0"/>
+            <a:ext cx="12191695" cy="6858000"/>
+          </a:xfrm>
+          <a:prstGeom prst="rect">
+            <a:avLst/>
+          </a:prstGeom>
+          <a:solidFill>
+            <a:srgbClr val="F4F7FB"/>
+          </a:solidFill>
+          <a:ln>
+            <a:noFill/>
+          </a:ln>
+        </p:spPr>
+        <p:style>
+          <a:lnRef idx="1">
+            <a:schemeClr val="accent1"/>
+          </a:lnRef>
+          <a:fillRef idx="3">
+            <a:schemeClr val="accent1"/>
+          </a:fillRef>
+          <a:effectRef idx="2">
+            <a:schemeClr val="accent1"/>
+          </a:effectRef>
+          <a:fontRef idx="minor">
+            <a:schemeClr val="lt1"/>
+          </a:fontRef>
+        </p:style>
+        <p:txBody>
+          <a:bodyPr rtlCol="0" anchor="ctr"/>
+          <a:lstStyle/>
+          <a:p>
+            <a:pPr algn="ctr"/>
+          </a:p>
+        </p:txBody>
+      </p:sp>
+      <p:sp>
+        <p:nvSpPr>
+          <p:cNvPr id="3" name="Rectangle 2"/>
+          <p:cNvSpPr/>
+          <p:nvPr/>
+        </p:nvSpPr>
+        <p:spPr>
+          <a:xfrm>
+            <a:off x="0" y="0"/>
+            <a:ext cx="12191695" cy="1078992"/>
+          </a:xfrm>
+          <a:prstGeom prst="rect">
+            <a:avLst/>
+          </a:prstGeom>
+          <a:solidFill>
+            <a:srgbClr val="0B2545"/>
+          </a:solidFill>
+          <a:ln>
+            <a:noFill/>
+          </a:ln>
+        </p:spPr>
+        <p:style>
+          <a:lnRef idx="1">
+            <a:schemeClr val="accent1"/>
+          </a:lnRef>
+          <a:fillRef idx="3">
+            <a:schemeClr val="accent1"/>
+          </a:fillRef>
+          <a:effectRef idx="2">
+            <a:schemeClr val="accent1"/>
+          </a:effectRef>
+          <a:fontRef idx="minor">
+            <a:schemeClr val="lt1"/>
+          </a:fontRef>
+        </p:style>
+        <p:txBody>
+          <a:bodyPr rtlCol="0" anchor="ctr"/>
+          <a:lstStyle/>
+          <a:p>
+            <a:pPr algn="ctr"/>
+          </a:p>
+        </p:txBody>
+      </p:sp>
+      <p:sp>
+        <p:nvSpPr>
+          <p:cNvPr id="4" name="Rectangle 3"/>
+          <p:cNvSpPr/>
+          <p:nvPr/>
+        </p:nvSpPr>
+        <p:spPr>
+          <a:xfrm>
+            <a:off x="0" y="1078992"/>
+            <a:ext cx="12191695" cy="54864"/>
+          </a:xfrm>
+          <a:prstGeom prst="rect">
+            <a:avLst/>
+          </a:prstGeom>
+          <a:solidFill>
+            <a:srgbClr val="1D4ED8"/>
+          </a:solidFill>
+          <a:ln>
+            <a:noFill/>
+          </a:ln>
+        </p:spPr>
+        <p:style>
+          <a:lnRef idx="1">
+            <a:schemeClr val="accent1"/>
+          </a:lnRef>
+          <a:fillRef idx="3">
+            <a:schemeClr val="accent1"/>
+          </a:fillRef>
+          <a:effectRef idx="2">
+            <a:schemeClr val="accent1"/>
+          </a:effectRef>
+          <a:fontRef idx="minor">
+            <a:schemeClr val="lt1"/>
+          </a:fontRef>
+        </p:style>
+        <p:txBody>
+          <a:bodyPr rtlCol="0" anchor="ctr"/>
+          <a:lstStyle/>
+          <a:p>
+            <a:pPr algn="ctr"/>
+          </a:p>
+        </p:txBody>
+      </p:sp>
+      <p:sp>
+        <p:nvSpPr>
+          <p:cNvPr id="5" name="TextBox 4"/>
+          <p:cNvSpPr txBox="1"/>
+          <p:nvPr/>
+        </p:nvSpPr>
+        <p:spPr>
+          <a:xfrm>
+            <a:off x="457200" y="91440"/>
+            <a:ext cx="11247120" cy="256032"/>
+          </a:xfrm>
+          <a:prstGeom prst="rect">
+            <a:avLst/>
+          </a:prstGeom>
+          <a:noFill/>
+        </p:spPr>
+        <p:txBody>
+          <a:bodyPr wrap="square" anchor="t"/>
+          <a:lstStyle/>
+          <a:p>
+            <a:pPr algn="l"/>
+            <a:r>
+              <a:rPr sz="1100" b="1">
+                <a:solidFill>
+                  <a:srgbClr val="A9BCD4"/>
+                </a:solidFill>
+                <a:latin typeface="Calibri"/>
+              </a:rPr>
+              <a:t>UPCOMING TRAINING</a:t>
+            </a:r>
+          </a:p>
+        </p:txBody>
+      </p:sp>
+      <p:sp>
+        <p:nvSpPr>
+          <p:cNvPr id="6" name="TextBox 5"/>
+          <p:cNvSpPr txBox="1"/>
+          <p:nvPr/>
+        </p:nvSpPr>
+        <p:spPr>
+          <a:xfrm>
+            <a:off x="457200" y="310896"/>
+            <a:ext cx="11247120" cy="384048"/>
+          </a:xfrm>
+          <a:prstGeom prst="rect">
+            <a:avLst/>
+          </a:prstGeom>
+          <a:noFill/>
+        </p:spPr>
+        <p:txBody>
+          <a:bodyPr wrap="square" anchor="t"/>
+          <a:lstStyle/>
+          <a:p>
+            <a:pPr algn="l"/>
+            <a:r>
+              <a:rPr sz="2600" b="1">
+                <a:solidFill>
+                  <a:srgbClr val="FFFFFF"/>
+                </a:solidFill>
+                <a:latin typeface="Calibri"/>
+              </a:rPr>
+              <a:t>AI training — and how Mechatronics can use it.</a:t>
+            </a:r>
+          </a:p>
+        </p:txBody>
+      </p:sp>
+      <p:sp>
+        <p:nvSpPr>
+          <p:cNvPr id="7" name="TextBox 6"/>
+          <p:cNvSpPr txBox="1"/>
+          <p:nvPr/>
+        </p:nvSpPr>
+        <p:spPr>
+          <a:xfrm>
+            <a:off x="457200" y="713232"/>
+            <a:ext cx="11247120" cy="292608"/>
+          </a:xfrm>
+          <a:prstGeom prst="rect">
+            <a:avLst/>
+          </a:prstGeom>
+          <a:noFill/>
+        </p:spPr>
+        <p:txBody>
+          <a:bodyPr wrap="square" anchor="t"/>
+          <a:lstStyle/>
+          <a:p>
+            <a:pPr algn="l"/>
+            <a:r>
+              <a:rPr sz="1300" b="0">
+                <a:solidFill>
+                  <a:srgbClr val="C5D4E8"/>
+                </a:solidFill>
+                <a:latin typeface="Calibri"/>
+              </a:rPr>
+              <a:t>A practical training for the team, not a computer-science course.</a:t>
+            </a:r>
+          </a:p>
+        </p:txBody>
+      </p:sp>
+      <p:sp>
+        <p:nvSpPr>
+          <p:cNvPr id="8" name="Rounded Rectangle 7"/>
+          <p:cNvSpPr/>
+          <p:nvPr/>
+        </p:nvSpPr>
+        <p:spPr>
+          <a:xfrm>
+            <a:off x="411480" y="1389888"/>
+            <a:ext cx="5532120" cy="4919472"/>
+          </a:xfrm>
+          <a:prstGeom prst="roundRect">
+            <a:avLst>
+              <a:gd name="adj" fmla="val 8000"/>
+            </a:avLst>
+          </a:prstGeom>
+          <a:solidFill>
+            <a:srgbClr val="FFFFFF"/>
+          </a:solidFill>
+          <a:ln w="12700">
+            <a:solidFill>
+              <a:srgbClr val="DDE3EC"/>
+            </a:solidFill>
+          </a:ln>
+        </p:spPr>
+        <p:style>
+          <a:lnRef idx="1">
+            <a:schemeClr val="accent1"/>
+          </a:lnRef>
+          <a:fillRef idx="3">
+            <a:schemeClr val="accent1"/>
+          </a:fillRef>
+          <a:effectRef idx="2">
+            <a:schemeClr val="accent1"/>
+          </a:effectRef>
+          <a:fontRef idx="minor">
+            <a:schemeClr val="lt1"/>
+          </a:fontRef>
+        </p:style>
+        <p:txBody>
+          <a:bodyPr rtlCol="0" anchor="ctr"/>
+          <a:lstStyle/>
+          <a:p>
+            <a:pPr algn="ctr"/>
+          </a:p>
+        </p:txBody>
+      </p:sp>
+      <p:sp>
+        <p:nvSpPr>
+          <p:cNvPr id="9" name="Rectangle 8"/>
+          <p:cNvSpPr/>
+          <p:nvPr/>
+        </p:nvSpPr>
+        <p:spPr>
+          <a:xfrm>
+            <a:off x="411480" y="1389888"/>
+            <a:ext cx="73152" cy="4919472"/>
+          </a:xfrm>
+          <a:prstGeom prst="rect">
+            <a:avLst/>
+          </a:prstGeom>
+          <a:solidFill>
+            <a:srgbClr val="1D4ED8"/>
+          </a:solidFill>
+          <a:ln>
+            <a:noFill/>
+          </a:ln>
+        </p:spPr>
+        <p:style>
+          <a:lnRef idx="1">
+            <a:schemeClr val="accent1"/>
+          </a:lnRef>
+          <a:fillRef idx="3">
+            <a:schemeClr val="accent1"/>
+          </a:fillRef>
+          <a:effectRef idx="2">
+            <a:schemeClr val="accent1"/>
+          </a:effectRef>
+          <a:fontRef idx="minor">
+            <a:schemeClr val="lt1"/>
+          </a:fontRef>
+        </p:style>
+        <p:txBody>
+          <a:bodyPr rtlCol="0" anchor="ctr"/>
+          <a:lstStyle/>
+          <a:p>
+            <a:pPr algn="ctr"/>
+          </a:p>
+        </p:txBody>
+      </p:sp>
+      <p:sp>
+        <p:nvSpPr>
+          <p:cNvPr id="10" name="TextBox 9"/>
+          <p:cNvSpPr txBox="1"/>
+          <p:nvPr/>
+        </p:nvSpPr>
+        <p:spPr>
+          <a:xfrm>
+            <a:off x="612648" y="1517904"/>
+            <a:ext cx="5221224" cy="347472"/>
+          </a:xfrm>
+          <a:prstGeom prst="rect">
+            <a:avLst/>
+          </a:prstGeom>
+          <a:noFill/>
+        </p:spPr>
+        <p:txBody>
+          <a:bodyPr wrap="square" anchor="t"/>
+          <a:lstStyle/>
+          <a:p>
+            <a:pPr algn="l"/>
+            <a:r>
+              <a:rPr sz="1800" b="1">
+                <a:solidFill>
+                  <a:srgbClr val="0B2545"/>
+                </a:solidFill>
+                <a:latin typeface="Calibri"/>
+              </a:rPr>
+              <a:t>What this training is for</a:t>
+            </a:r>
+          </a:p>
+        </p:txBody>
+      </p:sp>
+      <p:sp>
+        <p:nvSpPr>
+          <p:cNvPr id="11" name="TextBox 10"/>
+          <p:cNvSpPr txBox="1"/>
+          <p:nvPr/>
+        </p:nvSpPr>
+        <p:spPr>
+          <a:xfrm>
+            <a:off x="612648" y="1847088"/>
+            <a:ext cx="5221224" cy="4334256"/>
+          </a:xfrm>
+          <a:prstGeom prst="rect">
+            <a:avLst/>
+          </a:prstGeom>
+          <a:noFill/>
+        </p:spPr>
+        <p:txBody>
+          <a:bodyPr wrap="square" anchor="t"/>
+          <a:lstStyle/>
+          <a:p>
+            <a:pPr algn="l"/>
+            <a:r>
+              <a:rPr sz="1500" b="0">
+                <a:solidFill>
+                  <a:srgbClr val="1C2B3A"/>
+                </a:solidFill>
+                <a:latin typeface="Calibri"/>
+              </a:rPr>
+              <a:t>Understand what AI can (and cannot) do on our daily files.
+See how a tool like LEON helps on specs, matrices and TDRs, without replacing the engineer.
+Give the team a common language: where AI saves time, and where a person must still decide.
+Bring examples back from our real mechatronics documents.</a:t>
+            </a:r>
+          </a:p>
+        </p:txBody>
+      </p:sp>
+      <p:sp>
+        <p:nvSpPr>
+          <p:cNvPr id="12" name="Rounded Rectangle 11"/>
+          <p:cNvSpPr/>
+          <p:nvPr/>
+        </p:nvSpPr>
+        <p:spPr>
+          <a:xfrm>
+            <a:off x="6172200" y="1389888"/>
+            <a:ext cx="5532120" cy="4919472"/>
+          </a:xfrm>
+          <a:prstGeom prst="roundRect">
+            <a:avLst>
+              <a:gd name="adj" fmla="val 8000"/>
+            </a:avLst>
+          </a:prstGeom>
+          <a:solidFill>
+            <a:srgbClr val="FFFFFF"/>
+          </a:solidFill>
+          <a:ln w="12700">
+            <a:solidFill>
+              <a:srgbClr val="DDE3EC"/>
+            </a:solidFill>
+          </a:ln>
+        </p:spPr>
+        <p:style>
+          <a:lnRef idx="1">
+            <a:schemeClr val="accent1"/>
+          </a:lnRef>
+          <a:fillRef idx="3">
+            <a:schemeClr val="accent1"/>
+          </a:fillRef>
+          <a:effectRef idx="2">
+            <a:schemeClr val="accent1"/>
+          </a:effectRef>
+          <a:fontRef idx="minor">
+            <a:schemeClr val="lt1"/>
+          </a:fontRef>
+        </p:style>
+        <p:txBody>
+          <a:bodyPr rtlCol="0" anchor="ctr"/>
+          <a:lstStyle/>
+          <a:p>
+            <a:pPr algn="ctr"/>
+          </a:p>
+        </p:txBody>
+      </p:sp>
+      <p:sp>
+        <p:nvSpPr>
+          <p:cNvPr id="13" name="Rectangle 12"/>
+          <p:cNvSpPr/>
+          <p:nvPr/>
+        </p:nvSpPr>
+        <p:spPr>
+          <a:xfrm>
+            <a:off x="6172200" y="1389888"/>
+            <a:ext cx="73152" cy="4919472"/>
+          </a:xfrm>
+          <a:prstGeom prst="rect">
+            <a:avLst/>
+          </a:prstGeom>
+          <a:solidFill>
+            <a:srgbClr val="157347"/>
+          </a:solidFill>
+          <a:ln>
+            <a:noFill/>
+          </a:ln>
+        </p:spPr>
+        <p:style>
+          <a:lnRef idx="1">
+            <a:schemeClr val="accent1"/>
+          </a:lnRef>
+          <a:fillRef idx="3">
+            <a:schemeClr val="accent1"/>
+          </a:fillRef>
+          <a:effectRef idx="2">
+            <a:schemeClr val="accent1"/>
+          </a:effectRef>
+          <a:fontRef idx="minor">
+            <a:schemeClr val="lt1"/>
+          </a:fontRef>
+        </p:style>
+        <p:txBody>
+          <a:bodyPr rtlCol="0" anchor="ctr"/>
+          <a:lstStyle/>
+          <a:p>
+            <a:pPr algn="ctr"/>
+          </a:p>
+        </p:txBody>
+      </p:sp>
+      <p:sp>
+        <p:nvSpPr>
+          <p:cNvPr id="14" name="TextBox 13"/>
+          <p:cNvSpPr txBox="1"/>
+          <p:nvPr/>
+        </p:nvSpPr>
+        <p:spPr>
+          <a:xfrm>
+            <a:off x="6373368" y="1517904"/>
+            <a:ext cx="5221224" cy="347472"/>
+          </a:xfrm>
+          <a:prstGeom prst="rect">
+            <a:avLst/>
+          </a:prstGeom>
+          <a:noFill/>
+        </p:spPr>
+        <p:txBody>
+          <a:bodyPr wrap="square" anchor="t"/>
+          <a:lstStyle/>
+          <a:p>
+            <a:pPr algn="l"/>
+            <a:r>
+              <a:rPr sz="1800" b="1">
+                <a:solidFill>
+                  <a:srgbClr val="0B2545"/>
+                </a:solidFill>
+                <a:latin typeface="Calibri"/>
+              </a:rPr>
+              <a:t>How the team can use it afterwards</a:t>
+            </a:r>
+          </a:p>
+        </p:txBody>
+      </p:sp>
+      <p:sp>
+        <p:nvSpPr>
+          <p:cNvPr id="15" name="TextBox 14"/>
+          <p:cNvSpPr txBox="1"/>
+          <p:nvPr/>
+        </p:nvSpPr>
+        <p:spPr>
+          <a:xfrm>
+            <a:off x="6373368" y="1847088"/>
+            <a:ext cx="5221224" cy="4334256"/>
+          </a:xfrm>
+          <a:prstGeom prst="rect">
+            <a:avLst/>
+          </a:prstGeom>
+          <a:noFill/>
+        </p:spPr>
+        <p:txBody>
+          <a:bodyPr wrap="square" anchor="t"/>
+          <a:lstStyle/>
+          <a:p>
+            <a:pPr algn="l"/>
+            <a:r>
+              <a:rPr sz="1500" b="0">
+                <a:solidFill>
+                  <a:srgbClr val="1C2B3A"/>
+                </a:solidFill>
+                <a:latin typeface="Calibri"/>
+              </a:rPr>
+              <a:t>Faster first reading of a supplier file before a TDR meeting.
+Fewer missed “OK” that are not really OK.
+Side-by-side comparison of several suppliers on the technique.
+A habit: AI proposes, the mechatronics engineer validates.
+I can share a short recap with the team after the training.</a:t>
+            </a:r>
+          </a:p>
+        </p:txBody>
+      </p:sp>
+      <p:sp>
+        <p:nvSpPr>
+          <p:cNvPr id="16" name="Rectangle 15"/>
+          <p:cNvSpPr/>
+          <p:nvPr/>
+        </p:nvSpPr>
+        <p:spPr>
+          <a:xfrm>
+            <a:off x="0" y="6601968"/>
+            <a:ext cx="12191695" cy="256032"/>
+          </a:xfrm>
+          <a:prstGeom prst="rect">
+            <a:avLst/>
+          </a:prstGeom>
+          <a:solidFill>
+            <a:srgbClr val="0B2545"/>
+          </a:solidFill>
+          <a:ln>
+            <a:noFill/>
+          </a:ln>
+        </p:spPr>
+        <p:style>
+          <a:lnRef idx="1">
+            <a:schemeClr val="accent1"/>
+          </a:lnRef>
+          <a:fillRef idx="3">
+            <a:schemeClr val="accent1"/>
+          </a:fillRef>
+          <a:effectRef idx="2">
+            <a:schemeClr val="accent1"/>
+          </a:effectRef>
+          <a:fontRef idx="minor">
+            <a:schemeClr val="lt1"/>
+          </a:fontRef>
+        </p:style>
+        <p:txBody>
+          <a:bodyPr rtlCol="0" anchor="ctr"/>
+          <a:lstStyle/>
+          <a:p>
+            <a:pPr algn="ctr"/>
+          </a:p>
+        </p:txBody>
+      </p:sp>
+      <p:sp>
+        <p:nvSpPr>
+          <p:cNvPr id="17" name="TextBox 16"/>
+          <p:cNvSpPr txBox="1"/>
+          <p:nvPr/>
+        </p:nvSpPr>
+        <p:spPr>
+          <a:xfrm>
+            <a:off x="365760" y="6601968"/>
+            <a:ext cx="9144000" cy="256032"/>
+          </a:xfrm>
+          <a:prstGeom prst="rect">
+            <a:avLst/>
+          </a:prstGeom>
+          <a:noFill/>
+        </p:spPr>
+        <p:txBody>
+          <a:bodyPr wrap="square" anchor="ctr"/>
+          <a:lstStyle/>
+          <a:p>
+            <a:pPr algn="l"/>
+            <a:r>
+              <a:rPr sz="1100" b="0">
+                <a:solidFill>
+                  <a:srgbClr val="A9BCD4"/>
+                </a:solidFill>
+                <a:latin typeface="Calibri"/>
+              </a:rPr>
+              <a:t>Khadija Benhamida  ·  Mechatronics Engineering  ·  First meeting</a:t>
+            </a:r>
+          </a:p>
+        </p:txBody>
+      </p:sp>
+      <p:sp>
+        <p:nvSpPr>
+          <p:cNvPr id="18" name="TextBox 17"/>
+          <p:cNvSpPr txBox="1"/>
+          <p:nvPr/>
+        </p:nvSpPr>
+        <p:spPr>
+          <a:xfrm>
+            <a:off x="10424160" y="6601968"/>
+            <a:ext cx="1371600" cy="256032"/>
+          </a:xfrm>
+          <a:prstGeom prst="rect">
+            <a:avLst/>
+          </a:prstGeom>
+          <a:noFill/>
+        </p:spPr>
+        <p:txBody>
+          <a:bodyPr wrap="square" anchor="ctr"/>
+          <a:lstStyle/>
+          <a:p>
+            <a:pPr algn="r"/>
+            <a:r>
+              <a:rPr sz="1100" b="0">
+                <a:solidFill>
+                  <a:srgbClr val="FFFFFF"/>
+                </a:solidFill>
+                <a:latin typeface="Calibri"/>
+              </a:rPr>
+              <a:t>12  /  13</a:t>
+            </a:r>
+          </a:p>
+        </p:txBody>
+      </p:sp>
+    </p:spTree>
+  </p:cSld>
+  <p:clrMapOvr>
+    <a:masterClrMapping/>
+  </p:clrMapOvr>
+</p:sld>
+</file>
+
+<file path=ppt/slides/slide13.xml><?xml version="1.0" encoding="utf-8"?>
+<p:sld xmlns:a="http://schemas.openxmlformats.org/drawingml/2006/main" xmlns:p="http://schemas.openxmlformats.org/presentationml/2006/main" xmlns:r="http://schemas.openxmlformats.org/officeDocument/2006/relationships">
+  <p:cSld>
+    <p:spTree>
+      <p:nvGrpSpPr>
+        <p:cNvPr id="1" name=""/>
+        <p:cNvGrpSpPr/>
+        <p:nvPr/>
+      </p:nvGrpSpPr>
+      <p:grpSpPr/>
+      <p:sp>
+        <p:nvSpPr>
+          <p:cNvPr id="2" name="Rectangle 1"/>
+          <p:cNvSpPr/>
+          <p:nvPr/>
+        </p:nvSpPr>
+        <p:spPr>
+          <a:xfrm>
+            <a:off x="0" y="0"/>
+            <a:ext cx="12191695" cy="6858000"/>
+          </a:xfrm>
+          <a:prstGeom prst="rect">
+            <a:avLst/>
+          </a:prstGeom>
+          <a:solidFill>
+            <a:srgbClr val="F4F7FB"/>
+          </a:solidFill>
+          <a:ln>
+            <a:noFill/>
+          </a:ln>
+        </p:spPr>
+        <p:style>
+          <a:lnRef idx="1">
+            <a:schemeClr val="accent1"/>
+          </a:lnRef>
+          <a:fillRef idx="3">
+            <a:schemeClr val="accent1"/>
+          </a:fillRef>
+          <a:effectRef idx="2">
+            <a:schemeClr val="accent1"/>
+          </a:effectRef>
+          <a:fontRef idx="minor">
+            <a:schemeClr val="lt1"/>
+          </a:fontRef>
+        </p:style>
+        <p:txBody>
+          <a:bodyPr rtlCol="0" anchor="ctr"/>
+          <a:lstStyle/>
+          <a:p>
+            <a:pPr algn="ctr"/>
+          </a:p>
+        </p:txBody>
+      </p:sp>
+      <p:sp>
+        <p:nvSpPr>
+          <p:cNvPr id="3" name="Rectangle 2"/>
+          <p:cNvSpPr/>
+          <p:nvPr/>
+        </p:nvSpPr>
+        <p:spPr>
+          <a:xfrm>
+            <a:off x="0" y="0"/>
+            <a:ext cx="12191695" cy="1078992"/>
+          </a:xfrm>
+          <a:prstGeom prst="rect">
+            <a:avLst/>
+          </a:prstGeom>
+          <a:solidFill>
+            <a:srgbClr val="0B2545"/>
+          </a:solidFill>
+          <a:ln>
+            <a:noFill/>
+          </a:ln>
+        </p:spPr>
+        <p:style>
+          <a:lnRef idx="1">
+            <a:schemeClr val="accent1"/>
+          </a:lnRef>
+          <a:fillRef idx="3">
+            <a:schemeClr val="accent1"/>
+          </a:fillRef>
+          <a:effectRef idx="2">
+            <a:schemeClr val="accent1"/>
+          </a:effectRef>
+          <a:fontRef idx="minor">
+            <a:schemeClr val="lt1"/>
+          </a:fontRef>
+        </p:style>
+        <p:txBody>
+          <a:bodyPr rtlCol="0" anchor="ctr"/>
+          <a:lstStyle/>
+          <a:p>
+            <a:pPr algn="ctr"/>
+          </a:p>
+        </p:txBody>
+      </p:sp>
+      <p:sp>
+        <p:nvSpPr>
+          <p:cNvPr id="4" name="Rectangle 3"/>
+          <p:cNvSpPr/>
+          <p:nvPr/>
+        </p:nvSpPr>
+        <p:spPr>
+          <a:xfrm>
+            <a:off x="0" y="1078992"/>
+            <a:ext cx="12191695" cy="54864"/>
+          </a:xfrm>
+          <a:prstGeom prst="rect">
+            <a:avLst/>
+          </a:prstGeom>
+          <a:solidFill>
+            <a:srgbClr val="1D4ED8"/>
+          </a:solidFill>
+          <a:ln>
+            <a:noFill/>
+          </a:ln>
+        </p:spPr>
+        <p:style>
+          <a:lnRef idx="1">
+            <a:schemeClr val="accent1"/>
+          </a:lnRef>
+          <a:fillRef idx="3">
+            <a:schemeClr val="accent1"/>
+          </a:fillRef>
+          <a:effectRef idx="2">
+            <a:schemeClr val="accent1"/>
+          </a:effectRef>
+          <a:fontRef idx="minor">
+            <a:schemeClr val="lt1"/>
+          </a:fontRef>
+        </p:style>
+        <p:txBody>
+          <a:bodyPr rtlCol="0" anchor="ctr"/>
+          <a:lstStyle/>
+          <a:p>
+            <a:pPr algn="ctr"/>
+          </a:p>
+        </p:txBody>
+      </p:sp>
+      <p:sp>
+        <p:nvSpPr>
+          <p:cNvPr id="5" name="TextBox 4"/>
+          <p:cNvSpPr txBox="1"/>
+          <p:nvPr/>
+        </p:nvSpPr>
+        <p:spPr>
+          <a:xfrm>
+            <a:off x="457200" y="91440"/>
+            <a:ext cx="11247120" cy="256032"/>
+          </a:xfrm>
+          <a:prstGeom prst="rect">
+            <a:avLst/>
+          </a:prstGeom>
+          <a:noFill/>
+        </p:spPr>
+        <p:txBody>
+          <a:bodyPr wrap="square" anchor="t"/>
+          <a:lstStyle/>
+          <a:p>
+            <a:pPr algn="l"/>
+            <a:r>
+              <a:rPr sz="1100" b="1">
+                <a:solidFill>
+                  <a:srgbClr val="A9BCD4"/>
+                </a:solidFill>
+                <a:latin typeface="Calibri"/>
+              </a:rPr>
+              <a:t>TO CONFIRM WITH YOU</a:t>
+            </a:r>
+          </a:p>
+        </p:txBody>
+      </p:sp>
+      <p:sp>
+        <p:nvSpPr>
+          <p:cNvPr id="6" name="TextBox 5"/>
+          <p:cNvSpPr txBox="1"/>
+          <p:nvPr/>
+        </p:nvSpPr>
+        <p:spPr>
+          <a:xfrm>
+            <a:off x="457200" y="310896"/>
+            <a:ext cx="11247120" cy="384048"/>
+          </a:xfrm>
+          <a:prstGeom prst="rect">
+            <a:avLst/>
+          </a:prstGeom>
+          <a:noFill/>
+        </p:spPr>
+        <p:txBody>
+          <a:bodyPr wrap="square" anchor="t"/>
+          <a:lstStyle/>
+          <a:p>
+            <a:pPr algn="l"/>
+            <a:r>
+              <a:rPr sz="2600" b="1">
+                <a:solidFill>
+                  <a:srgbClr val="FFFFFF"/>
+                </a:solidFill>
+                <a:latin typeface="Calibri"/>
+              </a:rPr>
+              <a:t>Two points of organisation I would like to validate.</a:t>
+            </a:r>
+          </a:p>
+        </p:txBody>
+      </p:sp>
+      <p:sp>
+        <p:nvSpPr>
+          <p:cNvPr id="7" name="TextBox 6"/>
+          <p:cNvSpPr txBox="1"/>
+          <p:nvPr/>
+        </p:nvSpPr>
+        <p:spPr>
+          <a:xfrm>
+            <a:off x="457200" y="713232"/>
+            <a:ext cx="11247120" cy="292608"/>
+          </a:xfrm>
+          <a:prstGeom prst="rect">
+            <a:avLst/>
+          </a:prstGeom>
+          <a:noFill/>
+        </p:spPr>
+        <p:txBody>
+          <a:bodyPr wrap="square" anchor="t"/>
+          <a:lstStyle/>
+          <a:p>
+            <a:pPr algn="l"/>
+            <a:r>
+              <a:rPr sz="1300" b="0">
+                <a:solidFill>
+                  <a:srgbClr val="C5D4E8"/>
+                </a:solidFill>
+                <a:latin typeface="Calibri"/>
+              </a:rPr>
+              <a:t>Télétravail and the first school period.</a:t>
+            </a:r>
+          </a:p>
+        </p:txBody>
+      </p:sp>
+      <p:sp>
+        <p:nvSpPr>
+          <p:cNvPr id="8" name="Rounded Rectangle 7"/>
+          <p:cNvSpPr/>
+          <p:nvPr/>
+        </p:nvSpPr>
+        <p:spPr>
+          <a:xfrm>
+            <a:off x="411480" y="1389888"/>
+            <a:ext cx="5532120" cy="3383280"/>
+          </a:xfrm>
+          <a:prstGeom prst="roundRect">
+            <a:avLst>
+              <a:gd name="adj" fmla="val 8000"/>
+            </a:avLst>
+          </a:prstGeom>
+          <a:solidFill>
+            <a:srgbClr val="FFFFFF"/>
+          </a:solidFill>
+          <a:ln w="12700">
+            <a:solidFill>
+              <a:srgbClr val="DDE3EC"/>
+            </a:solidFill>
+          </a:ln>
+        </p:spPr>
+        <p:style>
+          <a:lnRef idx="1">
+            <a:schemeClr val="accent1"/>
+          </a:lnRef>
+          <a:fillRef idx="3">
+            <a:schemeClr val="accent1"/>
+          </a:fillRef>
+          <a:effectRef idx="2">
+            <a:schemeClr val="accent1"/>
+          </a:effectRef>
+          <a:fontRef idx="minor">
+            <a:schemeClr val="lt1"/>
+          </a:fontRef>
+        </p:style>
+        <p:txBody>
+          <a:bodyPr rtlCol="0" anchor="ctr"/>
+          <a:lstStyle/>
+          <a:p>
+            <a:pPr algn="ctr"/>
+          </a:p>
+        </p:txBody>
+      </p:sp>
+      <p:sp>
+        <p:nvSpPr>
+          <p:cNvPr id="9" name="Rectangle 8"/>
+          <p:cNvSpPr/>
+          <p:nvPr/>
+        </p:nvSpPr>
+        <p:spPr>
+          <a:xfrm>
+            <a:off x="411480" y="1389888"/>
+            <a:ext cx="5532120" cy="475488"/>
+          </a:xfrm>
+          <a:prstGeom prst="rect">
+            <a:avLst/>
+          </a:prstGeom>
+          <a:solidFill>
+            <a:srgbClr val="1D4ED8"/>
+          </a:solidFill>
+          <a:ln>
+            <a:noFill/>
+          </a:ln>
+        </p:spPr>
+        <p:style>
+          <a:lnRef idx="1">
+            <a:schemeClr val="accent1"/>
+          </a:lnRef>
+          <a:fillRef idx="3">
+            <a:schemeClr val="accent1"/>
+          </a:fillRef>
+          <a:effectRef idx="2">
+            <a:schemeClr val="accent1"/>
+          </a:effectRef>
+          <a:fontRef idx="minor">
+            <a:schemeClr val="lt1"/>
+          </a:fontRef>
+        </p:style>
+        <p:txBody>
+          <a:bodyPr rtlCol="0" anchor="ctr"/>
+          <a:lstStyle/>
+          <a:p>
+            <a:pPr algn="ctr"/>
+          </a:p>
+        </p:txBody>
+      </p:sp>
+      <p:sp>
+        <p:nvSpPr>
+          <p:cNvPr id="10" name="TextBox 9"/>
+          <p:cNvSpPr txBox="1"/>
+          <p:nvPr/>
+        </p:nvSpPr>
+        <p:spPr>
+          <a:xfrm>
+            <a:off x="594360" y="1444752"/>
+            <a:ext cx="5212080" cy="384048"/>
+          </a:xfrm>
+          <a:prstGeom prst="rect">
+            <a:avLst/>
+          </a:prstGeom>
+          <a:noFill/>
+        </p:spPr>
+        <p:txBody>
+          <a:bodyPr wrap="square" anchor="ctr"/>
+          <a:lstStyle/>
+          <a:p>
+            <a:pPr algn="l"/>
+            <a:r>
+              <a:rPr sz="1800" b="1">
+                <a:solidFill>
+                  <a:srgbClr val="FFFFFF"/>
+                </a:solidFill>
+                <a:latin typeface="Calibri"/>
+              </a:rPr>
+              <a:t>Télétravail (TT)</a:t>
+            </a:r>
+          </a:p>
+        </p:txBody>
+      </p:sp>
+      <p:sp>
+        <p:nvSpPr>
+          <p:cNvPr id="11" name="TextBox 10"/>
+          <p:cNvSpPr txBox="1"/>
+          <p:nvPr/>
+        </p:nvSpPr>
+        <p:spPr>
+          <a:xfrm>
+            <a:off x="640080" y="2057400"/>
+            <a:ext cx="5074920" cy="2468880"/>
+          </a:xfrm>
+          <a:prstGeom prst="rect">
+            <a:avLst/>
+          </a:prstGeom>
+          <a:noFill/>
+        </p:spPr>
+        <p:txBody>
+          <a:bodyPr wrap="square" anchor="t"/>
+          <a:lstStyle/>
+          <a:p>
+            <a:pPr algn="l"/>
+            <a:r>
+              <a:rPr sz="1600" b="0">
+                <a:solidFill>
+                  <a:srgbClr val="1C2B3A"/>
+                </a:solidFill>
+                <a:latin typeface="Calibri"/>
+              </a:rPr>
+              <a:t>I take two days of télétravail per week:
+• Wednesday
+• Friday
+I would like to confirm this rhythm with you, so the team knows when I am on site and when I am in TT.</a:t>
+            </a:r>
+          </a:p>
+        </p:txBody>
+      </p:sp>
+      <p:sp>
+        <p:nvSpPr>
+          <p:cNvPr id="12" name="Rounded Rectangle 11"/>
+          <p:cNvSpPr/>
+          <p:nvPr/>
+        </p:nvSpPr>
+        <p:spPr>
+          <a:xfrm>
+            <a:off x="6172200" y="1389888"/>
+            <a:ext cx="5532120" cy="3383280"/>
+          </a:xfrm>
+          <a:prstGeom prst="roundRect">
+            <a:avLst>
+              <a:gd name="adj" fmla="val 8000"/>
+            </a:avLst>
+          </a:prstGeom>
+          <a:solidFill>
+            <a:srgbClr val="FFFFFF"/>
+          </a:solidFill>
+          <a:ln w="12700">
+            <a:solidFill>
+              <a:srgbClr val="DDE3EC"/>
+            </a:solidFill>
+          </a:ln>
+        </p:spPr>
+        <p:style>
+          <a:lnRef idx="1">
+            <a:schemeClr val="accent1"/>
+          </a:lnRef>
+          <a:fillRef idx="3">
+            <a:schemeClr val="accent1"/>
+          </a:fillRef>
+          <a:effectRef idx="2">
+            <a:schemeClr val="accent1"/>
+          </a:effectRef>
+          <a:fontRef idx="minor">
+            <a:schemeClr val="lt1"/>
+          </a:fontRef>
+        </p:style>
+        <p:txBody>
+          <a:bodyPr rtlCol="0" anchor="ctr"/>
+          <a:lstStyle/>
+          <a:p>
+            <a:pPr algn="ctr"/>
+          </a:p>
+        </p:txBody>
+      </p:sp>
+      <p:sp>
+        <p:nvSpPr>
+          <p:cNvPr id="13" name="Rectangle 12"/>
+          <p:cNvSpPr/>
+          <p:nvPr/>
+        </p:nvSpPr>
+        <p:spPr>
+          <a:xfrm>
+            <a:off x="6172200" y="1389888"/>
+            <a:ext cx="5532120" cy="475488"/>
+          </a:xfrm>
+          <a:prstGeom prst="rect">
+            <a:avLst/>
+          </a:prstGeom>
+          <a:solidFill>
+            <a:srgbClr val="9A5B00"/>
+          </a:solidFill>
+          <a:ln>
+            <a:noFill/>
+          </a:ln>
+        </p:spPr>
+        <p:style>
+          <a:lnRef idx="1">
+            <a:schemeClr val="accent1"/>
+          </a:lnRef>
+          <a:fillRef idx="3">
+            <a:schemeClr val="accent1"/>
+          </a:fillRef>
+          <a:effectRef idx="2">
+            <a:schemeClr val="accent1"/>
+          </a:effectRef>
+          <a:fontRef idx="minor">
+            <a:schemeClr val="lt1"/>
+          </a:fontRef>
+        </p:style>
+        <p:txBody>
+          <a:bodyPr rtlCol="0" anchor="ctr"/>
+          <a:lstStyle/>
+          <a:p>
+            <a:pPr algn="ctr"/>
+          </a:p>
+        </p:txBody>
+      </p:sp>
+      <p:sp>
+        <p:nvSpPr>
+          <p:cNvPr id="14" name="TextBox 13"/>
+          <p:cNvSpPr txBox="1"/>
+          <p:nvPr/>
+        </p:nvSpPr>
+        <p:spPr>
+          <a:xfrm>
+            <a:off x="6355080" y="1444752"/>
+            <a:ext cx="5212080" cy="384048"/>
+          </a:xfrm>
+          <a:prstGeom prst="rect">
+            <a:avLst/>
+          </a:prstGeom>
+          <a:noFill/>
+        </p:spPr>
+        <p:txBody>
+          <a:bodyPr wrap="square" anchor="ctr"/>
+          <a:lstStyle/>
+          <a:p>
+            <a:pPr algn="l"/>
+            <a:r>
+              <a:rPr sz="1800" b="1">
+                <a:solidFill>
+                  <a:srgbClr val="FFFFFF"/>
+                </a:solidFill>
+                <a:latin typeface="Calibri"/>
+              </a:rPr>
+              <a:t>Période école</a:t>
+            </a:r>
+          </a:p>
+        </p:txBody>
+      </p:sp>
+      <p:sp>
+        <p:nvSpPr>
+          <p:cNvPr id="15" name="TextBox 14"/>
+          <p:cNvSpPr txBox="1"/>
+          <p:nvPr/>
+        </p:nvSpPr>
+        <p:spPr>
+          <a:xfrm>
+            <a:off x="6400800" y="2057400"/>
+            <a:ext cx="5074920" cy="2468880"/>
+          </a:xfrm>
+          <a:prstGeom prst="rect">
+            <a:avLst/>
+          </a:prstGeom>
+          <a:noFill/>
+        </p:spPr>
+        <p:txBody>
+          <a:bodyPr wrap="square" anchor="t"/>
+          <a:lstStyle/>
+          <a:p>
+            <a:pPr algn="l"/>
+            <a:r>
+              <a:rPr sz="1600" b="0">
+                <a:solidFill>
+                  <a:srgbClr val="1C2B3A"/>
+                </a:solidFill>
+                <a:latin typeface="Calibri"/>
+              </a:rPr>
+              <a:t>Over the next two weeks I will be in my first school period (période école).
+I will not be on site during that time.
+After that, I am back on the usual company / TT rhythm.</a:t>
+            </a:r>
+          </a:p>
+        </p:txBody>
+      </p:sp>
+      <p:sp>
+        <p:nvSpPr>
+          <p:cNvPr id="16" name="Rounded Rectangle 15"/>
+          <p:cNvSpPr/>
+          <p:nvPr/>
+        </p:nvSpPr>
+        <p:spPr>
+          <a:xfrm>
+            <a:off x="411480" y="4956048"/>
+            <a:ext cx="11292840" cy="1389888"/>
+          </a:xfrm>
+          <a:prstGeom prst="roundRect">
+            <a:avLst>
+              <a:gd name="adj" fmla="val 8000"/>
+            </a:avLst>
+          </a:prstGeom>
+          <a:solidFill>
+            <a:srgbClr val="FBF3E6"/>
+          </a:solidFill>
+          <a:ln w="12700">
+            <a:solidFill>
+              <a:srgbClr val="9A5B00"/>
+            </a:solidFill>
+          </a:ln>
+        </p:spPr>
+        <p:style>
+          <a:lnRef idx="1">
+            <a:schemeClr val="accent1"/>
+          </a:lnRef>
+          <a:fillRef idx="3">
+            <a:schemeClr val="accent1"/>
+          </a:fillRef>
+          <a:effectRef idx="2">
+            <a:schemeClr val="accent1"/>
+          </a:effectRef>
+          <a:fontRef idx="minor">
+            <a:schemeClr val="lt1"/>
+          </a:fontRef>
+        </p:style>
+        <p:txBody>
+          <a:bodyPr rtlCol="0" anchor="ctr"/>
+          <a:lstStyle/>
+          <a:p>
+            <a:pPr algn="ctr"/>
+          </a:p>
+        </p:txBody>
+      </p:sp>
+      <p:sp>
+        <p:nvSpPr>
+          <p:cNvPr id="17" name="TextBox 16"/>
+          <p:cNvSpPr txBox="1"/>
+          <p:nvPr/>
+        </p:nvSpPr>
+        <p:spPr>
+          <a:xfrm>
+            <a:off x="640080" y="5102352"/>
+            <a:ext cx="10881360" cy="329184"/>
+          </a:xfrm>
+          <a:prstGeom prst="rect">
+            <a:avLst/>
+          </a:prstGeom>
+          <a:noFill/>
+        </p:spPr>
+        <p:txBody>
+          <a:bodyPr wrap="square" anchor="t"/>
+          <a:lstStyle/>
+          <a:p>
+            <a:pPr algn="l"/>
+            <a:r>
+              <a:rPr sz="1600" b="1">
+                <a:solidFill>
+                  <a:srgbClr val="9A5B00"/>
+                </a:solidFill>
+                <a:latin typeface="Calibri"/>
+              </a:rPr>
+              <a:t>Thank you — I am happy to adjust if needed</a:t>
+            </a:r>
+          </a:p>
+        </p:txBody>
+      </p:sp>
+      <p:sp>
+        <p:nvSpPr>
+          <p:cNvPr id="18" name="TextBox 17"/>
+          <p:cNvSpPr txBox="1"/>
+          <p:nvPr/>
+        </p:nvSpPr>
+        <p:spPr>
+          <a:xfrm>
+            <a:off x="640080" y="5486400"/>
+            <a:ext cx="10881360" cy="658368"/>
+          </a:xfrm>
+          <a:prstGeom prst="rect">
+            <a:avLst/>
+          </a:prstGeom>
+          <a:noFill/>
+        </p:spPr>
+        <p:txBody>
+          <a:bodyPr wrap="square" anchor="t"/>
+          <a:lstStyle/>
+          <a:p>
+            <a:pPr algn="l"/>
+            <a:r>
+              <a:rPr sz="1500" b="0">
+                <a:solidFill>
+                  <a:srgbClr val="1C2B3A"/>
+                </a:solidFill>
+                <a:latin typeface="Calibri"/>
+              </a:rPr>
+              <a:t>These two points are for your validation. If the TT days or the school period need a different organisation, I can adapt.</a:t>
+            </a:r>
+          </a:p>
+        </p:txBody>
+      </p:sp>
+      <p:sp>
+        <p:nvSpPr>
+          <p:cNvPr id="19" name="Rectangle 18"/>
+          <p:cNvSpPr/>
+          <p:nvPr/>
+        </p:nvSpPr>
+        <p:spPr>
+          <a:xfrm>
+            <a:off x="0" y="6601968"/>
+            <a:ext cx="12191695" cy="256032"/>
+          </a:xfrm>
+          <a:prstGeom prst="rect">
+            <a:avLst/>
+          </a:prstGeom>
+          <a:solidFill>
+            <a:srgbClr val="0B2545"/>
+          </a:solidFill>
+          <a:ln>
+            <a:noFill/>
+          </a:ln>
+        </p:spPr>
+        <p:style>
+          <a:lnRef idx="1">
+            <a:schemeClr val="accent1"/>
+          </a:lnRef>
+          <a:fillRef idx="3">
+            <a:schemeClr val="accent1"/>
+          </a:fillRef>
+          <a:effectRef idx="2">
+            <a:schemeClr val="accent1"/>
+          </a:effectRef>
+          <a:fontRef idx="minor">
+            <a:schemeClr val="lt1"/>
+          </a:fontRef>
+        </p:style>
+        <p:txBody>
+          <a:bodyPr rtlCol="0" anchor="ctr"/>
+          <a:lstStyle/>
+          <a:p>
+            <a:pPr algn="ctr"/>
+          </a:p>
+        </p:txBody>
+      </p:sp>
+      <p:sp>
+        <p:nvSpPr>
+          <p:cNvPr id="20" name="TextBox 19"/>
+          <p:cNvSpPr txBox="1"/>
+          <p:nvPr/>
+        </p:nvSpPr>
+        <p:spPr>
+          <a:xfrm>
+            <a:off x="365760" y="6601968"/>
+            <a:ext cx="9144000" cy="256032"/>
+          </a:xfrm>
+          <a:prstGeom prst="rect">
+            <a:avLst/>
+          </a:prstGeom>
+          <a:noFill/>
+        </p:spPr>
+        <p:txBody>
+          <a:bodyPr wrap="square" anchor="ctr"/>
+          <a:lstStyle/>
+          <a:p>
+            <a:pPr algn="l"/>
+            <a:r>
+              <a:rPr sz="1100" b="0">
+                <a:solidFill>
+                  <a:srgbClr val="A9BCD4"/>
+                </a:solidFill>
+                <a:latin typeface="Calibri"/>
+              </a:rPr>
+              <a:t>Khadija Benhamida  ·  Mechatronics Engineering  ·  First meeting</a:t>
+            </a:r>
+          </a:p>
+        </p:txBody>
+      </p:sp>
+      <p:sp>
+        <p:nvSpPr>
+          <p:cNvPr id="21" name="TextBox 20"/>
+          <p:cNvSpPr txBox="1"/>
+          <p:nvPr/>
+        </p:nvSpPr>
+        <p:spPr>
+          <a:xfrm>
+            <a:off x="10424160" y="6601968"/>
+            <a:ext cx="1371600" cy="256032"/>
+          </a:xfrm>
+          <a:prstGeom prst="rect">
+            <a:avLst/>
+          </a:prstGeom>
+          <a:noFill/>
+        </p:spPr>
+        <p:txBody>
+          <a:bodyPr wrap="square" anchor="ctr"/>
+          <a:lstStyle/>
+          <a:p>
+            <a:pPr algn="r"/>
+            <a:r>
+              <a:rPr sz="1100" b="0">
+                <a:solidFill>
+                  <a:srgbClr val="FFFFFF"/>
+                </a:solidFill>
+                <a:latin typeface="Calibri"/>
+              </a:rPr>
+              <a:t>13  /  13</a:t>
             </a:r>
           </a:p>
         </p:txBody>
@@ -5005,7 +8772,7 @@
                 </a:solidFill>
                 <a:latin typeface="Calibri"/>
               </a:rPr>
-              <a:t>THE VOCABULARY</a:t>
+              <a:t>AGENDA</a:t>
             </a:r>
           </a:p>
         </p:txBody>
@@ -5038,7 +8805,7 @@
                 </a:solidFill>
                 <a:latin typeface="Calibri"/>
               </a:rPr>
-              <a:t>Three documents. One part. They must agree.</a:t>
+              <a:t>Points I would like to cover with you.</a:t>
             </a:r>
           </a:p>
         </p:txBody>
@@ -5071,7 +8838,7 @@
                 </a:solidFill>
                 <a:latin typeface="Calibri"/>
               </a:rPr>
-              <a:t>Think of buying a car screen, a camera or a controller from a supplier.</a:t>
+              <a:t>A short status of the work, then the practical points to confirm.</a:t>
             </a:r>
           </a:p>
         </p:txBody>
@@ -5084,8 +8851,8 @@
         </p:nvSpPr>
         <p:spPr>
           <a:xfrm>
-            <a:off x="411480" y="1417320"/>
-            <a:ext cx="3611880" cy="4892040"/>
+            <a:off x="457200" y="1353312"/>
+            <a:ext cx="11247120" cy="804672"/>
           </a:xfrm>
           <a:prstGeom prst="roundRect">
             <a:avLst>
@@ -5131,8 +8898,8 @@
         </p:nvSpPr>
         <p:spPr>
           <a:xfrm>
-            <a:off x="411480" y="1417320"/>
-            <a:ext cx="3611880" cy="109728"/>
+            <a:off x="457200" y="1353312"/>
+            <a:ext cx="804672" cy="804672"/>
           </a:xfrm>
           <a:prstGeom prst="rect">
             <a:avLst/>
@@ -5174,8 +8941,8 @@
         </p:nvSpPr>
         <p:spPr>
           <a:xfrm>
-            <a:off x="612648" y="1664208"/>
-            <a:ext cx="3200400" cy="457200"/>
+            <a:off x="457200" y="1353312"/>
+            <a:ext cx="804672" cy="804672"/>
           </a:xfrm>
           <a:prstGeom prst="rect">
             <a:avLst/>
@@ -5183,18 +8950,18 @@
           <a:noFill/>
         </p:spPr>
         <p:txBody>
-          <a:bodyPr wrap="square" anchor="t"/>
-          <a:lstStyle/>
-          <a:p>
-            <a:pPr algn="l"/>
-            <a:r>
-              <a:rPr sz="2000" b="1">
-                <a:solidFill>
-                  <a:srgbClr val="0B2545"/>
+          <a:bodyPr wrap="square" anchor="ctr"/>
+          <a:lstStyle/>
+          <a:p>
+            <a:pPr algn="ctr"/>
+            <a:r>
+              <a:rPr sz="1600" b="1">
+                <a:solidFill>
+                  <a:srgbClr val="FFFFFF"/>
                 </a:solidFill>
                 <a:latin typeface="Calibri"/>
               </a:rPr>
-              <a:t>1.  The SPEC</a:t>
+              <a:t>01</a:t>
             </a:r>
           </a:p>
         </p:txBody>
@@ -5207,8 +8974,8 @@
         </p:nvSpPr>
         <p:spPr>
           <a:xfrm>
-            <a:off x="612648" y="2194560"/>
-            <a:ext cx="3200400" cy="3840480"/>
+            <a:off x="1417320" y="1426464"/>
+            <a:ext cx="9966960" cy="310896"/>
           </a:xfrm>
           <a:prstGeom prst="rect">
             <a:avLst/>
@@ -5221,29 +8988,60 @@
           <a:p>
             <a:pPr algn="l"/>
             <a:r>
-              <a:rPr sz="1400" b="0">
-                <a:solidFill>
-                  <a:srgbClr val="1C2B3A"/>
+              <a:rPr sz="1600" b="1">
+                <a:solidFill>
+                  <a:srgbClr val="0B2545"/>
                 </a:solidFill>
                 <a:latin typeface="Calibri"/>
               </a:rPr>
-              <a:t>What Stellantis writes.
-Our technical specification: every requirement the part must meet (brightness, temperature, safety, interfaces…).
-This is our “shopping list” — and the contract of what “good” means.</a:t>
-            </a:r>
-          </a:p>
-        </p:txBody>
-      </p:sp>
-      <p:sp>
-        <p:nvSpPr>
-          <p:cNvPr id="12" name="Rounded Rectangle 11"/>
+              <a:t>The work on LEON</a:t>
+            </a:r>
+          </a:p>
+        </p:txBody>
+      </p:sp>
+      <p:sp>
+        <p:nvSpPr>
+          <p:cNvPr id="12" name="TextBox 11"/>
+          <p:cNvSpPr txBox="1"/>
+          <p:nvPr/>
+        </p:nvSpPr>
+        <p:spPr>
+          <a:xfrm>
+            <a:off x="1417320" y="1737360"/>
+            <a:ext cx="9966960" cy="347472"/>
+          </a:xfrm>
+          <a:prstGeom prst="rect">
+            <a:avLst/>
+          </a:prstGeom>
+          <a:noFill/>
+        </p:spPr>
+        <p:txBody>
+          <a:bodyPr wrap="square" anchor="t"/>
+          <a:lstStyle/>
+          <a:p>
+            <a:pPr algn="l"/>
+            <a:r>
+              <a:rPr sz="1300" b="0">
+                <a:solidFill>
+                  <a:srgbClr val="1C2B3A"/>
+                </a:solidFill>
+                <a:latin typeface="Calibri"/>
+              </a:rPr>
+              <a:t>The three documents we review, the tool I am building, and what it already does.</a:t>
+            </a:r>
+          </a:p>
+        </p:txBody>
+      </p:sp>
+      <p:sp>
+        <p:nvSpPr>
+          <p:cNvPr id="13" name="Rounded Rectangle 12"/>
           <p:cNvSpPr/>
           <p:nvPr/>
         </p:nvSpPr>
         <p:spPr>
           <a:xfrm>
-            <a:off x="4206240" y="1417320"/>
-            <a:ext cx="3611880" cy="4892040"/>
+            <a:off x="457200" y="2212848"/>
+            <a:ext cx="11247120" cy="804672"/>
           </a:xfrm>
           <a:prstGeom prst="roundRect">
             <a:avLst>
@@ -5283,20 +9081,20 @@
       </p:sp>
       <p:sp>
         <p:nvSpPr>
-          <p:cNvPr id="13" name="Rectangle 12"/>
+          <p:cNvPr id="14" name="Rectangle 13"/>
           <p:cNvSpPr/>
           <p:nvPr/>
         </p:nvSpPr>
         <p:spPr>
           <a:xfrm>
-            <a:off x="4206240" y="1417320"/>
-            <a:ext cx="3611880" cy="109728"/>
+            <a:off x="457200" y="2212848"/>
+            <a:ext cx="804672" cy="804672"/>
           </a:xfrm>
           <a:prstGeom prst="rect">
             <a:avLst/>
           </a:prstGeom>
           <a:solidFill>
-            <a:srgbClr val="9A5B00"/>
+            <a:srgbClr val="1D4ED8"/>
           </a:solidFill>
           <a:ln>
             <a:noFill/>
@@ -5326,14 +9124,14 @@
       </p:sp>
       <p:sp>
         <p:nvSpPr>
-          <p:cNvPr id="14" name="TextBox 13"/>
+          <p:cNvPr id="15" name="TextBox 14"/>
           <p:cNvSpPr txBox="1"/>
           <p:nvPr/>
         </p:nvSpPr>
         <p:spPr>
           <a:xfrm>
-            <a:off x="4407408" y="1664208"/>
-            <a:ext cx="3200400" cy="457200"/>
+            <a:off x="457200" y="2212848"/>
+            <a:ext cx="804672" cy="804672"/>
           </a:xfrm>
           <a:prstGeom prst="rect">
             <a:avLst/>
@@ -5341,32 +9139,32 @@
           <a:noFill/>
         </p:spPr>
         <p:txBody>
-          <a:bodyPr wrap="square" anchor="t"/>
-          <a:lstStyle/>
-          <a:p>
-            <a:pPr algn="l"/>
-            <a:r>
-              <a:rPr sz="2000" b="1">
-                <a:solidFill>
-                  <a:srgbClr val="0B2545"/>
+          <a:bodyPr wrap="square" anchor="ctr"/>
+          <a:lstStyle/>
+          <a:p>
+            <a:pPr algn="ctr"/>
+            <a:r>
+              <a:rPr sz="1600" b="1">
+                <a:solidFill>
+                  <a:srgbClr val="FFFFFF"/>
                 </a:solidFill>
                 <a:latin typeface="Calibri"/>
               </a:rPr>
-              <a:t>2.  The MATRIX</a:t>
-            </a:r>
-          </a:p>
-        </p:txBody>
-      </p:sp>
-      <p:sp>
-        <p:nvSpPr>
-          <p:cNvPr id="15" name="TextBox 14"/>
+              <a:t>02</a:t>
+            </a:r>
+          </a:p>
+        </p:txBody>
+      </p:sp>
+      <p:sp>
+        <p:nvSpPr>
+          <p:cNvPr id="16" name="TextBox 15"/>
           <p:cNvSpPr txBox="1"/>
           <p:nvPr/>
         </p:nvSpPr>
         <p:spPr>
           <a:xfrm>
-            <a:off x="4407408" y="2194560"/>
-            <a:ext cx="3200400" cy="3840480"/>
+            <a:off x="1417320" y="2286000"/>
+            <a:ext cx="9966960" cy="310896"/>
           </a:xfrm>
           <a:prstGeom prst="rect">
             <a:avLst/>
@@ -5379,29 +9177,60 @@
           <a:p>
             <a:pPr algn="l"/>
             <a:r>
-              <a:rPr sz="1400" b="0">
-                <a:solidFill>
-                  <a:srgbClr val="1C2B3A"/>
+              <a:rPr sz="1600" b="1">
+                <a:solidFill>
+                  <a:srgbClr val="0B2545"/>
                 </a:solidFill>
                 <a:latin typeface="Calibri"/>
               </a:rPr>
-              <a:t>What the supplier ticks.
-A big Excel / ODS spreadsheet. One row per requirement. The supplier marks OK, NOK (not OK) or NA (not applicable), plus a comment.
-This is their official yes / no.</a:t>
-            </a:r>
-          </a:p>
-        </p:txBody>
-      </p:sp>
-      <p:sp>
-        <p:nvSpPr>
-          <p:cNvPr id="16" name="Rounded Rectangle 15"/>
+              <a:t>What I have delivered so far</a:t>
+            </a:r>
+          </a:p>
+        </p:txBody>
+      </p:sp>
+      <p:sp>
+        <p:nvSpPr>
+          <p:cNvPr id="17" name="TextBox 16"/>
+          <p:cNvSpPr txBox="1"/>
+          <p:nvPr/>
+        </p:nvSpPr>
+        <p:spPr>
+          <a:xfrm>
+            <a:off x="1417320" y="2596896"/>
+            <a:ext cx="9966960" cy="347472"/>
+          </a:xfrm>
+          <a:prstGeom prst="rect">
+            <a:avLst/>
+          </a:prstGeom>
+          <a:noFill/>
+        </p:spPr>
+        <p:txBody>
+          <a:bodyPr wrap="square" anchor="t"/>
+          <a:lstStyle/>
+          <a:p>
+            <a:pPr algn="l"/>
+            <a:r>
+              <a:rPr sz="1300" b="0">
+                <a:solidFill>
+                  <a:srgbClr val="1C2B3A"/>
+                </a:solidFill>
+                <a:latin typeface="Calibri"/>
+              </a:rPr>
+              <a:t>Spec validation, conformity matrix, Matrix ↔ TDR, TDR benchmark, version follow-up.</a:t>
+            </a:r>
+          </a:p>
+        </p:txBody>
+      </p:sp>
+      <p:sp>
+        <p:nvSpPr>
+          <p:cNvPr id="18" name="Rounded Rectangle 17"/>
           <p:cNvSpPr/>
           <p:nvPr/>
         </p:nvSpPr>
         <p:spPr>
           <a:xfrm>
-            <a:off x="8001000" y="1417320"/>
-            <a:ext cx="3611880" cy="4892040"/>
+            <a:off x="457200" y="3072384"/>
+            <a:ext cx="11247120" cy="804672"/>
           </a:xfrm>
           <a:prstGeom prst="roundRect">
             <a:avLst>
@@ -5441,20 +9270,20 @@
       </p:sp>
       <p:sp>
         <p:nvSpPr>
-          <p:cNvPr id="17" name="Rectangle 16"/>
+          <p:cNvPr id="19" name="Rectangle 18"/>
           <p:cNvSpPr/>
           <p:nvPr/>
         </p:nvSpPr>
         <p:spPr>
           <a:xfrm>
-            <a:off x="8001000" y="1417320"/>
-            <a:ext cx="3611880" cy="109728"/>
+            <a:off x="457200" y="3072384"/>
+            <a:ext cx="804672" cy="804672"/>
           </a:xfrm>
           <a:prstGeom prst="rect">
             <a:avLst/>
           </a:prstGeom>
           <a:solidFill>
-            <a:srgbClr val="157347"/>
+            <a:srgbClr val="1D4ED8"/>
           </a:solidFill>
           <a:ln>
             <a:noFill/>
@@ -5484,14 +9313,14 @@
       </p:sp>
       <p:sp>
         <p:nvSpPr>
-          <p:cNvPr id="18" name="TextBox 17"/>
+          <p:cNvPr id="20" name="TextBox 19"/>
           <p:cNvSpPr txBox="1"/>
           <p:nvPr/>
         </p:nvSpPr>
         <p:spPr>
           <a:xfrm>
-            <a:off x="8202168" y="1664208"/>
-            <a:ext cx="3200400" cy="457200"/>
+            <a:off x="457200" y="3072384"/>
+            <a:ext cx="804672" cy="804672"/>
           </a:xfrm>
           <a:prstGeom prst="rect">
             <a:avLst/>
@@ -5499,32 +9328,32 @@
           <a:noFill/>
         </p:spPr>
         <p:txBody>
-          <a:bodyPr wrap="square" anchor="t"/>
-          <a:lstStyle/>
-          <a:p>
-            <a:pPr algn="l"/>
-            <a:r>
-              <a:rPr sz="2000" b="1">
-                <a:solidFill>
-                  <a:srgbClr val="0B2545"/>
+          <a:bodyPr wrap="square" anchor="ctr"/>
+          <a:lstStyle/>
+          <a:p>
+            <a:pPr algn="ctr"/>
+            <a:r>
+              <a:rPr sz="1600" b="1">
+                <a:solidFill>
+                  <a:srgbClr val="FFFFFF"/>
                 </a:solidFill>
                 <a:latin typeface="Calibri"/>
               </a:rPr>
-              <a:t>3.  The TDR</a:t>
-            </a:r>
-          </a:p>
-        </p:txBody>
-      </p:sp>
-      <p:sp>
-        <p:nvSpPr>
-          <p:cNvPr id="19" name="TextBox 18"/>
+              <a:t>03</a:t>
+            </a:r>
+          </a:p>
+        </p:txBody>
+      </p:sp>
+      <p:sp>
+        <p:nvSpPr>
+          <p:cNvPr id="21" name="TextBox 20"/>
           <p:cNvSpPr txBox="1"/>
           <p:nvPr/>
         </p:nvSpPr>
         <p:spPr>
           <a:xfrm>
-            <a:off x="8202168" y="2194560"/>
-            <a:ext cx="3200400" cy="3840480"/>
+            <a:off x="1417320" y="3145536"/>
+            <a:ext cx="9966960" cy="310896"/>
           </a:xfrm>
           <a:prstGeom prst="rect">
             <a:avLst/>
@@ -5537,22 +9366,620 @@
           <a:p>
             <a:pPr algn="l"/>
             <a:r>
-              <a:rPr sz="1400" b="0">
-                <a:solidFill>
-                  <a:srgbClr val="1C2B3A"/>
+              <a:rPr sz="1600" b="1">
+                <a:solidFill>
+                  <a:srgbClr val="0B2545"/>
                 </a:solidFill>
                 <a:latin typeface="Calibri"/>
               </a:rPr>
-              <a:t>What the supplier shows as proof.
-TDR = Technical Design Review / technical dossier. Usually a PowerPoint or PDF: drawings, numbers, tests, architecture.
-This is their “here is how we actually do it”.</a:t>
-            </a:r>
-          </a:p>
-        </p:txBody>
-      </p:sp>
-      <p:sp>
-        <p:nvSpPr>
-          <p:cNvPr id="20" name="Rectangle 19"/>
+              <a:t>Collaboration</a:t>
+            </a:r>
+          </a:p>
+        </p:txBody>
+      </p:sp>
+      <p:sp>
+        <p:nvSpPr>
+          <p:cNvPr id="22" name="TextBox 21"/>
+          <p:cNvSpPr txBox="1"/>
+          <p:nvPr/>
+        </p:nvSpPr>
+        <p:spPr>
+          <a:xfrm>
+            <a:off x="1417320" y="3456432"/>
+            <a:ext cx="9966960" cy="347472"/>
+          </a:xfrm>
+          <a:prstGeom prst="rect">
+            <a:avLst/>
+          </a:prstGeom>
+          <a:noFill/>
+        </p:spPr>
+        <p:txBody>
+          <a:bodyPr wrap="square" anchor="t"/>
+          <a:lstStyle/>
+          <a:p>
+            <a:pPr algn="l"/>
+            <a:r>
+              <a:rPr sz="1300" b="0">
+                <a:solidFill>
+                  <a:srgbClr val="1C2B3A"/>
+                </a:solidFill>
+                <a:latin typeface="Calibri"/>
+              </a:rPr>
+              <a:t>Imane El Brouji and Patrick Garcia — mechatronics expertise, ideas and explanations.</a:t>
+            </a:r>
+          </a:p>
+        </p:txBody>
+      </p:sp>
+      <p:sp>
+        <p:nvSpPr>
+          <p:cNvPr id="23" name="Rounded Rectangle 22"/>
+          <p:cNvSpPr/>
+          <p:nvPr/>
+        </p:nvSpPr>
+        <p:spPr>
+          <a:xfrm>
+            <a:off x="457200" y="3931920"/>
+            <a:ext cx="11247120" cy="804672"/>
+          </a:xfrm>
+          <a:prstGeom prst="roundRect">
+            <a:avLst>
+              <a:gd name="adj" fmla="val 8000"/>
+            </a:avLst>
+          </a:prstGeom>
+          <a:solidFill>
+            <a:srgbClr val="FFFFFF"/>
+          </a:solidFill>
+          <a:ln w="12700">
+            <a:solidFill>
+              <a:srgbClr val="DDE3EC"/>
+            </a:solidFill>
+          </a:ln>
+        </p:spPr>
+        <p:style>
+          <a:lnRef idx="1">
+            <a:schemeClr val="accent1"/>
+          </a:lnRef>
+          <a:fillRef idx="3">
+            <a:schemeClr val="accent1"/>
+          </a:fillRef>
+          <a:effectRef idx="2">
+            <a:schemeClr val="accent1"/>
+          </a:effectRef>
+          <a:fontRef idx="minor">
+            <a:schemeClr val="lt1"/>
+          </a:fontRef>
+        </p:style>
+        <p:txBody>
+          <a:bodyPr rtlCol="0" anchor="ctr"/>
+          <a:lstStyle/>
+          <a:p>
+            <a:pPr algn="ctr"/>
+          </a:p>
+        </p:txBody>
+      </p:sp>
+      <p:sp>
+        <p:nvSpPr>
+          <p:cNvPr id="24" name="Rectangle 23"/>
+          <p:cNvSpPr/>
+          <p:nvPr/>
+        </p:nvSpPr>
+        <p:spPr>
+          <a:xfrm>
+            <a:off x="457200" y="3931920"/>
+            <a:ext cx="804672" cy="804672"/>
+          </a:xfrm>
+          <a:prstGeom prst="rect">
+            <a:avLst/>
+          </a:prstGeom>
+          <a:solidFill>
+            <a:srgbClr val="1D4ED8"/>
+          </a:solidFill>
+          <a:ln>
+            <a:noFill/>
+          </a:ln>
+        </p:spPr>
+        <p:style>
+          <a:lnRef idx="1">
+            <a:schemeClr val="accent1"/>
+          </a:lnRef>
+          <a:fillRef idx="3">
+            <a:schemeClr val="accent1"/>
+          </a:fillRef>
+          <a:effectRef idx="2">
+            <a:schemeClr val="accent1"/>
+          </a:effectRef>
+          <a:fontRef idx="minor">
+            <a:schemeClr val="lt1"/>
+          </a:fontRef>
+        </p:style>
+        <p:txBody>
+          <a:bodyPr rtlCol="0" anchor="ctr"/>
+          <a:lstStyle/>
+          <a:p>
+            <a:pPr algn="ctr"/>
+          </a:p>
+        </p:txBody>
+      </p:sp>
+      <p:sp>
+        <p:nvSpPr>
+          <p:cNvPr id="25" name="TextBox 24"/>
+          <p:cNvSpPr txBox="1"/>
+          <p:nvPr/>
+        </p:nvSpPr>
+        <p:spPr>
+          <a:xfrm>
+            <a:off x="457200" y="3931920"/>
+            <a:ext cx="804672" cy="804672"/>
+          </a:xfrm>
+          <a:prstGeom prst="rect">
+            <a:avLst/>
+          </a:prstGeom>
+          <a:noFill/>
+        </p:spPr>
+        <p:txBody>
+          <a:bodyPr wrap="square" anchor="ctr"/>
+          <a:lstStyle/>
+          <a:p>
+            <a:pPr algn="ctr"/>
+            <a:r>
+              <a:rPr sz="1600" b="1">
+                <a:solidFill>
+                  <a:srgbClr val="FFFFFF"/>
+                </a:solidFill>
+                <a:latin typeface="Calibri"/>
+              </a:rPr>
+              <a:t>04</a:t>
+            </a:r>
+          </a:p>
+        </p:txBody>
+      </p:sp>
+      <p:sp>
+        <p:nvSpPr>
+          <p:cNvPr id="26" name="TextBox 25"/>
+          <p:cNvSpPr txBox="1"/>
+          <p:nvPr/>
+        </p:nvSpPr>
+        <p:spPr>
+          <a:xfrm>
+            <a:off x="1417320" y="4005072"/>
+            <a:ext cx="9966960" cy="310896"/>
+          </a:xfrm>
+          <a:prstGeom prst="rect">
+            <a:avLst/>
+          </a:prstGeom>
+          <a:noFill/>
+        </p:spPr>
+        <p:txBody>
+          <a:bodyPr wrap="square" anchor="t"/>
+          <a:lstStyle/>
+          <a:p>
+            <a:pPr algn="l"/>
+            <a:r>
+              <a:rPr sz="1600" b="1">
+                <a:solidFill>
+                  <a:srgbClr val="0B2545"/>
+                </a:solidFill>
+                <a:latin typeface="Calibri"/>
+              </a:rPr>
+              <a:t>Status and next step</a:t>
+            </a:r>
+          </a:p>
+        </p:txBody>
+      </p:sp>
+      <p:sp>
+        <p:nvSpPr>
+          <p:cNvPr id="27" name="TextBox 26"/>
+          <p:cNvSpPr txBox="1"/>
+          <p:nvPr/>
+        </p:nvSpPr>
+        <p:spPr>
+          <a:xfrm>
+            <a:off x="1417320" y="4315968"/>
+            <a:ext cx="9966960" cy="347472"/>
+          </a:xfrm>
+          <a:prstGeom prst="rect">
+            <a:avLst/>
+          </a:prstGeom>
+          <a:noFill/>
+        </p:spPr>
+        <p:txBody>
+          <a:bodyPr wrap="square" anchor="t"/>
+          <a:lstStyle/>
+          <a:p>
+            <a:pPr algn="l"/>
+            <a:r>
+              <a:rPr sz="1300" b="0">
+                <a:solidFill>
+                  <a:srgbClr val="1C2B3A"/>
+                </a:solidFill>
+                <a:latin typeface="Calibri"/>
+              </a:rPr>
+              <a:t>Work in progress. Once this task is finished, we start the deployment for the team.</a:t>
+            </a:r>
+          </a:p>
+        </p:txBody>
+      </p:sp>
+      <p:sp>
+        <p:nvSpPr>
+          <p:cNvPr id="28" name="Rounded Rectangle 27"/>
+          <p:cNvSpPr/>
+          <p:nvPr/>
+        </p:nvSpPr>
+        <p:spPr>
+          <a:xfrm>
+            <a:off x="457200" y="4791456"/>
+            <a:ext cx="11247120" cy="804672"/>
+          </a:xfrm>
+          <a:prstGeom prst="roundRect">
+            <a:avLst>
+              <a:gd name="adj" fmla="val 8000"/>
+            </a:avLst>
+          </a:prstGeom>
+          <a:solidFill>
+            <a:srgbClr val="FFFFFF"/>
+          </a:solidFill>
+          <a:ln w="12700">
+            <a:solidFill>
+              <a:srgbClr val="DDE3EC"/>
+            </a:solidFill>
+          </a:ln>
+        </p:spPr>
+        <p:style>
+          <a:lnRef idx="1">
+            <a:schemeClr val="accent1"/>
+          </a:lnRef>
+          <a:fillRef idx="3">
+            <a:schemeClr val="accent1"/>
+          </a:fillRef>
+          <a:effectRef idx="2">
+            <a:schemeClr val="accent1"/>
+          </a:effectRef>
+          <a:fontRef idx="minor">
+            <a:schemeClr val="lt1"/>
+          </a:fontRef>
+        </p:style>
+        <p:txBody>
+          <a:bodyPr rtlCol="0" anchor="ctr"/>
+          <a:lstStyle/>
+          <a:p>
+            <a:pPr algn="ctr"/>
+          </a:p>
+        </p:txBody>
+      </p:sp>
+      <p:sp>
+        <p:nvSpPr>
+          <p:cNvPr id="29" name="Rectangle 28"/>
+          <p:cNvSpPr/>
+          <p:nvPr/>
+        </p:nvSpPr>
+        <p:spPr>
+          <a:xfrm>
+            <a:off x="457200" y="4791456"/>
+            <a:ext cx="804672" cy="804672"/>
+          </a:xfrm>
+          <a:prstGeom prst="rect">
+            <a:avLst/>
+          </a:prstGeom>
+          <a:solidFill>
+            <a:srgbClr val="1D4ED8"/>
+          </a:solidFill>
+          <a:ln>
+            <a:noFill/>
+          </a:ln>
+        </p:spPr>
+        <p:style>
+          <a:lnRef idx="1">
+            <a:schemeClr val="accent1"/>
+          </a:lnRef>
+          <a:fillRef idx="3">
+            <a:schemeClr val="accent1"/>
+          </a:fillRef>
+          <a:effectRef idx="2">
+            <a:schemeClr val="accent1"/>
+          </a:effectRef>
+          <a:fontRef idx="minor">
+            <a:schemeClr val="lt1"/>
+          </a:fontRef>
+        </p:style>
+        <p:txBody>
+          <a:bodyPr rtlCol="0" anchor="ctr"/>
+          <a:lstStyle/>
+          <a:p>
+            <a:pPr algn="ctr"/>
+          </a:p>
+        </p:txBody>
+      </p:sp>
+      <p:sp>
+        <p:nvSpPr>
+          <p:cNvPr id="30" name="TextBox 29"/>
+          <p:cNvSpPr txBox="1"/>
+          <p:nvPr/>
+        </p:nvSpPr>
+        <p:spPr>
+          <a:xfrm>
+            <a:off x="457200" y="4791456"/>
+            <a:ext cx="804672" cy="804672"/>
+          </a:xfrm>
+          <a:prstGeom prst="rect">
+            <a:avLst/>
+          </a:prstGeom>
+          <a:noFill/>
+        </p:spPr>
+        <p:txBody>
+          <a:bodyPr wrap="square" anchor="ctr"/>
+          <a:lstStyle/>
+          <a:p>
+            <a:pPr algn="ctr"/>
+            <a:r>
+              <a:rPr sz="1600" b="1">
+                <a:solidFill>
+                  <a:srgbClr val="FFFFFF"/>
+                </a:solidFill>
+                <a:latin typeface="Calibri"/>
+              </a:rPr>
+              <a:t>05</a:t>
+            </a:r>
+          </a:p>
+        </p:txBody>
+      </p:sp>
+      <p:sp>
+        <p:nvSpPr>
+          <p:cNvPr id="31" name="TextBox 30"/>
+          <p:cNvSpPr txBox="1"/>
+          <p:nvPr/>
+        </p:nvSpPr>
+        <p:spPr>
+          <a:xfrm>
+            <a:off x="1417320" y="4864608"/>
+            <a:ext cx="9966960" cy="310896"/>
+          </a:xfrm>
+          <a:prstGeom prst="rect">
+            <a:avLst/>
+          </a:prstGeom>
+          <a:noFill/>
+        </p:spPr>
+        <p:txBody>
+          <a:bodyPr wrap="square" anchor="t"/>
+          <a:lstStyle/>
+          <a:p>
+            <a:pPr algn="l"/>
+            <a:r>
+              <a:rPr sz="1600" b="1">
+                <a:solidFill>
+                  <a:srgbClr val="0B2545"/>
+                </a:solidFill>
+                <a:latin typeface="Calibri"/>
+              </a:rPr>
+              <a:t>AI training for Mechatronics</a:t>
+            </a:r>
+          </a:p>
+        </p:txBody>
+      </p:sp>
+      <p:sp>
+        <p:nvSpPr>
+          <p:cNvPr id="32" name="TextBox 31"/>
+          <p:cNvSpPr txBox="1"/>
+          <p:nvPr/>
+        </p:nvSpPr>
+        <p:spPr>
+          <a:xfrm>
+            <a:off x="1417320" y="5175504"/>
+            <a:ext cx="9966960" cy="347472"/>
+          </a:xfrm>
+          <a:prstGeom prst="rect">
+            <a:avLst/>
+          </a:prstGeom>
+          <a:noFill/>
+        </p:spPr>
+        <p:txBody>
+          <a:bodyPr wrap="square" anchor="t"/>
+          <a:lstStyle/>
+          <a:p>
+            <a:pPr algn="l"/>
+            <a:r>
+              <a:rPr sz="1300" b="0">
+                <a:solidFill>
+                  <a:srgbClr val="1C2B3A"/>
+                </a:solidFill>
+                <a:latin typeface="Calibri"/>
+              </a:rPr>
+              <a:t>The training we will have, and how the team can use it in daily work.</a:t>
+            </a:r>
+          </a:p>
+        </p:txBody>
+      </p:sp>
+      <p:sp>
+        <p:nvSpPr>
+          <p:cNvPr id="33" name="Rounded Rectangle 32"/>
+          <p:cNvSpPr/>
+          <p:nvPr/>
+        </p:nvSpPr>
+        <p:spPr>
+          <a:xfrm>
+            <a:off x="457200" y="5650992"/>
+            <a:ext cx="11247120" cy="804672"/>
+          </a:xfrm>
+          <a:prstGeom prst="roundRect">
+            <a:avLst>
+              <a:gd name="adj" fmla="val 8000"/>
+            </a:avLst>
+          </a:prstGeom>
+          <a:solidFill>
+            <a:srgbClr val="FFFFFF"/>
+          </a:solidFill>
+          <a:ln w="12700">
+            <a:solidFill>
+              <a:srgbClr val="DDE3EC"/>
+            </a:solidFill>
+          </a:ln>
+        </p:spPr>
+        <p:style>
+          <a:lnRef idx="1">
+            <a:schemeClr val="accent1"/>
+          </a:lnRef>
+          <a:fillRef idx="3">
+            <a:schemeClr val="accent1"/>
+          </a:fillRef>
+          <a:effectRef idx="2">
+            <a:schemeClr val="accent1"/>
+          </a:effectRef>
+          <a:fontRef idx="minor">
+            <a:schemeClr val="lt1"/>
+          </a:fontRef>
+        </p:style>
+        <p:txBody>
+          <a:bodyPr rtlCol="0" anchor="ctr"/>
+          <a:lstStyle/>
+          <a:p>
+            <a:pPr algn="ctr"/>
+          </a:p>
+        </p:txBody>
+      </p:sp>
+      <p:sp>
+        <p:nvSpPr>
+          <p:cNvPr id="34" name="Rectangle 33"/>
+          <p:cNvSpPr/>
+          <p:nvPr/>
+        </p:nvSpPr>
+        <p:spPr>
+          <a:xfrm>
+            <a:off x="457200" y="5650992"/>
+            <a:ext cx="804672" cy="804672"/>
+          </a:xfrm>
+          <a:prstGeom prst="rect">
+            <a:avLst/>
+          </a:prstGeom>
+          <a:solidFill>
+            <a:srgbClr val="1D4ED8"/>
+          </a:solidFill>
+          <a:ln>
+            <a:noFill/>
+          </a:ln>
+        </p:spPr>
+        <p:style>
+          <a:lnRef idx="1">
+            <a:schemeClr val="accent1"/>
+          </a:lnRef>
+          <a:fillRef idx="3">
+            <a:schemeClr val="accent1"/>
+          </a:fillRef>
+          <a:effectRef idx="2">
+            <a:schemeClr val="accent1"/>
+          </a:effectRef>
+          <a:fontRef idx="minor">
+            <a:schemeClr val="lt1"/>
+          </a:fontRef>
+        </p:style>
+        <p:txBody>
+          <a:bodyPr rtlCol="0" anchor="ctr"/>
+          <a:lstStyle/>
+          <a:p>
+            <a:pPr algn="ctr"/>
+          </a:p>
+        </p:txBody>
+      </p:sp>
+      <p:sp>
+        <p:nvSpPr>
+          <p:cNvPr id="35" name="TextBox 34"/>
+          <p:cNvSpPr txBox="1"/>
+          <p:nvPr/>
+        </p:nvSpPr>
+        <p:spPr>
+          <a:xfrm>
+            <a:off x="457200" y="5650992"/>
+            <a:ext cx="804672" cy="804672"/>
+          </a:xfrm>
+          <a:prstGeom prst="rect">
+            <a:avLst/>
+          </a:prstGeom>
+          <a:noFill/>
+        </p:spPr>
+        <p:txBody>
+          <a:bodyPr wrap="square" anchor="ctr"/>
+          <a:lstStyle/>
+          <a:p>
+            <a:pPr algn="ctr"/>
+            <a:r>
+              <a:rPr sz="1600" b="1">
+                <a:solidFill>
+                  <a:srgbClr val="FFFFFF"/>
+                </a:solidFill>
+                <a:latin typeface="Calibri"/>
+              </a:rPr>
+              <a:t>06</a:t>
+            </a:r>
+          </a:p>
+        </p:txBody>
+      </p:sp>
+      <p:sp>
+        <p:nvSpPr>
+          <p:cNvPr id="36" name="TextBox 35"/>
+          <p:cNvSpPr txBox="1"/>
+          <p:nvPr/>
+        </p:nvSpPr>
+        <p:spPr>
+          <a:xfrm>
+            <a:off x="1417320" y="5724144"/>
+            <a:ext cx="9966960" cy="310896"/>
+          </a:xfrm>
+          <a:prstGeom prst="rect">
+            <a:avLst/>
+          </a:prstGeom>
+          <a:noFill/>
+        </p:spPr>
+        <p:txBody>
+          <a:bodyPr wrap="square" anchor="t"/>
+          <a:lstStyle/>
+          <a:p>
+            <a:pPr algn="l"/>
+            <a:r>
+              <a:rPr sz="1600" b="1">
+                <a:solidFill>
+                  <a:srgbClr val="0B2545"/>
+                </a:solidFill>
+                <a:latin typeface="Calibri"/>
+              </a:rPr>
+              <a:t>Availability to confirm</a:t>
+            </a:r>
+          </a:p>
+        </p:txBody>
+      </p:sp>
+      <p:sp>
+        <p:nvSpPr>
+          <p:cNvPr id="37" name="TextBox 36"/>
+          <p:cNvSpPr txBox="1"/>
+          <p:nvPr/>
+        </p:nvSpPr>
+        <p:spPr>
+          <a:xfrm>
+            <a:off x="1417320" y="6035040"/>
+            <a:ext cx="9966960" cy="347472"/>
+          </a:xfrm>
+          <a:prstGeom prst="rect">
+            <a:avLst/>
+          </a:prstGeom>
+          <a:noFill/>
+        </p:spPr>
+        <p:txBody>
+          <a:bodyPr wrap="square" anchor="t"/>
+          <a:lstStyle/>
+          <a:p>
+            <a:pPr algn="l"/>
+            <a:r>
+              <a:rPr sz="1300" b="0">
+                <a:solidFill>
+                  <a:srgbClr val="1C2B3A"/>
+                </a:solidFill>
+                <a:latin typeface="Calibri"/>
+              </a:rPr>
+              <a:t>Télétravail Wednesday and Friday, and the first school period over the next two weeks.</a:t>
+            </a:r>
+          </a:p>
+        </p:txBody>
+      </p:sp>
+      <p:sp>
+        <p:nvSpPr>
+          <p:cNvPr id="38" name="Rectangle 37"/>
           <p:cNvSpPr/>
           <p:nvPr/>
         </p:nvSpPr>
@@ -5595,7 +10022,7 @@
       </p:sp>
       <p:sp>
         <p:nvSpPr>
-          <p:cNvPr id="21" name="TextBox 20"/>
+          <p:cNvPr id="39" name="TextBox 38"/>
           <p:cNvSpPr txBox="1"/>
           <p:nvPr/>
         </p:nvSpPr>
@@ -5621,14 +10048,14 @@
                 </a:solidFill>
                 <a:latin typeface="Calibri"/>
               </a:rPr>
-              <a:t>LEON  ·  Quality Analysis  ·  Internal briefing for non-specialists</a:t>
-            </a:r>
-          </a:p>
-        </p:txBody>
-      </p:sp>
-      <p:sp>
-        <p:nvSpPr>
-          <p:cNvPr id="22" name="TextBox 21"/>
+              <a:t>Khadija Benhamida  ·  Mechatronics Engineering  ·  First meeting</a:t>
+            </a:r>
+          </a:p>
+        </p:txBody>
+      </p:sp>
+      <p:sp>
+        <p:nvSpPr>
+          <p:cNvPr id="40" name="TextBox 39"/>
           <p:cNvSpPr txBox="1"/>
           <p:nvPr/>
         </p:nvSpPr>
@@ -5654,7 +10081,7 @@
                 </a:solidFill>
                 <a:latin typeface="Calibri"/>
               </a:rPr>
-              <a:t>2  /  8</a:t>
+              <a:t>2  /  13</a:t>
             </a:r>
           </a:p>
         </p:txBody>
@@ -5834,7 +10261,7 @@
                 </a:solidFill>
                 <a:latin typeface="Calibri"/>
               </a:rPr>
-              <a:t>WHY WE BUILT THIS</a:t>
+              <a:t>THE VOCABULARY</a:t>
             </a:r>
           </a:p>
         </p:txBody>
@@ -5867,7 +10294,7 @@
                 </a:solidFill>
                 <a:latin typeface="Calibri"/>
               </a:rPr>
-              <a:t>Today this is still a lot of reading by hand.</a:t>
+              <a:t>Three documents. One part. They must agree.</a:t>
             </a:r>
           </a:p>
         </p:txBody>
@@ -5900,7 +10327,7 @@
                 </a:solidFill>
                 <a:latin typeface="Calibri"/>
               </a:rPr>
-              <a:t>A “green” Excel can hide a problem. A nice slide can hide a wrong number.</a:t>
+              <a:t>Think of buying a car screen, a camera or a controller from a supplier.</a:t>
             </a:r>
           </a:p>
         </p:txBody>
@@ -5913,8 +10340,8 @@
         </p:nvSpPr>
         <p:spPr>
           <a:xfrm>
-            <a:off x="457200" y="1371600"/>
-            <a:ext cx="11247120" cy="1115568"/>
+            <a:off x="411480" y="1417320"/>
+            <a:ext cx="3611880" cy="4892040"/>
           </a:xfrm>
           <a:prstGeom prst="roundRect">
             <a:avLst>
@@ -5960,14 +10387,14 @@
         </p:nvSpPr>
         <p:spPr>
           <a:xfrm>
-            <a:off x="457200" y="1371600"/>
-            <a:ext cx="109728" cy="1115568"/>
+            <a:off x="411480" y="1417320"/>
+            <a:ext cx="3611880" cy="109728"/>
           </a:xfrm>
           <a:prstGeom prst="rect">
             <a:avLst/>
           </a:prstGeom>
           <a:solidFill>
-            <a:srgbClr val="B3261E"/>
+            <a:srgbClr val="1D4ED8"/>
           </a:solidFill>
           <a:ln>
             <a:noFill/>
@@ -6003,8 +10430,8 @@
         </p:nvSpPr>
         <p:spPr>
           <a:xfrm>
-            <a:off x="777240" y="1517904"/>
-            <a:ext cx="10698480" cy="329184"/>
+            <a:off x="612648" y="1664208"/>
+            <a:ext cx="3200400" cy="457200"/>
           </a:xfrm>
           <a:prstGeom prst="rect">
             <a:avLst/>
@@ -6017,13 +10444,13 @@
           <a:p>
             <a:pPr algn="l"/>
             <a:r>
-              <a:rPr sz="1800" b="1">
+              <a:rPr sz="2000" b="1">
                 <a:solidFill>
                   <a:srgbClr val="0B2545"/>
                 </a:solidFill>
                 <a:latin typeface="Calibri"/>
               </a:rPr>
-              <a:t>Slow</a:t>
+              <a:t>1.  The SPEC</a:t>
             </a:r>
           </a:p>
         </p:txBody>
@@ -6036,8 +10463,8 @@
         </p:nvSpPr>
         <p:spPr>
           <a:xfrm>
-            <a:off x="777240" y="1847088"/>
-            <a:ext cx="10698480" cy="530352"/>
+            <a:off x="612648" y="2194560"/>
+            <a:ext cx="3200400" cy="3840480"/>
           </a:xfrm>
           <a:prstGeom prst="rect">
             <a:avLst/>
@@ -6050,13 +10477,15 @@
           <a:p>
             <a:pPr algn="l"/>
             <a:r>
-              <a:rPr sz="1500" b="0">
+              <a:rPr sz="1400" b="0">
                 <a:solidFill>
                   <a:srgbClr val="1C2B3A"/>
                 </a:solidFill>
                 <a:latin typeface="Calibri"/>
               </a:rPr>
-              <a:t>Hundreds of rows in Excel, dozens of slides, a long spec. A careful review takes a long time.</a:t>
+              <a:t>What Stellantis writes.
+Our technical specification: every requirement the part must meet (brightness, temperature, safety, interfaces…).
+This is our “shopping list” — and the contract of what “good” means.</a:t>
             </a:r>
           </a:p>
         </p:txBody>
@@ -6069,8 +10498,8 @@
         </p:nvSpPr>
         <p:spPr>
           <a:xfrm>
-            <a:off x="457200" y="2606040"/>
-            <a:ext cx="11247120" cy="1115568"/>
+            <a:off x="4206240" y="1417320"/>
+            <a:ext cx="3611880" cy="4892040"/>
           </a:xfrm>
           <a:prstGeom prst="roundRect">
             <a:avLst>
@@ -6116,14 +10545,14 @@
         </p:nvSpPr>
         <p:spPr>
           <a:xfrm>
-            <a:off x="457200" y="2606040"/>
-            <a:ext cx="109728" cy="1115568"/>
+            <a:off x="4206240" y="1417320"/>
+            <a:ext cx="3611880" cy="109728"/>
           </a:xfrm>
           <a:prstGeom prst="rect">
             <a:avLst/>
           </a:prstGeom>
           <a:solidFill>
-            <a:srgbClr val="B3261E"/>
+            <a:srgbClr val="9A5B00"/>
           </a:solidFill>
           <a:ln>
             <a:noFill/>
@@ -6159,8 +10588,8 @@
         </p:nvSpPr>
         <p:spPr>
           <a:xfrm>
-            <a:off x="777240" y="2752344"/>
-            <a:ext cx="10698480" cy="329184"/>
+            <a:off x="4407408" y="1664208"/>
+            <a:ext cx="3200400" cy="457200"/>
           </a:xfrm>
           <a:prstGeom prst="rect">
             <a:avLst/>
@@ -6173,13 +10602,13 @@
           <a:p>
             <a:pPr algn="l"/>
             <a:r>
-              <a:rPr sz="1800" b="1">
+              <a:rPr sz="2000" b="1">
                 <a:solidFill>
                   <a:srgbClr val="0B2545"/>
                 </a:solidFill>
                 <a:latin typeface="Calibri"/>
               </a:rPr>
-              <a:t>Easy to miss</a:t>
+              <a:t>2.  The MATRIX</a:t>
             </a:r>
           </a:p>
         </p:txBody>
@@ -6192,8 +10621,8 @@
         </p:nvSpPr>
         <p:spPr>
           <a:xfrm>
-            <a:off x="777240" y="3081528"/>
-            <a:ext cx="10698480" cy="530352"/>
+            <a:off x="4407408" y="2194560"/>
+            <a:ext cx="3200400" cy="3840480"/>
           </a:xfrm>
           <a:prstGeom prst="rect">
             <a:avLst/>
@@ -6206,13 +10635,15 @@
           <a:p>
             <a:pPr algn="l"/>
             <a:r>
-              <a:rPr sz="1500" b="0">
+              <a:rPr sz="1400" b="0">
                 <a:solidFill>
                   <a:srgbClr val="1C2B3A"/>
                 </a:solidFill>
                 <a:latin typeface="Calibri"/>
               </a:rPr>
-              <a:t>A row marked OK with the comment “pending validation” is not really OK. Humans skip comments when they are tired.</a:t>
+              <a:t>What the supplier ticks.
+A big Excel / ODS spreadsheet. One row per requirement. The supplier marks OK, NOK (not OK) or NA (not applicable), plus a comment.
+This is their official yes / no.</a:t>
             </a:r>
           </a:p>
         </p:txBody>
@@ -6225,8 +10656,8 @@
         </p:nvSpPr>
         <p:spPr>
           <a:xfrm>
-            <a:off x="457200" y="3840480"/>
-            <a:ext cx="11247120" cy="1115568"/>
+            <a:off x="8001000" y="1417320"/>
+            <a:ext cx="3611880" cy="4892040"/>
           </a:xfrm>
           <a:prstGeom prst="roundRect">
             <a:avLst>
@@ -6272,14 +10703,14 @@
         </p:nvSpPr>
         <p:spPr>
           <a:xfrm>
-            <a:off x="457200" y="3840480"/>
-            <a:ext cx="109728" cy="1115568"/>
+            <a:off x="8001000" y="1417320"/>
+            <a:ext cx="3611880" cy="109728"/>
           </a:xfrm>
           <a:prstGeom prst="rect">
             <a:avLst/>
           </a:prstGeom>
           <a:solidFill>
-            <a:srgbClr val="B3261E"/>
+            <a:srgbClr val="157347"/>
           </a:solidFill>
           <a:ln>
             <a:noFill/>
@@ -6315,8 +10746,8 @@
         </p:nvSpPr>
         <p:spPr>
           <a:xfrm>
-            <a:off x="777240" y="3986784"/>
-            <a:ext cx="10698480" cy="329184"/>
+            <a:off x="8202168" y="1664208"/>
+            <a:ext cx="3200400" cy="457200"/>
           </a:xfrm>
           <a:prstGeom prst="rect">
             <a:avLst/>
@@ -6329,13 +10760,13 @@
           <a:p>
             <a:pPr algn="l"/>
             <a:r>
-              <a:rPr sz="1800" b="1">
+              <a:rPr sz="2000" b="1">
                 <a:solidFill>
                   <a:srgbClr val="0B2545"/>
                 </a:solidFill>
                 <a:latin typeface="Calibri"/>
               </a:rPr>
-              <a:t>Easy to contradict</a:t>
+              <a:t>3.  The TDR</a:t>
             </a:r>
           </a:p>
         </p:txBody>
@@ -6348,8 +10779,8 @@
         </p:nvSpPr>
         <p:spPr>
           <a:xfrm>
-            <a:off x="777240" y="4315968"/>
-            <a:ext cx="10698480" cy="530352"/>
+            <a:off x="8202168" y="2194560"/>
+            <a:ext cx="3200400" cy="3840480"/>
           </a:xfrm>
           <a:prstGeom prst="rect">
             <a:avLst/>
@@ -6362,176 +10793,22 @@
           <a:p>
             <a:pPr algn="l"/>
             <a:r>
-              <a:rPr sz="1500" b="0">
+              <a:rPr sz="1400" b="0">
                 <a:solidFill>
                   <a:srgbClr val="1C2B3A"/>
                 </a:solidFill>
                 <a:latin typeface="Calibri"/>
               </a:rPr>
-              <a:t>The matrix says contrast ≥ 400:1 is OK. The TDR slide shows 380:1. Those two files were never put side by side.</a:t>
-            </a:r>
-          </a:p>
-        </p:txBody>
-      </p:sp>
-      <p:sp>
-        <p:nvSpPr>
-          <p:cNvPr id="20" name="Rounded Rectangle 19"/>
-          <p:cNvSpPr/>
-          <p:nvPr/>
-        </p:nvSpPr>
-        <p:spPr>
-          <a:xfrm>
-            <a:off x="457200" y="5074920"/>
-            <a:ext cx="11247120" cy="1115568"/>
-          </a:xfrm>
-          <a:prstGeom prst="roundRect">
-            <a:avLst>
-              <a:gd name="adj" fmla="val 8000"/>
-            </a:avLst>
-          </a:prstGeom>
-          <a:solidFill>
-            <a:srgbClr val="FFFFFF"/>
-          </a:solidFill>
-          <a:ln w="12700">
-            <a:solidFill>
-              <a:srgbClr val="DDE3EC"/>
-            </a:solidFill>
-          </a:ln>
-        </p:spPr>
-        <p:style>
-          <a:lnRef idx="1">
-            <a:schemeClr val="accent1"/>
-          </a:lnRef>
-          <a:fillRef idx="3">
-            <a:schemeClr val="accent1"/>
-          </a:fillRef>
-          <a:effectRef idx="2">
-            <a:schemeClr val="accent1"/>
-          </a:effectRef>
-          <a:fontRef idx="minor">
-            <a:schemeClr val="lt1"/>
-          </a:fontRef>
-        </p:style>
-        <p:txBody>
-          <a:bodyPr rtlCol="0" anchor="ctr"/>
-          <a:lstStyle/>
-          <a:p>
-            <a:pPr algn="ctr"/>
-          </a:p>
-        </p:txBody>
-      </p:sp>
-      <p:sp>
-        <p:nvSpPr>
-          <p:cNvPr id="21" name="Rectangle 20"/>
-          <p:cNvSpPr/>
-          <p:nvPr/>
-        </p:nvSpPr>
-        <p:spPr>
-          <a:xfrm>
-            <a:off x="457200" y="5074920"/>
-            <a:ext cx="109728" cy="1115568"/>
-          </a:xfrm>
-          <a:prstGeom prst="rect">
-            <a:avLst/>
-          </a:prstGeom>
-          <a:solidFill>
-            <a:srgbClr val="B3261E"/>
-          </a:solidFill>
-          <a:ln>
-            <a:noFill/>
-          </a:ln>
-        </p:spPr>
-        <p:style>
-          <a:lnRef idx="1">
-            <a:schemeClr val="accent1"/>
-          </a:lnRef>
-          <a:fillRef idx="3">
-            <a:schemeClr val="accent1"/>
-          </a:fillRef>
-          <a:effectRef idx="2">
-            <a:schemeClr val="accent1"/>
-          </a:effectRef>
-          <a:fontRef idx="minor">
-            <a:schemeClr val="lt1"/>
-          </a:fontRef>
-        </p:style>
-        <p:txBody>
-          <a:bodyPr rtlCol="0" anchor="ctr"/>
-          <a:lstStyle/>
-          <a:p>
-            <a:pPr algn="ctr"/>
-          </a:p>
-        </p:txBody>
-      </p:sp>
-      <p:sp>
-        <p:nvSpPr>
-          <p:cNvPr id="22" name="TextBox 21"/>
-          <p:cNvSpPr txBox="1"/>
-          <p:nvPr/>
-        </p:nvSpPr>
-        <p:spPr>
-          <a:xfrm>
-            <a:off x="777240" y="5221224"/>
-            <a:ext cx="10698480" cy="329184"/>
-          </a:xfrm>
-          <a:prstGeom prst="rect">
-            <a:avLst/>
-          </a:prstGeom>
-          <a:noFill/>
-        </p:spPr>
-        <p:txBody>
-          <a:bodyPr wrap="square" anchor="t"/>
-          <a:lstStyle/>
-          <a:p>
-            <a:pPr algn="l"/>
-            <a:r>
-              <a:rPr sz="1800" b="1">
-                <a:solidFill>
-                  <a:srgbClr val="0B2545"/>
-                </a:solidFill>
-                <a:latin typeface="Calibri"/>
-              </a:rPr>
-              <a:t>Hard to compare suppliers</a:t>
-            </a:r>
-          </a:p>
-        </p:txBody>
-      </p:sp>
-      <p:sp>
-        <p:nvSpPr>
-          <p:cNvPr id="23" name="TextBox 22"/>
-          <p:cNvSpPr txBox="1"/>
-          <p:nvPr/>
-        </p:nvSpPr>
-        <p:spPr>
-          <a:xfrm>
-            <a:off x="777240" y="5550408"/>
-            <a:ext cx="10698480" cy="530352"/>
-          </a:xfrm>
-          <a:prstGeom prst="rect">
-            <a:avLst/>
-          </a:prstGeom>
-          <a:noFill/>
-        </p:spPr>
-        <p:txBody>
-          <a:bodyPr wrap="square" anchor="t"/>
-          <a:lstStyle/>
-          <a:p>
-            <a:pPr algn="l"/>
-            <a:r>
-              <a:rPr sz="1500" b="0">
-                <a:solidFill>
-                  <a:srgbClr val="1C2B3A"/>
-                </a:solidFill>
-                <a:latin typeface="Calibri"/>
-              </a:rPr>
-              <a:t>Each supplier sends their own PowerPoint. Comparing three offers on the same technical points is a weekend of work.</a:t>
-            </a:r>
-          </a:p>
-        </p:txBody>
-      </p:sp>
-      <p:sp>
-        <p:nvSpPr>
-          <p:cNvPr id="24" name="Rectangle 23"/>
+              <a:t>What the supplier shows as proof.
+TDR = Technical Design Review / technical dossier. Usually a PowerPoint or PDF: drawings, numbers, tests, architecture.
+This is their “here is how we actually do it”.</a:t>
+            </a:r>
+          </a:p>
+        </p:txBody>
+      </p:sp>
+      <p:sp>
+        <p:nvSpPr>
+          <p:cNvPr id="20" name="Rectangle 19"/>
           <p:cNvSpPr/>
           <p:nvPr/>
         </p:nvSpPr>
@@ -6574,7 +10851,7 @@
       </p:sp>
       <p:sp>
         <p:nvSpPr>
-          <p:cNvPr id="25" name="TextBox 24"/>
+          <p:cNvPr id="21" name="TextBox 20"/>
           <p:cNvSpPr txBox="1"/>
           <p:nvPr/>
         </p:nvSpPr>
@@ -6600,14 +10877,14 @@
                 </a:solidFill>
                 <a:latin typeface="Calibri"/>
               </a:rPr>
-              <a:t>LEON  ·  Quality Analysis  ·  Internal briefing for non-specialists</a:t>
-            </a:r>
-          </a:p>
-        </p:txBody>
-      </p:sp>
-      <p:sp>
-        <p:nvSpPr>
-          <p:cNvPr id="26" name="TextBox 25"/>
+              <a:t>Khadija Benhamida  ·  Mechatronics Engineering  ·  First meeting</a:t>
+            </a:r>
+          </a:p>
+        </p:txBody>
+      </p:sp>
+      <p:sp>
+        <p:nvSpPr>
+          <p:cNvPr id="22" name="TextBox 21"/>
           <p:cNvSpPr txBox="1"/>
           <p:nvPr/>
         </p:nvSpPr>
@@ -6633,7 +10910,7 @@
                 </a:solidFill>
                 <a:latin typeface="Calibri"/>
               </a:rPr>
-              <a:t>3  /  8</a:t>
+              <a:t>3  /  13</a:t>
             </a:r>
           </a:p>
         </p:txBody>
@@ -6813,7 +11090,7 @@
                 </a:solidFill>
                 <a:latin typeface="Calibri"/>
               </a:rPr>
-              <a:t>IN ONE SENTENCE</a:t>
+              <a:t>WHY WE BUILT THIS</a:t>
             </a:r>
           </a:p>
         </p:txBody>
@@ -6846,7 +11123,7 @@
                 </a:solidFill>
                 <a:latin typeface="Calibri"/>
               </a:rPr>
-              <a:t>LEON is a web page that does a first reading of the files.</a:t>
+              <a:t>Today this is still a lot of reading by hand.</a:t>
             </a:r>
           </a:p>
         </p:txBody>
@@ -6879,7 +11156,7 @@
                 </a:solidFill>
                 <a:latin typeface="Calibri"/>
               </a:rPr>
-              <a:t>You drop the documents in a browser. You get highlights, then you decide.</a:t>
+              <a:t>A “green” Excel can hide a problem. A nice slide can hide a wrong number.</a:t>
             </a:r>
           </a:p>
         </p:txBody>
@@ -6892,8 +11169,8 @@
         </p:nvSpPr>
         <p:spPr>
           <a:xfrm>
-            <a:off x="411480" y="1417320"/>
-            <a:ext cx="5532120" cy="4892040"/>
+            <a:off x="457200" y="1371600"/>
+            <a:ext cx="11247120" cy="1115568"/>
           </a:xfrm>
           <a:prstGeom prst="roundRect">
             <a:avLst>
@@ -6939,14 +11216,14 @@
         </p:nvSpPr>
         <p:spPr>
           <a:xfrm>
-            <a:off x="411480" y="1417320"/>
-            <a:ext cx="73152" cy="4892040"/>
+            <a:off x="457200" y="1371600"/>
+            <a:ext cx="109728" cy="1115568"/>
           </a:xfrm>
           <a:prstGeom prst="rect">
             <a:avLst/>
           </a:prstGeom>
           <a:solidFill>
-            <a:srgbClr val="1D4ED8"/>
+            <a:srgbClr val="B3261E"/>
           </a:solidFill>
           <a:ln>
             <a:noFill/>
@@ -6982,8 +11259,8 @@
         </p:nvSpPr>
         <p:spPr>
           <a:xfrm>
-            <a:off x="612648" y="1545336"/>
-            <a:ext cx="5221224" cy="347472"/>
+            <a:off x="777240" y="1517904"/>
+            <a:ext cx="10698480" cy="329184"/>
           </a:xfrm>
           <a:prstGeom prst="rect">
             <a:avLst/>
@@ -7002,7 +11279,7 @@
                 </a:solidFill>
                 <a:latin typeface="Calibri"/>
               </a:rPr>
-              <a:t>What it does</a:t>
+              <a:t>Slow</a:t>
             </a:r>
           </a:p>
         </p:txBody>
@@ -7015,8 +11292,8 @@
         </p:nvSpPr>
         <p:spPr>
           <a:xfrm>
-            <a:off x="612648" y="1874520"/>
-            <a:ext cx="5221224" cy="4306824"/>
+            <a:off x="777240" y="1847088"/>
+            <a:ext cx="10698480" cy="530352"/>
           </a:xfrm>
           <a:prstGeom prst="rect">
             <a:avLst/>
@@ -7035,11 +11312,7 @@
                 </a:solidFill>
                 <a:latin typeface="Calibri"/>
               </a:rPr>
-              <a:t>Opens the spec, the matrix and the TDR for you.
-Finds every requirement, every OK / NOK / NA, and the matching page or slide.
-Puts in red the things that do not match — wrong number, empty proof, OK tick with a worrying comment.
-Gives you an Excel you can share in the review meeting.
-You still sign. LEON only prepares the file.</a:t>
+              <a:t>Hundreds of rows in Excel, dozens of slides, a long spec. A careful review takes a long time.</a:t>
             </a:r>
           </a:p>
         </p:txBody>
@@ -7052,8 +11325,8 @@
         </p:nvSpPr>
         <p:spPr>
           <a:xfrm>
-            <a:off x="6172200" y="1417320"/>
-            <a:ext cx="5532120" cy="2286000"/>
+            <a:off x="457200" y="2606040"/>
+            <a:ext cx="11247120" cy="1115568"/>
           </a:xfrm>
           <a:prstGeom prst="roundRect">
             <a:avLst>
@@ -7099,8 +11372,8 @@
         </p:nvSpPr>
         <p:spPr>
           <a:xfrm>
-            <a:off x="6172200" y="1417320"/>
-            <a:ext cx="73152" cy="2286000"/>
+            <a:off x="457200" y="2606040"/>
+            <a:ext cx="109728" cy="1115568"/>
           </a:xfrm>
           <a:prstGeom prst="rect">
             <a:avLst/>
@@ -7142,8 +11415,8 @@
         </p:nvSpPr>
         <p:spPr>
           <a:xfrm>
-            <a:off x="6373368" y="1545336"/>
-            <a:ext cx="5221224" cy="347472"/>
+            <a:off x="777240" y="2752344"/>
+            <a:ext cx="10698480" cy="329184"/>
           </a:xfrm>
           <a:prstGeom prst="rect">
             <a:avLst/>
@@ -7162,7 +11435,7 @@
                 </a:solidFill>
                 <a:latin typeface="Calibri"/>
               </a:rPr>
-              <a:t>What it is not</a:t>
+              <a:t>Easy to miss</a:t>
             </a:r>
           </a:p>
         </p:txBody>
@@ -7175,8 +11448,8 @@
         </p:nvSpPr>
         <p:spPr>
           <a:xfrm>
-            <a:off x="6373368" y="1874520"/>
-            <a:ext cx="5221224" cy="1700784"/>
+            <a:off x="777240" y="3081528"/>
+            <a:ext cx="10698480" cy="530352"/>
           </a:xfrm>
           <a:prstGeom prst="rect">
             <a:avLst/>
@@ -7195,9 +11468,7 @@
                 </a:solidFill>
                 <a:latin typeface="Calibri"/>
               </a:rPr>
-              <a:t>Not a robot that approves a supplier.
-Not a black box that “says yes”.
-Not a replacement for the engineer, quality or purchasing.</a:t>
+              <a:t>A row marked OK with the comment “pending validation” is not really OK. Humans skip comments when they are tired.</a:t>
             </a:r>
           </a:p>
         </p:txBody>
@@ -7210,8 +11481,8 @@
         </p:nvSpPr>
         <p:spPr>
           <a:xfrm>
-            <a:off x="6172200" y="3886200"/>
-            <a:ext cx="5532120" cy="2423160"/>
+            <a:off x="457200" y="3840480"/>
+            <a:ext cx="11247120" cy="1115568"/>
           </a:xfrm>
           <a:prstGeom prst="roundRect">
             <a:avLst>
@@ -7257,14 +11528,14 @@
         </p:nvSpPr>
         <p:spPr>
           <a:xfrm>
-            <a:off x="6172200" y="3886200"/>
-            <a:ext cx="73152" cy="2423160"/>
+            <a:off x="457200" y="3840480"/>
+            <a:ext cx="109728" cy="1115568"/>
           </a:xfrm>
           <a:prstGeom prst="rect">
             <a:avLst/>
           </a:prstGeom>
           <a:solidFill>
-            <a:srgbClr val="157347"/>
+            <a:srgbClr val="B3261E"/>
           </a:solidFill>
           <a:ln>
             <a:noFill/>
@@ -7300,8 +11571,8 @@
         </p:nvSpPr>
         <p:spPr>
           <a:xfrm>
-            <a:off x="6373368" y="4014216"/>
-            <a:ext cx="5221224" cy="347472"/>
+            <a:off x="777240" y="3986784"/>
+            <a:ext cx="10698480" cy="329184"/>
           </a:xfrm>
           <a:prstGeom prst="rect">
             <a:avLst/>
@@ -7320,7 +11591,7 @@
                 </a:solidFill>
                 <a:latin typeface="Calibri"/>
               </a:rPr>
-              <a:t>Who it is for</a:t>
+              <a:t>Easy to contradict</a:t>
             </a:r>
           </a:p>
         </p:txBody>
@@ -7333,8 +11604,8 @@
         </p:nvSpPr>
         <p:spPr>
           <a:xfrm>
-            <a:off x="6373368" y="4343400"/>
-            <a:ext cx="5221224" cy="1837944"/>
+            <a:off x="777240" y="4315968"/>
+            <a:ext cx="10698480" cy="530352"/>
           </a:xfrm>
           <a:prstGeom prst="rect">
             <a:avLst/>
@@ -7353,16 +11624,170 @@
                 </a:solidFill>
                 <a:latin typeface="Calibri"/>
               </a:rPr>
-              <a:t>Mechatronics engineers reviewing a part.
-Quality / FNR looking at a conformity matrix.
-Anyone who must walk into a TDR meeting prepared.</a:t>
-            </a:r>
-          </a:p>
-        </p:txBody>
-      </p:sp>
-      <p:sp>
-        <p:nvSpPr>
-          <p:cNvPr id="20" name="Rectangle 19"/>
+              <a:t>The matrix says contrast ≥ 400:1 is OK. The TDR slide shows 380:1. Those two files were never put side by side.</a:t>
+            </a:r>
+          </a:p>
+        </p:txBody>
+      </p:sp>
+      <p:sp>
+        <p:nvSpPr>
+          <p:cNvPr id="20" name="Rounded Rectangle 19"/>
+          <p:cNvSpPr/>
+          <p:nvPr/>
+        </p:nvSpPr>
+        <p:spPr>
+          <a:xfrm>
+            <a:off x="457200" y="5074920"/>
+            <a:ext cx="11247120" cy="1115568"/>
+          </a:xfrm>
+          <a:prstGeom prst="roundRect">
+            <a:avLst>
+              <a:gd name="adj" fmla="val 8000"/>
+            </a:avLst>
+          </a:prstGeom>
+          <a:solidFill>
+            <a:srgbClr val="FFFFFF"/>
+          </a:solidFill>
+          <a:ln w="12700">
+            <a:solidFill>
+              <a:srgbClr val="DDE3EC"/>
+            </a:solidFill>
+          </a:ln>
+        </p:spPr>
+        <p:style>
+          <a:lnRef idx="1">
+            <a:schemeClr val="accent1"/>
+          </a:lnRef>
+          <a:fillRef idx="3">
+            <a:schemeClr val="accent1"/>
+          </a:fillRef>
+          <a:effectRef idx="2">
+            <a:schemeClr val="accent1"/>
+          </a:effectRef>
+          <a:fontRef idx="minor">
+            <a:schemeClr val="lt1"/>
+          </a:fontRef>
+        </p:style>
+        <p:txBody>
+          <a:bodyPr rtlCol="0" anchor="ctr"/>
+          <a:lstStyle/>
+          <a:p>
+            <a:pPr algn="ctr"/>
+          </a:p>
+        </p:txBody>
+      </p:sp>
+      <p:sp>
+        <p:nvSpPr>
+          <p:cNvPr id="21" name="Rectangle 20"/>
+          <p:cNvSpPr/>
+          <p:nvPr/>
+        </p:nvSpPr>
+        <p:spPr>
+          <a:xfrm>
+            <a:off x="457200" y="5074920"/>
+            <a:ext cx="109728" cy="1115568"/>
+          </a:xfrm>
+          <a:prstGeom prst="rect">
+            <a:avLst/>
+          </a:prstGeom>
+          <a:solidFill>
+            <a:srgbClr val="B3261E"/>
+          </a:solidFill>
+          <a:ln>
+            <a:noFill/>
+          </a:ln>
+        </p:spPr>
+        <p:style>
+          <a:lnRef idx="1">
+            <a:schemeClr val="accent1"/>
+          </a:lnRef>
+          <a:fillRef idx="3">
+            <a:schemeClr val="accent1"/>
+          </a:fillRef>
+          <a:effectRef idx="2">
+            <a:schemeClr val="accent1"/>
+          </a:effectRef>
+          <a:fontRef idx="minor">
+            <a:schemeClr val="lt1"/>
+          </a:fontRef>
+        </p:style>
+        <p:txBody>
+          <a:bodyPr rtlCol="0" anchor="ctr"/>
+          <a:lstStyle/>
+          <a:p>
+            <a:pPr algn="ctr"/>
+          </a:p>
+        </p:txBody>
+      </p:sp>
+      <p:sp>
+        <p:nvSpPr>
+          <p:cNvPr id="22" name="TextBox 21"/>
+          <p:cNvSpPr txBox="1"/>
+          <p:nvPr/>
+        </p:nvSpPr>
+        <p:spPr>
+          <a:xfrm>
+            <a:off x="777240" y="5221224"/>
+            <a:ext cx="10698480" cy="329184"/>
+          </a:xfrm>
+          <a:prstGeom prst="rect">
+            <a:avLst/>
+          </a:prstGeom>
+          <a:noFill/>
+        </p:spPr>
+        <p:txBody>
+          <a:bodyPr wrap="square" anchor="t"/>
+          <a:lstStyle/>
+          <a:p>
+            <a:pPr algn="l"/>
+            <a:r>
+              <a:rPr sz="1800" b="1">
+                <a:solidFill>
+                  <a:srgbClr val="0B2545"/>
+                </a:solidFill>
+                <a:latin typeface="Calibri"/>
+              </a:rPr>
+              <a:t>Hard to compare suppliers</a:t>
+            </a:r>
+          </a:p>
+        </p:txBody>
+      </p:sp>
+      <p:sp>
+        <p:nvSpPr>
+          <p:cNvPr id="23" name="TextBox 22"/>
+          <p:cNvSpPr txBox="1"/>
+          <p:nvPr/>
+        </p:nvSpPr>
+        <p:spPr>
+          <a:xfrm>
+            <a:off x="777240" y="5550408"/>
+            <a:ext cx="10698480" cy="530352"/>
+          </a:xfrm>
+          <a:prstGeom prst="rect">
+            <a:avLst/>
+          </a:prstGeom>
+          <a:noFill/>
+        </p:spPr>
+        <p:txBody>
+          <a:bodyPr wrap="square" anchor="t"/>
+          <a:lstStyle/>
+          <a:p>
+            <a:pPr algn="l"/>
+            <a:r>
+              <a:rPr sz="1500" b="0">
+                <a:solidFill>
+                  <a:srgbClr val="1C2B3A"/>
+                </a:solidFill>
+                <a:latin typeface="Calibri"/>
+              </a:rPr>
+              <a:t>Each supplier sends their own PowerPoint. Comparing three offers on the same technical points is a weekend of work.</a:t>
+            </a:r>
+          </a:p>
+        </p:txBody>
+      </p:sp>
+      <p:sp>
+        <p:nvSpPr>
+          <p:cNvPr id="24" name="Rectangle 23"/>
           <p:cNvSpPr/>
           <p:nvPr/>
         </p:nvSpPr>
@@ -7405,7 +11830,7 @@
       </p:sp>
       <p:sp>
         <p:nvSpPr>
-          <p:cNvPr id="21" name="TextBox 20"/>
+          <p:cNvPr id="25" name="TextBox 24"/>
           <p:cNvSpPr txBox="1"/>
           <p:nvPr/>
         </p:nvSpPr>
@@ -7431,14 +11856,14 @@
                 </a:solidFill>
                 <a:latin typeface="Calibri"/>
               </a:rPr>
-              <a:t>LEON  ·  Quality Analysis  ·  Internal briefing for non-specialists</a:t>
-            </a:r>
-          </a:p>
-        </p:txBody>
-      </p:sp>
-      <p:sp>
-        <p:nvSpPr>
-          <p:cNvPr id="22" name="TextBox 21"/>
+              <a:t>Khadija Benhamida  ·  Mechatronics Engineering  ·  First meeting</a:t>
+            </a:r>
+          </a:p>
+        </p:txBody>
+      </p:sp>
+      <p:sp>
+        <p:nvSpPr>
+          <p:cNvPr id="26" name="TextBox 25"/>
           <p:cNvSpPr txBox="1"/>
           <p:nvPr/>
         </p:nvSpPr>
@@ -7464,7 +11889,7 @@
                 </a:solidFill>
                 <a:latin typeface="Calibri"/>
               </a:rPr>
-              <a:t>4  /  8</a:t>
+              <a:t>4  /  13</a:t>
             </a:r>
           </a:p>
         </p:txBody>
@@ -7644,7 +12069,7 @@
                 </a:solidFill>
                 <a:latin typeface="Calibri"/>
               </a:rPr>
-              <a:t>THE SCREEN YOU OPEN</a:t>
+              <a:t>IN ONE SENTENCE</a:t>
             </a:r>
           </a:p>
         </p:txBody>
@@ -7677,7 +12102,7 @@
                 </a:solidFill>
                 <a:latin typeface="Calibri"/>
               </a:rPr>
-              <a:t>Six tabs — six jobs. You only use the ones you need.</a:t>
+              <a:t>LEON is a web page that does a first reading of the files.</a:t>
             </a:r>
           </a:p>
         </p:txBody>
@@ -7710,7 +12135,7 @@
                 </a:solidFill>
                 <a:latin typeface="Calibri"/>
               </a:rPr>
-              <a:t>Same tool, same browser. No installation for the person reviewing.</a:t>
+              <a:t>You drop the documents in a browser. You get highlights, then you decide.</a:t>
             </a:r>
           </a:p>
         </p:txBody>
@@ -7723,8 +12148,8 @@
         </p:nvSpPr>
         <p:spPr>
           <a:xfrm>
-            <a:off x="411480" y="1389888"/>
-            <a:ext cx="3566160" cy="2194560"/>
+            <a:off x="411480" y="1417320"/>
+            <a:ext cx="5532120" cy="4892040"/>
           </a:xfrm>
           <a:prstGeom prst="roundRect">
             <a:avLst>
@@ -7770,8 +12195,8 @@
         </p:nvSpPr>
         <p:spPr>
           <a:xfrm>
-            <a:off x="411480" y="1389888"/>
-            <a:ext cx="3566160" cy="91440"/>
+            <a:off x="411480" y="1417320"/>
+            <a:ext cx="73152" cy="4892040"/>
           </a:xfrm>
           <a:prstGeom prst="rect">
             <a:avLst/>
@@ -7813,8 +12238,8 @@
         </p:nvSpPr>
         <p:spPr>
           <a:xfrm>
-            <a:off x="612648" y="1645920"/>
-            <a:ext cx="3163824" cy="777240"/>
+            <a:off x="612648" y="1545336"/>
+            <a:ext cx="5221224" cy="347472"/>
           </a:xfrm>
           <a:prstGeom prst="rect">
             <a:avLst/>
@@ -7827,13 +12252,13 @@
           <a:p>
             <a:pPr algn="l"/>
             <a:r>
-              <a:rPr sz="1600" b="1">
+              <a:rPr sz="1800" b="1">
                 <a:solidFill>
                   <a:srgbClr val="0B2545"/>
                 </a:solidFill>
                 <a:latin typeface="Calibri"/>
               </a:rPr>
-              <a:t>📄  Spec Validation</a:t>
+              <a:t>What it does</a:t>
             </a:r>
           </a:p>
         </p:txBody>
@@ -7846,8 +12271,8 @@
         </p:nvSpPr>
         <p:spPr>
           <a:xfrm>
-            <a:off x="612648" y="2441448"/>
-            <a:ext cx="3163824" cy="960120"/>
+            <a:off x="612648" y="1874520"/>
+            <a:ext cx="5221224" cy="4306824"/>
           </a:xfrm>
           <a:prstGeom prst="rect">
             <a:avLst/>
@@ -7860,13 +12285,17 @@
           <a:p>
             <a:pPr algn="l"/>
             <a:r>
-              <a:rPr sz="1400" b="0">
+              <a:rPr sz="1500" b="0">
                 <a:solidFill>
                   <a:srgbClr val="1C2B3A"/>
                 </a:solidFill>
                 <a:latin typeface="Calibri"/>
               </a:rPr>
-              <a:t>Is our spec complete and clear before we send it?</a:t>
+              <a:t>Opens the spec, the matrix and the TDR for you.
+Finds every requirement, every OK / NOK / NA, and the matching page or slide.
+Puts in red the things that do not match — wrong number, empty proof, OK tick with a worrying comment.
+Gives you an Excel you can share in the review meeting.
+You still sign. LEON only prepares the file.</a:t>
             </a:r>
           </a:p>
         </p:txBody>
@@ -7879,8 +12308,8 @@
         </p:nvSpPr>
         <p:spPr>
           <a:xfrm>
-            <a:off x="4160520" y="1389888"/>
-            <a:ext cx="3566160" cy="2194560"/>
+            <a:off x="6172200" y="1417320"/>
+            <a:ext cx="5532120" cy="2286000"/>
           </a:xfrm>
           <a:prstGeom prst="roundRect">
             <a:avLst>
@@ -7926,14 +12355,14 @@
         </p:nvSpPr>
         <p:spPr>
           <a:xfrm>
-            <a:off x="4160520" y="1389888"/>
-            <a:ext cx="3566160" cy="91440"/>
+            <a:off x="6172200" y="1417320"/>
+            <a:ext cx="73152" cy="2286000"/>
           </a:xfrm>
           <a:prstGeom prst="rect">
             <a:avLst/>
           </a:prstGeom>
           <a:solidFill>
-            <a:srgbClr val="9A5B00"/>
+            <a:srgbClr val="B3261E"/>
           </a:solidFill>
           <a:ln>
             <a:noFill/>
@@ -7969,8 +12398,8 @@
         </p:nvSpPr>
         <p:spPr>
           <a:xfrm>
-            <a:off x="4361688" y="1645920"/>
-            <a:ext cx="3163824" cy="777240"/>
+            <a:off x="6373368" y="1545336"/>
+            <a:ext cx="5221224" cy="347472"/>
           </a:xfrm>
           <a:prstGeom prst="rect">
             <a:avLst/>
@@ -7983,13 +12412,13 @@
           <a:p>
             <a:pPr algn="l"/>
             <a:r>
-              <a:rPr sz="1600" b="1">
+              <a:rPr sz="1800" b="1">
                 <a:solidFill>
                   <a:srgbClr val="0B2545"/>
                 </a:solidFill>
                 <a:latin typeface="Calibri"/>
               </a:rPr>
-              <a:t>📊  Conformity Matrix</a:t>
+              <a:t>What it is not</a:t>
             </a:r>
           </a:p>
         </p:txBody>
@@ -8002,8 +12431,8 @@
         </p:nvSpPr>
         <p:spPr>
           <a:xfrm>
-            <a:off x="4361688" y="2441448"/>
-            <a:ext cx="3163824" cy="960120"/>
+            <a:off x="6373368" y="1874520"/>
+            <a:ext cx="5221224" cy="1700784"/>
           </a:xfrm>
           <a:prstGeom prst="rect">
             <a:avLst/>
@@ -8016,13 +12445,15 @@
           <a:p>
             <a:pPr algn="l"/>
             <a:r>
-              <a:rPr sz="1400" b="0">
+              <a:rPr sz="1500" b="0">
                 <a:solidFill>
                   <a:srgbClr val="1C2B3A"/>
                 </a:solidFill>
                 <a:latin typeface="Calibri"/>
               </a:rPr>
-              <a:t>Read the supplier Excel: OK / NOK / NA and catch fake OK.</a:t>
+              <a:t>Not a robot that approves a supplier.
+Not a black box that “says yes”.
+Not a replacement for the engineer, quality or purchasing.</a:t>
             </a:r>
           </a:p>
         </p:txBody>
@@ -8035,8 +12466,8 @@
         </p:nvSpPr>
         <p:spPr>
           <a:xfrm>
-            <a:off x="7909560" y="1389888"/>
-            <a:ext cx="3566160" cy="2194560"/>
+            <a:off x="6172200" y="3886200"/>
+            <a:ext cx="5532120" cy="2423160"/>
           </a:xfrm>
           <a:prstGeom prst="roundRect">
             <a:avLst>
@@ -8082,164 +12513,8 @@
         </p:nvSpPr>
         <p:spPr>
           <a:xfrm>
-            <a:off x="7909560" y="1389888"/>
-            <a:ext cx="3566160" cy="91440"/>
-          </a:xfrm>
-          <a:prstGeom prst="rect">
-            <a:avLst/>
-          </a:prstGeom>
-          <a:solidFill>
-            <a:srgbClr val="123061"/>
-          </a:solidFill>
-          <a:ln>
-            <a:noFill/>
-          </a:ln>
-        </p:spPr>
-        <p:style>
-          <a:lnRef idx="1">
-            <a:schemeClr val="accent1"/>
-          </a:lnRef>
-          <a:fillRef idx="3">
-            <a:schemeClr val="accent1"/>
-          </a:fillRef>
-          <a:effectRef idx="2">
-            <a:schemeClr val="accent1"/>
-          </a:effectRef>
-          <a:fontRef idx="minor">
-            <a:schemeClr val="lt1"/>
-          </a:fontRef>
-        </p:style>
-        <p:txBody>
-          <a:bodyPr rtlCol="0" anchor="ctr"/>
-          <a:lstStyle/>
-          <a:p>
-            <a:pPr algn="ctr"/>
-          </a:p>
-        </p:txBody>
-      </p:sp>
-      <p:sp>
-        <p:nvSpPr>
-          <p:cNvPr id="18" name="TextBox 17"/>
-          <p:cNvSpPr txBox="1"/>
-          <p:nvPr/>
-        </p:nvSpPr>
-        <p:spPr>
-          <a:xfrm>
-            <a:off x="8110728" y="1645920"/>
-            <a:ext cx="3163824" cy="777240"/>
-          </a:xfrm>
-          <a:prstGeom prst="rect">
-            <a:avLst/>
-          </a:prstGeom>
-          <a:noFill/>
-        </p:spPr>
-        <p:txBody>
-          <a:bodyPr wrap="square" anchor="t"/>
-          <a:lstStyle/>
-          <a:p>
-            <a:pPr algn="l"/>
-            <a:r>
-              <a:rPr sz="1600" b="1">
-                <a:solidFill>
-                  <a:srgbClr val="0B2545"/>
-                </a:solidFill>
-                <a:latin typeface="Calibri"/>
-              </a:rPr>
-              <a:t>🔎  Matrix ↔ TDR</a:t>
-            </a:r>
-          </a:p>
-        </p:txBody>
-      </p:sp>
-      <p:sp>
-        <p:nvSpPr>
-          <p:cNvPr id="19" name="TextBox 18"/>
-          <p:cNvSpPr txBox="1"/>
-          <p:nvPr/>
-        </p:nvSpPr>
-        <p:spPr>
-          <a:xfrm>
-            <a:off x="8110728" y="2441448"/>
-            <a:ext cx="3163824" cy="960120"/>
-          </a:xfrm>
-          <a:prstGeom prst="rect">
-            <a:avLst/>
-          </a:prstGeom>
-          <a:noFill/>
-        </p:spPr>
-        <p:txBody>
-          <a:bodyPr wrap="square" anchor="t"/>
-          <a:lstStyle/>
-          <a:p>
-            <a:pPr algn="l"/>
-            <a:r>
-              <a:rPr sz="1400" b="0">
-                <a:solidFill>
-                  <a:srgbClr val="1C2B3A"/>
-                </a:solidFill>
-                <a:latin typeface="Calibri"/>
-              </a:rPr>
-              <a:t>Do the ticks match the proof in the PowerPoint / PDF?</a:t>
-            </a:r>
-          </a:p>
-        </p:txBody>
-      </p:sp>
-      <p:sp>
-        <p:nvSpPr>
-          <p:cNvPr id="20" name="Rounded Rectangle 19"/>
-          <p:cNvSpPr/>
-          <p:nvPr/>
-        </p:nvSpPr>
-        <p:spPr>
-          <a:xfrm>
-            <a:off x="411480" y="3794760"/>
-            <a:ext cx="3566160" cy="2194560"/>
-          </a:xfrm>
-          <a:prstGeom prst="roundRect">
-            <a:avLst>
-              <a:gd name="adj" fmla="val 8000"/>
-            </a:avLst>
-          </a:prstGeom>
-          <a:solidFill>
-            <a:srgbClr val="FFFFFF"/>
-          </a:solidFill>
-          <a:ln w="12700">
-            <a:solidFill>
-              <a:srgbClr val="DDE3EC"/>
-            </a:solidFill>
-          </a:ln>
-        </p:spPr>
-        <p:style>
-          <a:lnRef idx="1">
-            <a:schemeClr val="accent1"/>
-          </a:lnRef>
-          <a:fillRef idx="3">
-            <a:schemeClr val="accent1"/>
-          </a:fillRef>
-          <a:effectRef idx="2">
-            <a:schemeClr val="accent1"/>
-          </a:effectRef>
-          <a:fontRef idx="minor">
-            <a:schemeClr val="lt1"/>
-          </a:fontRef>
-        </p:style>
-        <p:txBody>
-          <a:bodyPr rtlCol="0" anchor="ctr"/>
-          <a:lstStyle/>
-          <a:p>
-            <a:pPr algn="ctr"/>
-          </a:p>
-        </p:txBody>
-      </p:sp>
-      <p:sp>
-        <p:nvSpPr>
-          <p:cNvPr id="21" name="Rectangle 20"/>
-          <p:cNvSpPr/>
-          <p:nvPr/>
-        </p:nvSpPr>
-        <p:spPr>
-          <a:xfrm>
-            <a:off x="411480" y="3794760"/>
-            <a:ext cx="3566160" cy="91440"/>
+            <a:off x="6172200" y="3886200"/>
+            <a:ext cx="73152" cy="2423160"/>
           </a:xfrm>
           <a:prstGeom prst="rect">
             <a:avLst/>
@@ -8275,14 +12550,14 @@
       </p:sp>
       <p:sp>
         <p:nvSpPr>
-          <p:cNvPr id="22" name="TextBox 21"/>
+          <p:cNvPr id="18" name="TextBox 17"/>
           <p:cNvSpPr txBox="1"/>
           <p:nvPr/>
         </p:nvSpPr>
         <p:spPr>
           <a:xfrm>
-            <a:off x="612648" y="4050792"/>
-            <a:ext cx="3163824" cy="777240"/>
+            <a:off x="6373368" y="4014216"/>
+            <a:ext cx="5221224" cy="347472"/>
           </a:xfrm>
           <a:prstGeom prst="rect">
             <a:avLst/>
@@ -8295,27 +12570,27 @@
           <a:p>
             <a:pPr algn="l"/>
             <a:r>
-              <a:rPr sz="1600" b="1">
+              <a:rPr sz="1800" b="1">
                 <a:solidFill>
                   <a:srgbClr val="0B2545"/>
                 </a:solidFill>
                 <a:latin typeface="Calibri"/>
               </a:rPr>
-              <a:t>🏁  TDR Benchmark</a:t>
-            </a:r>
-          </a:p>
-        </p:txBody>
-      </p:sp>
-      <p:sp>
-        <p:nvSpPr>
-          <p:cNvPr id="23" name="TextBox 22"/>
+              <a:t>Who it is for</a:t>
+            </a:r>
+          </a:p>
+        </p:txBody>
+      </p:sp>
+      <p:sp>
+        <p:nvSpPr>
+          <p:cNvPr id="19" name="TextBox 18"/>
           <p:cNvSpPr txBox="1"/>
           <p:nvPr/>
         </p:nvSpPr>
         <p:spPr>
           <a:xfrm>
-            <a:off x="612648" y="4846320"/>
-            <a:ext cx="3163824" cy="960120"/>
+            <a:off x="6373368" y="4343400"/>
+            <a:ext cx="5221224" cy="1837944"/>
           </a:xfrm>
           <a:prstGeom prst="rect">
             <a:avLst/>
@@ -8328,332 +12603,22 @@
           <a:p>
             <a:pPr algn="l"/>
             <a:r>
-              <a:rPr sz="1400" b="0">
+              <a:rPr sz="1500" b="0">
                 <a:solidFill>
                   <a:srgbClr val="1C2B3A"/>
                 </a:solidFill>
                 <a:latin typeface="Calibri"/>
               </a:rPr>
-              <a:t>Compare several suppliers’ technical offers, side by side.</a:t>
-            </a:r>
-          </a:p>
-        </p:txBody>
-      </p:sp>
-      <p:sp>
-        <p:nvSpPr>
-          <p:cNvPr id="24" name="Rounded Rectangle 23"/>
-          <p:cNvSpPr/>
-          <p:nvPr/>
-        </p:nvSpPr>
-        <p:spPr>
-          <a:xfrm>
-            <a:off x="4160520" y="3794760"/>
-            <a:ext cx="3566160" cy="2194560"/>
-          </a:xfrm>
-          <a:prstGeom prst="roundRect">
-            <a:avLst>
-              <a:gd name="adj" fmla="val 8000"/>
-            </a:avLst>
-          </a:prstGeom>
-          <a:solidFill>
-            <a:srgbClr val="FFFFFF"/>
-          </a:solidFill>
-          <a:ln w="12700">
-            <a:solidFill>
-              <a:srgbClr val="DDE3EC"/>
-            </a:solidFill>
-          </a:ln>
-        </p:spPr>
-        <p:style>
-          <a:lnRef idx="1">
-            <a:schemeClr val="accent1"/>
-          </a:lnRef>
-          <a:fillRef idx="3">
-            <a:schemeClr val="accent1"/>
-          </a:fillRef>
-          <a:effectRef idx="2">
-            <a:schemeClr val="accent1"/>
-          </a:effectRef>
-          <a:fontRef idx="minor">
-            <a:schemeClr val="lt1"/>
-          </a:fontRef>
-        </p:style>
-        <p:txBody>
-          <a:bodyPr rtlCol="0" anchor="ctr"/>
-          <a:lstStyle/>
-          <a:p>
-            <a:pPr algn="ctr"/>
-          </a:p>
-        </p:txBody>
-      </p:sp>
-      <p:sp>
-        <p:nvSpPr>
-          <p:cNvPr id="25" name="Rectangle 24"/>
-          <p:cNvSpPr/>
-          <p:nvPr/>
-        </p:nvSpPr>
-        <p:spPr>
-          <a:xfrm>
-            <a:off x="4160520" y="3794760"/>
-            <a:ext cx="3566160" cy="91440"/>
-          </a:xfrm>
-          <a:prstGeom prst="rect">
-            <a:avLst/>
-          </a:prstGeom>
-          <a:solidFill>
-            <a:srgbClr val="5B6B7C"/>
-          </a:solidFill>
-          <a:ln>
-            <a:noFill/>
-          </a:ln>
-        </p:spPr>
-        <p:style>
-          <a:lnRef idx="1">
-            <a:schemeClr val="accent1"/>
-          </a:lnRef>
-          <a:fillRef idx="3">
-            <a:schemeClr val="accent1"/>
-          </a:fillRef>
-          <a:effectRef idx="2">
-            <a:schemeClr val="accent1"/>
-          </a:effectRef>
-          <a:fontRef idx="minor">
-            <a:schemeClr val="lt1"/>
-          </a:fontRef>
-        </p:style>
-        <p:txBody>
-          <a:bodyPr rtlCol="0" anchor="ctr"/>
-          <a:lstStyle/>
-          <a:p>
-            <a:pPr algn="ctr"/>
-          </a:p>
-        </p:txBody>
-      </p:sp>
-      <p:sp>
-        <p:nvSpPr>
-          <p:cNvPr id="26" name="TextBox 25"/>
-          <p:cNvSpPr txBox="1"/>
-          <p:nvPr/>
-        </p:nvSpPr>
-        <p:spPr>
-          <a:xfrm>
-            <a:off x="4361688" y="4050792"/>
-            <a:ext cx="3163824" cy="777240"/>
-          </a:xfrm>
-          <a:prstGeom prst="rect">
-            <a:avLst/>
-          </a:prstGeom>
-          <a:noFill/>
-        </p:spPr>
-        <p:txBody>
-          <a:bodyPr wrap="square" anchor="t"/>
-          <a:lstStyle/>
-          <a:p>
-            <a:pPr algn="l"/>
-            <a:r>
-              <a:rPr sz="1600" b="1">
-                <a:solidFill>
-                  <a:srgbClr val="0B2545"/>
-                </a:solidFill>
-                <a:latin typeface="Calibri"/>
-              </a:rPr>
-              <a:t>📉  Version Delta</a:t>
-            </a:r>
-          </a:p>
-        </p:txBody>
-      </p:sp>
-      <p:sp>
-        <p:nvSpPr>
-          <p:cNvPr id="27" name="TextBox 26"/>
-          <p:cNvSpPr txBox="1"/>
-          <p:nvPr/>
-        </p:nvSpPr>
-        <p:spPr>
-          <a:xfrm>
-            <a:off x="4361688" y="4846320"/>
-            <a:ext cx="3163824" cy="960120"/>
-          </a:xfrm>
-          <a:prstGeom prst="rect">
-            <a:avLst/>
-          </a:prstGeom>
-          <a:noFill/>
-        </p:spPr>
-        <p:txBody>
-          <a:bodyPr wrap="square" anchor="t"/>
-          <a:lstStyle/>
-          <a:p>
-            <a:pPr algn="l"/>
-            <a:r>
-              <a:rPr sz="1400" b="0">
-                <a:solidFill>
-                  <a:srgbClr val="1C2B3A"/>
-                </a:solidFill>
-                <a:latin typeface="Calibri"/>
-              </a:rPr>
-              <a:t>What changed between two versions of the same matrix?</a:t>
-            </a:r>
-          </a:p>
-        </p:txBody>
-      </p:sp>
-      <p:sp>
-        <p:nvSpPr>
-          <p:cNvPr id="28" name="Rounded Rectangle 27"/>
-          <p:cNvSpPr/>
-          <p:nvPr/>
-        </p:nvSpPr>
-        <p:spPr>
-          <a:xfrm>
-            <a:off x="7909560" y="3794760"/>
-            <a:ext cx="3566160" cy="2194560"/>
-          </a:xfrm>
-          <a:prstGeom prst="roundRect">
-            <a:avLst>
-              <a:gd name="adj" fmla="val 8000"/>
-            </a:avLst>
-          </a:prstGeom>
-          <a:solidFill>
-            <a:srgbClr val="FFFFFF"/>
-          </a:solidFill>
-          <a:ln w="12700">
-            <a:solidFill>
-              <a:srgbClr val="DDE3EC"/>
-            </a:solidFill>
-          </a:ln>
-        </p:spPr>
-        <p:style>
-          <a:lnRef idx="1">
-            <a:schemeClr val="accent1"/>
-          </a:lnRef>
-          <a:fillRef idx="3">
-            <a:schemeClr val="accent1"/>
-          </a:fillRef>
-          <a:effectRef idx="2">
-            <a:schemeClr val="accent1"/>
-          </a:effectRef>
-          <a:fontRef idx="minor">
-            <a:schemeClr val="lt1"/>
-          </a:fontRef>
-        </p:style>
-        <p:txBody>
-          <a:bodyPr rtlCol="0" anchor="ctr"/>
-          <a:lstStyle/>
-          <a:p>
-            <a:pPr algn="ctr"/>
-          </a:p>
-        </p:txBody>
-      </p:sp>
-      <p:sp>
-        <p:nvSpPr>
-          <p:cNvPr id="29" name="Rectangle 28"/>
-          <p:cNvSpPr/>
-          <p:nvPr/>
-        </p:nvSpPr>
-        <p:spPr>
-          <a:xfrm>
-            <a:off x="7909560" y="3794760"/>
-            <a:ext cx="3566160" cy="91440"/>
-          </a:xfrm>
-          <a:prstGeom prst="rect">
-            <a:avLst/>
-          </a:prstGeom>
-          <a:solidFill>
-            <a:srgbClr val="1D4ED8"/>
-          </a:solidFill>
-          <a:ln>
-            <a:noFill/>
-          </a:ln>
-        </p:spPr>
-        <p:style>
-          <a:lnRef idx="1">
-            <a:schemeClr val="accent1"/>
-          </a:lnRef>
-          <a:fillRef idx="3">
-            <a:schemeClr val="accent1"/>
-          </a:fillRef>
-          <a:effectRef idx="2">
-            <a:schemeClr val="accent1"/>
-          </a:effectRef>
-          <a:fontRef idx="minor">
-            <a:schemeClr val="lt1"/>
-          </a:fontRef>
-        </p:style>
-        <p:txBody>
-          <a:bodyPr rtlCol="0" anchor="ctr"/>
-          <a:lstStyle/>
-          <a:p>
-            <a:pPr algn="ctr"/>
-          </a:p>
-        </p:txBody>
-      </p:sp>
-      <p:sp>
-        <p:nvSpPr>
-          <p:cNvPr id="30" name="TextBox 29"/>
-          <p:cNvSpPr txBox="1"/>
-          <p:nvPr/>
-        </p:nvSpPr>
-        <p:spPr>
-          <a:xfrm>
-            <a:off x="8110728" y="4050792"/>
-            <a:ext cx="3163824" cy="777240"/>
-          </a:xfrm>
-          <a:prstGeom prst="rect">
-            <a:avLst/>
-          </a:prstGeom>
-          <a:noFill/>
-        </p:spPr>
-        <p:txBody>
-          <a:bodyPr wrap="square" anchor="t"/>
-          <a:lstStyle/>
-          <a:p>
-            <a:pPr algn="l"/>
-            <a:r>
-              <a:rPr sz="1600" b="1">
-                <a:solidFill>
-                  <a:srgbClr val="0B2545"/>
-                </a:solidFill>
-                <a:latin typeface="Calibri"/>
-              </a:rPr>
-              <a:t>🔗  Matrix + evidence</a:t>
-            </a:r>
-          </a:p>
-        </p:txBody>
-      </p:sp>
-      <p:sp>
-        <p:nvSpPr>
-          <p:cNvPr id="31" name="TextBox 30"/>
-          <p:cNvSpPr txBox="1"/>
-          <p:nvPr/>
-        </p:nvSpPr>
-        <p:spPr>
-          <a:xfrm>
-            <a:off x="8110728" y="4846320"/>
-            <a:ext cx="3163824" cy="960120"/>
-          </a:xfrm>
-          <a:prstGeom prst="rect">
-            <a:avLst/>
-          </a:prstGeom>
-          <a:noFill/>
-        </p:spPr>
-        <p:txBody>
-          <a:bodyPr wrap="square" anchor="t"/>
-          <a:lstStyle/>
-          <a:p>
-            <a:pPr algn="l"/>
-            <a:r>
-              <a:rPr sz="1400" b="0">
-                <a:solidFill>
-                  <a:srgbClr val="1C2B3A"/>
-                </a:solidFill>
-                <a:latin typeface="Calibri"/>
-              </a:rPr>
-              <a:t>Find the page that talks about a given requirement.</a:t>
-            </a:r>
-          </a:p>
-        </p:txBody>
-      </p:sp>
-      <p:sp>
-        <p:nvSpPr>
-          <p:cNvPr id="32" name="Rectangle 31"/>
+              <a:t>Mechatronics engineers reviewing a part.
+Quality / FNR looking at a conformity matrix.
+Anyone who must walk into a TDR meeting prepared.</a:t>
+            </a:r>
+          </a:p>
+        </p:txBody>
+      </p:sp>
+      <p:sp>
+        <p:nvSpPr>
+          <p:cNvPr id="20" name="Rectangle 19"/>
           <p:cNvSpPr/>
           <p:nvPr/>
         </p:nvSpPr>
@@ -8696,7 +12661,7 @@
       </p:sp>
       <p:sp>
         <p:nvSpPr>
-          <p:cNvPr id="33" name="TextBox 32"/>
+          <p:cNvPr id="21" name="TextBox 20"/>
           <p:cNvSpPr txBox="1"/>
           <p:nvPr/>
         </p:nvSpPr>
@@ -8722,14 +12687,14 @@
                 </a:solidFill>
                 <a:latin typeface="Calibri"/>
               </a:rPr>
-              <a:t>LEON  ·  Quality Analysis  ·  Internal briefing for non-specialists</a:t>
-            </a:r>
-          </a:p>
-        </p:txBody>
-      </p:sp>
-      <p:sp>
-        <p:nvSpPr>
-          <p:cNvPr id="34" name="TextBox 33"/>
+              <a:t>Khadija Benhamida  ·  Mechatronics Engineering  ·  First meeting</a:t>
+            </a:r>
+          </a:p>
+        </p:txBody>
+      </p:sp>
+      <p:sp>
+        <p:nvSpPr>
+          <p:cNvPr id="22" name="TextBox 21"/>
           <p:cNvSpPr txBox="1"/>
           <p:nvPr/>
         </p:nvSpPr>
@@ -8755,7 +12720,7 @@
                 </a:solidFill>
                 <a:latin typeface="Calibri"/>
               </a:rPr>
-              <a:t>5  /  8</a:t>
+              <a:t>5  /  13</a:t>
             </a:r>
           </a:p>
         </p:txBody>
@@ -8935,7 +12900,7 @@
                 </a:solidFill>
                 <a:latin typeface="Calibri"/>
               </a:rPr>
-              <a:t>JOBS 1 AND 2</a:t>
+              <a:t>THE SCREEN YOU OPEN</a:t>
             </a:r>
           </a:p>
         </p:txBody>
@@ -8968,7 +12933,7 @@
                 </a:solidFill>
                 <a:latin typeface="Calibri"/>
               </a:rPr>
-              <a:t>First we clean our spec. Then we read their checklist.</a:t>
+              <a:t>Six tabs — six jobs. You only use the ones you need.</a:t>
             </a:r>
           </a:p>
         </p:txBody>
@@ -9001,7 +12966,7 @@
                 </a:solidFill>
                 <a:latin typeface="Calibri"/>
               </a:rPr>
-              <a:t>Two tabs that already save hours, even before looking at the TDR.</a:t>
+              <a:t>Same tool, same browser. No installation for the person reviewing.</a:t>
             </a:r>
           </a:p>
         </p:txBody>
@@ -9015,7 +12980,7 @@
         <p:spPr>
           <a:xfrm>
             <a:off x="411480" y="1389888"/>
-            <a:ext cx="5532120" cy="4919472"/>
+            <a:ext cx="3566160" cy="2194560"/>
           </a:xfrm>
           <a:prstGeom prst="roundRect">
             <a:avLst>
@@ -9062,7 +13027,7 @@
         <p:spPr>
           <a:xfrm>
             <a:off x="411480" y="1389888"/>
-            <a:ext cx="5532120" cy="475488"/>
+            <a:ext cx="3566160" cy="91440"/>
           </a:xfrm>
           <a:prstGeom prst="rect">
             <a:avLst/>
@@ -9104,8 +13069,8 @@
         </p:nvSpPr>
         <p:spPr>
           <a:xfrm>
-            <a:off x="594360" y="1444752"/>
-            <a:ext cx="5212080" cy="384048"/>
+            <a:off x="612648" y="1645920"/>
+            <a:ext cx="3163824" cy="777240"/>
           </a:xfrm>
           <a:prstGeom prst="rect">
             <a:avLst/>
@@ -9113,18 +13078,18 @@
           <a:noFill/>
         </p:spPr>
         <p:txBody>
-          <a:bodyPr wrap="square" anchor="ctr"/>
+          <a:bodyPr wrap="square" anchor="t"/>
           <a:lstStyle/>
           <a:p>
             <a:pPr algn="l"/>
             <a:r>
-              <a:rPr sz="1800" b="1">
-                <a:solidFill>
-                  <a:srgbClr val="FFFFFF"/>
+              <a:rPr sz="1600" b="1">
+                <a:solidFill>
+                  <a:srgbClr val="0B2545"/>
                 </a:solidFill>
                 <a:latin typeface="Calibri"/>
               </a:rPr>
-              <a:t>📄   Spec Validation</a:t>
+              <a:t>📄  Spec Validation</a:t>
             </a:r>
           </a:p>
         </p:txBody>
@@ -9137,8 +13102,8 @@
         </p:nvSpPr>
         <p:spPr>
           <a:xfrm>
-            <a:off x="640080" y="2011680"/>
-            <a:ext cx="5074920" cy="4023360"/>
+            <a:off x="612648" y="2441448"/>
+            <a:ext cx="3163824" cy="960120"/>
           </a:xfrm>
           <a:prstGeom prst="rect">
             <a:avLst/>
@@ -9157,13 +13122,7 @@
                 </a:solidFill>
                 <a:latin typeface="Calibri"/>
               </a:rPr>
-              <a:t>Upload our Word / PDF specification.
-LEON checks, like a very patient editor:
-• Are the mandatory chapters there? (Purpose, Scope, Requirements…)
-• Are leftover template words still there?  &lt;&lt;name&gt;&gt;, TBD, XXX
-• Does each requirement have an ID and a clear “shall”?
-You get a verdict (good / acceptable / not ready) and a Word report.
-Bonus: one click builds the empty conformity matrix so the supplier does not type 400 rows by hand.</a:t>
+              <a:t>Is our spec complete and clear before we send it?</a:t>
             </a:r>
           </a:p>
         </p:txBody>
@@ -9176,8 +13135,8 @@
         </p:nvSpPr>
         <p:spPr>
           <a:xfrm>
-            <a:off x="6172200" y="1389888"/>
-            <a:ext cx="5532120" cy="4919472"/>
+            <a:off x="4160520" y="1389888"/>
+            <a:ext cx="3566160" cy="2194560"/>
           </a:xfrm>
           <a:prstGeom prst="roundRect">
             <a:avLst>
@@ -9223,8 +13182,8 @@
         </p:nvSpPr>
         <p:spPr>
           <a:xfrm>
-            <a:off x="6172200" y="1389888"/>
-            <a:ext cx="5532120" cy="475488"/>
+            <a:off x="4160520" y="1389888"/>
+            <a:ext cx="3566160" cy="91440"/>
           </a:xfrm>
           <a:prstGeom prst="rect">
             <a:avLst/>
@@ -9266,8 +13225,8 @@
         </p:nvSpPr>
         <p:spPr>
           <a:xfrm>
-            <a:off x="6355080" y="1444752"/>
-            <a:ext cx="5212080" cy="384048"/>
+            <a:off x="4361688" y="1645920"/>
+            <a:ext cx="3163824" cy="777240"/>
           </a:xfrm>
           <a:prstGeom prst="rect">
             <a:avLst/>
@@ -9275,18 +13234,18 @@
           <a:noFill/>
         </p:spPr>
         <p:txBody>
-          <a:bodyPr wrap="square" anchor="ctr"/>
+          <a:bodyPr wrap="square" anchor="t"/>
           <a:lstStyle/>
           <a:p>
             <a:pPr algn="l"/>
             <a:r>
-              <a:rPr sz="1800" b="1">
-                <a:solidFill>
-                  <a:srgbClr val="FFFFFF"/>
+              <a:rPr sz="1600" b="1">
+                <a:solidFill>
+                  <a:srgbClr val="0B2545"/>
                 </a:solidFill>
                 <a:latin typeface="Calibri"/>
               </a:rPr>
-              <a:t>📊   Conformity Matrix</a:t>
+              <a:t>📊  Conformity Matrix</a:t>
             </a:r>
           </a:p>
         </p:txBody>
@@ -9299,8 +13258,8 @@
         </p:nvSpPr>
         <p:spPr>
           <a:xfrm>
-            <a:off x="6400800" y="2011680"/>
-            <a:ext cx="5074920" cy="4023360"/>
+            <a:off x="4361688" y="2441448"/>
+            <a:ext cx="3163824" cy="960120"/>
           </a:xfrm>
           <a:prstGeom prst="rect">
             <a:avLst/>
@@ -9319,19 +13278,638 @@
                 </a:solidFill>
                 <a:latin typeface="Calibri"/>
               </a:rPr>
-              <a:t>Upload the supplier’s Excel / ODS — even if they renamed columns.
-LEON counts OK / NOK / NA, draws a pie chart, and lists every row.
-Then it re-reads every OK comment and raises a “point of attention” when:
-• the comment contradicts the tick  (“OK” + “not validated”)
-• conformity is only partial or still pending
-You download a colour-coded Excel (green / red / grey) for the meeting.</a:t>
-            </a:r>
-          </a:p>
-        </p:txBody>
-      </p:sp>
-      <p:sp>
-        <p:nvSpPr>
-          <p:cNvPr id="16" name="Rectangle 15"/>
+              <a:t>Read the supplier Excel: OK / NOK / NA and catch fake OK.</a:t>
+            </a:r>
+          </a:p>
+        </p:txBody>
+      </p:sp>
+      <p:sp>
+        <p:nvSpPr>
+          <p:cNvPr id="16" name="Rounded Rectangle 15"/>
+          <p:cNvSpPr/>
+          <p:nvPr/>
+        </p:nvSpPr>
+        <p:spPr>
+          <a:xfrm>
+            <a:off x="7909560" y="1389888"/>
+            <a:ext cx="3566160" cy="2194560"/>
+          </a:xfrm>
+          <a:prstGeom prst="roundRect">
+            <a:avLst>
+              <a:gd name="adj" fmla="val 8000"/>
+            </a:avLst>
+          </a:prstGeom>
+          <a:solidFill>
+            <a:srgbClr val="FFFFFF"/>
+          </a:solidFill>
+          <a:ln w="12700">
+            <a:solidFill>
+              <a:srgbClr val="DDE3EC"/>
+            </a:solidFill>
+          </a:ln>
+        </p:spPr>
+        <p:style>
+          <a:lnRef idx="1">
+            <a:schemeClr val="accent1"/>
+          </a:lnRef>
+          <a:fillRef idx="3">
+            <a:schemeClr val="accent1"/>
+          </a:fillRef>
+          <a:effectRef idx="2">
+            <a:schemeClr val="accent1"/>
+          </a:effectRef>
+          <a:fontRef idx="minor">
+            <a:schemeClr val="lt1"/>
+          </a:fontRef>
+        </p:style>
+        <p:txBody>
+          <a:bodyPr rtlCol="0" anchor="ctr"/>
+          <a:lstStyle/>
+          <a:p>
+            <a:pPr algn="ctr"/>
+          </a:p>
+        </p:txBody>
+      </p:sp>
+      <p:sp>
+        <p:nvSpPr>
+          <p:cNvPr id="17" name="Rectangle 16"/>
+          <p:cNvSpPr/>
+          <p:nvPr/>
+        </p:nvSpPr>
+        <p:spPr>
+          <a:xfrm>
+            <a:off x="7909560" y="1389888"/>
+            <a:ext cx="3566160" cy="91440"/>
+          </a:xfrm>
+          <a:prstGeom prst="rect">
+            <a:avLst/>
+          </a:prstGeom>
+          <a:solidFill>
+            <a:srgbClr val="123061"/>
+          </a:solidFill>
+          <a:ln>
+            <a:noFill/>
+          </a:ln>
+        </p:spPr>
+        <p:style>
+          <a:lnRef idx="1">
+            <a:schemeClr val="accent1"/>
+          </a:lnRef>
+          <a:fillRef idx="3">
+            <a:schemeClr val="accent1"/>
+          </a:fillRef>
+          <a:effectRef idx="2">
+            <a:schemeClr val="accent1"/>
+          </a:effectRef>
+          <a:fontRef idx="minor">
+            <a:schemeClr val="lt1"/>
+          </a:fontRef>
+        </p:style>
+        <p:txBody>
+          <a:bodyPr rtlCol="0" anchor="ctr"/>
+          <a:lstStyle/>
+          <a:p>
+            <a:pPr algn="ctr"/>
+          </a:p>
+        </p:txBody>
+      </p:sp>
+      <p:sp>
+        <p:nvSpPr>
+          <p:cNvPr id="18" name="TextBox 17"/>
+          <p:cNvSpPr txBox="1"/>
+          <p:nvPr/>
+        </p:nvSpPr>
+        <p:spPr>
+          <a:xfrm>
+            <a:off x="8110728" y="1645920"/>
+            <a:ext cx="3163824" cy="777240"/>
+          </a:xfrm>
+          <a:prstGeom prst="rect">
+            <a:avLst/>
+          </a:prstGeom>
+          <a:noFill/>
+        </p:spPr>
+        <p:txBody>
+          <a:bodyPr wrap="square" anchor="t"/>
+          <a:lstStyle/>
+          <a:p>
+            <a:pPr algn="l"/>
+            <a:r>
+              <a:rPr sz="1600" b="1">
+                <a:solidFill>
+                  <a:srgbClr val="0B2545"/>
+                </a:solidFill>
+                <a:latin typeface="Calibri"/>
+              </a:rPr>
+              <a:t>🔎  Matrix ↔ TDR</a:t>
+            </a:r>
+          </a:p>
+        </p:txBody>
+      </p:sp>
+      <p:sp>
+        <p:nvSpPr>
+          <p:cNvPr id="19" name="TextBox 18"/>
+          <p:cNvSpPr txBox="1"/>
+          <p:nvPr/>
+        </p:nvSpPr>
+        <p:spPr>
+          <a:xfrm>
+            <a:off x="8110728" y="2441448"/>
+            <a:ext cx="3163824" cy="960120"/>
+          </a:xfrm>
+          <a:prstGeom prst="rect">
+            <a:avLst/>
+          </a:prstGeom>
+          <a:noFill/>
+        </p:spPr>
+        <p:txBody>
+          <a:bodyPr wrap="square" anchor="t"/>
+          <a:lstStyle/>
+          <a:p>
+            <a:pPr algn="l"/>
+            <a:r>
+              <a:rPr sz="1400" b="0">
+                <a:solidFill>
+                  <a:srgbClr val="1C2B3A"/>
+                </a:solidFill>
+                <a:latin typeface="Calibri"/>
+              </a:rPr>
+              <a:t>Do the ticks match the proof in the PowerPoint / PDF?</a:t>
+            </a:r>
+          </a:p>
+        </p:txBody>
+      </p:sp>
+      <p:sp>
+        <p:nvSpPr>
+          <p:cNvPr id="20" name="Rounded Rectangle 19"/>
+          <p:cNvSpPr/>
+          <p:nvPr/>
+        </p:nvSpPr>
+        <p:spPr>
+          <a:xfrm>
+            <a:off x="411480" y="3794760"/>
+            <a:ext cx="3566160" cy="2194560"/>
+          </a:xfrm>
+          <a:prstGeom prst="roundRect">
+            <a:avLst>
+              <a:gd name="adj" fmla="val 8000"/>
+            </a:avLst>
+          </a:prstGeom>
+          <a:solidFill>
+            <a:srgbClr val="FFFFFF"/>
+          </a:solidFill>
+          <a:ln w="12700">
+            <a:solidFill>
+              <a:srgbClr val="DDE3EC"/>
+            </a:solidFill>
+          </a:ln>
+        </p:spPr>
+        <p:style>
+          <a:lnRef idx="1">
+            <a:schemeClr val="accent1"/>
+          </a:lnRef>
+          <a:fillRef idx="3">
+            <a:schemeClr val="accent1"/>
+          </a:fillRef>
+          <a:effectRef idx="2">
+            <a:schemeClr val="accent1"/>
+          </a:effectRef>
+          <a:fontRef idx="minor">
+            <a:schemeClr val="lt1"/>
+          </a:fontRef>
+        </p:style>
+        <p:txBody>
+          <a:bodyPr rtlCol="0" anchor="ctr"/>
+          <a:lstStyle/>
+          <a:p>
+            <a:pPr algn="ctr"/>
+          </a:p>
+        </p:txBody>
+      </p:sp>
+      <p:sp>
+        <p:nvSpPr>
+          <p:cNvPr id="21" name="Rectangle 20"/>
+          <p:cNvSpPr/>
+          <p:nvPr/>
+        </p:nvSpPr>
+        <p:spPr>
+          <a:xfrm>
+            <a:off x="411480" y="3794760"/>
+            <a:ext cx="3566160" cy="91440"/>
+          </a:xfrm>
+          <a:prstGeom prst="rect">
+            <a:avLst/>
+          </a:prstGeom>
+          <a:solidFill>
+            <a:srgbClr val="157347"/>
+          </a:solidFill>
+          <a:ln>
+            <a:noFill/>
+          </a:ln>
+        </p:spPr>
+        <p:style>
+          <a:lnRef idx="1">
+            <a:schemeClr val="accent1"/>
+          </a:lnRef>
+          <a:fillRef idx="3">
+            <a:schemeClr val="accent1"/>
+          </a:fillRef>
+          <a:effectRef idx="2">
+            <a:schemeClr val="accent1"/>
+          </a:effectRef>
+          <a:fontRef idx="minor">
+            <a:schemeClr val="lt1"/>
+          </a:fontRef>
+        </p:style>
+        <p:txBody>
+          <a:bodyPr rtlCol="0" anchor="ctr"/>
+          <a:lstStyle/>
+          <a:p>
+            <a:pPr algn="ctr"/>
+          </a:p>
+        </p:txBody>
+      </p:sp>
+      <p:sp>
+        <p:nvSpPr>
+          <p:cNvPr id="22" name="TextBox 21"/>
+          <p:cNvSpPr txBox="1"/>
+          <p:nvPr/>
+        </p:nvSpPr>
+        <p:spPr>
+          <a:xfrm>
+            <a:off x="612648" y="4050792"/>
+            <a:ext cx="3163824" cy="777240"/>
+          </a:xfrm>
+          <a:prstGeom prst="rect">
+            <a:avLst/>
+          </a:prstGeom>
+          <a:noFill/>
+        </p:spPr>
+        <p:txBody>
+          <a:bodyPr wrap="square" anchor="t"/>
+          <a:lstStyle/>
+          <a:p>
+            <a:pPr algn="l"/>
+            <a:r>
+              <a:rPr sz="1600" b="1">
+                <a:solidFill>
+                  <a:srgbClr val="0B2545"/>
+                </a:solidFill>
+                <a:latin typeface="Calibri"/>
+              </a:rPr>
+              <a:t>🏁  TDR Benchmark</a:t>
+            </a:r>
+          </a:p>
+        </p:txBody>
+      </p:sp>
+      <p:sp>
+        <p:nvSpPr>
+          <p:cNvPr id="23" name="TextBox 22"/>
+          <p:cNvSpPr txBox="1"/>
+          <p:nvPr/>
+        </p:nvSpPr>
+        <p:spPr>
+          <a:xfrm>
+            <a:off x="612648" y="4846320"/>
+            <a:ext cx="3163824" cy="960120"/>
+          </a:xfrm>
+          <a:prstGeom prst="rect">
+            <a:avLst/>
+          </a:prstGeom>
+          <a:noFill/>
+        </p:spPr>
+        <p:txBody>
+          <a:bodyPr wrap="square" anchor="t"/>
+          <a:lstStyle/>
+          <a:p>
+            <a:pPr algn="l"/>
+            <a:r>
+              <a:rPr sz="1400" b="0">
+                <a:solidFill>
+                  <a:srgbClr val="1C2B3A"/>
+                </a:solidFill>
+                <a:latin typeface="Calibri"/>
+              </a:rPr>
+              <a:t>Compare several suppliers’ technical offers, side by side.</a:t>
+            </a:r>
+          </a:p>
+        </p:txBody>
+      </p:sp>
+      <p:sp>
+        <p:nvSpPr>
+          <p:cNvPr id="24" name="Rounded Rectangle 23"/>
+          <p:cNvSpPr/>
+          <p:nvPr/>
+        </p:nvSpPr>
+        <p:spPr>
+          <a:xfrm>
+            <a:off x="4160520" y="3794760"/>
+            <a:ext cx="3566160" cy="2194560"/>
+          </a:xfrm>
+          <a:prstGeom prst="roundRect">
+            <a:avLst>
+              <a:gd name="adj" fmla="val 8000"/>
+            </a:avLst>
+          </a:prstGeom>
+          <a:solidFill>
+            <a:srgbClr val="FFFFFF"/>
+          </a:solidFill>
+          <a:ln w="12700">
+            <a:solidFill>
+              <a:srgbClr val="DDE3EC"/>
+            </a:solidFill>
+          </a:ln>
+        </p:spPr>
+        <p:style>
+          <a:lnRef idx="1">
+            <a:schemeClr val="accent1"/>
+          </a:lnRef>
+          <a:fillRef idx="3">
+            <a:schemeClr val="accent1"/>
+          </a:fillRef>
+          <a:effectRef idx="2">
+            <a:schemeClr val="accent1"/>
+          </a:effectRef>
+          <a:fontRef idx="minor">
+            <a:schemeClr val="lt1"/>
+          </a:fontRef>
+        </p:style>
+        <p:txBody>
+          <a:bodyPr rtlCol="0" anchor="ctr"/>
+          <a:lstStyle/>
+          <a:p>
+            <a:pPr algn="ctr"/>
+          </a:p>
+        </p:txBody>
+      </p:sp>
+      <p:sp>
+        <p:nvSpPr>
+          <p:cNvPr id="25" name="Rectangle 24"/>
+          <p:cNvSpPr/>
+          <p:nvPr/>
+        </p:nvSpPr>
+        <p:spPr>
+          <a:xfrm>
+            <a:off x="4160520" y="3794760"/>
+            <a:ext cx="3566160" cy="91440"/>
+          </a:xfrm>
+          <a:prstGeom prst="rect">
+            <a:avLst/>
+          </a:prstGeom>
+          <a:solidFill>
+            <a:srgbClr val="5B6B7C"/>
+          </a:solidFill>
+          <a:ln>
+            <a:noFill/>
+          </a:ln>
+        </p:spPr>
+        <p:style>
+          <a:lnRef idx="1">
+            <a:schemeClr val="accent1"/>
+          </a:lnRef>
+          <a:fillRef idx="3">
+            <a:schemeClr val="accent1"/>
+          </a:fillRef>
+          <a:effectRef idx="2">
+            <a:schemeClr val="accent1"/>
+          </a:effectRef>
+          <a:fontRef idx="minor">
+            <a:schemeClr val="lt1"/>
+          </a:fontRef>
+        </p:style>
+        <p:txBody>
+          <a:bodyPr rtlCol="0" anchor="ctr"/>
+          <a:lstStyle/>
+          <a:p>
+            <a:pPr algn="ctr"/>
+          </a:p>
+        </p:txBody>
+      </p:sp>
+      <p:sp>
+        <p:nvSpPr>
+          <p:cNvPr id="26" name="TextBox 25"/>
+          <p:cNvSpPr txBox="1"/>
+          <p:nvPr/>
+        </p:nvSpPr>
+        <p:spPr>
+          <a:xfrm>
+            <a:off x="4361688" y="4050792"/>
+            <a:ext cx="3163824" cy="777240"/>
+          </a:xfrm>
+          <a:prstGeom prst="rect">
+            <a:avLst/>
+          </a:prstGeom>
+          <a:noFill/>
+        </p:spPr>
+        <p:txBody>
+          <a:bodyPr wrap="square" anchor="t"/>
+          <a:lstStyle/>
+          <a:p>
+            <a:pPr algn="l"/>
+            <a:r>
+              <a:rPr sz="1600" b="1">
+                <a:solidFill>
+                  <a:srgbClr val="0B2545"/>
+                </a:solidFill>
+                <a:latin typeface="Calibri"/>
+              </a:rPr>
+              <a:t>📉  Version Delta</a:t>
+            </a:r>
+          </a:p>
+        </p:txBody>
+      </p:sp>
+      <p:sp>
+        <p:nvSpPr>
+          <p:cNvPr id="27" name="TextBox 26"/>
+          <p:cNvSpPr txBox="1"/>
+          <p:nvPr/>
+        </p:nvSpPr>
+        <p:spPr>
+          <a:xfrm>
+            <a:off x="4361688" y="4846320"/>
+            <a:ext cx="3163824" cy="960120"/>
+          </a:xfrm>
+          <a:prstGeom prst="rect">
+            <a:avLst/>
+          </a:prstGeom>
+          <a:noFill/>
+        </p:spPr>
+        <p:txBody>
+          <a:bodyPr wrap="square" anchor="t"/>
+          <a:lstStyle/>
+          <a:p>
+            <a:pPr algn="l"/>
+            <a:r>
+              <a:rPr sz="1400" b="0">
+                <a:solidFill>
+                  <a:srgbClr val="1C2B3A"/>
+                </a:solidFill>
+                <a:latin typeface="Calibri"/>
+              </a:rPr>
+              <a:t>What changed between two versions of the same matrix?</a:t>
+            </a:r>
+          </a:p>
+        </p:txBody>
+      </p:sp>
+      <p:sp>
+        <p:nvSpPr>
+          <p:cNvPr id="28" name="Rounded Rectangle 27"/>
+          <p:cNvSpPr/>
+          <p:nvPr/>
+        </p:nvSpPr>
+        <p:spPr>
+          <a:xfrm>
+            <a:off x="7909560" y="3794760"/>
+            <a:ext cx="3566160" cy="2194560"/>
+          </a:xfrm>
+          <a:prstGeom prst="roundRect">
+            <a:avLst>
+              <a:gd name="adj" fmla="val 8000"/>
+            </a:avLst>
+          </a:prstGeom>
+          <a:solidFill>
+            <a:srgbClr val="FFFFFF"/>
+          </a:solidFill>
+          <a:ln w="12700">
+            <a:solidFill>
+              <a:srgbClr val="DDE3EC"/>
+            </a:solidFill>
+          </a:ln>
+        </p:spPr>
+        <p:style>
+          <a:lnRef idx="1">
+            <a:schemeClr val="accent1"/>
+          </a:lnRef>
+          <a:fillRef idx="3">
+            <a:schemeClr val="accent1"/>
+          </a:fillRef>
+          <a:effectRef idx="2">
+            <a:schemeClr val="accent1"/>
+          </a:effectRef>
+          <a:fontRef idx="minor">
+            <a:schemeClr val="lt1"/>
+          </a:fontRef>
+        </p:style>
+        <p:txBody>
+          <a:bodyPr rtlCol="0" anchor="ctr"/>
+          <a:lstStyle/>
+          <a:p>
+            <a:pPr algn="ctr"/>
+          </a:p>
+        </p:txBody>
+      </p:sp>
+      <p:sp>
+        <p:nvSpPr>
+          <p:cNvPr id="29" name="Rectangle 28"/>
+          <p:cNvSpPr/>
+          <p:nvPr/>
+        </p:nvSpPr>
+        <p:spPr>
+          <a:xfrm>
+            <a:off x="7909560" y="3794760"/>
+            <a:ext cx="3566160" cy="91440"/>
+          </a:xfrm>
+          <a:prstGeom prst="rect">
+            <a:avLst/>
+          </a:prstGeom>
+          <a:solidFill>
+            <a:srgbClr val="1D4ED8"/>
+          </a:solidFill>
+          <a:ln>
+            <a:noFill/>
+          </a:ln>
+        </p:spPr>
+        <p:style>
+          <a:lnRef idx="1">
+            <a:schemeClr val="accent1"/>
+          </a:lnRef>
+          <a:fillRef idx="3">
+            <a:schemeClr val="accent1"/>
+          </a:fillRef>
+          <a:effectRef idx="2">
+            <a:schemeClr val="accent1"/>
+          </a:effectRef>
+          <a:fontRef idx="minor">
+            <a:schemeClr val="lt1"/>
+          </a:fontRef>
+        </p:style>
+        <p:txBody>
+          <a:bodyPr rtlCol="0" anchor="ctr"/>
+          <a:lstStyle/>
+          <a:p>
+            <a:pPr algn="ctr"/>
+          </a:p>
+        </p:txBody>
+      </p:sp>
+      <p:sp>
+        <p:nvSpPr>
+          <p:cNvPr id="30" name="TextBox 29"/>
+          <p:cNvSpPr txBox="1"/>
+          <p:nvPr/>
+        </p:nvSpPr>
+        <p:spPr>
+          <a:xfrm>
+            <a:off x="8110728" y="4050792"/>
+            <a:ext cx="3163824" cy="777240"/>
+          </a:xfrm>
+          <a:prstGeom prst="rect">
+            <a:avLst/>
+          </a:prstGeom>
+          <a:noFill/>
+        </p:spPr>
+        <p:txBody>
+          <a:bodyPr wrap="square" anchor="t"/>
+          <a:lstStyle/>
+          <a:p>
+            <a:pPr algn="l"/>
+            <a:r>
+              <a:rPr sz="1600" b="1">
+                <a:solidFill>
+                  <a:srgbClr val="0B2545"/>
+                </a:solidFill>
+                <a:latin typeface="Calibri"/>
+              </a:rPr>
+              <a:t>🔗  Matrix + evidence</a:t>
+            </a:r>
+          </a:p>
+        </p:txBody>
+      </p:sp>
+      <p:sp>
+        <p:nvSpPr>
+          <p:cNvPr id="31" name="TextBox 30"/>
+          <p:cNvSpPr txBox="1"/>
+          <p:nvPr/>
+        </p:nvSpPr>
+        <p:spPr>
+          <a:xfrm>
+            <a:off x="8110728" y="4846320"/>
+            <a:ext cx="3163824" cy="960120"/>
+          </a:xfrm>
+          <a:prstGeom prst="rect">
+            <a:avLst/>
+          </a:prstGeom>
+          <a:noFill/>
+        </p:spPr>
+        <p:txBody>
+          <a:bodyPr wrap="square" anchor="t"/>
+          <a:lstStyle/>
+          <a:p>
+            <a:pPr algn="l"/>
+            <a:r>
+              <a:rPr sz="1400" b="0">
+                <a:solidFill>
+                  <a:srgbClr val="1C2B3A"/>
+                </a:solidFill>
+                <a:latin typeface="Calibri"/>
+              </a:rPr>
+              <a:t>Find the page that talks about a given requirement.</a:t>
+            </a:r>
+          </a:p>
+        </p:txBody>
+      </p:sp>
+      <p:sp>
+        <p:nvSpPr>
+          <p:cNvPr id="32" name="Rectangle 31"/>
           <p:cNvSpPr/>
           <p:nvPr/>
         </p:nvSpPr>
@@ -9374,7 +13952,7 @@
       </p:sp>
       <p:sp>
         <p:nvSpPr>
-          <p:cNvPr id="17" name="TextBox 16"/>
+          <p:cNvPr id="33" name="TextBox 32"/>
           <p:cNvSpPr txBox="1"/>
           <p:nvPr/>
         </p:nvSpPr>
@@ -9400,14 +13978,14 @@
                 </a:solidFill>
                 <a:latin typeface="Calibri"/>
               </a:rPr>
-              <a:t>LEON  ·  Quality Analysis  ·  Internal briefing for non-specialists</a:t>
-            </a:r>
-          </a:p>
-        </p:txBody>
-      </p:sp>
-      <p:sp>
-        <p:nvSpPr>
-          <p:cNvPr id="18" name="TextBox 17"/>
+              <a:t>Khadija Benhamida  ·  Mechatronics Engineering  ·  First meeting</a:t>
+            </a:r>
+          </a:p>
+        </p:txBody>
+      </p:sp>
+      <p:sp>
+        <p:nvSpPr>
+          <p:cNvPr id="34" name="TextBox 33"/>
           <p:cNvSpPr txBox="1"/>
           <p:nvPr/>
         </p:nvSpPr>
@@ -9433,7 +14011,7 @@
                 </a:solidFill>
                 <a:latin typeface="Calibri"/>
               </a:rPr>
-              <a:t>6  /  8</a:t>
+              <a:t>6  /  13</a:t>
             </a:r>
           </a:p>
         </p:txBody>
@@ -9613,7 +14191,7 @@
                 </a:solidFill>
                 <a:latin typeface="Calibri"/>
               </a:rPr>
-              <a:t>JOBS 3 AND 4 — THE HEART OF THE WORK</a:t>
+              <a:t>JOBS 1 AND 2</a:t>
             </a:r>
           </a:p>
         </p:txBody>
@@ -9646,7 +14224,7 @@
                 </a:solidFill>
                 <a:latin typeface="Calibri"/>
               </a:rPr>
-              <a:t>The TDR is the proof. LEON puts the tick next to the proof.</a:t>
+              <a:t>First we clean our spec. Then we read their checklist.</a:t>
             </a:r>
           </a:p>
         </p:txBody>
@@ -9679,7 +14257,7 @@
                 </a:solidFill>
                 <a:latin typeface="Calibri"/>
               </a:rPr>
-              <a:t>This is the tab to show in a TDR meeting.</a:t>
+              <a:t>Two tabs that already save hours, even before looking at the TDR.</a:t>
             </a:r>
           </a:p>
         </p:txBody>
@@ -9692,122 +14270,8 @@
         </p:nvSpPr>
         <p:spPr>
           <a:xfrm>
-            <a:off x="411480" y="1353312"/>
-            <a:ext cx="11338560" cy="1234440"/>
-          </a:xfrm>
-          <a:prstGeom prst="roundRect">
-            <a:avLst>
-              <a:gd name="adj" fmla="val 8000"/>
-            </a:avLst>
-          </a:prstGeom>
-          <a:solidFill>
-            <a:srgbClr val="FBF3E6"/>
-          </a:solidFill>
-          <a:ln w="12700">
-            <a:solidFill>
-              <a:srgbClr val="9A5B00"/>
-            </a:solidFill>
-          </a:ln>
-        </p:spPr>
-        <p:style>
-          <a:lnRef idx="1">
-            <a:schemeClr val="accent1"/>
-          </a:lnRef>
-          <a:fillRef idx="3">
-            <a:schemeClr val="accent1"/>
-          </a:fillRef>
-          <a:effectRef idx="2">
-            <a:schemeClr val="accent1"/>
-          </a:effectRef>
-          <a:fontRef idx="minor">
-            <a:schemeClr val="lt1"/>
-          </a:fontRef>
-        </p:style>
-        <p:txBody>
-          <a:bodyPr rtlCol="0" anchor="ctr"/>
-          <a:lstStyle/>
-          <a:p>
-            <a:pPr algn="ctr"/>
-          </a:p>
-        </p:txBody>
-      </p:sp>
-      <p:sp>
-        <p:nvSpPr>
-          <p:cNvPr id="9" name="TextBox 8"/>
-          <p:cNvSpPr txBox="1"/>
-          <p:nvPr/>
-        </p:nvSpPr>
-        <p:spPr>
-          <a:xfrm>
-            <a:off x="640080" y="1444752"/>
-            <a:ext cx="10972800" cy="292608"/>
-          </a:xfrm>
-          <a:prstGeom prst="rect">
-            <a:avLst/>
-          </a:prstGeom>
-          <a:noFill/>
-        </p:spPr>
-        <p:txBody>
-          <a:bodyPr wrap="square" anchor="t"/>
-          <a:lstStyle/>
-          <a:p>
-            <a:pPr algn="l"/>
-            <a:r>
-              <a:rPr sz="1400" b="1">
-                <a:solidFill>
-                  <a:srgbClr val="9A5B00"/>
-                </a:solidFill>
-                <a:latin typeface="Calibri"/>
-              </a:rPr>
-              <a:t>A typical catch  —  contrast of the display</a:t>
-            </a:r>
-          </a:p>
-        </p:txBody>
-      </p:sp>
-      <p:sp>
-        <p:nvSpPr>
-          <p:cNvPr id="10" name="TextBox 9"/>
-          <p:cNvSpPr txBox="1"/>
-          <p:nvPr/>
-        </p:nvSpPr>
-        <p:spPr>
-          <a:xfrm>
-            <a:off x="640080" y="1755648"/>
-            <a:ext cx="10972800" cy="658368"/>
-          </a:xfrm>
-          <a:prstGeom prst="rect">
-            <a:avLst/>
-          </a:prstGeom>
-          <a:noFill/>
-        </p:spPr>
-        <p:txBody>
-          <a:bodyPr wrap="square" anchor="t"/>
-          <a:lstStyle/>
-          <a:p>
-            <a:pPr algn="l"/>
-            <a:r>
-              <a:rPr sz="1400" b="0">
-                <a:solidFill>
-                  <a:srgbClr val="1C2B3A"/>
-                </a:solidFill>
-                <a:latin typeface="Calibri"/>
-              </a:rPr>
-              <a:t>Stellantis asks:  contrast ≥ 400:1     ·     Matrix:  OK     ·     TDR slide 14:  380:1
-LEON opens on this kind of incoherence — not on the 200 rows that already match.</a:t>
-            </a:r>
-          </a:p>
-        </p:txBody>
-      </p:sp>
-      <p:sp>
-        <p:nvSpPr>
-          <p:cNvPr id="11" name="Rounded Rectangle 10"/>
-          <p:cNvSpPr/>
-          <p:nvPr/>
-        </p:nvSpPr>
-        <p:spPr>
-          <a:xfrm>
-            <a:off x="411480" y="2761488"/>
-            <a:ext cx="5532120" cy="3520440"/>
+            <a:off x="411480" y="1389888"/>
+            <a:ext cx="5532120" cy="4919472"/>
           </a:xfrm>
           <a:prstGeom prst="roundRect">
             <a:avLst>
@@ -9847,20 +14311,20 @@
       </p:sp>
       <p:sp>
         <p:nvSpPr>
-          <p:cNvPr id="12" name="Rectangle 11"/>
+          <p:cNvPr id="9" name="Rectangle 8"/>
           <p:cNvSpPr/>
           <p:nvPr/>
         </p:nvSpPr>
         <p:spPr>
           <a:xfrm>
-            <a:off x="411480" y="2761488"/>
-            <a:ext cx="73152" cy="3520440"/>
+            <a:off x="411480" y="1389888"/>
+            <a:ext cx="5532120" cy="475488"/>
           </a:xfrm>
           <a:prstGeom prst="rect">
             <a:avLst/>
           </a:prstGeom>
           <a:solidFill>
-            <a:srgbClr val="123061"/>
+            <a:srgbClr val="1D4ED8"/>
           </a:solidFill>
           <a:ln>
             <a:noFill/>
@@ -9890,14 +14354,14 @@
       </p:sp>
       <p:sp>
         <p:nvSpPr>
-          <p:cNvPr id="13" name="TextBox 12"/>
+          <p:cNvPr id="10" name="TextBox 9"/>
           <p:cNvSpPr txBox="1"/>
           <p:nvPr/>
         </p:nvSpPr>
         <p:spPr>
           <a:xfrm>
-            <a:off x="612648" y="2889504"/>
-            <a:ext cx="5221224" cy="347472"/>
+            <a:off x="594360" y="1444752"/>
+            <a:ext cx="5212080" cy="384048"/>
           </a:xfrm>
           <a:prstGeom prst="rect">
             <a:avLst/>
@@ -9905,32 +14369,32 @@
           <a:noFill/>
         </p:spPr>
         <p:txBody>
-          <a:bodyPr wrap="square" anchor="t"/>
+          <a:bodyPr wrap="square" anchor="ctr"/>
           <a:lstStyle/>
           <a:p>
             <a:pPr algn="l"/>
             <a:r>
-              <a:rPr sz="1600" b="1">
-                <a:solidFill>
-                  <a:srgbClr val="0B2545"/>
+              <a:rPr sz="1800" b="1">
+                <a:solidFill>
+                  <a:srgbClr val="FFFFFF"/>
                 </a:solidFill>
                 <a:latin typeface="Calibri"/>
               </a:rPr>
-              <a:t>🔎  Matrix ↔ TDR</a:t>
-            </a:r>
-          </a:p>
-        </p:txBody>
-      </p:sp>
-      <p:sp>
-        <p:nvSpPr>
-          <p:cNvPr id="14" name="TextBox 13"/>
+              <a:t>📄   Spec Validation</a:t>
+            </a:r>
+          </a:p>
+        </p:txBody>
+      </p:sp>
+      <p:sp>
+        <p:nvSpPr>
+          <p:cNvPr id="11" name="TextBox 10"/>
           <p:cNvSpPr txBox="1"/>
           <p:nvPr/>
         </p:nvSpPr>
         <p:spPr>
           <a:xfrm>
-            <a:off x="612648" y="3218688"/>
-            <a:ext cx="5221224" cy="2935224"/>
+            <a:off x="640080" y="2011680"/>
+            <a:ext cx="5074920" cy="4023360"/>
           </a:xfrm>
           <a:prstGeom prst="rect">
             <a:avLst/>
@@ -9943,30 +14407,33 @@
           <a:p>
             <a:pPr algn="l"/>
             <a:r>
-              <a:rPr sz="1300" b="0">
+              <a:rPr sz="1400" b="0">
                 <a:solidFill>
                   <a:srgbClr val="1C2B3A"/>
                 </a:solidFill>
                 <a:latin typeface="Calibri"/>
               </a:rPr>
-              <a:t>Upload the matrix and the supplier dossier (PPT / PDF / Word).
-For each requirement LEON writes four lines:
-what we asked · what they ticked · what the TDR says · which page.
-The engineer can confirm, correct or ask for real proof. Nothing is auto-accepted.</a:t>
-            </a:r>
-          </a:p>
-        </p:txBody>
-      </p:sp>
-      <p:sp>
-        <p:nvSpPr>
-          <p:cNvPr id="15" name="Rounded Rectangle 14"/>
+              <a:t>Upload our Word / PDF specification.
+LEON checks, like a very patient editor:
+• Are the mandatory chapters there? (Purpose, Scope, Requirements…)
+• Are leftover template words still there?  &lt;&lt;name&gt;&gt;, TBD, XXX
+• Does each requirement have an ID and a clear “shall”?
+You get a verdict (good / acceptable / not ready) and a Word report.
+Bonus: one click builds the empty conformity matrix so the supplier does not type 400 rows by hand.</a:t>
+            </a:r>
+          </a:p>
+        </p:txBody>
+      </p:sp>
+      <p:sp>
+        <p:nvSpPr>
+          <p:cNvPr id="12" name="Rounded Rectangle 11"/>
           <p:cNvSpPr/>
           <p:nvPr/>
         </p:nvSpPr>
         <p:spPr>
           <a:xfrm>
-            <a:off x="6172200" y="2761488"/>
-            <a:ext cx="5532120" cy="3520440"/>
+            <a:off x="6172200" y="1389888"/>
+            <a:ext cx="5532120" cy="4919472"/>
           </a:xfrm>
           <a:prstGeom prst="roundRect">
             <a:avLst>
@@ -10006,20 +14473,20 @@
       </p:sp>
       <p:sp>
         <p:nvSpPr>
-          <p:cNvPr id="16" name="Rectangle 15"/>
+          <p:cNvPr id="13" name="Rectangle 12"/>
           <p:cNvSpPr/>
           <p:nvPr/>
         </p:nvSpPr>
         <p:spPr>
           <a:xfrm>
-            <a:off x="6172200" y="2761488"/>
-            <a:ext cx="73152" cy="3520440"/>
+            <a:off x="6172200" y="1389888"/>
+            <a:ext cx="5532120" cy="475488"/>
           </a:xfrm>
           <a:prstGeom prst="rect">
             <a:avLst/>
           </a:prstGeom>
           <a:solidFill>
-            <a:srgbClr val="157347"/>
+            <a:srgbClr val="9A5B00"/>
           </a:solidFill>
           <a:ln>
             <a:noFill/>
@@ -10049,14 +14516,14 @@
       </p:sp>
       <p:sp>
         <p:nvSpPr>
-          <p:cNvPr id="17" name="TextBox 16"/>
+          <p:cNvPr id="14" name="TextBox 13"/>
           <p:cNvSpPr txBox="1"/>
           <p:nvPr/>
         </p:nvSpPr>
         <p:spPr>
           <a:xfrm>
-            <a:off x="6373368" y="2889504"/>
-            <a:ext cx="5221224" cy="347472"/>
+            <a:off x="6355080" y="1444752"/>
+            <a:ext cx="5212080" cy="384048"/>
           </a:xfrm>
           <a:prstGeom prst="rect">
             <a:avLst/>
@@ -10064,32 +14531,32 @@
           <a:noFill/>
         </p:spPr>
         <p:txBody>
-          <a:bodyPr wrap="square" anchor="t"/>
+          <a:bodyPr wrap="square" anchor="ctr"/>
           <a:lstStyle/>
           <a:p>
             <a:pPr algn="l"/>
             <a:r>
-              <a:rPr sz="1600" b="1">
-                <a:solidFill>
-                  <a:srgbClr val="0B2545"/>
+              <a:rPr sz="1800" b="1">
+                <a:solidFill>
+                  <a:srgbClr val="FFFFFF"/>
                 </a:solidFill>
                 <a:latin typeface="Calibri"/>
               </a:rPr>
-              <a:t>🏁  TDR Benchmark</a:t>
-            </a:r>
-          </a:p>
-        </p:txBody>
-      </p:sp>
-      <p:sp>
-        <p:nvSpPr>
-          <p:cNvPr id="18" name="TextBox 17"/>
+              <a:t>📊   Conformity Matrix</a:t>
+            </a:r>
+          </a:p>
+        </p:txBody>
+      </p:sp>
+      <p:sp>
+        <p:nvSpPr>
+          <p:cNvPr id="15" name="TextBox 14"/>
           <p:cNvSpPr txBox="1"/>
           <p:nvPr/>
         </p:nvSpPr>
         <p:spPr>
           <a:xfrm>
-            <a:off x="6373368" y="3218688"/>
-            <a:ext cx="5221224" cy="2935224"/>
+            <a:off x="6400800" y="2011680"/>
+            <a:ext cx="5074920" cy="4023360"/>
           </a:xfrm>
           <a:prstGeom prst="rect">
             <a:avLst/>
@@ -10102,22 +14569,25 @@
           <a:p>
             <a:pPr algn="l"/>
             <a:r>
-              <a:rPr sz="1300" b="0">
+              <a:rPr sz="1400" b="0">
                 <a:solidFill>
                   <a:srgbClr val="1C2B3A"/>
                 </a:solidFill>
                 <a:latin typeface="Calibri"/>
               </a:rPr>
-              <a:t>Several suppliers, several technical files — no prices, only the technique.
-LEON lines them up on the same topics: mechanics, display, electronics, safety, software, testing, industrialisation…
-You see strengths, gaps and open questions, then you still pick the partner.</a:t>
-            </a:r>
-          </a:p>
-        </p:txBody>
-      </p:sp>
-      <p:sp>
-        <p:nvSpPr>
-          <p:cNvPr id="19" name="Rectangle 18"/>
+              <a:t>Upload the supplier’s Excel / ODS — even if they renamed columns.
+LEON counts OK / NOK / NA, draws a pie chart, and lists every row.
+Then it re-reads every OK comment and raises a “point of attention” when:
+• the comment contradicts the tick  (“OK” + “not validated”)
+• conformity is only partial or still pending
+You download a colour-coded Excel (green / red / grey) for the meeting.</a:t>
+            </a:r>
+          </a:p>
+        </p:txBody>
+      </p:sp>
+      <p:sp>
+        <p:nvSpPr>
+          <p:cNvPr id="16" name="Rectangle 15"/>
           <p:cNvSpPr/>
           <p:nvPr/>
         </p:nvSpPr>
@@ -10160,7 +14630,7 @@
       </p:sp>
       <p:sp>
         <p:nvSpPr>
-          <p:cNvPr id="20" name="TextBox 19"/>
+          <p:cNvPr id="17" name="TextBox 16"/>
           <p:cNvSpPr txBox="1"/>
           <p:nvPr/>
         </p:nvSpPr>
@@ -10186,14 +14656,14 @@
                 </a:solidFill>
                 <a:latin typeface="Calibri"/>
               </a:rPr>
-              <a:t>LEON  ·  Quality Analysis  ·  Internal briefing for non-specialists</a:t>
-            </a:r>
-          </a:p>
-        </p:txBody>
-      </p:sp>
-      <p:sp>
-        <p:nvSpPr>
-          <p:cNvPr id="21" name="TextBox 20"/>
+              <a:t>Khadija Benhamida  ·  Mechatronics Engineering  ·  First meeting</a:t>
+            </a:r>
+          </a:p>
+        </p:txBody>
+      </p:sp>
+      <p:sp>
+        <p:nvSpPr>
+          <p:cNvPr id="18" name="TextBox 17"/>
           <p:cNvSpPr txBox="1"/>
           <p:nvPr/>
         </p:nvSpPr>
@@ -10219,7 +14689,7 @@
                 </a:solidFill>
                 <a:latin typeface="Calibri"/>
               </a:rPr>
-              <a:t>7  /  8</a:t>
+              <a:t>7  /  13</a:t>
             </a:r>
           </a:p>
         </p:txBody>
@@ -10399,7 +14869,7 @@
                 </a:solidFill>
                 <a:latin typeface="Calibri"/>
               </a:rPr>
-              <a:t>WHAT TO REMEMBER</a:t>
+              <a:t>JOBS 3 AND 4 — THE HEART OF THE WORK</a:t>
             </a:r>
           </a:p>
         </p:txBody>
@@ -10432,7 +14902,7 @@
                 </a:solidFill>
                 <a:latin typeface="Calibri"/>
               </a:rPr>
-              <a:t>LEON prepares the review. People remain in charge.</a:t>
+              <a:t>The TDR is the proof. LEON puts the tick next to the proof.</a:t>
             </a:r>
           </a:p>
         </p:txBody>
@@ -10465,7 +14935,7 @@
                 </a:solidFill>
                 <a:latin typeface="Calibri"/>
               </a:rPr>
-              <a:t>A first reading in minutes, so the meeting is about the real issues.</a:t>
+              <a:t>This is the tab to show in a TDR meeting.</a:t>
             </a:r>
           </a:p>
         </p:txBody>
@@ -10478,8 +14948,122 @@
         </p:nvSpPr>
         <p:spPr>
           <a:xfrm>
-            <a:off x="457200" y="1371600"/>
-            <a:ext cx="11247120" cy="960120"/>
+            <a:off x="411480" y="1353312"/>
+            <a:ext cx="11338560" cy="1234440"/>
+          </a:xfrm>
+          <a:prstGeom prst="roundRect">
+            <a:avLst>
+              <a:gd name="adj" fmla="val 8000"/>
+            </a:avLst>
+          </a:prstGeom>
+          <a:solidFill>
+            <a:srgbClr val="FBF3E6"/>
+          </a:solidFill>
+          <a:ln w="12700">
+            <a:solidFill>
+              <a:srgbClr val="9A5B00"/>
+            </a:solidFill>
+          </a:ln>
+        </p:spPr>
+        <p:style>
+          <a:lnRef idx="1">
+            <a:schemeClr val="accent1"/>
+          </a:lnRef>
+          <a:fillRef idx="3">
+            <a:schemeClr val="accent1"/>
+          </a:fillRef>
+          <a:effectRef idx="2">
+            <a:schemeClr val="accent1"/>
+          </a:effectRef>
+          <a:fontRef idx="minor">
+            <a:schemeClr val="lt1"/>
+          </a:fontRef>
+        </p:style>
+        <p:txBody>
+          <a:bodyPr rtlCol="0" anchor="ctr"/>
+          <a:lstStyle/>
+          <a:p>
+            <a:pPr algn="ctr"/>
+          </a:p>
+        </p:txBody>
+      </p:sp>
+      <p:sp>
+        <p:nvSpPr>
+          <p:cNvPr id="9" name="TextBox 8"/>
+          <p:cNvSpPr txBox="1"/>
+          <p:nvPr/>
+        </p:nvSpPr>
+        <p:spPr>
+          <a:xfrm>
+            <a:off x="640080" y="1444752"/>
+            <a:ext cx="10972800" cy="292608"/>
+          </a:xfrm>
+          <a:prstGeom prst="rect">
+            <a:avLst/>
+          </a:prstGeom>
+          <a:noFill/>
+        </p:spPr>
+        <p:txBody>
+          <a:bodyPr wrap="square" anchor="t"/>
+          <a:lstStyle/>
+          <a:p>
+            <a:pPr algn="l"/>
+            <a:r>
+              <a:rPr sz="1400" b="1">
+                <a:solidFill>
+                  <a:srgbClr val="9A5B00"/>
+                </a:solidFill>
+                <a:latin typeface="Calibri"/>
+              </a:rPr>
+              <a:t>A typical catch  —  contrast of the display</a:t>
+            </a:r>
+          </a:p>
+        </p:txBody>
+      </p:sp>
+      <p:sp>
+        <p:nvSpPr>
+          <p:cNvPr id="10" name="TextBox 9"/>
+          <p:cNvSpPr txBox="1"/>
+          <p:nvPr/>
+        </p:nvSpPr>
+        <p:spPr>
+          <a:xfrm>
+            <a:off x="640080" y="1755648"/>
+            <a:ext cx="10972800" cy="658368"/>
+          </a:xfrm>
+          <a:prstGeom prst="rect">
+            <a:avLst/>
+          </a:prstGeom>
+          <a:noFill/>
+        </p:spPr>
+        <p:txBody>
+          <a:bodyPr wrap="square" anchor="t"/>
+          <a:lstStyle/>
+          <a:p>
+            <a:pPr algn="l"/>
+            <a:r>
+              <a:rPr sz="1400" b="0">
+                <a:solidFill>
+                  <a:srgbClr val="1C2B3A"/>
+                </a:solidFill>
+                <a:latin typeface="Calibri"/>
+              </a:rPr>
+              <a:t>Stellantis asks:  contrast ≥ 400:1     ·     Matrix:  OK     ·     TDR slide 14:  380:1
+LEON opens on this kind of incoherence — not on the 200 rows that already match.</a:t>
+            </a:r>
+          </a:p>
+        </p:txBody>
+      </p:sp>
+      <p:sp>
+        <p:nvSpPr>
+          <p:cNvPr id="11" name="Rounded Rectangle 10"/>
+          <p:cNvSpPr/>
+          <p:nvPr/>
+        </p:nvSpPr>
+        <p:spPr>
+          <a:xfrm>
+            <a:off x="411480" y="2761488"/>
+            <a:ext cx="5532120" cy="3520440"/>
           </a:xfrm>
           <a:prstGeom prst="roundRect">
             <a:avLst>
@@ -10519,20 +15103,20 @@
       </p:sp>
       <p:sp>
         <p:nvSpPr>
-          <p:cNvPr id="9" name="Rectangle 8"/>
+          <p:cNvPr id="12" name="Rectangle 11"/>
           <p:cNvSpPr/>
           <p:nvPr/>
         </p:nvSpPr>
         <p:spPr>
           <a:xfrm>
-            <a:off x="457200" y="1371600"/>
-            <a:ext cx="109728" cy="960120"/>
+            <a:off x="411480" y="2761488"/>
+            <a:ext cx="73152" cy="3520440"/>
           </a:xfrm>
           <a:prstGeom prst="rect">
             <a:avLst/>
           </a:prstGeom>
           <a:solidFill>
-            <a:srgbClr val="157347"/>
+            <a:srgbClr val="123061"/>
           </a:solidFill>
           <a:ln>
             <a:noFill/>
@@ -10562,14 +15146,14 @@
       </p:sp>
       <p:sp>
         <p:nvSpPr>
-          <p:cNvPr id="10" name="TextBox 9"/>
+          <p:cNvPr id="13" name="TextBox 12"/>
           <p:cNvSpPr txBox="1"/>
           <p:nvPr/>
         </p:nvSpPr>
         <p:spPr>
           <a:xfrm>
-            <a:off x="777240" y="1481328"/>
-            <a:ext cx="10698480" cy="329184"/>
+            <a:off x="612648" y="2889504"/>
+            <a:ext cx="5221224" cy="347472"/>
           </a:xfrm>
           <a:prstGeom prst="rect">
             <a:avLst/>
@@ -10588,21 +15172,21 @@
                 </a:solidFill>
                 <a:latin typeface="Calibri"/>
               </a:rPr>
-              <a:t>Drop files in a browser</a:t>
-            </a:r>
-          </a:p>
-        </p:txBody>
-      </p:sp>
-      <p:sp>
-        <p:nvSpPr>
-          <p:cNvPr id="11" name="TextBox 10"/>
+              <a:t>🔎  Matrix ↔ TDR</a:t>
+            </a:r>
+          </a:p>
+        </p:txBody>
+      </p:sp>
+      <p:sp>
+        <p:nvSpPr>
+          <p:cNvPr id="14" name="TextBox 13"/>
           <p:cNvSpPr txBox="1"/>
           <p:nvPr/>
         </p:nvSpPr>
         <p:spPr>
           <a:xfrm>
-            <a:off x="777240" y="1810512"/>
-            <a:ext cx="10698480" cy="402336"/>
+            <a:off x="612648" y="3218688"/>
+            <a:ext cx="5221224" cy="2935224"/>
           </a:xfrm>
           <a:prstGeom prst="rect">
             <a:avLst/>
@@ -10615,27 +15199,30 @@
           <a:p>
             <a:pPr algn="l"/>
             <a:r>
-              <a:rPr sz="1400" b="0">
+              <a:rPr sz="1300" b="0">
                 <a:solidFill>
                   <a:srgbClr val="1C2B3A"/>
                 </a:solidFill>
                 <a:latin typeface="Calibri"/>
               </a:rPr>
-              <a:t>Spec, matrix, TDR. No software to install for the reviewer.</a:t>
-            </a:r>
-          </a:p>
-        </p:txBody>
-      </p:sp>
-      <p:sp>
-        <p:nvSpPr>
-          <p:cNvPr id="12" name="Rounded Rectangle 11"/>
+              <a:t>Upload the matrix and the supplier dossier (PPT / PDF / Word).
+For each requirement LEON writes four lines:
+what we asked · what they ticked · what the TDR says · which page.
+The engineer can confirm, correct or ask for real proof. Nothing is auto-accepted.</a:t>
+            </a:r>
+          </a:p>
+        </p:txBody>
+      </p:sp>
+      <p:sp>
+        <p:nvSpPr>
+          <p:cNvPr id="15" name="Rounded Rectangle 14"/>
           <p:cNvSpPr/>
           <p:nvPr/>
         </p:nvSpPr>
         <p:spPr>
           <a:xfrm>
-            <a:off x="457200" y="2423160"/>
-            <a:ext cx="11247120" cy="960120"/>
+            <a:off x="6172200" y="2761488"/>
+            <a:ext cx="5532120" cy="3520440"/>
           </a:xfrm>
           <a:prstGeom prst="roundRect">
             <a:avLst>
@@ -10675,14 +15262,338 @@
       </p:sp>
       <p:sp>
         <p:nvSpPr>
-          <p:cNvPr id="13" name="Rectangle 12"/>
+          <p:cNvPr id="16" name="Rectangle 15"/>
           <p:cNvSpPr/>
           <p:nvPr/>
         </p:nvSpPr>
         <p:spPr>
           <a:xfrm>
-            <a:off x="457200" y="2423160"/>
-            <a:ext cx="109728" cy="960120"/>
+            <a:off x="6172200" y="2761488"/>
+            <a:ext cx="73152" cy="3520440"/>
+          </a:xfrm>
+          <a:prstGeom prst="rect">
+            <a:avLst/>
+          </a:prstGeom>
+          <a:solidFill>
+            <a:srgbClr val="157347"/>
+          </a:solidFill>
+          <a:ln>
+            <a:noFill/>
+          </a:ln>
+        </p:spPr>
+        <p:style>
+          <a:lnRef idx="1">
+            <a:schemeClr val="accent1"/>
+          </a:lnRef>
+          <a:fillRef idx="3">
+            <a:schemeClr val="accent1"/>
+          </a:fillRef>
+          <a:effectRef idx="2">
+            <a:schemeClr val="accent1"/>
+          </a:effectRef>
+          <a:fontRef idx="minor">
+            <a:schemeClr val="lt1"/>
+          </a:fontRef>
+        </p:style>
+        <p:txBody>
+          <a:bodyPr rtlCol="0" anchor="ctr"/>
+          <a:lstStyle/>
+          <a:p>
+            <a:pPr algn="ctr"/>
+          </a:p>
+        </p:txBody>
+      </p:sp>
+      <p:sp>
+        <p:nvSpPr>
+          <p:cNvPr id="17" name="TextBox 16"/>
+          <p:cNvSpPr txBox="1"/>
+          <p:nvPr/>
+        </p:nvSpPr>
+        <p:spPr>
+          <a:xfrm>
+            <a:off x="6373368" y="2889504"/>
+            <a:ext cx="5221224" cy="347472"/>
+          </a:xfrm>
+          <a:prstGeom prst="rect">
+            <a:avLst/>
+          </a:prstGeom>
+          <a:noFill/>
+        </p:spPr>
+        <p:txBody>
+          <a:bodyPr wrap="square" anchor="t"/>
+          <a:lstStyle/>
+          <a:p>
+            <a:pPr algn="l"/>
+            <a:r>
+              <a:rPr sz="1600" b="1">
+                <a:solidFill>
+                  <a:srgbClr val="0B2545"/>
+                </a:solidFill>
+                <a:latin typeface="Calibri"/>
+              </a:rPr>
+              <a:t>🏁  TDR Benchmark</a:t>
+            </a:r>
+          </a:p>
+        </p:txBody>
+      </p:sp>
+      <p:sp>
+        <p:nvSpPr>
+          <p:cNvPr id="18" name="TextBox 17"/>
+          <p:cNvSpPr txBox="1"/>
+          <p:nvPr/>
+        </p:nvSpPr>
+        <p:spPr>
+          <a:xfrm>
+            <a:off x="6373368" y="3218688"/>
+            <a:ext cx="5221224" cy="2935224"/>
+          </a:xfrm>
+          <a:prstGeom prst="rect">
+            <a:avLst/>
+          </a:prstGeom>
+          <a:noFill/>
+        </p:spPr>
+        <p:txBody>
+          <a:bodyPr wrap="square" anchor="t"/>
+          <a:lstStyle/>
+          <a:p>
+            <a:pPr algn="l"/>
+            <a:r>
+              <a:rPr sz="1300" b="0">
+                <a:solidFill>
+                  <a:srgbClr val="1C2B3A"/>
+                </a:solidFill>
+                <a:latin typeface="Calibri"/>
+              </a:rPr>
+              <a:t>Several suppliers, several technical files — no prices, only the technique.
+LEON lines them up on the same topics: mechanics, display, electronics, safety, software, testing, industrialisation…
+You see strengths, gaps and open questions, then you still pick the partner.</a:t>
+            </a:r>
+          </a:p>
+        </p:txBody>
+      </p:sp>
+      <p:sp>
+        <p:nvSpPr>
+          <p:cNvPr id="19" name="Rectangle 18"/>
+          <p:cNvSpPr/>
+          <p:nvPr/>
+        </p:nvSpPr>
+        <p:spPr>
+          <a:xfrm>
+            <a:off x="0" y="6601968"/>
+            <a:ext cx="12191695" cy="256032"/>
+          </a:xfrm>
+          <a:prstGeom prst="rect">
+            <a:avLst/>
+          </a:prstGeom>
+          <a:solidFill>
+            <a:srgbClr val="0B2545"/>
+          </a:solidFill>
+          <a:ln>
+            <a:noFill/>
+          </a:ln>
+        </p:spPr>
+        <p:style>
+          <a:lnRef idx="1">
+            <a:schemeClr val="accent1"/>
+          </a:lnRef>
+          <a:fillRef idx="3">
+            <a:schemeClr val="accent1"/>
+          </a:fillRef>
+          <a:effectRef idx="2">
+            <a:schemeClr val="accent1"/>
+          </a:effectRef>
+          <a:fontRef idx="minor">
+            <a:schemeClr val="lt1"/>
+          </a:fontRef>
+        </p:style>
+        <p:txBody>
+          <a:bodyPr rtlCol="0" anchor="ctr"/>
+          <a:lstStyle/>
+          <a:p>
+            <a:pPr algn="ctr"/>
+          </a:p>
+        </p:txBody>
+      </p:sp>
+      <p:sp>
+        <p:nvSpPr>
+          <p:cNvPr id="20" name="TextBox 19"/>
+          <p:cNvSpPr txBox="1"/>
+          <p:nvPr/>
+        </p:nvSpPr>
+        <p:spPr>
+          <a:xfrm>
+            <a:off x="365760" y="6601968"/>
+            <a:ext cx="9144000" cy="256032"/>
+          </a:xfrm>
+          <a:prstGeom prst="rect">
+            <a:avLst/>
+          </a:prstGeom>
+          <a:noFill/>
+        </p:spPr>
+        <p:txBody>
+          <a:bodyPr wrap="square" anchor="ctr"/>
+          <a:lstStyle/>
+          <a:p>
+            <a:pPr algn="l"/>
+            <a:r>
+              <a:rPr sz="1100" b="0">
+                <a:solidFill>
+                  <a:srgbClr val="A9BCD4"/>
+                </a:solidFill>
+                <a:latin typeface="Calibri"/>
+              </a:rPr>
+              <a:t>Khadija Benhamida  ·  Mechatronics Engineering  ·  First meeting</a:t>
+            </a:r>
+          </a:p>
+        </p:txBody>
+      </p:sp>
+      <p:sp>
+        <p:nvSpPr>
+          <p:cNvPr id="21" name="TextBox 20"/>
+          <p:cNvSpPr txBox="1"/>
+          <p:nvPr/>
+        </p:nvSpPr>
+        <p:spPr>
+          <a:xfrm>
+            <a:off x="10424160" y="6601968"/>
+            <a:ext cx="1371600" cy="256032"/>
+          </a:xfrm>
+          <a:prstGeom prst="rect">
+            <a:avLst/>
+          </a:prstGeom>
+          <a:noFill/>
+        </p:spPr>
+        <p:txBody>
+          <a:bodyPr wrap="square" anchor="ctr"/>
+          <a:lstStyle/>
+          <a:p>
+            <a:pPr algn="r"/>
+            <a:r>
+              <a:rPr sz="1100" b="0">
+                <a:solidFill>
+                  <a:srgbClr val="FFFFFF"/>
+                </a:solidFill>
+                <a:latin typeface="Calibri"/>
+              </a:rPr>
+              <a:t>8  /  13</a:t>
+            </a:r>
+          </a:p>
+        </p:txBody>
+      </p:sp>
+    </p:spTree>
+  </p:cSld>
+  <p:clrMapOvr>
+    <a:masterClrMapping/>
+  </p:clrMapOvr>
+</p:sld>
+</file>
+
+<file path=ppt/slides/slide9.xml><?xml version="1.0" encoding="utf-8"?>
+<p:sld xmlns:a="http://schemas.openxmlformats.org/drawingml/2006/main" xmlns:p="http://schemas.openxmlformats.org/presentationml/2006/main" xmlns:r="http://schemas.openxmlformats.org/officeDocument/2006/relationships">
+  <p:cSld>
+    <p:spTree>
+      <p:nvGrpSpPr>
+        <p:cNvPr id="1" name=""/>
+        <p:cNvGrpSpPr/>
+        <p:nvPr/>
+      </p:nvGrpSpPr>
+      <p:grpSpPr/>
+      <p:sp>
+        <p:nvSpPr>
+          <p:cNvPr id="2" name="Rectangle 1"/>
+          <p:cNvSpPr/>
+          <p:nvPr/>
+        </p:nvSpPr>
+        <p:spPr>
+          <a:xfrm>
+            <a:off x="0" y="0"/>
+            <a:ext cx="12191695" cy="6858000"/>
+          </a:xfrm>
+          <a:prstGeom prst="rect">
+            <a:avLst/>
+          </a:prstGeom>
+          <a:solidFill>
+            <a:srgbClr val="F4F7FB"/>
+          </a:solidFill>
+          <a:ln>
+            <a:noFill/>
+          </a:ln>
+        </p:spPr>
+        <p:style>
+          <a:lnRef idx="1">
+            <a:schemeClr val="accent1"/>
+          </a:lnRef>
+          <a:fillRef idx="3">
+            <a:schemeClr val="accent1"/>
+          </a:fillRef>
+          <a:effectRef idx="2">
+            <a:schemeClr val="accent1"/>
+          </a:effectRef>
+          <a:fontRef idx="minor">
+            <a:schemeClr val="lt1"/>
+          </a:fontRef>
+        </p:style>
+        <p:txBody>
+          <a:bodyPr rtlCol="0" anchor="ctr"/>
+          <a:lstStyle/>
+          <a:p>
+            <a:pPr algn="ctr"/>
+          </a:p>
+        </p:txBody>
+      </p:sp>
+      <p:sp>
+        <p:nvSpPr>
+          <p:cNvPr id="3" name="Rectangle 2"/>
+          <p:cNvSpPr/>
+          <p:nvPr/>
+        </p:nvSpPr>
+        <p:spPr>
+          <a:xfrm>
+            <a:off x="0" y="0"/>
+            <a:ext cx="12191695" cy="1078992"/>
+          </a:xfrm>
+          <a:prstGeom prst="rect">
+            <a:avLst/>
+          </a:prstGeom>
+          <a:solidFill>
+            <a:srgbClr val="0B2545"/>
+          </a:solidFill>
+          <a:ln>
+            <a:noFill/>
+          </a:ln>
+        </p:spPr>
+        <p:style>
+          <a:lnRef idx="1">
+            <a:schemeClr val="accent1"/>
+          </a:lnRef>
+          <a:fillRef idx="3">
+            <a:schemeClr val="accent1"/>
+          </a:fillRef>
+          <a:effectRef idx="2">
+            <a:schemeClr val="accent1"/>
+          </a:effectRef>
+          <a:fontRef idx="minor">
+            <a:schemeClr val="lt1"/>
+          </a:fontRef>
+        </p:style>
+        <p:txBody>
+          <a:bodyPr rtlCol="0" anchor="ctr"/>
+          <a:lstStyle/>
+          <a:p>
+            <a:pPr algn="ctr"/>
+          </a:p>
+        </p:txBody>
+      </p:sp>
+      <p:sp>
+        <p:nvSpPr>
+          <p:cNvPr id="4" name="Rectangle 3"/>
+          <p:cNvSpPr/>
+          <p:nvPr/>
+        </p:nvSpPr>
+        <p:spPr>
+          <a:xfrm>
+            <a:off x="0" y="1078992"/>
+            <a:ext cx="12191695" cy="54864"/>
           </a:xfrm>
           <a:prstGeom prst="rect">
             <a:avLst/>
@@ -10718,14 +15629,14 @@
       </p:sp>
       <p:sp>
         <p:nvSpPr>
-          <p:cNvPr id="14" name="TextBox 13"/>
+          <p:cNvPr id="5" name="TextBox 4"/>
           <p:cNvSpPr txBox="1"/>
           <p:nvPr/>
         </p:nvSpPr>
         <p:spPr>
           <a:xfrm>
-            <a:off x="777240" y="2532888"/>
-            <a:ext cx="10698480" cy="329184"/>
+            <a:off x="457200" y="91440"/>
+            <a:ext cx="11247120" cy="256032"/>
           </a:xfrm>
           <a:prstGeom prst="rect">
             <a:avLst/>
@@ -10738,27 +15649,27 @@
           <a:p>
             <a:pPr algn="l"/>
             <a:r>
-              <a:rPr sz="1600" b="1">
-                <a:solidFill>
-                  <a:srgbClr val="0B2545"/>
+              <a:rPr sz="1100" b="1">
+                <a:solidFill>
+                  <a:srgbClr val="A9BCD4"/>
                 </a:solidFill>
                 <a:latin typeface="Calibri"/>
               </a:rPr>
-              <a:t>See mismatches first</a:t>
-            </a:r>
-          </a:p>
-        </p:txBody>
-      </p:sp>
-      <p:sp>
-        <p:nvSpPr>
-          <p:cNvPr id="15" name="TextBox 14"/>
+              <a:t>WHAT I HAVE DELIVERED SO FAR</a:t>
+            </a:r>
+          </a:p>
+        </p:txBody>
+      </p:sp>
+      <p:sp>
+        <p:nvSpPr>
+          <p:cNvPr id="6" name="TextBox 5"/>
           <p:cNvSpPr txBox="1"/>
           <p:nvPr/>
         </p:nvSpPr>
         <p:spPr>
           <a:xfrm>
-            <a:off x="777240" y="2862072"/>
-            <a:ext cx="10698480" cy="402336"/>
+            <a:off x="457200" y="310896"/>
+            <a:ext cx="11247120" cy="384048"/>
           </a:xfrm>
           <a:prstGeom prst="rect">
             <a:avLst/>
@@ -10771,26 +15682,59 @@
           <a:p>
             <a:pPr algn="l"/>
             <a:r>
-              <a:rPr sz="1400" b="0">
-                <a:solidFill>
-                  <a:srgbClr val="1C2B3A"/>
+              <a:rPr sz="2600" b="1">
+                <a:solidFill>
+                  <a:srgbClr val="FFFFFF"/>
                 </a:solidFill>
                 <a:latin typeface="Calibri"/>
               </a:rPr>
-              <a:t>Fake OK, missing proof, wrong numbers, version changes.</a:t>
-            </a:r>
-          </a:p>
-        </p:txBody>
-      </p:sp>
-      <p:sp>
-        <p:nvSpPr>
-          <p:cNvPr id="16" name="Rounded Rectangle 15"/>
+              <a:t>LEON prepares the review. People remain in charge.</a:t>
+            </a:r>
+          </a:p>
+        </p:txBody>
+      </p:sp>
+      <p:sp>
+        <p:nvSpPr>
+          <p:cNvPr id="7" name="TextBox 6"/>
+          <p:cNvSpPr txBox="1"/>
+          <p:nvPr/>
+        </p:nvSpPr>
+        <p:spPr>
+          <a:xfrm>
+            <a:off x="457200" y="713232"/>
+            <a:ext cx="11247120" cy="292608"/>
+          </a:xfrm>
+          <a:prstGeom prst="rect">
+            <a:avLst/>
+          </a:prstGeom>
+          <a:noFill/>
+        </p:spPr>
+        <p:txBody>
+          <a:bodyPr wrap="square" anchor="t"/>
+          <a:lstStyle/>
+          <a:p>
+            <a:pPr algn="l"/>
+            <a:r>
+              <a:rPr sz="1300" b="0">
+                <a:solidFill>
+                  <a:srgbClr val="C5D4E8"/>
+                </a:solidFill>
+                <a:latin typeface="Calibri"/>
+              </a:rPr>
+              <a:t>These are the points I have been working on — a first reading in minutes, so the meeting is about the real issues.</a:t>
+            </a:r>
+          </a:p>
+        </p:txBody>
+      </p:sp>
+      <p:sp>
+        <p:nvSpPr>
+          <p:cNvPr id="8" name="Rounded Rectangle 7"/>
           <p:cNvSpPr/>
           <p:nvPr/>
         </p:nvSpPr>
         <p:spPr>
           <a:xfrm>
-            <a:off x="457200" y="3474720"/>
+            <a:off x="457200" y="1371600"/>
             <a:ext cx="11247120" cy="960120"/>
           </a:xfrm>
           <a:prstGeom prst="roundRect">
@@ -10831,20 +15775,20 @@
       </p:sp>
       <p:sp>
         <p:nvSpPr>
-          <p:cNvPr id="17" name="Rectangle 16"/>
+          <p:cNvPr id="9" name="Rectangle 8"/>
           <p:cNvSpPr/>
           <p:nvPr/>
         </p:nvSpPr>
         <p:spPr>
           <a:xfrm>
-            <a:off x="457200" y="3474720"/>
+            <a:off x="457200" y="1371600"/>
             <a:ext cx="109728" cy="960120"/>
           </a:xfrm>
           <a:prstGeom prst="rect">
             <a:avLst/>
           </a:prstGeom>
           <a:solidFill>
-            <a:srgbClr val="9A5B00"/>
+            <a:srgbClr val="157347"/>
           </a:solidFill>
           <a:ln>
             <a:noFill/>
@@ -10874,13 +15818,13 @@
       </p:sp>
       <p:sp>
         <p:nvSpPr>
-          <p:cNvPr id="18" name="TextBox 17"/>
+          <p:cNvPr id="10" name="TextBox 9"/>
           <p:cNvSpPr txBox="1"/>
           <p:nvPr/>
         </p:nvSpPr>
         <p:spPr>
           <a:xfrm>
-            <a:off x="777240" y="3584448"/>
+            <a:off x="777240" y="1481328"/>
             <a:ext cx="10698480" cy="329184"/>
           </a:xfrm>
           <a:prstGeom prst="rect">
@@ -10900,20 +15844,20 @@
                 </a:solidFill>
                 <a:latin typeface="Calibri"/>
               </a:rPr>
-              <a:t>Leave with an Excel</a:t>
-            </a:r>
-          </a:p>
-        </p:txBody>
-      </p:sp>
-      <p:sp>
-        <p:nvSpPr>
-          <p:cNvPr id="19" name="TextBox 18"/>
+              <a:t>Drop files in a browser</a:t>
+            </a:r>
+          </a:p>
+        </p:txBody>
+      </p:sp>
+      <p:sp>
+        <p:nvSpPr>
+          <p:cNvPr id="11" name="TextBox 10"/>
           <p:cNvSpPr txBox="1"/>
           <p:nvPr/>
         </p:nvSpPr>
         <p:spPr>
           <a:xfrm>
-            <a:off x="777240" y="3913632"/>
+            <a:off x="777240" y="1810512"/>
             <a:ext cx="10698480" cy="402336"/>
           </a:xfrm>
           <a:prstGeom prst="rect">
@@ -10933,20 +15877,20 @@
                 </a:solidFill>
                 <a:latin typeface="Calibri"/>
               </a:rPr>
-              <a:t>Colour-coded report you can send to quality, purchasing or the supplier.</a:t>
-            </a:r>
-          </a:p>
-        </p:txBody>
-      </p:sp>
-      <p:sp>
-        <p:nvSpPr>
-          <p:cNvPr id="20" name="Rounded Rectangle 19"/>
+              <a:t>Spec, matrix, TDR. No software to install for the reviewer.</a:t>
+            </a:r>
+          </a:p>
+        </p:txBody>
+      </p:sp>
+      <p:sp>
+        <p:nvSpPr>
+          <p:cNvPr id="12" name="Rounded Rectangle 11"/>
           <p:cNvSpPr/>
           <p:nvPr/>
         </p:nvSpPr>
         <p:spPr>
           <a:xfrm>
-            <a:off x="457200" y="4526280"/>
+            <a:off x="457200" y="2423160"/>
             <a:ext cx="11247120" cy="960120"/>
           </a:xfrm>
           <a:prstGeom prst="roundRect">
@@ -10987,6 +15931,318 @@
       </p:sp>
       <p:sp>
         <p:nvSpPr>
+          <p:cNvPr id="13" name="Rectangle 12"/>
+          <p:cNvSpPr/>
+          <p:nvPr/>
+        </p:nvSpPr>
+        <p:spPr>
+          <a:xfrm>
+            <a:off x="457200" y="2423160"/>
+            <a:ext cx="109728" cy="960120"/>
+          </a:xfrm>
+          <a:prstGeom prst="rect">
+            <a:avLst/>
+          </a:prstGeom>
+          <a:solidFill>
+            <a:srgbClr val="1D4ED8"/>
+          </a:solidFill>
+          <a:ln>
+            <a:noFill/>
+          </a:ln>
+        </p:spPr>
+        <p:style>
+          <a:lnRef idx="1">
+            <a:schemeClr val="accent1"/>
+          </a:lnRef>
+          <a:fillRef idx="3">
+            <a:schemeClr val="accent1"/>
+          </a:fillRef>
+          <a:effectRef idx="2">
+            <a:schemeClr val="accent1"/>
+          </a:effectRef>
+          <a:fontRef idx="minor">
+            <a:schemeClr val="lt1"/>
+          </a:fontRef>
+        </p:style>
+        <p:txBody>
+          <a:bodyPr rtlCol="0" anchor="ctr"/>
+          <a:lstStyle/>
+          <a:p>
+            <a:pPr algn="ctr"/>
+          </a:p>
+        </p:txBody>
+      </p:sp>
+      <p:sp>
+        <p:nvSpPr>
+          <p:cNvPr id="14" name="TextBox 13"/>
+          <p:cNvSpPr txBox="1"/>
+          <p:nvPr/>
+        </p:nvSpPr>
+        <p:spPr>
+          <a:xfrm>
+            <a:off x="777240" y="2532888"/>
+            <a:ext cx="10698480" cy="329184"/>
+          </a:xfrm>
+          <a:prstGeom prst="rect">
+            <a:avLst/>
+          </a:prstGeom>
+          <a:noFill/>
+        </p:spPr>
+        <p:txBody>
+          <a:bodyPr wrap="square" anchor="t"/>
+          <a:lstStyle/>
+          <a:p>
+            <a:pPr algn="l"/>
+            <a:r>
+              <a:rPr sz="1600" b="1">
+                <a:solidFill>
+                  <a:srgbClr val="0B2545"/>
+                </a:solidFill>
+                <a:latin typeface="Calibri"/>
+              </a:rPr>
+              <a:t>See mismatches first</a:t>
+            </a:r>
+          </a:p>
+        </p:txBody>
+      </p:sp>
+      <p:sp>
+        <p:nvSpPr>
+          <p:cNvPr id="15" name="TextBox 14"/>
+          <p:cNvSpPr txBox="1"/>
+          <p:nvPr/>
+        </p:nvSpPr>
+        <p:spPr>
+          <a:xfrm>
+            <a:off x="777240" y="2862072"/>
+            <a:ext cx="10698480" cy="402336"/>
+          </a:xfrm>
+          <a:prstGeom prst="rect">
+            <a:avLst/>
+          </a:prstGeom>
+          <a:noFill/>
+        </p:spPr>
+        <p:txBody>
+          <a:bodyPr wrap="square" anchor="t"/>
+          <a:lstStyle/>
+          <a:p>
+            <a:pPr algn="l"/>
+            <a:r>
+              <a:rPr sz="1400" b="0">
+                <a:solidFill>
+                  <a:srgbClr val="1C2B3A"/>
+                </a:solidFill>
+                <a:latin typeface="Calibri"/>
+              </a:rPr>
+              <a:t>Fake OK, missing proof, wrong numbers, version changes.</a:t>
+            </a:r>
+          </a:p>
+        </p:txBody>
+      </p:sp>
+      <p:sp>
+        <p:nvSpPr>
+          <p:cNvPr id="16" name="Rounded Rectangle 15"/>
+          <p:cNvSpPr/>
+          <p:nvPr/>
+        </p:nvSpPr>
+        <p:spPr>
+          <a:xfrm>
+            <a:off x="457200" y="3474720"/>
+            <a:ext cx="11247120" cy="960120"/>
+          </a:xfrm>
+          <a:prstGeom prst="roundRect">
+            <a:avLst>
+              <a:gd name="adj" fmla="val 8000"/>
+            </a:avLst>
+          </a:prstGeom>
+          <a:solidFill>
+            <a:srgbClr val="FFFFFF"/>
+          </a:solidFill>
+          <a:ln w="12700">
+            <a:solidFill>
+              <a:srgbClr val="DDE3EC"/>
+            </a:solidFill>
+          </a:ln>
+        </p:spPr>
+        <p:style>
+          <a:lnRef idx="1">
+            <a:schemeClr val="accent1"/>
+          </a:lnRef>
+          <a:fillRef idx="3">
+            <a:schemeClr val="accent1"/>
+          </a:fillRef>
+          <a:effectRef idx="2">
+            <a:schemeClr val="accent1"/>
+          </a:effectRef>
+          <a:fontRef idx="minor">
+            <a:schemeClr val="lt1"/>
+          </a:fontRef>
+        </p:style>
+        <p:txBody>
+          <a:bodyPr rtlCol="0" anchor="ctr"/>
+          <a:lstStyle/>
+          <a:p>
+            <a:pPr algn="ctr"/>
+          </a:p>
+        </p:txBody>
+      </p:sp>
+      <p:sp>
+        <p:nvSpPr>
+          <p:cNvPr id="17" name="Rectangle 16"/>
+          <p:cNvSpPr/>
+          <p:nvPr/>
+        </p:nvSpPr>
+        <p:spPr>
+          <a:xfrm>
+            <a:off x="457200" y="3474720"/>
+            <a:ext cx="109728" cy="960120"/>
+          </a:xfrm>
+          <a:prstGeom prst="rect">
+            <a:avLst/>
+          </a:prstGeom>
+          <a:solidFill>
+            <a:srgbClr val="9A5B00"/>
+          </a:solidFill>
+          <a:ln>
+            <a:noFill/>
+          </a:ln>
+        </p:spPr>
+        <p:style>
+          <a:lnRef idx="1">
+            <a:schemeClr val="accent1"/>
+          </a:lnRef>
+          <a:fillRef idx="3">
+            <a:schemeClr val="accent1"/>
+          </a:fillRef>
+          <a:effectRef idx="2">
+            <a:schemeClr val="accent1"/>
+          </a:effectRef>
+          <a:fontRef idx="minor">
+            <a:schemeClr val="lt1"/>
+          </a:fontRef>
+        </p:style>
+        <p:txBody>
+          <a:bodyPr rtlCol="0" anchor="ctr"/>
+          <a:lstStyle/>
+          <a:p>
+            <a:pPr algn="ctr"/>
+          </a:p>
+        </p:txBody>
+      </p:sp>
+      <p:sp>
+        <p:nvSpPr>
+          <p:cNvPr id="18" name="TextBox 17"/>
+          <p:cNvSpPr txBox="1"/>
+          <p:nvPr/>
+        </p:nvSpPr>
+        <p:spPr>
+          <a:xfrm>
+            <a:off x="777240" y="3584448"/>
+            <a:ext cx="10698480" cy="329184"/>
+          </a:xfrm>
+          <a:prstGeom prst="rect">
+            <a:avLst/>
+          </a:prstGeom>
+          <a:noFill/>
+        </p:spPr>
+        <p:txBody>
+          <a:bodyPr wrap="square" anchor="t"/>
+          <a:lstStyle/>
+          <a:p>
+            <a:pPr algn="l"/>
+            <a:r>
+              <a:rPr sz="1600" b="1">
+                <a:solidFill>
+                  <a:srgbClr val="0B2545"/>
+                </a:solidFill>
+                <a:latin typeface="Calibri"/>
+              </a:rPr>
+              <a:t>Leave with an Excel</a:t>
+            </a:r>
+          </a:p>
+        </p:txBody>
+      </p:sp>
+      <p:sp>
+        <p:nvSpPr>
+          <p:cNvPr id="19" name="TextBox 18"/>
+          <p:cNvSpPr txBox="1"/>
+          <p:nvPr/>
+        </p:nvSpPr>
+        <p:spPr>
+          <a:xfrm>
+            <a:off x="777240" y="3913632"/>
+            <a:ext cx="10698480" cy="402336"/>
+          </a:xfrm>
+          <a:prstGeom prst="rect">
+            <a:avLst/>
+          </a:prstGeom>
+          <a:noFill/>
+        </p:spPr>
+        <p:txBody>
+          <a:bodyPr wrap="square" anchor="t"/>
+          <a:lstStyle/>
+          <a:p>
+            <a:pPr algn="l"/>
+            <a:r>
+              <a:rPr sz="1400" b="0">
+                <a:solidFill>
+                  <a:srgbClr val="1C2B3A"/>
+                </a:solidFill>
+                <a:latin typeface="Calibri"/>
+              </a:rPr>
+              <a:t>Colour-coded report you can send to quality, purchasing or the supplier.</a:t>
+            </a:r>
+          </a:p>
+        </p:txBody>
+      </p:sp>
+      <p:sp>
+        <p:nvSpPr>
+          <p:cNvPr id="20" name="Rounded Rectangle 19"/>
+          <p:cNvSpPr/>
+          <p:nvPr/>
+        </p:nvSpPr>
+        <p:spPr>
+          <a:xfrm>
+            <a:off x="457200" y="4526280"/>
+            <a:ext cx="11247120" cy="960120"/>
+          </a:xfrm>
+          <a:prstGeom prst="roundRect">
+            <a:avLst>
+              <a:gd name="adj" fmla="val 8000"/>
+            </a:avLst>
+          </a:prstGeom>
+          <a:solidFill>
+            <a:srgbClr val="FFFFFF"/>
+          </a:solidFill>
+          <a:ln w="12700">
+            <a:solidFill>
+              <a:srgbClr val="DDE3EC"/>
+            </a:solidFill>
+          </a:ln>
+        </p:spPr>
+        <p:style>
+          <a:lnRef idx="1">
+            <a:schemeClr val="accent1"/>
+          </a:lnRef>
+          <a:fillRef idx="3">
+            <a:schemeClr val="accent1"/>
+          </a:fillRef>
+          <a:effectRef idx="2">
+            <a:schemeClr val="accent1"/>
+          </a:effectRef>
+          <a:fontRef idx="minor">
+            <a:schemeClr val="lt1"/>
+          </a:fontRef>
+        </p:style>
+        <p:txBody>
+          <a:bodyPr rtlCol="0" anchor="ctr"/>
+          <a:lstStyle/>
+          <a:p>
+            <a:pPr algn="ctr"/>
+          </a:p>
+        </p:txBody>
+      </p:sp>
+      <p:sp>
+        <p:nvSpPr>
           <p:cNvPr id="21" name="Rectangle 20"/>
           <p:cNvSpPr/>
           <p:nvPr/>
@@ -11198,7 +16454,7 @@
                 </a:solidFill>
                 <a:latin typeface="Calibri"/>
               </a:rPr>
-              <a:t>LEON  ·  Quality Analysis  ·  Internal briefing for non-specialists</a:t>
+              <a:t>Khadija Benhamida  ·  Mechatronics Engineering  ·  First meeting</a:t>
             </a:r>
           </a:p>
         </p:txBody>
@@ -11231,7 +16487,7 @@
                 </a:solidFill>
                 <a:latin typeface="Calibri"/>
               </a:rPr>
-              <a:t>8  /  8</a:t>
+              <a:t>9  /  13</a:t>
             </a:r>
           </a:p>
         </p:txBody>

--- a/docs/LEON_intro_for_non_specialists.pptx
+++ b/docs/LEON_intro_for_non_specialists.pptx
@@ -18,6 +18,7 @@
     <p:sldId id="266" r:id="rId18"/>
     <p:sldId id="267" r:id="rId19"/>
     <p:sldId id="268" r:id="rId20"/>
+    <p:sldId id="269" r:id="rId21"/>
   </p:sldIdLst>
   <p:sldSz cx="12191695" cy="6858000" type="screen4x3"/>
   <p:notesSz cx="6858000" cy="9144000"/>
@@ -514,12 +515,7 @@
           <a:lstStyle/>
           <a:p>
             <a:r>
-              <a:t>Bonjour. This is my first meeting with you.</a:t>
-            </a:r>
-          </a:p>
-          <a:p>
-            <a:r>
-              <a:t>I will present the work I am doing on LEON, the people I work with on the mechatronics side, the next step (deployment), the AI training, and two points of availability I would like to confirm with you.</a:t>
+              <a:t>Introduce the meeting, the project name, and the collaboration. Then move to the agenda.</a:t>
             </a:r>
           </a:p>
         </p:txBody>
@@ -589,7 +585,7 @@
           <a:lstStyle/>
           <a:p>
             <a:r>
-              <a:t>Thank Imane and Patrick by name. Make clear you are the builder, they are the mechatronics experts. The manager should see you are not isolated.</a:t>
+              <a:t>Close the project part. Next: collaboration, status, training, organisation.</a:t>
             </a:r>
           </a:p>
         </p:txBody>
@@ -659,7 +655,7 @@
           <a:lstStyle/>
           <a:p>
             <a:r>
-              <a:t>Be clear: it is not live for everyone yet. Do not promise a date you do not have. The commitment is: finish this task, then deploy.</a:t>
+              <a:t>Acknowledge both colleagues by name.</a:t>
             </a:r>
           </a:p>
         </p:txBody>
@@ -729,7 +725,7 @@
           <a:lstStyle/>
           <a:p>
             <a:r>
-              <a:t>If the manager asks for the date or the provider, say you will confirm — do not invent a catalogue name. The message is: the team will be trained to use AI on our work, with the engineer remaining responsible.</a:t>
+              <a:t>Do not commit to a deployment date. Sequence: finish this phase, then deploy.</a:t>
             </a:r>
           </a:p>
         </p:txBody>
@@ -799,7 +795,77 @@
           <a:lstStyle/>
           <a:p>
             <a:r>
-              <a:t>Ask clearly for confirmation. Do not rush. TT = mercredi et vendredi. Next two weeks = first school period. Then thank the manager for the time.</a:t>
+              <a:t>Do not invent a training provider or date if not confirmed.</a:t>
+            </a:r>
+          </a:p>
+        </p:txBody>
+      </p:sp>
+      <p:sp>
+        <p:nvSpPr>
+          <p:cNvPr id="4" name="Slide Number Placeholder 3"/>
+          <p:cNvSpPr>
+            <a:spLocks noGrp="1"/>
+          </p:cNvSpPr>
+          <p:nvPr>
+            <p:ph type="sldNum" idx="5" sz="quarter"/>
+          </p:nvPr>
+        </p:nvSpPr>
+        <p:spPr/>
+      </p:sp>
+    </p:spTree>
+  </p:cSld>
+  <p:clrMapOvr>
+    <a:masterClrMapping/>
+  </p:clrMapOvr>
+</p:notes>
+</file>
+
+<file path=ppt/notesSlides/notesSlide14.xml><?xml version="1.0" encoding="utf-8"?>
+<p:notes xmlns:a="http://schemas.openxmlformats.org/drawingml/2006/main" xmlns:p="http://schemas.openxmlformats.org/presentationml/2006/main" xmlns:r="http://schemas.openxmlformats.org/officeDocument/2006/relationships">
+  <p:cSld>
+    <p:spTree>
+      <p:nvGrpSpPr>
+        <p:cNvPr id="1" name=""/>
+        <p:cNvGrpSpPr/>
+        <p:nvPr/>
+      </p:nvGrpSpPr>
+      <p:grpSpPr>
+        <a:xfrm>
+          <a:off x="0" y="0"/>
+          <a:ext cx="0" cy="0"/>
+          <a:chOff x="0" y="0"/>
+          <a:chExt cx="0" cy="0"/>
+        </a:xfrm>
+      </p:grpSpPr>
+      <p:sp>
+        <p:nvSpPr>
+          <p:cNvPr id="2" name="Slide Image Placeholder 1"/>
+          <p:cNvSpPr>
+            <a:spLocks noGrp="1"/>
+          </p:cNvSpPr>
+          <p:nvPr>
+            <p:ph type="sldImg" idx="2"/>
+          </p:nvPr>
+        </p:nvSpPr>
+        <p:spPr/>
+      </p:sp>
+      <p:sp>
+        <p:nvSpPr>
+          <p:cNvPr id="3" name="Notes Placeholder 2"/>
+          <p:cNvSpPr>
+            <a:spLocks noGrp="1"/>
+          </p:cNvSpPr>
+          <p:nvPr>
+            <p:ph type="body" idx="3" sz="quarter"/>
+          </p:nvPr>
+        </p:nvSpPr>
+        <p:spPr/>
+        <p:txBody>
+          <a:bodyPr/>
+          <a:lstStyle/>
+          <a:p>
+            <a:r>
+              <a:t>Ask for confirmation of TT Wednesday and Friday, and of the school period. Thank the manager.</a:t>
             </a:r>
           </a:p>
         </p:txBody>
@@ -869,7 +935,7 @@
           <a:lstStyle/>
           <a:p>
             <a:r>
-              <a:t>Walk the agenda in 20 seconds. Then go to the three documents.</a:t>
+              <a:t>Present the agenda briefly, then start with the project.</a:t>
             </a:r>
           </a:p>
         </p:txBody>
@@ -939,12 +1005,7 @@
           <a:lstStyle/>
           <a:p>
             <a:r>
-              <a:t>Spend time here. Most confusion later comes from mixing these three names.</a:t>
-            </a:r>
-          </a:p>
-          <a:p>
-            <a:r>
-              <a:t>SPEC = us. MATRIX = their checklist. TDR = their technical brochure.</a:t>
+              <a:t>This is the project definition. Then explain the three documents.</a:t>
             </a:r>
           </a:p>
         </p:txBody>
@@ -1014,7 +1075,7 @@
           <a:lstStyle/>
           <a:p>
             <a:r>
-              <a:t>The punchline: we are not replacing the engineer. We are catching the misses.</a:t>
+              <a:t>Specification = Stellantis. Matrix = supplier declaration. TDR = technical evidence. The three must tell the same story.</a:t>
             </a:r>
           </a:p>
         </p:txBody>
@@ -1084,7 +1145,7 @@
           <a:lstStyle/>
           <a:p>
             <a:r>
-              <a:t>If someone asks “is it AI?”, answer: it is a reading assistant. Some checks are simple rules (count the sections, compare two numbers). A person always remains responsible.</a:t>
+              <a:t>The project does not replace the engineer; it highlights the points that require attention.</a:t>
             </a:r>
           </a:p>
         </p:txBody>
@@ -1154,12 +1215,7 @@
           <a:lstStyle/>
           <a:p>
             <a:r>
-              <a:t>Walk the tabs left to right as the project timeline:</a:t>
-            </a:r>
-          </a:p>
-          <a:p>
-            <a:r>
-              <a:t>write spec → send matrix → receive filled matrix + TDR → compare suppliers → track versions.</a:t>
+              <a:t>LEON is a first analysis. The engineer remains accountable.</a:t>
             </a:r>
           </a:p>
         </p:txBody>
@@ -1229,7 +1285,7 @@
           <a:lstStyle/>
           <a:p>
             <a:r>
-              <a:t>Demo path: drop a matrix, show the pie, then open one red “point of attention”.</a:t>
+              <a:t>Present the six functions, then detail specification, matrix and TDR.</a:t>
             </a:r>
           </a:p>
         </p:txBody>
@@ -1299,12 +1355,7 @@
           <a:lstStyle/>
           <a:p>
             <a:r>
-              <a:t>Stress the example. Non-specialists remember one number (400 vs 380) better than a process.</a:t>
-            </a:r>
-          </a:p>
-          <a:p>
-            <a:r>
-              <a:t>Mention Version Delta only if asked: it shows NOK→OK between two Excel versions.</a:t>
+              <a:t>These two functions already produce a usable report before TDR cross-check.</a:t>
             </a:r>
           </a:p>
         </p:txBody>
@@ -1374,7 +1425,7 @@
           <a:lstStyle/>
           <a:p>
             <a:r>
-              <a:t>This is the close of the product part. Next slides: people, status, training, availability.</a:t>
+              <a:t>Use the contrast example. Mention version follow-up only if asked.</a:t>
             </a:r>
           </a:p>
         </p:txBody>
@@ -4570,7 +4621,7 @@
                 </a:solidFill>
                 <a:latin typeface="Calibri"/>
               </a:rPr>
-              <a:t>FIRST MEETING</a:t>
+              <a:t>STATUS MEETING  ·  OCTOBER 2026</a:t>
             </a:r>
           </a:p>
         </p:txBody>
@@ -4669,8 +4720,8 @@
                 </a:solidFill>
                 <a:latin typeface="Calibri"/>
               </a:rPr>
-              <a:t>Review of specifications, conformity matrices and technical dossiers (TDR)
-for the Mechatronics team.</a:t>
+              <a:t>Application supporting the review of specifications, conformity matrices
+and technical design dossiers (TDR).</a:t>
             </a:r>
           </a:p>
         </p:txBody>
@@ -4747,7 +4798,7 @@
                 <a:latin typeface="Calibri"/>
               </a:rPr>
               <a:t>In collaboration with Imane El Brouji and Patrick Garcia
-October 2026</a:t>
+Mechatronics Engineering</a:t>
             </a:r>
           </a:p>
         </p:txBody>
@@ -4901,7 +4952,7 @@
                 </a:solidFill>
                 <a:latin typeface="Calibri"/>
               </a:rPr>
-              <a:t>What we ask</a:t>
+              <a:t>Customer requirements</a:t>
             </a:r>
           </a:p>
         </p:txBody>
@@ -5055,7 +5106,7 @@
                 </a:solidFill>
                 <a:latin typeface="Calibri"/>
               </a:rPr>
-              <a:t>What they tick</a:t>
+              <a:t>Supplier declaration</a:t>
             </a:r>
           </a:p>
         </p:txBody>
@@ -5209,7 +5260,7 @@
                 </a:solidFill>
                 <a:latin typeface="Calibri"/>
               </a:rPr>
-              <a:t>What they prove</a:t>
+              <a:t>Technical evidence</a:t>
             </a:r>
           </a:p>
         </p:txBody>
@@ -5242,7 +5293,7 @@
                 </a:solidFill>
                 <a:latin typeface="Calibri"/>
               </a:rPr>
-              <a:t>Project in progress  ·  Deployment for the whole team once this step is finished</a:t>
+              <a:t>Status: development in progress  ·  Team deployment after completion of this phase</a:t>
             </a:r>
           </a:p>
         </p:txBody>
@@ -5422,7 +5473,7 @@
                 </a:solidFill>
                 <a:latin typeface="Calibri"/>
               </a:rPr>
-              <a:t>COLLABORATION</a:t>
+              <a:t>WORK COMPLETED TO DATE</a:t>
             </a:r>
           </a:p>
         </p:txBody>
@@ -5455,7 +5506,7 @@
                 </a:solidFill>
                 <a:latin typeface="Calibri"/>
               </a:rPr>
-              <a:t>I do not work on this alone.</a:t>
+              <a:t>Current capabilities of LEON</a:t>
             </a:r>
           </a:p>
         </p:txBody>
@@ -5488,7 +5539,7 @@
                 </a:solidFill>
                 <a:latin typeface="Calibri"/>
               </a:rPr>
-              <a:t>Imane El Brouji and Patrick Garcia bring the mechatronics side. I turn it into LEON.</a:t>
+              <a:t>The functions below are implemented. Technical acceptance remains with the engineer.</a:t>
             </a:r>
           </a:p>
         </p:txBody>
@@ -5501,8 +5552,8 @@
         </p:nvSpPr>
         <p:spPr>
           <a:xfrm>
-            <a:off x="411480" y="1389888"/>
-            <a:ext cx="5532120" cy="3246120"/>
+            <a:off x="457200" y="1371600"/>
+            <a:ext cx="11247120" cy="960120"/>
           </a:xfrm>
           <a:prstGeom prst="roundRect">
             <a:avLst>
@@ -5548,14 +5599,14 @@
         </p:nvSpPr>
         <p:spPr>
           <a:xfrm>
-            <a:off x="411480" y="1389888"/>
-            <a:ext cx="5532120" cy="109728"/>
+            <a:off x="457200" y="1371600"/>
+            <a:ext cx="109728" cy="960120"/>
           </a:xfrm>
           <a:prstGeom prst="rect">
             <a:avLst/>
           </a:prstGeom>
           <a:solidFill>
-            <a:srgbClr val="1D4ED8"/>
+            <a:srgbClr val="157347"/>
           </a:solidFill>
           <a:ln>
             <a:noFill/>
@@ -5591,8 +5642,8 @@
         </p:nvSpPr>
         <p:spPr>
           <a:xfrm>
-            <a:off x="640080" y="1645920"/>
-            <a:ext cx="5074920" cy="365760"/>
+            <a:off x="777240" y="1481328"/>
+            <a:ext cx="10698480" cy="329184"/>
           </a:xfrm>
           <a:prstGeom prst="rect">
             <a:avLst/>
@@ -5605,13 +5656,13 @@
           <a:p>
             <a:pPr algn="l"/>
             <a:r>
-              <a:rPr sz="2200" b="1">
+              <a:rPr sz="1600" b="1">
                 <a:solidFill>
                   <a:srgbClr val="0B2545"/>
                 </a:solidFill>
                 <a:latin typeface="Calibri"/>
               </a:rPr>
-              <a:t>Imane El Brouji</a:t>
+              <a:t>Browser-based access</a:t>
             </a:r>
           </a:p>
         </p:txBody>
@@ -5624,8 +5675,8 @@
         </p:nvSpPr>
         <p:spPr>
           <a:xfrm>
-            <a:off x="640080" y="2084831"/>
-            <a:ext cx="5074920" cy="292608"/>
+            <a:off x="777240" y="1810512"/>
+            <a:ext cx="10698480" cy="402336"/>
           </a:xfrm>
           <a:prstGeom prst="rect">
             <a:avLst/>
@@ -5638,60 +5689,27 @@
           <a:p>
             <a:pPr algn="l"/>
             <a:r>
-              <a:rPr sz="1400" b="1">
-                <a:solidFill>
-                  <a:srgbClr val="1D4ED8"/>
-                </a:solidFill>
-                <a:latin typeface="Calibri"/>
-              </a:rPr>
-              <a:t>Mechatronics Engineering</a:t>
-            </a:r>
-          </a:p>
-        </p:txBody>
-      </p:sp>
-      <p:sp>
-        <p:nvSpPr>
-          <p:cNvPr id="12" name="TextBox 11"/>
-          <p:cNvSpPr txBox="1"/>
-          <p:nvPr/>
-        </p:nvSpPr>
-        <p:spPr>
-          <a:xfrm>
-            <a:off x="640080" y="2514600"/>
-            <a:ext cx="5074920" cy="1828800"/>
-          </a:xfrm>
-          <a:prstGeom prst="rect">
-            <a:avLst/>
-          </a:prstGeom>
-          <a:noFill/>
-        </p:spPr>
-        <p:txBody>
-          <a:bodyPr wrap="square" anchor="t"/>
-          <a:lstStyle/>
-          <a:p>
-            <a:pPr algn="l"/>
-            <a:r>
-              <a:rPr sz="1500" b="0">
+              <a:rPr sz="1400" b="0">
                 <a:solidFill>
                   <a:srgbClr val="1C2B3A"/>
                 </a:solidFill>
                 <a:latin typeface="Calibri"/>
               </a:rPr>
-              <a:t>Shares the needs of the team, the real documents we receive, and the ideas of what would actually help an engineer in a review.</a:t>
-            </a:r>
-          </a:p>
-        </p:txBody>
-      </p:sp>
-      <p:sp>
-        <p:nvSpPr>
-          <p:cNvPr id="13" name="Rounded Rectangle 12"/>
+              <a:t>Specification, matrix and TDR are uploaded in the application. No installation is required for the reviewer.</a:t>
+            </a:r>
+          </a:p>
+        </p:txBody>
+      </p:sp>
+      <p:sp>
+        <p:nvSpPr>
+          <p:cNvPr id="12" name="Rounded Rectangle 11"/>
           <p:cNvSpPr/>
           <p:nvPr/>
         </p:nvSpPr>
         <p:spPr>
           <a:xfrm>
-            <a:off x="6172200" y="1389888"/>
-            <a:ext cx="5532120" cy="3246120"/>
+            <a:off x="457200" y="2423160"/>
+            <a:ext cx="11247120" cy="960120"/>
           </a:xfrm>
           <a:prstGeom prst="roundRect">
             <a:avLst>
@@ -5731,20 +5749,20 @@
       </p:sp>
       <p:sp>
         <p:nvSpPr>
-          <p:cNvPr id="14" name="Rectangle 13"/>
+          <p:cNvPr id="13" name="Rectangle 12"/>
           <p:cNvSpPr/>
           <p:nvPr/>
         </p:nvSpPr>
         <p:spPr>
           <a:xfrm>
-            <a:off x="6172200" y="1389888"/>
-            <a:ext cx="5532120" cy="109728"/>
+            <a:off x="457200" y="2423160"/>
+            <a:ext cx="109728" cy="960120"/>
           </a:xfrm>
           <a:prstGeom prst="rect">
             <a:avLst/>
           </a:prstGeom>
           <a:solidFill>
-            <a:srgbClr val="157347"/>
+            <a:srgbClr val="1D4ED8"/>
           </a:solidFill>
           <a:ln>
             <a:noFill/>
@@ -5774,14 +5792,47 @@
       </p:sp>
       <p:sp>
         <p:nvSpPr>
+          <p:cNvPr id="14" name="TextBox 13"/>
+          <p:cNvSpPr txBox="1"/>
+          <p:nvPr/>
+        </p:nvSpPr>
+        <p:spPr>
+          <a:xfrm>
+            <a:off x="777240" y="2532888"/>
+            <a:ext cx="10698480" cy="329184"/>
+          </a:xfrm>
+          <a:prstGeom prst="rect">
+            <a:avLst/>
+          </a:prstGeom>
+          <a:noFill/>
+        </p:spPr>
+        <p:txBody>
+          <a:bodyPr wrap="square" anchor="t"/>
+          <a:lstStyle/>
+          <a:p>
+            <a:pPr algn="l"/>
+            <a:r>
+              <a:rPr sz="1600" b="1">
+                <a:solidFill>
+                  <a:srgbClr val="0B2545"/>
+                </a:solidFill>
+                <a:latin typeface="Calibri"/>
+              </a:rPr>
+              <a:t>Detection of inconsistencies</a:t>
+            </a:r>
+          </a:p>
+        </p:txBody>
+      </p:sp>
+      <p:sp>
+        <p:nvSpPr>
           <p:cNvPr id="15" name="TextBox 14"/>
           <p:cNvSpPr txBox="1"/>
           <p:nvPr/>
         </p:nvSpPr>
         <p:spPr>
           <a:xfrm>
-            <a:off x="6400800" y="1645920"/>
-            <a:ext cx="5074920" cy="365760"/>
+            <a:off x="777240" y="2862072"/>
+            <a:ext cx="10698480" cy="402336"/>
           </a:xfrm>
           <a:prstGeom prst="rect">
             <a:avLst/>
@@ -5794,93 +5845,27 @@
           <a:p>
             <a:pPr algn="l"/>
             <a:r>
-              <a:rPr sz="2200" b="1">
-                <a:solidFill>
-                  <a:srgbClr val="0B2545"/>
-                </a:solidFill>
-                <a:latin typeface="Calibri"/>
-              </a:rPr>
-              <a:t>Patrick Garcia</a:t>
-            </a:r>
-          </a:p>
-        </p:txBody>
-      </p:sp>
-      <p:sp>
-        <p:nvSpPr>
-          <p:cNvPr id="16" name="TextBox 15"/>
-          <p:cNvSpPr txBox="1"/>
-          <p:nvPr/>
-        </p:nvSpPr>
-        <p:spPr>
-          <a:xfrm>
-            <a:off x="6400800" y="2084831"/>
-            <a:ext cx="5074920" cy="292608"/>
-          </a:xfrm>
-          <a:prstGeom prst="rect">
-            <a:avLst/>
-          </a:prstGeom>
-          <a:noFill/>
-        </p:spPr>
-        <p:txBody>
-          <a:bodyPr wrap="square" anchor="t"/>
-          <a:lstStyle/>
-          <a:p>
-            <a:pPr algn="l"/>
-            <a:r>
-              <a:rPr sz="1400" b="1">
-                <a:solidFill>
-                  <a:srgbClr val="157347"/>
-                </a:solidFill>
-                <a:latin typeface="Calibri"/>
-              </a:rPr>
-              <a:t>Mechatronics Engineering</a:t>
-            </a:r>
-          </a:p>
-        </p:txBody>
-      </p:sp>
-      <p:sp>
-        <p:nvSpPr>
-          <p:cNvPr id="17" name="TextBox 16"/>
-          <p:cNvSpPr txBox="1"/>
-          <p:nvPr/>
-        </p:nvSpPr>
-        <p:spPr>
-          <a:xfrm>
-            <a:off x="6400800" y="2514600"/>
-            <a:ext cx="5074920" cy="1828800"/>
-          </a:xfrm>
-          <a:prstGeom prst="rect">
-            <a:avLst/>
-          </a:prstGeom>
-          <a:noFill/>
-        </p:spPr>
-        <p:txBody>
-          <a:bodyPr wrap="square" anchor="t"/>
-          <a:lstStyle/>
-          <a:p>
-            <a:pPr algn="l"/>
-            <a:r>
-              <a:rPr sz="1500" b="0">
+              <a:rPr sz="1400" b="0">
                 <a:solidFill>
                   <a:srgbClr val="1C2B3A"/>
                 </a:solidFill>
                 <a:latin typeface="Calibri"/>
               </a:rPr>
-              <a:t>Explains the mechatronics context: how a spec, a matrix and a TDR are used in the team, and what a good review must look like.</a:t>
-            </a:r>
-          </a:p>
-        </p:txBody>
-      </p:sp>
-      <p:sp>
-        <p:nvSpPr>
-          <p:cNvPr id="18" name="Rounded Rectangle 17"/>
+              <a:t>Contradictory OK comments, missing evidence, non-compliant values, and changes between matrix versions.</a:t>
+            </a:r>
+          </a:p>
+        </p:txBody>
+      </p:sp>
+      <p:sp>
+        <p:nvSpPr>
+          <p:cNvPr id="16" name="Rounded Rectangle 15"/>
           <p:cNvSpPr/>
           <p:nvPr/>
         </p:nvSpPr>
         <p:spPr>
           <a:xfrm>
-            <a:off x="411480" y="4800600"/>
-            <a:ext cx="11292840" cy="1554480"/>
+            <a:off x="457200" y="3474720"/>
+            <a:ext cx="11247120" cy="960120"/>
           </a:xfrm>
           <a:prstGeom prst="roundRect">
             <a:avLst>
@@ -5920,14 +5905,170 @@
       </p:sp>
       <p:sp>
         <p:nvSpPr>
-          <p:cNvPr id="19" name="Rectangle 18"/>
+          <p:cNvPr id="17" name="Rectangle 16"/>
           <p:cNvSpPr/>
           <p:nvPr/>
         </p:nvSpPr>
         <p:spPr>
           <a:xfrm>
-            <a:off x="411480" y="4800600"/>
-            <a:ext cx="109728" cy="1554480"/>
+            <a:off x="457200" y="3474720"/>
+            <a:ext cx="109728" cy="960120"/>
+          </a:xfrm>
+          <a:prstGeom prst="rect">
+            <a:avLst/>
+          </a:prstGeom>
+          <a:solidFill>
+            <a:srgbClr val="9A5B00"/>
+          </a:solidFill>
+          <a:ln>
+            <a:noFill/>
+          </a:ln>
+        </p:spPr>
+        <p:style>
+          <a:lnRef idx="1">
+            <a:schemeClr val="accent1"/>
+          </a:lnRef>
+          <a:fillRef idx="3">
+            <a:schemeClr val="accent1"/>
+          </a:fillRef>
+          <a:effectRef idx="2">
+            <a:schemeClr val="accent1"/>
+          </a:effectRef>
+          <a:fontRef idx="minor">
+            <a:schemeClr val="lt1"/>
+          </a:fontRef>
+        </p:style>
+        <p:txBody>
+          <a:bodyPr rtlCol="0" anchor="ctr"/>
+          <a:lstStyle/>
+          <a:p>
+            <a:pPr algn="ctr"/>
+          </a:p>
+        </p:txBody>
+      </p:sp>
+      <p:sp>
+        <p:nvSpPr>
+          <p:cNvPr id="18" name="TextBox 17"/>
+          <p:cNvSpPr txBox="1"/>
+          <p:nvPr/>
+        </p:nvSpPr>
+        <p:spPr>
+          <a:xfrm>
+            <a:off x="777240" y="3584448"/>
+            <a:ext cx="10698480" cy="329184"/>
+          </a:xfrm>
+          <a:prstGeom prst="rect">
+            <a:avLst/>
+          </a:prstGeom>
+          <a:noFill/>
+        </p:spPr>
+        <p:txBody>
+          <a:bodyPr wrap="square" anchor="t"/>
+          <a:lstStyle/>
+          <a:p>
+            <a:pPr algn="l"/>
+            <a:r>
+              <a:rPr sz="1600" b="1">
+                <a:solidFill>
+                  <a:srgbClr val="0B2545"/>
+                </a:solidFill>
+                <a:latin typeface="Calibri"/>
+              </a:rPr>
+              <a:t>Export for the review</a:t>
+            </a:r>
+          </a:p>
+        </p:txBody>
+      </p:sp>
+      <p:sp>
+        <p:nvSpPr>
+          <p:cNvPr id="19" name="TextBox 18"/>
+          <p:cNvSpPr txBox="1"/>
+          <p:nvPr/>
+        </p:nvSpPr>
+        <p:spPr>
+          <a:xfrm>
+            <a:off x="777240" y="3913632"/>
+            <a:ext cx="10698480" cy="402336"/>
+          </a:xfrm>
+          <a:prstGeom prst="rect">
+            <a:avLst/>
+          </a:prstGeom>
+          <a:noFill/>
+        </p:spPr>
+        <p:txBody>
+          <a:bodyPr wrap="square" anchor="t"/>
+          <a:lstStyle/>
+          <a:p>
+            <a:pPr algn="l"/>
+            <a:r>
+              <a:rPr sz="1400" b="0">
+                <a:solidFill>
+                  <a:srgbClr val="1C2B3A"/>
+                </a:solidFill>
+                <a:latin typeface="Calibri"/>
+              </a:rPr>
+              <a:t>Colour-coded Excel reports for Quality, Purchasing or the supplier.</a:t>
+            </a:r>
+          </a:p>
+        </p:txBody>
+      </p:sp>
+      <p:sp>
+        <p:nvSpPr>
+          <p:cNvPr id="20" name="Rounded Rectangle 19"/>
+          <p:cNvSpPr/>
+          <p:nvPr/>
+        </p:nvSpPr>
+        <p:spPr>
+          <a:xfrm>
+            <a:off x="457200" y="4526280"/>
+            <a:ext cx="11247120" cy="960120"/>
+          </a:xfrm>
+          <a:prstGeom prst="roundRect">
+            <a:avLst>
+              <a:gd name="adj" fmla="val 8000"/>
+            </a:avLst>
+          </a:prstGeom>
+          <a:solidFill>
+            <a:srgbClr val="FFFFFF"/>
+          </a:solidFill>
+          <a:ln w="12700">
+            <a:solidFill>
+              <a:srgbClr val="DDE3EC"/>
+            </a:solidFill>
+          </a:ln>
+        </p:spPr>
+        <p:style>
+          <a:lnRef idx="1">
+            <a:schemeClr val="accent1"/>
+          </a:lnRef>
+          <a:fillRef idx="3">
+            <a:schemeClr val="accent1"/>
+          </a:fillRef>
+          <a:effectRef idx="2">
+            <a:schemeClr val="accent1"/>
+          </a:effectRef>
+          <a:fontRef idx="minor">
+            <a:schemeClr val="lt1"/>
+          </a:fontRef>
+        </p:style>
+        <p:txBody>
+          <a:bodyPr rtlCol="0" anchor="ctr"/>
+          <a:lstStyle/>
+          <a:p>
+            <a:pPr algn="ctr"/>
+          </a:p>
+        </p:txBody>
+      </p:sp>
+      <p:sp>
+        <p:nvSpPr>
+          <p:cNvPr id="21" name="Rectangle 20"/>
+          <p:cNvSpPr/>
+          <p:nvPr/>
+        </p:nvSpPr>
+        <p:spPr>
+          <a:xfrm>
+            <a:off x="457200" y="4526280"/>
+            <a:ext cx="109728" cy="960120"/>
           </a:xfrm>
           <a:prstGeom prst="rect">
             <a:avLst/>
@@ -5963,13 +6104,13 @@
       </p:sp>
       <p:sp>
         <p:nvSpPr>
-          <p:cNvPr id="20" name="TextBox 19"/>
-          <p:cNvSpPr txBox="1"/>
-          <p:nvPr/>
-        </p:nvSpPr>
-        <p:spPr>
-          <a:xfrm>
-            <a:off x="731520" y="4937760"/>
+          <p:cNvPr id="22" name="TextBox 21"/>
+          <p:cNvSpPr txBox="1"/>
+          <p:nvPr/>
+        </p:nvSpPr>
+        <p:spPr>
+          <a:xfrm>
+            <a:off x="777240" y="4636008"/>
             <a:ext cx="10698480" cy="329184"/>
           </a:xfrm>
           <a:prstGeom prst="rect">
@@ -5989,21 +6130,21 @@
                 </a:solidFill>
                 <a:latin typeface="Calibri"/>
               </a:rPr>
-              <a:t>How we work together</a:t>
-            </a:r>
-          </a:p>
-        </p:txBody>
-      </p:sp>
-      <p:sp>
-        <p:nvSpPr>
-          <p:cNvPr id="21" name="TextBox 20"/>
-          <p:cNvSpPr txBox="1"/>
-          <p:nvPr/>
-        </p:nvSpPr>
-        <p:spPr>
-          <a:xfrm>
-            <a:off x="731520" y="5321808"/>
-            <a:ext cx="10698480" cy="822960"/>
+              <a:t>No automatic approval</a:t>
+            </a:r>
+          </a:p>
+        </p:txBody>
+      </p:sp>
+      <p:sp>
+        <p:nvSpPr>
+          <p:cNvPr id="23" name="TextBox 22"/>
+          <p:cNvSpPr txBox="1"/>
+          <p:nvPr/>
+        </p:nvSpPr>
+        <p:spPr>
+          <a:xfrm>
+            <a:off x="777240" y="4965192"/>
+            <a:ext cx="10698480" cy="402336"/>
           </a:xfrm>
           <a:prstGeom prst="rect">
             <a:avLst/>
@@ -6016,20 +6157,53 @@
           <a:p>
             <a:pPr algn="l"/>
             <a:r>
-              <a:rPr sz="1500" b="0">
+              <a:rPr sz="1400" b="0">
                 <a:solidFill>
                   <a:srgbClr val="1C2B3A"/>
                 </a:solidFill>
                 <a:latin typeface="Calibri"/>
               </a:rPr>
-              <a:t>They give the ideas and the technical meaning. I build and iterate on LEON. Nothing in the tool is designed without that mechatronics input — so the result stays useful for the team, not only for an IT exercise.</a:t>
-            </a:r>
-          </a:p>
-        </p:txBody>
-      </p:sp>
-      <p:sp>
-        <p:nvSpPr>
-          <p:cNvPr id="22" name="Rectangle 21"/>
+              <a:t>Absence of a detected inconsistency is not a certificate of conformity.</a:t>
+            </a:r>
+          </a:p>
+        </p:txBody>
+      </p:sp>
+      <p:sp>
+        <p:nvSpPr>
+          <p:cNvPr id="24" name="TextBox 23"/>
+          <p:cNvSpPr txBox="1"/>
+          <p:nvPr/>
+        </p:nvSpPr>
+        <p:spPr>
+          <a:xfrm>
+            <a:off x="457200" y="5623560"/>
+            <a:ext cx="11247120" cy="777240"/>
+          </a:xfrm>
+          <a:prstGeom prst="rect">
+            <a:avLst/>
+          </a:prstGeom>
+          <a:noFill/>
+        </p:spPr>
+        <p:txBody>
+          <a:bodyPr wrap="square" anchor="t"/>
+          <a:lstStyle/>
+          <a:p>
+            <a:pPr algn="l"/>
+            <a:r>
+              <a:rPr sz="1500" b="1">
+                <a:solidFill>
+                  <a:srgbClr val="0B2545"/>
+                </a:solidFill>
+                <a:latin typeface="Calibri"/>
+              </a:rPr>
+              <a:t>LEON provides a structured first reading of the specification, the matrix and the TDR, so that review meetings start from identified inconsistencies.</a:t>
+            </a:r>
+          </a:p>
+        </p:txBody>
+      </p:sp>
+      <p:sp>
+        <p:nvSpPr>
+          <p:cNvPr id="25" name="Rectangle 24"/>
           <p:cNvSpPr/>
           <p:nvPr/>
         </p:nvSpPr>
@@ -6072,7 +6246,7 @@
       </p:sp>
       <p:sp>
         <p:nvSpPr>
-          <p:cNvPr id="23" name="TextBox 22"/>
+          <p:cNvPr id="26" name="TextBox 25"/>
           <p:cNvSpPr txBox="1"/>
           <p:nvPr/>
         </p:nvSpPr>
@@ -6098,14 +6272,14 @@
                 </a:solidFill>
                 <a:latin typeface="Calibri"/>
               </a:rPr>
-              <a:t>Khadija Benhamida  ·  Mechatronics Engineering  ·  First meeting</a:t>
-            </a:r>
-          </a:p>
-        </p:txBody>
-      </p:sp>
-      <p:sp>
-        <p:nvSpPr>
-          <p:cNvPr id="24" name="TextBox 23"/>
+              <a:t>Khadija Benhamida  ·  Mechatronics Engineering  ·  Confidential</a:t>
+            </a:r>
+          </a:p>
+        </p:txBody>
+      </p:sp>
+      <p:sp>
+        <p:nvSpPr>
+          <p:cNvPr id="27" name="TextBox 26"/>
           <p:cNvSpPr txBox="1"/>
           <p:nvPr/>
         </p:nvSpPr>
@@ -6131,7 +6305,7 @@
                 </a:solidFill>
                 <a:latin typeface="Calibri"/>
               </a:rPr>
-              <a:t>10  /  13</a:t>
+              <a:t>10  /  14</a:t>
             </a:r>
           </a:p>
         </p:txBody>
@@ -6311,7 +6485,7 @@
                 </a:solidFill>
                 <a:latin typeface="Calibri"/>
               </a:rPr>
-              <a:t>STATUS AND NEXT STEP</a:t>
+              <a:t>COLLABORATION</a:t>
             </a:r>
           </a:p>
         </p:txBody>
@@ -6344,7 +6518,7 @@
                 </a:solidFill>
                 <a:latin typeface="Calibri"/>
               </a:rPr>
-              <a:t>The work is in progress. Deployment comes after.</a:t>
+              <a:t>Working arrangement within Mechatronics Engineering</a:t>
             </a:r>
           </a:p>
         </p:txBody>
@@ -6377,7 +6551,7 @@
                 </a:solidFill>
                 <a:latin typeface="Calibri"/>
               </a:rPr>
-              <a:t>The whole team will have access once this step is finished.</a:t>
+              <a:t>Imane El Brouji and Patrick Garcia provide the domain input. Development of LEON is carried out on that basis.</a:t>
             </a:r>
           </a:p>
         </p:txBody>
@@ -6390,8 +6564,8 @@
         </p:nvSpPr>
         <p:spPr>
           <a:xfrm>
-            <a:off x="411480" y="1417320"/>
-            <a:ext cx="3703320" cy="3703320"/>
+            <a:off x="411480" y="1389888"/>
+            <a:ext cx="5532120" cy="3246120"/>
           </a:xfrm>
           <a:prstGeom prst="roundRect">
             <a:avLst>
@@ -6437,8 +6611,8 @@
         </p:nvSpPr>
         <p:spPr>
           <a:xfrm>
-            <a:off x="411480" y="1417320"/>
-            <a:ext cx="3703320" cy="109728"/>
+            <a:off x="411480" y="1389888"/>
+            <a:ext cx="5532120" cy="109728"/>
           </a:xfrm>
           <a:prstGeom prst="rect">
             <a:avLst/>
@@ -6480,8 +6654,8 @@
         </p:nvSpPr>
         <p:spPr>
           <a:xfrm>
-            <a:off x="640080" y="1691640"/>
-            <a:ext cx="3246120" cy="329184"/>
+            <a:off x="640080" y="1645920"/>
+            <a:ext cx="5074920" cy="365760"/>
           </a:xfrm>
           <a:prstGeom prst="rect">
             <a:avLst/>
@@ -6494,27 +6668,60 @@
           <a:p>
             <a:pPr algn="l"/>
             <a:r>
-              <a:rPr sz="1300" b="1">
+              <a:rPr sz="2200" b="1">
+                <a:solidFill>
+                  <a:srgbClr val="0B2545"/>
+                </a:solidFill>
+                <a:latin typeface="Calibri"/>
+              </a:rPr>
+              <a:t>Imane El Brouji</a:t>
+            </a:r>
+          </a:p>
+        </p:txBody>
+      </p:sp>
+      <p:sp>
+        <p:nvSpPr>
+          <p:cNvPr id="11" name="TextBox 10"/>
+          <p:cNvSpPr txBox="1"/>
+          <p:nvPr/>
+        </p:nvSpPr>
+        <p:spPr>
+          <a:xfrm>
+            <a:off x="640080" y="2084831"/>
+            <a:ext cx="5074920" cy="292608"/>
+          </a:xfrm>
+          <a:prstGeom prst="rect">
+            <a:avLst/>
+          </a:prstGeom>
+          <a:noFill/>
+        </p:spPr>
+        <p:txBody>
+          <a:bodyPr wrap="square" anchor="t"/>
+          <a:lstStyle/>
+          <a:p>
+            <a:pPr algn="l"/>
+            <a:r>
+              <a:rPr sz="1400" b="1">
                 <a:solidFill>
                   <a:srgbClr val="1D4ED8"/>
                 </a:solidFill>
                 <a:latin typeface="Calibri"/>
               </a:rPr>
-              <a:t>01  Now</a:t>
-            </a:r>
-          </a:p>
-        </p:txBody>
-      </p:sp>
-      <p:sp>
-        <p:nvSpPr>
-          <p:cNvPr id="11" name="TextBox 10"/>
-          <p:cNvSpPr txBox="1"/>
-          <p:nvPr/>
-        </p:nvSpPr>
-        <p:spPr>
-          <a:xfrm>
-            <a:off x="640080" y="2084831"/>
-            <a:ext cx="3246120" cy="731520"/>
+              <a:t>Mechatronics Engineering</a:t>
+            </a:r>
+          </a:p>
+        </p:txBody>
+      </p:sp>
+      <p:sp>
+        <p:nvSpPr>
+          <p:cNvPr id="12" name="TextBox 11"/>
+          <p:cNvSpPr txBox="1"/>
+          <p:nvPr/>
+        </p:nvSpPr>
+        <p:spPr>
+          <a:xfrm>
+            <a:off x="640080" y="2514600"/>
+            <a:ext cx="5074920" cy="1828800"/>
           </a:xfrm>
           <a:prstGeom prst="rect">
             <a:avLst/>
@@ -6527,46 +6734,13 @@
           <a:p>
             <a:pPr algn="l"/>
             <a:r>
-              <a:rPr sz="2200" b="1">
-                <a:solidFill>
-                  <a:srgbClr val="0B2545"/>
-                </a:solidFill>
-                <a:latin typeface="Calibri"/>
-              </a:rPr>
-              <a:t>In progress</a:t>
-            </a:r>
-          </a:p>
-        </p:txBody>
-      </p:sp>
-      <p:sp>
-        <p:nvSpPr>
-          <p:cNvPr id="12" name="TextBox 11"/>
-          <p:cNvSpPr txBox="1"/>
-          <p:nvPr/>
-        </p:nvSpPr>
-        <p:spPr>
-          <a:xfrm>
-            <a:off x="640080" y="2926080"/>
-            <a:ext cx="3246120" cy="1920240"/>
-          </a:xfrm>
-          <a:prstGeom prst="rect">
-            <a:avLst/>
-          </a:prstGeom>
-          <a:noFill/>
-        </p:spPr>
-        <p:txBody>
-          <a:bodyPr wrap="square" anchor="t"/>
-          <a:lstStyle/>
-          <a:p>
-            <a:pPr algn="l"/>
-            <a:r>
               <a:rPr sz="1500" b="0">
                 <a:solidFill>
                   <a:srgbClr val="1C2B3A"/>
                 </a:solidFill>
                 <a:latin typeface="Calibri"/>
               </a:rPr>
-              <a:t>I am finishing the LEON functions you just saw: spec, matrix, TDR cross-check and benchmark.</a:t>
+              <a:t>Defines the operational needs of the team, the documents actually received, and the analyses that are useful during a review.</a:t>
             </a:r>
           </a:p>
         </p:txBody>
@@ -6579,8 +6753,8 @@
         </p:nvSpPr>
         <p:spPr>
           <a:xfrm>
-            <a:off x="4251960" y="1417320"/>
-            <a:ext cx="3703320" cy="3703320"/>
+            <a:off x="6172200" y="1389888"/>
+            <a:ext cx="5532120" cy="3246120"/>
           </a:xfrm>
           <a:prstGeom prst="roundRect">
             <a:avLst>
@@ -6626,14 +6800,14 @@
         </p:nvSpPr>
         <p:spPr>
           <a:xfrm>
-            <a:off x="4251960" y="1417320"/>
-            <a:ext cx="3703320" cy="109728"/>
+            <a:off x="6172200" y="1389888"/>
+            <a:ext cx="5532120" cy="109728"/>
           </a:xfrm>
           <a:prstGeom prst="rect">
             <a:avLst/>
           </a:prstGeom>
           <a:solidFill>
-            <a:srgbClr val="9A5B00"/>
+            <a:srgbClr val="157347"/>
           </a:solidFill>
           <a:ln>
             <a:noFill/>
@@ -6669,8 +6843,8 @@
         </p:nvSpPr>
         <p:spPr>
           <a:xfrm>
-            <a:off x="4480560" y="1691640"/>
-            <a:ext cx="3246120" cy="329184"/>
+            <a:off x="6400800" y="1645920"/>
+            <a:ext cx="5074920" cy="365760"/>
           </a:xfrm>
           <a:prstGeom prst="rect">
             <a:avLst/>
@@ -6683,13 +6857,13 @@
           <a:p>
             <a:pPr algn="l"/>
             <a:r>
-              <a:rPr sz="1300" b="1">
-                <a:solidFill>
-                  <a:srgbClr val="9A5B00"/>
-                </a:solidFill>
-                <a:latin typeface="Calibri"/>
-              </a:rPr>
-              <a:t>02  Next</a:t>
+              <a:rPr sz="2200" b="1">
+                <a:solidFill>
+                  <a:srgbClr val="0B2545"/>
+                </a:solidFill>
+                <a:latin typeface="Calibri"/>
+              </a:rPr>
+              <a:t>Patrick Garcia</a:t>
             </a:r>
           </a:p>
         </p:txBody>
@@ -6702,8 +6876,8 @@
         </p:nvSpPr>
         <p:spPr>
           <a:xfrm>
-            <a:off x="4480560" y="2084831"/>
-            <a:ext cx="3246120" cy="731520"/>
+            <a:off x="6400800" y="2084831"/>
+            <a:ext cx="5074920" cy="292608"/>
           </a:xfrm>
           <a:prstGeom prst="rect">
             <a:avLst/>
@@ -6716,13 +6890,13 @@
           <a:p>
             <a:pPr algn="l"/>
             <a:r>
-              <a:rPr sz="2200" b="1">
-                <a:solidFill>
-                  <a:srgbClr val="0B2545"/>
-                </a:solidFill>
-                <a:latin typeface="Calibri"/>
-              </a:rPr>
-              <a:t>Finish this task</a:t>
+              <a:rPr sz="1400" b="1">
+                <a:solidFill>
+                  <a:srgbClr val="157347"/>
+                </a:solidFill>
+                <a:latin typeface="Calibri"/>
+              </a:rPr>
+              <a:t>Mechatronics Engineering</a:t>
             </a:r>
           </a:p>
         </p:txBody>
@@ -6735,8 +6909,8 @@
         </p:nvSpPr>
         <p:spPr>
           <a:xfrm>
-            <a:off x="4480560" y="2926080"/>
-            <a:ext cx="3246120" cy="1920240"/>
+            <a:off x="6400800" y="2514600"/>
+            <a:ext cx="5074920" cy="1828800"/>
           </a:xfrm>
           <a:prstGeom prst="rect">
             <a:avLst/>
@@ -6755,7 +6929,7 @@
                 </a:solidFill>
                 <a:latin typeface="Calibri"/>
               </a:rPr>
-              <a:t>Close the remaining work, test with real mechatronics files, and align with Imane and Patrick.</a:t>
+              <a:t>Provides the mechatronics context: use of the specification, the matrix and the TDR, and the expected content of a technical review.</a:t>
             </a:r>
           </a:p>
         </p:txBody>
@@ -6768,8 +6942,8 @@
         </p:nvSpPr>
         <p:spPr>
           <a:xfrm>
-            <a:off x="8092440" y="1417320"/>
-            <a:ext cx="3703320" cy="3703320"/>
+            <a:off x="411480" y="4800600"/>
+            <a:ext cx="11292840" cy="1554480"/>
           </a:xfrm>
           <a:prstGeom prst="roundRect">
             <a:avLst>
@@ -6815,14 +6989,14 @@
         </p:nvSpPr>
         <p:spPr>
           <a:xfrm>
-            <a:off x="8092440" y="1417320"/>
-            <a:ext cx="3703320" cy="109728"/>
+            <a:off x="411480" y="4800600"/>
+            <a:ext cx="109728" cy="1554480"/>
           </a:xfrm>
           <a:prstGeom prst="rect">
             <a:avLst/>
           </a:prstGeom>
           <a:solidFill>
-            <a:srgbClr val="157347"/>
+            <a:srgbClr val="123061"/>
           </a:solidFill>
           <a:ln>
             <a:noFill/>
@@ -6858,8 +7032,8 @@
         </p:nvSpPr>
         <p:spPr>
           <a:xfrm>
-            <a:off x="8321040" y="1691640"/>
-            <a:ext cx="3246120" cy="329184"/>
+            <a:off x="731520" y="4937760"/>
+            <a:ext cx="10698480" cy="329184"/>
           </a:xfrm>
           <a:prstGeom prst="rect">
             <a:avLst/>
@@ -6872,13 +7046,13 @@
           <a:p>
             <a:pPr algn="l"/>
             <a:r>
-              <a:rPr sz="1300" b="1">
-                <a:solidFill>
-                  <a:srgbClr val="157347"/>
-                </a:solidFill>
-                <a:latin typeface="Calibri"/>
-              </a:rPr>
-              <a:t>03  Then</a:t>
+              <a:rPr sz="1600" b="1">
+                <a:solidFill>
+                  <a:srgbClr val="0B2545"/>
+                </a:solidFill>
+                <a:latin typeface="Calibri"/>
+              </a:rPr>
+              <a:t>Division of roles</a:t>
             </a:r>
           </a:p>
         </p:txBody>
@@ -6891,8 +7065,8 @@
         </p:nvSpPr>
         <p:spPr>
           <a:xfrm>
-            <a:off x="8321040" y="2084831"/>
-            <a:ext cx="3246120" cy="731520"/>
+            <a:off x="731520" y="5321808"/>
+            <a:ext cx="10698480" cy="822960"/>
           </a:xfrm>
           <a:prstGeom prst="rect">
             <a:avLst/>
@@ -6905,133 +7079,20 @@
           <a:p>
             <a:pPr algn="l"/>
             <a:r>
-              <a:rPr sz="2200" b="1">
-                <a:solidFill>
-                  <a:srgbClr val="0B2545"/>
-                </a:solidFill>
-                <a:latin typeface="Calibri"/>
-              </a:rPr>
-              <a:t>Deployment for the team</a:t>
-            </a:r>
-          </a:p>
-        </p:txBody>
-      </p:sp>
-      <p:sp>
-        <p:nvSpPr>
-          <p:cNvPr id="22" name="TextBox 21"/>
-          <p:cNvSpPr txBox="1"/>
-          <p:nvPr/>
-        </p:nvSpPr>
-        <p:spPr>
-          <a:xfrm>
-            <a:off x="8321040" y="2926080"/>
-            <a:ext cx="3246120" cy="1920240"/>
-          </a:xfrm>
-          <a:prstGeom prst="rect">
-            <a:avLst/>
-          </a:prstGeom>
-          <a:noFill/>
-        </p:spPr>
-        <p:txBody>
-          <a:bodyPr wrap="square" anchor="t"/>
-          <a:lstStyle/>
-          <a:p>
-            <a:pPr algn="l"/>
-            <a:r>
               <a:rPr sz="1500" b="0">
                 <a:solidFill>
                   <a:srgbClr val="1C2B3A"/>
                 </a:solidFill>
                 <a:latin typeface="Calibri"/>
               </a:rPr>
-              <a:t>Once this task is finished, we start the deployment so the whole Mechatronics team can open LEON in a browser, with no installation.</a:t>
-            </a:r>
-          </a:p>
-        </p:txBody>
-      </p:sp>
-      <p:sp>
-        <p:nvSpPr>
-          <p:cNvPr id="23" name="Rounded Rectangle 22"/>
-          <p:cNvSpPr/>
-          <p:nvPr/>
-        </p:nvSpPr>
-        <p:spPr>
-          <a:xfrm>
-            <a:off x="411480" y="5303520"/>
-            <a:ext cx="11292840" cy="1078992"/>
-          </a:xfrm>
-          <a:prstGeom prst="roundRect">
-            <a:avLst>
-              <a:gd name="adj" fmla="val 8000"/>
-            </a:avLst>
-          </a:prstGeom>
-          <a:solidFill>
-            <a:srgbClr val="E8F5EE"/>
-          </a:solidFill>
-          <a:ln w="12700">
-            <a:solidFill>
-              <a:srgbClr val="157347"/>
-            </a:solidFill>
-          </a:ln>
-        </p:spPr>
-        <p:style>
-          <a:lnRef idx="1">
-            <a:schemeClr val="accent1"/>
-          </a:lnRef>
-          <a:fillRef idx="3">
-            <a:schemeClr val="accent1"/>
-          </a:fillRef>
-          <a:effectRef idx="2">
-            <a:schemeClr val="accent1"/>
-          </a:effectRef>
-          <a:fontRef idx="minor">
-            <a:schemeClr val="lt1"/>
-          </a:fontRef>
-        </p:style>
-        <p:txBody>
-          <a:bodyPr rtlCol="0" anchor="ctr"/>
-          <a:lstStyle/>
-          <a:p>
-            <a:pPr algn="ctr"/>
-          </a:p>
-        </p:txBody>
-      </p:sp>
-      <p:sp>
-        <p:nvSpPr>
-          <p:cNvPr id="24" name="TextBox 23"/>
-          <p:cNvSpPr txBox="1"/>
-          <p:nvPr/>
-        </p:nvSpPr>
-        <p:spPr>
-          <a:xfrm>
-            <a:off x="640080" y="5440680"/>
-            <a:ext cx="10881360" cy="822960"/>
-          </a:xfrm>
-          <a:prstGeom prst="rect">
-            <a:avLst/>
-          </a:prstGeom>
-          <a:noFill/>
-        </p:spPr>
-        <p:txBody>
-          <a:bodyPr wrap="square" anchor="t"/>
-          <a:lstStyle/>
-          <a:p>
-            <a:pPr algn="l"/>
-            <a:r>
-              <a:rPr sz="1600" b="1">
-                <a:solidFill>
-                  <a:srgbClr val="0B2545"/>
-                </a:solidFill>
-                <a:latin typeface="Calibri"/>
-              </a:rPr>
-              <a:t>Objective: every colleague who reviews a spec, a matrix or a TDR can use LEON — not only the people building it today.</a:t>
-            </a:r>
-          </a:p>
-        </p:txBody>
-      </p:sp>
-      <p:sp>
-        <p:nvSpPr>
-          <p:cNvPr id="25" name="Rectangle 24"/>
+              <a:t>They provide the ideas and the technical meaning. I implement and iterate on LEON. The application is designed from mechatronics practice, not as a standalone IT development.</a:t>
+            </a:r>
+          </a:p>
+        </p:txBody>
+      </p:sp>
+      <p:sp>
+        <p:nvSpPr>
+          <p:cNvPr id="22" name="Rectangle 21"/>
           <p:cNvSpPr/>
           <p:nvPr/>
         </p:nvSpPr>
@@ -7074,7 +7135,7 @@
       </p:sp>
       <p:sp>
         <p:nvSpPr>
-          <p:cNvPr id="26" name="TextBox 25"/>
+          <p:cNvPr id="23" name="TextBox 22"/>
           <p:cNvSpPr txBox="1"/>
           <p:nvPr/>
         </p:nvSpPr>
@@ -7100,14 +7161,14 @@
                 </a:solidFill>
                 <a:latin typeface="Calibri"/>
               </a:rPr>
-              <a:t>Khadija Benhamida  ·  Mechatronics Engineering  ·  First meeting</a:t>
-            </a:r>
-          </a:p>
-        </p:txBody>
-      </p:sp>
-      <p:sp>
-        <p:nvSpPr>
-          <p:cNvPr id="27" name="TextBox 26"/>
+              <a:t>Khadija Benhamida  ·  Mechatronics Engineering  ·  Confidential</a:t>
+            </a:r>
+          </a:p>
+        </p:txBody>
+      </p:sp>
+      <p:sp>
+        <p:nvSpPr>
+          <p:cNvPr id="24" name="TextBox 23"/>
           <p:cNvSpPr txBox="1"/>
           <p:nvPr/>
         </p:nvSpPr>
@@ -7133,7 +7194,7 @@
                 </a:solidFill>
                 <a:latin typeface="Calibri"/>
               </a:rPr>
-              <a:t>11  /  13</a:t>
+              <a:t>11  /  14</a:t>
             </a:r>
           </a:p>
         </p:txBody>
@@ -7313,7 +7374,7 @@
                 </a:solidFill>
                 <a:latin typeface="Calibri"/>
               </a:rPr>
-              <a:t>UPCOMING TRAINING</a:t>
+              <a:t>STATUS AND NEXT STEP</a:t>
             </a:r>
           </a:p>
         </p:txBody>
@@ -7346,7 +7407,7 @@
                 </a:solidFill>
                 <a:latin typeface="Calibri"/>
               </a:rPr>
-              <a:t>AI training — and how Mechatronics can use it.</a:t>
+              <a:t>Development in progress — then deployment</a:t>
             </a:r>
           </a:p>
         </p:txBody>
@@ -7379,7 +7440,7 @@
                 </a:solidFill>
                 <a:latin typeface="Calibri"/>
               </a:rPr>
-              <a:t>A practical training for the team, not a computer-science course.</a:t>
+              <a:t>Access for the whole team will be opened after completion of this phase.</a:t>
             </a:r>
           </a:p>
         </p:txBody>
@@ -7392,8 +7453,8 @@
         </p:nvSpPr>
         <p:spPr>
           <a:xfrm>
-            <a:off x="411480" y="1389888"/>
-            <a:ext cx="5532120" cy="4919472"/>
+            <a:off x="411480" y="1417320"/>
+            <a:ext cx="3703320" cy="3703320"/>
           </a:xfrm>
           <a:prstGeom prst="roundRect">
             <a:avLst>
@@ -7439,8 +7500,8 @@
         </p:nvSpPr>
         <p:spPr>
           <a:xfrm>
-            <a:off x="411480" y="1389888"/>
-            <a:ext cx="73152" cy="4919472"/>
+            <a:off x="411480" y="1417320"/>
+            <a:ext cx="3703320" cy="109728"/>
           </a:xfrm>
           <a:prstGeom prst="rect">
             <a:avLst/>
@@ -7482,8 +7543,8 @@
         </p:nvSpPr>
         <p:spPr>
           <a:xfrm>
-            <a:off x="612648" y="1517904"/>
-            <a:ext cx="5221224" cy="347472"/>
+            <a:off x="640080" y="1691640"/>
+            <a:ext cx="3246120" cy="365760"/>
           </a:xfrm>
           <a:prstGeom prst="rect">
             <a:avLst/>
@@ -7496,27 +7557,60 @@
           <a:p>
             <a:pPr algn="l"/>
             <a:r>
-              <a:rPr sz="1800" b="1">
+              <a:rPr sz="1300" b="1">
+                <a:solidFill>
+                  <a:srgbClr val="1D4ED8"/>
+                </a:solidFill>
+                <a:latin typeface="Calibri"/>
+              </a:rPr>
+              <a:t>01  Current phase</a:t>
+            </a:r>
+          </a:p>
+        </p:txBody>
+      </p:sp>
+      <p:sp>
+        <p:nvSpPr>
+          <p:cNvPr id="11" name="TextBox 10"/>
+          <p:cNvSpPr txBox="1"/>
+          <p:nvPr/>
+        </p:nvSpPr>
+        <p:spPr>
+          <a:xfrm>
+            <a:off x="640080" y="2084831"/>
+            <a:ext cx="3246120" cy="822960"/>
+          </a:xfrm>
+          <a:prstGeom prst="rect">
+            <a:avLst/>
+          </a:prstGeom>
+          <a:noFill/>
+        </p:spPr>
+        <p:txBody>
+          <a:bodyPr wrap="square" anchor="t"/>
+          <a:lstStyle/>
+          <a:p>
+            <a:pPr algn="l"/>
+            <a:r>
+              <a:rPr sz="2000" b="1">
                 <a:solidFill>
                   <a:srgbClr val="0B2545"/>
                 </a:solidFill>
                 <a:latin typeface="Calibri"/>
               </a:rPr>
-              <a:t>What this training is for</a:t>
-            </a:r>
-          </a:p>
-        </p:txBody>
-      </p:sp>
-      <p:sp>
-        <p:nvSpPr>
-          <p:cNvPr id="11" name="TextBox 10"/>
-          <p:cNvSpPr txBox="1"/>
-          <p:nvPr/>
-        </p:nvSpPr>
-        <p:spPr>
-          <a:xfrm>
-            <a:off x="612648" y="1847088"/>
-            <a:ext cx="5221224" cy="4334256"/>
+              <a:t>In progress</a:t>
+            </a:r>
+          </a:p>
+        </p:txBody>
+      </p:sp>
+      <p:sp>
+        <p:nvSpPr>
+          <p:cNvPr id="12" name="TextBox 11"/>
+          <p:cNvSpPr txBox="1"/>
+          <p:nvPr/>
+        </p:nvSpPr>
+        <p:spPr>
+          <a:xfrm>
+            <a:off x="640080" y="2971800"/>
+            <a:ext cx="3246120" cy="1874519"/>
           </a:xfrm>
           <a:prstGeom prst="rect">
             <a:avLst/>
@@ -7529,30 +7623,27 @@
           <a:p>
             <a:pPr algn="l"/>
             <a:r>
-              <a:rPr sz="1500" b="0">
+              <a:rPr sz="1400" b="0">
                 <a:solidFill>
                   <a:srgbClr val="1C2B3A"/>
                 </a:solidFill>
                 <a:latin typeface="Calibri"/>
               </a:rPr>
-              <a:t>Understand what AI can (and cannot) do on our daily files.
-See how a tool like LEON helps on specs, matrices and TDRs, without replacing the engineer.
-Give the team a common language: where AI saves time, and where a person must still decide.
-Bring examples back from our real mechatronics documents.</a:t>
-            </a:r>
-          </a:p>
-        </p:txBody>
-      </p:sp>
-      <p:sp>
-        <p:nvSpPr>
-          <p:cNvPr id="12" name="Rounded Rectangle 11"/>
+              <a:t>Completion of the functions presented: specification, matrix, Matrix ↔ TDR and TDR benchmark.</a:t>
+            </a:r>
+          </a:p>
+        </p:txBody>
+      </p:sp>
+      <p:sp>
+        <p:nvSpPr>
+          <p:cNvPr id="13" name="Rounded Rectangle 12"/>
           <p:cNvSpPr/>
           <p:nvPr/>
         </p:nvSpPr>
         <p:spPr>
           <a:xfrm>
-            <a:off x="6172200" y="1389888"/>
-            <a:ext cx="5532120" cy="4919472"/>
+            <a:off x="4251960" y="1417320"/>
+            <a:ext cx="3703320" cy="3703320"/>
           </a:xfrm>
           <a:prstGeom prst="roundRect">
             <a:avLst>
@@ -7592,14 +7683,203 @@
       </p:sp>
       <p:sp>
         <p:nvSpPr>
-          <p:cNvPr id="13" name="Rectangle 12"/>
+          <p:cNvPr id="14" name="Rectangle 13"/>
           <p:cNvSpPr/>
           <p:nvPr/>
         </p:nvSpPr>
         <p:spPr>
           <a:xfrm>
-            <a:off x="6172200" y="1389888"/>
-            <a:ext cx="73152" cy="4919472"/>
+            <a:off x="4251960" y="1417320"/>
+            <a:ext cx="3703320" cy="109728"/>
+          </a:xfrm>
+          <a:prstGeom prst="rect">
+            <a:avLst/>
+          </a:prstGeom>
+          <a:solidFill>
+            <a:srgbClr val="9A5B00"/>
+          </a:solidFill>
+          <a:ln>
+            <a:noFill/>
+          </a:ln>
+        </p:spPr>
+        <p:style>
+          <a:lnRef idx="1">
+            <a:schemeClr val="accent1"/>
+          </a:lnRef>
+          <a:fillRef idx="3">
+            <a:schemeClr val="accent1"/>
+          </a:fillRef>
+          <a:effectRef idx="2">
+            <a:schemeClr val="accent1"/>
+          </a:effectRef>
+          <a:fontRef idx="minor">
+            <a:schemeClr val="lt1"/>
+          </a:fontRef>
+        </p:style>
+        <p:txBody>
+          <a:bodyPr rtlCol="0" anchor="ctr"/>
+          <a:lstStyle/>
+          <a:p>
+            <a:pPr algn="ctr"/>
+          </a:p>
+        </p:txBody>
+      </p:sp>
+      <p:sp>
+        <p:nvSpPr>
+          <p:cNvPr id="15" name="TextBox 14"/>
+          <p:cNvSpPr txBox="1"/>
+          <p:nvPr/>
+        </p:nvSpPr>
+        <p:spPr>
+          <a:xfrm>
+            <a:off x="4480560" y="1691640"/>
+            <a:ext cx="3246120" cy="365760"/>
+          </a:xfrm>
+          <a:prstGeom prst="rect">
+            <a:avLst/>
+          </a:prstGeom>
+          <a:noFill/>
+        </p:spPr>
+        <p:txBody>
+          <a:bodyPr wrap="square" anchor="t"/>
+          <a:lstStyle/>
+          <a:p>
+            <a:pPr algn="l"/>
+            <a:r>
+              <a:rPr sz="1300" b="1">
+                <a:solidFill>
+                  <a:srgbClr val="9A5B00"/>
+                </a:solidFill>
+                <a:latin typeface="Calibri"/>
+              </a:rPr>
+              <a:t>02  Next</a:t>
+            </a:r>
+          </a:p>
+        </p:txBody>
+      </p:sp>
+      <p:sp>
+        <p:nvSpPr>
+          <p:cNvPr id="16" name="TextBox 15"/>
+          <p:cNvSpPr txBox="1"/>
+          <p:nvPr/>
+        </p:nvSpPr>
+        <p:spPr>
+          <a:xfrm>
+            <a:off x="4480560" y="2084831"/>
+            <a:ext cx="3246120" cy="822960"/>
+          </a:xfrm>
+          <a:prstGeom prst="rect">
+            <a:avLst/>
+          </a:prstGeom>
+          <a:noFill/>
+        </p:spPr>
+        <p:txBody>
+          <a:bodyPr wrap="square" anchor="t"/>
+          <a:lstStyle/>
+          <a:p>
+            <a:pPr algn="l"/>
+            <a:r>
+              <a:rPr sz="2000" b="1">
+                <a:solidFill>
+                  <a:srgbClr val="0B2545"/>
+                </a:solidFill>
+                <a:latin typeface="Calibri"/>
+              </a:rPr>
+              <a:t>Close this phase</a:t>
+            </a:r>
+          </a:p>
+        </p:txBody>
+      </p:sp>
+      <p:sp>
+        <p:nvSpPr>
+          <p:cNvPr id="17" name="TextBox 16"/>
+          <p:cNvSpPr txBox="1"/>
+          <p:nvPr/>
+        </p:nvSpPr>
+        <p:spPr>
+          <a:xfrm>
+            <a:off x="4480560" y="2971800"/>
+            <a:ext cx="3246120" cy="1874519"/>
+          </a:xfrm>
+          <a:prstGeom prst="rect">
+            <a:avLst/>
+          </a:prstGeom>
+          <a:noFill/>
+        </p:spPr>
+        <p:txBody>
+          <a:bodyPr wrap="square" anchor="t"/>
+          <a:lstStyle/>
+          <a:p>
+            <a:pPr algn="l"/>
+            <a:r>
+              <a:rPr sz="1400" b="0">
+                <a:solidFill>
+                  <a:srgbClr val="1C2B3A"/>
+                </a:solidFill>
+                <a:latin typeface="Calibri"/>
+              </a:rPr>
+              <a:t>Remaining development, tests on representative mechatronics files, alignment with Imane El Brouji and Patrick Garcia.</a:t>
+            </a:r>
+          </a:p>
+        </p:txBody>
+      </p:sp>
+      <p:sp>
+        <p:nvSpPr>
+          <p:cNvPr id="18" name="Rounded Rectangle 17"/>
+          <p:cNvSpPr/>
+          <p:nvPr/>
+        </p:nvSpPr>
+        <p:spPr>
+          <a:xfrm>
+            <a:off x="8092440" y="1417320"/>
+            <a:ext cx="3703320" cy="3703320"/>
+          </a:xfrm>
+          <a:prstGeom prst="roundRect">
+            <a:avLst>
+              <a:gd name="adj" fmla="val 8000"/>
+            </a:avLst>
+          </a:prstGeom>
+          <a:solidFill>
+            <a:srgbClr val="FFFFFF"/>
+          </a:solidFill>
+          <a:ln w="12700">
+            <a:solidFill>
+              <a:srgbClr val="DDE3EC"/>
+            </a:solidFill>
+          </a:ln>
+        </p:spPr>
+        <p:style>
+          <a:lnRef idx="1">
+            <a:schemeClr val="accent1"/>
+          </a:lnRef>
+          <a:fillRef idx="3">
+            <a:schemeClr val="accent1"/>
+          </a:fillRef>
+          <a:effectRef idx="2">
+            <a:schemeClr val="accent1"/>
+          </a:effectRef>
+          <a:fontRef idx="minor">
+            <a:schemeClr val="lt1"/>
+          </a:fontRef>
+        </p:style>
+        <p:txBody>
+          <a:bodyPr rtlCol="0" anchor="ctr"/>
+          <a:lstStyle/>
+          <a:p>
+            <a:pPr algn="ctr"/>
+          </a:p>
+        </p:txBody>
+      </p:sp>
+      <p:sp>
+        <p:nvSpPr>
+          <p:cNvPr id="19" name="Rectangle 18"/>
+          <p:cNvSpPr/>
+          <p:nvPr/>
+        </p:nvSpPr>
+        <p:spPr>
+          <a:xfrm>
+            <a:off x="8092440" y="1417320"/>
+            <a:ext cx="3703320" cy="109728"/>
           </a:xfrm>
           <a:prstGeom prst="rect">
             <a:avLst/>
@@ -7635,14 +7915,14 @@
       </p:sp>
       <p:sp>
         <p:nvSpPr>
-          <p:cNvPr id="14" name="TextBox 13"/>
-          <p:cNvSpPr txBox="1"/>
-          <p:nvPr/>
-        </p:nvSpPr>
-        <p:spPr>
-          <a:xfrm>
-            <a:off x="6373368" y="1517904"/>
-            <a:ext cx="5221224" cy="347472"/>
+          <p:cNvPr id="20" name="TextBox 19"/>
+          <p:cNvSpPr txBox="1"/>
+          <p:nvPr/>
+        </p:nvSpPr>
+        <p:spPr>
+          <a:xfrm>
+            <a:off x="8321040" y="1691640"/>
+            <a:ext cx="3246120" cy="365760"/>
           </a:xfrm>
           <a:prstGeom prst="rect">
             <a:avLst/>
@@ -7655,27 +7935,60 @@
           <a:p>
             <a:pPr algn="l"/>
             <a:r>
-              <a:rPr sz="1800" b="1">
+              <a:rPr sz="1300" b="1">
+                <a:solidFill>
+                  <a:srgbClr val="157347"/>
+                </a:solidFill>
+                <a:latin typeface="Calibri"/>
+              </a:rPr>
+              <a:t>03  Then</a:t>
+            </a:r>
+          </a:p>
+        </p:txBody>
+      </p:sp>
+      <p:sp>
+        <p:nvSpPr>
+          <p:cNvPr id="21" name="TextBox 20"/>
+          <p:cNvSpPr txBox="1"/>
+          <p:nvPr/>
+        </p:nvSpPr>
+        <p:spPr>
+          <a:xfrm>
+            <a:off x="8321040" y="2084831"/>
+            <a:ext cx="3246120" cy="822960"/>
+          </a:xfrm>
+          <a:prstGeom prst="rect">
+            <a:avLst/>
+          </a:prstGeom>
+          <a:noFill/>
+        </p:spPr>
+        <p:txBody>
+          <a:bodyPr wrap="square" anchor="t"/>
+          <a:lstStyle/>
+          <a:p>
+            <a:pPr algn="l"/>
+            <a:r>
+              <a:rPr sz="2000" b="1">
                 <a:solidFill>
                   <a:srgbClr val="0B2545"/>
                 </a:solidFill>
                 <a:latin typeface="Calibri"/>
               </a:rPr>
-              <a:t>How the team can use it afterwards</a:t>
-            </a:r>
-          </a:p>
-        </p:txBody>
-      </p:sp>
-      <p:sp>
-        <p:nvSpPr>
-          <p:cNvPr id="15" name="TextBox 14"/>
-          <p:cNvSpPr txBox="1"/>
-          <p:nvPr/>
-        </p:nvSpPr>
-        <p:spPr>
-          <a:xfrm>
-            <a:off x="6373368" y="1847088"/>
-            <a:ext cx="5221224" cy="4334256"/>
+              <a:t>Team deployment</a:t>
+            </a:r>
+          </a:p>
+        </p:txBody>
+      </p:sp>
+      <p:sp>
+        <p:nvSpPr>
+          <p:cNvPr id="22" name="TextBox 21"/>
+          <p:cNvSpPr txBox="1"/>
+          <p:nvPr/>
+        </p:nvSpPr>
+        <p:spPr>
+          <a:xfrm>
+            <a:off x="8321040" y="2971800"/>
+            <a:ext cx="3246120" cy="1874519"/>
           </a:xfrm>
           <a:prstGeom prst="rect">
             <a:avLst/>
@@ -7688,24 +8001,100 @@
           <a:p>
             <a:pPr algn="l"/>
             <a:r>
-              <a:rPr sz="1500" b="0">
+              <a:rPr sz="1400" b="0">
                 <a:solidFill>
                   <a:srgbClr val="1C2B3A"/>
                 </a:solidFill>
                 <a:latin typeface="Calibri"/>
               </a:rPr>
-              <a:t>Faster first reading of a supplier file before a TDR meeting.
-Fewer missed “OK” that are not really OK.
-Side-by-side comparison of several suppliers on the technique.
-A habit: AI proposes, the mechatronics engineer validates.
-I can share a short recap with the team after the training.</a:t>
-            </a:r>
-          </a:p>
-        </p:txBody>
-      </p:sp>
-      <p:sp>
-        <p:nvSpPr>
-          <p:cNvPr id="16" name="Rectangle 15"/>
+              <a:t>Once this phase is completed, deployment will start so that Mechatronics Engineering can use LEON in a browser, without installation.</a:t>
+            </a:r>
+          </a:p>
+        </p:txBody>
+      </p:sp>
+      <p:sp>
+        <p:nvSpPr>
+          <p:cNvPr id="23" name="Rounded Rectangle 22"/>
+          <p:cNvSpPr/>
+          <p:nvPr/>
+        </p:nvSpPr>
+        <p:spPr>
+          <a:xfrm>
+            <a:off x="411480" y="5303520"/>
+            <a:ext cx="11292840" cy="1078992"/>
+          </a:xfrm>
+          <a:prstGeom prst="roundRect">
+            <a:avLst>
+              <a:gd name="adj" fmla="val 8000"/>
+            </a:avLst>
+          </a:prstGeom>
+          <a:solidFill>
+            <a:srgbClr val="E8F5EE"/>
+          </a:solidFill>
+          <a:ln w="12700">
+            <a:solidFill>
+              <a:srgbClr val="157347"/>
+            </a:solidFill>
+          </a:ln>
+        </p:spPr>
+        <p:style>
+          <a:lnRef idx="1">
+            <a:schemeClr val="accent1"/>
+          </a:lnRef>
+          <a:fillRef idx="3">
+            <a:schemeClr val="accent1"/>
+          </a:fillRef>
+          <a:effectRef idx="2">
+            <a:schemeClr val="accent1"/>
+          </a:effectRef>
+          <a:fontRef idx="minor">
+            <a:schemeClr val="lt1"/>
+          </a:fontRef>
+        </p:style>
+        <p:txBody>
+          <a:bodyPr rtlCol="0" anchor="ctr"/>
+          <a:lstStyle/>
+          <a:p>
+            <a:pPr algn="ctr"/>
+          </a:p>
+        </p:txBody>
+      </p:sp>
+      <p:sp>
+        <p:nvSpPr>
+          <p:cNvPr id="24" name="TextBox 23"/>
+          <p:cNvSpPr txBox="1"/>
+          <p:nvPr/>
+        </p:nvSpPr>
+        <p:spPr>
+          <a:xfrm>
+            <a:off x="640080" y="5440680"/>
+            <a:ext cx="10881360" cy="822960"/>
+          </a:xfrm>
+          <a:prstGeom prst="rect">
+            <a:avLst/>
+          </a:prstGeom>
+          <a:noFill/>
+        </p:spPr>
+        <p:txBody>
+          <a:bodyPr wrap="square" anchor="t"/>
+          <a:lstStyle/>
+          <a:p>
+            <a:pPr algn="l"/>
+            <a:r>
+              <a:rPr sz="1600" b="1">
+                <a:solidFill>
+                  <a:srgbClr val="0B2545"/>
+                </a:solidFill>
+                <a:latin typeface="Calibri"/>
+              </a:rPr>
+              <a:t>Target: any colleague who reviews a specification, a matrix or a TDR can use LEON.</a:t>
+            </a:r>
+          </a:p>
+        </p:txBody>
+      </p:sp>
+      <p:sp>
+        <p:nvSpPr>
+          <p:cNvPr id="25" name="Rectangle 24"/>
           <p:cNvSpPr/>
           <p:nvPr/>
         </p:nvSpPr>
@@ -7748,7 +8137,7 @@
       </p:sp>
       <p:sp>
         <p:nvSpPr>
-          <p:cNvPr id="17" name="TextBox 16"/>
+          <p:cNvPr id="26" name="TextBox 25"/>
           <p:cNvSpPr txBox="1"/>
           <p:nvPr/>
         </p:nvSpPr>
@@ -7774,14 +8163,14 @@
                 </a:solidFill>
                 <a:latin typeface="Calibri"/>
               </a:rPr>
-              <a:t>Khadija Benhamida  ·  Mechatronics Engineering  ·  First meeting</a:t>
-            </a:r>
-          </a:p>
-        </p:txBody>
-      </p:sp>
-      <p:sp>
-        <p:nvSpPr>
-          <p:cNvPr id="18" name="TextBox 17"/>
+              <a:t>Khadija Benhamida  ·  Mechatronics Engineering  ·  Confidential</a:t>
+            </a:r>
+          </a:p>
+        </p:txBody>
+      </p:sp>
+      <p:sp>
+        <p:nvSpPr>
+          <p:cNvPr id="27" name="TextBox 26"/>
           <p:cNvSpPr txBox="1"/>
           <p:nvPr/>
         </p:nvSpPr>
@@ -7807,7 +8196,7 @@
                 </a:solidFill>
                 <a:latin typeface="Calibri"/>
               </a:rPr>
-              <a:t>12  /  13</a:t>
+              <a:t>12  /  14</a:t>
             </a:r>
           </a:p>
         </p:txBody>
@@ -7987,7 +8376,7 @@
                 </a:solidFill>
                 <a:latin typeface="Calibri"/>
               </a:rPr>
-              <a:t>TO CONFIRM WITH YOU</a:t>
+              <a:t>UPCOMING TRAINING</a:t>
             </a:r>
           </a:p>
         </p:txBody>
@@ -8020,7 +8409,7 @@
                 </a:solidFill>
                 <a:latin typeface="Calibri"/>
               </a:rPr>
-              <a:t>Two points of organisation I would like to validate.</a:t>
+              <a:t>AI training for Mechatronics Engineering</a:t>
             </a:r>
           </a:p>
         </p:txBody>
@@ -8053,7 +8442,7 @@
                 </a:solidFill>
                 <a:latin typeface="Calibri"/>
               </a:rPr>
-              <a:t>Télétravail and the first school period.</a:t>
+              <a:t>Operational training on the use of AI in daily document review.</a:t>
             </a:r>
           </a:p>
         </p:txBody>
@@ -8067,7 +8456,7 @@
         <p:spPr>
           <a:xfrm>
             <a:off x="411480" y="1389888"/>
-            <a:ext cx="5532120" cy="3383280"/>
+            <a:ext cx="5532120" cy="4919472"/>
           </a:xfrm>
           <a:prstGeom prst="roundRect">
             <a:avLst>
@@ -8114,7 +8503,7 @@
         <p:spPr>
           <a:xfrm>
             <a:off x="411480" y="1389888"/>
-            <a:ext cx="5532120" cy="475488"/>
+            <a:ext cx="73152" cy="4919472"/>
           </a:xfrm>
           <a:prstGeom prst="rect">
             <a:avLst/>
@@ -8156,27 +8545,27 @@
         </p:nvSpPr>
         <p:spPr>
           <a:xfrm>
-            <a:off x="594360" y="1444752"/>
-            <a:ext cx="5212080" cy="384048"/>
-          </a:xfrm>
-          <a:prstGeom prst="rect">
-            <a:avLst/>
-          </a:prstGeom>
-          <a:noFill/>
-        </p:spPr>
-        <p:txBody>
-          <a:bodyPr wrap="square" anchor="ctr"/>
+            <a:off x="612648" y="1517904"/>
+            <a:ext cx="5221224" cy="347472"/>
+          </a:xfrm>
+          <a:prstGeom prst="rect">
+            <a:avLst/>
+          </a:prstGeom>
+          <a:noFill/>
+        </p:spPr>
+        <p:txBody>
+          <a:bodyPr wrap="square" anchor="t"/>
           <a:lstStyle/>
           <a:p>
             <a:pPr algn="l"/>
             <a:r>
               <a:rPr sz="1800" b="1">
                 <a:solidFill>
-                  <a:srgbClr val="FFFFFF"/>
-                </a:solidFill>
-                <a:latin typeface="Calibri"/>
-              </a:rPr>
-              <a:t>Télétravail (TT)</a:t>
+                  <a:srgbClr val="0B2545"/>
+                </a:solidFill>
+                <a:latin typeface="Calibri"/>
+              </a:rPr>
+              <a:t>Objectives of the training</a:t>
             </a:r>
           </a:p>
         </p:txBody>
@@ -8189,8 +8578,8 @@
         </p:nvSpPr>
         <p:spPr>
           <a:xfrm>
-            <a:off x="640080" y="2057400"/>
-            <a:ext cx="5074920" cy="2468880"/>
+            <a:off x="612648" y="1847088"/>
+            <a:ext cx="5221224" cy="4334256"/>
           </a:xfrm>
           <a:prstGeom prst="rect">
             <a:avLst/>
@@ -8203,16 +8592,16 @@
           <a:p>
             <a:pPr algn="l"/>
             <a:r>
-              <a:rPr sz="1600" b="0">
+              <a:rPr sz="1400" b="0">
                 <a:solidFill>
                   <a:srgbClr val="1C2B3A"/>
                 </a:solidFill>
                 <a:latin typeface="Calibri"/>
               </a:rPr>
-              <a:t>I take two days of télétravail per week:
-• Wednesday
-• Friday
-I would like to confirm this rhythm with you, so the team knows when I am on site and when I am in TT.</a:t>
+              <a:t>Clarify what AI can and cannot do on specifications, matrices and TDR files.
+Position a tool such as LEON as a first analysis, not as a substitute for the engineer.
+Establish a common practice: where AI reduces review time, and where a technical decision is required.
+Use examples drawn from mechatronics documents.</a:t>
             </a:r>
           </a:p>
         </p:txBody>
@@ -8226,7 +8615,7 @@
         <p:spPr>
           <a:xfrm>
             <a:off x="6172200" y="1389888"/>
-            <a:ext cx="5532120" cy="3383280"/>
+            <a:ext cx="5532120" cy="4919472"/>
           </a:xfrm>
           <a:prstGeom prst="roundRect">
             <a:avLst>
@@ -8273,6 +8662,680 @@
         <p:spPr>
           <a:xfrm>
             <a:off x="6172200" y="1389888"/>
+            <a:ext cx="73152" cy="4919472"/>
+          </a:xfrm>
+          <a:prstGeom prst="rect">
+            <a:avLst/>
+          </a:prstGeom>
+          <a:solidFill>
+            <a:srgbClr val="157347"/>
+          </a:solidFill>
+          <a:ln>
+            <a:noFill/>
+          </a:ln>
+        </p:spPr>
+        <p:style>
+          <a:lnRef idx="1">
+            <a:schemeClr val="accent1"/>
+          </a:lnRef>
+          <a:fillRef idx="3">
+            <a:schemeClr val="accent1"/>
+          </a:fillRef>
+          <a:effectRef idx="2">
+            <a:schemeClr val="accent1"/>
+          </a:effectRef>
+          <a:fontRef idx="minor">
+            <a:schemeClr val="lt1"/>
+          </a:fontRef>
+        </p:style>
+        <p:txBody>
+          <a:bodyPr rtlCol="0" anchor="ctr"/>
+          <a:lstStyle/>
+          <a:p>
+            <a:pPr algn="ctr"/>
+          </a:p>
+        </p:txBody>
+      </p:sp>
+      <p:sp>
+        <p:nvSpPr>
+          <p:cNvPr id="14" name="TextBox 13"/>
+          <p:cNvSpPr txBox="1"/>
+          <p:nvPr/>
+        </p:nvSpPr>
+        <p:spPr>
+          <a:xfrm>
+            <a:off x="6373368" y="1517904"/>
+            <a:ext cx="5221224" cy="347472"/>
+          </a:xfrm>
+          <a:prstGeom prst="rect">
+            <a:avLst/>
+          </a:prstGeom>
+          <a:noFill/>
+        </p:spPr>
+        <p:txBody>
+          <a:bodyPr wrap="square" anchor="t"/>
+          <a:lstStyle/>
+          <a:p>
+            <a:pPr algn="l"/>
+            <a:r>
+              <a:rPr sz="1800" b="1">
+                <a:solidFill>
+                  <a:srgbClr val="0B2545"/>
+                </a:solidFill>
+                <a:latin typeface="Calibri"/>
+              </a:rPr>
+              <a:t>Expected use in the team</a:t>
+            </a:r>
+          </a:p>
+        </p:txBody>
+      </p:sp>
+      <p:sp>
+        <p:nvSpPr>
+          <p:cNvPr id="15" name="TextBox 14"/>
+          <p:cNvSpPr txBox="1"/>
+          <p:nvPr/>
+        </p:nvSpPr>
+        <p:spPr>
+          <a:xfrm>
+            <a:off x="6373368" y="1847088"/>
+            <a:ext cx="5221224" cy="4334256"/>
+          </a:xfrm>
+          <a:prstGeom prst="rect">
+            <a:avLst/>
+          </a:prstGeom>
+          <a:noFill/>
+        </p:spPr>
+        <p:txBody>
+          <a:bodyPr wrap="square" anchor="t"/>
+          <a:lstStyle/>
+          <a:p>
+            <a:pPr algn="l"/>
+            <a:r>
+              <a:rPr sz="1400" b="0">
+                <a:solidFill>
+                  <a:srgbClr val="1C2B3A"/>
+                </a:solidFill>
+                <a:latin typeface="Calibri"/>
+              </a:rPr>
+              <a:t>Faster preparation of a TDR review.
+Fewer OK declarations accepted despite a contradictory comment.
+Structured comparison of several suppliers on technical criteria.
+Rule of use: the application proposes; the engineer validates.
+A short feedback to the team can be prepared after the training.</a:t>
+            </a:r>
+          </a:p>
+        </p:txBody>
+      </p:sp>
+      <p:sp>
+        <p:nvSpPr>
+          <p:cNvPr id="16" name="Rectangle 15"/>
+          <p:cNvSpPr/>
+          <p:nvPr/>
+        </p:nvSpPr>
+        <p:spPr>
+          <a:xfrm>
+            <a:off x="0" y="6601968"/>
+            <a:ext cx="12191695" cy="256032"/>
+          </a:xfrm>
+          <a:prstGeom prst="rect">
+            <a:avLst/>
+          </a:prstGeom>
+          <a:solidFill>
+            <a:srgbClr val="0B2545"/>
+          </a:solidFill>
+          <a:ln>
+            <a:noFill/>
+          </a:ln>
+        </p:spPr>
+        <p:style>
+          <a:lnRef idx="1">
+            <a:schemeClr val="accent1"/>
+          </a:lnRef>
+          <a:fillRef idx="3">
+            <a:schemeClr val="accent1"/>
+          </a:fillRef>
+          <a:effectRef idx="2">
+            <a:schemeClr val="accent1"/>
+          </a:effectRef>
+          <a:fontRef idx="minor">
+            <a:schemeClr val="lt1"/>
+          </a:fontRef>
+        </p:style>
+        <p:txBody>
+          <a:bodyPr rtlCol="0" anchor="ctr"/>
+          <a:lstStyle/>
+          <a:p>
+            <a:pPr algn="ctr"/>
+          </a:p>
+        </p:txBody>
+      </p:sp>
+      <p:sp>
+        <p:nvSpPr>
+          <p:cNvPr id="17" name="TextBox 16"/>
+          <p:cNvSpPr txBox="1"/>
+          <p:nvPr/>
+        </p:nvSpPr>
+        <p:spPr>
+          <a:xfrm>
+            <a:off x="365760" y="6601968"/>
+            <a:ext cx="9144000" cy="256032"/>
+          </a:xfrm>
+          <a:prstGeom prst="rect">
+            <a:avLst/>
+          </a:prstGeom>
+          <a:noFill/>
+        </p:spPr>
+        <p:txBody>
+          <a:bodyPr wrap="square" anchor="ctr"/>
+          <a:lstStyle/>
+          <a:p>
+            <a:pPr algn="l"/>
+            <a:r>
+              <a:rPr sz="1100" b="0">
+                <a:solidFill>
+                  <a:srgbClr val="A9BCD4"/>
+                </a:solidFill>
+                <a:latin typeface="Calibri"/>
+              </a:rPr>
+              <a:t>Khadija Benhamida  ·  Mechatronics Engineering  ·  Confidential</a:t>
+            </a:r>
+          </a:p>
+        </p:txBody>
+      </p:sp>
+      <p:sp>
+        <p:nvSpPr>
+          <p:cNvPr id="18" name="TextBox 17"/>
+          <p:cNvSpPr txBox="1"/>
+          <p:nvPr/>
+        </p:nvSpPr>
+        <p:spPr>
+          <a:xfrm>
+            <a:off x="10424160" y="6601968"/>
+            <a:ext cx="1371600" cy="256032"/>
+          </a:xfrm>
+          <a:prstGeom prst="rect">
+            <a:avLst/>
+          </a:prstGeom>
+          <a:noFill/>
+        </p:spPr>
+        <p:txBody>
+          <a:bodyPr wrap="square" anchor="ctr"/>
+          <a:lstStyle/>
+          <a:p>
+            <a:pPr algn="r"/>
+            <a:r>
+              <a:rPr sz="1100" b="0">
+                <a:solidFill>
+                  <a:srgbClr val="FFFFFF"/>
+                </a:solidFill>
+                <a:latin typeface="Calibri"/>
+              </a:rPr>
+              <a:t>13  /  14</a:t>
+            </a:r>
+          </a:p>
+        </p:txBody>
+      </p:sp>
+    </p:spTree>
+  </p:cSld>
+  <p:clrMapOvr>
+    <a:masterClrMapping/>
+  </p:clrMapOvr>
+</p:sld>
+</file>
+
+<file path=ppt/slides/slide14.xml><?xml version="1.0" encoding="utf-8"?>
+<p:sld xmlns:a="http://schemas.openxmlformats.org/drawingml/2006/main" xmlns:p="http://schemas.openxmlformats.org/presentationml/2006/main" xmlns:r="http://schemas.openxmlformats.org/officeDocument/2006/relationships">
+  <p:cSld>
+    <p:spTree>
+      <p:nvGrpSpPr>
+        <p:cNvPr id="1" name=""/>
+        <p:cNvGrpSpPr/>
+        <p:nvPr/>
+      </p:nvGrpSpPr>
+      <p:grpSpPr/>
+      <p:sp>
+        <p:nvSpPr>
+          <p:cNvPr id="2" name="Rectangle 1"/>
+          <p:cNvSpPr/>
+          <p:nvPr/>
+        </p:nvSpPr>
+        <p:spPr>
+          <a:xfrm>
+            <a:off x="0" y="0"/>
+            <a:ext cx="12191695" cy="6858000"/>
+          </a:xfrm>
+          <a:prstGeom prst="rect">
+            <a:avLst/>
+          </a:prstGeom>
+          <a:solidFill>
+            <a:srgbClr val="F4F7FB"/>
+          </a:solidFill>
+          <a:ln>
+            <a:noFill/>
+          </a:ln>
+        </p:spPr>
+        <p:style>
+          <a:lnRef idx="1">
+            <a:schemeClr val="accent1"/>
+          </a:lnRef>
+          <a:fillRef idx="3">
+            <a:schemeClr val="accent1"/>
+          </a:fillRef>
+          <a:effectRef idx="2">
+            <a:schemeClr val="accent1"/>
+          </a:effectRef>
+          <a:fontRef idx="minor">
+            <a:schemeClr val="lt1"/>
+          </a:fontRef>
+        </p:style>
+        <p:txBody>
+          <a:bodyPr rtlCol="0" anchor="ctr"/>
+          <a:lstStyle/>
+          <a:p>
+            <a:pPr algn="ctr"/>
+          </a:p>
+        </p:txBody>
+      </p:sp>
+      <p:sp>
+        <p:nvSpPr>
+          <p:cNvPr id="3" name="Rectangle 2"/>
+          <p:cNvSpPr/>
+          <p:nvPr/>
+        </p:nvSpPr>
+        <p:spPr>
+          <a:xfrm>
+            <a:off x="0" y="0"/>
+            <a:ext cx="12191695" cy="1078992"/>
+          </a:xfrm>
+          <a:prstGeom prst="rect">
+            <a:avLst/>
+          </a:prstGeom>
+          <a:solidFill>
+            <a:srgbClr val="0B2545"/>
+          </a:solidFill>
+          <a:ln>
+            <a:noFill/>
+          </a:ln>
+        </p:spPr>
+        <p:style>
+          <a:lnRef idx="1">
+            <a:schemeClr val="accent1"/>
+          </a:lnRef>
+          <a:fillRef idx="3">
+            <a:schemeClr val="accent1"/>
+          </a:fillRef>
+          <a:effectRef idx="2">
+            <a:schemeClr val="accent1"/>
+          </a:effectRef>
+          <a:fontRef idx="minor">
+            <a:schemeClr val="lt1"/>
+          </a:fontRef>
+        </p:style>
+        <p:txBody>
+          <a:bodyPr rtlCol="0" anchor="ctr"/>
+          <a:lstStyle/>
+          <a:p>
+            <a:pPr algn="ctr"/>
+          </a:p>
+        </p:txBody>
+      </p:sp>
+      <p:sp>
+        <p:nvSpPr>
+          <p:cNvPr id="4" name="Rectangle 3"/>
+          <p:cNvSpPr/>
+          <p:nvPr/>
+        </p:nvSpPr>
+        <p:spPr>
+          <a:xfrm>
+            <a:off x="0" y="1078992"/>
+            <a:ext cx="12191695" cy="54864"/>
+          </a:xfrm>
+          <a:prstGeom prst="rect">
+            <a:avLst/>
+          </a:prstGeom>
+          <a:solidFill>
+            <a:srgbClr val="1D4ED8"/>
+          </a:solidFill>
+          <a:ln>
+            <a:noFill/>
+          </a:ln>
+        </p:spPr>
+        <p:style>
+          <a:lnRef idx="1">
+            <a:schemeClr val="accent1"/>
+          </a:lnRef>
+          <a:fillRef idx="3">
+            <a:schemeClr val="accent1"/>
+          </a:fillRef>
+          <a:effectRef idx="2">
+            <a:schemeClr val="accent1"/>
+          </a:effectRef>
+          <a:fontRef idx="minor">
+            <a:schemeClr val="lt1"/>
+          </a:fontRef>
+        </p:style>
+        <p:txBody>
+          <a:bodyPr rtlCol="0" anchor="ctr"/>
+          <a:lstStyle/>
+          <a:p>
+            <a:pPr algn="ctr"/>
+          </a:p>
+        </p:txBody>
+      </p:sp>
+      <p:sp>
+        <p:nvSpPr>
+          <p:cNvPr id="5" name="TextBox 4"/>
+          <p:cNvSpPr txBox="1"/>
+          <p:nvPr/>
+        </p:nvSpPr>
+        <p:spPr>
+          <a:xfrm>
+            <a:off x="457200" y="91440"/>
+            <a:ext cx="11247120" cy="256032"/>
+          </a:xfrm>
+          <a:prstGeom prst="rect">
+            <a:avLst/>
+          </a:prstGeom>
+          <a:noFill/>
+        </p:spPr>
+        <p:txBody>
+          <a:bodyPr wrap="square" anchor="t"/>
+          <a:lstStyle/>
+          <a:p>
+            <a:pPr algn="l"/>
+            <a:r>
+              <a:rPr sz="1100" b="1">
+                <a:solidFill>
+                  <a:srgbClr val="A9BCD4"/>
+                </a:solidFill>
+                <a:latin typeface="Calibri"/>
+              </a:rPr>
+              <a:t>WORKING ARRANGEMENTS</a:t>
+            </a:r>
+          </a:p>
+        </p:txBody>
+      </p:sp>
+      <p:sp>
+        <p:nvSpPr>
+          <p:cNvPr id="6" name="TextBox 5"/>
+          <p:cNvSpPr txBox="1"/>
+          <p:nvPr/>
+        </p:nvSpPr>
+        <p:spPr>
+          <a:xfrm>
+            <a:off x="457200" y="310896"/>
+            <a:ext cx="11247120" cy="384048"/>
+          </a:xfrm>
+          <a:prstGeom prst="rect">
+            <a:avLst/>
+          </a:prstGeom>
+          <a:noFill/>
+        </p:spPr>
+        <p:txBody>
+          <a:bodyPr wrap="square" anchor="t"/>
+          <a:lstStyle/>
+          <a:p>
+            <a:pPr algn="l"/>
+            <a:r>
+              <a:rPr sz="2600" b="1">
+                <a:solidFill>
+                  <a:srgbClr val="FFFFFF"/>
+                </a:solidFill>
+                <a:latin typeface="Calibri"/>
+              </a:rPr>
+              <a:t>Points submitted for confirmation</a:t>
+            </a:r>
+          </a:p>
+        </p:txBody>
+      </p:sp>
+      <p:sp>
+        <p:nvSpPr>
+          <p:cNvPr id="7" name="TextBox 6"/>
+          <p:cNvSpPr txBox="1"/>
+          <p:nvPr/>
+        </p:nvSpPr>
+        <p:spPr>
+          <a:xfrm>
+            <a:off x="457200" y="713232"/>
+            <a:ext cx="11247120" cy="292608"/>
+          </a:xfrm>
+          <a:prstGeom prst="rect">
+            <a:avLst/>
+          </a:prstGeom>
+          <a:noFill/>
+        </p:spPr>
+        <p:txBody>
+          <a:bodyPr wrap="square" anchor="t"/>
+          <a:lstStyle/>
+          <a:p>
+            <a:pPr algn="l"/>
+            <a:r>
+              <a:rPr sz="1300" b="0">
+                <a:solidFill>
+                  <a:srgbClr val="C5D4E8"/>
+                </a:solidFill>
+                <a:latin typeface="Calibri"/>
+              </a:rPr>
+              <a:t>Télétravail and first school period.</a:t>
+            </a:r>
+          </a:p>
+        </p:txBody>
+      </p:sp>
+      <p:sp>
+        <p:nvSpPr>
+          <p:cNvPr id="8" name="Rounded Rectangle 7"/>
+          <p:cNvSpPr/>
+          <p:nvPr/>
+        </p:nvSpPr>
+        <p:spPr>
+          <a:xfrm>
+            <a:off x="411480" y="1389888"/>
+            <a:ext cx="5532120" cy="3383280"/>
+          </a:xfrm>
+          <a:prstGeom prst="roundRect">
+            <a:avLst>
+              <a:gd name="adj" fmla="val 8000"/>
+            </a:avLst>
+          </a:prstGeom>
+          <a:solidFill>
+            <a:srgbClr val="FFFFFF"/>
+          </a:solidFill>
+          <a:ln w="12700">
+            <a:solidFill>
+              <a:srgbClr val="DDE3EC"/>
+            </a:solidFill>
+          </a:ln>
+        </p:spPr>
+        <p:style>
+          <a:lnRef idx="1">
+            <a:schemeClr val="accent1"/>
+          </a:lnRef>
+          <a:fillRef idx="3">
+            <a:schemeClr val="accent1"/>
+          </a:fillRef>
+          <a:effectRef idx="2">
+            <a:schemeClr val="accent1"/>
+          </a:effectRef>
+          <a:fontRef idx="minor">
+            <a:schemeClr val="lt1"/>
+          </a:fontRef>
+        </p:style>
+        <p:txBody>
+          <a:bodyPr rtlCol="0" anchor="ctr"/>
+          <a:lstStyle/>
+          <a:p>
+            <a:pPr algn="ctr"/>
+          </a:p>
+        </p:txBody>
+      </p:sp>
+      <p:sp>
+        <p:nvSpPr>
+          <p:cNvPr id="9" name="Rectangle 8"/>
+          <p:cNvSpPr/>
+          <p:nvPr/>
+        </p:nvSpPr>
+        <p:spPr>
+          <a:xfrm>
+            <a:off x="411480" y="1389888"/>
+            <a:ext cx="5532120" cy="475488"/>
+          </a:xfrm>
+          <a:prstGeom prst="rect">
+            <a:avLst/>
+          </a:prstGeom>
+          <a:solidFill>
+            <a:srgbClr val="1D4ED8"/>
+          </a:solidFill>
+          <a:ln>
+            <a:noFill/>
+          </a:ln>
+        </p:spPr>
+        <p:style>
+          <a:lnRef idx="1">
+            <a:schemeClr val="accent1"/>
+          </a:lnRef>
+          <a:fillRef idx="3">
+            <a:schemeClr val="accent1"/>
+          </a:fillRef>
+          <a:effectRef idx="2">
+            <a:schemeClr val="accent1"/>
+          </a:effectRef>
+          <a:fontRef idx="minor">
+            <a:schemeClr val="lt1"/>
+          </a:fontRef>
+        </p:style>
+        <p:txBody>
+          <a:bodyPr rtlCol="0" anchor="ctr"/>
+          <a:lstStyle/>
+          <a:p>
+            <a:pPr algn="ctr"/>
+          </a:p>
+        </p:txBody>
+      </p:sp>
+      <p:sp>
+        <p:nvSpPr>
+          <p:cNvPr id="10" name="TextBox 9"/>
+          <p:cNvSpPr txBox="1"/>
+          <p:nvPr/>
+        </p:nvSpPr>
+        <p:spPr>
+          <a:xfrm>
+            <a:off x="594360" y="1444752"/>
+            <a:ext cx="5212080" cy="384048"/>
+          </a:xfrm>
+          <a:prstGeom prst="rect">
+            <a:avLst/>
+          </a:prstGeom>
+          <a:noFill/>
+        </p:spPr>
+        <p:txBody>
+          <a:bodyPr wrap="square" anchor="ctr"/>
+          <a:lstStyle/>
+          <a:p>
+            <a:pPr algn="l"/>
+            <a:r>
+              <a:rPr sz="1800" b="1">
+                <a:solidFill>
+                  <a:srgbClr val="FFFFFF"/>
+                </a:solidFill>
+                <a:latin typeface="Calibri"/>
+              </a:rPr>
+              <a:t>Télétravail (TT)</a:t>
+            </a:r>
+          </a:p>
+        </p:txBody>
+      </p:sp>
+      <p:sp>
+        <p:nvSpPr>
+          <p:cNvPr id="11" name="TextBox 10"/>
+          <p:cNvSpPr txBox="1"/>
+          <p:nvPr/>
+        </p:nvSpPr>
+        <p:spPr>
+          <a:xfrm>
+            <a:off x="640080" y="2057400"/>
+            <a:ext cx="5074920" cy="2468880"/>
+          </a:xfrm>
+          <a:prstGeom prst="rect">
+            <a:avLst/>
+          </a:prstGeom>
+          <a:noFill/>
+        </p:spPr>
+        <p:txBody>
+          <a:bodyPr wrap="square" anchor="t"/>
+          <a:lstStyle/>
+          <a:p>
+            <a:pPr algn="l"/>
+            <a:r>
+              <a:rPr sz="1600" b="0">
+                <a:solidFill>
+                  <a:srgbClr val="1C2B3A"/>
+                </a:solidFill>
+                <a:latin typeface="Calibri"/>
+              </a:rPr>
+              <a:t>Proposed weekly pattern: two days of télétravail.
+• Wednesday
+• Friday
+This pattern is submitted for confirmation, so that on-site presence is clear for the team.</a:t>
+            </a:r>
+          </a:p>
+        </p:txBody>
+      </p:sp>
+      <p:sp>
+        <p:nvSpPr>
+          <p:cNvPr id="12" name="Rounded Rectangle 11"/>
+          <p:cNvSpPr/>
+          <p:nvPr/>
+        </p:nvSpPr>
+        <p:spPr>
+          <a:xfrm>
+            <a:off x="6172200" y="1389888"/>
+            <a:ext cx="5532120" cy="3383280"/>
+          </a:xfrm>
+          <a:prstGeom prst="roundRect">
+            <a:avLst>
+              <a:gd name="adj" fmla="val 8000"/>
+            </a:avLst>
+          </a:prstGeom>
+          <a:solidFill>
+            <a:srgbClr val="FFFFFF"/>
+          </a:solidFill>
+          <a:ln w="12700">
+            <a:solidFill>
+              <a:srgbClr val="DDE3EC"/>
+            </a:solidFill>
+          </a:ln>
+        </p:spPr>
+        <p:style>
+          <a:lnRef idx="1">
+            <a:schemeClr val="accent1"/>
+          </a:lnRef>
+          <a:fillRef idx="3">
+            <a:schemeClr val="accent1"/>
+          </a:fillRef>
+          <a:effectRef idx="2">
+            <a:schemeClr val="accent1"/>
+          </a:effectRef>
+          <a:fontRef idx="minor">
+            <a:schemeClr val="lt1"/>
+          </a:fontRef>
+        </p:style>
+        <p:txBody>
+          <a:bodyPr rtlCol="0" anchor="ctr"/>
+          <a:lstStyle/>
+          <a:p>
+            <a:pPr algn="ctr"/>
+          </a:p>
+        </p:txBody>
+      </p:sp>
+      <p:sp>
+        <p:nvSpPr>
+          <p:cNvPr id="13" name="Rectangle 12"/>
+          <p:cNvSpPr/>
+          <p:nvPr/>
+        </p:nvSpPr>
+        <p:spPr>
+          <a:xfrm>
+            <a:off x="6172200" y="1389888"/>
             <a:ext cx="5532120" cy="475488"/>
           </a:xfrm>
           <a:prstGeom prst="rect">
@@ -8368,9 +9431,9 @@
                 </a:solidFill>
                 <a:latin typeface="Calibri"/>
               </a:rPr>
-              <a:t>Over the next two weeks I will be in my first school period (période école).
-I will not be on site during that time.
-After that, I am back on the usual company / TT rhythm.</a:t>
+              <a:t>The next two weeks correspond to the first school period (période école).
+Presence on site is not planned during that period.
+The usual company / TT pattern resumes afterwards.</a:t>
             </a:r>
           </a:p>
         </p:txBody>
@@ -8450,7 +9513,7 @@
                 </a:solidFill>
                 <a:latin typeface="Calibri"/>
               </a:rPr>
-              <a:t>Thank you — I am happy to adjust if needed</a:t>
+              <a:t>Submitted for your confirmation</a:t>
             </a:r>
           </a:p>
         </p:txBody>
@@ -8483,7 +9546,7 @@
                 </a:solidFill>
                 <a:latin typeface="Calibri"/>
               </a:rPr>
-              <a:t>These two points are for your validation. If the TT days or the school period need a different organisation, I can adapt.</a:t>
+              <a:t>Both points can be adjusted if a different organisation is required.</a:t>
             </a:r>
           </a:p>
         </p:txBody>
@@ -8559,7 +9622,7 @@
                 </a:solidFill>
                 <a:latin typeface="Calibri"/>
               </a:rPr>
-              <a:t>Khadija Benhamida  ·  Mechatronics Engineering  ·  First meeting</a:t>
+              <a:t>Khadija Benhamida  ·  Mechatronics Engineering  ·  Confidential</a:t>
             </a:r>
           </a:p>
         </p:txBody>
@@ -8592,7 +9655,7 @@
                 </a:solidFill>
                 <a:latin typeface="Calibri"/>
               </a:rPr>
-              <a:t>13  /  13</a:t>
+              <a:t>14  /  14</a:t>
             </a:r>
           </a:p>
         </p:txBody>
@@ -8805,7 +9868,7 @@
                 </a:solidFill>
                 <a:latin typeface="Calibri"/>
               </a:rPr>
-              <a:t>Points I would like to cover with you.</a:t>
+              <a:t>Meeting agenda</a:t>
             </a:r>
           </a:p>
         </p:txBody>
@@ -8838,7 +9901,7 @@
                 </a:solidFill>
                 <a:latin typeface="Calibri"/>
               </a:rPr>
-              <a:t>A short status of the work, then the practical points to confirm.</a:t>
+              <a:t>Project presentation, current status, and organisational points.</a:t>
             </a:r>
           </a:p>
         </p:txBody>
@@ -8994,7 +10057,7 @@
                 </a:solidFill>
                 <a:latin typeface="Calibri"/>
               </a:rPr>
-              <a:t>The work on LEON</a:t>
+              <a:t>Project presentation</a:t>
             </a:r>
           </a:p>
         </p:txBody>
@@ -9027,7 +10090,7 @@
                 </a:solidFill>
                 <a:latin typeface="Calibri"/>
               </a:rPr>
-              <a:t>The three documents we review, the tool I am building, and what it already does.</a:t>
+              <a:t>Purpose of LEON, the three documents concerned, and the functions of the application.</a:t>
             </a:r>
           </a:p>
         </p:txBody>
@@ -9183,7 +10246,7 @@
                 </a:solidFill>
                 <a:latin typeface="Calibri"/>
               </a:rPr>
-              <a:t>What I have delivered so far</a:t>
+              <a:t>Work completed to date</a:t>
             </a:r>
           </a:p>
         </p:txBody>
@@ -9216,7 +10279,7 @@
                 </a:solidFill>
                 <a:latin typeface="Calibri"/>
               </a:rPr>
-              <a:t>Spec validation, conformity matrix, Matrix ↔ TDR, TDR benchmark, version follow-up.</a:t>
+              <a:t>Specification validation, conformity matrix analysis, Matrix ↔ TDR, TDR benchmark.</a:t>
             </a:r>
           </a:p>
         </p:txBody>
@@ -9405,7 +10468,7 @@
                 </a:solidFill>
                 <a:latin typeface="Calibri"/>
               </a:rPr>
-              <a:t>Imane El Brouji and Patrick Garcia — mechatronics expertise, ideas and explanations.</a:t>
+              <a:t>Working arrangement with Imane El Brouji and Patrick Garcia.</a:t>
             </a:r>
           </a:p>
         </p:txBody>
@@ -9561,7 +10624,7 @@
                 </a:solidFill>
                 <a:latin typeface="Calibri"/>
               </a:rPr>
-              <a:t>Status and next step</a:t>
+              <a:t>Status and deployment</a:t>
             </a:r>
           </a:p>
         </p:txBody>
@@ -9594,7 +10657,7 @@
                 </a:solidFill>
                 <a:latin typeface="Calibri"/>
               </a:rPr>
-              <a:t>Work in progress. Once this task is finished, we start the deployment for the team.</a:t>
+              <a:t>Development in progress. Team access will follow completion of this phase.</a:t>
             </a:r>
           </a:p>
         </p:txBody>
@@ -9750,7 +10813,7 @@
                 </a:solidFill>
                 <a:latin typeface="Calibri"/>
               </a:rPr>
-              <a:t>AI training for Mechatronics</a:t>
+              <a:t>AI training</a:t>
             </a:r>
           </a:p>
         </p:txBody>
@@ -9783,7 +10846,7 @@
                 </a:solidFill>
                 <a:latin typeface="Calibri"/>
               </a:rPr>
-              <a:t>The training we will have, and how the team can use it in daily work.</a:t>
+              <a:t>Upcoming training and expected use within Mechatronics Engineering.</a:t>
             </a:r>
           </a:p>
         </p:txBody>
@@ -9939,7 +11002,7 @@
                 </a:solidFill>
                 <a:latin typeface="Calibri"/>
               </a:rPr>
-              <a:t>Availability to confirm</a:t>
+              <a:t>Working arrangements</a:t>
             </a:r>
           </a:p>
         </p:txBody>
@@ -9972,7 +11035,7 @@
                 </a:solidFill>
                 <a:latin typeface="Calibri"/>
               </a:rPr>
-              <a:t>Télétravail Wednesday and Friday, and the first school period over the next two weeks.</a:t>
+              <a:t>Télétravail on Wednesday and Friday; first school period over the next two weeks.</a:t>
             </a:r>
           </a:p>
         </p:txBody>
@@ -10048,7 +11111,7 @@
                 </a:solidFill>
                 <a:latin typeface="Calibri"/>
               </a:rPr>
-              <a:t>Khadija Benhamida  ·  Mechatronics Engineering  ·  First meeting</a:t>
+              <a:t>Khadija Benhamida  ·  Mechatronics Engineering  ·  Confidential</a:t>
             </a:r>
           </a:p>
         </p:txBody>
@@ -10081,7 +11144,7 @@
                 </a:solidFill>
                 <a:latin typeface="Calibri"/>
               </a:rPr>
-              <a:t>2  /  13</a:t>
+              <a:t>2  /  14</a:t>
             </a:r>
           </a:p>
         </p:txBody>
@@ -10261,7 +11324,7 @@
                 </a:solidFill>
                 <a:latin typeface="Calibri"/>
               </a:rPr>
-              <a:t>THE VOCABULARY</a:t>
+              <a:t>THE PROJECT</a:t>
             </a:r>
           </a:p>
         </p:txBody>
@@ -10294,7 +11357,7 @@
                 </a:solidFill>
                 <a:latin typeface="Calibri"/>
               </a:rPr>
-              <a:t>Three documents. One part. They must agree.</a:t>
+              <a:t>Purpose of LEON</a:t>
             </a:r>
           </a:p>
         </p:txBody>
@@ -10327,7 +11390,7 @@
                 </a:solidFill>
                 <a:latin typeface="Calibri"/>
               </a:rPr>
-              <a:t>Think of buying a car screen, a camera or a controller from a supplier.</a:t>
+              <a:t>A structured first analysis of supplier documentation for Mechatronics Engineering.</a:t>
             </a:r>
           </a:p>
         </p:txBody>
@@ -10340,8 +11403,8 @@
         </p:nvSpPr>
         <p:spPr>
           <a:xfrm>
-            <a:off x="411480" y="1417320"/>
-            <a:ext cx="3611880" cy="4892040"/>
+            <a:off x="411480" y="1389888"/>
+            <a:ext cx="5532120" cy="2240280"/>
           </a:xfrm>
           <a:prstGeom prst="roundRect">
             <a:avLst>
@@ -10387,8 +11450,8 @@
         </p:nvSpPr>
         <p:spPr>
           <a:xfrm>
-            <a:off x="411480" y="1417320"/>
-            <a:ext cx="3611880" cy="109728"/>
+            <a:off x="411480" y="1389888"/>
+            <a:ext cx="73152" cy="2240280"/>
           </a:xfrm>
           <a:prstGeom prst="rect">
             <a:avLst/>
@@ -10430,8 +11493,8 @@
         </p:nvSpPr>
         <p:spPr>
           <a:xfrm>
-            <a:off x="612648" y="1664208"/>
-            <a:ext cx="3200400" cy="457200"/>
+            <a:off x="612648" y="1517904"/>
+            <a:ext cx="5221224" cy="347472"/>
           </a:xfrm>
           <a:prstGeom prst="rect">
             <a:avLst/>
@@ -10444,13 +11507,13 @@
           <a:p>
             <a:pPr algn="l"/>
             <a:r>
-              <a:rPr sz="2000" b="1">
+              <a:rPr sz="1600" b="1">
                 <a:solidFill>
                   <a:srgbClr val="0B2545"/>
                 </a:solidFill>
                 <a:latin typeface="Calibri"/>
               </a:rPr>
-              <a:t>1.  The SPEC</a:t>
+              <a:t>Objective</a:t>
             </a:r>
           </a:p>
         </p:txBody>
@@ -10463,8 +11526,8 @@
         </p:nvSpPr>
         <p:spPr>
           <a:xfrm>
-            <a:off x="612648" y="2194560"/>
-            <a:ext cx="3200400" cy="3840480"/>
+            <a:off x="612648" y="1847088"/>
+            <a:ext cx="5221224" cy="1655064"/>
           </a:xfrm>
           <a:prstGeom prst="rect">
             <a:avLst/>
@@ -10483,9 +11546,7 @@
                 </a:solidFill>
                 <a:latin typeface="Calibri"/>
               </a:rPr>
-              <a:t>What Stellantis writes.
-Our technical specification: every requirement the part must meet (brightness, temperature, safety, interfaces…).
-This is our “shopping list” — and the contract of what “good” means.</a:t>
+              <a:t>Reduce the time and the risk of a purely manual review of specifications, conformity matrices and TDR files, while keeping the technical decision with the engineer.</a:t>
             </a:r>
           </a:p>
         </p:txBody>
@@ -10498,8 +11559,8 @@
         </p:nvSpPr>
         <p:spPr>
           <a:xfrm>
-            <a:off x="4206240" y="1417320"/>
-            <a:ext cx="3611880" cy="4892040"/>
+            <a:off x="6172200" y="1389888"/>
+            <a:ext cx="5532120" cy="2240280"/>
           </a:xfrm>
           <a:prstGeom prst="roundRect">
             <a:avLst>
@@ -10545,14 +11606,14 @@
         </p:nvSpPr>
         <p:spPr>
           <a:xfrm>
-            <a:off x="4206240" y="1417320"/>
-            <a:ext cx="3611880" cy="109728"/>
+            <a:off x="6172200" y="1389888"/>
+            <a:ext cx="73152" cy="2240280"/>
           </a:xfrm>
           <a:prstGeom prst="rect">
             <a:avLst/>
           </a:prstGeom>
           <a:solidFill>
-            <a:srgbClr val="9A5B00"/>
+            <a:srgbClr val="123061"/>
           </a:solidFill>
           <a:ln>
             <a:noFill/>
@@ -10588,8 +11649,8 @@
         </p:nvSpPr>
         <p:spPr>
           <a:xfrm>
-            <a:off x="4407408" y="1664208"/>
-            <a:ext cx="3200400" cy="457200"/>
+            <a:off x="6373368" y="1517904"/>
+            <a:ext cx="5221224" cy="347472"/>
           </a:xfrm>
           <a:prstGeom prst="rect">
             <a:avLst/>
@@ -10602,13 +11663,13 @@
           <a:p>
             <a:pPr algn="l"/>
             <a:r>
-              <a:rPr sz="2000" b="1">
+              <a:rPr sz="1600" b="1">
                 <a:solidFill>
                   <a:srgbClr val="0B2545"/>
                 </a:solidFill>
                 <a:latin typeface="Calibri"/>
               </a:rPr>
-              <a:t>2.  The MATRIX</a:t>
+              <a:t>Scope</a:t>
             </a:r>
           </a:p>
         </p:txBody>
@@ -10621,8 +11682,8 @@
         </p:nvSpPr>
         <p:spPr>
           <a:xfrm>
-            <a:off x="4407408" y="2194560"/>
-            <a:ext cx="3200400" cy="3840480"/>
+            <a:off x="6373368" y="1847088"/>
+            <a:ext cx="5221224" cy="1655064"/>
           </a:xfrm>
           <a:prstGeom prst="rect">
             <a:avLst/>
@@ -10641,9 +11702,7 @@
                 </a:solidFill>
                 <a:latin typeface="Calibri"/>
               </a:rPr>
-              <a:t>What the supplier ticks.
-A big Excel / ODS spreadsheet. One row per requirement. The supplier marks OK, NOK (not OK) or NA (not applicable), plus a comment.
-This is their official yes / no.</a:t>
+              <a:t>Customer Technical Specifications (CTS), FNR conformity matrices (Excel / ODS) and supplier technical dossiers (PowerPoint, PDF, Word).</a:t>
             </a:r>
           </a:p>
         </p:txBody>
@@ -10656,8 +11715,8 @@
         </p:nvSpPr>
         <p:spPr>
           <a:xfrm>
-            <a:off x="8001000" y="1417320"/>
-            <a:ext cx="3611880" cy="4892040"/>
+            <a:off x="411480" y="3794760"/>
+            <a:ext cx="5532120" cy="2514600"/>
           </a:xfrm>
           <a:prstGeom prst="roundRect">
             <a:avLst>
@@ -10703,8 +11762,8 @@
         </p:nvSpPr>
         <p:spPr>
           <a:xfrm>
-            <a:off x="8001000" y="1417320"/>
-            <a:ext cx="3611880" cy="109728"/>
+            <a:off x="411480" y="3794760"/>
+            <a:ext cx="73152" cy="2514600"/>
           </a:xfrm>
           <a:prstGeom prst="rect">
             <a:avLst/>
@@ -10746,8 +11805,8 @@
         </p:nvSpPr>
         <p:spPr>
           <a:xfrm>
-            <a:off x="8202168" y="1664208"/>
-            <a:ext cx="3200400" cy="457200"/>
+            <a:off x="612648" y="3922776"/>
+            <a:ext cx="5221224" cy="347472"/>
           </a:xfrm>
           <a:prstGeom prst="rect">
             <a:avLst/>
@@ -10760,13 +11819,13 @@
           <a:p>
             <a:pPr algn="l"/>
             <a:r>
-              <a:rPr sz="2000" b="1">
+              <a:rPr sz="1600" b="1">
                 <a:solidFill>
                   <a:srgbClr val="0B2545"/>
                 </a:solidFill>
                 <a:latin typeface="Calibri"/>
               </a:rPr>
-              <a:t>3.  The TDR</a:t>
+              <a:t>Expected result</a:t>
             </a:r>
           </a:p>
         </p:txBody>
@@ -10779,8 +11838,8 @@
         </p:nvSpPr>
         <p:spPr>
           <a:xfrm>
-            <a:off x="8202168" y="2194560"/>
-            <a:ext cx="3200400" cy="3840480"/>
+            <a:off x="612648" y="4251960"/>
+            <a:ext cx="5221224" cy="1929384"/>
           </a:xfrm>
           <a:prstGeom prst="rect">
             <a:avLst/>
@@ -10799,16 +11858,171 @@
                 </a:solidFill>
                 <a:latin typeface="Calibri"/>
               </a:rPr>
-              <a:t>What the supplier shows as proof.
-TDR = Technical Design Review / technical dossier. Usually a PowerPoint or PDF: drawings, numbers, tests, architecture.
-This is their “here is how we actually do it”.</a:t>
-            </a:r>
-          </a:p>
-        </p:txBody>
-      </p:sp>
-      <p:sp>
-        <p:nvSpPr>
-          <p:cNvPr id="20" name="Rectangle 19"/>
+              <a:t>A first reading of the files: requirement status, inconsistencies, and the location of the supporting evidence.
+Export of a colour-coded Excel report for the review meeting.</a:t>
+            </a:r>
+          </a:p>
+        </p:txBody>
+      </p:sp>
+      <p:sp>
+        <p:nvSpPr>
+          <p:cNvPr id="20" name="Rounded Rectangle 19"/>
+          <p:cNvSpPr/>
+          <p:nvPr/>
+        </p:nvSpPr>
+        <p:spPr>
+          <a:xfrm>
+            <a:off x="6172200" y="3794760"/>
+            <a:ext cx="5532120" cy="2514600"/>
+          </a:xfrm>
+          <a:prstGeom prst="roundRect">
+            <a:avLst>
+              <a:gd name="adj" fmla="val 8000"/>
+            </a:avLst>
+          </a:prstGeom>
+          <a:solidFill>
+            <a:srgbClr val="FFFFFF"/>
+          </a:solidFill>
+          <a:ln w="12700">
+            <a:solidFill>
+              <a:srgbClr val="DDE3EC"/>
+            </a:solidFill>
+          </a:ln>
+        </p:spPr>
+        <p:style>
+          <a:lnRef idx="1">
+            <a:schemeClr val="accent1"/>
+          </a:lnRef>
+          <a:fillRef idx="3">
+            <a:schemeClr val="accent1"/>
+          </a:fillRef>
+          <a:effectRef idx="2">
+            <a:schemeClr val="accent1"/>
+          </a:effectRef>
+          <a:fontRef idx="minor">
+            <a:schemeClr val="lt1"/>
+          </a:fontRef>
+        </p:style>
+        <p:txBody>
+          <a:bodyPr rtlCol="0" anchor="ctr"/>
+          <a:lstStyle/>
+          <a:p>
+            <a:pPr algn="ctr"/>
+          </a:p>
+        </p:txBody>
+      </p:sp>
+      <p:sp>
+        <p:nvSpPr>
+          <p:cNvPr id="21" name="Rectangle 20"/>
+          <p:cNvSpPr/>
+          <p:nvPr/>
+        </p:nvSpPr>
+        <p:spPr>
+          <a:xfrm>
+            <a:off x="6172200" y="3794760"/>
+            <a:ext cx="73152" cy="2514600"/>
+          </a:xfrm>
+          <a:prstGeom prst="rect">
+            <a:avLst/>
+          </a:prstGeom>
+          <a:solidFill>
+            <a:srgbClr val="9A5B00"/>
+          </a:solidFill>
+          <a:ln>
+            <a:noFill/>
+          </a:ln>
+        </p:spPr>
+        <p:style>
+          <a:lnRef idx="1">
+            <a:schemeClr val="accent1"/>
+          </a:lnRef>
+          <a:fillRef idx="3">
+            <a:schemeClr val="accent1"/>
+          </a:fillRef>
+          <a:effectRef idx="2">
+            <a:schemeClr val="accent1"/>
+          </a:effectRef>
+          <a:fontRef idx="minor">
+            <a:schemeClr val="lt1"/>
+          </a:fontRef>
+        </p:style>
+        <p:txBody>
+          <a:bodyPr rtlCol="0" anchor="ctr"/>
+          <a:lstStyle/>
+          <a:p>
+            <a:pPr algn="ctr"/>
+          </a:p>
+        </p:txBody>
+      </p:sp>
+      <p:sp>
+        <p:nvSpPr>
+          <p:cNvPr id="22" name="TextBox 21"/>
+          <p:cNvSpPr txBox="1"/>
+          <p:nvPr/>
+        </p:nvSpPr>
+        <p:spPr>
+          <a:xfrm>
+            <a:off x="6373368" y="3922776"/>
+            <a:ext cx="5221224" cy="347472"/>
+          </a:xfrm>
+          <a:prstGeom prst="rect">
+            <a:avLst/>
+          </a:prstGeom>
+          <a:noFill/>
+        </p:spPr>
+        <p:txBody>
+          <a:bodyPr wrap="square" anchor="t"/>
+          <a:lstStyle/>
+          <a:p>
+            <a:pPr algn="l"/>
+            <a:r>
+              <a:rPr sz="1600" b="1">
+                <a:solidFill>
+                  <a:srgbClr val="0B2545"/>
+                </a:solidFill>
+                <a:latin typeface="Calibri"/>
+              </a:rPr>
+              <a:t>Limit of the tool</a:t>
+            </a:r>
+          </a:p>
+        </p:txBody>
+      </p:sp>
+      <p:sp>
+        <p:nvSpPr>
+          <p:cNvPr id="23" name="TextBox 22"/>
+          <p:cNvSpPr txBox="1"/>
+          <p:nvPr/>
+        </p:nvSpPr>
+        <p:spPr>
+          <a:xfrm>
+            <a:off x="6373368" y="4251960"/>
+            <a:ext cx="5221224" cy="1929384"/>
+          </a:xfrm>
+          <a:prstGeom prst="rect">
+            <a:avLst/>
+          </a:prstGeom>
+          <a:noFill/>
+        </p:spPr>
+        <p:txBody>
+          <a:bodyPr wrap="square" anchor="t"/>
+          <a:lstStyle/>
+          <a:p>
+            <a:pPr algn="l"/>
+            <a:r>
+              <a:rPr sz="1400" b="0">
+                <a:solidFill>
+                  <a:srgbClr val="1C2B3A"/>
+                </a:solidFill>
+                <a:latin typeface="Calibri"/>
+              </a:rPr>
+              <a:t>LEON prepares the review. It does not approve a supplier and does not replace Quality, Purchasing or the responsible engineer.</a:t>
+            </a:r>
+          </a:p>
+        </p:txBody>
+      </p:sp>
+      <p:sp>
+        <p:nvSpPr>
+          <p:cNvPr id="24" name="Rectangle 23"/>
           <p:cNvSpPr/>
           <p:nvPr/>
         </p:nvSpPr>
@@ -10851,7 +12065,7 @@
       </p:sp>
       <p:sp>
         <p:nvSpPr>
-          <p:cNvPr id="21" name="TextBox 20"/>
+          <p:cNvPr id="25" name="TextBox 24"/>
           <p:cNvSpPr txBox="1"/>
           <p:nvPr/>
         </p:nvSpPr>
@@ -10877,14 +12091,14 @@
                 </a:solidFill>
                 <a:latin typeface="Calibri"/>
               </a:rPr>
-              <a:t>Khadija Benhamida  ·  Mechatronics Engineering  ·  First meeting</a:t>
-            </a:r>
-          </a:p>
-        </p:txBody>
-      </p:sp>
-      <p:sp>
-        <p:nvSpPr>
-          <p:cNvPr id="22" name="TextBox 21"/>
+              <a:t>Khadija Benhamida  ·  Mechatronics Engineering  ·  Confidential</a:t>
+            </a:r>
+          </a:p>
+        </p:txBody>
+      </p:sp>
+      <p:sp>
+        <p:nvSpPr>
+          <p:cNvPr id="26" name="TextBox 25"/>
           <p:cNvSpPr txBox="1"/>
           <p:nvPr/>
         </p:nvSpPr>
@@ -10910,7 +12124,7 @@
                 </a:solidFill>
                 <a:latin typeface="Calibri"/>
               </a:rPr>
-              <a:t>3  /  13</a:t>
+              <a:t>3  /  14</a:t>
             </a:r>
           </a:p>
         </p:txBody>
@@ -11090,7 +12304,7 @@
                 </a:solidFill>
                 <a:latin typeface="Calibri"/>
               </a:rPr>
-              <a:t>WHY WE BUILT THIS</a:t>
+              <a:t>PROJECT CONTEXT</a:t>
             </a:r>
           </a:p>
         </p:txBody>
@@ -11123,7 +12337,7 @@
                 </a:solidFill>
                 <a:latin typeface="Calibri"/>
               </a:rPr>
-              <a:t>Today this is still a lot of reading by hand.</a:t>
+              <a:t>Three documents must remain consistent</a:t>
             </a:r>
           </a:p>
         </p:txBody>
@@ -11156,7 +12370,7 @@
                 </a:solidFill>
                 <a:latin typeface="Calibri"/>
               </a:rPr>
-              <a:t>A “green” Excel can hide a problem. A nice slide can hide a wrong number.</a:t>
+              <a:t>For each component, Stellantis requirements, the supplier declaration and the technical evidence.</a:t>
             </a:r>
           </a:p>
         </p:txBody>
@@ -11169,8 +12383,8 @@
         </p:nvSpPr>
         <p:spPr>
           <a:xfrm>
-            <a:off x="457200" y="1371600"/>
-            <a:ext cx="11247120" cy="1115568"/>
+            <a:off x="411480" y="1417320"/>
+            <a:ext cx="3611880" cy="4892040"/>
           </a:xfrm>
           <a:prstGeom prst="roundRect">
             <a:avLst>
@@ -11216,14 +12430,14 @@
         </p:nvSpPr>
         <p:spPr>
           <a:xfrm>
-            <a:off x="457200" y="1371600"/>
-            <a:ext cx="109728" cy="1115568"/>
+            <a:off x="411480" y="1417320"/>
+            <a:ext cx="3611880" cy="109728"/>
           </a:xfrm>
           <a:prstGeom prst="rect">
             <a:avLst/>
           </a:prstGeom>
           <a:solidFill>
-            <a:srgbClr val="B3261E"/>
+            <a:srgbClr val="1D4ED8"/>
           </a:solidFill>
           <a:ln>
             <a:noFill/>
@@ -11259,8 +12473,8 @@
         </p:nvSpPr>
         <p:spPr>
           <a:xfrm>
-            <a:off x="777240" y="1517904"/>
-            <a:ext cx="10698480" cy="329184"/>
+            <a:off x="612648" y="1664208"/>
+            <a:ext cx="3200400" cy="640080"/>
           </a:xfrm>
           <a:prstGeom prst="rect">
             <a:avLst/>
@@ -11273,13 +12487,13 @@
           <a:p>
             <a:pPr algn="l"/>
             <a:r>
-              <a:rPr sz="1800" b="1">
+              <a:rPr sz="1600" b="1">
                 <a:solidFill>
                   <a:srgbClr val="0B2545"/>
                 </a:solidFill>
                 <a:latin typeface="Calibri"/>
               </a:rPr>
-              <a:t>Slow</a:t>
+              <a:t>1.  Specification (CTS)</a:t>
             </a:r>
           </a:p>
         </p:txBody>
@@ -11292,8 +12506,8 @@
         </p:nvSpPr>
         <p:spPr>
           <a:xfrm>
-            <a:off x="777240" y="1847088"/>
-            <a:ext cx="10698480" cy="530352"/>
+            <a:off x="612648" y="2377440"/>
+            <a:ext cx="3200400" cy="3657600"/>
           </a:xfrm>
           <a:prstGeom prst="rect">
             <a:avLst/>
@@ -11306,13 +12520,15 @@
           <a:p>
             <a:pPr algn="l"/>
             <a:r>
-              <a:rPr sz="1500" b="0">
+              <a:rPr sz="1400" b="0">
                 <a:solidFill>
                   <a:srgbClr val="1C2B3A"/>
                 </a:solidFill>
                 <a:latin typeface="Calibri"/>
               </a:rPr>
-              <a:t>Hundreds of rows in Excel, dozens of slides, a long spec. A careful review takes a long time.</a:t>
+              <a:t>Document issued by Stellantis.
+It defines the requirements applicable to the component: performance, interfaces, environment, safety, quality.
+It is the contractual reference of what “compliant” means.</a:t>
             </a:r>
           </a:p>
         </p:txBody>
@@ -11325,8 +12541,8 @@
         </p:nvSpPr>
         <p:spPr>
           <a:xfrm>
-            <a:off x="457200" y="2606040"/>
-            <a:ext cx="11247120" cy="1115568"/>
+            <a:off x="4206240" y="1417320"/>
+            <a:ext cx="3611880" cy="4892040"/>
           </a:xfrm>
           <a:prstGeom prst="roundRect">
             <a:avLst>
@@ -11372,14 +12588,14 @@
         </p:nvSpPr>
         <p:spPr>
           <a:xfrm>
-            <a:off x="457200" y="2606040"/>
-            <a:ext cx="109728" cy="1115568"/>
+            <a:off x="4206240" y="1417320"/>
+            <a:ext cx="3611880" cy="109728"/>
           </a:xfrm>
           <a:prstGeom prst="rect">
             <a:avLst/>
           </a:prstGeom>
           <a:solidFill>
-            <a:srgbClr val="B3261E"/>
+            <a:srgbClr val="9A5B00"/>
           </a:solidFill>
           <a:ln>
             <a:noFill/>
@@ -11415,8 +12631,8 @@
         </p:nvSpPr>
         <p:spPr>
           <a:xfrm>
-            <a:off x="777240" y="2752344"/>
-            <a:ext cx="10698480" cy="329184"/>
+            <a:off x="4407408" y="1664208"/>
+            <a:ext cx="3200400" cy="640080"/>
           </a:xfrm>
           <a:prstGeom prst="rect">
             <a:avLst/>
@@ -11429,13 +12645,13 @@
           <a:p>
             <a:pPr algn="l"/>
             <a:r>
-              <a:rPr sz="1800" b="1">
+              <a:rPr sz="1600" b="1">
                 <a:solidFill>
                   <a:srgbClr val="0B2545"/>
                 </a:solidFill>
                 <a:latin typeface="Calibri"/>
               </a:rPr>
-              <a:t>Easy to miss</a:t>
+              <a:t>2.  Conformity matrix</a:t>
             </a:r>
           </a:p>
         </p:txBody>
@@ -11448,8 +12664,8 @@
         </p:nvSpPr>
         <p:spPr>
           <a:xfrm>
-            <a:off x="777240" y="3081528"/>
-            <a:ext cx="10698480" cy="530352"/>
+            <a:off x="4407408" y="2377440"/>
+            <a:ext cx="3200400" cy="3657600"/>
           </a:xfrm>
           <a:prstGeom prst="rect">
             <a:avLst/>
@@ -11462,13 +12678,15 @@
           <a:p>
             <a:pPr algn="l"/>
             <a:r>
-              <a:rPr sz="1500" b="0">
+              <a:rPr sz="1400" b="0">
                 <a:solidFill>
                   <a:srgbClr val="1C2B3A"/>
                 </a:solidFill>
                 <a:latin typeface="Calibri"/>
               </a:rPr>
-              <a:t>A row marked OK with the comment “pending validation” is not really OK. Humans skip comments when they are tired.</a:t>
+              <a:t>Document completed by the supplier.
+One row per requirement. Status OK, NOK (not compliant) or NA (not applicable), with a comment.
+It is the official supplier declaration.</a:t>
             </a:r>
           </a:p>
         </p:txBody>
@@ -11481,8 +12699,8 @@
         </p:nvSpPr>
         <p:spPr>
           <a:xfrm>
-            <a:off x="457200" y="3840480"/>
-            <a:ext cx="11247120" cy="1115568"/>
+            <a:off x="8001000" y="1417320"/>
+            <a:ext cx="3611880" cy="4892040"/>
           </a:xfrm>
           <a:prstGeom prst="roundRect">
             <a:avLst>
@@ -11528,14 +12746,14 @@
         </p:nvSpPr>
         <p:spPr>
           <a:xfrm>
-            <a:off x="457200" y="3840480"/>
-            <a:ext cx="109728" cy="1115568"/>
+            <a:off x="8001000" y="1417320"/>
+            <a:ext cx="3611880" cy="109728"/>
           </a:xfrm>
           <a:prstGeom prst="rect">
             <a:avLst/>
           </a:prstGeom>
           <a:solidFill>
-            <a:srgbClr val="B3261E"/>
+            <a:srgbClr val="157347"/>
           </a:solidFill>
           <a:ln>
             <a:noFill/>
@@ -11571,8 +12789,8 @@
         </p:nvSpPr>
         <p:spPr>
           <a:xfrm>
-            <a:off x="777240" y="3986784"/>
-            <a:ext cx="10698480" cy="329184"/>
+            <a:off x="8202168" y="1664208"/>
+            <a:ext cx="3200400" cy="640080"/>
           </a:xfrm>
           <a:prstGeom prst="rect">
             <a:avLst/>
@@ -11585,13 +12803,13 @@
           <a:p>
             <a:pPr algn="l"/>
             <a:r>
-              <a:rPr sz="1800" b="1">
+              <a:rPr sz="1600" b="1">
                 <a:solidFill>
                   <a:srgbClr val="0B2545"/>
                 </a:solidFill>
                 <a:latin typeface="Calibri"/>
               </a:rPr>
-              <a:t>Easy to contradict</a:t>
+              <a:t>3.  TDR</a:t>
             </a:r>
           </a:p>
         </p:txBody>
@@ -11604,8 +12822,8 @@
         </p:nvSpPr>
         <p:spPr>
           <a:xfrm>
-            <a:off x="777240" y="4315968"/>
-            <a:ext cx="10698480" cy="530352"/>
+            <a:off x="8202168" y="2377440"/>
+            <a:ext cx="3200400" cy="3657600"/>
           </a:xfrm>
           <a:prstGeom prst="rect">
             <a:avLst/>
@@ -11618,176 +12836,22 @@
           <a:p>
             <a:pPr algn="l"/>
             <a:r>
-              <a:rPr sz="1500" b="0">
+              <a:rPr sz="1400" b="0">
                 <a:solidFill>
                   <a:srgbClr val="1C2B3A"/>
                 </a:solidFill>
                 <a:latin typeface="Calibri"/>
               </a:rPr>
-              <a:t>The matrix says contrast ≥ 400:1 is OK. The TDR slide shows 380:1. Those two files were never put side by side.</a:t>
-            </a:r>
-          </a:p>
-        </p:txBody>
-      </p:sp>
-      <p:sp>
-        <p:nvSpPr>
-          <p:cNvPr id="20" name="Rounded Rectangle 19"/>
-          <p:cNvSpPr/>
-          <p:nvPr/>
-        </p:nvSpPr>
-        <p:spPr>
-          <a:xfrm>
-            <a:off x="457200" y="5074920"/>
-            <a:ext cx="11247120" cy="1115568"/>
-          </a:xfrm>
-          <a:prstGeom prst="roundRect">
-            <a:avLst>
-              <a:gd name="adj" fmla="val 8000"/>
-            </a:avLst>
-          </a:prstGeom>
-          <a:solidFill>
-            <a:srgbClr val="FFFFFF"/>
-          </a:solidFill>
-          <a:ln w="12700">
-            <a:solidFill>
-              <a:srgbClr val="DDE3EC"/>
-            </a:solidFill>
-          </a:ln>
-        </p:spPr>
-        <p:style>
-          <a:lnRef idx="1">
-            <a:schemeClr val="accent1"/>
-          </a:lnRef>
-          <a:fillRef idx="3">
-            <a:schemeClr val="accent1"/>
-          </a:fillRef>
-          <a:effectRef idx="2">
-            <a:schemeClr val="accent1"/>
-          </a:effectRef>
-          <a:fontRef idx="minor">
-            <a:schemeClr val="lt1"/>
-          </a:fontRef>
-        </p:style>
-        <p:txBody>
-          <a:bodyPr rtlCol="0" anchor="ctr"/>
-          <a:lstStyle/>
-          <a:p>
-            <a:pPr algn="ctr"/>
-          </a:p>
-        </p:txBody>
-      </p:sp>
-      <p:sp>
-        <p:nvSpPr>
-          <p:cNvPr id="21" name="Rectangle 20"/>
-          <p:cNvSpPr/>
-          <p:nvPr/>
-        </p:nvSpPr>
-        <p:spPr>
-          <a:xfrm>
-            <a:off x="457200" y="5074920"/>
-            <a:ext cx="109728" cy="1115568"/>
-          </a:xfrm>
-          <a:prstGeom prst="rect">
-            <a:avLst/>
-          </a:prstGeom>
-          <a:solidFill>
-            <a:srgbClr val="B3261E"/>
-          </a:solidFill>
-          <a:ln>
-            <a:noFill/>
-          </a:ln>
-        </p:spPr>
-        <p:style>
-          <a:lnRef idx="1">
-            <a:schemeClr val="accent1"/>
-          </a:lnRef>
-          <a:fillRef idx="3">
-            <a:schemeClr val="accent1"/>
-          </a:fillRef>
-          <a:effectRef idx="2">
-            <a:schemeClr val="accent1"/>
-          </a:effectRef>
-          <a:fontRef idx="minor">
-            <a:schemeClr val="lt1"/>
-          </a:fontRef>
-        </p:style>
-        <p:txBody>
-          <a:bodyPr rtlCol="0" anchor="ctr"/>
-          <a:lstStyle/>
-          <a:p>
-            <a:pPr algn="ctr"/>
-          </a:p>
-        </p:txBody>
-      </p:sp>
-      <p:sp>
-        <p:nvSpPr>
-          <p:cNvPr id="22" name="TextBox 21"/>
-          <p:cNvSpPr txBox="1"/>
-          <p:nvPr/>
-        </p:nvSpPr>
-        <p:spPr>
-          <a:xfrm>
-            <a:off x="777240" y="5221224"/>
-            <a:ext cx="10698480" cy="329184"/>
-          </a:xfrm>
-          <a:prstGeom prst="rect">
-            <a:avLst/>
-          </a:prstGeom>
-          <a:noFill/>
-        </p:spPr>
-        <p:txBody>
-          <a:bodyPr wrap="square" anchor="t"/>
-          <a:lstStyle/>
-          <a:p>
-            <a:pPr algn="l"/>
-            <a:r>
-              <a:rPr sz="1800" b="1">
-                <a:solidFill>
-                  <a:srgbClr val="0B2545"/>
-                </a:solidFill>
-                <a:latin typeface="Calibri"/>
-              </a:rPr>
-              <a:t>Hard to compare suppliers</a:t>
-            </a:r>
-          </a:p>
-        </p:txBody>
-      </p:sp>
-      <p:sp>
-        <p:nvSpPr>
-          <p:cNvPr id="23" name="TextBox 22"/>
-          <p:cNvSpPr txBox="1"/>
-          <p:nvPr/>
-        </p:nvSpPr>
-        <p:spPr>
-          <a:xfrm>
-            <a:off x="777240" y="5550408"/>
-            <a:ext cx="10698480" cy="530352"/>
-          </a:xfrm>
-          <a:prstGeom prst="rect">
-            <a:avLst/>
-          </a:prstGeom>
-          <a:noFill/>
-        </p:spPr>
-        <p:txBody>
-          <a:bodyPr wrap="square" anchor="t"/>
-          <a:lstStyle/>
-          <a:p>
-            <a:pPr algn="l"/>
-            <a:r>
-              <a:rPr sz="1500" b="0">
-                <a:solidFill>
-                  <a:srgbClr val="1C2B3A"/>
-                </a:solidFill>
-                <a:latin typeface="Calibri"/>
-              </a:rPr>
-              <a:t>Each supplier sends their own PowerPoint. Comparing three offers on the same technical points is a weekend of work.</a:t>
-            </a:r>
-          </a:p>
-        </p:txBody>
-      </p:sp>
-      <p:sp>
-        <p:nvSpPr>
-          <p:cNvPr id="24" name="Rectangle 23"/>
+              <a:t>Technical Design Review / technical dossier.
+PowerPoint or PDF presenting architecture, values, tests and design choices.
+It is the supporting evidence behind the declaration.</a:t>
+            </a:r>
+          </a:p>
+        </p:txBody>
+      </p:sp>
+      <p:sp>
+        <p:nvSpPr>
+          <p:cNvPr id="20" name="Rectangle 19"/>
           <p:cNvSpPr/>
           <p:nvPr/>
         </p:nvSpPr>
@@ -11830,7 +12894,7 @@
       </p:sp>
       <p:sp>
         <p:nvSpPr>
-          <p:cNvPr id="25" name="TextBox 24"/>
+          <p:cNvPr id="21" name="TextBox 20"/>
           <p:cNvSpPr txBox="1"/>
           <p:nvPr/>
         </p:nvSpPr>
@@ -11856,14 +12920,14 @@
                 </a:solidFill>
                 <a:latin typeface="Calibri"/>
               </a:rPr>
-              <a:t>Khadija Benhamida  ·  Mechatronics Engineering  ·  First meeting</a:t>
-            </a:r>
-          </a:p>
-        </p:txBody>
-      </p:sp>
-      <p:sp>
-        <p:nvSpPr>
-          <p:cNvPr id="26" name="TextBox 25"/>
+              <a:t>Khadija Benhamida  ·  Mechatronics Engineering  ·  Confidential</a:t>
+            </a:r>
+          </a:p>
+        </p:txBody>
+      </p:sp>
+      <p:sp>
+        <p:nvSpPr>
+          <p:cNvPr id="22" name="TextBox 21"/>
           <p:cNvSpPr txBox="1"/>
           <p:nvPr/>
         </p:nvSpPr>
@@ -11889,7 +12953,7 @@
                 </a:solidFill>
                 <a:latin typeface="Calibri"/>
               </a:rPr>
-              <a:t>4  /  13</a:t>
+              <a:t>4  /  14</a:t>
             </a:r>
           </a:p>
         </p:txBody>
@@ -12069,7 +13133,7 @@
                 </a:solidFill>
                 <a:latin typeface="Calibri"/>
               </a:rPr>
-              <a:t>IN ONE SENTENCE</a:t>
+              <a:t>WHY THE PROJECT EXISTS</a:t>
             </a:r>
           </a:p>
         </p:txBody>
@@ -12102,7 +13166,7 @@
                 </a:solidFill>
                 <a:latin typeface="Calibri"/>
               </a:rPr>
-              <a:t>LEON is a web page that does a first reading of the files.</a:t>
+              <a:t>The current review remains largely manual</a:t>
             </a:r>
           </a:p>
         </p:txBody>
@@ -12135,7 +13199,7 @@
                 </a:solidFill>
                 <a:latin typeface="Calibri"/>
               </a:rPr>
-              <a:t>You drop the documents in a browser. You get highlights, then you decide.</a:t>
+              <a:t>An OK status in Excel, or a complete TDR presentation, can still hide an inconsistency.</a:t>
             </a:r>
           </a:p>
         </p:txBody>
@@ -12148,8 +13212,8 @@
         </p:nvSpPr>
         <p:spPr>
           <a:xfrm>
-            <a:off x="411480" y="1417320"/>
-            <a:ext cx="5532120" cy="4892040"/>
+            <a:off x="457200" y="1371600"/>
+            <a:ext cx="11247120" cy="1115568"/>
           </a:xfrm>
           <a:prstGeom prst="roundRect">
             <a:avLst>
@@ -12195,14 +13259,14 @@
         </p:nvSpPr>
         <p:spPr>
           <a:xfrm>
-            <a:off x="411480" y="1417320"/>
-            <a:ext cx="73152" cy="4892040"/>
+            <a:off x="457200" y="1371600"/>
+            <a:ext cx="109728" cy="1115568"/>
           </a:xfrm>
           <a:prstGeom prst="rect">
             <a:avLst/>
           </a:prstGeom>
           <a:solidFill>
-            <a:srgbClr val="1D4ED8"/>
+            <a:srgbClr val="B3261E"/>
           </a:solidFill>
           <a:ln>
             <a:noFill/>
@@ -12238,8 +13302,8 @@
         </p:nvSpPr>
         <p:spPr>
           <a:xfrm>
-            <a:off x="612648" y="1545336"/>
-            <a:ext cx="5221224" cy="347472"/>
+            <a:off x="777240" y="1517904"/>
+            <a:ext cx="10698480" cy="329184"/>
           </a:xfrm>
           <a:prstGeom prst="rect">
             <a:avLst/>
@@ -12258,7 +13322,7 @@
                 </a:solidFill>
                 <a:latin typeface="Calibri"/>
               </a:rPr>
-              <a:t>What it does</a:t>
+              <a:t>Review time</a:t>
             </a:r>
           </a:p>
         </p:txBody>
@@ -12271,8 +13335,8 @@
         </p:nvSpPr>
         <p:spPr>
           <a:xfrm>
-            <a:off x="612648" y="1874520"/>
-            <a:ext cx="5221224" cy="4306824"/>
+            <a:off x="777240" y="1847088"/>
+            <a:ext cx="10698480" cy="530352"/>
           </a:xfrm>
           <a:prstGeom prst="rect">
             <a:avLst/>
@@ -12285,17 +13349,13 @@
           <a:p>
             <a:pPr algn="l"/>
             <a:r>
-              <a:rPr sz="1500" b="0">
+              <a:rPr sz="1400" b="0">
                 <a:solidFill>
                   <a:srgbClr val="1C2B3A"/>
                 </a:solidFill>
                 <a:latin typeface="Calibri"/>
               </a:rPr>
-              <a:t>Opens the spec, the matrix and the TDR for you.
-Finds every requirement, every OK / NOK / NA, and the matching page or slide.
-Puts in red the things that do not match — wrong number, empty proof, OK tick with a worrying comment.
-Gives you an Excel you can share in the review meeting.
-You still sign. LEON only prepares the file.</a:t>
+              <a:t>A specification, a matrix of several hundred rows and a TDR of several dozen slides are reviewed mainly by hand.</a:t>
             </a:r>
           </a:p>
         </p:txBody>
@@ -12308,8 +13368,8 @@
         </p:nvSpPr>
         <p:spPr>
           <a:xfrm>
-            <a:off x="6172200" y="1417320"/>
-            <a:ext cx="5532120" cy="2286000"/>
+            <a:off x="457200" y="2606040"/>
+            <a:ext cx="11247120" cy="1115568"/>
           </a:xfrm>
           <a:prstGeom prst="roundRect">
             <a:avLst>
@@ -12355,8 +13415,8 @@
         </p:nvSpPr>
         <p:spPr>
           <a:xfrm>
-            <a:off x="6172200" y="1417320"/>
-            <a:ext cx="73152" cy="2286000"/>
+            <a:off x="457200" y="2606040"/>
+            <a:ext cx="109728" cy="1115568"/>
           </a:xfrm>
           <a:prstGeom prst="rect">
             <a:avLst/>
@@ -12398,8 +13458,8 @@
         </p:nvSpPr>
         <p:spPr>
           <a:xfrm>
-            <a:off x="6373368" y="1545336"/>
-            <a:ext cx="5221224" cy="347472"/>
+            <a:off x="777240" y="2752344"/>
+            <a:ext cx="10698480" cy="329184"/>
           </a:xfrm>
           <a:prstGeom prst="rect">
             <a:avLst/>
@@ -12418,7 +13478,7 @@
                 </a:solidFill>
                 <a:latin typeface="Calibri"/>
               </a:rPr>
-              <a:t>What it is not</a:t>
+              <a:t>Incomplete declarations</a:t>
             </a:r>
           </a:p>
         </p:txBody>
@@ -12431,8 +13491,8 @@
         </p:nvSpPr>
         <p:spPr>
           <a:xfrm>
-            <a:off x="6373368" y="1874520"/>
-            <a:ext cx="5221224" cy="1700784"/>
+            <a:off x="777240" y="3081528"/>
+            <a:ext cx="10698480" cy="530352"/>
           </a:xfrm>
           <a:prstGeom prst="rect">
             <a:avLst/>
@@ -12445,15 +13505,13 @@
           <a:p>
             <a:pPr algn="l"/>
             <a:r>
-              <a:rPr sz="1500" b="0">
+              <a:rPr sz="1400" b="0">
                 <a:solidFill>
                   <a:srgbClr val="1C2B3A"/>
                 </a:solidFill>
                 <a:latin typeface="Calibri"/>
               </a:rPr>
-              <a:t>Not a robot that approves a supplier.
-Not a black box that “says yes”.
-Not a replacement for the engineer, quality or purchasing.</a:t>
+              <a:t>A requirement marked OK with a comment such as “pending validation” or “partially covered” is not a confirmed conformity.</a:t>
             </a:r>
           </a:p>
         </p:txBody>
@@ -12466,8 +13524,8 @@
         </p:nvSpPr>
         <p:spPr>
           <a:xfrm>
-            <a:off x="6172200" y="3886200"/>
-            <a:ext cx="5532120" cy="2423160"/>
+            <a:off x="457200" y="3840480"/>
+            <a:ext cx="11247120" cy="1115568"/>
           </a:xfrm>
           <a:prstGeom prst="roundRect">
             <a:avLst>
@@ -12513,14 +13571,14 @@
         </p:nvSpPr>
         <p:spPr>
           <a:xfrm>
-            <a:off x="6172200" y="3886200"/>
-            <a:ext cx="73152" cy="2423160"/>
+            <a:off x="457200" y="3840480"/>
+            <a:ext cx="109728" cy="1115568"/>
           </a:xfrm>
           <a:prstGeom prst="rect">
             <a:avLst/>
           </a:prstGeom>
           <a:solidFill>
-            <a:srgbClr val="157347"/>
+            <a:srgbClr val="B3261E"/>
           </a:solidFill>
           <a:ln>
             <a:noFill/>
@@ -12556,8 +13614,8 @@
         </p:nvSpPr>
         <p:spPr>
           <a:xfrm>
-            <a:off x="6373368" y="4014216"/>
-            <a:ext cx="5221224" cy="347472"/>
+            <a:off x="777240" y="3986784"/>
+            <a:ext cx="10698480" cy="329184"/>
           </a:xfrm>
           <a:prstGeom prst="rect">
             <a:avLst/>
@@ -12576,7 +13634,7 @@
                 </a:solidFill>
                 <a:latin typeface="Calibri"/>
               </a:rPr>
-              <a:t>Who it is for</a:t>
+              <a:t>Inconsistency between files</a:t>
             </a:r>
           </a:p>
         </p:txBody>
@@ -12589,8 +13647,8 @@
         </p:nvSpPr>
         <p:spPr>
           <a:xfrm>
-            <a:off x="6373368" y="4343400"/>
-            <a:ext cx="5221224" cy="1837944"/>
+            <a:off x="777240" y="4315968"/>
+            <a:ext cx="10698480" cy="530352"/>
           </a:xfrm>
           <a:prstGeom prst="rect">
             <a:avLst/>
@@ -12603,22 +13661,176 @@
           <a:p>
             <a:pPr algn="l"/>
             <a:r>
-              <a:rPr sz="1500" b="0">
+              <a:rPr sz="1400" b="0">
                 <a:solidFill>
                   <a:srgbClr val="1C2B3A"/>
                 </a:solidFill>
                 <a:latin typeface="Calibri"/>
               </a:rPr>
-              <a:t>Mechatronics engineers reviewing a part.
-Quality / FNR looking at a conformity matrix.
-Anyone who must walk into a TDR meeting prepared.</a:t>
-            </a:r>
-          </a:p>
-        </p:txBody>
-      </p:sp>
-      <p:sp>
-        <p:nvSpPr>
-          <p:cNvPr id="20" name="Rectangle 19"/>
+              <a:t>The matrix may declare OK while the TDR presents a value below the requirement (for example contrast ≥ 400:1 in the specification, 380:1 in the TDR).</a:t>
+            </a:r>
+          </a:p>
+        </p:txBody>
+      </p:sp>
+      <p:sp>
+        <p:nvSpPr>
+          <p:cNvPr id="20" name="Rounded Rectangle 19"/>
+          <p:cNvSpPr/>
+          <p:nvPr/>
+        </p:nvSpPr>
+        <p:spPr>
+          <a:xfrm>
+            <a:off x="457200" y="5074920"/>
+            <a:ext cx="11247120" cy="1115568"/>
+          </a:xfrm>
+          <a:prstGeom prst="roundRect">
+            <a:avLst>
+              <a:gd name="adj" fmla="val 8000"/>
+            </a:avLst>
+          </a:prstGeom>
+          <a:solidFill>
+            <a:srgbClr val="FFFFFF"/>
+          </a:solidFill>
+          <a:ln w="12700">
+            <a:solidFill>
+              <a:srgbClr val="DDE3EC"/>
+            </a:solidFill>
+          </a:ln>
+        </p:spPr>
+        <p:style>
+          <a:lnRef idx="1">
+            <a:schemeClr val="accent1"/>
+          </a:lnRef>
+          <a:fillRef idx="3">
+            <a:schemeClr val="accent1"/>
+          </a:fillRef>
+          <a:effectRef idx="2">
+            <a:schemeClr val="accent1"/>
+          </a:effectRef>
+          <a:fontRef idx="minor">
+            <a:schemeClr val="lt1"/>
+          </a:fontRef>
+        </p:style>
+        <p:txBody>
+          <a:bodyPr rtlCol="0" anchor="ctr"/>
+          <a:lstStyle/>
+          <a:p>
+            <a:pPr algn="ctr"/>
+          </a:p>
+        </p:txBody>
+      </p:sp>
+      <p:sp>
+        <p:nvSpPr>
+          <p:cNvPr id="21" name="Rectangle 20"/>
+          <p:cNvSpPr/>
+          <p:nvPr/>
+        </p:nvSpPr>
+        <p:spPr>
+          <a:xfrm>
+            <a:off x="457200" y="5074920"/>
+            <a:ext cx="109728" cy="1115568"/>
+          </a:xfrm>
+          <a:prstGeom prst="rect">
+            <a:avLst/>
+          </a:prstGeom>
+          <a:solidFill>
+            <a:srgbClr val="B3261E"/>
+          </a:solidFill>
+          <a:ln>
+            <a:noFill/>
+          </a:ln>
+        </p:spPr>
+        <p:style>
+          <a:lnRef idx="1">
+            <a:schemeClr val="accent1"/>
+          </a:lnRef>
+          <a:fillRef idx="3">
+            <a:schemeClr val="accent1"/>
+          </a:fillRef>
+          <a:effectRef idx="2">
+            <a:schemeClr val="accent1"/>
+          </a:effectRef>
+          <a:fontRef idx="minor">
+            <a:schemeClr val="lt1"/>
+          </a:fontRef>
+        </p:style>
+        <p:txBody>
+          <a:bodyPr rtlCol="0" anchor="ctr"/>
+          <a:lstStyle/>
+          <a:p>
+            <a:pPr algn="ctr"/>
+          </a:p>
+        </p:txBody>
+      </p:sp>
+      <p:sp>
+        <p:nvSpPr>
+          <p:cNvPr id="22" name="TextBox 21"/>
+          <p:cNvSpPr txBox="1"/>
+          <p:nvPr/>
+        </p:nvSpPr>
+        <p:spPr>
+          <a:xfrm>
+            <a:off x="777240" y="5221224"/>
+            <a:ext cx="10698480" cy="329184"/>
+          </a:xfrm>
+          <a:prstGeom prst="rect">
+            <a:avLst/>
+          </a:prstGeom>
+          <a:noFill/>
+        </p:spPr>
+        <p:txBody>
+          <a:bodyPr wrap="square" anchor="t"/>
+          <a:lstStyle/>
+          <a:p>
+            <a:pPr algn="l"/>
+            <a:r>
+              <a:rPr sz="1800" b="1">
+                <a:solidFill>
+                  <a:srgbClr val="0B2545"/>
+                </a:solidFill>
+                <a:latin typeface="Calibri"/>
+              </a:rPr>
+              <a:t>Comparison of suppliers</a:t>
+            </a:r>
+          </a:p>
+        </p:txBody>
+      </p:sp>
+      <p:sp>
+        <p:nvSpPr>
+          <p:cNvPr id="23" name="TextBox 22"/>
+          <p:cNvSpPr txBox="1"/>
+          <p:nvPr/>
+        </p:nvSpPr>
+        <p:spPr>
+          <a:xfrm>
+            <a:off x="777240" y="5550408"/>
+            <a:ext cx="10698480" cy="530352"/>
+          </a:xfrm>
+          <a:prstGeom prst="rect">
+            <a:avLst/>
+          </a:prstGeom>
+          <a:noFill/>
+        </p:spPr>
+        <p:txBody>
+          <a:bodyPr wrap="square" anchor="t"/>
+          <a:lstStyle/>
+          <a:p>
+            <a:pPr algn="l"/>
+            <a:r>
+              <a:rPr sz="1400" b="0">
+                <a:solidFill>
+                  <a:srgbClr val="1C2B3A"/>
+                </a:solidFill>
+                <a:latin typeface="Calibri"/>
+              </a:rPr>
+              <a:t>Each supplier delivers a different dossier. A structured technical comparison on the same criteria is currently time-consuming.</a:t>
+            </a:r>
+          </a:p>
+        </p:txBody>
+      </p:sp>
+      <p:sp>
+        <p:nvSpPr>
+          <p:cNvPr id="24" name="Rectangle 23"/>
           <p:cNvSpPr/>
           <p:nvPr/>
         </p:nvSpPr>
@@ -12661,7 +13873,7 @@
       </p:sp>
       <p:sp>
         <p:nvSpPr>
-          <p:cNvPr id="21" name="TextBox 20"/>
+          <p:cNvPr id="25" name="TextBox 24"/>
           <p:cNvSpPr txBox="1"/>
           <p:nvPr/>
         </p:nvSpPr>
@@ -12687,14 +13899,14 @@
                 </a:solidFill>
                 <a:latin typeface="Calibri"/>
               </a:rPr>
-              <a:t>Khadija Benhamida  ·  Mechatronics Engineering  ·  First meeting</a:t>
-            </a:r>
-          </a:p>
-        </p:txBody>
-      </p:sp>
-      <p:sp>
-        <p:nvSpPr>
-          <p:cNvPr id="22" name="TextBox 21"/>
+              <a:t>Khadija Benhamida  ·  Mechatronics Engineering  ·  Confidential</a:t>
+            </a:r>
+          </a:p>
+        </p:txBody>
+      </p:sp>
+      <p:sp>
+        <p:nvSpPr>
+          <p:cNvPr id="26" name="TextBox 25"/>
           <p:cNvSpPr txBox="1"/>
           <p:nvPr/>
         </p:nvSpPr>
@@ -12720,7 +13932,7 @@
                 </a:solidFill>
                 <a:latin typeface="Calibri"/>
               </a:rPr>
-              <a:t>5  /  13</a:t>
+              <a:t>5  /  14</a:t>
             </a:r>
           </a:p>
         </p:txBody>
@@ -12900,7 +14112,7 @@
                 </a:solidFill>
                 <a:latin typeface="Calibri"/>
               </a:rPr>
-              <a:t>THE SCREEN YOU OPEN</a:t>
+              <a:t>THE APPLICATION</a:t>
             </a:r>
           </a:p>
         </p:txBody>
@@ -12933,7 +14145,7 @@
                 </a:solidFill>
                 <a:latin typeface="Calibri"/>
               </a:rPr>
-              <a:t>Six tabs — six jobs. You only use the ones you need.</a:t>
+              <a:t>What LEON does</a:t>
             </a:r>
           </a:p>
         </p:txBody>
@@ -12966,7 +14178,7 @@
                 </a:solidFill>
                 <a:latin typeface="Calibri"/>
               </a:rPr>
-              <a:t>Same tool, same browser. No installation for the person reviewing.</a:t>
+              <a:t>A browser-based application. Documents are uploaded; the first analysis is displayed; the engineer decides.</a:t>
             </a:r>
           </a:p>
         </p:txBody>
@@ -12979,8 +14191,8 @@
         </p:nvSpPr>
         <p:spPr>
           <a:xfrm>
-            <a:off x="411480" y="1389888"/>
-            <a:ext cx="3566160" cy="2194560"/>
+            <a:off x="411480" y="1417320"/>
+            <a:ext cx="5532120" cy="4892040"/>
           </a:xfrm>
           <a:prstGeom prst="roundRect">
             <a:avLst>
@@ -13026,8 +14238,8 @@
         </p:nvSpPr>
         <p:spPr>
           <a:xfrm>
-            <a:off x="411480" y="1389888"/>
-            <a:ext cx="3566160" cy="91440"/>
+            <a:off x="411480" y="1417320"/>
+            <a:ext cx="73152" cy="4892040"/>
           </a:xfrm>
           <a:prstGeom prst="rect">
             <a:avLst/>
@@ -13069,8 +14281,8 @@
         </p:nvSpPr>
         <p:spPr>
           <a:xfrm>
-            <a:off x="612648" y="1645920"/>
-            <a:ext cx="3163824" cy="777240"/>
+            <a:off x="612648" y="1545336"/>
+            <a:ext cx="5221224" cy="347472"/>
           </a:xfrm>
           <a:prstGeom prst="rect">
             <a:avLst/>
@@ -13083,13 +14295,13 @@
           <a:p>
             <a:pPr algn="l"/>
             <a:r>
-              <a:rPr sz="1600" b="1">
+              <a:rPr sz="1800" b="1">
                 <a:solidFill>
                   <a:srgbClr val="0B2545"/>
                 </a:solidFill>
                 <a:latin typeface="Calibri"/>
               </a:rPr>
-              <a:t>📄  Spec Validation</a:t>
+              <a:t>Functions</a:t>
             </a:r>
           </a:p>
         </p:txBody>
@@ -13102,8 +14314,8 @@
         </p:nvSpPr>
         <p:spPr>
           <a:xfrm>
-            <a:off x="612648" y="2441448"/>
-            <a:ext cx="3163824" cy="960120"/>
+            <a:off x="612648" y="1874520"/>
+            <a:ext cx="5221224" cy="4306824"/>
           </a:xfrm>
           <a:prstGeom prst="rect">
             <a:avLst/>
@@ -13122,7 +14334,12 @@
                 </a:solidFill>
                 <a:latin typeface="Calibri"/>
               </a:rPr>
-              <a:t>Is our spec complete and clear before we send it?</a:t>
+              <a:t>Reads the specification, the conformity matrix and the TDR.
+Identifies each requirement and its status (OK / NOK / NA).
+Locates the corresponding evidence in the TDR (page or slide).
+Highlights inconsistencies: contradictory comments, missing evidence, values that do not meet the requirement.
+Produces an Excel report for the review meeting.
+The technical validation remains a human decision.</a:t>
             </a:r>
           </a:p>
         </p:txBody>
@@ -13135,8 +14352,8 @@
         </p:nvSpPr>
         <p:spPr>
           <a:xfrm>
-            <a:off x="4160520" y="1389888"/>
-            <a:ext cx="3566160" cy="2194560"/>
+            <a:off x="6172200" y="1417320"/>
+            <a:ext cx="5532120" cy="2286000"/>
           </a:xfrm>
           <a:prstGeom prst="roundRect">
             <a:avLst>
@@ -13182,14 +14399,14 @@
         </p:nvSpPr>
         <p:spPr>
           <a:xfrm>
-            <a:off x="4160520" y="1389888"/>
-            <a:ext cx="3566160" cy="91440"/>
+            <a:off x="6172200" y="1417320"/>
+            <a:ext cx="73152" cy="2286000"/>
           </a:xfrm>
           <a:prstGeom prst="rect">
             <a:avLst/>
           </a:prstGeom>
           <a:solidFill>
-            <a:srgbClr val="9A5B00"/>
+            <a:srgbClr val="B3261E"/>
           </a:solidFill>
           <a:ln>
             <a:noFill/>
@@ -13225,8 +14442,8 @@
         </p:nvSpPr>
         <p:spPr>
           <a:xfrm>
-            <a:off x="4361688" y="1645920"/>
-            <a:ext cx="3163824" cy="777240"/>
+            <a:off x="6373368" y="1545336"/>
+            <a:ext cx="5221224" cy="347472"/>
           </a:xfrm>
           <a:prstGeom prst="rect">
             <a:avLst/>
@@ -13239,13 +14456,13 @@
           <a:p>
             <a:pPr algn="l"/>
             <a:r>
-              <a:rPr sz="1600" b="1">
+              <a:rPr sz="1800" b="1">
                 <a:solidFill>
                   <a:srgbClr val="0B2545"/>
                 </a:solidFill>
                 <a:latin typeface="Calibri"/>
               </a:rPr>
-              <a:t>📊  Conformity Matrix</a:t>
+              <a:t>Out of scope</a:t>
             </a:r>
           </a:p>
         </p:txBody>
@@ -13258,8 +14475,8 @@
         </p:nvSpPr>
         <p:spPr>
           <a:xfrm>
-            <a:off x="4361688" y="2441448"/>
-            <a:ext cx="3163824" cy="960120"/>
+            <a:off x="6373368" y="1874520"/>
+            <a:ext cx="5221224" cy="1700784"/>
           </a:xfrm>
           <a:prstGeom prst="rect">
             <a:avLst/>
@@ -13278,7 +14495,9 @@
                 </a:solidFill>
                 <a:latin typeface="Calibri"/>
               </a:rPr>
-              <a:t>Read the supplier Excel: OK / NOK / NA and catch fake OK.</a:t>
+              <a:t>Automatic approval of a supplier.
+Replacement of Quality, Purchasing or the responsible engineer.
+A certificate of conformity.</a:t>
             </a:r>
           </a:p>
         </p:txBody>
@@ -13291,8 +14510,8 @@
         </p:nvSpPr>
         <p:spPr>
           <a:xfrm>
-            <a:off x="7909560" y="1389888"/>
-            <a:ext cx="3566160" cy="2194560"/>
+            <a:off x="6172200" y="3886200"/>
+            <a:ext cx="5532120" cy="2423160"/>
           </a:xfrm>
           <a:prstGeom prst="roundRect">
             <a:avLst>
@@ -13338,164 +14557,8 @@
         </p:nvSpPr>
         <p:spPr>
           <a:xfrm>
-            <a:off x="7909560" y="1389888"/>
-            <a:ext cx="3566160" cy="91440"/>
-          </a:xfrm>
-          <a:prstGeom prst="rect">
-            <a:avLst/>
-          </a:prstGeom>
-          <a:solidFill>
-            <a:srgbClr val="123061"/>
-          </a:solidFill>
-          <a:ln>
-            <a:noFill/>
-          </a:ln>
-        </p:spPr>
-        <p:style>
-          <a:lnRef idx="1">
-            <a:schemeClr val="accent1"/>
-          </a:lnRef>
-          <a:fillRef idx="3">
-            <a:schemeClr val="accent1"/>
-          </a:fillRef>
-          <a:effectRef idx="2">
-            <a:schemeClr val="accent1"/>
-          </a:effectRef>
-          <a:fontRef idx="minor">
-            <a:schemeClr val="lt1"/>
-          </a:fontRef>
-        </p:style>
-        <p:txBody>
-          <a:bodyPr rtlCol="0" anchor="ctr"/>
-          <a:lstStyle/>
-          <a:p>
-            <a:pPr algn="ctr"/>
-          </a:p>
-        </p:txBody>
-      </p:sp>
-      <p:sp>
-        <p:nvSpPr>
-          <p:cNvPr id="18" name="TextBox 17"/>
-          <p:cNvSpPr txBox="1"/>
-          <p:nvPr/>
-        </p:nvSpPr>
-        <p:spPr>
-          <a:xfrm>
-            <a:off x="8110728" y="1645920"/>
-            <a:ext cx="3163824" cy="777240"/>
-          </a:xfrm>
-          <a:prstGeom prst="rect">
-            <a:avLst/>
-          </a:prstGeom>
-          <a:noFill/>
-        </p:spPr>
-        <p:txBody>
-          <a:bodyPr wrap="square" anchor="t"/>
-          <a:lstStyle/>
-          <a:p>
-            <a:pPr algn="l"/>
-            <a:r>
-              <a:rPr sz="1600" b="1">
-                <a:solidFill>
-                  <a:srgbClr val="0B2545"/>
-                </a:solidFill>
-                <a:latin typeface="Calibri"/>
-              </a:rPr>
-              <a:t>🔎  Matrix ↔ TDR</a:t>
-            </a:r>
-          </a:p>
-        </p:txBody>
-      </p:sp>
-      <p:sp>
-        <p:nvSpPr>
-          <p:cNvPr id="19" name="TextBox 18"/>
-          <p:cNvSpPr txBox="1"/>
-          <p:nvPr/>
-        </p:nvSpPr>
-        <p:spPr>
-          <a:xfrm>
-            <a:off x="8110728" y="2441448"/>
-            <a:ext cx="3163824" cy="960120"/>
-          </a:xfrm>
-          <a:prstGeom prst="rect">
-            <a:avLst/>
-          </a:prstGeom>
-          <a:noFill/>
-        </p:spPr>
-        <p:txBody>
-          <a:bodyPr wrap="square" anchor="t"/>
-          <a:lstStyle/>
-          <a:p>
-            <a:pPr algn="l"/>
-            <a:r>
-              <a:rPr sz="1400" b="0">
-                <a:solidFill>
-                  <a:srgbClr val="1C2B3A"/>
-                </a:solidFill>
-                <a:latin typeface="Calibri"/>
-              </a:rPr>
-              <a:t>Do the ticks match the proof in the PowerPoint / PDF?</a:t>
-            </a:r>
-          </a:p>
-        </p:txBody>
-      </p:sp>
-      <p:sp>
-        <p:nvSpPr>
-          <p:cNvPr id="20" name="Rounded Rectangle 19"/>
-          <p:cNvSpPr/>
-          <p:nvPr/>
-        </p:nvSpPr>
-        <p:spPr>
-          <a:xfrm>
-            <a:off x="411480" y="3794760"/>
-            <a:ext cx="3566160" cy="2194560"/>
-          </a:xfrm>
-          <a:prstGeom prst="roundRect">
-            <a:avLst>
-              <a:gd name="adj" fmla="val 8000"/>
-            </a:avLst>
-          </a:prstGeom>
-          <a:solidFill>
-            <a:srgbClr val="FFFFFF"/>
-          </a:solidFill>
-          <a:ln w="12700">
-            <a:solidFill>
-              <a:srgbClr val="DDE3EC"/>
-            </a:solidFill>
-          </a:ln>
-        </p:spPr>
-        <p:style>
-          <a:lnRef idx="1">
-            <a:schemeClr val="accent1"/>
-          </a:lnRef>
-          <a:fillRef idx="3">
-            <a:schemeClr val="accent1"/>
-          </a:fillRef>
-          <a:effectRef idx="2">
-            <a:schemeClr val="accent1"/>
-          </a:effectRef>
-          <a:fontRef idx="minor">
-            <a:schemeClr val="lt1"/>
-          </a:fontRef>
-        </p:style>
-        <p:txBody>
-          <a:bodyPr rtlCol="0" anchor="ctr"/>
-          <a:lstStyle/>
-          <a:p>
-            <a:pPr algn="ctr"/>
-          </a:p>
-        </p:txBody>
-      </p:sp>
-      <p:sp>
-        <p:nvSpPr>
-          <p:cNvPr id="21" name="Rectangle 20"/>
-          <p:cNvSpPr/>
-          <p:nvPr/>
-        </p:nvSpPr>
-        <p:spPr>
-          <a:xfrm>
-            <a:off x="411480" y="3794760"/>
-            <a:ext cx="3566160" cy="91440"/>
+            <a:off x="6172200" y="3886200"/>
+            <a:ext cx="73152" cy="2423160"/>
           </a:xfrm>
           <a:prstGeom prst="rect">
             <a:avLst/>
@@ -13531,14 +14594,14 @@
       </p:sp>
       <p:sp>
         <p:nvSpPr>
-          <p:cNvPr id="22" name="TextBox 21"/>
-          <p:cNvSpPr txBox="1"/>
-          <p:nvPr/>
-        </p:nvSpPr>
-        <p:spPr>
-          <a:xfrm>
-            <a:off x="612648" y="4050792"/>
-            <a:ext cx="3163824" cy="777240"/>
+          <p:cNvPr id="18" name="TextBox 17"/>
+          <p:cNvSpPr txBox="1"/>
+          <p:nvPr/>
+        </p:nvSpPr>
+        <p:spPr>
+          <a:xfrm>
+            <a:off x="6373368" y="4014216"/>
+            <a:ext cx="5221224" cy="347472"/>
           </a:xfrm>
           <a:prstGeom prst="rect">
             <a:avLst/>
@@ -13551,27 +14614,27 @@
           <a:p>
             <a:pPr algn="l"/>
             <a:r>
-              <a:rPr sz="1600" b="1">
+              <a:rPr sz="1800" b="1">
                 <a:solidFill>
                   <a:srgbClr val="0B2545"/>
                 </a:solidFill>
                 <a:latin typeface="Calibri"/>
               </a:rPr>
-              <a:t>🏁  TDR Benchmark</a:t>
-            </a:r>
-          </a:p>
-        </p:txBody>
-      </p:sp>
-      <p:sp>
-        <p:nvSpPr>
-          <p:cNvPr id="23" name="TextBox 22"/>
-          <p:cNvSpPr txBox="1"/>
-          <p:nvPr/>
-        </p:nvSpPr>
-        <p:spPr>
-          <a:xfrm>
-            <a:off x="612648" y="4846320"/>
-            <a:ext cx="3163824" cy="960120"/>
+              <a:t>Users</a:t>
+            </a:r>
+          </a:p>
+        </p:txBody>
+      </p:sp>
+      <p:sp>
+        <p:nvSpPr>
+          <p:cNvPr id="19" name="TextBox 18"/>
+          <p:cNvSpPr txBox="1"/>
+          <p:nvPr/>
+        </p:nvSpPr>
+        <p:spPr>
+          <a:xfrm>
+            <a:off x="6373368" y="4343400"/>
+            <a:ext cx="5221224" cy="1837944"/>
           </a:xfrm>
           <a:prstGeom prst="rect">
             <a:avLst/>
@@ -13590,326 +14653,16 @@
                 </a:solidFill>
                 <a:latin typeface="Calibri"/>
               </a:rPr>
-              <a:t>Compare several suppliers’ technical offers, side by side.</a:t>
-            </a:r>
-          </a:p>
-        </p:txBody>
-      </p:sp>
-      <p:sp>
-        <p:nvSpPr>
-          <p:cNvPr id="24" name="Rounded Rectangle 23"/>
-          <p:cNvSpPr/>
-          <p:nvPr/>
-        </p:nvSpPr>
-        <p:spPr>
-          <a:xfrm>
-            <a:off x="4160520" y="3794760"/>
-            <a:ext cx="3566160" cy="2194560"/>
-          </a:xfrm>
-          <a:prstGeom prst="roundRect">
-            <a:avLst>
-              <a:gd name="adj" fmla="val 8000"/>
-            </a:avLst>
-          </a:prstGeom>
-          <a:solidFill>
-            <a:srgbClr val="FFFFFF"/>
-          </a:solidFill>
-          <a:ln w="12700">
-            <a:solidFill>
-              <a:srgbClr val="DDE3EC"/>
-            </a:solidFill>
-          </a:ln>
-        </p:spPr>
-        <p:style>
-          <a:lnRef idx="1">
-            <a:schemeClr val="accent1"/>
-          </a:lnRef>
-          <a:fillRef idx="3">
-            <a:schemeClr val="accent1"/>
-          </a:fillRef>
-          <a:effectRef idx="2">
-            <a:schemeClr val="accent1"/>
-          </a:effectRef>
-          <a:fontRef idx="minor">
-            <a:schemeClr val="lt1"/>
-          </a:fontRef>
-        </p:style>
-        <p:txBody>
-          <a:bodyPr rtlCol="0" anchor="ctr"/>
-          <a:lstStyle/>
-          <a:p>
-            <a:pPr algn="ctr"/>
-          </a:p>
-        </p:txBody>
-      </p:sp>
-      <p:sp>
-        <p:nvSpPr>
-          <p:cNvPr id="25" name="Rectangle 24"/>
-          <p:cNvSpPr/>
-          <p:nvPr/>
-        </p:nvSpPr>
-        <p:spPr>
-          <a:xfrm>
-            <a:off x="4160520" y="3794760"/>
-            <a:ext cx="3566160" cy="91440"/>
-          </a:xfrm>
-          <a:prstGeom prst="rect">
-            <a:avLst/>
-          </a:prstGeom>
-          <a:solidFill>
-            <a:srgbClr val="5B6B7C"/>
-          </a:solidFill>
-          <a:ln>
-            <a:noFill/>
-          </a:ln>
-        </p:spPr>
-        <p:style>
-          <a:lnRef idx="1">
-            <a:schemeClr val="accent1"/>
-          </a:lnRef>
-          <a:fillRef idx="3">
-            <a:schemeClr val="accent1"/>
-          </a:fillRef>
-          <a:effectRef idx="2">
-            <a:schemeClr val="accent1"/>
-          </a:effectRef>
-          <a:fontRef idx="minor">
-            <a:schemeClr val="lt1"/>
-          </a:fontRef>
-        </p:style>
-        <p:txBody>
-          <a:bodyPr rtlCol="0" anchor="ctr"/>
-          <a:lstStyle/>
-          <a:p>
-            <a:pPr algn="ctr"/>
-          </a:p>
-        </p:txBody>
-      </p:sp>
-      <p:sp>
-        <p:nvSpPr>
-          <p:cNvPr id="26" name="TextBox 25"/>
-          <p:cNvSpPr txBox="1"/>
-          <p:nvPr/>
-        </p:nvSpPr>
-        <p:spPr>
-          <a:xfrm>
-            <a:off x="4361688" y="4050792"/>
-            <a:ext cx="3163824" cy="777240"/>
-          </a:xfrm>
-          <a:prstGeom prst="rect">
-            <a:avLst/>
-          </a:prstGeom>
-          <a:noFill/>
-        </p:spPr>
-        <p:txBody>
-          <a:bodyPr wrap="square" anchor="t"/>
-          <a:lstStyle/>
-          <a:p>
-            <a:pPr algn="l"/>
-            <a:r>
-              <a:rPr sz="1600" b="1">
-                <a:solidFill>
-                  <a:srgbClr val="0B2545"/>
-                </a:solidFill>
-                <a:latin typeface="Calibri"/>
-              </a:rPr>
-              <a:t>📉  Version Delta</a:t>
-            </a:r>
-          </a:p>
-        </p:txBody>
-      </p:sp>
-      <p:sp>
-        <p:nvSpPr>
-          <p:cNvPr id="27" name="TextBox 26"/>
-          <p:cNvSpPr txBox="1"/>
-          <p:nvPr/>
-        </p:nvSpPr>
-        <p:spPr>
-          <a:xfrm>
-            <a:off x="4361688" y="4846320"/>
-            <a:ext cx="3163824" cy="960120"/>
-          </a:xfrm>
-          <a:prstGeom prst="rect">
-            <a:avLst/>
-          </a:prstGeom>
-          <a:noFill/>
-        </p:spPr>
-        <p:txBody>
-          <a:bodyPr wrap="square" anchor="t"/>
-          <a:lstStyle/>
-          <a:p>
-            <a:pPr algn="l"/>
-            <a:r>
-              <a:rPr sz="1400" b="0">
-                <a:solidFill>
-                  <a:srgbClr val="1C2B3A"/>
-                </a:solidFill>
-                <a:latin typeface="Calibri"/>
-              </a:rPr>
-              <a:t>What changed between two versions of the same matrix?</a:t>
-            </a:r>
-          </a:p>
-        </p:txBody>
-      </p:sp>
-      <p:sp>
-        <p:nvSpPr>
-          <p:cNvPr id="28" name="Rounded Rectangle 27"/>
-          <p:cNvSpPr/>
-          <p:nvPr/>
-        </p:nvSpPr>
-        <p:spPr>
-          <a:xfrm>
-            <a:off x="7909560" y="3794760"/>
-            <a:ext cx="3566160" cy="2194560"/>
-          </a:xfrm>
-          <a:prstGeom prst="roundRect">
-            <a:avLst>
-              <a:gd name="adj" fmla="val 8000"/>
-            </a:avLst>
-          </a:prstGeom>
-          <a:solidFill>
-            <a:srgbClr val="FFFFFF"/>
-          </a:solidFill>
-          <a:ln w="12700">
-            <a:solidFill>
-              <a:srgbClr val="DDE3EC"/>
-            </a:solidFill>
-          </a:ln>
-        </p:spPr>
-        <p:style>
-          <a:lnRef idx="1">
-            <a:schemeClr val="accent1"/>
-          </a:lnRef>
-          <a:fillRef idx="3">
-            <a:schemeClr val="accent1"/>
-          </a:fillRef>
-          <a:effectRef idx="2">
-            <a:schemeClr val="accent1"/>
-          </a:effectRef>
-          <a:fontRef idx="minor">
-            <a:schemeClr val="lt1"/>
-          </a:fontRef>
-        </p:style>
-        <p:txBody>
-          <a:bodyPr rtlCol="0" anchor="ctr"/>
-          <a:lstStyle/>
-          <a:p>
-            <a:pPr algn="ctr"/>
-          </a:p>
-        </p:txBody>
-      </p:sp>
-      <p:sp>
-        <p:nvSpPr>
-          <p:cNvPr id="29" name="Rectangle 28"/>
-          <p:cNvSpPr/>
-          <p:nvPr/>
-        </p:nvSpPr>
-        <p:spPr>
-          <a:xfrm>
-            <a:off x="7909560" y="3794760"/>
-            <a:ext cx="3566160" cy="91440"/>
-          </a:xfrm>
-          <a:prstGeom prst="rect">
-            <a:avLst/>
-          </a:prstGeom>
-          <a:solidFill>
-            <a:srgbClr val="1D4ED8"/>
-          </a:solidFill>
-          <a:ln>
-            <a:noFill/>
-          </a:ln>
-        </p:spPr>
-        <p:style>
-          <a:lnRef idx="1">
-            <a:schemeClr val="accent1"/>
-          </a:lnRef>
-          <a:fillRef idx="3">
-            <a:schemeClr val="accent1"/>
-          </a:fillRef>
-          <a:effectRef idx="2">
-            <a:schemeClr val="accent1"/>
-          </a:effectRef>
-          <a:fontRef idx="minor">
-            <a:schemeClr val="lt1"/>
-          </a:fontRef>
-        </p:style>
-        <p:txBody>
-          <a:bodyPr rtlCol="0" anchor="ctr"/>
-          <a:lstStyle/>
-          <a:p>
-            <a:pPr algn="ctr"/>
-          </a:p>
-        </p:txBody>
-      </p:sp>
-      <p:sp>
-        <p:nvSpPr>
-          <p:cNvPr id="30" name="TextBox 29"/>
-          <p:cNvSpPr txBox="1"/>
-          <p:nvPr/>
-        </p:nvSpPr>
-        <p:spPr>
-          <a:xfrm>
-            <a:off x="8110728" y="4050792"/>
-            <a:ext cx="3163824" cy="777240"/>
-          </a:xfrm>
-          <a:prstGeom prst="rect">
-            <a:avLst/>
-          </a:prstGeom>
-          <a:noFill/>
-        </p:spPr>
-        <p:txBody>
-          <a:bodyPr wrap="square" anchor="t"/>
-          <a:lstStyle/>
-          <a:p>
-            <a:pPr algn="l"/>
-            <a:r>
-              <a:rPr sz="1600" b="1">
-                <a:solidFill>
-                  <a:srgbClr val="0B2545"/>
-                </a:solidFill>
-                <a:latin typeface="Calibri"/>
-              </a:rPr>
-              <a:t>🔗  Matrix + evidence</a:t>
-            </a:r>
-          </a:p>
-        </p:txBody>
-      </p:sp>
-      <p:sp>
-        <p:nvSpPr>
-          <p:cNvPr id="31" name="TextBox 30"/>
-          <p:cNvSpPr txBox="1"/>
-          <p:nvPr/>
-        </p:nvSpPr>
-        <p:spPr>
-          <a:xfrm>
-            <a:off x="8110728" y="4846320"/>
-            <a:ext cx="3163824" cy="960120"/>
-          </a:xfrm>
-          <a:prstGeom prst="rect">
-            <a:avLst/>
-          </a:prstGeom>
-          <a:noFill/>
-        </p:spPr>
-        <p:txBody>
-          <a:bodyPr wrap="square" anchor="t"/>
-          <a:lstStyle/>
-          <a:p>
-            <a:pPr algn="l"/>
-            <a:r>
-              <a:rPr sz="1400" b="0">
-                <a:solidFill>
-                  <a:srgbClr val="1C2B3A"/>
-                </a:solidFill>
-                <a:latin typeface="Calibri"/>
-              </a:rPr>
-              <a:t>Find the page that talks about a given requirement.</a:t>
-            </a:r>
-          </a:p>
-        </p:txBody>
-      </p:sp>
-      <p:sp>
-        <p:nvSpPr>
-          <p:cNvPr id="32" name="Rectangle 31"/>
+              <a:t>Mechatronics engineers in charge of a component.
+Quality / FNR for the analysis of a conformity matrix.
+Participants preparing a TDR review.</a:t>
+            </a:r>
+          </a:p>
+        </p:txBody>
+      </p:sp>
+      <p:sp>
+        <p:nvSpPr>
+          <p:cNvPr id="20" name="Rectangle 19"/>
           <p:cNvSpPr/>
           <p:nvPr/>
         </p:nvSpPr>
@@ -13952,7 +14705,7 @@
       </p:sp>
       <p:sp>
         <p:nvSpPr>
-          <p:cNvPr id="33" name="TextBox 32"/>
+          <p:cNvPr id="21" name="TextBox 20"/>
           <p:cNvSpPr txBox="1"/>
           <p:nvPr/>
         </p:nvSpPr>
@@ -13978,14 +14731,14 @@
                 </a:solidFill>
                 <a:latin typeface="Calibri"/>
               </a:rPr>
-              <a:t>Khadija Benhamida  ·  Mechatronics Engineering  ·  First meeting</a:t>
-            </a:r>
-          </a:p>
-        </p:txBody>
-      </p:sp>
-      <p:sp>
-        <p:nvSpPr>
-          <p:cNvPr id="34" name="TextBox 33"/>
+              <a:t>Khadija Benhamida  ·  Mechatronics Engineering  ·  Confidential</a:t>
+            </a:r>
+          </a:p>
+        </p:txBody>
+      </p:sp>
+      <p:sp>
+        <p:nvSpPr>
+          <p:cNvPr id="22" name="TextBox 21"/>
           <p:cNvSpPr txBox="1"/>
           <p:nvPr/>
         </p:nvSpPr>
@@ -14011,7 +14764,7 @@
                 </a:solidFill>
                 <a:latin typeface="Calibri"/>
               </a:rPr>
-              <a:t>6  /  13</a:t>
+              <a:t>6  /  14</a:t>
             </a:r>
           </a:p>
         </p:txBody>
@@ -14191,7 +14944,7 @@
                 </a:solidFill>
                 <a:latin typeface="Calibri"/>
               </a:rPr>
-              <a:t>JOBS 1 AND 2</a:t>
+              <a:t>THE APPLICATION</a:t>
             </a:r>
           </a:p>
         </p:txBody>
@@ -14224,7 +14977,7 @@
                 </a:solidFill>
                 <a:latin typeface="Calibri"/>
               </a:rPr>
-              <a:t>First we clean our spec. Then we read their checklist.</a:t>
+              <a:t>Six functions in a single interface</a:t>
             </a:r>
           </a:p>
         </p:txBody>
@@ -14257,7 +15010,7 @@
                 </a:solidFill>
                 <a:latin typeface="Calibri"/>
               </a:rPr>
-              <a:t>Two tabs that already save hours, even before looking at the TDR.</a:t>
+              <a:t>No installation is required for the reviewer. Only the relevant function is used.</a:t>
             </a:r>
           </a:p>
         </p:txBody>
@@ -14271,7 +15024,7 @@
         <p:spPr>
           <a:xfrm>
             <a:off x="411480" y="1389888"/>
-            <a:ext cx="5532120" cy="4919472"/>
+            <a:ext cx="3566160" cy="2194560"/>
           </a:xfrm>
           <a:prstGeom prst="roundRect">
             <a:avLst>
@@ -14318,7 +15071,7 @@
         <p:spPr>
           <a:xfrm>
             <a:off x="411480" y="1389888"/>
-            <a:ext cx="5532120" cy="475488"/>
+            <a:ext cx="3566160" cy="91440"/>
           </a:xfrm>
           <a:prstGeom prst="rect">
             <a:avLst/>
@@ -14360,27 +15113,27 @@
         </p:nvSpPr>
         <p:spPr>
           <a:xfrm>
-            <a:off x="594360" y="1444752"/>
-            <a:ext cx="5212080" cy="384048"/>
-          </a:xfrm>
-          <a:prstGeom prst="rect">
-            <a:avLst/>
-          </a:prstGeom>
-          <a:noFill/>
-        </p:spPr>
-        <p:txBody>
-          <a:bodyPr wrap="square" anchor="ctr"/>
+            <a:off x="612648" y="1645920"/>
+            <a:ext cx="3163824" cy="640080"/>
+          </a:xfrm>
+          <a:prstGeom prst="rect">
+            <a:avLst/>
+          </a:prstGeom>
+          <a:noFill/>
+        </p:spPr>
+        <p:txBody>
+          <a:bodyPr wrap="square" anchor="t"/>
           <a:lstStyle/>
           <a:p>
             <a:pPr algn="l"/>
             <a:r>
-              <a:rPr sz="1800" b="1">
-                <a:solidFill>
-                  <a:srgbClr val="FFFFFF"/>
-                </a:solidFill>
-                <a:latin typeface="Calibri"/>
-              </a:rPr>
-              <a:t>📄   Spec Validation</a:t>
+              <a:rPr sz="1500" b="1">
+                <a:solidFill>
+                  <a:srgbClr val="0B2545"/>
+                </a:solidFill>
+                <a:latin typeface="Calibri"/>
+              </a:rPr>
+              <a:t>Specification validation</a:t>
             </a:r>
           </a:p>
         </p:txBody>
@@ -14393,8 +15146,8 @@
         </p:nvSpPr>
         <p:spPr>
           <a:xfrm>
-            <a:off x="640080" y="2011680"/>
-            <a:ext cx="5074920" cy="4023360"/>
+            <a:off x="612648" y="2395728"/>
+            <a:ext cx="3163824" cy="1005840"/>
           </a:xfrm>
           <a:prstGeom prst="rect">
             <a:avLst/>
@@ -14407,19 +15160,13 @@
           <a:p>
             <a:pPr algn="l"/>
             <a:r>
-              <a:rPr sz="1400" b="0">
+              <a:rPr sz="1300" b="0">
                 <a:solidFill>
                   <a:srgbClr val="1C2B3A"/>
                 </a:solidFill>
                 <a:latin typeface="Calibri"/>
               </a:rPr>
-              <a:t>Upload our Word / PDF specification.
-LEON checks, like a very patient editor:
-• Are the mandatory chapters there? (Purpose, Scope, Requirements…)
-• Are leftover template words still there?  &lt;&lt;name&gt;&gt;, TBD, XXX
-• Does each requirement have an ID and a clear “shall”?
-You get a verdict (good / acceptable / not ready) and a Word report.
-Bonus: one click builds the empty conformity matrix so the supplier does not type 400 rows by hand.</a:t>
+              <a:t>Checks completeness and writing quality of the CTS before it is issued.</a:t>
             </a:r>
           </a:p>
         </p:txBody>
@@ -14432,8 +15179,8 @@
         </p:nvSpPr>
         <p:spPr>
           <a:xfrm>
-            <a:off x="6172200" y="1389888"/>
-            <a:ext cx="5532120" cy="4919472"/>
+            <a:off x="4160520" y="1389888"/>
+            <a:ext cx="3566160" cy="2194560"/>
           </a:xfrm>
           <a:prstGeom prst="roundRect">
             <a:avLst>
@@ -14479,8 +15226,8 @@
         </p:nvSpPr>
         <p:spPr>
           <a:xfrm>
-            <a:off x="6172200" y="1389888"/>
-            <a:ext cx="5532120" cy="475488"/>
+            <a:off x="4160520" y="1389888"/>
+            <a:ext cx="3566160" cy="91440"/>
           </a:xfrm>
           <a:prstGeom prst="rect">
             <a:avLst/>
@@ -14522,27 +15269,27 @@
         </p:nvSpPr>
         <p:spPr>
           <a:xfrm>
-            <a:off x="6355080" y="1444752"/>
-            <a:ext cx="5212080" cy="384048"/>
-          </a:xfrm>
-          <a:prstGeom prst="rect">
-            <a:avLst/>
-          </a:prstGeom>
-          <a:noFill/>
-        </p:spPr>
-        <p:txBody>
-          <a:bodyPr wrap="square" anchor="ctr"/>
+            <a:off x="4361688" y="1645920"/>
+            <a:ext cx="3163824" cy="640080"/>
+          </a:xfrm>
+          <a:prstGeom prst="rect">
+            <a:avLst/>
+          </a:prstGeom>
+          <a:noFill/>
+        </p:spPr>
+        <p:txBody>
+          <a:bodyPr wrap="square" anchor="t"/>
           <a:lstStyle/>
           <a:p>
             <a:pPr algn="l"/>
             <a:r>
-              <a:rPr sz="1800" b="1">
-                <a:solidFill>
-                  <a:srgbClr val="FFFFFF"/>
-                </a:solidFill>
-                <a:latin typeface="Calibri"/>
-              </a:rPr>
-              <a:t>📊   Conformity Matrix</a:t>
+              <a:rPr sz="1500" b="1">
+                <a:solidFill>
+                  <a:srgbClr val="0B2545"/>
+                </a:solidFill>
+                <a:latin typeface="Calibri"/>
+              </a:rPr>
+              <a:t>Conformity matrix</a:t>
             </a:r>
           </a:p>
         </p:txBody>
@@ -14555,8 +15302,8 @@
         </p:nvSpPr>
         <p:spPr>
           <a:xfrm>
-            <a:off x="6400800" y="2011680"/>
-            <a:ext cx="5074920" cy="4023360"/>
+            <a:off x="4361688" y="2395728"/>
+            <a:ext cx="3163824" cy="1005840"/>
           </a:xfrm>
           <a:prstGeom prst="rect">
             <a:avLst/>
@@ -14569,25 +15316,644 @@
           <a:p>
             <a:pPr algn="l"/>
             <a:r>
-              <a:rPr sz="1400" b="0">
+              <a:rPr sz="1300" b="0">
                 <a:solidFill>
                   <a:srgbClr val="1C2B3A"/>
                 </a:solidFill>
                 <a:latin typeface="Calibri"/>
               </a:rPr>
-              <a:t>Upload the supplier’s Excel / ODS — even if they renamed columns.
-LEON counts OK / NOK / NA, draws a pie chart, and lists every row.
-Then it re-reads every OK comment and raises a “point of attention” when:
-• the comment contradicts the tick  (“OK” + “not validated”)
-• conformity is only partial or still pending
-You download a colour-coded Excel (green / red / grey) for the meeting.</a:t>
-            </a:r>
-          </a:p>
-        </p:txBody>
-      </p:sp>
-      <p:sp>
-        <p:nvSpPr>
-          <p:cNvPr id="16" name="Rectangle 15"/>
+              <a:t>Analyses supplier OK / NOK / NA statuses and flags inconsistent OK comments.</a:t>
+            </a:r>
+          </a:p>
+        </p:txBody>
+      </p:sp>
+      <p:sp>
+        <p:nvSpPr>
+          <p:cNvPr id="16" name="Rounded Rectangle 15"/>
+          <p:cNvSpPr/>
+          <p:nvPr/>
+        </p:nvSpPr>
+        <p:spPr>
+          <a:xfrm>
+            <a:off x="7909560" y="1389888"/>
+            <a:ext cx="3566160" cy="2194560"/>
+          </a:xfrm>
+          <a:prstGeom prst="roundRect">
+            <a:avLst>
+              <a:gd name="adj" fmla="val 8000"/>
+            </a:avLst>
+          </a:prstGeom>
+          <a:solidFill>
+            <a:srgbClr val="FFFFFF"/>
+          </a:solidFill>
+          <a:ln w="12700">
+            <a:solidFill>
+              <a:srgbClr val="DDE3EC"/>
+            </a:solidFill>
+          </a:ln>
+        </p:spPr>
+        <p:style>
+          <a:lnRef idx="1">
+            <a:schemeClr val="accent1"/>
+          </a:lnRef>
+          <a:fillRef idx="3">
+            <a:schemeClr val="accent1"/>
+          </a:fillRef>
+          <a:effectRef idx="2">
+            <a:schemeClr val="accent1"/>
+          </a:effectRef>
+          <a:fontRef idx="minor">
+            <a:schemeClr val="lt1"/>
+          </a:fontRef>
+        </p:style>
+        <p:txBody>
+          <a:bodyPr rtlCol="0" anchor="ctr"/>
+          <a:lstStyle/>
+          <a:p>
+            <a:pPr algn="ctr"/>
+          </a:p>
+        </p:txBody>
+      </p:sp>
+      <p:sp>
+        <p:nvSpPr>
+          <p:cNvPr id="17" name="Rectangle 16"/>
+          <p:cNvSpPr/>
+          <p:nvPr/>
+        </p:nvSpPr>
+        <p:spPr>
+          <a:xfrm>
+            <a:off x="7909560" y="1389888"/>
+            <a:ext cx="3566160" cy="91440"/>
+          </a:xfrm>
+          <a:prstGeom prst="rect">
+            <a:avLst/>
+          </a:prstGeom>
+          <a:solidFill>
+            <a:srgbClr val="123061"/>
+          </a:solidFill>
+          <a:ln>
+            <a:noFill/>
+          </a:ln>
+        </p:spPr>
+        <p:style>
+          <a:lnRef idx="1">
+            <a:schemeClr val="accent1"/>
+          </a:lnRef>
+          <a:fillRef idx="3">
+            <a:schemeClr val="accent1"/>
+          </a:fillRef>
+          <a:effectRef idx="2">
+            <a:schemeClr val="accent1"/>
+          </a:effectRef>
+          <a:fontRef idx="minor">
+            <a:schemeClr val="lt1"/>
+          </a:fontRef>
+        </p:style>
+        <p:txBody>
+          <a:bodyPr rtlCol="0" anchor="ctr"/>
+          <a:lstStyle/>
+          <a:p>
+            <a:pPr algn="ctr"/>
+          </a:p>
+        </p:txBody>
+      </p:sp>
+      <p:sp>
+        <p:nvSpPr>
+          <p:cNvPr id="18" name="TextBox 17"/>
+          <p:cNvSpPr txBox="1"/>
+          <p:nvPr/>
+        </p:nvSpPr>
+        <p:spPr>
+          <a:xfrm>
+            <a:off x="8110728" y="1645920"/>
+            <a:ext cx="3163824" cy="640080"/>
+          </a:xfrm>
+          <a:prstGeom prst="rect">
+            <a:avLst/>
+          </a:prstGeom>
+          <a:noFill/>
+        </p:spPr>
+        <p:txBody>
+          <a:bodyPr wrap="square" anchor="t"/>
+          <a:lstStyle/>
+          <a:p>
+            <a:pPr algn="l"/>
+            <a:r>
+              <a:rPr sz="1500" b="1">
+                <a:solidFill>
+                  <a:srgbClr val="0B2545"/>
+                </a:solidFill>
+                <a:latin typeface="Calibri"/>
+              </a:rPr>
+              <a:t>Matrix ↔ TDR</a:t>
+            </a:r>
+          </a:p>
+        </p:txBody>
+      </p:sp>
+      <p:sp>
+        <p:nvSpPr>
+          <p:cNvPr id="19" name="TextBox 18"/>
+          <p:cNvSpPr txBox="1"/>
+          <p:nvPr/>
+        </p:nvSpPr>
+        <p:spPr>
+          <a:xfrm>
+            <a:off x="8110728" y="2395728"/>
+            <a:ext cx="3163824" cy="1005840"/>
+          </a:xfrm>
+          <a:prstGeom prst="rect">
+            <a:avLst/>
+          </a:prstGeom>
+          <a:noFill/>
+        </p:spPr>
+        <p:txBody>
+          <a:bodyPr wrap="square" anchor="t"/>
+          <a:lstStyle/>
+          <a:p>
+            <a:pPr algn="l"/>
+            <a:r>
+              <a:rPr sz="1300" b="0">
+                <a:solidFill>
+                  <a:srgbClr val="1C2B3A"/>
+                </a:solidFill>
+                <a:latin typeface="Calibri"/>
+              </a:rPr>
+              <a:t>Compares the declaration in the matrix with the evidence in the TDR.</a:t>
+            </a:r>
+          </a:p>
+        </p:txBody>
+      </p:sp>
+      <p:sp>
+        <p:nvSpPr>
+          <p:cNvPr id="20" name="Rounded Rectangle 19"/>
+          <p:cNvSpPr/>
+          <p:nvPr/>
+        </p:nvSpPr>
+        <p:spPr>
+          <a:xfrm>
+            <a:off x="411480" y="3794760"/>
+            <a:ext cx="3566160" cy="2194560"/>
+          </a:xfrm>
+          <a:prstGeom prst="roundRect">
+            <a:avLst>
+              <a:gd name="adj" fmla="val 8000"/>
+            </a:avLst>
+          </a:prstGeom>
+          <a:solidFill>
+            <a:srgbClr val="FFFFFF"/>
+          </a:solidFill>
+          <a:ln w="12700">
+            <a:solidFill>
+              <a:srgbClr val="DDE3EC"/>
+            </a:solidFill>
+          </a:ln>
+        </p:spPr>
+        <p:style>
+          <a:lnRef idx="1">
+            <a:schemeClr val="accent1"/>
+          </a:lnRef>
+          <a:fillRef idx="3">
+            <a:schemeClr val="accent1"/>
+          </a:fillRef>
+          <a:effectRef idx="2">
+            <a:schemeClr val="accent1"/>
+          </a:effectRef>
+          <a:fontRef idx="minor">
+            <a:schemeClr val="lt1"/>
+          </a:fontRef>
+        </p:style>
+        <p:txBody>
+          <a:bodyPr rtlCol="0" anchor="ctr"/>
+          <a:lstStyle/>
+          <a:p>
+            <a:pPr algn="ctr"/>
+          </a:p>
+        </p:txBody>
+      </p:sp>
+      <p:sp>
+        <p:nvSpPr>
+          <p:cNvPr id="21" name="Rectangle 20"/>
+          <p:cNvSpPr/>
+          <p:nvPr/>
+        </p:nvSpPr>
+        <p:spPr>
+          <a:xfrm>
+            <a:off x="411480" y="3794760"/>
+            <a:ext cx="3566160" cy="91440"/>
+          </a:xfrm>
+          <a:prstGeom prst="rect">
+            <a:avLst/>
+          </a:prstGeom>
+          <a:solidFill>
+            <a:srgbClr val="157347"/>
+          </a:solidFill>
+          <a:ln>
+            <a:noFill/>
+          </a:ln>
+        </p:spPr>
+        <p:style>
+          <a:lnRef idx="1">
+            <a:schemeClr val="accent1"/>
+          </a:lnRef>
+          <a:fillRef idx="3">
+            <a:schemeClr val="accent1"/>
+          </a:fillRef>
+          <a:effectRef idx="2">
+            <a:schemeClr val="accent1"/>
+          </a:effectRef>
+          <a:fontRef idx="minor">
+            <a:schemeClr val="lt1"/>
+          </a:fontRef>
+        </p:style>
+        <p:txBody>
+          <a:bodyPr rtlCol="0" anchor="ctr"/>
+          <a:lstStyle/>
+          <a:p>
+            <a:pPr algn="ctr"/>
+          </a:p>
+        </p:txBody>
+      </p:sp>
+      <p:sp>
+        <p:nvSpPr>
+          <p:cNvPr id="22" name="TextBox 21"/>
+          <p:cNvSpPr txBox="1"/>
+          <p:nvPr/>
+        </p:nvSpPr>
+        <p:spPr>
+          <a:xfrm>
+            <a:off x="612648" y="4050792"/>
+            <a:ext cx="3163824" cy="640080"/>
+          </a:xfrm>
+          <a:prstGeom prst="rect">
+            <a:avLst/>
+          </a:prstGeom>
+          <a:noFill/>
+        </p:spPr>
+        <p:txBody>
+          <a:bodyPr wrap="square" anchor="t"/>
+          <a:lstStyle/>
+          <a:p>
+            <a:pPr algn="l"/>
+            <a:r>
+              <a:rPr sz="1500" b="1">
+                <a:solidFill>
+                  <a:srgbClr val="0B2545"/>
+                </a:solidFill>
+                <a:latin typeface="Calibri"/>
+              </a:rPr>
+              <a:t>TDR benchmark</a:t>
+            </a:r>
+          </a:p>
+        </p:txBody>
+      </p:sp>
+      <p:sp>
+        <p:nvSpPr>
+          <p:cNvPr id="23" name="TextBox 22"/>
+          <p:cNvSpPr txBox="1"/>
+          <p:nvPr/>
+        </p:nvSpPr>
+        <p:spPr>
+          <a:xfrm>
+            <a:off x="612648" y="4800600"/>
+            <a:ext cx="3163824" cy="1005840"/>
+          </a:xfrm>
+          <a:prstGeom prst="rect">
+            <a:avLst/>
+          </a:prstGeom>
+          <a:noFill/>
+        </p:spPr>
+        <p:txBody>
+          <a:bodyPr wrap="square" anchor="t"/>
+          <a:lstStyle/>
+          <a:p>
+            <a:pPr algn="l"/>
+            <a:r>
+              <a:rPr sz="1300" b="0">
+                <a:solidFill>
+                  <a:srgbClr val="1C2B3A"/>
+                </a:solidFill>
+                <a:latin typeface="Calibri"/>
+              </a:rPr>
+              <a:t>Compares several suppliers on the same technical criteria, excluding price.</a:t>
+            </a:r>
+          </a:p>
+        </p:txBody>
+      </p:sp>
+      <p:sp>
+        <p:nvSpPr>
+          <p:cNvPr id="24" name="Rounded Rectangle 23"/>
+          <p:cNvSpPr/>
+          <p:nvPr/>
+        </p:nvSpPr>
+        <p:spPr>
+          <a:xfrm>
+            <a:off x="4160520" y="3794760"/>
+            <a:ext cx="3566160" cy="2194560"/>
+          </a:xfrm>
+          <a:prstGeom prst="roundRect">
+            <a:avLst>
+              <a:gd name="adj" fmla="val 8000"/>
+            </a:avLst>
+          </a:prstGeom>
+          <a:solidFill>
+            <a:srgbClr val="FFFFFF"/>
+          </a:solidFill>
+          <a:ln w="12700">
+            <a:solidFill>
+              <a:srgbClr val="DDE3EC"/>
+            </a:solidFill>
+          </a:ln>
+        </p:spPr>
+        <p:style>
+          <a:lnRef idx="1">
+            <a:schemeClr val="accent1"/>
+          </a:lnRef>
+          <a:fillRef idx="3">
+            <a:schemeClr val="accent1"/>
+          </a:fillRef>
+          <a:effectRef idx="2">
+            <a:schemeClr val="accent1"/>
+          </a:effectRef>
+          <a:fontRef idx="minor">
+            <a:schemeClr val="lt1"/>
+          </a:fontRef>
+        </p:style>
+        <p:txBody>
+          <a:bodyPr rtlCol="0" anchor="ctr"/>
+          <a:lstStyle/>
+          <a:p>
+            <a:pPr algn="ctr"/>
+          </a:p>
+        </p:txBody>
+      </p:sp>
+      <p:sp>
+        <p:nvSpPr>
+          <p:cNvPr id="25" name="Rectangle 24"/>
+          <p:cNvSpPr/>
+          <p:nvPr/>
+        </p:nvSpPr>
+        <p:spPr>
+          <a:xfrm>
+            <a:off x="4160520" y="3794760"/>
+            <a:ext cx="3566160" cy="91440"/>
+          </a:xfrm>
+          <a:prstGeom prst="rect">
+            <a:avLst/>
+          </a:prstGeom>
+          <a:solidFill>
+            <a:srgbClr val="5B6B7C"/>
+          </a:solidFill>
+          <a:ln>
+            <a:noFill/>
+          </a:ln>
+        </p:spPr>
+        <p:style>
+          <a:lnRef idx="1">
+            <a:schemeClr val="accent1"/>
+          </a:lnRef>
+          <a:fillRef idx="3">
+            <a:schemeClr val="accent1"/>
+          </a:fillRef>
+          <a:effectRef idx="2">
+            <a:schemeClr val="accent1"/>
+          </a:effectRef>
+          <a:fontRef idx="minor">
+            <a:schemeClr val="lt1"/>
+          </a:fontRef>
+        </p:style>
+        <p:txBody>
+          <a:bodyPr rtlCol="0" anchor="ctr"/>
+          <a:lstStyle/>
+          <a:p>
+            <a:pPr algn="ctr"/>
+          </a:p>
+        </p:txBody>
+      </p:sp>
+      <p:sp>
+        <p:nvSpPr>
+          <p:cNvPr id="26" name="TextBox 25"/>
+          <p:cNvSpPr txBox="1"/>
+          <p:nvPr/>
+        </p:nvSpPr>
+        <p:spPr>
+          <a:xfrm>
+            <a:off x="4361688" y="4050792"/>
+            <a:ext cx="3163824" cy="640080"/>
+          </a:xfrm>
+          <a:prstGeom prst="rect">
+            <a:avLst/>
+          </a:prstGeom>
+          <a:noFill/>
+        </p:spPr>
+        <p:txBody>
+          <a:bodyPr wrap="square" anchor="t"/>
+          <a:lstStyle/>
+          <a:p>
+            <a:pPr algn="l"/>
+            <a:r>
+              <a:rPr sz="1500" b="1">
+                <a:solidFill>
+                  <a:srgbClr val="0B2545"/>
+                </a:solidFill>
+                <a:latin typeface="Calibri"/>
+              </a:rPr>
+              <a:t>Version follow-up</a:t>
+            </a:r>
+          </a:p>
+        </p:txBody>
+      </p:sp>
+      <p:sp>
+        <p:nvSpPr>
+          <p:cNvPr id="27" name="TextBox 26"/>
+          <p:cNvSpPr txBox="1"/>
+          <p:nvPr/>
+        </p:nvSpPr>
+        <p:spPr>
+          <a:xfrm>
+            <a:off x="4361688" y="4800600"/>
+            <a:ext cx="3163824" cy="1005840"/>
+          </a:xfrm>
+          <a:prstGeom prst="rect">
+            <a:avLst/>
+          </a:prstGeom>
+          <a:noFill/>
+        </p:spPr>
+        <p:txBody>
+          <a:bodyPr wrap="square" anchor="t"/>
+          <a:lstStyle/>
+          <a:p>
+            <a:pPr algn="l"/>
+            <a:r>
+              <a:rPr sz="1300" b="0">
+                <a:solidFill>
+                  <a:srgbClr val="1C2B3A"/>
+                </a:solidFill>
+                <a:latin typeface="Calibri"/>
+              </a:rPr>
+              <a:t>Identifies status and comment changes between successive matrix versions.</a:t>
+            </a:r>
+          </a:p>
+        </p:txBody>
+      </p:sp>
+      <p:sp>
+        <p:nvSpPr>
+          <p:cNvPr id="28" name="Rounded Rectangle 27"/>
+          <p:cNvSpPr/>
+          <p:nvPr/>
+        </p:nvSpPr>
+        <p:spPr>
+          <a:xfrm>
+            <a:off x="7909560" y="3794760"/>
+            <a:ext cx="3566160" cy="2194560"/>
+          </a:xfrm>
+          <a:prstGeom prst="roundRect">
+            <a:avLst>
+              <a:gd name="adj" fmla="val 8000"/>
+            </a:avLst>
+          </a:prstGeom>
+          <a:solidFill>
+            <a:srgbClr val="FFFFFF"/>
+          </a:solidFill>
+          <a:ln w="12700">
+            <a:solidFill>
+              <a:srgbClr val="DDE3EC"/>
+            </a:solidFill>
+          </a:ln>
+        </p:spPr>
+        <p:style>
+          <a:lnRef idx="1">
+            <a:schemeClr val="accent1"/>
+          </a:lnRef>
+          <a:fillRef idx="3">
+            <a:schemeClr val="accent1"/>
+          </a:fillRef>
+          <a:effectRef idx="2">
+            <a:schemeClr val="accent1"/>
+          </a:effectRef>
+          <a:fontRef idx="minor">
+            <a:schemeClr val="lt1"/>
+          </a:fontRef>
+        </p:style>
+        <p:txBody>
+          <a:bodyPr rtlCol="0" anchor="ctr"/>
+          <a:lstStyle/>
+          <a:p>
+            <a:pPr algn="ctr"/>
+          </a:p>
+        </p:txBody>
+      </p:sp>
+      <p:sp>
+        <p:nvSpPr>
+          <p:cNvPr id="29" name="Rectangle 28"/>
+          <p:cNvSpPr/>
+          <p:nvPr/>
+        </p:nvSpPr>
+        <p:spPr>
+          <a:xfrm>
+            <a:off x="7909560" y="3794760"/>
+            <a:ext cx="3566160" cy="91440"/>
+          </a:xfrm>
+          <a:prstGeom prst="rect">
+            <a:avLst/>
+          </a:prstGeom>
+          <a:solidFill>
+            <a:srgbClr val="1D4ED8"/>
+          </a:solidFill>
+          <a:ln>
+            <a:noFill/>
+          </a:ln>
+        </p:spPr>
+        <p:style>
+          <a:lnRef idx="1">
+            <a:schemeClr val="accent1"/>
+          </a:lnRef>
+          <a:fillRef idx="3">
+            <a:schemeClr val="accent1"/>
+          </a:fillRef>
+          <a:effectRef idx="2">
+            <a:schemeClr val="accent1"/>
+          </a:effectRef>
+          <a:fontRef idx="minor">
+            <a:schemeClr val="lt1"/>
+          </a:fontRef>
+        </p:style>
+        <p:txBody>
+          <a:bodyPr rtlCol="0" anchor="ctr"/>
+          <a:lstStyle/>
+          <a:p>
+            <a:pPr algn="ctr"/>
+          </a:p>
+        </p:txBody>
+      </p:sp>
+      <p:sp>
+        <p:nvSpPr>
+          <p:cNvPr id="30" name="TextBox 29"/>
+          <p:cNvSpPr txBox="1"/>
+          <p:nvPr/>
+        </p:nvSpPr>
+        <p:spPr>
+          <a:xfrm>
+            <a:off x="8110728" y="4050792"/>
+            <a:ext cx="3163824" cy="640080"/>
+          </a:xfrm>
+          <a:prstGeom prst="rect">
+            <a:avLst/>
+          </a:prstGeom>
+          <a:noFill/>
+        </p:spPr>
+        <p:txBody>
+          <a:bodyPr wrap="square" anchor="t"/>
+          <a:lstStyle/>
+          <a:p>
+            <a:pPr algn="l"/>
+            <a:r>
+              <a:rPr sz="1500" b="1">
+                <a:solidFill>
+                  <a:srgbClr val="0B2545"/>
+                </a:solidFill>
+                <a:latin typeface="Calibri"/>
+              </a:rPr>
+              <a:t>Evidence location</a:t>
+            </a:r>
+          </a:p>
+        </p:txBody>
+      </p:sp>
+      <p:sp>
+        <p:nvSpPr>
+          <p:cNvPr id="31" name="TextBox 30"/>
+          <p:cNvSpPr txBox="1"/>
+          <p:nvPr/>
+        </p:nvSpPr>
+        <p:spPr>
+          <a:xfrm>
+            <a:off x="8110728" y="4800600"/>
+            <a:ext cx="3163824" cy="1005840"/>
+          </a:xfrm>
+          <a:prstGeom prst="rect">
+            <a:avLst/>
+          </a:prstGeom>
+          <a:noFill/>
+        </p:spPr>
+        <p:txBody>
+          <a:bodyPr wrap="square" anchor="t"/>
+          <a:lstStyle/>
+          <a:p>
+            <a:pPr algn="l"/>
+            <a:r>
+              <a:rPr sz="1300" b="0">
+                <a:solidFill>
+                  <a:srgbClr val="1C2B3A"/>
+                </a:solidFill>
+                <a:latin typeface="Calibri"/>
+              </a:rPr>
+              <a:t>Associates each requirement with the corresponding page or slide in the dossier.</a:t>
+            </a:r>
+          </a:p>
+        </p:txBody>
+      </p:sp>
+      <p:sp>
+        <p:nvSpPr>
+          <p:cNvPr id="32" name="Rectangle 31"/>
           <p:cNvSpPr/>
           <p:nvPr/>
         </p:nvSpPr>
@@ -14630,7 +15996,7 @@
       </p:sp>
       <p:sp>
         <p:nvSpPr>
-          <p:cNvPr id="17" name="TextBox 16"/>
+          <p:cNvPr id="33" name="TextBox 32"/>
           <p:cNvSpPr txBox="1"/>
           <p:nvPr/>
         </p:nvSpPr>
@@ -14656,14 +16022,14 @@
                 </a:solidFill>
                 <a:latin typeface="Calibri"/>
               </a:rPr>
-              <a:t>Khadija Benhamida  ·  Mechatronics Engineering  ·  First meeting</a:t>
-            </a:r>
-          </a:p>
-        </p:txBody>
-      </p:sp>
-      <p:sp>
-        <p:nvSpPr>
-          <p:cNvPr id="18" name="TextBox 17"/>
+              <a:t>Khadija Benhamida  ·  Mechatronics Engineering  ·  Confidential</a:t>
+            </a:r>
+          </a:p>
+        </p:txBody>
+      </p:sp>
+      <p:sp>
+        <p:nvSpPr>
+          <p:cNvPr id="34" name="TextBox 33"/>
           <p:cNvSpPr txBox="1"/>
           <p:nvPr/>
         </p:nvSpPr>
@@ -14689,7 +16055,7 @@
                 </a:solidFill>
                 <a:latin typeface="Calibri"/>
               </a:rPr>
-              <a:t>7  /  13</a:t>
+              <a:t>7  /  14</a:t>
             </a:r>
           </a:p>
         </p:txBody>
@@ -14869,7 +16235,7 @@
                 </a:solidFill>
                 <a:latin typeface="Calibri"/>
               </a:rPr>
-              <a:t>JOBS 3 AND 4 — THE HEART OF THE WORK</a:t>
+              <a:t>PROJECT FUNCTIONS</a:t>
             </a:r>
           </a:p>
         </p:txBody>
@@ -14902,7 +16268,7 @@
                 </a:solidFill>
                 <a:latin typeface="Calibri"/>
               </a:rPr>
-              <a:t>The TDR is the proof. LEON puts the tick next to the proof.</a:t>
+              <a:t>Specification and conformity matrix</a:t>
             </a:r>
           </a:p>
         </p:txBody>
@@ -14935,7 +16301,7 @@
                 </a:solidFill>
                 <a:latin typeface="Calibri"/>
               </a:rPr>
-              <a:t>This is the tab to show in a TDR meeting.</a:t>
+              <a:t>Two analyses available before opening the TDR.</a:t>
             </a:r>
           </a:p>
         </p:txBody>
@@ -14948,122 +16314,8 @@
         </p:nvSpPr>
         <p:spPr>
           <a:xfrm>
-            <a:off x="411480" y="1353312"/>
-            <a:ext cx="11338560" cy="1234440"/>
-          </a:xfrm>
-          <a:prstGeom prst="roundRect">
-            <a:avLst>
-              <a:gd name="adj" fmla="val 8000"/>
-            </a:avLst>
-          </a:prstGeom>
-          <a:solidFill>
-            <a:srgbClr val="FBF3E6"/>
-          </a:solidFill>
-          <a:ln w="12700">
-            <a:solidFill>
-              <a:srgbClr val="9A5B00"/>
-            </a:solidFill>
-          </a:ln>
-        </p:spPr>
-        <p:style>
-          <a:lnRef idx="1">
-            <a:schemeClr val="accent1"/>
-          </a:lnRef>
-          <a:fillRef idx="3">
-            <a:schemeClr val="accent1"/>
-          </a:fillRef>
-          <a:effectRef idx="2">
-            <a:schemeClr val="accent1"/>
-          </a:effectRef>
-          <a:fontRef idx="minor">
-            <a:schemeClr val="lt1"/>
-          </a:fontRef>
-        </p:style>
-        <p:txBody>
-          <a:bodyPr rtlCol="0" anchor="ctr"/>
-          <a:lstStyle/>
-          <a:p>
-            <a:pPr algn="ctr"/>
-          </a:p>
-        </p:txBody>
-      </p:sp>
-      <p:sp>
-        <p:nvSpPr>
-          <p:cNvPr id="9" name="TextBox 8"/>
-          <p:cNvSpPr txBox="1"/>
-          <p:nvPr/>
-        </p:nvSpPr>
-        <p:spPr>
-          <a:xfrm>
-            <a:off x="640080" y="1444752"/>
-            <a:ext cx="10972800" cy="292608"/>
-          </a:xfrm>
-          <a:prstGeom prst="rect">
-            <a:avLst/>
-          </a:prstGeom>
-          <a:noFill/>
-        </p:spPr>
-        <p:txBody>
-          <a:bodyPr wrap="square" anchor="t"/>
-          <a:lstStyle/>
-          <a:p>
-            <a:pPr algn="l"/>
-            <a:r>
-              <a:rPr sz="1400" b="1">
-                <a:solidFill>
-                  <a:srgbClr val="9A5B00"/>
-                </a:solidFill>
-                <a:latin typeface="Calibri"/>
-              </a:rPr>
-              <a:t>A typical catch  —  contrast of the display</a:t>
-            </a:r>
-          </a:p>
-        </p:txBody>
-      </p:sp>
-      <p:sp>
-        <p:nvSpPr>
-          <p:cNvPr id="10" name="TextBox 9"/>
-          <p:cNvSpPr txBox="1"/>
-          <p:nvPr/>
-        </p:nvSpPr>
-        <p:spPr>
-          <a:xfrm>
-            <a:off x="640080" y="1755648"/>
-            <a:ext cx="10972800" cy="658368"/>
-          </a:xfrm>
-          <a:prstGeom prst="rect">
-            <a:avLst/>
-          </a:prstGeom>
-          <a:noFill/>
-        </p:spPr>
-        <p:txBody>
-          <a:bodyPr wrap="square" anchor="t"/>
-          <a:lstStyle/>
-          <a:p>
-            <a:pPr algn="l"/>
-            <a:r>
-              <a:rPr sz="1400" b="0">
-                <a:solidFill>
-                  <a:srgbClr val="1C2B3A"/>
-                </a:solidFill>
-                <a:latin typeface="Calibri"/>
-              </a:rPr>
-              <a:t>Stellantis asks:  contrast ≥ 400:1     ·     Matrix:  OK     ·     TDR slide 14:  380:1
-LEON opens on this kind of incoherence — not on the 200 rows that already match.</a:t>
-            </a:r>
-          </a:p>
-        </p:txBody>
-      </p:sp>
-      <p:sp>
-        <p:nvSpPr>
-          <p:cNvPr id="11" name="Rounded Rectangle 10"/>
-          <p:cNvSpPr/>
-          <p:nvPr/>
-        </p:nvSpPr>
-        <p:spPr>
-          <a:xfrm>
-            <a:off x="411480" y="2761488"/>
-            <a:ext cx="5532120" cy="3520440"/>
+            <a:off x="411480" y="1389888"/>
+            <a:ext cx="5532120" cy="4919472"/>
           </a:xfrm>
           <a:prstGeom prst="roundRect">
             <a:avLst>
@@ -15103,20 +16355,20 @@
       </p:sp>
       <p:sp>
         <p:nvSpPr>
-          <p:cNvPr id="12" name="Rectangle 11"/>
+          <p:cNvPr id="9" name="Rectangle 8"/>
           <p:cNvSpPr/>
           <p:nvPr/>
         </p:nvSpPr>
         <p:spPr>
           <a:xfrm>
-            <a:off x="411480" y="2761488"/>
-            <a:ext cx="73152" cy="3520440"/>
+            <a:off x="411480" y="1389888"/>
+            <a:ext cx="5532120" cy="475488"/>
           </a:xfrm>
           <a:prstGeom prst="rect">
             <a:avLst/>
           </a:prstGeom>
           <a:solidFill>
-            <a:srgbClr val="123061"/>
+            <a:srgbClr val="1D4ED8"/>
           </a:solidFill>
           <a:ln>
             <a:noFill/>
@@ -15146,14 +16398,47 @@
       </p:sp>
       <p:sp>
         <p:nvSpPr>
-          <p:cNvPr id="13" name="TextBox 12"/>
-          <p:cNvSpPr txBox="1"/>
-          <p:nvPr/>
-        </p:nvSpPr>
-        <p:spPr>
-          <a:xfrm>
-            <a:off x="612648" y="2889504"/>
-            <a:ext cx="5221224" cy="347472"/>
+          <p:cNvPr id="10" name="TextBox 9"/>
+          <p:cNvSpPr txBox="1"/>
+          <p:nvPr/>
+        </p:nvSpPr>
+        <p:spPr>
+          <a:xfrm>
+            <a:off x="594360" y="1444752"/>
+            <a:ext cx="5212080" cy="384048"/>
+          </a:xfrm>
+          <a:prstGeom prst="rect">
+            <a:avLst/>
+          </a:prstGeom>
+          <a:noFill/>
+        </p:spPr>
+        <p:txBody>
+          <a:bodyPr wrap="square" anchor="ctr"/>
+          <a:lstStyle/>
+          <a:p>
+            <a:pPr algn="l"/>
+            <a:r>
+              <a:rPr sz="1800" b="1">
+                <a:solidFill>
+                  <a:srgbClr val="FFFFFF"/>
+                </a:solidFill>
+                <a:latin typeface="Calibri"/>
+              </a:rPr>
+              <a:t>Specification validation</a:t>
+            </a:r>
+          </a:p>
+        </p:txBody>
+      </p:sp>
+      <p:sp>
+        <p:nvSpPr>
+          <p:cNvPr id="11" name="TextBox 10"/>
+          <p:cNvSpPr txBox="1"/>
+          <p:nvPr/>
+        </p:nvSpPr>
+        <p:spPr>
+          <a:xfrm>
+            <a:off x="640080" y="2011680"/>
+            <a:ext cx="5074920" cy="4023360"/>
           </a:xfrm>
           <a:prstGeom prst="rect">
             <a:avLst/>
@@ -15166,63 +16451,33 @@
           <a:p>
             <a:pPr algn="l"/>
             <a:r>
-              <a:rPr sz="1600" b="1">
-                <a:solidFill>
-                  <a:srgbClr val="0B2545"/>
-                </a:solidFill>
-                <a:latin typeface="Calibri"/>
-              </a:rPr>
-              <a:t>🔎  Matrix ↔ TDR</a:t>
-            </a:r>
-          </a:p>
-        </p:txBody>
-      </p:sp>
-      <p:sp>
-        <p:nvSpPr>
-          <p:cNvPr id="14" name="TextBox 13"/>
-          <p:cNvSpPr txBox="1"/>
-          <p:nvPr/>
-        </p:nvSpPr>
-        <p:spPr>
-          <a:xfrm>
-            <a:off x="612648" y="3218688"/>
-            <a:ext cx="5221224" cy="2935224"/>
-          </a:xfrm>
-          <a:prstGeom prst="rect">
-            <a:avLst/>
-          </a:prstGeom>
-          <a:noFill/>
-        </p:spPr>
-        <p:txBody>
-          <a:bodyPr wrap="square" anchor="t"/>
-          <a:lstStyle/>
-          <a:p>
-            <a:pPr algn="l"/>
-            <a:r>
               <a:rPr sz="1300" b="0">
                 <a:solidFill>
                   <a:srgbClr val="1C2B3A"/>
                 </a:solidFill>
                 <a:latin typeface="Calibri"/>
               </a:rPr>
-              <a:t>Upload the matrix and the supplier dossier (PPT / PDF / Word).
-For each requirement LEON writes four lines:
-what we asked · what they ticked · what the TDR says · which page.
-The engineer can confirm, correct or ask for real proof. Nothing is auto-accepted.</a:t>
-            </a:r>
-          </a:p>
-        </p:txBody>
-      </p:sp>
-      <p:sp>
-        <p:nvSpPr>
-          <p:cNvPr id="15" name="Rounded Rectangle 14"/>
+              <a:t>The CTS file is uploaded (Word, PDF or text).
+LEON verifies:
+• presence of mandatory sections (Purpose, Scope, Requirements…);
+• remaining template placeholders (&lt;&lt;name&gt;&gt;, TBD, XXX);
+• requirement identifiers and binding language (“shall”).
+Output: a verdict (compliant / acceptable / not ready) and a Word report.
+The empty conformity matrix can be generated from the specification, so that the supplier does not recreate the requirement list.</a:t>
+            </a:r>
+          </a:p>
+        </p:txBody>
+      </p:sp>
+      <p:sp>
+        <p:nvSpPr>
+          <p:cNvPr id="12" name="Rounded Rectangle 11"/>
           <p:cNvSpPr/>
           <p:nvPr/>
         </p:nvSpPr>
         <p:spPr>
           <a:xfrm>
-            <a:off x="6172200" y="2761488"/>
-            <a:ext cx="5532120" cy="3520440"/>
+            <a:off x="6172200" y="1389888"/>
+            <a:ext cx="5532120" cy="4919472"/>
           </a:xfrm>
           <a:prstGeom prst="roundRect">
             <a:avLst>
@@ -15262,20 +16517,20 @@
       </p:sp>
       <p:sp>
         <p:nvSpPr>
-          <p:cNvPr id="16" name="Rectangle 15"/>
+          <p:cNvPr id="13" name="Rectangle 12"/>
           <p:cNvSpPr/>
           <p:nvPr/>
         </p:nvSpPr>
         <p:spPr>
           <a:xfrm>
-            <a:off x="6172200" y="2761488"/>
-            <a:ext cx="73152" cy="3520440"/>
+            <a:off x="6172200" y="1389888"/>
+            <a:ext cx="5532120" cy="475488"/>
           </a:xfrm>
           <a:prstGeom prst="rect">
             <a:avLst/>
           </a:prstGeom>
           <a:solidFill>
-            <a:srgbClr val="157347"/>
+            <a:srgbClr val="9A5B00"/>
           </a:solidFill>
           <a:ln>
             <a:noFill/>
@@ -15305,14 +16560,47 @@
       </p:sp>
       <p:sp>
         <p:nvSpPr>
-          <p:cNvPr id="17" name="TextBox 16"/>
-          <p:cNvSpPr txBox="1"/>
-          <p:nvPr/>
-        </p:nvSpPr>
-        <p:spPr>
-          <a:xfrm>
-            <a:off x="6373368" y="2889504"/>
-            <a:ext cx="5221224" cy="347472"/>
+          <p:cNvPr id="14" name="TextBox 13"/>
+          <p:cNvSpPr txBox="1"/>
+          <p:nvPr/>
+        </p:nvSpPr>
+        <p:spPr>
+          <a:xfrm>
+            <a:off x="6355080" y="1444752"/>
+            <a:ext cx="5212080" cy="384048"/>
+          </a:xfrm>
+          <a:prstGeom prst="rect">
+            <a:avLst/>
+          </a:prstGeom>
+          <a:noFill/>
+        </p:spPr>
+        <p:txBody>
+          <a:bodyPr wrap="square" anchor="ctr"/>
+          <a:lstStyle/>
+          <a:p>
+            <a:pPr algn="l"/>
+            <a:r>
+              <a:rPr sz="1800" b="1">
+                <a:solidFill>
+                  <a:srgbClr val="FFFFFF"/>
+                </a:solidFill>
+                <a:latin typeface="Calibri"/>
+              </a:rPr>
+              <a:t>Conformity matrix analysis</a:t>
+            </a:r>
+          </a:p>
+        </p:txBody>
+      </p:sp>
+      <p:sp>
+        <p:nvSpPr>
+          <p:cNvPr id="15" name="TextBox 14"/>
+          <p:cNvSpPr txBox="1"/>
+          <p:nvPr/>
+        </p:nvSpPr>
+        <p:spPr>
+          <a:xfrm>
+            <a:off x="6400800" y="2011680"/>
+            <a:ext cx="5074920" cy="4023360"/>
           </a:xfrm>
           <a:prstGeom prst="rect">
             <a:avLst/>
@@ -15325,55 +16613,25 @@
           <a:p>
             <a:pPr algn="l"/>
             <a:r>
-              <a:rPr sz="1600" b="1">
-                <a:solidFill>
-                  <a:srgbClr val="0B2545"/>
-                </a:solidFill>
-                <a:latin typeface="Calibri"/>
-              </a:rPr>
-              <a:t>🏁  TDR Benchmark</a:t>
-            </a:r>
-          </a:p>
-        </p:txBody>
-      </p:sp>
-      <p:sp>
-        <p:nvSpPr>
-          <p:cNvPr id="18" name="TextBox 17"/>
-          <p:cNvSpPr txBox="1"/>
-          <p:nvPr/>
-        </p:nvSpPr>
-        <p:spPr>
-          <a:xfrm>
-            <a:off x="6373368" y="3218688"/>
-            <a:ext cx="5221224" cy="2935224"/>
-          </a:xfrm>
-          <a:prstGeom prst="rect">
-            <a:avLst/>
-          </a:prstGeom>
-          <a:noFill/>
-        </p:spPr>
-        <p:txBody>
-          <a:bodyPr wrap="square" anchor="t"/>
-          <a:lstStyle/>
-          <a:p>
-            <a:pPr algn="l"/>
-            <a:r>
               <a:rPr sz="1300" b="0">
                 <a:solidFill>
                   <a:srgbClr val="1C2B3A"/>
                 </a:solidFill>
                 <a:latin typeface="Calibri"/>
               </a:rPr>
-              <a:t>Several suppliers, several technical files — no prices, only the technique.
-LEON lines them up on the same topics: mechanics, display, electronics, safety, software, testing, industrialisation…
-You see strengths, gaps and open questions, then you still pick the partner.</a:t>
-            </a:r>
-          </a:p>
-        </p:txBody>
-      </p:sp>
-      <p:sp>
-        <p:nvSpPr>
-          <p:cNvPr id="19" name="Rectangle 18"/>
+              <a:t>The supplier matrix is uploaded (Excel / ODS), including files with renamed columns.
+LEON counts OK / NOK / NA statuses and presents the full requirement list.
+Each OK comment is reviewed. A point of attention is raised when:
+• the comment contradicts the status;
+• conformity is partial or still pending.
+Output: a colour-coded Excel report (green / red / grey) for the meeting.</a:t>
+            </a:r>
+          </a:p>
+        </p:txBody>
+      </p:sp>
+      <p:sp>
+        <p:nvSpPr>
+          <p:cNvPr id="16" name="Rectangle 15"/>
           <p:cNvSpPr/>
           <p:nvPr/>
         </p:nvSpPr>
@@ -15416,7 +16674,7 @@
       </p:sp>
       <p:sp>
         <p:nvSpPr>
-          <p:cNvPr id="20" name="TextBox 19"/>
+          <p:cNvPr id="17" name="TextBox 16"/>
           <p:cNvSpPr txBox="1"/>
           <p:nvPr/>
         </p:nvSpPr>
@@ -15442,14 +16700,14 @@
                 </a:solidFill>
                 <a:latin typeface="Calibri"/>
               </a:rPr>
-              <a:t>Khadija Benhamida  ·  Mechatronics Engineering  ·  First meeting</a:t>
-            </a:r>
-          </a:p>
-        </p:txBody>
-      </p:sp>
-      <p:sp>
-        <p:nvSpPr>
-          <p:cNvPr id="21" name="TextBox 20"/>
+              <a:t>Khadija Benhamida  ·  Mechatronics Engineering  ·  Confidential</a:t>
+            </a:r>
+          </a:p>
+        </p:txBody>
+      </p:sp>
+      <p:sp>
+        <p:nvSpPr>
+          <p:cNvPr id="18" name="TextBox 17"/>
           <p:cNvSpPr txBox="1"/>
           <p:nvPr/>
         </p:nvSpPr>
@@ -15475,7 +16733,7 @@
                 </a:solidFill>
                 <a:latin typeface="Calibri"/>
               </a:rPr>
-              <a:t>8  /  13</a:t>
+              <a:t>8  /  14</a:t>
             </a:r>
           </a:p>
         </p:txBody>
@@ -15655,7 +16913,7 @@
                 </a:solidFill>
                 <a:latin typeface="Calibri"/>
               </a:rPr>
-              <a:t>WHAT I HAVE DELIVERED SO FAR</a:t>
+              <a:t>PROJECT FUNCTIONS</a:t>
             </a:r>
           </a:p>
         </p:txBody>
@@ -15688,7 +16946,7 @@
                 </a:solidFill>
                 <a:latin typeface="Calibri"/>
               </a:rPr>
-              <a:t>LEON prepares the review. People remain in charge.</a:t>
+              <a:t>Matrix versus TDR, and supplier comparison</a:t>
             </a:r>
           </a:p>
         </p:txBody>
@@ -15721,7 +16979,7 @@
                 </a:solidFill>
                 <a:latin typeface="Calibri"/>
               </a:rPr>
-              <a:t>These are the points I have been working on — a first reading in minutes, so the meeting is about the real issues.</a:t>
+              <a:t>The TDR is the evidence. LEON compares the declaration with that evidence.</a:t>
             </a:r>
           </a:p>
         </p:txBody>
@@ -15734,8 +16992,122 @@
         </p:nvSpPr>
         <p:spPr>
           <a:xfrm>
-            <a:off x="457200" y="1371600"/>
-            <a:ext cx="11247120" cy="960120"/>
+            <a:off x="411480" y="1353312"/>
+            <a:ext cx="11338560" cy="1234440"/>
+          </a:xfrm>
+          <a:prstGeom prst="roundRect">
+            <a:avLst>
+              <a:gd name="adj" fmla="val 8000"/>
+            </a:avLst>
+          </a:prstGeom>
+          <a:solidFill>
+            <a:srgbClr val="FBF3E6"/>
+          </a:solidFill>
+          <a:ln w="12700">
+            <a:solidFill>
+              <a:srgbClr val="9A5B00"/>
+            </a:solidFill>
+          </a:ln>
+        </p:spPr>
+        <p:style>
+          <a:lnRef idx="1">
+            <a:schemeClr val="accent1"/>
+          </a:lnRef>
+          <a:fillRef idx="3">
+            <a:schemeClr val="accent1"/>
+          </a:fillRef>
+          <a:effectRef idx="2">
+            <a:schemeClr val="accent1"/>
+          </a:effectRef>
+          <a:fontRef idx="minor">
+            <a:schemeClr val="lt1"/>
+          </a:fontRef>
+        </p:style>
+        <p:txBody>
+          <a:bodyPr rtlCol="0" anchor="ctr"/>
+          <a:lstStyle/>
+          <a:p>
+            <a:pPr algn="ctr"/>
+          </a:p>
+        </p:txBody>
+      </p:sp>
+      <p:sp>
+        <p:nvSpPr>
+          <p:cNvPr id="9" name="TextBox 8"/>
+          <p:cNvSpPr txBox="1"/>
+          <p:nvPr/>
+        </p:nvSpPr>
+        <p:spPr>
+          <a:xfrm>
+            <a:off x="640080" y="1444752"/>
+            <a:ext cx="10972800" cy="292608"/>
+          </a:xfrm>
+          <a:prstGeom prst="rect">
+            <a:avLst/>
+          </a:prstGeom>
+          <a:noFill/>
+        </p:spPr>
+        <p:txBody>
+          <a:bodyPr wrap="square" anchor="t"/>
+          <a:lstStyle/>
+          <a:p>
+            <a:pPr algn="l"/>
+            <a:r>
+              <a:rPr sz="1400" b="1">
+                <a:solidFill>
+                  <a:srgbClr val="9A5B00"/>
+                </a:solidFill>
+                <a:latin typeface="Calibri"/>
+              </a:rPr>
+              <a:t>Example of inconsistency  —  display contrast</a:t>
+            </a:r>
+          </a:p>
+        </p:txBody>
+      </p:sp>
+      <p:sp>
+        <p:nvSpPr>
+          <p:cNvPr id="10" name="TextBox 9"/>
+          <p:cNvSpPr txBox="1"/>
+          <p:nvPr/>
+        </p:nvSpPr>
+        <p:spPr>
+          <a:xfrm>
+            <a:off x="640080" y="1755648"/>
+            <a:ext cx="10972800" cy="658368"/>
+          </a:xfrm>
+          <a:prstGeom prst="rect">
+            <a:avLst/>
+          </a:prstGeom>
+          <a:noFill/>
+        </p:spPr>
+        <p:txBody>
+          <a:bodyPr wrap="square" anchor="t"/>
+          <a:lstStyle/>
+          <a:p>
+            <a:pPr algn="l"/>
+            <a:r>
+              <a:rPr sz="1400" b="0">
+                <a:solidFill>
+                  <a:srgbClr val="1C2B3A"/>
+                </a:solidFill>
+                <a:latin typeface="Calibri"/>
+              </a:rPr>
+              <a:t>Requirement: contrast ≥ 400:1     ·     Matrix: OK     ·     TDR, slide 14: 380:1
+LEON presents this type of inconsistency first. Consistent requirements are not listed by default.</a:t>
+            </a:r>
+          </a:p>
+        </p:txBody>
+      </p:sp>
+      <p:sp>
+        <p:nvSpPr>
+          <p:cNvPr id="11" name="Rounded Rectangle 10"/>
+          <p:cNvSpPr/>
+          <p:nvPr/>
+        </p:nvSpPr>
+        <p:spPr>
+          <a:xfrm>
+            <a:off x="411480" y="2761488"/>
+            <a:ext cx="5532120" cy="3520440"/>
           </a:xfrm>
           <a:prstGeom prst="roundRect">
             <a:avLst>
@@ -15775,20 +17147,20 @@
       </p:sp>
       <p:sp>
         <p:nvSpPr>
-          <p:cNvPr id="9" name="Rectangle 8"/>
+          <p:cNvPr id="12" name="Rectangle 11"/>
           <p:cNvSpPr/>
           <p:nvPr/>
         </p:nvSpPr>
         <p:spPr>
           <a:xfrm>
-            <a:off x="457200" y="1371600"/>
-            <a:ext cx="109728" cy="960120"/>
+            <a:off x="411480" y="2761488"/>
+            <a:ext cx="73152" cy="3520440"/>
           </a:xfrm>
           <a:prstGeom prst="rect">
             <a:avLst/>
           </a:prstGeom>
           <a:solidFill>
-            <a:srgbClr val="157347"/>
+            <a:srgbClr val="123061"/>
           </a:solidFill>
           <a:ln>
             <a:noFill/>
@@ -15818,14 +17190,14 @@
       </p:sp>
       <p:sp>
         <p:nvSpPr>
-          <p:cNvPr id="10" name="TextBox 9"/>
-          <p:cNvSpPr txBox="1"/>
-          <p:nvPr/>
-        </p:nvSpPr>
-        <p:spPr>
-          <a:xfrm>
-            <a:off x="777240" y="1481328"/>
-            <a:ext cx="10698480" cy="329184"/>
+          <p:cNvPr id="13" name="TextBox 12"/>
+          <p:cNvSpPr txBox="1"/>
+          <p:nvPr/>
+        </p:nvSpPr>
+        <p:spPr>
+          <a:xfrm>
+            <a:off x="612648" y="2889504"/>
+            <a:ext cx="5221224" cy="347472"/>
           </a:xfrm>
           <a:prstGeom prst="rect">
             <a:avLst/>
@@ -15844,21 +17216,21 @@
                 </a:solidFill>
                 <a:latin typeface="Calibri"/>
               </a:rPr>
-              <a:t>Drop files in a browser</a:t>
-            </a:r>
-          </a:p>
-        </p:txBody>
-      </p:sp>
-      <p:sp>
-        <p:nvSpPr>
-          <p:cNvPr id="11" name="TextBox 10"/>
-          <p:cNvSpPr txBox="1"/>
-          <p:nvPr/>
-        </p:nvSpPr>
-        <p:spPr>
-          <a:xfrm>
-            <a:off x="777240" y="1810512"/>
-            <a:ext cx="10698480" cy="402336"/>
+              <a:t>Matrix ↔ TDR</a:t>
+            </a:r>
+          </a:p>
+        </p:txBody>
+      </p:sp>
+      <p:sp>
+        <p:nvSpPr>
+          <p:cNvPr id="14" name="TextBox 13"/>
+          <p:cNvSpPr txBox="1"/>
+          <p:nvPr/>
+        </p:nvSpPr>
+        <p:spPr>
+          <a:xfrm>
+            <a:off x="612648" y="3218688"/>
+            <a:ext cx="5221224" cy="2935224"/>
           </a:xfrm>
           <a:prstGeom prst="rect">
             <a:avLst/>
@@ -15871,27 +17243,29 @@
           <a:p>
             <a:pPr algn="l"/>
             <a:r>
-              <a:rPr sz="1400" b="0">
+              <a:rPr sz="1300" b="0">
                 <a:solidFill>
                   <a:srgbClr val="1C2B3A"/>
                 </a:solidFill>
                 <a:latin typeface="Calibri"/>
               </a:rPr>
-              <a:t>Spec, matrix, TDR. No software to install for the reviewer.</a:t>
-            </a:r>
-          </a:p>
-        </p:txBody>
-      </p:sp>
-      <p:sp>
-        <p:nvSpPr>
-          <p:cNvPr id="12" name="Rounded Rectangle 11"/>
+              <a:t>The matrix and the TDR (PowerPoint, PDF or Word) are uploaded together.
+For each requirement, four elements are displayed: the Stellantis requirement, the matrix declaration, the TDR statement, and the source page or slide.
+The engineer confirms, corrects or requests additional evidence. No result is accepted automatically.</a:t>
+            </a:r>
+          </a:p>
+        </p:txBody>
+      </p:sp>
+      <p:sp>
+        <p:nvSpPr>
+          <p:cNvPr id="15" name="Rounded Rectangle 14"/>
           <p:cNvSpPr/>
           <p:nvPr/>
         </p:nvSpPr>
         <p:spPr>
           <a:xfrm>
-            <a:off x="457200" y="2423160"/>
-            <a:ext cx="11247120" cy="960120"/>
+            <a:off x="6172200" y="2761488"/>
+            <a:ext cx="5532120" cy="3520440"/>
           </a:xfrm>
           <a:prstGeom prst="roundRect">
             <a:avLst>
@@ -15931,20 +17305,20 @@
       </p:sp>
       <p:sp>
         <p:nvSpPr>
-          <p:cNvPr id="13" name="Rectangle 12"/>
+          <p:cNvPr id="16" name="Rectangle 15"/>
           <p:cNvSpPr/>
           <p:nvPr/>
         </p:nvSpPr>
         <p:spPr>
           <a:xfrm>
-            <a:off x="457200" y="2423160"/>
-            <a:ext cx="109728" cy="960120"/>
+            <a:off x="6172200" y="2761488"/>
+            <a:ext cx="73152" cy="3520440"/>
           </a:xfrm>
           <a:prstGeom prst="rect">
             <a:avLst/>
           </a:prstGeom>
           <a:solidFill>
-            <a:srgbClr val="1D4ED8"/>
+            <a:srgbClr val="157347"/>
           </a:solidFill>
           <a:ln>
             <a:noFill/>
@@ -15974,14 +17348,14 @@
       </p:sp>
       <p:sp>
         <p:nvSpPr>
-          <p:cNvPr id="14" name="TextBox 13"/>
-          <p:cNvSpPr txBox="1"/>
-          <p:nvPr/>
-        </p:nvSpPr>
-        <p:spPr>
-          <a:xfrm>
-            <a:off x="777240" y="2532888"/>
-            <a:ext cx="10698480" cy="329184"/>
+          <p:cNvPr id="17" name="TextBox 16"/>
+          <p:cNvSpPr txBox="1"/>
+          <p:nvPr/>
+        </p:nvSpPr>
+        <p:spPr>
+          <a:xfrm>
+            <a:off x="6373368" y="2889504"/>
+            <a:ext cx="5221224" cy="347472"/>
           </a:xfrm>
           <a:prstGeom prst="rect">
             <a:avLst/>
@@ -16000,21 +17374,21 @@
                 </a:solidFill>
                 <a:latin typeface="Calibri"/>
               </a:rPr>
-              <a:t>See mismatches first</a:t>
-            </a:r>
-          </a:p>
-        </p:txBody>
-      </p:sp>
-      <p:sp>
-        <p:nvSpPr>
-          <p:cNvPr id="15" name="TextBox 14"/>
-          <p:cNvSpPr txBox="1"/>
-          <p:nvPr/>
-        </p:nvSpPr>
-        <p:spPr>
-          <a:xfrm>
-            <a:off x="777240" y="2862072"/>
-            <a:ext cx="10698480" cy="402336"/>
+              <a:t>TDR benchmark</a:t>
+            </a:r>
+          </a:p>
+        </p:txBody>
+      </p:sp>
+      <p:sp>
+        <p:nvSpPr>
+          <p:cNvPr id="18" name="TextBox 17"/>
+          <p:cNvSpPr txBox="1"/>
+          <p:nvPr/>
+        </p:nvSpPr>
+        <p:spPr>
+          <a:xfrm>
+            <a:off x="6373368" y="3218688"/>
+            <a:ext cx="5221224" cy="2935224"/>
           </a:xfrm>
           <a:prstGeom prst="rect">
             <a:avLst/>
@@ -16027,365 +17401,22 @@
           <a:p>
             <a:pPr algn="l"/>
             <a:r>
-              <a:rPr sz="1400" b="0">
+              <a:rPr sz="1300" b="0">
                 <a:solidFill>
                   <a:srgbClr val="1C2B3A"/>
                 </a:solidFill>
                 <a:latin typeface="Calibri"/>
               </a:rPr>
-              <a:t>Fake OK, missing proof, wrong numbers, version changes.</a:t>
-            </a:r>
-          </a:p>
-        </p:txBody>
-      </p:sp>
-      <p:sp>
-        <p:nvSpPr>
-          <p:cNvPr id="16" name="Rounded Rectangle 15"/>
-          <p:cNvSpPr/>
-          <p:nvPr/>
-        </p:nvSpPr>
-        <p:spPr>
-          <a:xfrm>
-            <a:off x="457200" y="3474720"/>
-            <a:ext cx="11247120" cy="960120"/>
-          </a:xfrm>
-          <a:prstGeom prst="roundRect">
-            <a:avLst>
-              <a:gd name="adj" fmla="val 8000"/>
-            </a:avLst>
-          </a:prstGeom>
-          <a:solidFill>
-            <a:srgbClr val="FFFFFF"/>
-          </a:solidFill>
-          <a:ln w="12700">
-            <a:solidFill>
-              <a:srgbClr val="DDE3EC"/>
-            </a:solidFill>
-          </a:ln>
-        </p:spPr>
-        <p:style>
-          <a:lnRef idx="1">
-            <a:schemeClr val="accent1"/>
-          </a:lnRef>
-          <a:fillRef idx="3">
-            <a:schemeClr val="accent1"/>
-          </a:fillRef>
-          <a:effectRef idx="2">
-            <a:schemeClr val="accent1"/>
-          </a:effectRef>
-          <a:fontRef idx="minor">
-            <a:schemeClr val="lt1"/>
-          </a:fontRef>
-        </p:style>
-        <p:txBody>
-          <a:bodyPr rtlCol="0" anchor="ctr"/>
-          <a:lstStyle/>
-          <a:p>
-            <a:pPr algn="ctr"/>
-          </a:p>
-        </p:txBody>
-      </p:sp>
-      <p:sp>
-        <p:nvSpPr>
-          <p:cNvPr id="17" name="Rectangle 16"/>
-          <p:cNvSpPr/>
-          <p:nvPr/>
-        </p:nvSpPr>
-        <p:spPr>
-          <a:xfrm>
-            <a:off x="457200" y="3474720"/>
-            <a:ext cx="109728" cy="960120"/>
-          </a:xfrm>
-          <a:prstGeom prst="rect">
-            <a:avLst/>
-          </a:prstGeom>
-          <a:solidFill>
-            <a:srgbClr val="9A5B00"/>
-          </a:solidFill>
-          <a:ln>
-            <a:noFill/>
-          </a:ln>
-        </p:spPr>
-        <p:style>
-          <a:lnRef idx="1">
-            <a:schemeClr val="accent1"/>
-          </a:lnRef>
-          <a:fillRef idx="3">
-            <a:schemeClr val="accent1"/>
-          </a:fillRef>
-          <a:effectRef idx="2">
-            <a:schemeClr val="accent1"/>
-          </a:effectRef>
-          <a:fontRef idx="minor">
-            <a:schemeClr val="lt1"/>
-          </a:fontRef>
-        </p:style>
-        <p:txBody>
-          <a:bodyPr rtlCol="0" anchor="ctr"/>
-          <a:lstStyle/>
-          <a:p>
-            <a:pPr algn="ctr"/>
-          </a:p>
-        </p:txBody>
-      </p:sp>
-      <p:sp>
-        <p:nvSpPr>
-          <p:cNvPr id="18" name="TextBox 17"/>
-          <p:cNvSpPr txBox="1"/>
-          <p:nvPr/>
-        </p:nvSpPr>
-        <p:spPr>
-          <a:xfrm>
-            <a:off x="777240" y="3584448"/>
-            <a:ext cx="10698480" cy="329184"/>
-          </a:xfrm>
-          <a:prstGeom prst="rect">
-            <a:avLst/>
-          </a:prstGeom>
-          <a:noFill/>
-        </p:spPr>
-        <p:txBody>
-          <a:bodyPr wrap="square" anchor="t"/>
-          <a:lstStyle/>
-          <a:p>
-            <a:pPr algn="l"/>
-            <a:r>
-              <a:rPr sz="1600" b="1">
-                <a:solidFill>
-                  <a:srgbClr val="0B2545"/>
-                </a:solidFill>
-                <a:latin typeface="Calibri"/>
-              </a:rPr>
-              <a:t>Leave with an Excel</a:t>
-            </a:r>
-          </a:p>
-        </p:txBody>
-      </p:sp>
-      <p:sp>
-        <p:nvSpPr>
-          <p:cNvPr id="19" name="TextBox 18"/>
-          <p:cNvSpPr txBox="1"/>
-          <p:nvPr/>
-        </p:nvSpPr>
-        <p:spPr>
-          <a:xfrm>
-            <a:off x="777240" y="3913632"/>
-            <a:ext cx="10698480" cy="402336"/>
-          </a:xfrm>
-          <a:prstGeom prst="rect">
-            <a:avLst/>
-          </a:prstGeom>
-          <a:noFill/>
-        </p:spPr>
-        <p:txBody>
-          <a:bodyPr wrap="square" anchor="t"/>
-          <a:lstStyle/>
-          <a:p>
-            <a:pPr algn="l"/>
-            <a:r>
-              <a:rPr sz="1400" b="0">
-                <a:solidFill>
-                  <a:srgbClr val="1C2B3A"/>
-                </a:solidFill>
-                <a:latin typeface="Calibri"/>
-              </a:rPr>
-              <a:t>Colour-coded report you can send to quality, purchasing or the supplier.</a:t>
-            </a:r>
-          </a:p>
-        </p:txBody>
-      </p:sp>
-      <p:sp>
-        <p:nvSpPr>
-          <p:cNvPr id="20" name="Rounded Rectangle 19"/>
-          <p:cNvSpPr/>
-          <p:nvPr/>
-        </p:nvSpPr>
-        <p:spPr>
-          <a:xfrm>
-            <a:off x="457200" y="4526280"/>
-            <a:ext cx="11247120" cy="960120"/>
-          </a:xfrm>
-          <a:prstGeom prst="roundRect">
-            <a:avLst>
-              <a:gd name="adj" fmla="val 8000"/>
-            </a:avLst>
-          </a:prstGeom>
-          <a:solidFill>
-            <a:srgbClr val="FFFFFF"/>
-          </a:solidFill>
-          <a:ln w="12700">
-            <a:solidFill>
-              <a:srgbClr val="DDE3EC"/>
-            </a:solidFill>
-          </a:ln>
-        </p:spPr>
-        <p:style>
-          <a:lnRef idx="1">
-            <a:schemeClr val="accent1"/>
-          </a:lnRef>
-          <a:fillRef idx="3">
-            <a:schemeClr val="accent1"/>
-          </a:fillRef>
-          <a:effectRef idx="2">
-            <a:schemeClr val="accent1"/>
-          </a:effectRef>
-          <a:fontRef idx="minor">
-            <a:schemeClr val="lt1"/>
-          </a:fontRef>
-        </p:style>
-        <p:txBody>
-          <a:bodyPr rtlCol="0" anchor="ctr"/>
-          <a:lstStyle/>
-          <a:p>
-            <a:pPr algn="ctr"/>
-          </a:p>
-        </p:txBody>
-      </p:sp>
-      <p:sp>
-        <p:nvSpPr>
-          <p:cNvPr id="21" name="Rectangle 20"/>
-          <p:cNvSpPr/>
-          <p:nvPr/>
-        </p:nvSpPr>
-        <p:spPr>
-          <a:xfrm>
-            <a:off x="457200" y="4526280"/>
-            <a:ext cx="109728" cy="960120"/>
-          </a:xfrm>
-          <a:prstGeom prst="rect">
-            <a:avLst/>
-          </a:prstGeom>
-          <a:solidFill>
-            <a:srgbClr val="123061"/>
-          </a:solidFill>
-          <a:ln>
-            <a:noFill/>
-          </a:ln>
-        </p:spPr>
-        <p:style>
-          <a:lnRef idx="1">
-            <a:schemeClr val="accent1"/>
-          </a:lnRef>
-          <a:fillRef idx="3">
-            <a:schemeClr val="accent1"/>
-          </a:fillRef>
-          <a:effectRef idx="2">
-            <a:schemeClr val="accent1"/>
-          </a:effectRef>
-          <a:fontRef idx="minor">
-            <a:schemeClr val="lt1"/>
-          </a:fontRef>
-        </p:style>
-        <p:txBody>
-          <a:bodyPr rtlCol="0" anchor="ctr"/>
-          <a:lstStyle/>
-          <a:p>
-            <a:pPr algn="ctr"/>
-          </a:p>
-        </p:txBody>
-      </p:sp>
-      <p:sp>
-        <p:nvSpPr>
-          <p:cNvPr id="22" name="TextBox 21"/>
-          <p:cNvSpPr txBox="1"/>
-          <p:nvPr/>
-        </p:nvSpPr>
-        <p:spPr>
-          <a:xfrm>
-            <a:off x="777240" y="4636008"/>
-            <a:ext cx="10698480" cy="329184"/>
-          </a:xfrm>
-          <a:prstGeom prst="rect">
-            <a:avLst/>
-          </a:prstGeom>
-          <a:noFill/>
-        </p:spPr>
-        <p:txBody>
-          <a:bodyPr wrap="square" anchor="t"/>
-          <a:lstStyle/>
-          <a:p>
-            <a:pPr algn="l"/>
-            <a:r>
-              <a:rPr sz="1600" b="1">
-                <a:solidFill>
-                  <a:srgbClr val="0B2545"/>
-                </a:solidFill>
-                <a:latin typeface="Calibri"/>
-              </a:rPr>
-              <a:t>Never a certificate</a:t>
-            </a:r>
-          </a:p>
-        </p:txBody>
-      </p:sp>
-      <p:sp>
-        <p:nvSpPr>
-          <p:cNvPr id="23" name="TextBox 22"/>
-          <p:cNvSpPr txBox="1"/>
-          <p:nvPr/>
-        </p:nvSpPr>
-        <p:spPr>
-          <a:xfrm>
-            <a:off x="777240" y="4965192"/>
-            <a:ext cx="10698480" cy="402336"/>
-          </a:xfrm>
-          <a:prstGeom prst="rect">
-            <a:avLst/>
-          </a:prstGeom>
-          <a:noFill/>
-        </p:spPr>
-        <p:txBody>
-          <a:bodyPr wrap="square" anchor="t"/>
-          <a:lstStyle/>
-          <a:p>
-            <a:pPr algn="l"/>
-            <a:r>
-              <a:rPr sz="1400" b="0">
-                <a:solidFill>
-                  <a:srgbClr val="1C2B3A"/>
-                </a:solidFill>
-                <a:latin typeface="Calibri"/>
-              </a:rPr>
-              <a:t>If LEON finds nothing, that is not a stamp of approval. An engineer still signs.</a:t>
-            </a:r>
-          </a:p>
-        </p:txBody>
-      </p:sp>
-      <p:sp>
-        <p:nvSpPr>
-          <p:cNvPr id="24" name="TextBox 23"/>
-          <p:cNvSpPr txBox="1"/>
-          <p:nvPr/>
-        </p:nvSpPr>
-        <p:spPr>
-          <a:xfrm>
-            <a:off x="457200" y="5623560"/>
-            <a:ext cx="11247120" cy="777240"/>
-          </a:xfrm>
-          <a:prstGeom prst="rect">
-            <a:avLst/>
-          </a:prstGeom>
-          <a:noFill/>
-        </p:spPr>
-        <p:txBody>
-          <a:bodyPr wrap="square" anchor="t"/>
-          <a:lstStyle/>
-          <a:p>
-            <a:pPr algn="l"/>
-            <a:r>
-              <a:rPr sz="1500" b="1">
-                <a:solidFill>
-                  <a:srgbClr val="0B2545"/>
-                </a:solidFill>
-                <a:latin typeface="Calibri"/>
-              </a:rPr>
-              <a:t>In short: we are building a careful reader for the spec, the matrix and the TDR — so Stellantis walks into supplier reviews with the contradictions already on the table.</a:t>
-            </a:r>
-          </a:p>
-        </p:txBody>
-      </p:sp>
-      <p:sp>
-        <p:nvSpPr>
-          <p:cNvPr id="25" name="Rectangle 24"/>
+              <a:t>Several supplier dossiers are compared on the same technical domains (mechanics, display, electronics, safety, software, validation, industrialisation).
+Commercial content is excluded.
+The output is a structured comparison of strengths, gaps and open points. Supplier selection remains a human decision.</a:t>
+            </a:r>
+          </a:p>
+        </p:txBody>
+      </p:sp>
+      <p:sp>
+        <p:nvSpPr>
+          <p:cNvPr id="19" name="Rectangle 18"/>
           <p:cNvSpPr/>
           <p:nvPr/>
         </p:nvSpPr>
@@ -16428,7 +17459,7 @@
       </p:sp>
       <p:sp>
         <p:nvSpPr>
-          <p:cNvPr id="26" name="TextBox 25"/>
+          <p:cNvPr id="20" name="TextBox 19"/>
           <p:cNvSpPr txBox="1"/>
           <p:nvPr/>
         </p:nvSpPr>
@@ -16454,14 +17485,14 @@
                 </a:solidFill>
                 <a:latin typeface="Calibri"/>
               </a:rPr>
-              <a:t>Khadija Benhamida  ·  Mechatronics Engineering  ·  First meeting</a:t>
-            </a:r>
-          </a:p>
-        </p:txBody>
-      </p:sp>
-      <p:sp>
-        <p:nvSpPr>
-          <p:cNvPr id="27" name="TextBox 26"/>
+              <a:t>Khadija Benhamida  ·  Mechatronics Engineering  ·  Confidential</a:t>
+            </a:r>
+          </a:p>
+        </p:txBody>
+      </p:sp>
+      <p:sp>
+        <p:nvSpPr>
+          <p:cNvPr id="21" name="TextBox 20"/>
           <p:cNvSpPr txBox="1"/>
           <p:nvPr/>
         </p:nvSpPr>
@@ -16487,7 +17518,7 @@
                 </a:solidFill>
                 <a:latin typeface="Calibri"/>
               </a:rPr>
-              <a:t>9  /  13</a:t>
+              <a:t>9  /  14</a:t>
             </a:r>
           </a:p>
         </p:txBody>

--- a/docs/LEON_intro_for_non_specialists.pptx
+++ b/docs/LEON_intro_for_non_specialists.pptx
@@ -16,9 +16,6 @@
     <p:sldId id="264" r:id="rId16"/>
     <p:sldId id="265" r:id="rId17"/>
     <p:sldId id="266" r:id="rId18"/>
-    <p:sldId id="267" r:id="rId19"/>
-    <p:sldId id="268" r:id="rId20"/>
-    <p:sldId id="269" r:id="rId21"/>
   </p:sldIdLst>
   <p:sldSz cx="12191695" cy="6858000" type="screen4x3"/>
   <p:notesSz cx="6858000" cy="9144000"/>
@@ -515,357 +512,7 @@
           <a:lstStyle/>
           <a:p>
             <a:r>
-              <a:t>Introduce the meeting, the project name, and the collaboration. Then move to the agenda.</a:t>
-            </a:r>
-          </a:p>
-        </p:txBody>
-      </p:sp>
-      <p:sp>
-        <p:nvSpPr>
-          <p:cNvPr id="4" name="Slide Number Placeholder 3"/>
-          <p:cNvSpPr>
-            <a:spLocks noGrp="1"/>
-          </p:cNvSpPr>
-          <p:nvPr>
-            <p:ph type="sldNum" idx="5" sz="quarter"/>
-          </p:nvPr>
-        </p:nvSpPr>
-        <p:spPr/>
-      </p:sp>
-    </p:spTree>
-  </p:cSld>
-  <p:clrMapOvr>
-    <a:masterClrMapping/>
-  </p:clrMapOvr>
-</p:notes>
-</file>
-
-<file path=ppt/notesSlides/notesSlide10.xml><?xml version="1.0" encoding="utf-8"?>
-<p:notes xmlns:a="http://schemas.openxmlformats.org/drawingml/2006/main" xmlns:p="http://schemas.openxmlformats.org/presentationml/2006/main" xmlns:r="http://schemas.openxmlformats.org/officeDocument/2006/relationships">
-  <p:cSld>
-    <p:spTree>
-      <p:nvGrpSpPr>
-        <p:cNvPr id="1" name=""/>
-        <p:cNvGrpSpPr/>
-        <p:nvPr/>
-      </p:nvGrpSpPr>
-      <p:grpSpPr>
-        <a:xfrm>
-          <a:off x="0" y="0"/>
-          <a:ext cx="0" cy="0"/>
-          <a:chOff x="0" y="0"/>
-          <a:chExt cx="0" cy="0"/>
-        </a:xfrm>
-      </p:grpSpPr>
-      <p:sp>
-        <p:nvSpPr>
-          <p:cNvPr id="2" name="Slide Image Placeholder 1"/>
-          <p:cNvSpPr>
-            <a:spLocks noGrp="1"/>
-          </p:cNvSpPr>
-          <p:nvPr>
-            <p:ph type="sldImg" idx="2"/>
-          </p:nvPr>
-        </p:nvSpPr>
-        <p:spPr/>
-      </p:sp>
-      <p:sp>
-        <p:nvSpPr>
-          <p:cNvPr id="3" name="Notes Placeholder 2"/>
-          <p:cNvSpPr>
-            <a:spLocks noGrp="1"/>
-          </p:cNvSpPr>
-          <p:nvPr>
-            <p:ph type="body" idx="3" sz="quarter"/>
-          </p:nvPr>
-        </p:nvSpPr>
-        <p:spPr/>
-        <p:txBody>
-          <a:bodyPr/>
-          <a:lstStyle/>
-          <a:p>
-            <a:r>
-              <a:t>Close the project part. Next: collaboration, status, training, organisation.</a:t>
-            </a:r>
-          </a:p>
-        </p:txBody>
-      </p:sp>
-      <p:sp>
-        <p:nvSpPr>
-          <p:cNvPr id="4" name="Slide Number Placeholder 3"/>
-          <p:cNvSpPr>
-            <a:spLocks noGrp="1"/>
-          </p:cNvSpPr>
-          <p:nvPr>
-            <p:ph type="sldNum" idx="5" sz="quarter"/>
-          </p:nvPr>
-        </p:nvSpPr>
-        <p:spPr/>
-      </p:sp>
-    </p:spTree>
-  </p:cSld>
-  <p:clrMapOvr>
-    <a:masterClrMapping/>
-  </p:clrMapOvr>
-</p:notes>
-</file>
-
-<file path=ppt/notesSlides/notesSlide11.xml><?xml version="1.0" encoding="utf-8"?>
-<p:notes xmlns:a="http://schemas.openxmlformats.org/drawingml/2006/main" xmlns:p="http://schemas.openxmlformats.org/presentationml/2006/main" xmlns:r="http://schemas.openxmlformats.org/officeDocument/2006/relationships">
-  <p:cSld>
-    <p:spTree>
-      <p:nvGrpSpPr>
-        <p:cNvPr id="1" name=""/>
-        <p:cNvGrpSpPr/>
-        <p:nvPr/>
-      </p:nvGrpSpPr>
-      <p:grpSpPr>
-        <a:xfrm>
-          <a:off x="0" y="0"/>
-          <a:ext cx="0" cy="0"/>
-          <a:chOff x="0" y="0"/>
-          <a:chExt cx="0" cy="0"/>
-        </a:xfrm>
-      </p:grpSpPr>
-      <p:sp>
-        <p:nvSpPr>
-          <p:cNvPr id="2" name="Slide Image Placeholder 1"/>
-          <p:cNvSpPr>
-            <a:spLocks noGrp="1"/>
-          </p:cNvSpPr>
-          <p:nvPr>
-            <p:ph type="sldImg" idx="2"/>
-          </p:nvPr>
-        </p:nvSpPr>
-        <p:spPr/>
-      </p:sp>
-      <p:sp>
-        <p:nvSpPr>
-          <p:cNvPr id="3" name="Notes Placeholder 2"/>
-          <p:cNvSpPr>
-            <a:spLocks noGrp="1"/>
-          </p:cNvSpPr>
-          <p:nvPr>
-            <p:ph type="body" idx="3" sz="quarter"/>
-          </p:nvPr>
-        </p:nvSpPr>
-        <p:spPr/>
-        <p:txBody>
-          <a:bodyPr/>
-          <a:lstStyle/>
-          <a:p>
-            <a:r>
-              <a:t>Acknowledge both colleagues by name.</a:t>
-            </a:r>
-          </a:p>
-        </p:txBody>
-      </p:sp>
-      <p:sp>
-        <p:nvSpPr>
-          <p:cNvPr id="4" name="Slide Number Placeholder 3"/>
-          <p:cNvSpPr>
-            <a:spLocks noGrp="1"/>
-          </p:cNvSpPr>
-          <p:nvPr>
-            <p:ph type="sldNum" idx="5" sz="quarter"/>
-          </p:nvPr>
-        </p:nvSpPr>
-        <p:spPr/>
-      </p:sp>
-    </p:spTree>
-  </p:cSld>
-  <p:clrMapOvr>
-    <a:masterClrMapping/>
-  </p:clrMapOvr>
-</p:notes>
-</file>
-
-<file path=ppt/notesSlides/notesSlide12.xml><?xml version="1.0" encoding="utf-8"?>
-<p:notes xmlns:a="http://schemas.openxmlformats.org/drawingml/2006/main" xmlns:p="http://schemas.openxmlformats.org/presentationml/2006/main" xmlns:r="http://schemas.openxmlformats.org/officeDocument/2006/relationships">
-  <p:cSld>
-    <p:spTree>
-      <p:nvGrpSpPr>
-        <p:cNvPr id="1" name=""/>
-        <p:cNvGrpSpPr/>
-        <p:nvPr/>
-      </p:nvGrpSpPr>
-      <p:grpSpPr>
-        <a:xfrm>
-          <a:off x="0" y="0"/>
-          <a:ext cx="0" cy="0"/>
-          <a:chOff x="0" y="0"/>
-          <a:chExt cx="0" cy="0"/>
-        </a:xfrm>
-      </p:grpSpPr>
-      <p:sp>
-        <p:nvSpPr>
-          <p:cNvPr id="2" name="Slide Image Placeholder 1"/>
-          <p:cNvSpPr>
-            <a:spLocks noGrp="1"/>
-          </p:cNvSpPr>
-          <p:nvPr>
-            <p:ph type="sldImg" idx="2"/>
-          </p:nvPr>
-        </p:nvSpPr>
-        <p:spPr/>
-      </p:sp>
-      <p:sp>
-        <p:nvSpPr>
-          <p:cNvPr id="3" name="Notes Placeholder 2"/>
-          <p:cNvSpPr>
-            <a:spLocks noGrp="1"/>
-          </p:cNvSpPr>
-          <p:nvPr>
-            <p:ph type="body" idx="3" sz="quarter"/>
-          </p:nvPr>
-        </p:nvSpPr>
-        <p:spPr/>
-        <p:txBody>
-          <a:bodyPr/>
-          <a:lstStyle/>
-          <a:p>
-            <a:r>
-              <a:t>Do not commit to a deployment date. Sequence: finish this phase, then deploy.</a:t>
-            </a:r>
-          </a:p>
-        </p:txBody>
-      </p:sp>
-      <p:sp>
-        <p:nvSpPr>
-          <p:cNvPr id="4" name="Slide Number Placeholder 3"/>
-          <p:cNvSpPr>
-            <a:spLocks noGrp="1"/>
-          </p:cNvSpPr>
-          <p:nvPr>
-            <p:ph type="sldNum" idx="5" sz="quarter"/>
-          </p:nvPr>
-        </p:nvSpPr>
-        <p:spPr/>
-      </p:sp>
-    </p:spTree>
-  </p:cSld>
-  <p:clrMapOvr>
-    <a:masterClrMapping/>
-  </p:clrMapOvr>
-</p:notes>
-</file>
-
-<file path=ppt/notesSlides/notesSlide13.xml><?xml version="1.0" encoding="utf-8"?>
-<p:notes xmlns:a="http://schemas.openxmlformats.org/drawingml/2006/main" xmlns:p="http://schemas.openxmlformats.org/presentationml/2006/main" xmlns:r="http://schemas.openxmlformats.org/officeDocument/2006/relationships">
-  <p:cSld>
-    <p:spTree>
-      <p:nvGrpSpPr>
-        <p:cNvPr id="1" name=""/>
-        <p:cNvGrpSpPr/>
-        <p:nvPr/>
-      </p:nvGrpSpPr>
-      <p:grpSpPr>
-        <a:xfrm>
-          <a:off x="0" y="0"/>
-          <a:ext cx="0" cy="0"/>
-          <a:chOff x="0" y="0"/>
-          <a:chExt cx="0" cy="0"/>
-        </a:xfrm>
-      </p:grpSpPr>
-      <p:sp>
-        <p:nvSpPr>
-          <p:cNvPr id="2" name="Slide Image Placeholder 1"/>
-          <p:cNvSpPr>
-            <a:spLocks noGrp="1"/>
-          </p:cNvSpPr>
-          <p:nvPr>
-            <p:ph type="sldImg" idx="2"/>
-          </p:nvPr>
-        </p:nvSpPr>
-        <p:spPr/>
-      </p:sp>
-      <p:sp>
-        <p:nvSpPr>
-          <p:cNvPr id="3" name="Notes Placeholder 2"/>
-          <p:cNvSpPr>
-            <a:spLocks noGrp="1"/>
-          </p:cNvSpPr>
-          <p:nvPr>
-            <p:ph type="body" idx="3" sz="quarter"/>
-          </p:nvPr>
-        </p:nvSpPr>
-        <p:spPr/>
-        <p:txBody>
-          <a:bodyPr/>
-          <a:lstStyle/>
-          <a:p>
-            <a:r>
-              <a:t>Do not invent a training provider or date if not confirmed.</a:t>
-            </a:r>
-          </a:p>
-        </p:txBody>
-      </p:sp>
-      <p:sp>
-        <p:nvSpPr>
-          <p:cNvPr id="4" name="Slide Number Placeholder 3"/>
-          <p:cNvSpPr>
-            <a:spLocks noGrp="1"/>
-          </p:cNvSpPr>
-          <p:nvPr>
-            <p:ph type="sldNum" idx="5" sz="quarter"/>
-          </p:nvPr>
-        </p:nvSpPr>
-        <p:spPr/>
-      </p:sp>
-    </p:spTree>
-  </p:cSld>
-  <p:clrMapOvr>
-    <a:masterClrMapping/>
-  </p:clrMapOvr>
-</p:notes>
-</file>
-
-<file path=ppt/notesSlides/notesSlide14.xml><?xml version="1.0" encoding="utf-8"?>
-<p:notes xmlns:a="http://schemas.openxmlformats.org/drawingml/2006/main" xmlns:p="http://schemas.openxmlformats.org/presentationml/2006/main" xmlns:r="http://schemas.openxmlformats.org/officeDocument/2006/relationships">
-  <p:cSld>
-    <p:spTree>
-      <p:nvGrpSpPr>
-        <p:cNvPr id="1" name=""/>
-        <p:cNvGrpSpPr/>
-        <p:nvPr/>
-      </p:nvGrpSpPr>
-      <p:grpSpPr>
-        <a:xfrm>
-          <a:off x="0" y="0"/>
-          <a:ext cx="0" cy="0"/>
-          <a:chOff x="0" y="0"/>
-          <a:chExt cx="0" cy="0"/>
-        </a:xfrm>
-      </p:grpSpPr>
-      <p:sp>
-        <p:nvSpPr>
-          <p:cNvPr id="2" name="Slide Image Placeholder 1"/>
-          <p:cNvSpPr>
-            <a:spLocks noGrp="1"/>
-          </p:cNvSpPr>
-          <p:nvPr>
-            <p:ph type="sldImg" idx="2"/>
-          </p:nvPr>
-        </p:nvSpPr>
-        <p:spPr/>
-      </p:sp>
-      <p:sp>
-        <p:nvSpPr>
-          <p:cNvPr id="3" name="Notes Placeholder 2"/>
-          <p:cNvSpPr>
-            <a:spLocks noGrp="1"/>
-          </p:cNvSpPr>
-          <p:nvPr>
-            <p:ph type="body" idx="3" sz="quarter"/>
-          </p:nvPr>
-        </p:nvSpPr>
-        <p:spPr/>
-        <p:txBody>
-          <a:bodyPr/>
-          <a:lstStyle/>
-          <a:p>
-            <a:r>
-              <a:t>Ask for confirmation of TT Wednesday and Friday, and of the school period. Thank the manager.</a:t>
+              <a:t>Introductory meeting. Present the project, then collaboration, status and organisation.</a:t>
             </a:r>
           </a:p>
         </p:txBody>
@@ -935,7 +582,7 @@
           <a:lstStyle/>
           <a:p>
             <a:r>
-              <a:t>Present the agenda briefly, then start with the project.</a:t>
+              <a:t>This is the core of the project. The three documents must tell the same story.</a:t>
             </a:r>
           </a:p>
         </p:txBody>
@@ -1005,427 +652,7 @@
           <a:lstStyle/>
           <a:p>
             <a:r>
-              <a:t>This is the project definition. Then explain the three documents.</a:t>
-            </a:r>
-          </a:p>
-        </p:txBody>
-      </p:sp>
-      <p:sp>
-        <p:nvSpPr>
-          <p:cNvPr id="4" name="Slide Number Placeholder 3"/>
-          <p:cNvSpPr>
-            <a:spLocks noGrp="1"/>
-          </p:cNvSpPr>
-          <p:nvPr>
-            <p:ph type="sldNum" idx="5" sz="quarter"/>
-          </p:nvPr>
-        </p:nvSpPr>
-        <p:spPr/>
-      </p:sp>
-    </p:spTree>
-  </p:cSld>
-  <p:clrMapOvr>
-    <a:masterClrMapping/>
-  </p:clrMapOvr>
-</p:notes>
-</file>
-
-<file path=ppt/notesSlides/notesSlide4.xml><?xml version="1.0" encoding="utf-8"?>
-<p:notes xmlns:a="http://schemas.openxmlformats.org/drawingml/2006/main" xmlns:p="http://schemas.openxmlformats.org/presentationml/2006/main" xmlns:r="http://schemas.openxmlformats.org/officeDocument/2006/relationships">
-  <p:cSld>
-    <p:spTree>
-      <p:nvGrpSpPr>
-        <p:cNvPr id="1" name=""/>
-        <p:cNvGrpSpPr/>
-        <p:nvPr/>
-      </p:nvGrpSpPr>
-      <p:grpSpPr>
-        <a:xfrm>
-          <a:off x="0" y="0"/>
-          <a:ext cx="0" cy="0"/>
-          <a:chOff x="0" y="0"/>
-          <a:chExt cx="0" cy="0"/>
-        </a:xfrm>
-      </p:grpSpPr>
-      <p:sp>
-        <p:nvSpPr>
-          <p:cNvPr id="2" name="Slide Image Placeholder 1"/>
-          <p:cNvSpPr>
-            <a:spLocks noGrp="1"/>
-          </p:cNvSpPr>
-          <p:nvPr>
-            <p:ph type="sldImg" idx="2"/>
-          </p:nvPr>
-        </p:nvSpPr>
-        <p:spPr/>
-      </p:sp>
-      <p:sp>
-        <p:nvSpPr>
-          <p:cNvPr id="3" name="Notes Placeholder 2"/>
-          <p:cNvSpPr>
-            <a:spLocks noGrp="1"/>
-          </p:cNvSpPr>
-          <p:nvPr>
-            <p:ph type="body" idx="3" sz="quarter"/>
-          </p:nvPr>
-        </p:nvSpPr>
-        <p:spPr/>
-        <p:txBody>
-          <a:bodyPr/>
-          <a:lstStyle/>
-          <a:p>
-            <a:r>
-              <a:t>Specification = Stellantis. Matrix = supplier declaration. TDR = technical evidence. The three must tell the same story.</a:t>
-            </a:r>
-          </a:p>
-        </p:txBody>
-      </p:sp>
-      <p:sp>
-        <p:nvSpPr>
-          <p:cNvPr id="4" name="Slide Number Placeholder 3"/>
-          <p:cNvSpPr>
-            <a:spLocks noGrp="1"/>
-          </p:cNvSpPr>
-          <p:nvPr>
-            <p:ph type="sldNum" idx="5" sz="quarter"/>
-          </p:nvPr>
-        </p:nvSpPr>
-        <p:spPr/>
-      </p:sp>
-    </p:spTree>
-  </p:cSld>
-  <p:clrMapOvr>
-    <a:masterClrMapping/>
-  </p:clrMapOvr>
-</p:notes>
-</file>
-
-<file path=ppt/notesSlides/notesSlide5.xml><?xml version="1.0" encoding="utf-8"?>
-<p:notes xmlns:a="http://schemas.openxmlformats.org/drawingml/2006/main" xmlns:p="http://schemas.openxmlformats.org/presentationml/2006/main" xmlns:r="http://schemas.openxmlformats.org/officeDocument/2006/relationships">
-  <p:cSld>
-    <p:spTree>
-      <p:nvGrpSpPr>
-        <p:cNvPr id="1" name=""/>
-        <p:cNvGrpSpPr/>
-        <p:nvPr/>
-      </p:nvGrpSpPr>
-      <p:grpSpPr>
-        <a:xfrm>
-          <a:off x="0" y="0"/>
-          <a:ext cx="0" cy="0"/>
-          <a:chOff x="0" y="0"/>
-          <a:chExt cx="0" cy="0"/>
-        </a:xfrm>
-      </p:grpSpPr>
-      <p:sp>
-        <p:nvSpPr>
-          <p:cNvPr id="2" name="Slide Image Placeholder 1"/>
-          <p:cNvSpPr>
-            <a:spLocks noGrp="1"/>
-          </p:cNvSpPr>
-          <p:nvPr>
-            <p:ph type="sldImg" idx="2"/>
-          </p:nvPr>
-        </p:nvSpPr>
-        <p:spPr/>
-      </p:sp>
-      <p:sp>
-        <p:nvSpPr>
-          <p:cNvPr id="3" name="Notes Placeholder 2"/>
-          <p:cNvSpPr>
-            <a:spLocks noGrp="1"/>
-          </p:cNvSpPr>
-          <p:nvPr>
-            <p:ph type="body" idx="3" sz="quarter"/>
-          </p:nvPr>
-        </p:nvSpPr>
-        <p:spPr/>
-        <p:txBody>
-          <a:bodyPr/>
-          <a:lstStyle/>
-          <a:p>
-            <a:r>
-              <a:t>The project does not replace the engineer; it highlights the points that require attention.</a:t>
-            </a:r>
-          </a:p>
-        </p:txBody>
-      </p:sp>
-      <p:sp>
-        <p:nvSpPr>
-          <p:cNvPr id="4" name="Slide Number Placeholder 3"/>
-          <p:cNvSpPr>
-            <a:spLocks noGrp="1"/>
-          </p:cNvSpPr>
-          <p:nvPr>
-            <p:ph type="sldNum" idx="5" sz="quarter"/>
-          </p:nvPr>
-        </p:nvSpPr>
-        <p:spPr/>
-      </p:sp>
-    </p:spTree>
-  </p:cSld>
-  <p:clrMapOvr>
-    <a:masterClrMapping/>
-  </p:clrMapOvr>
-</p:notes>
-</file>
-
-<file path=ppt/notesSlides/notesSlide6.xml><?xml version="1.0" encoding="utf-8"?>
-<p:notes xmlns:a="http://schemas.openxmlformats.org/drawingml/2006/main" xmlns:p="http://schemas.openxmlformats.org/presentationml/2006/main" xmlns:r="http://schemas.openxmlformats.org/officeDocument/2006/relationships">
-  <p:cSld>
-    <p:spTree>
-      <p:nvGrpSpPr>
-        <p:cNvPr id="1" name=""/>
-        <p:cNvGrpSpPr/>
-        <p:nvPr/>
-      </p:nvGrpSpPr>
-      <p:grpSpPr>
-        <a:xfrm>
-          <a:off x="0" y="0"/>
-          <a:ext cx="0" cy="0"/>
-          <a:chOff x="0" y="0"/>
-          <a:chExt cx="0" cy="0"/>
-        </a:xfrm>
-      </p:grpSpPr>
-      <p:sp>
-        <p:nvSpPr>
-          <p:cNvPr id="2" name="Slide Image Placeholder 1"/>
-          <p:cNvSpPr>
-            <a:spLocks noGrp="1"/>
-          </p:cNvSpPr>
-          <p:nvPr>
-            <p:ph type="sldImg" idx="2"/>
-          </p:nvPr>
-        </p:nvSpPr>
-        <p:spPr/>
-      </p:sp>
-      <p:sp>
-        <p:nvSpPr>
-          <p:cNvPr id="3" name="Notes Placeholder 2"/>
-          <p:cNvSpPr>
-            <a:spLocks noGrp="1"/>
-          </p:cNvSpPr>
-          <p:nvPr>
-            <p:ph type="body" idx="3" sz="quarter"/>
-          </p:nvPr>
-        </p:nvSpPr>
-        <p:spPr/>
-        <p:txBody>
-          <a:bodyPr/>
-          <a:lstStyle/>
-          <a:p>
-            <a:r>
-              <a:t>LEON is a first analysis. The engineer remains accountable.</a:t>
-            </a:r>
-          </a:p>
-        </p:txBody>
-      </p:sp>
-      <p:sp>
-        <p:nvSpPr>
-          <p:cNvPr id="4" name="Slide Number Placeholder 3"/>
-          <p:cNvSpPr>
-            <a:spLocks noGrp="1"/>
-          </p:cNvSpPr>
-          <p:nvPr>
-            <p:ph type="sldNum" idx="5" sz="quarter"/>
-          </p:nvPr>
-        </p:nvSpPr>
-        <p:spPr/>
-      </p:sp>
-    </p:spTree>
-  </p:cSld>
-  <p:clrMapOvr>
-    <a:masterClrMapping/>
-  </p:clrMapOvr>
-</p:notes>
-</file>
-
-<file path=ppt/notesSlides/notesSlide7.xml><?xml version="1.0" encoding="utf-8"?>
-<p:notes xmlns:a="http://schemas.openxmlformats.org/drawingml/2006/main" xmlns:p="http://schemas.openxmlformats.org/presentationml/2006/main" xmlns:r="http://schemas.openxmlformats.org/officeDocument/2006/relationships">
-  <p:cSld>
-    <p:spTree>
-      <p:nvGrpSpPr>
-        <p:cNvPr id="1" name=""/>
-        <p:cNvGrpSpPr/>
-        <p:nvPr/>
-      </p:nvGrpSpPr>
-      <p:grpSpPr>
-        <a:xfrm>
-          <a:off x="0" y="0"/>
-          <a:ext cx="0" cy="0"/>
-          <a:chOff x="0" y="0"/>
-          <a:chExt cx="0" cy="0"/>
-        </a:xfrm>
-      </p:grpSpPr>
-      <p:sp>
-        <p:nvSpPr>
-          <p:cNvPr id="2" name="Slide Image Placeholder 1"/>
-          <p:cNvSpPr>
-            <a:spLocks noGrp="1"/>
-          </p:cNvSpPr>
-          <p:nvPr>
-            <p:ph type="sldImg" idx="2"/>
-          </p:nvPr>
-        </p:nvSpPr>
-        <p:spPr/>
-      </p:sp>
-      <p:sp>
-        <p:nvSpPr>
-          <p:cNvPr id="3" name="Notes Placeholder 2"/>
-          <p:cNvSpPr>
-            <a:spLocks noGrp="1"/>
-          </p:cNvSpPr>
-          <p:nvPr>
-            <p:ph type="body" idx="3" sz="quarter"/>
-          </p:nvPr>
-        </p:nvSpPr>
-        <p:spPr/>
-        <p:txBody>
-          <a:bodyPr/>
-          <a:lstStyle/>
-          <a:p>
-            <a:r>
-              <a:t>Present the six functions, then detail specification, matrix and TDR.</a:t>
-            </a:r>
-          </a:p>
-        </p:txBody>
-      </p:sp>
-      <p:sp>
-        <p:nvSpPr>
-          <p:cNvPr id="4" name="Slide Number Placeholder 3"/>
-          <p:cNvSpPr>
-            <a:spLocks noGrp="1"/>
-          </p:cNvSpPr>
-          <p:nvPr>
-            <p:ph type="sldNum" idx="5" sz="quarter"/>
-          </p:nvPr>
-        </p:nvSpPr>
-        <p:spPr/>
-      </p:sp>
-    </p:spTree>
-  </p:cSld>
-  <p:clrMapOvr>
-    <a:masterClrMapping/>
-  </p:clrMapOvr>
-</p:notes>
-</file>
-
-<file path=ppt/notesSlides/notesSlide8.xml><?xml version="1.0" encoding="utf-8"?>
-<p:notes xmlns:a="http://schemas.openxmlformats.org/drawingml/2006/main" xmlns:p="http://schemas.openxmlformats.org/presentationml/2006/main" xmlns:r="http://schemas.openxmlformats.org/officeDocument/2006/relationships">
-  <p:cSld>
-    <p:spTree>
-      <p:nvGrpSpPr>
-        <p:cNvPr id="1" name=""/>
-        <p:cNvGrpSpPr/>
-        <p:nvPr/>
-      </p:nvGrpSpPr>
-      <p:grpSpPr>
-        <a:xfrm>
-          <a:off x="0" y="0"/>
-          <a:ext cx="0" cy="0"/>
-          <a:chOff x="0" y="0"/>
-          <a:chExt cx="0" cy="0"/>
-        </a:xfrm>
-      </p:grpSpPr>
-      <p:sp>
-        <p:nvSpPr>
-          <p:cNvPr id="2" name="Slide Image Placeholder 1"/>
-          <p:cNvSpPr>
-            <a:spLocks noGrp="1"/>
-          </p:cNvSpPr>
-          <p:nvPr>
-            <p:ph type="sldImg" idx="2"/>
-          </p:nvPr>
-        </p:nvSpPr>
-        <p:spPr/>
-      </p:sp>
-      <p:sp>
-        <p:nvSpPr>
-          <p:cNvPr id="3" name="Notes Placeholder 2"/>
-          <p:cNvSpPr>
-            <a:spLocks noGrp="1"/>
-          </p:cNvSpPr>
-          <p:nvPr>
-            <p:ph type="body" idx="3" sz="quarter"/>
-          </p:nvPr>
-        </p:nvSpPr>
-        <p:spPr/>
-        <p:txBody>
-          <a:bodyPr/>
-          <a:lstStyle/>
-          <a:p>
-            <a:r>
-              <a:t>These two functions already produce a usable report before TDR cross-check.</a:t>
-            </a:r>
-          </a:p>
-        </p:txBody>
-      </p:sp>
-      <p:sp>
-        <p:nvSpPr>
-          <p:cNvPr id="4" name="Slide Number Placeholder 3"/>
-          <p:cNvSpPr>
-            <a:spLocks noGrp="1"/>
-          </p:cNvSpPr>
-          <p:nvPr>
-            <p:ph type="sldNum" idx="5" sz="quarter"/>
-          </p:nvPr>
-        </p:nvSpPr>
-        <p:spPr/>
-      </p:sp>
-    </p:spTree>
-  </p:cSld>
-  <p:clrMapOvr>
-    <a:masterClrMapping/>
-  </p:clrMapOvr>
-</p:notes>
-</file>
-
-<file path=ppt/notesSlides/notesSlide9.xml><?xml version="1.0" encoding="utf-8"?>
-<p:notes xmlns:a="http://schemas.openxmlformats.org/drawingml/2006/main" xmlns:p="http://schemas.openxmlformats.org/presentationml/2006/main" xmlns:r="http://schemas.openxmlformats.org/officeDocument/2006/relationships">
-  <p:cSld>
-    <p:spTree>
-      <p:nvGrpSpPr>
-        <p:cNvPr id="1" name=""/>
-        <p:cNvGrpSpPr/>
-        <p:nvPr/>
-      </p:nvGrpSpPr>
-      <p:grpSpPr>
-        <a:xfrm>
-          <a:off x="0" y="0"/>
-          <a:ext cx="0" cy="0"/>
-          <a:chOff x="0" y="0"/>
-          <a:chExt cx="0" cy="0"/>
-        </a:xfrm>
-      </p:grpSpPr>
-      <p:sp>
-        <p:nvSpPr>
-          <p:cNvPr id="2" name="Slide Image Placeholder 1"/>
-          <p:cNvSpPr>
-            <a:spLocks noGrp="1"/>
-          </p:cNvSpPr>
-          <p:nvPr>
-            <p:ph type="sldImg" idx="2"/>
-          </p:nvPr>
-        </p:nvSpPr>
-        <p:spPr/>
-      </p:sp>
-      <p:sp>
-        <p:nvSpPr>
-          <p:cNvPr id="3" name="Notes Placeholder 2"/>
-          <p:cNvSpPr>
-            <a:spLocks noGrp="1"/>
-          </p:cNvSpPr>
-          <p:nvPr>
-            <p:ph type="body" idx="3" sz="quarter"/>
-          </p:nvPr>
-        </p:nvSpPr>
-        <p:spPr/>
-        <p:txBody>
-          <a:bodyPr/>
-          <a:lstStyle/>
-          <a:p>
-            <a:r>
-              <a:t>Use the contrast example. Mention version follow-up only if asked.</a:t>
+              <a:t>Ask for confirmation of TT Wednesday and Friday, and of the school period.</a:t>
             </a:r>
           </a:p>
         </p:txBody>
@@ -4568,8 +3795,8 @@
         </p:nvSpPr>
         <p:spPr>
           <a:xfrm>
-            <a:off x="640080" y="777240"/>
-            <a:ext cx="10515600" cy="292608"/>
+            <a:off x="640080" y="731520"/>
+            <a:ext cx="10515600" cy="256032"/>
           </a:xfrm>
           <a:prstGeom prst="rect">
             <a:avLst/>
@@ -4601,8 +3828,8 @@
         </p:nvSpPr>
         <p:spPr>
           <a:xfrm>
-            <a:off x="640080" y="1188720"/>
-            <a:ext cx="10515600" cy="292608"/>
+            <a:off x="640080" y="1078992"/>
+            <a:ext cx="10515600" cy="274320"/>
           </a:xfrm>
           <a:prstGeom prst="rect">
             <a:avLst/>
@@ -4621,7 +3848,7 @@
                 </a:solidFill>
                 <a:latin typeface="Calibri"/>
               </a:rPr>
-              <a:t>STATUS MEETING  ·  OCTOBER 2026</a:t>
+              <a:t>INTRODUCTORY MEETING  ·  OCTOBER 2026</a:t>
             </a:r>
           </a:p>
         </p:txBody>
@@ -4634,8 +3861,8 @@
         </p:nvSpPr>
         <p:spPr>
           <a:xfrm>
-            <a:off x="640080" y="1481328"/>
-            <a:ext cx="10972800" cy="640080"/>
+            <a:off x="640080" y="1389888"/>
+            <a:ext cx="10972800" cy="566928"/>
           </a:xfrm>
           <a:prstGeom prst="rect">
             <a:avLst/>
@@ -4648,7 +3875,7 @@
           <a:p>
             <a:pPr algn="l"/>
             <a:r>
-              <a:rPr sz="4000" b="1">
+              <a:rPr sz="3800" b="1">
                 <a:solidFill>
                   <a:srgbClr val="FFFFFF"/>
                 </a:solidFill>
@@ -4667,8 +3894,8 @@
         </p:nvSpPr>
         <p:spPr>
           <a:xfrm>
-            <a:off x="640080" y="2194560"/>
-            <a:ext cx="10972800" cy="640080"/>
+            <a:off x="640080" y="1993392"/>
+            <a:ext cx="10972800" cy="502920"/>
           </a:xfrm>
           <a:prstGeom prst="rect">
             <a:avLst/>
@@ -4681,7 +3908,7 @@
           <a:p>
             <a:pPr algn="l"/>
             <a:r>
-              <a:rPr sz="2800" b="1">
+              <a:rPr sz="2600" b="1">
                 <a:solidFill>
                   <a:srgbClr val="E8EEFB"/>
                 </a:solidFill>
@@ -4700,7 +3927,7 @@
         </p:nvSpPr>
         <p:spPr>
           <a:xfrm>
-            <a:off x="640080" y="2880360"/>
+            <a:off x="640080" y="2560320"/>
             <a:ext cx="10789920" cy="640080"/>
           </a:xfrm>
           <a:prstGeom prst="rect">
@@ -4720,8 +3947,8 @@
                 </a:solidFill>
                 <a:latin typeface="Calibri"/>
               </a:rPr>
-              <a:t>Application supporting the review of specifications, conformity matrices
-and technical design dossiers (TDR).</a:t>
+              <a:t>Project presentation: review of specifications, conformity matrices
+and technical design dossiers (TDR) — without requiring an AI background.</a:t>
             </a:r>
           </a:p>
         </p:txBody>
@@ -4734,7 +3961,7 @@
         </p:nvSpPr>
         <p:spPr>
           <a:xfrm>
-            <a:off x="640080" y="3703320"/>
+            <a:off x="640080" y="3310128"/>
             <a:ext cx="3108960" cy="64008"/>
           </a:xfrm>
           <a:prstGeom prst="rect">
@@ -4777,7 +4004,7 @@
         </p:nvSpPr>
         <p:spPr>
           <a:xfrm>
-            <a:off x="640080" y="3913632"/>
+            <a:off x="640080" y="3493008"/>
             <a:ext cx="10789920" cy="640080"/>
           </a:xfrm>
           <a:prstGeom prst="rect">
@@ -4811,7 +4038,7 @@
         </p:nvSpPr>
         <p:spPr>
           <a:xfrm>
-            <a:off x="640080" y="4892040"/>
+            <a:off x="640080" y="4297680"/>
             <a:ext cx="3108960" cy="1051560"/>
           </a:xfrm>
           <a:prstGeom prst="roundRect">
@@ -4856,7 +4083,7 @@
         </p:nvSpPr>
         <p:spPr>
           <a:xfrm>
-            <a:off x="640080" y="4892040"/>
+            <a:off x="640080" y="4297680"/>
             <a:ext cx="91440" cy="1051560"/>
           </a:xfrm>
           <a:prstGeom prst="rect">
@@ -4899,7 +4126,7 @@
         </p:nvSpPr>
         <p:spPr>
           <a:xfrm>
-            <a:off x="896112" y="5010912"/>
+            <a:off x="896112" y="4407408"/>
             <a:ext cx="2743200" cy="384048"/>
           </a:xfrm>
           <a:prstGeom prst="rect">
@@ -4932,7 +4159,7 @@
         </p:nvSpPr>
         <p:spPr>
           <a:xfrm>
-            <a:off x="896112" y="5413248"/>
+            <a:off x="896112" y="4809744"/>
             <a:ext cx="2743200" cy="365760"/>
           </a:xfrm>
           <a:prstGeom prst="rect">
@@ -4965,7 +4192,7 @@
         </p:nvSpPr>
         <p:spPr>
           <a:xfrm>
-            <a:off x="3977640" y="4892040"/>
+            <a:off x="3977640" y="4297680"/>
             <a:ext cx="3108960" cy="1051560"/>
           </a:xfrm>
           <a:prstGeom prst="roundRect">
@@ -5010,7 +4237,7 @@
         </p:nvSpPr>
         <p:spPr>
           <a:xfrm>
-            <a:off x="3977640" y="4892040"/>
+            <a:off x="3977640" y="4297680"/>
             <a:ext cx="91440" cy="1051560"/>
           </a:xfrm>
           <a:prstGeom prst="rect">
@@ -5053,7 +4280,7 @@
         </p:nvSpPr>
         <p:spPr>
           <a:xfrm>
-            <a:off x="4233672" y="5010912"/>
+            <a:off x="4233672" y="4407408"/>
             <a:ext cx="2743200" cy="384048"/>
           </a:xfrm>
           <a:prstGeom prst="rect">
@@ -5086,7 +4313,7 @@
         </p:nvSpPr>
         <p:spPr>
           <a:xfrm>
-            <a:off x="4233672" y="5413248"/>
+            <a:off x="4233672" y="4809744"/>
             <a:ext cx="2743200" cy="365760"/>
           </a:xfrm>
           <a:prstGeom prst="rect">
@@ -5119,7 +4346,7 @@
         </p:nvSpPr>
         <p:spPr>
           <a:xfrm>
-            <a:off x="7315200" y="4892040"/>
+            <a:off x="7315200" y="4297680"/>
             <a:ext cx="3108960" cy="1051560"/>
           </a:xfrm>
           <a:prstGeom prst="roundRect">
@@ -5164,7 +4391,7 @@
         </p:nvSpPr>
         <p:spPr>
           <a:xfrm>
-            <a:off x="7315200" y="4892040"/>
+            <a:off x="7315200" y="4297680"/>
             <a:ext cx="91440" cy="1051560"/>
           </a:xfrm>
           <a:prstGeom prst="rect">
@@ -5207,7 +4434,7 @@
         </p:nvSpPr>
         <p:spPr>
           <a:xfrm>
-            <a:off x="7571232" y="5010912"/>
+            <a:off x="7571232" y="4407408"/>
             <a:ext cx="2743200" cy="384048"/>
           </a:xfrm>
           <a:prstGeom prst="rect">
@@ -5240,7 +4467,7 @@
         </p:nvSpPr>
         <p:spPr>
           <a:xfrm>
-            <a:off x="7571232" y="5413248"/>
+            <a:off x="7571232" y="4809744"/>
             <a:ext cx="2743200" cy="365760"/>
           </a:xfrm>
           <a:prstGeom prst="rect">
@@ -5273,8 +4500,8 @@
         </p:nvSpPr>
         <p:spPr>
           <a:xfrm>
-            <a:off x="640080" y="6126480"/>
-            <a:ext cx="10789920" cy="320040"/>
+            <a:off x="640080" y="5577840"/>
+            <a:ext cx="10789920" cy="640080"/>
           </a:xfrm>
           <a:prstGeom prst="rect">
             <a:avLst/>
@@ -5287,13 +4514,14 @@
           <a:p>
             <a:pPr algn="l"/>
             <a:r>
-              <a:rPr sz="1300" b="0">
+              <a:rPr sz="1400" b="0">
                 <a:solidFill>
                   <a:srgbClr val="A9BCD4"/>
                 </a:solidFill>
                 <a:latin typeface="Calibri"/>
               </a:rPr>
-              <a:t>Status: development in progress  ·  Team deployment after completion of this phase</a:t>
+              <a:t>Status: development in progress.
+After completion of this phase, deployment will start so that the whole team has access.</a:t>
             </a:r>
           </a:p>
         </p:txBody>
@@ -5473,7 +4701,7 @@
                 </a:solidFill>
                 <a:latin typeface="Calibri"/>
               </a:rPr>
-              <a:t>WORK COMPLETED TO DATE</a:t>
+              <a:t>UPCOMING TRAINING</a:t>
             </a:r>
           </a:p>
         </p:txBody>
@@ -5506,7 +4734,7 @@
                 </a:solidFill>
                 <a:latin typeface="Calibri"/>
               </a:rPr>
-              <a:t>Current capabilities of LEON</a:t>
+              <a:t>AI training for the Mechatronics team</a:t>
             </a:r>
           </a:p>
         </p:txBody>
@@ -5539,7 +4767,7 @@
                 </a:solidFill>
                 <a:latin typeface="Calibri"/>
               </a:rPr>
-              <a:t>The functions below are implemented. Technical acceptance remains with the engineer.</a:t>
+              <a:t>Operational training on the use of AI in daily document review.</a:t>
             </a:r>
           </a:p>
         </p:txBody>
@@ -5552,8 +4780,8 @@
         </p:nvSpPr>
         <p:spPr>
           <a:xfrm>
-            <a:off x="457200" y="1371600"/>
-            <a:ext cx="11247120" cy="960120"/>
+            <a:off x="411480" y="1389888"/>
+            <a:ext cx="5532120" cy="4919472"/>
           </a:xfrm>
           <a:prstGeom prst="roundRect">
             <a:avLst>
@@ -5599,14 +4827,14 @@
         </p:nvSpPr>
         <p:spPr>
           <a:xfrm>
-            <a:off x="457200" y="1371600"/>
-            <a:ext cx="109728" cy="960120"/>
+            <a:off x="411480" y="1389888"/>
+            <a:ext cx="73152" cy="4919472"/>
           </a:xfrm>
           <a:prstGeom prst="rect">
             <a:avLst/>
           </a:prstGeom>
           <a:solidFill>
-            <a:srgbClr val="157347"/>
+            <a:srgbClr val="1D4ED8"/>
           </a:solidFill>
           <a:ln>
             <a:noFill/>
@@ -5642,8 +4870,8 @@
         </p:nvSpPr>
         <p:spPr>
           <a:xfrm>
-            <a:off x="777240" y="1481328"/>
-            <a:ext cx="10698480" cy="329184"/>
+            <a:off x="612648" y="1517904"/>
+            <a:ext cx="5221224" cy="347472"/>
           </a:xfrm>
           <a:prstGeom prst="rect">
             <a:avLst/>
@@ -5656,13 +4884,13 @@
           <a:p>
             <a:pPr algn="l"/>
             <a:r>
-              <a:rPr sz="1600" b="1">
+              <a:rPr sz="1800" b="1">
                 <a:solidFill>
                   <a:srgbClr val="0B2545"/>
                 </a:solidFill>
                 <a:latin typeface="Calibri"/>
               </a:rPr>
-              <a:t>Browser-based access</a:t>
+              <a:t>Objectives</a:t>
             </a:r>
           </a:p>
         </p:txBody>
@@ -5675,8 +4903,8 @@
         </p:nvSpPr>
         <p:spPr>
           <a:xfrm>
-            <a:off x="777240" y="1810512"/>
-            <a:ext cx="10698480" cy="402336"/>
+            <a:off x="612648" y="1847088"/>
+            <a:ext cx="5221224" cy="4334256"/>
           </a:xfrm>
           <a:prstGeom prst="rect">
             <a:avLst/>
@@ -5695,7 +4923,10 @@
                 </a:solidFill>
                 <a:latin typeface="Calibri"/>
               </a:rPr>
-              <a:t>Specification, matrix and TDR are uploaded in the application. No installation is required for the reviewer.</a:t>
+              <a:t>Clarify what AI can and cannot do on specifications, matrices and TDR files.
+Position LEON as a first analysis, not as a substitute for the engineer.
+Establish a common practice: where AI reduces review time, and where a technical decision is required.
+Use examples drawn from mechatronics documents.</a:t>
             </a:r>
           </a:p>
         </p:txBody>
@@ -5708,8 +4939,8 @@
         </p:nvSpPr>
         <p:spPr>
           <a:xfrm>
-            <a:off x="457200" y="2423160"/>
-            <a:ext cx="11247120" cy="960120"/>
+            <a:off x="6172200" y="1389888"/>
+            <a:ext cx="5532120" cy="4919472"/>
           </a:xfrm>
           <a:prstGeom prst="roundRect">
             <a:avLst>
@@ -5755,14 +4986,14 @@
         </p:nvSpPr>
         <p:spPr>
           <a:xfrm>
-            <a:off x="457200" y="2423160"/>
-            <a:ext cx="109728" cy="960120"/>
+            <a:off x="6172200" y="1389888"/>
+            <a:ext cx="73152" cy="4919472"/>
           </a:xfrm>
           <a:prstGeom prst="rect">
             <a:avLst/>
           </a:prstGeom>
           <a:solidFill>
-            <a:srgbClr val="1D4ED8"/>
+            <a:srgbClr val="157347"/>
           </a:solidFill>
           <a:ln>
             <a:noFill/>
@@ -5798,8 +5029,8 @@
         </p:nvSpPr>
         <p:spPr>
           <a:xfrm>
-            <a:off x="777240" y="2532888"/>
-            <a:ext cx="10698480" cy="329184"/>
+            <a:off x="6373368" y="1517904"/>
+            <a:ext cx="5221224" cy="347472"/>
           </a:xfrm>
           <a:prstGeom prst="rect">
             <a:avLst/>
@@ -5812,13 +5043,13 @@
           <a:p>
             <a:pPr algn="l"/>
             <a:r>
-              <a:rPr sz="1600" b="1">
+              <a:rPr sz="1800" b="1">
                 <a:solidFill>
                   <a:srgbClr val="0B2545"/>
                 </a:solidFill>
                 <a:latin typeface="Calibri"/>
               </a:rPr>
-              <a:t>Detection of inconsistencies</a:t>
+              <a:t>Expected use in the team</a:t>
             </a:r>
           </a:p>
         </p:txBody>
@@ -5831,8 +5062,8 @@
         </p:nvSpPr>
         <p:spPr>
           <a:xfrm>
-            <a:off x="777240" y="2862072"/>
-            <a:ext cx="10698480" cy="402336"/>
+            <a:off x="6373368" y="1847088"/>
+            <a:ext cx="5221224" cy="4334256"/>
           </a:xfrm>
           <a:prstGeom prst="rect">
             <a:avLst/>
@@ -5851,359 +5082,18 @@
                 </a:solidFill>
                 <a:latin typeface="Calibri"/>
               </a:rPr>
-              <a:t>Contradictory OK comments, missing evidence, non-compliant values, and changes between matrix versions.</a:t>
-            </a:r>
-          </a:p>
-        </p:txBody>
-      </p:sp>
-      <p:sp>
-        <p:nvSpPr>
-          <p:cNvPr id="16" name="Rounded Rectangle 15"/>
-          <p:cNvSpPr/>
-          <p:nvPr/>
-        </p:nvSpPr>
-        <p:spPr>
-          <a:xfrm>
-            <a:off x="457200" y="3474720"/>
-            <a:ext cx="11247120" cy="960120"/>
-          </a:xfrm>
-          <a:prstGeom prst="roundRect">
-            <a:avLst>
-              <a:gd name="adj" fmla="val 8000"/>
-            </a:avLst>
-          </a:prstGeom>
-          <a:solidFill>
-            <a:srgbClr val="FFFFFF"/>
-          </a:solidFill>
-          <a:ln w="12700">
-            <a:solidFill>
-              <a:srgbClr val="DDE3EC"/>
-            </a:solidFill>
-          </a:ln>
-        </p:spPr>
-        <p:style>
-          <a:lnRef idx="1">
-            <a:schemeClr val="accent1"/>
-          </a:lnRef>
-          <a:fillRef idx="3">
-            <a:schemeClr val="accent1"/>
-          </a:fillRef>
-          <a:effectRef idx="2">
-            <a:schemeClr val="accent1"/>
-          </a:effectRef>
-          <a:fontRef idx="minor">
-            <a:schemeClr val="lt1"/>
-          </a:fontRef>
-        </p:style>
-        <p:txBody>
-          <a:bodyPr rtlCol="0" anchor="ctr"/>
-          <a:lstStyle/>
-          <a:p>
-            <a:pPr algn="ctr"/>
-          </a:p>
-        </p:txBody>
-      </p:sp>
-      <p:sp>
-        <p:nvSpPr>
-          <p:cNvPr id="17" name="Rectangle 16"/>
-          <p:cNvSpPr/>
-          <p:nvPr/>
-        </p:nvSpPr>
-        <p:spPr>
-          <a:xfrm>
-            <a:off x="457200" y="3474720"/>
-            <a:ext cx="109728" cy="960120"/>
-          </a:xfrm>
-          <a:prstGeom prst="rect">
-            <a:avLst/>
-          </a:prstGeom>
-          <a:solidFill>
-            <a:srgbClr val="9A5B00"/>
-          </a:solidFill>
-          <a:ln>
-            <a:noFill/>
-          </a:ln>
-        </p:spPr>
-        <p:style>
-          <a:lnRef idx="1">
-            <a:schemeClr val="accent1"/>
-          </a:lnRef>
-          <a:fillRef idx="3">
-            <a:schemeClr val="accent1"/>
-          </a:fillRef>
-          <a:effectRef idx="2">
-            <a:schemeClr val="accent1"/>
-          </a:effectRef>
-          <a:fontRef idx="minor">
-            <a:schemeClr val="lt1"/>
-          </a:fontRef>
-        </p:style>
-        <p:txBody>
-          <a:bodyPr rtlCol="0" anchor="ctr"/>
-          <a:lstStyle/>
-          <a:p>
-            <a:pPr algn="ctr"/>
-          </a:p>
-        </p:txBody>
-      </p:sp>
-      <p:sp>
-        <p:nvSpPr>
-          <p:cNvPr id="18" name="TextBox 17"/>
-          <p:cNvSpPr txBox="1"/>
-          <p:nvPr/>
-        </p:nvSpPr>
-        <p:spPr>
-          <a:xfrm>
-            <a:off x="777240" y="3584448"/>
-            <a:ext cx="10698480" cy="329184"/>
-          </a:xfrm>
-          <a:prstGeom prst="rect">
-            <a:avLst/>
-          </a:prstGeom>
-          <a:noFill/>
-        </p:spPr>
-        <p:txBody>
-          <a:bodyPr wrap="square" anchor="t"/>
-          <a:lstStyle/>
-          <a:p>
-            <a:pPr algn="l"/>
-            <a:r>
-              <a:rPr sz="1600" b="1">
-                <a:solidFill>
-                  <a:srgbClr val="0B2545"/>
-                </a:solidFill>
-                <a:latin typeface="Calibri"/>
-              </a:rPr>
-              <a:t>Export for the review</a:t>
-            </a:r>
-          </a:p>
-        </p:txBody>
-      </p:sp>
-      <p:sp>
-        <p:nvSpPr>
-          <p:cNvPr id="19" name="TextBox 18"/>
-          <p:cNvSpPr txBox="1"/>
-          <p:nvPr/>
-        </p:nvSpPr>
-        <p:spPr>
-          <a:xfrm>
-            <a:off x="777240" y="3913632"/>
-            <a:ext cx="10698480" cy="402336"/>
-          </a:xfrm>
-          <a:prstGeom prst="rect">
-            <a:avLst/>
-          </a:prstGeom>
-          <a:noFill/>
-        </p:spPr>
-        <p:txBody>
-          <a:bodyPr wrap="square" anchor="t"/>
-          <a:lstStyle/>
-          <a:p>
-            <a:pPr algn="l"/>
-            <a:r>
-              <a:rPr sz="1400" b="0">
-                <a:solidFill>
-                  <a:srgbClr val="1C2B3A"/>
-                </a:solidFill>
-                <a:latin typeface="Calibri"/>
-              </a:rPr>
-              <a:t>Colour-coded Excel reports for Quality, Purchasing or the supplier.</a:t>
-            </a:r>
-          </a:p>
-        </p:txBody>
-      </p:sp>
-      <p:sp>
-        <p:nvSpPr>
-          <p:cNvPr id="20" name="Rounded Rectangle 19"/>
-          <p:cNvSpPr/>
-          <p:nvPr/>
-        </p:nvSpPr>
-        <p:spPr>
-          <a:xfrm>
-            <a:off x="457200" y="4526280"/>
-            <a:ext cx="11247120" cy="960120"/>
-          </a:xfrm>
-          <a:prstGeom prst="roundRect">
-            <a:avLst>
-              <a:gd name="adj" fmla="val 8000"/>
-            </a:avLst>
-          </a:prstGeom>
-          <a:solidFill>
-            <a:srgbClr val="FFFFFF"/>
-          </a:solidFill>
-          <a:ln w="12700">
-            <a:solidFill>
-              <a:srgbClr val="DDE3EC"/>
-            </a:solidFill>
-          </a:ln>
-        </p:spPr>
-        <p:style>
-          <a:lnRef idx="1">
-            <a:schemeClr val="accent1"/>
-          </a:lnRef>
-          <a:fillRef idx="3">
-            <a:schemeClr val="accent1"/>
-          </a:fillRef>
-          <a:effectRef idx="2">
-            <a:schemeClr val="accent1"/>
-          </a:effectRef>
-          <a:fontRef idx="minor">
-            <a:schemeClr val="lt1"/>
-          </a:fontRef>
-        </p:style>
-        <p:txBody>
-          <a:bodyPr rtlCol="0" anchor="ctr"/>
-          <a:lstStyle/>
-          <a:p>
-            <a:pPr algn="ctr"/>
-          </a:p>
-        </p:txBody>
-      </p:sp>
-      <p:sp>
-        <p:nvSpPr>
-          <p:cNvPr id="21" name="Rectangle 20"/>
-          <p:cNvSpPr/>
-          <p:nvPr/>
-        </p:nvSpPr>
-        <p:spPr>
-          <a:xfrm>
-            <a:off x="457200" y="4526280"/>
-            <a:ext cx="109728" cy="960120"/>
-          </a:xfrm>
-          <a:prstGeom prst="rect">
-            <a:avLst/>
-          </a:prstGeom>
-          <a:solidFill>
-            <a:srgbClr val="123061"/>
-          </a:solidFill>
-          <a:ln>
-            <a:noFill/>
-          </a:ln>
-        </p:spPr>
-        <p:style>
-          <a:lnRef idx="1">
-            <a:schemeClr val="accent1"/>
-          </a:lnRef>
-          <a:fillRef idx="3">
-            <a:schemeClr val="accent1"/>
-          </a:fillRef>
-          <a:effectRef idx="2">
-            <a:schemeClr val="accent1"/>
-          </a:effectRef>
-          <a:fontRef idx="minor">
-            <a:schemeClr val="lt1"/>
-          </a:fontRef>
-        </p:style>
-        <p:txBody>
-          <a:bodyPr rtlCol="0" anchor="ctr"/>
-          <a:lstStyle/>
-          <a:p>
-            <a:pPr algn="ctr"/>
-          </a:p>
-        </p:txBody>
-      </p:sp>
-      <p:sp>
-        <p:nvSpPr>
-          <p:cNvPr id="22" name="TextBox 21"/>
-          <p:cNvSpPr txBox="1"/>
-          <p:nvPr/>
-        </p:nvSpPr>
-        <p:spPr>
-          <a:xfrm>
-            <a:off x="777240" y="4636008"/>
-            <a:ext cx="10698480" cy="329184"/>
-          </a:xfrm>
-          <a:prstGeom prst="rect">
-            <a:avLst/>
-          </a:prstGeom>
-          <a:noFill/>
-        </p:spPr>
-        <p:txBody>
-          <a:bodyPr wrap="square" anchor="t"/>
-          <a:lstStyle/>
-          <a:p>
-            <a:pPr algn="l"/>
-            <a:r>
-              <a:rPr sz="1600" b="1">
-                <a:solidFill>
-                  <a:srgbClr val="0B2545"/>
-                </a:solidFill>
-                <a:latin typeface="Calibri"/>
-              </a:rPr>
-              <a:t>No automatic approval</a:t>
-            </a:r>
-          </a:p>
-        </p:txBody>
-      </p:sp>
-      <p:sp>
-        <p:nvSpPr>
-          <p:cNvPr id="23" name="TextBox 22"/>
-          <p:cNvSpPr txBox="1"/>
-          <p:nvPr/>
-        </p:nvSpPr>
-        <p:spPr>
-          <a:xfrm>
-            <a:off x="777240" y="4965192"/>
-            <a:ext cx="10698480" cy="402336"/>
-          </a:xfrm>
-          <a:prstGeom prst="rect">
-            <a:avLst/>
-          </a:prstGeom>
-          <a:noFill/>
-        </p:spPr>
-        <p:txBody>
-          <a:bodyPr wrap="square" anchor="t"/>
-          <a:lstStyle/>
-          <a:p>
-            <a:pPr algn="l"/>
-            <a:r>
-              <a:rPr sz="1400" b="0">
-                <a:solidFill>
-                  <a:srgbClr val="1C2B3A"/>
-                </a:solidFill>
-                <a:latin typeface="Calibri"/>
-              </a:rPr>
-              <a:t>Absence of a detected inconsistency is not a certificate of conformity.</a:t>
-            </a:r>
-          </a:p>
-        </p:txBody>
-      </p:sp>
-      <p:sp>
-        <p:nvSpPr>
-          <p:cNvPr id="24" name="TextBox 23"/>
-          <p:cNvSpPr txBox="1"/>
-          <p:nvPr/>
-        </p:nvSpPr>
-        <p:spPr>
-          <a:xfrm>
-            <a:off x="457200" y="5623560"/>
-            <a:ext cx="11247120" cy="777240"/>
-          </a:xfrm>
-          <a:prstGeom prst="rect">
-            <a:avLst/>
-          </a:prstGeom>
-          <a:noFill/>
-        </p:spPr>
-        <p:txBody>
-          <a:bodyPr wrap="square" anchor="t"/>
-          <a:lstStyle/>
-          <a:p>
-            <a:pPr algn="l"/>
-            <a:r>
-              <a:rPr sz="1500" b="1">
-                <a:solidFill>
-                  <a:srgbClr val="0B2545"/>
-                </a:solidFill>
-                <a:latin typeface="Calibri"/>
-              </a:rPr>
-              <a:t>LEON provides a structured first reading of the specification, the matrix and the TDR, so that review meetings start from identified inconsistencies.</a:t>
-            </a:r>
-          </a:p>
-        </p:txBody>
-      </p:sp>
-      <p:sp>
-        <p:nvSpPr>
-          <p:cNvPr id="25" name="Rectangle 24"/>
+              <a:t>Faster preparation of a TDR review.
+Fewer OK declarations accepted despite a contradictory comment.
+Structured comparison of several suppliers on technical criteria.
+Rule of use: the application proposes; the engineer validates.
+A short feedback to the team can be prepared after the training.</a:t>
+            </a:r>
+          </a:p>
+        </p:txBody>
+      </p:sp>
+      <p:sp>
+        <p:nvSpPr>
+          <p:cNvPr id="16" name="Rectangle 15"/>
           <p:cNvSpPr/>
           <p:nvPr/>
         </p:nvSpPr>
@@ -6246,7 +5136,7 @@
       </p:sp>
       <p:sp>
         <p:nvSpPr>
-          <p:cNvPr id="26" name="TextBox 25"/>
+          <p:cNvPr id="17" name="TextBox 16"/>
           <p:cNvSpPr txBox="1"/>
           <p:nvPr/>
         </p:nvSpPr>
@@ -6279,7 +5169,7 @@
       </p:sp>
       <p:sp>
         <p:nvSpPr>
-          <p:cNvPr id="27" name="TextBox 26"/>
+          <p:cNvPr id="18" name="TextBox 17"/>
           <p:cNvSpPr txBox="1"/>
           <p:nvPr/>
         </p:nvSpPr>
@@ -6305,7 +5195,7 @@
                 </a:solidFill>
                 <a:latin typeface="Calibri"/>
               </a:rPr>
-              <a:t>10  /  14</a:t>
+              <a:t>10  /  11</a:t>
             </a:r>
           </a:p>
         </p:txBody>
@@ -6485,7 +5375,7 @@
                 </a:solidFill>
                 <a:latin typeface="Calibri"/>
               </a:rPr>
-              <a:t>COLLABORATION</a:t>
+              <a:t>WORKING ARRANGEMENTS</a:t>
             </a:r>
           </a:p>
         </p:txBody>
@@ -6518,7 +5408,7 @@
                 </a:solidFill>
                 <a:latin typeface="Calibri"/>
               </a:rPr>
-              <a:t>Working arrangement within Mechatronics Engineering</a:t>
+              <a:t>Points submitted for confirmation</a:t>
             </a:r>
           </a:p>
         </p:txBody>
@@ -6551,7 +5441,7 @@
                 </a:solidFill>
                 <a:latin typeface="Calibri"/>
               </a:rPr>
-              <a:t>Imane El Brouji and Patrick Garcia provide the domain input. Development of LEON is carried out on that basis.</a:t>
+              <a:t>Télétravail and first school period.</a:t>
             </a:r>
           </a:p>
         </p:txBody>
@@ -6565,7 +5455,7 @@
         <p:spPr>
           <a:xfrm>
             <a:off x="411480" y="1389888"/>
-            <a:ext cx="5532120" cy="3246120"/>
+            <a:ext cx="5532120" cy="3383280"/>
           </a:xfrm>
           <a:prstGeom prst="roundRect">
             <a:avLst>
@@ -6612,7 +5502,7 @@
         <p:spPr>
           <a:xfrm>
             <a:off x="411480" y="1389888"/>
-            <a:ext cx="5532120" cy="109728"/>
+            <a:ext cx="5532120" cy="475488"/>
           </a:xfrm>
           <a:prstGeom prst="rect">
             <a:avLst/>
@@ -6654,8 +5544,8 @@
         </p:nvSpPr>
         <p:spPr>
           <a:xfrm>
-            <a:off x="640080" y="1645920"/>
-            <a:ext cx="5074920" cy="365760"/>
+            <a:off x="594360" y="1444752"/>
+            <a:ext cx="5212080" cy="384048"/>
           </a:xfrm>
           <a:prstGeom prst="rect">
             <a:avLst/>
@@ -6663,18 +5553,18 @@
           <a:noFill/>
         </p:spPr>
         <p:txBody>
-          <a:bodyPr wrap="square" anchor="t"/>
+          <a:bodyPr wrap="square" anchor="ctr"/>
           <a:lstStyle/>
           <a:p>
             <a:pPr algn="l"/>
             <a:r>
-              <a:rPr sz="2200" b="1">
-                <a:solidFill>
-                  <a:srgbClr val="0B2545"/>
+              <a:rPr sz="1800" b="1">
+                <a:solidFill>
+                  <a:srgbClr val="FFFFFF"/>
                 </a:solidFill>
                 <a:latin typeface="Calibri"/>
               </a:rPr>
-              <a:t>Imane El Brouji</a:t>
+              <a:t>Télétravail (TT)</a:t>
             </a:r>
           </a:p>
         </p:txBody>
@@ -6687,8 +5577,8 @@
         </p:nvSpPr>
         <p:spPr>
           <a:xfrm>
-            <a:off x="640080" y="2084831"/>
-            <a:ext cx="5074920" cy="292608"/>
+            <a:off x="640080" y="2057400"/>
+            <a:ext cx="5074920" cy="2468880"/>
           </a:xfrm>
           <a:prstGeom prst="rect">
             <a:avLst/>
@@ -6701,60 +5591,30 @@
           <a:p>
             <a:pPr algn="l"/>
             <a:r>
-              <a:rPr sz="1400" b="1">
-                <a:solidFill>
-                  <a:srgbClr val="1D4ED8"/>
+              <a:rPr sz="1600" b="0">
+                <a:solidFill>
+                  <a:srgbClr val="1C2B3A"/>
                 </a:solidFill>
                 <a:latin typeface="Calibri"/>
               </a:rPr>
-              <a:t>Mechatronics Engineering</a:t>
-            </a:r>
-          </a:p>
-        </p:txBody>
-      </p:sp>
-      <p:sp>
-        <p:nvSpPr>
-          <p:cNvPr id="12" name="TextBox 11"/>
-          <p:cNvSpPr txBox="1"/>
-          <p:nvPr/>
-        </p:nvSpPr>
-        <p:spPr>
-          <a:xfrm>
-            <a:off x="640080" y="2514600"/>
-            <a:ext cx="5074920" cy="1828800"/>
-          </a:xfrm>
-          <a:prstGeom prst="rect">
-            <a:avLst/>
-          </a:prstGeom>
-          <a:noFill/>
-        </p:spPr>
-        <p:txBody>
-          <a:bodyPr wrap="square" anchor="t"/>
-          <a:lstStyle/>
-          <a:p>
-            <a:pPr algn="l"/>
-            <a:r>
-              <a:rPr sz="1500" b="0">
-                <a:solidFill>
-                  <a:srgbClr val="1C2B3A"/>
-                </a:solidFill>
-                <a:latin typeface="Calibri"/>
-              </a:rPr>
-              <a:t>Defines the operational needs of the team, the documents actually received, and the analyses that are useful during a review.</a:t>
-            </a:r>
-          </a:p>
-        </p:txBody>
-      </p:sp>
-      <p:sp>
-        <p:nvSpPr>
-          <p:cNvPr id="13" name="Rounded Rectangle 12"/>
+              <a:t>Proposed weekly pattern: two days of télétravail.
+• Wednesday
+• Friday
+Submitted for confirmation, so that on-site presence is clear for the team.</a:t>
+            </a:r>
+          </a:p>
+        </p:txBody>
+      </p:sp>
+      <p:sp>
+        <p:nvSpPr>
+          <p:cNvPr id="12" name="Rounded Rectangle 11"/>
           <p:cNvSpPr/>
           <p:nvPr/>
         </p:nvSpPr>
         <p:spPr>
           <a:xfrm>
             <a:off x="6172200" y="1389888"/>
-            <a:ext cx="5532120" cy="3246120"/>
+            <a:ext cx="5532120" cy="3383280"/>
           </a:xfrm>
           <a:prstGeom prst="roundRect">
             <a:avLst>
@@ -6794,2541 +5654,6 @@
       </p:sp>
       <p:sp>
         <p:nvSpPr>
-          <p:cNvPr id="14" name="Rectangle 13"/>
-          <p:cNvSpPr/>
-          <p:nvPr/>
-        </p:nvSpPr>
-        <p:spPr>
-          <a:xfrm>
-            <a:off x="6172200" y="1389888"/>
-            <a:ext cx="5532120" cy="109728"/>
-          </a:xfrm>
-          <a:prstGeom prst="rect">
-            <a:avLst/>
-          </a:prstGeom>
-          <a:solidFill>
-            <a:srgbClr val="157347"/>
-          </a:solidFill>
-          <a:ln>
-            <a:noFill/>
-          </a:ln>
-        </p:spPr>
-        <p:style>
-          <a:lnRef idx="1">
-            <a:schemeClr val="accent1"/>
-          </a:lnRef>
-          <a:fillRef idx="3">
-            <a:schemeClr val="accent1"/>
-          </a:fillRef>
-          <a:effectRef idx="2">
-            <a:schemeClr val="accent1"/>
-          </a:effectRef>
-          <a:fontRef idx="minor">
-            <a:schemeClr val="lt1"/>
-          </a:fontRef>
-        </p:style>
-        <p:txBody>
-          <a:bodyPr rtlCol="0" anchor="ctr"/>
-          <a:lstStyle/>
-          <a:p>
-            <a:pPr algn="ctr"/>
-          </a:p>
-        </p:txBody>
-      </p:sp>
-      <p:sp>
-        <p:nvSpPr>
-          <p:cNvPr id="15" name="TextBox 14"/>
-          <p:cNvSpPr txBox="1"/>
-          <p:nvPr/>
-        </p:nvSpPr>
-        <p:spPr>
-          <a:xfrm>
-            <a:off x="6400800" y="1645920"/>
-            <a:ext cx="5074920" cy="365760"/>
-          </a:xfrm>
-          <a:prstGeom prst="rect">
-            <a:avLst/>
-          </a:prstGeom>
-          <a:noFill/>
-        </p:spPr>
-        <p:txBody>
-          <a:bodyPr wrap="square" anchor="t"/>
-          <a:lstStyle/>
-          <a:p>
-            <a:pPr algn="l"/>
-            <a:r>
-              <a:rPr sz="2200" b="1">
-                <a:solidFill>
-                  <a:srgbClr val="0B2545"/>
-                </a:solidFill>
-                <a:latin typeface="Calibri"/>
-              </a:rPr>
-              <a:t>Patrick Garcia</a:t>
-            </a:r>
-          </a:p>
-        </p:txBody>
-      </p:sp>
-      <p:sp>
-        <p:nvSpPr>
-          <p:cNvPr id="16" name="TextBox 15"/>
-          <p:cNvSpPr txBox="1"/>
-          <p:nvPr/>
-        </p:nvSpPr>
-        <p:spPr>
-          <a:xfrm>
-            <a:off x="6400800" y="2084831"/>
-            <a:ext cx="5074920" cy="292608"/>
-          </a:xfrm>
-          <a:prstGeom prst="rect">
-            <a:avLst/>
-          </a:prstGeom>
-          <a:noFill/>
-        </p:spPr>
-        <p:txBody>
-          <a:bodyPr wrap="square" anchor="t"/>
-          <a:lstStyle/>
-          <a:p>
-            <a:pPr algn="l"/>
-            <a:r>
-              <a:rPr sz="1400" b="1">
-                <a:solidFill>
-                  <a:srgbClr val="157347"/>
-                </a:solidFill>
-                <a:latin typeface="Calibri"/>
-              </a:rPr>
-              <a:t>Mechatronics Engineering</a:t>
-            </a:r>
-          </a:p>
-        </p:txBody>
-      </p:sp>
-      <p:sp>
-        <p:nvSpPr>
-          <p:cNvPr id="17" name="TextBox 16"/>
-          <p:cNvSpPr txBox="1"/>
-          <p:nvPr/>
-        </p:nvSpPr>
-        <p:spPr>
-          <a:xfrm>
-            <a:off x="6400800" y="2514600"/>
-            <a:ext cx="5074920" cy="1828800"/>
-          </a:xfrm>
-          <a:prstGeom prst="rect">
-            <a:avLst/>
-          </a:prstGeom>
-          <a:noFill/>
-        </p:spPr>
-        <p:txBody>
-          <a:bodyPr wrap="square" anchor="t"/>
-          <a:lstStyle/>
-          <a:p>
-            <a:pPr algn="l"/>
-            <a:r>
-              <a:rPr sz="1500" b="0">
-                <a:solidFill>
-                  <a:srgbClr val="1C2B3A"/>
-                </a:solidFill>
-                <a:latin typeface="Calibri"/>
-              </a:rPr>
-              <a:t>Provides the mechatronics context: use of the specification, the matrix and the TDR, and the expected content of a technical review.</a:t>
-            </a:r>
-          </a:p>
-        </p:txBody>
-      </p:sp>
-      <p:sp>
-        <p:nvSpPr>
-          <p:cNvPr id="18" name="Rounded Rectangle 17"/>
-          <p:cNvSpPr/>
-          <p:nvPr/>
-        </p:nvSpPr>
-        <p:spPr>
-          <a:xfrm>
-            <a:off x="411480" y="4800600"/>
-            <a:ext cx="11292840" cy="1554480"/>
-          </a:xfrm>
-          <a:prstGeom prst="roundRect">
-            <a:avLst>
-              <a:gd name="adj" fmla="val 8000"/>
-            </a:avLst>
-          </a:prstGeom>
-          <a:solidFill>
-            <a:srgbClr val="FFFFFF"/>
-          </a:solidFill>
-          <a:ln w="12700">
-            <a:solidFill>
-              <a:srgbClr val="DDE3EC"/>
-            </a:solidFill>
-          </a:ln>
-        </p:spPr>
-        <p:style>
-          <a:lnRef idx="1">
-            <a:schemeClr val="accent1"/>
-          </a:lnRef>
-          <a:fillRef idx="3">
-            <a:schemeClr val="accent1"/>
-          </a:fillRef>
-          <a:effectRef idx="2">
-            <a:schemeClr val="accent1"/>
-          </a:effectRef>
-          <a:fontRef idx="minor">
-            <a:schemeClr val="lt1"/>
-          </a:fontRef>
-        </p:style>
-        <p:txBody>
-          <a:bodyPr rtlCol="0" anchor="ctr"/>
-          <a:lstStyle/>
-          <a:p>
-            <a:pPr algn="ctr"/>
-          </a:p>
-        </p:txBody>
-      </p:sp>
-      <p:sp>
-        <p:nvSpPr>
-          <p:cNvPr id="19" name="Rectangle 18"/>
-          <p:cNvSpPr/>
-          <p:nvPr/>
-        </p:nvSpPr>
-        <p:spPr>
-          <a:xfrm>
-            <a:off x="411480" y="4800600"/>
-            <a:ext cx="109728" cy="1554480"/>
-          </a:xfrm>
-          <a:prstGeom prst="rect">
-            <a:avLst/>
-          </a:prstGeom>
-          <a:solidFill>
-            <a:srgbClr val="123061"/>
-          </a:solidFill>
-          <a:ln>
-            <a:noFill/>
-          </a:ln>
-        </p:spPr>
-        <p:style>
-          <a:lnRef idx="1">
-            <a:schemeClr val="accent1"/>
-          </a:lnRef>
-          <a:fillRef idx="3">
-            <a:schemeClr val="accent1"/>
-          </a:fillRef>
-          <a:effectRef idx="2">
-            <a:schemeClr val="accent1"/>
-          </a:effectRef>
-          <a:fontRef idx="minor">
-            <a:schemeClr val="lt1"/>
-          </a:fontRef>
-        </p:style>
-        <p:txBody>
-          <a:bodyPr rtlCol="0" anchor="ctr"/>
-          <a:lstStyle/>
-          <a:p>
-            <a:pPr algn="ctr"/>
-          </a:p>
-        </p:txBody>
-      </p:sp>
-      <p:sp>
-        <p:nvSpPr>
-          <p:cNvPr id="20" name="TextBox 19"/>
-          <p:cNvSpPr txBox="1"/>
-          <p:nvPr/>
-        </p:nvSpPr>
-        <p:spPr>
-          <a:xfrm>
-            <a:off x="731520" y="4937760"/>
-            <a:ext cx="10698480" cy="329184"/>
-          </a:xfrm>
-          <a:prstGeom prst="rect">
-            <a:avLst/>
-          </a:prstGeom>
-          <a:noFill/>
-        </p:spPr>
-        <p:txBody>
-          <a:bodyPr wrap="square" anchor="t"/>
-          <a:lstStyle/>
-          <a:p>
-            <a:pPr algn="l"/>
-            <a:r>
-              <a:rPr sz="1600" b="1">
-                <a:solidFill>
-                  <a:srgbClr val="0B2545"/>
-                </a:solidFill>
-                <a:latin typeface="Calibri"/>
-              </a:rPr>
-              <a:t>Division of roles</a:t>
-            </a:r>
-          </a:p>
-        </p:txBody>
-      </p:sp>
-      <p:sp>
-        <p:nvSpPr>
-          <p:cNvPr id="21" name="TextBox 20"/>
-          <p:cNvSpPr txBox="1"/>
-          <p:nvPr/>
-        </p:nvSpPr>
-        <p:spPr>
-          <a:xfrm>
-            <a:off x="731520" y="5321808"/>
-            <a:ext cx="10698480" cy="822960"/>
-          </a:xfrm>
-          <a:prstGeom prst="rect">
-            <a:avLst/>
-          </a:prstGeom>
-          <a:noFill/>
-        </p:spPr>
-        <p:txBody>
-          <a:bodyPr wrap="square" anchor="t"/>
-          <a:lstStyle/>
-          <a:p>
-            <a:pPr algn="l"/>
-            <a:r>
-              <a:rPr sz="1500" b="0">
-                <a:solidFill>
-                  <a:srgbClr val="1C2B3A"/>
-                </a:solidFill>
-                <a:latin typeface="Calibri"/>
-              </a:rPr>
-              <a:t>They provide the ideas and the technical meaning. I implement and iterate on LEON. The application is designed from mechatronics practice, not as a standalone IT development.</a:t>
-            </a:r>
-          </a:p>
-        </p:txBody>
-      </p:sp>
-      <p:sp>
-        <p:nvSpPr>
-          <p:cNvPr id="22" name="Rectangle 21"/>
-          <p:cNvSpPr/>
-          <p:nvPr/>
-        </p:nvSpPr>
-        <p:spPr>
-          <a:xfrm>
-            <a:off x="0" y="6601968"/>
-            <a:ext cx="12191695" cy="256032"/>
-          </a:xfrm>
-          <a:prstGeom prst="rect">
-            <a:avLst/>
-          </a:prstGeom>
-          <a:solidFill>
-            <a:srgbClr val="0B2545"/>
-          </a:solidFill>
-          <a:ln>
-            <a:noFill/>
-          </a:ln>
-        </p:spPr>
-        <p:style>
-          <a:lnRef idx="1">
-            <a:schemeClr val="accent1"/>
-          </a:lnRef>
-          <a:fillRef idx="3">
-            <a:schemeClr val="accent1"/>
-          </a:fillRef>
-          <a:effectRef idx="2">
-            <a:schemeClr val="accent1"/>
-          </a:effectRef>
-          <a:fontRef idx="minor">
-            <a:schemeClr val="lt1"/>
-          </a:fontRef>
-        </p:style>
-        <p:txBody>
-          <a:bodyPr rtlCol="0" anchor="ctr"/>
-          <a:lstStyle/>
-          <a:p>
-            <a:pPr algn="ctr"/>
-          </a:p>
-        </p:txBody>
-      </p:sp>
-      <p:sp>
-        <p:nvSpPr>
-          <p:cNvPr id="23" name="TextBox 22"/>
-          <p:cNvSpPr txBox="1"/>
-          <p:nvPr/>
-        </p:nvSpPr>
-        <p:spPr>
-          <a:xfrm>
-            <a:off x="365760" y="6601968"/>
-            <a:ext cx="9144000" cy="256032"/>
-          </a:xfrm>
-          <a:prstGeom prst="rect">
-            <a:avLst/>
-          </a:prstGeom>
-          <a:noFill/>
-        </p:spPr>
-        <p:txBody>
-          <a:bodyPr wrap="square" anchor="ctr"/>
-          <a:lstStyle/>
-          <a:p>
-            <a:pPr algn="l"/>
-            <a:r>
-              <a:rPr sz="1100" b="0">
-                <a:solidFill>
-                  <a:srgbClr val="A9BCD4"/>
-                </a:solidFill>
-                <a:latin typeface="Calibri"/>
-              </a:rPr>
-              <a:t>Khadija Benhamida  ·  Mechatronics Engineering  ·  Confidential</a:t>
-            </a:r>
-          </a:p>
-        </p:txBody>
-      </p:sp>
-      <p:sp>
-        <p:nvSpPr>
-          <p:cNvPr id="24" name="TextBox 23"/>
-          <p:cNvSpPr txBox="1"/>
-          <p:nvPr/>
-        </p:nvSpPr>
-        <p:spPr>
-          <a:xfrm>
-            <a:off x="10424160" y="6601968"/>
-            <a:ext cx="1371600" cy="256032"/>
-          </a:xfrm>
-          <a:prstGeom prst="rect">
-            <a:avLst/>
-          </a:prstGeom>
-          <a:noFill/>
-        </p:spPr>
-        <p:txBody>
-          <a:bodyPr wrap="square" anchor="ctr"/>
-          <a:lstStyle/>
-          <a:p>
-            <a:pPr algn="r"/>
-            <a:r>
-              <a:rPr sz="1100" b="0">
-                <a:solidFill>
-                  <a:srgbClr val="FFFFFF"/>
-                </a:solidFill>
-                <a:latin typeface="Calibri"/>
-              </a:rPr>
-              <a:t>11  /  14</a:t>
-            </a:r>
-          </a:p>
-        </p:txBody>
-      </p:sp>
-    </p:spTree>
-  </p:cSld>
-  <p:clrMapOvr>
-    <a:masterClrMapping/>
-  </p:clrMapOvr>
-</p:sld>
-</file>
-
-<file path=ppt/slides/slide12.xml><?xml version="1.0" encoding="utf-8"?>
-<p:sld xmlns:a="http://schemas.openxmlformats.org/drawingml/2006/main" xmlns:p="http://schemas.openxmlformats.org/presentationml/2006/main" xmlns:r="http://schemas.openxmlformats.org/officeDocument/2006/relationships">
-  <p:cSld>
-    <p:spTree>
-      <p:nvGrpSpPr>
-        <p:cNvPr id="1" name=""/>
-        <p:cNvGrpSpPr/>
-        <p:nvPr/>
-      </p:nvGrpSpPr>
-      <p:grpSpPr/>
-      <p:sp>
-        <p:nvSpPr>
-          <p:cNvPr id="2" name="Rectangle 1"/>
-          <p:cNvSpPr/>
-          <p:nvPr/>
-        </p:nvSpPr>
-        <p:spPr>
-          <a:xfrm>
-            <a:off x="0" y="0"/>
-            <a:ext cx="12191695" cy="6858000"/>
-          </a:xfrm>
-          <a:prstGeom prst="rect">
-            <a:avLst/>
-          </a:prstGeom>
-          <a:solidFill>
-            <a:srgbClr val="F4F7FB"/>
-          </a:solidFill>
-          <a:ln>
-            <a:noFill/>
-          </a:ln>
-        </p:spPr>
-        <p:style>
-          <a:lnRef idx="1">
-            <a:schemeClr val="accent1"/>
-          </a:lnRef>
-          <a:fillRef idx="3">
-            <a:schemeClr val="accent1"/>
-          </a:fillRef>
-          <a:effectRef idx="2">
-            <a:schemeClr val="accent1"/>
-          </a:effectRef>
-          <a:fontRef idx="minor">
-            <a:schemeClr val="lt1"/>
-          </a:fontRef>
-        </p:style>
-        <p:txBody>
-          <a:bodyPr rtlCol="0" anchor="ctr"/>
-          <a:lstStyle/>
-          <a:p>
-            <a:pPr algn="ctr"/>
-          </a:p>
-        </p:txBody>
-      </p:sp>
-      <p:sp>
-        <p:nvSpPr>
-          <p:cNvPr id="3" name="Rectangle 2"/>
-          <p:cNvSpPr/>
-          <p:nvPr/>
-        </p:nvSpPr>
-        <p:spPr>
-          <a:xfrm>
-            <a:off x="0" y="0"/>
-            <a:ext cx="12191695" cy="1078992"/>
-          </a:xfrm>
-          <a:prstGeom prst="rect">
-            <a:avLst/>
-          </a:prstGeom>
-          <a:solidFill>
-            <a:srgbClr val="0B2545"/>
-          </a:solidFill>
-          <a:ln>
-            <a:noFill/>
-          </a:ln>
-        </p:spPr>
-        <p:style>
-          <a:lnRef idx="1">
-            <a:schemeClr val="accent1"/>
-          </a:lnRef>
-          <a:fillRef idx="3">
-            <a:schemeClr val="accent1"/>
-          </a:fillRef>
-          <a:effectRef idx="2">
-            <a:schemeClr val="accent1"/>
-          </a:effectRef>
-          <a:fontRef idx="minor">
-            <a:schemeClr val="lt1"/>
-          </a:fontRef>
-        </p:style>
-        <p:txBody>
-          <a:bodyPr rtlCol="0" anchor="ctr"/>
-          <a:lstStyle/>
-          <a:p>
-            <a:pPr algn="ctr"/>
-          </a:p>
-        </p:txBody>
-      </p:sp>
-      <p:sp>
-        <p:nvSpPr>
-          <p:cNvPr id="4" name="Rectangle 3"/>
-          <p:cNvSpPr/>
-          <p:nvPr/>
-        </p:nvSpPr>
-        <p:spPr>
-          <a:xfrm>
-            <a:off x="0" y="1078992"/>
-            <a:ext cx="12191695" cy="54864"/>
-          </a:xfrm>
-          <a:prstGeom prst="rect">
-            <a:avLst/>
-          </a:prstGeom>
-          <a:solidFill>
-            <a:srgbClr val="1D4ED8"/>
-          </a:solidFill>
-          <a:ln>
-            <a:noFill/>
-          </a:ln>
-        </p:spPr>
-        <p:style>
-          <a:lnRef idx="1">
-            <a:schemeClr val="accent1"/>
-          </a:lnRef>
-          <a:fillRef idx="3">
-            <a:schemeClr val="accent1"/>
-          </a:fillRef>
-          <a:effectRef idx="2">
-            <a:schemeClr val="accent1"/>
-          </a:effectRef>
-          <a:fontRef idx="minor">
-            <a:schemeClr val="lt1"/>
-          </a:fontRef>
-        </p:style>
-        <p:txBody>
-          <a:bodyPr rtlCol="0" anchor="ctr"/>
-          <a:lstStyle/>
-          <a:p>
-            <a:pPr algn="ctr"/>
-          </a:p>
-        </p:txBody>
-      </p:sp>
-      <p:sp>
-        <p:nvSpPr>
-          <p:cNvPr id="5" name="TextBox 4"/>
-          <p:cNvSpPr txBox="1"/>
-          <p:nvPr/>
-        </p:nvSpPr>
-        <p:spPr>
-          <a:xfrm>
-            <a:off x="457200" y="91440"/>
-            <a:ext cx="11247120" cy="256032"/>
-          </a:xfrm>
-          <a:prstGeom prst="rect">
-            <a:avLst/>
-          </a:prstGeom>
-          <a:noFill/>
-        </p:spPr>
-        <p:txBody>
-          <a:bodyPr wrap="square" anchor="t"/>
-          <a:lstStyle/>
-          <a:p>
-            <a:pPr algn="l"/>
-            <a:r>
-              <a:rPr sz="1100" b="1">
-                <a:solidFill>
-                  <a:srgbClr val="A9BCD4"/>
-                </a:solidFill>
-                <a:latin typeface="Calibri"/>
-              </a:rPr>
-              <a:t>STATUS AND NEXT STEP</a:t>
-            </a:r>
-          </a:p>
-        </p:txBody>
-      </p:sp>
-      <p:sp>
-        <p:nvSpPr>
-          <p:cNvPr id="6" name="TextBox 5"/>
-          <p:cNvSpPr txBox="1"/>
-          <p:nvPr/>
-        </p:nvSpPr>
-        <p:spPr>
-          <a:xfrm>
-            <a:off x="457200" y="310896"/>
-            <a:ext cx="11247120" cy="384048"/>
-          </a:xfrm>
-          <a:prstGeom prst="rect">
-            <a:avLst/>
-          </a:prstGeom>
-          <a:noFill/>
-        </p:spPr>
-        <p:txBody>
-          <a:bodyPr wrap="square" anchor="t"/>
-          <a:lstStyle/>
-          <a:p>
-            <a:pPr algn="l"/>
-            <a:r>
-              <a:rPr sz="2600" b="1">
-                <a:solidFill>
-                  <a:srgbClr val="FFFFFF"/>
-                </a:solidFill>
-                <a:latin typeface="Calibri"/>
-              </a:rPr>
-              <a:t>Development in progress — then deployment</a:t>
-            </a:r>
-          </a:p>
-        </p:txBody>
-      </p:sp>
-      <p:sp>
-        <p:nvSpPr>
-          <p:cNvPr id="7" name="TextBox 6"/>
-          <p:cNvSpPr txBox="1"/>
-          <p:nvPr/>
-        </p:nvSpPr>
-        <p:spPr>
-          <a:xfrm>
-            <a:off x="457200" y="713232"/>
-            <a:ext cx="11247120" cy="292608"/>
-          </a:xfrm>
-          <a:prstGeom prst="rect">
-            <a:avLst/>
-          </a:prstGeom>
-          <a:noFill/>
-        </p:spPr>
-        <p:txBody>
-          <a:bodyPr wrap="square" anchor="t"/>
-          <a:lstStyle/>
-          <a:p>
-            <a:pPr algn="l"/>
-            <a:r>
-              <a:rPr sz="1300" b="0">
-                <a:solidFill>
-                  <a:srgbClr val="C5D4E8"/>
-                </a:solidFill>
-                <a:latin typeface="Calibri"/>
-              </a:rPr>
-              <a:t>Access for the whole team will be opened after completion of this phase.</a:t>
-            </a:r>
-          </a:p>
-        </p:txBody>
-      </p:sp>
-      <p:sp>
-        <p:nvSpPr>
-          <p:cNvPr id="8" name="Rounded Rectangle 7"/>
-          <p:cNvSpPr/>
-          <p:nvPr/>
-        </p:nvSpPr>
-        <p:spPr>
-          <a:xfrm>
-            <a:off x="411480" y="1417320"/>
-            <a:ext cx="3703320" cy="3703320"/>
-          </a:xfrm>
-          <a:prstGeom prst="roundRect">
-            <a:avLst>
-              <a:gd name="adj" fmla="val 8000"/>
-            </a:avLst>
-          </a:prstGeom>
-          <a:solidFill>
-            <a:srgbClr val="FFFFFF"/>
-          </a:solidFill>
-          <a:ln w="12700">
-            <a:solidFill>
-              <a:srgbClr val="DDE3EC"/>
-            </a:solidFill>
-          </a:ln>
-        </p:spPr>
-        <p:style>
-          <a:lnRef idx="1">
-            <a:schemeClr val="accent1"/>
-          </a:lnRef>
-          <a:fillRef idx="3">
-            <a:schemeClr val="accent1"/>
-          </a:fillRef>
-          <a:effectRef idx="2">
-            <a:schemeClr val="accent1"/>
-          </a:effectRef>
-          <a:fontRef idx="minor">
-            <a:schemeClr val="lt1"/>
-          </a:fontRef>
-        </p:style>
-        <p:txBody>
-          <a:bodyPr rtlCol="0" anchor="ctr"/>
-          <a:lstStyle/>
-          <a:p>
-            <a:pPr algn="ctr"/>
-          </a:p>
-        </p:txBody>
-      </p:sp>
-      <p:sp>
-        <p:nvSpPr>
-          <p:cNvPr id="9" name="Rectangle 8"/>
-          <p:cNvSpPr/>
-          <p:nvPr/>
-        </p:nvSpPr>
-        <p:spPr>
-          <a:xfrm>
-            <a:off x="411480" y="1417320"/>
-            <a:ext cx="3703320" cy="109728"/>
-          </a:xfrm>
-          <a:prstGeom prst="rect">
-            <a:avLst/>
-          </a:prstGeom>
-          <a:solidFill>
-            <a:srgbClr val="1D4ED8"/>
-          </a:solidFill>
-          <a:ln>
-            <a:noFill/>
-          </a:ln>
-        </p:spPr>
-        <p:style>
-          <a:lnRef idx="1">
-            <a:schemeClr val="accent1"/>
-          </a:lnRef>
-          <a:fillRef idx="3">
-            <a:schemeClr val="accent1"/>
-          </a:fillRef>
-          <a:effectRef idx="2">
-            <a:schemeClr val="accent1"/>
-          </a:effectRef>
-          <a:fontRef idx="minor">
-            <a:schemeClr val="lt1"/>
-          </a:fontRef>
-        </p:style>
-        <p:txBody>
-          <a:bodyPr rtlCol="0" anchor="ctr"/>
-          <a:lstStyle/>
-          <a:p>
-            <a:pPr algn="ctr"/>
-          </a:p>
-        </p:txBody>
-      </p:sp>
-      <p:sp>
-        <p:nvSpPr>
-          <p:cNvPr id="10" name="TextBox 9"/>
-          <p:cNvSpPr txBox="1"/>
-          <p:nvPr/>
-        </p:nvSpPr>
-        <p:spPr>
-          <a:xfrm>
-            <a:off x="640080" y="1691640"/>
-            <a:ext cx="3246120" cy="365760"/>
-          </a:xfrm>
-          <a:prstGeom prst="rect">
-            <a:avLst/>
-          </a:prstGeom>
-          <a:noFill/>
-        </p:spPr>
-        <p:txBody>
-          <a:bodyPr wrap="square" anchor="t"/>
-          <a:lstStyle/>
-          <a:p>
-            <a:pPr algn="l"/>
-            <a:r>
-              <a:rPr sz="1300" b="1">
-                <a:solidFill>
-                  <a:srgbClr val="1D4ED8"/>
-                </a:solidFill>
-                <a:latin typeface="Calibri"/>
-              </a:rPr>
-              <a:t>01  Current phase</a:t>
-            </a:r>
-          </a:p>
-        </p:txBody>
-      </p:sp>
-      <p:sp>
-        <p:nvSpPr>
-          <p:cNvPr id="11" name="TextBox 10"/>
-          <p:cNvSpPr txBox="1"/>
-          <p:nvPr/>
-        </p:nvSpPr>
-        <p:spPr>
-          <a:xfrm>
-            <a:off x="640080" y="2084831"/>
-            <a:ext cx="3246120" cy="822960"/>
-          </a:xfrm>
-          <a:prstGeom prst="rect">
-            <a:avLst/>
-          </a:prstGeom>
-          <a:noFill/>
-        </p:spPr>
-        <p:txBody>
-          <a:bodyPr wrap="square" anchor="t"/>
-          <a:lstStyle/>
-          <a:p>
-            <a:pPr algn="l"/>
-            <a:r>
-              <a:rPr sz="2000" b="1">
-                <a:solidFill>
-                  <a:srgbClr val="0B2545"/>
-                </a:solidFill>
-                <a:latin typeface="Calibri"/>
-              </a:rPr>
-              <a:t>In progress</a:t>
-            </a:r>
-          </a:p>
-        </p:txBody>
-      </p:sp>
-      <p:sp>
-        <p:nvSpPr>
-          <p:cNvPr id="12" name="TextBox 11"/>
-          <p:cNvSpPr txBox="1"/>
-          <p:nvPr/>
-        </p:nvSpPr>
-        <p:spPr>
-          <a:xfrm>
-            <a:off x="640080" y="2971800"/>
-            <a:ext cx="3246120" cy="1874519"/>
-          </a:xfrm>
-          <a:prstGeom prst="rect">
-            <a:avLst/>
-          </a:prstGeom>
-          <a:noFill/>
-        </p:spPr>
-        <p:txBody>
-          <a:bodyPr wrap="square" anchor="t"/>
-          <a:lstStyle/>
-          <a:p>
-            <a:pPr algn="l"/>
-            <a:r>
-              <a:rPr sz="1400" b="0">
-                <a:solidFill>
-                  <a:srgbClr val="1C2B3A"/>
-                </a:solidFill>
-                <a:latin typeface="Calibri"/>
-              </a:rPr>
-              <a:t>Completion of the functions presented: specification, matrix, Matrix ↔ TDR and TDR benchmark.</a:t>
-            </a:r>
-          </a:p>
-        </p:txBody>
-      </p:sp>
-      <p:sp>
-        <p:nvSpPr>
-          <p:cNvPr id="13" name="Rounded Rectangle 12"/>
-          <p:cNvSpPr/>
-          <p:nvPr/>
-        </p:nvSpPr>
-        <p:spPr>
-          <a:xfrm>
-            <a:off x="4251960" y="1417320"/>
-            <a:ext cx="3703320" cy="3703320"/>
-          </a:xfrm>
-          <a:prstGeom prst="roundRect">
-            <a:avLst>
-              <a:gd name="adj" fmla="val 8000"/>
-            </a:avLst>
-          </a:prstGeom>
-          <a:solidFill>
-            <a:srgbClr val="FFFFFF"/>
-          </a:solidFill>
-          <a:ln w="12700">
-            <a:solidFill>
-              <a:srgbClr val="DDE3EC"/>
-            </a:solidFill>
-          </a:ln>
-        </p:spPr>
-        <p:style>
-          <a:lnRef idx="1">
-            <a:schemeClr val="accent1"/>
-          </a:lnRef>
-          <a:fillRef idx="3">
-            <a:schemeClr val="accent1"/>
-          </a:fillRef>
-          <a:effectRef idx="2">
-            <a:schemeClr val="accent1"/>
-          </a:effectRef>
-          <a:fontRef idx="minor">
-            <a:schemeClr val="lt1"/>
-          </a:fontRef>
-        </p:style>
-        <p:txBody>
-          <a:bodyPr rtlCol="0" anchor="ctr"/>
-          <a:lstStyle/>
-          <a:p>
-            <a:pPr algn="ctr"/>
-          </a:p>
-        </p:txBody>
-      </p:sp>
-      <p:sp>
-        <p:nvSpPr>
-          <p:cNvPr id="14" name="Rectangle 13"/>
-          <p:cNvSpPr/>
-          <p:nvPr/>
-        </p:nvSpPr>
-        <p:spPr>
-          <a:xfrm>
-            <a:off x="4251960" y="1417320"/>
-            <a:ext cx="3703320" cy="109728"/>
-          </a:xfrm>
-          <a:prstGeom prst="rect">
-            <a:avLst/>
-          </a:prstGeom>
-          <a:solidFill>
-            <a:srgbClr val="9A5B00"/>
-          </a:solidFill>
-          <a:ln>
-            <a:noFill/>
-          </a:ln>
-        </p:spPr>
-        <p:style>
-          <a:lnRef idx="1">
-            <a:schemeClr val="accent1"/>
-          </a:lnRef>
-          <a:fillRef idx="3">
-            <a:schemeClr val="accent1"/>
-          </a:fillRef>
-          <a:effectRef idx="2">
-            <a:schemeClr val="accent1"/>
-          </a:effectRef>
-          <a:fontRef idx="minor">
-            <a:schemeClr val="lt1"/>
-          </a:fontRef>
-        </p:style>
-        <p:txBody>
-          <a:bodyPr rtlCol="0" anchor="ctr"/>
-          <a:lstStyle/>
-          <a:p>
-            <a:pPr algn="ctr"/>
-          </a:p>
-        </p:txBody>
-      </p:sp>
-      <p:sp>
-        <p:nvSpPr>
-          <p:cNvPr id="15" name="TextBox 14"/>
-          <p:cNvSpPr txBox="1"/>
-          <p:nvPr/>
-        </p:nvSpPr>
-        <p:spPr>
-          <a:xfrm>
-            <a:off x="4480560" y="1691640"/>
-            <a:ext cx="3246120" cy="365760"/>
-          </a:xfrm>
-          <a:prstGeom prst="rect">
-            <a:avLst/>
-          </a:prstGeom>
-          <a:noFill/>
-        </p:spPr>
-        <p:txBody>
-          <a:bodyPr wrap="square" anchor="t"/>
-          <a:lstStyle/>
-          <a:p>
-            <a:pPr algn="l"/>
-            <a:r>
-              <a:rPr sz="1300" b="1">
-                <a:solidFill>
-                  <a:srgbClr val="9A5B00"/>
-                </a:solidFill>
-                <a:latin typeface="Calibri"/>
-              </a:rPr>
-              <a:t>02  Next</a:t>
-            </a:r>
-          </a:p>
-        </p:txBody>
-      </p:sp>
-      <p:sp>
-        <p:nvSpPr>
-          <p:cNvPr id="16" name="TextBox 15"/>
-          <p:cNvSpPr txBox="1"/>
-          <p:nvPr/>
-        </p:nvSpPr>
-        <p:spPr>
-          <a:xfrm>
-            <a:off x="4480560" y="2084831"/>
-            <a:ext cx="3246120" cy="822960"/>
-          </a:xfrm>
-          <a:prstGeom prst="rect">
-            <a:avLst/>
-          </a:prstGeom>
-          <a:noFill/>
-        </p:spPr>
-        <p:txBody>
-          <a:bodyPr wrap="square" anchor="t"/>
-          <a:lstStyle/>
-          <a:p>
-            <a:pPr algn="l"/>
-            <a:r>
-              <a:rPr sz="2000" b="1">
-                <a:solidFill>
-                  <a:srgbClr val="0B2545"/>
-                </a:solidFill>
-                <a:latin typeface="Calibri"/>
-              </a:rPr>
-              <a:t>Close this phase</a:t>
-            </a:r>
-          </a:p>
-        </p:txBody>
-      </p:sp>
-      <p:sp>
-        <p:nvSpPr>
-          <p:cNvPr id="17" name="TextBox 16"/>
-          <p:cNvSpPr txBox="1"/>
-          <p:nvPr/>
-        </p:nvSpPr>
-        <p:spPr>
-          <a:xfrm>
-            <a:off x="4480560" y="2971800"/>
-            <a:ext cx="3246120" cy="1874519"/>
-          </a:xfrm>
-          <a:prstGeom prst="rect">
-            <a:avLst/>
-          </a:prstGeom>
-          <a:noFill/>
-        </p:spPr>
-        <p:txBody>
-          <a:bodyPr wrap="square" anchor="t"/>
-          <a:lstStyle/>
-          <a:p>
-            <a:pPr algn="l"/>
-            <a:r>
-              <a:rPr sz="1400" b="0">
-                <a:solidFill>
-                  <a:srgbClr val="1C2B3A"/>
-                </a:solidFill>
-                <a:latin typeface="Calibri"/>
-              </a:rPr>
-              <a:t>Remaining development, tests on representative mechatronics files, alignment with Imane El Brouji and Patrick Garcia.</a:t>
-            </a:r>
-          </a:p>
-        </p:txBody>
-      </p:sp>
-      <p:sp>
-        <p:nvSpPr>
-          <p:cNvPr id="18" name="Rounded Rectangle 17"/>
-          <p:cNvSpPr/>
-          <p:nvPr/>
-        </p:nvSpPr>
-        <p:spPr>
-          <a:xfrm>
-            <a:off x="8092440" y="1417320"/>
-            <a:ext cx="3703320" cy="3703320"/>
-          </a:xfrm>
-          <a:prstGeom prst="roundRect">
-            <a:avLst>
-              <a:gd name="adj" fmla="val 8000"/>
-            </a:avLst>
-          </a:prstGeom>
-          <a:solidFill>
-            <a:srgbClr val="FFFFFF"/>
-          </a:solidFill>
-          <a:ln w="12700">
-            <a:solidFill>
-              <a:srgbClr val="DDE3EC"/>
-            </a:solidFill>
-          </a:ln>
-        </p:spPr>
-        <p:style>
-          <a:lnRef idx="1">
-            <a:schemeClr val="accent1"/>
-          </a:lnRef>
-          <a:fillRef idx="3">
-            <a:schemeClr val="accent1"/>
-          </a:fillRef>
-          <a:effectRef idx="2">
-            <a:schemeClr val="accent1"/>
-          </a:effectRef>
-          <a:fontRef idx="minor">
-            <a:schemeClr val="lt1"/>
-          </a:fontRef>
-        </p:style>
-        <p:txBody>
-          <a:bodyPr rtlCol="0" anchor="ctr"/>
-          <a:lstStyle/>
-          <a:p>
-            <a:pPr algn="ctr"/>
-          </a:p>
-        </p:txBody>
-      </p:sp>
-      <p:sp>
-        <p:nvSpPr>
-          <p:cNvPr id="19" name="Rectangle 18"/>
-          <p:cNvSpPr/>
-          <p:nvPr/>
-        </p:nvSpPr>
-        <p:spPr>
-          <a:xfrm>
-            <a:off x="8092440" y="1417320"/>
-            <a:ext cx="3703320" cy="109728"/>
-          </a:xfrm>
-          <a:prstGeom prst="rect">
-            <a:avLst/>
-          </a:prstGeom>
-          <a:solidFill>
-            <a:srgbClr val="157347"/>
-          </a:solidFill>
-          <a:ln>
-            <a:noFill/>
-          </a:ln>
-        </p:spPr>
-        <p:style>
-          <a:lnRef idx="1">
-            <a:schemeClr val="accent1"/>
-          </a:lnRef>
-          <a:fillRef idx="3">
-            <a:schemeClr val="accent1"/>
-          </a:fillRef>
-          <a:effectRef idx="2">
-            <a:schemeClr val="accent1"/>
-          </a:effectRef>
-          <a:fontRef idx="minor">
-            <a:schemeClr val="lt1"/>
-          </a:fontRef>
-        </p:style>
-        <p:txBody>
-          <a:bodyPr rtlCol="0" anchor="ctr"/>
-          <a:lstStyle/>
-          <a:p>
-            <a:pPr algn="ctr"/>
-          </a:p>
-        </p:txBody>
-      </p:sp>
-      <p:sp>
-        <p:nvSpPr>
-          <p:cNvPr id="20" name="TextBox 19"/>
-          <p:cNvSpPr txBox="1"/>
-          <p:nvPr/>
-        </p:nvSpPr>
-        <p:spPr>
-          <a:xfrm>
-            <a:off x="8321040" y="1691640"/>
-            <a:ext cx="3246120" cy="365760"/>
-          </a:xfrm>
-          <a:prstGeom prst="rect">
-            <a:avLst/>
-          </a:prstGeom>
-          <a:noFill/>
-        </p:spPr>
-        <p:txBody>
-          <a:bodyPr wrap="square" anchor="t"/>
-          <a:lstStyle/>
-          <a:p>
-            <a:pPr algn="l"/>
-            <a:r>
-              <a:rPr sz="1300" b="1">
-                <a:solidFill>
-                  <a:srgbClr val="157347"/>
-                </a:solidFill>
-                <a:latin typeface="Calibri"/>
-              </a:rPr>
-              <a:t>03  Then</a:t>
-            </a:r>
-          </a:p>
-        </p:txBody>
-      </p:sp>
-      <p:sp>
-        <p:nvSpPr>
-          <p:cNvPr id="21" name="TextBox 20"/>
-          <p:cNvSpPr txBox="1"/>
-          <p:nvPr/>
-        </p:nvSpPr>
-        <p:spPr>
-          <a:xfrm>
-            <a:off x="8321040" y="2084831"/>
-            <a:ext cx="3246120" cy="822960"/>
-          </a:xfrm>
-          <a:prstGeom prst="rect">
-            <a:avLst/>
-          </a:prstGeom>
-          <a:noFill/>
-        </p:spPr>
-        <p:txBody>
-          <a:bodyPr wrap="square" anchor="t"/>
-          <a:lstStyle/>
-          <a:p>
-            <a:pPr algn="l"/>
-            <a:r>
-              <a:rPr sz="2000" b="1">
-                <a:solidFill>
-                  <a:srgbClr val="0B2545"/>
-                </a:solidFill>
-                <a:latin typeface="Calibri"/>
-              </a:rPr>
-              <a:t>Team deployment</a:t>
-            </a:r>
-          </a:p>
-        </p:txBody>
-      </p:sp>
-      <p:sp>
-        <p:nvSpPr>
-          <p:cNvPr id="22" name="TextBox 21"/>
-          <p:cNvSpPr txBox="1"/>
-          <p:nvPr/>
-        </p:nvSpPr>
-        <p:spPr>
-          <a:xfrm>
-            <a:off x="8321040" y="2971800"/>
-            <a:ext cx="3246120" cy="1874519"/>
-          </a:xfrm>
-          <a:prstGeom prst="rect">
-            <a:avLst/>
-          </a:prstGeom>
-          <a:noFill/>
-        </p:spPr>
-        <p:txBody>
-          <a:bodyPr wrap="square" anchor="t"/>
-          <a:lstStyle/>
-          <a:p>
-            <a:pPr algn="l"/>
-            <a:r>
-              <a:rPr sz="1400" b="0">
-                <a:solidFill>
-                  <a:srgbClr val="1C2B3A"/>
-                </a:solidFill>
-                <a:latin typeface="Calibri"/>
-              </a:rPr>
-              <a:t>Once this phase is completed, deployment will start so that Mechatronics Engineering can use LEON in a browser, without installation.</a:t>
-            </a:r>
-          </a:p>
-        </p:txBody>
-      </p:sp>
-      <p:sp>
-        <p:nvSpPr>
-          <p:cNvPr id="23" name="Rounded Rectangle 22"/>
-          <p:cNvSpPr/>
-          <p:nvPr/>
-        </p:nvSpPr>
-        <p:spPr>
-          <a:xfrm>
-            <a:off x="411480" y="5303520"/>
-            <a:ext cx="11292840" cy="1078992"/>
-          </a:xfrm>
-          <a:prstGeom prst="roundRect">
-            <a:avLst>
-              <a:gd name="adj" fmla="val 8000"/>
-            </a:avLst>
-          </a:prstGeom>
-          <a:solidFill>
-            <a:srgbClr val="E8F5EE"/>
-          </a:solidFill>
-          <a:ln w="12700">
-            <a:solidFill>
-              <a:srgbClr val="157347"/>
-            </a:solidFill>
-          </a:ln>
-        </p:spPr>
-        <p:style>
-          <a:lnRef idx="1">
-            <a:schemeClr val="accent1"/>
-          </a:lnRef>
-          <a:fillRef idx="3">
-            <a:schemeClr val="accent1"/>
-          </a:fillRef>
-          <a:effectRef idx="2">
-            <a:schemeClr val="accent1"/>
-          </a:effectRef>
-          <a:fontRef idx="minor">
-            <a:schemeClr val="lt1"/>
-          </a:fontRef>
-        </p:style>
-        <p:txBody>
-          <a:bodyPr rtlCol="0" anchor="ctr"/>
-          <a:lstStyle/>
-          <a:p>
-            <a:pPr algn="ctr"/>
-          </a:p>
-        </p:txBody>
-      </p:sp>
-      <p:sp>
-        <p:nvSpPr>
-          <p:cNvPr id="24" name="TextBox 23"/>
-          <p:cNvSpPr txBox="1"/>
-          <p:nvPr/>
-        </p:nvSpPr>
-        <p:spPr>
-          <a:xfrm>
-            <a:off x="640080" y="5440680"/>
-            <a:ext cx="10881360" cy="822960"/>
-          </a:xfrm>
-          <a:prstGeom prst="rect">
-            <a:avLst/>
-          </a:prstGeom>
-          <a:noFill/>
-        </p:spPr>
-        <p:txBody>
-          <a:bodyPr wrap="square" anchor="t"/>
-          <a:lstStyle/>
-          <a:p>
-            <a:pPr algn="l"/>
-            <a:r>
-              <a:rPr sz="1600" b="1">
-                <a:solidFill>
-                  <a:srgbClr val="0B2545"/>
-                </a:solidFill>
-                <a:latin typeface="Calibri"/>
-              </a:rPr>
-              <a:t>Target: any colleague who reviews a specification, a matrix or a TDR can use LEON.</a:t>
-            </a:r>
-          </a:p>
-        </p:txBody>
-      </p:sp>
-      <p:sp>
-        <p:nvSpPr>
-          <p:cNvPr id="25" name="Rectangle 24"/>
-          <p:cNvSpPr/>
-          <p:nvPr/>
-        </p:nvSpPr>
-        <p:spPr>
-          <a:xfrm>
-            <a:off x="0" y="6601968"/>
-            <a:ext cx="12191695" cy="256032"/>
-          </a:xfrm>
-          <a:prstGeom prst="rect">
-            <a:avLst/>
-          </a:prstGeom>
-          <a:solidFill>
-            <a:srgbClr val="0B2545"/>
-          </a:solidFill>
-          <a:ln>
-            <a:noFill/>
-          </a:ln>
-        </p:spPr>
-        <p:style>
-          <a:lnRef idx="1">
-            <a:schemeClr val="accent1"/>
-          </a:lnRef>
-          <a:fillRef idx="3">
-            <a:schemeClr val="accent1"/>
-          </a:fillRef>
-          <a:effectRef idx="2">
-            <a:schemeClr val="accent1"/>
-          </a:effectRef>
-          <a:fontRef idx="minor">
-            <a:schemeClr val="lt1"/>
-          </a:fontRef>
-        </p:style>
-        <p:txBody>
-          <a:bodyPr rtlCol="0" anchor="ctr"/>
-          <a:lstStyle/>
-          <a:p>
-            <a:pPr algn="ctr"/>
-          </a:p>
-        </p:txBody>
-      </p:sp>
-      <p:sp>
-        <p:nvSpPr>
-          <p:cNvPr id="26" name="TextBox 25"/>
-          <p:cNvSpPr txBox="1"/>
-          <p:nvPr/>
-        </p:nvSpPr>
-        <p:spPr>
-          <a:xfrm>
-            <a:off x="365760" y="6601968"/>
-            <a:ext cx="9144000" cy="256032"/>
-          </a:xfrm>
-          <a:prstGeom prst="rect">
-            <a:avLst/>
-          </a:prstGeom>
-          <a:noFill/>
-        </p:spPr>
-        <p:txBody>
-          <a:bodyPr wrap="square" anchor="ctr"/>
-          <a:lstStyle/>
-          <a:p>
-            <a:pPr algn="l"/>
-            <a:r>
-              <a:rPr sz="1100" b="0">
-                <a:solidFill>
-                  <a:srgbClr val="A9BCD4"/>
-                </a:solidFill>
-                <a:latin typeface="Calibri"/>
-              </a:rPr>
-              <a:t>Khadija Benhamida  ·  Mechatronics Engineering  ·  Confidential</a:t>
-            </a:r>
-          </a:p>
-        </p:txBody>
-      </p:sp>
-      <p:sp>
-        <p:nvSpPr>
-          <p:cNvPr id="27" name="TextBox 26"/>
-          <p:cNvSpPr txBox="1"/>
-          <p:nvPr/>
-        </p:nvSpPr>
-        <p:spPr>
-          <a:xfrm>
-            <a:off x="10424160" y="6601968"/>
-            <a:ext cx="1371600" cy="256032"/>
-          </a:xfrm>
-          <a:prstGeom prst="rect">
-            <a:avLst/>
-          </a:prstGeom>
-          <a:noFill/>
-        </p:spPr>
-        <p:txBody>
-          <a:bodyPr wrap="square" anchor="ctr"/>
-          <a:lstStyle/>
-          <a:p>
-            <a:pPr algn="r"/>
-            <a:r>
-              <a:rPr sz="1100" b="0">
-                <a:solidFill>
-                  <a:srgbClr val="FFFFFF"/>
-                </a:solidFill>
-                <a:latin typeface="Calibri"/>
-              </a:rPr>
-              <a:t>12  /  14</a:t>
-            </a:r>
-          </a:p>
-        </p:txBody>
-      </p:sp>
-    </p:spTree>
-  </p:cSld>
-  <p:clrMapOvr>
-    <a:masterClrMapping/>
-  </p:clrMapOvr>
-</p:sld>
-</file>
-
-<file path=ppt/slides/slide13.xml><?xml version="1.0" encoding="utf-8"?>
-<p:sld xmlns:a="http://schemas.openxmlformats.org/drawingml/2006/main" xmlns:p="http://schemas.openxmlformats.org/presentationml/2006/main" xmlns:r="http://schemas.openxmlformats.org/officeDocument/2006/relationships">
-  <p:cSld>
-    <p:spTree>
-      <p:nvGrpSpPr>
-        <p:cNvPr id="1" name=""/>
-        <p:cNvGrpSpPr/>
-        <p:nvPr/>
-      </p:nvGrpSpPr>
-      <p:grpSpPr/>
-      <p:sp>
-        <p:nvSpPr>
-          <p:cNvPr id="2" name="Rectangle 1"/>
-          <p:cNvSpPr/>
-          <p:nvPr/>
-        </p:nvSpPr>
-        <p:spPr>
-          <a:xfrm>
-            <a:off x="0" y="0"/>
-            <a:ext cx="12191695" cy="6858000"/>
-          </a:xfrm>
-          <a:prstGeom prst="rect">
-            <a:avLst/>
-          </a:prstGeom>
-          <a:solidFill>
-            <a:srgbClr val="F4F7FB"/>
-          </a:solidFill>
-          <a:ln>
-            <a:noFill/>
-          </a:ln>
-        </p:spPr>
-        <p:style>
-          <a:lnRef idx="1">
-            <a:schemeClr val="accent1"/>
-          </a:lnRef>
-          <a:fillRef idx="3">
-            <a:schemeClr val="accent1"/>
-          </a:fillRef>
-          <a:effectRef idx="2">
-            <a:schemeClr val="accent1"/>
-          </a:effectRef>
-          <a:fontRef idx="minor">
-            <a:schemeClr val="lt1"/>
-          </a:fontRef>
-        </p:style>
-        <p:txBody>
-          <a:bodyPr rtlCol="0" anchor="ctr"/>
-          <a:lstStyle/>
-          <a:p>
-            <a:pPr algn="ctr"/>
-          </a:p>
-        </p:txBody>
-      </p:sp>
-      <p:sp>
-        <p:nvSpPr>
-          <p:cNvPr id="3" name="Rectangle 2"/>
-          <p:cNvSpPr/>
-          <p:nvPr/>
-        </p:nvSpPr>
-        <p:spPr>
-          <a:xfrm>
-            <a:off x="0" y="0"/>
-            <a:ext cx="12191695" cy="1078992"/>
-          </a:xfrm>
-          <a:prstGeom prst="rect">
-            <a:avLst/>
-          </a:prstGeom>
-          <a:solidFill>
-            <a:srgbClr val="0B2545"/>
-          </a:solidFill>
-          <a:ln>
-            <a:noFill/>
-          </a:ln>
-        </p:spPr>
-        <p:style>
-          <a:lnRef idx="1">
-            <a:schemeClr val="accent1"/>
-          </a:lnRef>
-          <a:fillRef idx="3">
-            <a:schemeClr val="accent1"/>
-          </a:fillRef>
-          <a:effectRef idx="2">
-            <a:schemeClr val="accent1"/>
-          </a:effectRef>
-          <a:fontRef idx="minor">
-            <a:schemeClr val="lt1"/>
-          </a:fontRef>
-        </p:style>
-        <p:txBody>
-          <a:bodyPr rtlCol="0" anchor="ctr"/>
-          <a:lstStyle/>
-          <a:p>
-            <a:pPr algn="ctr"/>
-          </a:p>
-        </p:txBody>
-      </p:sp>
-      <p:sp>
-        <p:nvSpPr>
-          <p:cNvPr id="4" name="Rectangle 3"/>
-          <p:cNvSpPr/>
-          <p:nvPr/>
-        </p:nvSpPr>
-        <p:spPr>
-          <a:xfrm>
-            <a:off x="0" y="1078992"/>
-            <a:ext cx="12191695" cy="54864"/>
-          </a:xfrm>
-          <a:prstGeom prst="rect">
-            <a:avLst/>
-          </a:prstGeom>
-          <a:solidFill>
-            <a:srgbClr val="1D4ED8"/>
-          </a:solidFill>
-          <a:ln>
-            <a:noFill/>
-          </a:ln>
-        </p:spPr>
-        <p:style>
-          <a:lnRef idx="1">
-            <a:schemeClr val="accent1"/>
-          </a:lnRef>
-          <a:fillRef idx="3">
-            <a:schemeClr val="accent1"/>
-          </a:fillRef>
-          <a:effectRef idx="2">
-            <a:schemeClr val="accent1"/>
-          </a:effectRef>
-          <a:fontRef idx="minor">
-            <a:schemeClr val="lt1"/>
-          </a:fontRef>
-        </p:style>
-        <p:txBody>
-          <a:bodyPr rtlCol="0" anchor="ctr"/>
-          <a:lstStyle/>
-          <a:p>
-            <a:pPr algn="ctr"/>
-          </a:p>
-        </p:txBody>
-      </p:sp>
-      <p:sp>
-        <p:nvSpPr>
-          <p:cNvPr id="5" name="TextBox 4"/>
-          <p:cNvSpPr txBox="1"/>
-          <p:nvPr/>
-        </p:nvSpPr>
-        <p:spPr>
-          <a:xfrm>
-            <a:off x="457200" y="91440"/>
-            <a:ext cx="11247120" cy="256032"/>
-          </a:xfrm>
-          <a:prstGeom prst="rect">
-            <a:avLst/>
-          </a:prstGeom>
-          <a:noFill/>
-        </p:spPr>
-        <p:txBody>
-          <a:bodyPr wrap="square" anchor="t"/>
-          <a:lstStyle/>
-          <a:p>
-            <a:pPr algn="l"/>
-            <a:r>
-              <a:rPr sz="1100" b="1">
-                <a:solidFill>
-                  <a:srgbClr val="A9BCD4"/>
-                </a:solidFill>
-                <a:latin typeface="Calibri"/>
-              </a:rPr>
-              <a:t>UPCOMING TRAINING</a:t>
-            </a:r>
-          </a:p>
-        </p:txBody>
-      </p:sp>
-      <p:sp>
-        <p:nvSpPr>
-          <p:cNvPr id="6" name="TextBox 5"/>
-          <p:cNvSpPr txBox="1"/>
-          <p:nvPr/>
-        </p:nvSpPr>
-        <p:spPr>
-          <a:xfrm>
-            <a:off x="457200" y="310896"/>
-            <a:ext cx="11247120" cy="384048"/>
-          </a:xfrm>
-          <a:prstGeom prst="rect">
-            <a:avLst/>
-          </a:prstGeom>
-          <a:noFill/>
-        </p:spPr>
-        <p:txBody>
-          <a:bodyPr wrap="square" anchor="t"/>
-          <a:lstStyle/>
-          <a:p>
-            <a:pPr algn="l"/>
-            <a:r>
-              <a:rPr sz="2600" b="1">
-                <a:solidFill>
-                  <a:srgbClr val="FFFFFF"/>
-                </a:solidFill>
-                <a:latin typeface="Calibri"/>
-              </a:rPr>
-              <a:t>AI training for Mechatronics Engineering</a:t>
-            </a:r>
-          </a:p>
-        </p:txBody>
-      </p:sp>
-      <p:sp>
-        <p:nvSpPr>
-          <p:cNvPr id="7" name="TextBox 6"/>
-          <p:cNvSpPr txBox="1"/>
-          <p:nvPr/>
-        </p:nvSpPr>
-        <p:spPr>
-          <a:xfrm>
-            <a:off x="457200" y="713232"/>
-            <a:ext cx="11247120" cy="292608"/>
-          </a:xfrm>
-          <a:prstGeom prst="rect">
-            <a:avLst/>
-          </a:prstGeom>
-          <a:noFill/>
-        </p:spPr>
-        <p:txBody>
-          <a:bodyPr wrap="square" anchor="t"/>
-          <a:lstStyle/>
-          <a:p>
-            <a:pPr algn="l"/>
-            <a:r>
-              <a:rPr sz="1300" b="0">
-                <a:solidFill>
-                  <a:srgbClr val="C5D4E8"/>
-                </a:solidFill>
-                <a:latin typeface="Calibri"/>
-              </a:rPr>
-              <a:t>Operational training on the use of AI in daily document review.</a:t>
-            </a:r>
-          </a:p>
-        </p:txBody>
-      </p:sp>
-      <p:sp>
-        <p:nvSpPr>
-          <p:cNvPr id="8" name="Rounded Rectangle 7"/>
-          <p:cNvSpPr/>
-          <p:nvPr/>
-        </p:nvSpPr>
-        <p:spPr>
-          <a:xfrm>
-            <a:off x="411480" y="1389888"/>
-            <a:ext cx="5532120" cy="4919472"/>
-          </a:xfrm>
-          <a:prstGeom prst="roundRect">
-            <a:avLst>
-              <a:gd name="adj" fmla="val 8000"/>
-            </a:avLst>
-          </a:prstGeom>
-          <a:solidFill>
-            <a:srgbClr val="FFFFFF"/>
-          </a:solidFill>
-          <a:ln w="12700">
-            <a:solidFill>
-              <a:srgbClr val="DDE3EC"/>
-            </a:solidFill>
-          </a:ln>
-        </p:spPr>
-        <p:style>
-          <a:lnRef idx="1">
-            <a:schemeClr val="accent1"/>
-          </a:lnRef>
-          <a:fillRef idx="3">
-            <a:schemeClr val="accent1"/>
-          </a:fillRef>
-          <a:effectRef idx="2">
-            <a:schemeClr val="accent1"/>
-          </a:effectRef>
-          <a:fontRef idx="minor">
-            <a:schemeClr val="lt1"/>
-          </a:fontRef>
-        </p:style>
-        <p:txBody>
-          <a:bodyPr rtlCol="0" anchor="ctr"/>
-          <a:lstStyle/>
-          <a:p>
-            <a:pPr algn="ctr"/>
-          </a:p>
-        </p:txBody>
-      </p:sp>
-      <p:sp>
-        <p:nvSpPr>
-          <p:cNvPr id="9" name="Rectangle 8"/>
-          <p:cNvSpPr/>
-          <p:nvPr/>
-        </p:nvSpPr>
-        <p:spPr>
-          <a:xfrm>
-            <a:off x="411480" y="1389888"/>
-            <a:ext cx="73152" cy="4919472"/>
-          </a:xfrm>
-          <a:prstGeom prst="rect">
-            <a:avLst/>
-          </a:prstGeom>
-          <a:solidFill>
-            <a:srgbClr val="1D4ED8"/>
-          </a:solidFill>
-          <a:ln>
-            <a:noFill/>
-          </a:ln>
-        </p:spPr>
-        <p:style>
-          <a:lnRef idx="1">
-            <a:schemeClr val="accent1"/>
-          </a:lnRef>
-          <a:fillRef idx="3">
-            <a:schemeClr val="accent1"/>
-          </a:fillRef>
-          <a:effectRef idx="2">
-            <a:schemeClr val="accent1"/>
-          </a:effectRef>
-          <a:fontRef idx="minor">
-            <a:schemeClr val="lt1"/>
-          </a:fontRef>
-        </p:style>
-        <p:txBody>
-          <a:bodyPr rtlCol="0" anchor="ctr"/>
-          <a:lstStyle/>
-          <a:p>
-            <a:pPr algn="ctr"/>
-          </a:p>
-        </p:txBody>
-      </p:sp>
-      <p:sp>
-        <p:nvSpPr>
-          <p:cNvPr id="10" name="TextBox 9"/>
-          <p:cNvSpPr txBox="1"/>
-          <p:nvPr/>
-        </p:nvSpPr>
-        <p:spPr>
-          <a:xfrm>
-            <a:off x="612648" y="1517904"/>
-            <a:ext cx="5221224" cy="347472"/>
-          </a:xfrm>
-          <a:prstGeom prst="rect">
-            <a:avLst/>
-          </a:prstGeom>
-          <a:noFill/>
-        </p:spPr>
-        <p:txBody>
-          <a:bodyPr wrap="square" anchor="t"/>
-          <a:lstStyle/>
-          <a:p>
-            <a:pPr algn="l"/>
-            <a:r>
-              <a:rPr sz="1800" b="1">
-                <a:solidFill>
-                  <a:srgbClr val="0B2545"/>
-                </a:solidFill>
-                <a:latin typeface="Calibri"/>
-              </a:rPr>
-              <a:t>Objectives of the training</a:t>
-            </a:r>
-          </a:p>
-        </p:txBody>
-      </p:sp>
-      <p:sp>
-        <p:nvSpPr>
-          <p:cNvPr id="11" name="TextBox 10"/>
-          <p:cNvSpPr txBox="1"/>
-          <p:nvPr/>
-        </p:nvSpPr>
-        <p:spPr>
-          <a:xfrm>
-            <a:off x="612648" y="1847088"/>
-            <a:ext cx="5221224" cy="4334256"/>
-          </a:xfrm>
-          <a:prstGeom prst="rect">
-            <a:avLst/>
-          </a:prstGeom>
-          <a:noFill/>
-        </p:spPr>
-        <p:txBody>
-          <a:bodyPr wrap="square" anchor="t"/>
-          <a:lstStyle/>
-          <a:p>
-            <a:pPr algn="l"/>
-            <a:r>
-              <a:rPr sz="1400" b="0">
-                <a:solidFill>
-                  <a:srgbClr val="1C2B3A"/>
-                </a:solidFill>
-                <a:latin typeface="Calibri"/>
-              </a:rPr>
-              <a:t>Clarify what AI can and cannot do on specifications, matrices and TDR files.
-Position a tool such as LEON as a first analysis, not as a substitute for the engineer.
-Establish a common practice: where AI reduces review time, and where a technical decision is required.
-Use examples drawn from mechatronics documents.</a:t>
-            </a:r>
-          </a:p>
-        </p:txBody>
-      </p:sp>
-      <p:sp>
-        <p:nvSpPr>
-          <p:cNvPr id="12" name="Rounded Rectangle 11"/>
-          <p:cNvSpPr/>
-          <p:nvPr/>
-        </p:nvSpPr>
-        <p:spPr>
-          <a:xfrm>
-            <a:off x="6172200" y="1389888"/>
-            <a:ext cx="5532120" cy="4919472"/>
-          </a:xfrm>
-          <a:prstGeom prst="roundRect">
-            <a:avLst>
-              <a:gd name="adj" fmla="val 8000"/>
-            </a:avLst>
-          </a:prstGeom>
-          <a:solidFill>
-            <a:srgbClr val="FFFFFF"/>
-          </a:solidFill>
-          <a:ln w="12700">
-            <a:solidFill>
-              <a:srgbClr val="DDE3EC"/>
-            </a:solidFill>
-          </a:ln>
-        </p:spPr>
-        <p:style>
-          <a:lnRef idx="1">
-            <a:schemeClr val="accent1"/>
-          </a:lnRef>
-          <a:fillRef idx="3">
-            <a:schemeClr val="accent1"/>
-          </a:fillRef>
-          <a:effectRef idx="2">
-            <a:schemeClr val="accent1"/>
-          </a:effectRef>
-          <a:fontRef idx="minor">
-            <a:schemeClr val="lt1"/>
-          </a:fontRef>
-        </p:style>
-        <p:txBody>
-          <a:bodyPr rtlCol="0" anchor="ctr"/>
-          <a:lstStyle/>
-          <a:p>
-            <a:pPr algn="ctr"/>
-          </a:p>
-        </p:txBody>
-      </p:sp>
-      <p:sp>
-        <p:nvSpPr>
-          <p:cNvPr id="13" name="Rectangle 12"/>
-          <p:cNvSpPr/>
-          <p:nvPr/>
-        </p:nvSpPr>
-        <p:spPr>
-          <a:xfrm>
-            <a:off x="6172200" y="1389888"/>
-            <a:ext cx="73152" cy="4919472"/>
-          </a:xfrm>
-          <a:prstGeom prst="rect">
-            <a:avLst/>
-          </a:prstGeom>
-          <a:solidFill>
-            <a:srgbClr val="157347"/>
-          </a:solidFill>
-          <a:ln>
-            <a:noFill/>
-          </a:ln>
-        </p:spPr>
-        <p:style>
-          <a:lnRef idx="1">
-            <a:schemeClr val="accent1"/>
-          </a:lnRef>
-          <a:fillRef idx="3">
-            <a:schemeClr val="accent1"/>
-          </a:fillRef>
-          <a:effectRef idx="2">
-            <a:schemeClr val="accent1"/>
-          </a:effectRef>
-          <a:fontRef idx="minor">
-            <a:schemeClr val="lt1"/>
-          </a:fontRef>
-        </p:style>
-        <p:txBody>
-          <a:bodyPr rtlCol="0" anchor="ctr"/>
-          <a:lstStyle/>
-          <a:p>
-            <a:pPr algn="ctr"/>
-          </a:p>
-        </p:txBody>
-      </p:sp>
-      <p:sp>
-        <p:nvSpPr>
-          <p:cNvPr id="14" name="TextBox 13"/>
-          <p:cNvSpPr txBox="1"/>
-          <p:nvPr/>
-        </p:nvSpPr>
-        <p:spPr>
-          <a:xfrm>
-            <a:off x="6373368" y="1517904"/>
-            <a:ext cx="5221224" cy="347472"/>
-          </a:xfrm>
-          <a:prstGeom prst="rect">
-            <a:avLst/>
-          </a:prstGeom>
-          <a:noFill/>
-        </p:spPr>
-        <p:txBody>
-          <a:bodyPr wrap="square" anchor="t"/>
-          <a:lstStyle/>
-          <a:p>
-            <a:pPr algn="l"/>
-            <a:r>
-              <a:rPr sz="1800" b="1">
-                <a:solidFill>
-                  <a:srgbClr val="0B2545"/>
-                </a:solidFill>
-                <a:latin typeface="Calibri"/>
-              </a:rPr>
-              <a:t>Expected use in the team</a:t>
-            </a:r>
-          </a:p>
-        </p:txBody>
-      </p:sp>
-      <p:sp>
-        <p:nvSpPr>
-          <p:cNvPr id="15" name="TextBox 14"/>
-          <p:cNvSpPr txBox="1"/>
-          <p:nvPr/>
-        </p:nvSpPr>
-        <p:spPr>
-          <a:xfrm>
-            <a:off x="6373368" y="1847088"/>
-            <a:ext cx="5221224" cy="4334256"/>
-          </a:xfrm>
-          <a:prstGeom prst="rect">
-            <a:avLst/>
-          </a:prstGeom>
-          <a:noFill/>
-        </p:spPr>
-        <p:txBody>
-          <a:bodyPr wrap="square" anchor="t"/>
-          <a:lstStyle/>
-          <a:p>
-            <a:pPr algn="l"/>
-            <a:r>
-              <a:rPr sz="1400" b="0">
-                <a:solidFill>
-                  <a:srgbClr val="1C2B3A"/>
-                </a:solidFill>
-                <a:latin typeface="Calibri"/>
-              </a:rPr>
-              <a:t>Faster preparation of a TDR review.
-Fewer OK declarations accepted despite a contradictory comment.
-Structured comparison of several suppliers on technical criteria.
-Rule of use: the application proposes; the engineer validates.
-A short feedback to the team can be prepared after the training.</a:t>
-            </a:r>
-          </a:p>
-        </p:txBody>
-      </p:sp>
-      <p:sp>
-        <p:nvSpPr>
-          <p:cNvPr id="16" name="Rectangle 15"/>
-          <p:cNvSpPr/>
-          <p:nvPr/>
-        </p:nvSpPr>
-        <p:spPr>
-          <a:xfrm>
-            <a:off x="0" y="6601968"/>
-            <a:ext cx="12191695" cy="256032"/>
-          </a:xfrm>
-          <a:prstGeom prst="rect">
-            <a:avLst/>
-          </a:prstGeom>
-          <a:solidFill>
-            <a:srgbClr val="0B2545"/>
-          </a:solidFill>
-          <a:ln>
-            <a:noFill/>
-          </a:ln>
-        </p:spPr>
-        <p:style>
-          <a:lnRef idx="1">
-            <a:schemeClr val="accent1"/>
-          </a:lnRef>
-          <a:fillRef idx="3">
-            <a:schemeClr val="accent1"/>
-          </a:fillRef>
-          <a:effectRef idx="2">
-            <a:schemeClr val="accent1"/>
-          </a:effectRef>
-          <a:fontRef idx="minor">
-            <a:schemeClr val="lt1"/>
-          </a:fontRef>
-        </p:style>
-        <p:txBody>
-          <a:bodyPr rtlCol="0" anchor="ctr"/>
-          <a:lstStyle/>
-          <a:p>
-            <a:pPr algn="ctr"/>
-          </a:p>
-        </p:txBody>
-      </p:sp>
-      <p:sp>
-        <p:nvSpPr>
-          <p:cNvPr id="17" name="TextBox 16"/>
-          <p:cNvSpPr txBox="1"/>
-          <p:nvPr/>
-        </p:nvSpPr>
-        <p:spPr>
-          <a:xfrm>
-            <a:off x="365760" y="6601968"/>
-            <a:ext cx="9144000" cy="256032"/>
-          </a:xfrm>
-          <a:prstGeom prst="rect">
-            <a:avLst/>
-          </a:prstGeom>
-          <a:noFill/>
-        </p:spPr>
-        <p:txBody>
-          <a:bodyPr wrap="square" anchor="ctr"/>
-          <a:lstStyle/>
-          <a:p>
-            <a:pPr algn="l"/>
-            <a:r>
-              <a:rPr sz="1100" b="0">
-                <a:solidFill>
-                  <a:srgbClr val="A9BCD4"/>
-                </a:solidFill>
-                <a:latin typeface="Calibri"/>
-              </a:rPr>
-              <a:t>Khadija Benhamida  ·  Mechatronics Engineering  ·  Confidential</a:t>
-            </a:r>
-          </a:p>
-        </p:txBody>
-      </p:sp>
-      <p:sp>
-        <p:nvSpPr>
-          <p:cNvPr id="18" name="TextBox 17"/>
-          <p:cNvSpPr txBox="1"/>
-          <p:nvPr/>
-        </p:nvSpPr>
-        <p:spPr>
-          <a:xfrm>
-            <a:off x="10424160" y="6601968"/>
-            <a:ext cx="1371600" cy="256032"/>
-          </a:xfrm>
-          <a:prstGeom prst="rect">
-            <a:avLst/>
-          </a:prstGeom>
-          <a:noFill/>
-        </p:spPr>
-        <p:txBody>
-          <a:bodyPr wrap="square" anchor="ctr"/>
-          <a:lstStyle/>
-          <a:p>
-            <a:pPr algn="r"/>
-            <a:r>
-              <a:rPr sz="1100" b="0">
-                <a:solidFill>
-                  <a:srgbClr val="FFFFFF"/>
-                </a:solidFill>
-                <a:latin typeface="Calibri"/>
-              </a:rPr>
-              <a:t>13  /  14</a:t>
-            </a:r>
-          </a:p>
-        </p:txBody>
-      </p:sp>
-    </p:spTree>
-  </p:cSld>
-  <p:clrMapOvr>
-    <a:masterClrMapping/>
-  </p:clrMapOvr>
-</p:sld>
-</file>
-
-<file path=ppt/slides/slide14.xml><?xml version="1.0" encoding="utf-8"?>
-<p:sld xmlns:a="http://schemas.openxmlformats.org/drawingml/2006/main" xmlns:p="http://schemas.openxmlformats.org/presentationml/2006/main" xmlns:r="http://schemas.openxmlformats.org/officeDocument/2006/relationships">
-  <p:cSld>
-    <p:spTree>
-      <p:nvGrpSpPr>
-        <p:cNvPr id="1" name=""/>
-        <p:cNvGrpSpPr/>
-        <p:nvPr/>
-      </p:nvGrpSpPr>
-      <p:grpSpPr/>
-      <p:sp>
-        <p:nvSpPr>
-          <p:cNvPr id="2" name="Rectangle 1"/>
-          <p:cNvSpPr/>
-          <p:nvPr/>
-        </p:nvSpPr>
-        <p:spPr>
-          <a:xfrm>
-            <a:off x="0" y="0"/>
-            <a:ext cx="12191695" cy="6858000"/>
-          </a:xfrm>
-          <a:prstGeom prst="rect">
-            <a:avLst/>
-          </a:prstGeom>
-          <a:solidFill>
-            <a:srgbClr val="F4F7FB"/>
-          </a:solidFill>
-          <a:ln>
-            <a:noFill/>
-          </a:ln>
-        </p:spPr>
-        <p:style>
-          <a:lnRef idx="1">
-            <a:schemeClr val="accent1"/>
-          </a:lnRef>
-          <a:fillRef idx="3">
-            <a:schemeClr val="accent1"/>
-          </a:fillRef>
-          <a:effectRef idx="2">
-            <a:schemeClr val="accent1"/>
-          </a:effectRef>
-          <a:fontRef idx="minor">
-            <a:schemeClr val="lt1"/>
-          </a:fontRef>
-        </p:style>
-        <p:txBody>
-          <a:bodyPr rtlCol="0" anchor="ctr"/>
-          <a:lstStyle/>
-          <a:p>
-            <a:pPr algn="ctr"/>
-          </a:p>
-        </p:txBody>
-      </p:sp>
-      <p:sp>
-        <p:nvSpPr>
-          <p:cNvPr id="3" name="Rectangle 2"/>
-          <p:cNvSpPr/>
-          <p:nvPr/>
-        </p:nvSpPr>
-        <p:spPr>
-          <a:xfrm>
-            <a:off x="0" y="0"/>
-            <a:ext cx="12191695" cy="1078992"/>
-          </a:xfrm>
-          <a:prstGeom prst="rect">
-            <a:avLst/>
-          </a:prstGeom>
-          <a:solidFill>
-            <a:srgbClr val="0B2545"/>
-          </a:solidFill>
-          <a:ln>
-            <a:noFill/>
-          </a:ln>
-        </p:spPr>
-        <p:style>
-          <a:lnRef idx="1">
-            <a:schemeClr val="accent1"/>
-          </a:lnRef>
-          <a:fillRef idx="3">
-            <a:schemeClr val="accent1"/>
-          </a:fillRef>
-          <a:effectRef idx="2">
-            <a:schemeClr val="accent1"/>
-          </a:effectRef>
-          <a:fontRef idx="minor">
-            <a:schemeClr val="lt1"/>
-          </a:fontRef>
-        </p:style>
-        <p:txBody>
-          <a:bodyPr rtlCol="0" anchor="ctr"/>
-          <a:lstStyle/>
-          <a:p>
-            <a:pPr algn="ctr"/>
-          </a:p>
-        </p:txBody>
-      </p:sp>
-      <p:sp>
-        <p:nvSpPr>
-          <p:cNvPr id="4" name="Rectangle 3"/>
-          <p:cNvSpPr/>
-          <p:nvPr/>
-        </p:nvSpPr>
-        <p:spPr>
-          <a:xfrm>
-            <a:off x="0" y="1078992"/>
-            <a:ext cx="12191695" cy="54864"/>
-          </a:xfrm>
-          <a:prstGeom prst="rect">
-            <a:avLst/>
-          </a:prstGeom>
-          <a:solidFill>
-            <a:srgbClr val="1D4ED8"/>
-          </a:solidFill>
-          <a:ln>
-            <a:noFill/>
-          </a:ln>
-        </p:spPr>
-        <p:style>
-          <a:lnRef idx="1">
-            <a:schemeClr val="accent1"/>
-          </a:lnRef>
-          <a:fillRef idx="3">
-            <a:schemeClr val="accent1"/>
-          </a:fillRef>
-          <a:effectRef idx="2">
-            <a:schemeClr val="accent1"/>
-          </a:effectRef>
-          <a:fontRef idx="minor">
-            <a:schemeClr val="lt1"/>
-          </a:fontRef>
-        </p:style>
-        <p:txBody>
-          <a:bodyPr rtlCol="0" anchor="ctr"/>
-          <a:lstStyle/>
-          <a:p>
-            <a:pPr algn="ctr"/>
-          </a:p>
-        </p:txBody>
-      </p:sp>
-      <p:sp>
-        <p:nvSpPr>
-          <p:cNvPr id="5" name="TextBox 4"/>
-          <p:cNvSpPr txBox="1"/>
-          <p:nvPr/>
-        </p:nvSpPr>
-        <p:spPr>
-          <a:xfrm>
-            <a:off x="457200" y="91440"/>
-            <a:ext cx="11247120" cy="256032"/>
-          </a:xfrm>
-          <a:prstGeom prst="rect">
-            <a:avLst/>
-          </a:prstGeom>
-          <a:noFill/>
-        </p:spPr>
-        <p:txBody>
-          <a:bodyPr wrap="square" anchor="t"/>
-          <a:lstStyle/>
-          <a:p>
-            <a:pPr algn="l"/>
-            <a:r>
-              <a:rPr sz="1100" b="1">
-                <a:solidFill>
-                  <a:srgbClr val="A9BCD4"/>
-                </a:solidFill>
-                <a:latin typeface="Calibri"/>
-              </a:rPr>
-              <a:t>WORKING ARRANGEMENTS</a:t>
-            </a:r>
-          </a:p>
-        </p:txBody>
-      </p:sp>
-      <p:sp>
-        <p:nvSpPr>
-          <p:cNvPr id="6" name="TextBox 5"/>
-          <p:cNvSpPr txBox="1"/>
-          <p:nvPr/>
-        </p:nvSpPr>
-        <p:spPr>
-          <a:xfrm>
-            <a:off x="457200" y="310896"/>
-            <a:ext cx="11247120" cy="384048"/>
-          </a:xfrm>
-          <a:prstGeom prst="rect">
-            <a:avLst/>
-          </a:prstGeom>
-          <a:noFill/>
-        </p:spPr>
-        <p:txBody>
-          <a:bodyPr wrap="square" anchor="t"/>
-          <a:lstStyle/>
-          <a:p>
-            <a:pPr algn="l"/>
-            <a:r>
-              <a:rPr sz="2600" b="1">
-                <a:solidFill>
-                  <a:srgbClr val="FFFFFF"/>
-                </a:solidFill>
-                <a:latin typeface="Calibri"/>
-              </a:rPr>
-              <a:t>Points submitted for confirmation</a:t>
-            </a:r>
-          </a:p>
-        </p:txBody>
-      </p:sp>
-      <p:sp>
-        <p:nvSpPr>
-          <p:cNvPr id="7" name="TextBox 6"/>
-          <p:cNvSpPr txBox="1"/>
-          <p:nvPr/>
-        </p:nvSpPr>
-        <p:spPr>
-          <a:xfrm>
-            <a:off x="457200" y="713232"/>
-            <a:ext cx="11247120" cy="292608"/>
-          </a:xfrm>
-          <a:prstGeom prst="rect">
-            <a:avLst/>
-          </a:prstGeom>
-          <a:noFill/>
-        </p:spPr>
-        <p:txBody>
-          <a:bodyPr wrap="square" anchor="t"/>
-          <a:lstStyle/>
-          <a:p>
-            <a:pPr algn="l"/>
-            <a:r>
-              <a:rPr sz="1300" b="0">
-                <a:solidFill>
-                  <a:srgbClr val="C5D4E8"/>
-                </a:solidFill>
-                <a:latin typeface="Calibri"/>
-              </a:rPr>
-              <a:t>Télétravail and first school period.</a:t>
-            </a:r>
-          </a:p>
-        </p:txBody>
-      </p:sp>
-      <p:sp>
-        <p:nvSpPr>
-          <p:cNvPr id="8" name="Rounded Rectangle 7"/>
-          <p:cNvSpPr/>
-          <p:nvPr/>
-        </p:nvSpPr>
-        <p:spPr>
-          <a:xfrm>
-            <a:off x="411480" y="1389888"/>
-            <a:ext cx="5532120" cy="3383280"/>
-          </a:xfrm>
-          <a:prstGeom prst="roundRect">
-            <a:avLst>
-              <a:gd name="adj" fmla="val 8000"/>
-            </a:avLst>
-          </a:prstGeom>
-          <a:solidFill>
-            <a:srgbClr val="FFFFFF"/>
-          </a:solidFill>
-          <a:ln w="12700">
-            <a:solidFill>
-              <a:srgbClr val="DDE3EC"/>
-            </a:solidFill>
-          </a:ln>
-        </p:spPr>
-        <p:style>
-          <a:lnRef idx="1">
-            <a:schemeClr val="accent1"/>
-          </a:lnRef>
-          <a:fillRef idx="3">
-            <a:schemeClr val="accent1"/>
-          </a:fillRef>
-          <a:effectRef idx="2">
-            <a:schemeClr val="accent1"/>
-          </a:effectRef>
-          <a:fontRef idx="minor">
-            <a:schemeClr val="lt1"/>
-          </a:fontRef>
-        </p:style>
-        <p:txBody>
-          <a:bodyPr rtlCol="0" anchor="ctr"/>
-          <a:lstStyle/>
-          <a:p>
-            <a:pPr algn="ctr"/>
-          </a:p>
-        </p:txBody>
-      </p:sp>
-      <p:sp>
-        <p:nvSpPr>
-          <p:cNvPr id="9" name="Rectangle 8"/>
-          <p:cNvSpPr/>
-          <p:nvPr/>
-        </p:nvSpPr>
-        <p:spPr>
-          <a:xfrm>
-            <a:off x="411480" y="1389888"/>
-            <a:ext cx="5532120" cy="475488"/>
-          </a:xfrm>
-          <a:prstGeom prst="rect">
-            <a:avLst/>
-          </a:prstGeom>
-          <a:solidFill>
-            <a:srgbClr val="1D4ED8"/>
-          </a:solidFill>
-          <a:ln>
-            <a:noFill/>
-          </a:ln>
-        </p:spPr>
-        <p:style>
-          <a:lnRef idx="1">
-            <a:schemeClr val="accent1"/>
-          </a:lnRef>
-          <a:fillRef idx="3">
-            <a:schemeClr val="accent1"/>
-          </a:fillRef>
-          <a:effectRef idx="2">
-            <a:schemeClr val="accent1"/>
-          </a:effectRef>
-          <a:fontRef idx="minor">
-            <a:schemeClr val="lt1"/>
-          </a:fontRef>
-        </p:style>
-        <p:txBody>
-          <a:bodyPr rtlCol="0" anchor="ctr"/>
-          <a:lstStyle/>
-          <a:p>
-            <a:pPr algn="ctr"/>
-          </a:p>
-        </p:txBody>
-      </p:sp>
-      <p:sp>
-        <p:nvSpPr>
-          <p:cNvPr id="10" name="TextBox 9"/>
-          <p:cNvSpPr txBox="1"/>
-          <p:nvPr/>
-        </p:nvSpPr>
-        <p:spPr>
-          <a:xfrm>
-            <a:off x="594360" y="1444752"/>
-            <a:ext cx="5212080" cy="384048"/>
-          </a:xfrm>
-          <a:prstGeom prst="rect">
-            <a:avLst/>
-          </a:prstGeom>
-          <a:noFill/>
-        </p:spPr>
-        <p:txBody>
-          <a:bodyPr wrap="square" anchor="ctr"/>
-          <a:lstStyle/>
-          <a:p>
-            <a:pPr algn="l"/>
-            <a:r>
-              <a:rPr sz="1800" b="1">
-                <a:solidFill>
-                  <a:srgbClr val="FFFFFF"/>
-                </a:solidFill>
-                <a:latin typeface="Calibri"/>
-              </a:rPr>
-              <a:t>Télétravail (TT)</a:t>
-            </a:r>
-          </a:p>
-        </p:txBody>
-      </p:sp>
-      <p:sp>
-        <p:nvSpPr>
-          <p:cNvPr id="11" name="TextBox 10"/>
-          <p:cNvSpPr txBox="1"/>
-          <p:nvPr/>
-        </p:nvSpPr>
-        <p:spPr>
-          <a:xfrm>
-            <a:off x="640080" y="2057400"/>
-            <a:ext cx="5074920" cy="2468880"/>
-          </a:xfrm>
-          <a:prstGeom prst="rect">
-            <a:avLst/>
-          </a:prstGeom>
-          <a:noFill/>
-        </p:spPr>
-        <p:txBody>
-          <a:bodyPr wrap="square" anchor="t"/>
-          <a:lstStyle/>
-          <a:p>
-            <a:pPr algn="l"/>
-            <a:r>
-              <a:rPr sz="1600" b="0">
-                <a:solidFill>
-                  <a:srgbClr val="1C2B3A"/>
-                </a:solidFill>
-                <a:latin typeface="Calibri"/>
-              </a:rPr>
-              <a:t>Proposed weekly pattern: two days of télétravail.
-• Wednesday
-• Friday
-This pattern is submitted for confirmation, so that on-site presence is clear for the team.</a:t>
-            </a:r>
-          </a:p>
-        </p:txBody>
-      </p:sp>
-      <p:sp>
-        <p:nvSpPr>
-          <p:cNvPr id="12" name="Rounded Rectangle 11"/>
-          <p:cNvSpPr/>
-          <p:nvPr/>
-        </p:nvSpPr>
-        <p:spPr>
-          <a:xfrm>
-            <a:off x="6172200" y="1389888"/>
-            <a:ext cx="5532120" cy="3383280"/>
-          </a:xfrm>
-          <a:prstGeom prst="roundRect">
-            <a:avLst>
-              <a:gd name="adj" fmla="val 8000"/>
-            </a:avLst>
-          </a:prstGeom>
-          <a:solidFill>
-            <a:srgbClr val="FFFFFF"/>
-          </a:solidFill>
-          <a:ln w="12700">
-            <a:solidFill>
-              <a:srgbClr val="DDE3EC"/>
-            </a:solidFill>
-          </a:ln>
-        </p:spPr>
-        <p:style>
-          <a:lnRef idx="1">
-            <a:schemeClr val="accent1"/>
-          </a:lnRef>
-          <a:fillRef idx="3">
-            <a:schemeClr val="accent1"/>
-          </a:fillRef>
-          <a:effectRef idx="2">
-            <a:schemeClr val="accent1"/>
-          </a:effectRef>
-          <a:fontRef idx="minor">
-            <a:schemeClr val="lt1"/>
-          </a:fontRef>
-        </p:style>
-        <p:txBody>
-          <a:bodyPr rtlCol="0" anchor="ctr"/>
-          <a:lstStyle/>
-          <a:p>
-            <a:pPr algn="ctr"/>
-          </a:p>
-        </p:txBody>
-      </p:sp>
-      <p:sp>
-        <p:nvSpPr>
           <p:cNvPr id="13" name="Rectangle 12"/>
           <p:cNvSpPr/>
           <p:nvPr/>
@@ -9655,7 +5980,7 @@
                 </a:solidFill>
                 <a:latin typeface="Calibri"/>
               </a:rPr>
-              <a:t>14  /  14</a:t>
+              <a:t>11  /  11</a:t>
             </a:r>
           </a:p>
         </p:txBody>
@@ -9901,7 +6226,7 @@
                 </a:solidFill>
                 <a:latin typeface="Calibri"/>
               </a:rPr>
-              <a:t>Project presentation, current status, and organisational points.</a:t>
+              <a:t>Project explanation, work completed, then organisational points.</a:t>
             </a:r>
           </a:p>
         </p:txBody>
@@ -10057,7 +6382,7 @@
                 </a:solidFill>
                 <a:latin typeface="Calibri"/>
               </a:rPr>
-              <a:t>Project presentation</a:t>
+              <a:t>The project</a:t>
             </a:r>
           </a:p>
         </p:txBody>
@@ -10090,7 +6415,7 @@
                 </a:solidFill>
                 <a:latin typeface="Calibri"/>
               </a:rPr>
-              <a:t>Purpose of LEON, the three documents concerned, and the functions of the application.</a:t>
+              <a:t>Purpose of LEON, the three documents (specification, matrix, TDR) and the application.</a:t>
             </a:r>
           </a:p>
         </p:txBody>
@@ -10246,7 +6571,7 @@
                 </a:solidFill>
                 <a:latin typeface="Calibri"/>
               </a:rPr>
-              <a:t>Work completed to date</a:t>
+              <a:t>Work completed</a:t>
             </a:r>
           </a:p>
         </p:txBody>
@@ -10279,7 +6604,7 @@
                 </a:solidFill>
                 <a:latin typeface="Calibri"/>
               </a:rPr>
-              <a:t>Specification validation, conformity matrix analysis, Matrix ↔ TDR, TDR benchmark.</a:t>
+              <a:t>Specification validation, conformity matrix, Matrix ↔ TDR, TDR benchmark.</a:t>
             </a:r>
           </a:p>
         </p:txBody>
@@ -10468,7 +6793,7 @@
                 </a:solidFill>
                 <a:latin typeface="Calibri"/>
               </a:rPr>
-              <a:t>Working arrangement with Imane El Brouji and Patrick Garcia.</a:t>
+              <a:t>Imane El Brouji and Patrick Garcia — mechatronics input and explanations.</a:t>
             </a:r>
           </a:p>
         </p:txBody>
@@ -10657,7 +6982,7 @@
                 </a:solidFill>
                 <a:latin typeface="Calibri"/>
               </a:rPr>
-              <a:t>Development in progress. Team access will follow completion of this phase.</a:t>
+              <a:t>Work in progress. Team access after completion of this phase.</a:t>
             </a:r>
           </a:p>
         </p:txBody>
@@ -10846,7 +7171,7 @@
                 </a:solidFill>
                 <a:latin typeface="Calibri"/>
               </a:rPr>
-              <a:t>Upcoming training and expected use within Mechatronics Engineering.</a:t>
+              <a:t>Upcoming training and use within the Mechatronics team.</a:t>
             </a:r>
           </a:p>
         </p:txBody>
@@ -11035,7 +7360,7 @@
                 </a:solidFill>
                 <a:latin typeface="Calibri"/>
               </a:rPr>
-              <a:t>Télétravail on Wednesday and Friday; first school period over the next two weeks.</a:t>
+              <a:t>Télétravail Wednesday and Friday; first school period over the next two weeks.</a:t>
             </a:r>
           </a:p>
         </p:txBody>
@@ -11144,7 +7469,7 @@
                 </a:solidFill>
                 <a:latin typeface="Calibri"/>
               </a:rPr>
-              <a:t>2  /  14</a:t>
+              <a:t>2  /  11</a:t>
             </a:r>
           </a:p>
         </p:txBody>
@@ -11357,7 +7682,7 @@
                 </a:solidFill>
                 <a:latin typeface="Calibri"/>
               </a:rPr>
-              <a:t>Purpose of LEON</a:t>
+              <a:t>What we are working on</a:t>
             </a:r>
           </a:p>
         </p:txBody>
@@ -11390,7 +7715,7 @@
                 </a:solidFill>
                 <a:latin typeface="Calibri"/>
               </a:rPr>
-              <a:t>A structured first analysis of supplier documentation for Mechatronics Engineering.</a:t>
+              <a:t>LEON supports Mechatronics Engineering in the review of three documents that must remain consistent.</a:t>
             </a:r>
           </a:p>
         </p:txBody>
@@ -11403,8 +7728,89 @@
         </p:nvSpPr>
         <p:spPr>
           <a:xfrm>
-            <a:off x="411480" y="1389888"/>
-            <a:ext cx="5532120" cy="2240280"/>
+            <a:off x="411480" y="1325880"/>
+            <a:ext cx="11338560" cy="1234440"/>
+          </a:xfrm>
+          <a:prstGeom prst="roundRect">
+            <a:avLst>
+              <a:gd name="adj" fmla="val 8000"/>
+            </a:avLst>
+          </a:prstGeom>
+          <a:solidFill>
+            <a:srgbClr val="E8EEFB"/>
+          </a:solidFill>
+          <a:ln w="12700">
+            <a:solidFill>
+              <a:srgbClr val="1D4ED8"/>
+            </a:solidFill>
+          </a:ln>
+        </p:spPr>
+        <p:style>
+          <a:lnRef idx="1">
+            <a:schemeClr val="accent1"/>
+          </a:lnRef>
+          <a:fillRef idx="3">
+            <a:schemeClr val="accent1"/>
+          </a:fillRef>
+          <a:effectRef idx="2">
+            <a:schemeClr val="accent1"/>
+          </a:effectRef>
+          <a:fontRef idx="minor">
+            <a:schemeClr val="lt1"/>
+          </a:fontRef>
+        </p:style>
+        <p:txBody>
+          <a:bodyPr rtlCol="0" anchor="ctr"/>
+          <a:lstStyle/>
+          <a:p>
+            <a:pPr algn="ctr"/>
+          </a:p>
+        </p:txBody>
+      </p:sp>
+      <p:sp>
+        <p:nvSpPr>
+          <p:cNvPr id="9" name="TextBox 8"/>
+          <p:cNvSpPr txBox="1"/>
+          <p:nvPr/>
+        </p:nvSpPr>
+        <p:spPr>
+          <a:xfrm>
+            <a:off x="640080" y="1417320"/>
+            <a:ext cx="10881360" cy="1051560"/>
+          </a:xfrm>
+          <a:prstGeom prst="rect">
+            <a:avLst/>
+          </a:prstGeom>
+          <a:noFill/>
+        </p:spPr>
+        <p:txBody>
+          <a:bodyPr wrap="square" anchor="t"/>
+          <a:lstStyle/>
+          <a:p>
+            <a:pPr algn="l"/>
+            <a:r>
+              <a:rPr sz="1400" b="0">
+                <a:solidFill>
+                  <a:srgbClr val="0B2545"/>
+                </a:solidFill>
+                <a:latin typeface="Calibri"/>
+              </a:rPr>
+              <a:t>Objective: provide a structured first analysis of supplier files, reduce review time and highlight inconsistencies — while the engineer remains responsible for the technical decision.
+LEON does not approve a supplier and does not replace Quality or Purchasing.</a:t>
+            </a:r>
+          </a:p>
+        </p:txBody>
+      </p:sp>
+      <p:sp>
+        <p:nvSpPr>
+          <p:cNvPr id="10" name="Rounded Rectangle 9"/>
+          <p:cNvSpPr/>
+          <p:nvPr/>
+        </p:nvSpPr>
+        <p:spPr>
+          <a:xfrm>
+            <a:off x="411480" y="2724912"/>
+            <a:ext cx="3611880" cy="3611880"/>
           </a:xfrm>
           <a:prstGeom prst="roundRect">
             <a:avLst>
@@ -11444,14 +7850,14 @@
       </p:sp>
       <p:sp>
         <p:nvSpPr>
-          <p:cNvPr id="9" name="Rectangle 8"/>
+          <p:cNvPr id="11" name="Rectangle 10"/>
           <p:cNvSpPr/>
           <p:nvPr/>
         </p:nvSpPr>
         <p:spPr>
           <a:xfrm>
-            <a:off x="411480" y="1389888"/>
-            <a:ext cx="73152" cy="2240280"/>
+            <a:off x="411480" y="2724912"/>
+            <a:ext cx="3611880" cy="91440"/>
           </a:xfrm>
           <a:prstGeom prst="rect">
             <a:avLst/>
@@ -11487,14 +7893,14 @@
       </p:sp>
       <p:sp>
         <p:nvSpPr>
-          <p:cNvPr id="10" name="TextBox 9"/>
+          <p:cNvPr id="12" name="TextBox 11"/>
           <p:cNvSpPr txBox="1"/>
           <p:nvPr/>
         </p:nvSpPr>
         <p:spPr>
           <a:xfrm>
-            <a:off x="612648" y="1517904"/>
-            <a:ext cx="5221224" cy="347472"/>
+            <a:off x="612648" y="2907792"/>
+            <a:ext cx="3200400" cy="502920"/>
           </a:xfrm>
           <a:prstGeom prst="rect">
             <a:avLst/>
@@ -11507,27 +7913,27 @@
           <a:p>
             <a:pPr algn="l"/>
             <a:r>
-              <a:rPr sz="1600" b="1">
+              <a:rPr sz="1500" b="1">
                 <a:solidFill>
                   <a:srgbClr val="0B2545"/>
                 </a:solidFill>
                 <a:latin typeface="Calibri"/>
               </a:rPr>
-              <a:t>Objective</a:t>
-            </a:r>
-          </a:p>
-        </p:txBody>
-      </p:sp>
-      <p:sp>
-        <p:nvSpPr>
-          <p:cNvPr id="11" name="TextBox 10"/>
+              <a:t>1. Specification (CTS)</a:t>
+            </a:r>
+          </a:p>
+        </p:txBody>
+      </p:sp>
+      <p:sp>
+        <p:nvSpPr>
+          <p:cNvPr id="13" name="TextBox 12"/>
           <p:cNvSpPr txBox="1"/>
           <p:nvPr/>
         </p:nvSpPr>
         <p:spPr>
           <a:xfrm>
-            <a:off x="612648" y="1847088"/>
-            <a:ext cx="5221224" cy="1655064"/>
+            <a:off x="612648" y="3429000"/>
+            <a:ext cx="3200400" cy="2697480"/>
           </a:xfrm>
           <a:prstGeom prst="rect">
             <a:avLst/>
@@ -11540,27 +7946,29 @@
           <a:p>
             <a:pPr algn="l"/>
             <a:r>
-              <a:rPr sz="1400" b="0">
+              <a:rPr sz="1300" b="0">
                 <a:solidFill>
                   <a:srgbClr val="1C2B3A"/>
                 </a:solidFill>
                 <a:latin typeface="Calibri"/>
               </a:rPr>
-              <a:t>Reduce the time and the risk of a purely manual review of specifications, conformity matrices and TDR files, while keeping the technical decision with the engineer.</a:t>
-            </a:r>
-          </a:p>
-        </p:txBody>
-      </p:sp>
-      <p:sp>
-        <p:nvSpPr>
-          <p:cNvPr id="12" name="Rounded Rectangle 11"/>
+              <a:t>Issued by Stellantis.
+Defines the requirements of the component: performance, interfaces, environment, safety, quality.
+Contractual reference of what “compliant” means.</a:t>
+            </a:r>
+          </a:p>
+        </p:txBody>
+      </p:sp>
+      <p:sp>
+        <p:nvSpPr>
+          <p:cNvPr id="14" name="Rounded Rectangle 13"/>
           <p:cNvSpPr/>
           <p:nvPr/>
         </p:nvSpPr>
         <p:spPr>
           <a:xfrm>
-            <a:off x="6172200" y="1389888"/>
-            <a:ext cx="5532120" cy="2240280"/>
+            <a:off x="4206240" y="2724912"/>
+            <a:ext cx="3611880" cy="3611880"/>
           </a:xfrm>
           <a:prstGeom prst="roundRect">
             <a:avLst>
@@ -11600,20 +8008,20 @@
       </p:sp>
       <p:sp>
         <p:nvSpPr>
-          <p:cNvPr id="13" name="Rectangle 12"/>
+          <p:cNvPr id="15" name="Rectangle 14"/>
           <p:cNvSpPr/>
           <p:nvPr/>
         </p:nvSpPr>
         <p:spPr>
           <a:xfrm>
-            <a:off x="6172200" y="1389888"/>
-            <a:ext cx="73152" cy="2240280"/>
+            <a:off x="4206240" y="2724912"/>
+            <a:ext cx="3611880" cy="91440"/>
           </a:xfrm>
           <a:prstGeom prst="rect">
             <a:avLst/>
           </a:prstGeom>
           <a:solidFill>
-            <a:srgbClr val="123061"/>
+            <a:srgbClr val="9A5B00"/>
           </a:solidFill>
           <a:ln>
             <a:noFill/>
@@ -11643,14 +8051,14 @@
       </p:sp>
       <p:sp>
         <p:nvSpPr>
-          <p:cNvPr id="14" name="TextBox 13"/>
+          <p:cNvPr id="16" name="TextBox 15"/>
           <p:cNvSpPr txBox="1"/>
           <p:nvPr/>
         </p:nvSpPr>
         <p:spPr>
           <a:xfrm>
-            <a:off x="6373368" y="1517904"/>
-            <a:ext cx="5221224" cy="347472"/>
+            <a:off x="4407408" y="2907792"/>
+            <a:ext cx="3200400" cy="502920"/>
           </a:xfrm>
           <a:prstGeom prst="rect">
             <a:avLst/>
@@ -11663,27 +8071,27 @@
           <a:p>
             <a:pPr algn="l"/>
             <a:r>
-              <a:rPr sz="1600" b="1">
+              <a:rPr sz="1500" b="1">
                 <a:solidFill>
                   <a:srgbClr val="0B2545"/>
                 </a:solidFill>
                 <a:latin typeface="Calibri"/>
               </a:rPr>
-              <a:t>Scope</a:t>
-            </a:r>
-          </a:p>
-        </p:txBody>
-      </p:sp>
-      <p:sp>
-        <p:nvSpPr>
-          <p:cNvPr id="15" name="TextBox 14"/>
+              <a:t>2. Conformity matrix</a:t>
+            </a:r>
+          </a:p>
+        </p:txBody>
+      </p:sp>
+      <p:sp>
+        <p:nvSpPr>
+          <p:cNvPr id="17" name="TextBox 16"/>
           <p:cNvSpPr txBox="1"/>
           <p:nvPr/>
         </p:nvSpPr>
         <p:spPr>
           <a:xfrm>
-            <a:off x="6373368" y="1847088"/>
-            <a:ext cx="5221224" cy="1655064"/>
+            <a:off x="4407408" y="3429000"/>
+            <a:ext cx="3200400" cy="2697480"/>
           </a:xfrm>
           <a:prstGeom prst="rect">
             <a:avLst/>
@@ -11696,27 +8104,29 @@
           <a:p>
             <a:pPr algn="l"/>
             <a:r>
-              <a:rPr sz="1400" b="0">
+              <a:rPr sz="1300" b="0">
                 <a:solidFill>
                   <a:srgbClr val="1C2B3A"/>
                 </a:solidFill>
                 <a:latin typeface="Calibri"/>
               </a:rPr>
-              <a:t>Customer Technical Specifications (CTS), FNR conformity matrices (Excel / ODS) and supplier technical dossiers (PowerPoint, PDF, Word).</a:t>
-            </a:r>
-          </a:p>
-        </p:txBody>
-      </p:sp>
-      <p:sp>
-        <p:nvSpPr>
-          <p:cNvPr id="16" name="Rounded Rectangle 15"/>
+              <a:t>Completed by the supplier.
+One row per requirement. Status OK, NOK or NA, plus a comment.
+Official supplier declaration.</a:t>
+            </a:r>
+          </a:p>
+        </p:txBody>
+      </p:sp>
+      <p:sp>
+        <p:nvSpPr>
+          <p:cNvPr id="18" name="Rounded Rectangle 17"/>
           <p:cNvSpPr/>
           <p:nvPr/>
         </p:nvSpPr>
         <p:spPr>
           <a:xfrm>
-            <a:off x="411480" y="3794760"/>
-            <a:ext cx="5532120" cy="2514600"/>
+            <a:off x="8001000" y="2724912"/>
+            <a:ext cx="3611880" cy="3611880"/>
           </a:xfrm>
           <a:prstGeom prst="roundRect">
             <a:avLst>
@@ -11756,14 +8166,14 @@
       </p:sp>
       <p:sp>
         <p:nvSpPr>
-          <p:cNvPr id="17" name="Rectangle 16"/>
+          <p:cNvPr id="19" name="Rectangle 18"/>
           <p:cNvSpPr/>
           <p:nvPr/>
         </p:nvSpPr>
         <p:spPr>
           <a:xfrm>
-            <a:off x="411480" y="3794760"/>
-            <a:ext cx="73152" cy="2514600"/>
+            <a:off x="8001000" y="2724912"/>
+            <a:ext cx="3611880" cy="91440"/>
           </a:xfrm>
           <a:prstGeom prst="rect">
             <a:avLst/>
@@ -11799,14 +8209,14 @@
       </p:sp>
       <p:sp>
         <p:nvSpPr>
-          <p:cNvPr id="18" name="TextBox 17"/>
+          <p:cNvPr id="20" name="TextBox 19"/>
           <p:cNvSpPr txBox="1"/>
           <p:nvPr/>
         </p:nvSpPr>
         <p:spPr>
           <a:xfrm>
-            <a:off x="612648" y="3922776"/>
-            <a:ext cx="5221224" cy="347472"/>
+            <a:off x="8202168" y="2907792"/>
+            <a:ext cx="3200400" cy="502920"/>
           </a:xfrm>
           <a:prstGeom prst="rect">
             <a:avLst/>
@@ -11819,27 +8229,27 @@
           <a:p>
             <a:pPr algn="l"/>
             <a:r>
-              <a:rPr sz="1600" b="1">
+              <a:rPr sz="1500" b="1">
                 <a:solidFill>
                   <a:srgbClr val="0B2545"/>
                 </a:solidFill>
                 <a:latin typeface="Calibri"/>
               </a:rPr>
-              <a:t>Expected result</a:t>
-            </a:r>
-          </a:p>
-        </p:txBody>
-      </p:sp>
-      <p:sp>
-        <p:nvSpPr>
-          <p:cNvPr id="19" name="TextBox 18"/>
+              <a:t>3. TDR</a:t>
+            </a:r>
+          </a:p>
+        </p:txBody>
+      </p:sp>
+      <p:sp>
+        <p:nvSpPr>
+          <p:cNvPr id="21" name="TextBox 20"/>
           <p:cNvSpPr txBox="1"/>
           <p:nvPr/>
         </p:nvSpPr>
         <p:spPr>
           <a:xfrm>
-            <a:off x="612648" y="4251960"/>
-            <a:ext cx="5221224" cy="1929384"/>
+            <a:off x="8202168" y="3429000"/>
+            <a:ext cx="3200400" cy="2697480"/>
           </a:xfrm>
           <a:prstGeom prst="rect">
             <a:avLst/>
@@ -11852,177 +8262,22 @@
           <a:p>
             <a:pPr algn="l"/>
             <a:r>
-              <a:rPr sz="1400" b="0">
+              <a:rPr sz="1300" b="0">
                 <a:solidFill>
                   <a:srgbClr val="1C2B3A"/>
                 </a:solidFill>
                 <a:latin typeface="Calibri"/>
               </a:rPr>
-              <a:t>A first reading of the files: requirement status, inconsistencies, and the location of the supporting evidence.
-Export of a colour-coded Excel report for the review meeting.</a:t>
-            </a:r>
-          </a:p>
-        </p:txBody>
-      </p:sp>
-      <p:sp>
-        <p:nvSpPr>
-          <p:cNvPr id="20" name="Rounded Rectangle 19"/>
-          <p:cNvSpPr/>
-          <p:nvPr/>
-        </p:nvSpPr>
-        <p:spPr>
-          <a:xfrm>
-            <a:off x="6172200" y="3794760"/>
-            <a:ext cx="5532120" cy="2514600"/>
-          </a:xfrm>
-          <a:prstGeom prst="roundRect">
-            <a:avLst>
-              <a:gd name="adj" fmla="val 8000"/>
-            </a:avLst>
-          </a:prstGeom>
-          <a:solidFill>
-            <a:srgbClr val="FFFFFF"/>
-          </a:solidFill>
-          <a:ln w="12700">
-            <a:solidFill>
-              <a:srgbClr val="DDE3EC"/>
-            </a:solidFill>
-          </a:ln>
-        </p:spPr>
-        <p:style>
-          <a:lnRef idx="1">
-            <a:schemeClr val="accent1"/>
-          </a:lnRef>
-          <a:fillRef idx="3">
-            <a:schemeClr val="accent1"/>
-          </a:fillRef>
-          <a:effectRef idx="2">
-            <a:schemeClr val="accent1"/>
-          </a:effectRef>
-          <a:fontRef idx="minor">
-            <a:schemeClr val="lt1"/>
-          </a:fontRef>
-        </p:style>
-        <p:txBody>
-          <a:bodyPr rtlCol="0" anchor="ctr"/>
-          <a:lstStyle/>
-          <a:p>
-            <a:pPr algn="ctr"/>
-          </a:p>
-        </p:txBody>
-      </p:sp>
-      <p:sp>
-        <p:nvSpPr>
-          <p:cNvPr id="21" name="Rectangle 20"/>
-          <p:cNvSpPr/>
-          <p:nvPr/>
-        </p:nvSpPr>
-        <p:spPr>
-          <a:xfrm>
-            <a:off x="6172200" y="3794760"/>
-            <a:ext cx="73152" cy="2514600"/>
-          </a:xfrm>
-          <a:prstGeom prst="rect">
-            <a:avLst/>
-          </a:prstGeom>
-          <a:solidFill>
-            <a:srgbClr val="9A5B00"/>
-          </a:solidFill>
-          <a:ln>
-            <a:noFill/>
-          </a:ln>
-        </p:spPr>
-        <p:style>
-          <a:lnRef idx="1">
-            <a:schemeClr val="accent1"/>
-          </a:lnRef>
-          <a:fillRef idx="3">
-            <a:schemeClr val="accent1"/>
-          </a:fillRef>
-          <a:effectRef idx="2">
-            <a:schemeClr val="accent1"/>
-          </a:effectRef>
-          <a:fontRef idx="minor">
-            <a:schemeClr val="lt1"/>
-          </a:fontRef>
-        </p:style>
-        <p:txBody>
-          <a:bodyPr rtlCol="0" anchor="ctr"/>
-          <a:lstStyle/>
-          <a:p>
-            <a:pPr algn="ctr"/>
-          </a:p>
-        </p:txBody>
-      </p:sp>
-      <p:sp>
-        <p:nvSpPr>
-          <p:cNvPr id="22" name="TextBox 21"/>
-          <p:cNvSpPr txBox="1"/>
-          <p:nvPr/>
-        </p:nvSpPr>
-        <p:spPr>
-          <a:xfrm>
-            <a:off x="6373368" y="3922776"/>
-            <a:ext cx="5221224" cy="347472"/>
-          </a:xfrm>
-          <a:prstGeom prst="rect">
-            <a:avLst/>
-          </a:prstGeom>
-          <a:noFill/>
-        </p:spPr>
-        <p:txBody>
-          <a:bodyPr wrap="square" anchor="t"/>
-          <a:lstStyle/>
-          <a:p>
-            <a:pPr algn="l"/>
-            <a:r>
-              <a:rPr sz="1600" b="1">
-                <a:solidFill>
-                  <a:srgbClr val="0B2545"/>
-                </a:solidFill>
-                <a:latin typeface="Calibri"/>
-              </a:rPr>
-              <a:t>Limit of the tool</a:t>
-            </a:r>
-          </a:p>
-        </p:txBody>
-      </p:sp>
-      <p:sp>
-        <p:nvSpPr>
-          <p:cNvPr id="23" name="TextBox 22"/>
-          <p:cNvSpPr txBox="1"/>
-          <p:nvPr/>
-        </p:nvSpPr>
-        <p:spPr>
-          <a:xfrm>
-            <a:off x="6373368" y="4251960"/>
-            <a:ext cx="5221224" cy="1929384"/>
-          </a:xfrm>
-          <a:prstGeom prst="rect">
-            <a:avLst/>
-          </a:prstGeom>
-          <a:noFill/>
-        </p:spPr>
-        <p:txBody>
-          <a:bodyPr wrap="square" anchor="t"/>
-          <a:lstStyle/>
-          <a:p>
-            <a:pPr algn="l"/>
-            <a:r>
-              <a:rPr sz="1400" b="0">
-                <a:solidFill>
-                  <a:srgbClr val="1C2B3A"/>
-                </a:solidFill>
-                <a:latin typeface="Calibri"/>
-              </a:rPr>
-              <a:t>LEON prepares the review. It does not approve a supplier and does not replace Quality, Purchasing or the responsible engineer.</a:t>
-            </a:r>
-          </a:p>
-        </p:txBody>
-      </p:sp>
-      <p:sp>
-        <p:nvSpPr>
-          <p:cNvPr id="24" name="Rectangle 23"/>
+              <a:t>Technical Design Review / dossier.
+PowerPoint or PDF: architecture, measured values, tests, design choices.
+Supporting evidence behind the declaration.</a:t>
+            </a:r>
+          </a:p>
+        </p:txBody>
+      </p:sp>
+      <p:sp>
+        <p:nvSpPr>
+          <p:cNvPr id="22" name="Rectangle 21"/>
           <p:cNvSpPr/>
           <p:nvPr/>
         </p:nvSpPr>
@@ -12065,7 +8320,7 @@
       </p:sp>
       <p:sp>
         <p:nvSpPr>
-          <p:cNvPr id="25" name="TextBox 24"/>
+          <p:cNvPr id="23" name="TextBox 22"/>
           <p:cNvSpPr txBox="1"/>
           <p:nvPr/>
         </p:nvSpPr>
@@ -12098,7 +8353,7 @@
       </p:sp>
       <p:sp>
         <p:nvSpPr>
-          <p:cNvPr id="26" name="TextBox 25"/>
+          <p:cNvPr id="24" name="TextBox 23"/>
           <p:cNvSpPr txBox="1"/>
           <p:nvPr/>
         </p:nvSpPr>
@@ -12124,7 +8379,7 @@
                 </a:solidFill>
                 <a:latin typeface="Calibri"/>
               </a:rPr>
-              <a:t>3  /  14</a:t>
+              <a:t>3  /  11</a:t>
             </a:r>
           </a:p>
         </p:txBody>
@@ -12304,7 +8559,7 @@
                 </a:solidFill>
                 <a:latin typeface="Calibri"/>
               </a:rPr>
-              <a:t>PROJECT CONTEXT</a:t>
+              <a:t>THE PROJECT</a:t>
             </a:r>
           </a:p>
         </p:txBody>
@@ -12337,7 +8592,7 @@
                 </a:solidFill>
                 <a:latin typeface="Calibri"/>
               </a:rPr>
-              <a:t>Three documents must remain consistent</a:t>
+              <a:t>Why LEON exists, and what it does</a:t>
             </a:r>
           </a:p>
         </p:txBody>
@@ -12370,7 +8625,7 @@
                 </a:solidFill>
                 <a:latin typeface="Calibri"/>
               </a:rPr>
-              <a:t>For each component, Stellantis requirements, the supplier declaration and the technical evidence.</a:t>
+              <a:t>The review is still largely manual. LEON performs a first reading of the files in a browser.</a:t>
             </a:r>
           </a:p>
         </p:txBody>
@@ -12383,8 +8638,8 @@
         </p:nvSpPr>
         <p:spPr>
           <a:xfrm>
-            <a:off x="411480" y="1417320"/>
-            <a:ext cx="3611880" cy="4892040"/>
+            <a:off x="411480" y="1353312"/>
+            <a:ext cx="5577840" cy="1170432"/>
           </a:xfrm>
           <a:prstGeom prst="roundRect">
             <a:avLst>
@@ -12430,14 +8685,14 @@
         </p:nvSpPr>
         <p:spPr>
           <a:xfrm>
-            <a:off x="411480" y="1417320"/>
-            <a:ext cx="3611880" cy="109728"/>
+            <a:off x="411480" y="1353312"/>
+            <a:ext cx="91440" cy="1170432"/>
           </a:xfrm>
           <a:prstGeom prst="rect">
             <a:avLst/>
           </a:prstGeom>
           <a:solidFill>
-            <a:srgbClr val="1D4ED8"/>
+            <a:srgbClr val="B3261E"/>
           </a:solidFill>
           <a:ln>
             <a:noFill/>
@@ -12473,8 +8728,8 @@
         </p:nvSpPr>
         <p:spPr>
           <a:xfrm>
-            <a:off x="612648" y="1664208"/>
-            <a:ext cx="3200400" cy="640080"/>
+            <a:off x="685800" y="1444752"/>
+            <a:ext cx="5120640" cy="292608"/>
           </a:xfrm>
           <a:prstGeom prst="rect">
             <a:avLst/>
@@ -12487,13 +8742,13 @@
           <a:p>
             <a:pPr algn="l"/>
             <a:r>
-              <a:rPr sz="1600" b="1">
+              <a:rPr sz="1400" b="1">
                 <a:solidFill>
                   <a:srgbClr val="0B2545"/>
                 </a:solidFill>
                 <a:latin typeface="Calibri"/>
               </a:rPr>
-              <a:t>1.  Specification (CTS)</a:t>
+              <a:t>Review time</a:t>
             </a:r>
           </a:p>
         </p:txBody>
@@ -12506,8 +8761,8 @@
         </p:nvSpPr>
         <p:spPr>
           <a:xfrm>
-            <a:off x="612648" y="2377440"/>
-            <a:ext cx="3200400" cy="3657600"/>
+            <a:off x="685800" y="1755648"/>
+            <a:ext cx="5120640" cy="676656"/>
           </a:xfrm>
           <a:prstGeom prst="rect">
             <a:avLst/>
@@ -12520,15 +8775,13 @@
           <a:p>
             <a:pPr algn="l"/>
             <a:r>
-              <a:rPr sz="1400" b="0">
+              <a:rPr sz="1200" b="0">
                 <a:solidFill>
                   <a:srgbClr val="1C2B3A"/>
                 </a:solidFill>
                 <a:latin typeface="Calibri"/>
               </a:rPr>
-              <a:t>Document issued by Stellantis.
-It defines the requirements applicable to the component: performance, interfaces, environment, safety, quality.
-It is the contractual reference of what “compliant” means.</a:t>
+              <a:t>A specification, a matrix of several hundred rows and a TDR of dozens of slides are reviewed mainly by hand.</a:t>
             </a:r>
           </a:p>
         </p:txBody>
@@ -12541,8 +8794,8 @@
         </p:nvSpPr>
         <p:spPr>
           <a:xfrm>
-            <a:off x="4206240" y="1417320"/>
-            <a:ext cx="3611880" cy="4892040"/>
+            <a:off x="411480" y="2615184"/>
+            <a:ext cx="5577840" cy="1170432"/>
           </a:xfrm>
           <a:prstGeom prst="roundRect">
             <a:avLst>
@@ -12588,14 +8841,14 @@
         </p:nvSpPr>
         <p:spPr>
           <a:xfrm>
-            <a:off x="4206240" y="1417320"/>
-            <a:ext cx="3611880" cy="109728"/>
+            <a:off x="411480" y="2615184"/>
+            <a:ext cx="91440" cy="1170432"/>
           </a:xfrm>
           <a:prstGeom prst="rect">
             <a:avLst/>
           </a:prstGeom>
           <a:solidFill>
-            <a:srgbClr val="9A5B00"/>
+            <a:srgbClr val="B3261E"/>
           </a:solidFill>
           <a:ln>
             <a:noFill/>
@@ -12631,8 +8884,8 @@
         </p:nvSpPr>
         <p:spPr>
           <a:xfrm>
-            <a:off x="4407408" y="1664208"/>
-            <a:ext cx="3200400" cy="640080"/>
+            <a:off x="685800" y="2706624"/>
+            <a:ext cx="5120640" cy="292608"/>
           </a:xfrm>
           <a:prstGeom prst="rect">
             <a:avLst/>
@@ -12645,13 +8898,13 @@
           <a:p>
             <a:pPr algn="l"/>
             <a:r>
-              <a:rPr sz="1600" b="1">
+              <a:rPr sz="1400" b="1">
                 <a:solidFill>
                   <a:srgbClr val="0B2545"/>
                 </a:solidFill>
                 <a:latin typeface="Calibri"/>
               </a:rPr>
-              <a:t>2.  Conformity matrix</a:t>
+              <a:t>Incomplete OK</a:t>
             </a:r>
           </a:p>
         </p:txBody>
@@ -12664,8 +8917,8 @@
         </p:nvSpPr>
         <p:spPr>
           <a:xfrm>
-            <a:off x="4407408" y="2377440"/>
-            <a:ext cx="3200400" cy="3657600"/>
+            <a:off x="685800" y="3017520"/>
+            <a:ext cx="5120640" cy="676656"/>
           </a:xfrm>
           <a:prstGeom prst="rect">
             <a:avLst/>
@@ -12678,15 +8931,13 @@
           <a:p>
             <a:pPr algn="l"/>
             <a:r>
-              <a:rPr sz="1400" b="0">
+              <a:rPr sz="1200" b="0">
                 <a:solidFill>
                   <a:srgbClr val="1C2B3A"/>
                 </a:solidFill>
                 <a:latin typeface="Calibri"/>
               </a:rPr>
-              <a:t>Document completed by the supplier.
-One row per requirement. Status OK, NOK (not compliant) or NA (not applicable), with a comment.
-It is the official supplier declaration.</a:t>
+              <a:t>A status marked OK with the comment “pending validation” is not confirmed conformity.</a:t>
             </a:r>
           </a:p>
         </p:txBody>
@@ -12699,8 +8950,8 @@
         </p:nvSpPr>
         <p:spPr>
           <a:xfrm>
-            <a:off x="8001000" y="1417320"/>
-            <a:ext cx="3611880" cy="4892040"/>
+            <a:off x="411480" y="3877056"/>
+            <a:ext cx="5577840" cy="1170432"/>
           </a:xfrm>
           <a:prstGeom prst="roundRect">
             <a:avLst>
@@ -12746,14 +8997,14 @@
         </p:nvSpPr>
         <p:spPr>
           <a:xfrm>
-            <a:off x="8001000" y="1417320"/>
-            <a:ext cx="3611880" cy="109728"/>
+            <a:off x="411480" y="3877056"/>
+            <a:ext cx="91440" cy="1170432"/>
           </a:xfrm>
           <a:prstGeom prst="rect">
             <a:avLst/>
           </a:prstGeom>
           <a:solidFill>
-            <a:srgbClr val="157347"/>
+            <a:srgbClr val="B3261E"/>
           </a:solidFill>
           <a:ln>
             <a:noFill/>
@@ -12789,8 +9040,8 @@
         </p:nvSpPr>
         <p:spPr>
           <a:xfrm>
-            <a:off x="8202168" y="1664208"/>
-            <a:ext cx="3200400" cy="640080"/>
+            <a:off x="685800" y="3968496"/>
+            <a:ext cx="5120640" cy="292608"/>
           </a:xfrm>
           <a:prstGeom prst="rect">
             <a:avLst/>
@@ -12803,13 +9054,13 @@
           <a:p>
             <a:pPr algn="l"/>
             <a:r>
-              <a:rPr sz="1600" b="1">
+              <a:rPr sz="1400" b="1">
                 <a:solidFill>
                   <a:srgbClr val="0B2545"/>
                 </a:solidFill>
                 <a:latin typeface="Calibri"/>
               </a:rPr>
-              <a:t>3.  TDR</a:t>
+              <a:t>File inconsistency</a:t>
             </a:r>
           </a:p>
         </p:txBody>
@@ -12822,8 +9073,8 @@
         </p:nvSpPr>
         <p:spPr>
           <a:xfrm>
-            <a:off x="8202168" y="2377440"/>
-            <a:ext cx="3200400" cy="3657600"/>
+            <a:off x="685800" y="4279392"/>
+            <a:ext cx="5120640" cy="676656"/>
           </a:xfrm>
           <a:prstGeom prst="rect">
             <a:avLst/>
@@ -12836,22 +9087,336 @@
           <a:p>
             <a:pPr algn="l"/>
             <a:r>
-              <a:rPr sz="1400" b="0">
+              <a:rPr sz="1200" b="0">
                 <a:solidFill>
                   <a:srgbClr val="1C2B3A"/>
                 </a:solidFill>
                 <a:latin typeface="Calibri"/>
               </a:rPr>
-              <a:t>Technical Design Review / technical dossier.
-PowerPoint or PDF presenting architecture, values, tests and design choices.
-It is the supporting evidence behind the declaration.</a:t>
-            </a:r>
-          </a:p>
-        </p:txBody>
-      </p:sp>
-      <p:sp>
-        <p:nvSpPr>
-          <p:cNvPr id="20" name="Rectangle 19"/>
+              <a:t>The matrix may declare OK while the TDR shows a lower value (example: ≥ 400:1 required, 380:1 presented).</a:t>
+            </a:r>
+          </a:p>
+        </p:txBody>
+      </p:sp>
+      <p:sp>
+        <p:nvSpPr>
+          <p:cNvPr id="20" name="Rounded Rectangle 19"/>
+          <p:cNvSpPr/>
+          <p:nvPr/>
+        </p:nvSpPr>
+        <p:spPr>
+          <a:xfrm>
+            <a:off x="411480" y="5138928"/>
+            <a:ext cx="5577840" cy="1170432"/>
+          </a:xfrm>
+          <a:prstGeom prst="roundRect">
+            <a:avLst>
+              <a:gd name="adj" fmla="val 8000"/>
+            </a:avLst>
+          </a:prstGeom>
+          <a:solidFill>
+            <a:srgbClr val="FFFFFF"/>
+          </a:solidFill>
+          <a:ln w="12700">
+            <a:solidFill>
+              <a:srgbClr val="DDE3EC"/>
+            </a:solidFill>
+          </a:ln>
+        </p:spPr>
+        <p:style>
+          <a:lnRef idx="1">
+            <a:schemeClr val="accent1"/>
+          </a:lnRef>
+          <a:fillRef idx="3">
+            <a:schemeClr val="accent1"/>
+          </a:fillRef>
+          <a:effectRef idx="2">
+            <a:schemeClr val="accent1"/>
+          </a:effectRef>
+          <a:fontRef idx="minor">
+            <a:schemeClr val="lt1"/>
+          </a:fontRef>
+        </p:style>
+        <p:txBody>
+          <a:bodyPr rtlCol="0" anchor="ctr"/>
+          <a:lstStyle/>
+          <a:p>
+            <a:pPr algn="ctr"/>
+          </a:p>
+        </p:txBody>
+      </p:sp>
+      <p:sp>
+        <p:nvSpPr>
+          <p:cNvPr id="21" name="Rectangle 20"/>
+          <p:cNvSpPr/>
+          <p:nvPr/>
+        </p:nvSpPr>
+        <p:spPr>
+          <a:xfrm>
+            <a:off x="411480" y="5138928"/>
+            <a:ext cx="91440" cy="1170432"/>
+          </a:xfrm>
+          <a:prstGeom prst="rect">
+            <a:avLst/>
+          </a:prstGeom>
+          <a:solidFill>
+            <a:srgbClr val="B3261E"/>
+          </a:solidFill>
+          <a:ln>
+            <a:noFill/>
+          </a:ln>
+        </p:spPr>
+        <p:style>
+          <a:lnRef idx="1">
+            <a:schemeClr val="accent1"/>
+          </a:lnRef>
+          <a:fillRef idx="3">
+            <a:schemeClr val="accent1"/>
+          </a:fillRef>
+          <a:effectRef idx="2">
+            <a:schemeClr val="accent1"/>
+          </a:effectRef>
+          <a:fontRef idx="minor">
+            <a:schemeClr val="lt1"/>
+          </a:fontRef>
+        </p:style>
+        <p:txBody>
+          <a:bodyPr rtlCol="0" anchor="ctr"/>
+          <a:lstStyle/>
+          <a:p>
+            <a:pPr algn="ctr"/>
+          </a:p>
+        </p:txBody>
+      </p:sp>
+      <p:sp>
+        <p:nvSpPr>
+          <p:cNvPr id="22" name="TextBox 21"/>
+          <p:cNvSpPr txBox="1"/>
+          <p:nvPr/>
+        </p:nvSpPr>
+        <p:spPr>
+          <a:xfrm>
+            <a:off x="685800" y="5230368"/>
+            <a:ext cx="5120640" cy="292608"/>
+          </a:xfrm>
+          <a:prstGeom prst="rect">
+            <a:avLst/>
+          </a:prstGeom>
+          <a:noFill/>
+        </p:spPr>
+        <p:txBody>
+          <a:bodyPr wrap="square" anchor="t"/>
+          <a:lstStyle/>
+          <a:p>
+            <a:pPr algn="l"/>
+            <a:r>
+              <a:rPr sz="1400" b="1">
+                <a:solidFill>
+                  <a:srgbClr val="0B2545"/>
+                </a:solidFill>
+                <a:latin typeface="Calibri"/>
+              </a:rPr>
+              <a:t>Supplier comparison</a:t>
+            </a:r>
+          </a:p>
+        </p:txBody>
+      </p:sp>
+      <p:sp>
+        <p:nvSpPr>
+          <p:cNvPr id="23" name="TextBox 22"/>
+          <p:cNvSpPr txBox="1"/>
+          <p:nvPr/>
+        </p:nvSpPr>
+        <p:spPr>
+          <a:xfrm>
+            <a:off x="685800" y="5541264"/>
+            <a:ext cx="5120640" cy="676656"/>
+          </a:xfrm>
+          <a:prstGeom prst="rect">
+            <a:avLst/>
+          </a:prstGeom>
+          <a:noFill/>
+        </p:spPr>
+        <p:txBody>
+          <a:bodyPr wrap="square" anchor="t"/>
+          <a:lstStyle/>
+          <a:p>
+            <a:pPr algn="l"/>
+            <a:r>
+              <a:rPr sz="1200" b="0">
+                <a:solidFill>
+                  <a:srgbClr val="1C2B3A"/>
+                </a:solidFill>
+                <a:latin typeface="Calibri"/>
+              </a:rPr>
+              <a:t>Comparing several technical offers on the same criteria is currently time-consuming.</a:t>
+            </a:r>
+          </a:p>
+        </p:txBody>
+      </p:sp>
+      <p:sp>
+        <p:nvSpPr>
+          <p:cNvPr id="24" name="Rounded Rectangle 23"/>
+          <p:cNvSpPr/>
+          <p:nvPr/>
+        </p:nvSpPr>
+        <p:spPr>
+          <a:xfrm>
+            <a:off x="6217920" y="1353312"/>
+            <a:ext cx="5532120" cy="4956048"/>
+          </a:xfrm>
+          <a:prstGeom prst="roundRect">
+            <a:avLst>
+              <a:gd name="adj" fmla="val 8000"/>
+            </a:avLst>
+          </a:prstGeom>
+          <a:solidFill>
+            <a:srgbClr val="FFFFFF"/>
+          </a:solidFill>
+          <a:ln w="12700">
+            <a:solidFill>
+              <a:srgbClr val="DDE3EC"/>
+            </a:solidFill>
+          </a:ln>
+        </p:spPr>
+        <p:style>
+          <a:lnRef idx="1">
+            <a:schemeClr val="accent1"/>
+          </a:lnRef>
+          <a:fillRef idx="3">
+            <a:schemeClr val="accent1"/>
+          </a:fillRef>
+          <a:effectRef idx="2">
+            <a:schemeClr val="accent1"/>
+          </a:effectRef>
+          <a:fontRef idx="minor">
+            <a:schemeClr val="lt1"/>
+          </a:fontRef>
+        </p:style>
+        <p:txBody>
+          <a:bodyPr rtlCol="0" anchor="ctr"/>
+          <a:lstStyle/>
+          <a:p>
+            <a:pPr algn="ctr"/>
+          </a:p>
+        </p:txBody>
+      </p:sp>
+      <p:sp>
+        <p:nvSpPr>
+          <p:cNvPr id="25" name="Rectangle 24"/>
+          <p:cNvSpPr/>
+          <p:nvPr/>
+        </p:nvSpPr>
+        <p:spPr>
+          <a:xfrm>
+            <a:off x="6217920" y="1353312"/>
+            <a:ext cx="73152" cy="4956048"/>
+          </a:xfrm>
+          <a:prstGeom prst="rect">
+            <a:avLst/>
+          </a:prstGeom>
+          <a:solidFill>
+            <a:srgbClr val="1D4ED8"/>
+          </a:solidFill>
+          <a:ln>
+            <a:noFill/>
+          </a:ln>
+        </p:spPr>
+        <p:style>
+          <a:lnRef idx="1">
+            <a:schemeClr val="accent1"/>
+          </a:lnRef>
+          <a:fillRef idx="3">
+            <a:schemeClr val="accent1"/>
+          </a:fillRef>
+          <a:effectRef idx="2">
+            <a:schemeClr val="accent1"/>
+          </a:effectRef>
+          <a:fontRef idx="minor">
+            <a:schemeClr val="lt1"/>
+          </a:fontRef>
+        </p:style>
+        <p:txBody>
+          <a:bodyPr rtlCol="0" anchor="ctr"/>
+          <a:lstStyle/>
+          <a:p>
+            <a:pPr algn="ctr"/>
+          </a:p>
+        </p:txBody>
+      </p:sp>
+      <p:sp>
+        <p:nvSpPr>
+          <p:cNvPr id="26" name="TextBox 25"/>
+          <p:cNvSpPr txBox="1"/>
+          <p:nvPr/>
+        </p:nvSpPr>
+        <p:spPr>
+          <a:xfrm>
+            <a:off x="6419088" y="1481328"/>
+            <a:ext cx="5221224" cy="347472"/>
+          </a:xfrm>
+          <a:prstGeom prst="rect">
+            <a:avLst/>
+          </a:prstGeom>
+          <a:noFill/>
+        </p:spPr>
+        <p:txBody>
+          <a:bodyPr wrap="square" anchor="t"/>
+          <a:lstStyle/>
+          <a:p>
+            <a:pPr algn="l"/>
+            <a:r>
+              <a:rPr sz="1700" b="1">
+                <a:solidFill>
+                  <a:srgbClr val="0B2545"/>
+                </a:solidFill>
+                <a:latin typeface="Calibri"/>
+              </a:rPr>
+              <a:t>What LEON does</a:t>
+            </a:r>
+          </a:p>
+        </p:txBody>
+      </p:sp>
+      <p:sp>
+        <p:nvSpPr>
+          <p:cNvPr id="27" name="TextBox 26"/>
+          <p:cNvSpPr txBox="1"/>
+          <p:nvPr/>
+        </p:nvSpPr>
+        <p:spPr>
+          <a:xfrm>
+            <a:off x="6419088" y="1810512"/>
+            <a:ext cx="5221224" cy="4370832"/>
+          </a:xfrm>
+          <a:prstGeom prst="rect">
+            <a:avLst/>
+          </a:prstGeom>
+          <a:noFill/>
+        </p:spPr>
+        <p:txBody>
+          <a:bodyPr wrap="square" anchor="t"/>
+          <a:lstStyle/>
+          <a:p>
+            <a:pPr algn="l"/>
+            <a:r>
+              <a:rPr sz="1300" b="0">
+                <a:solidFill>
+                  <a:srgbClr val="1C2B3A"/>
+                </a:solidFill>
+                <a:latin typeface="Calibri"/>
+              </a:rPr>
+              <a:t>The specification, the matrix and the TDR are uploaded in the browser.
+The application identifies each requirement, its status, and the matching page or slide in the TDR.
+It highlights inconsistencies and produces a colour-coded Excel report for the review meeting.
+No installation is required for the reviewer.
+The technical decision remains human. LEON does not issue a certificate of conformity.</a:t>
+            </a:r>
+          </a:p>
+        </p:txBody>
+      </p:sp>
+      <p:sp>
+        <p:nvSpPr>
+          <p:cNvPr id="28" name="Rectangle 27"/>
           <p:cNvSpPr/>
           <p:nvPr/>
         </p:nvSpPr>
@@ -12894,7 +9459,7 @@
       </p:sp>
       <p:sp>
         <p:nvSpPr>
-          <p:cNvPr id="21" name="TextBox 20"/>
+          <p:cNvPr id="29" name="TextBox 28"/>
           <p:cNvSpPr txBox="1"/>
           <p:nvPr/>
         </p:nvSpPr>
@@ -12927,7 +9492,7 @@
       </p:sp>
       <p:sp>
         <p:nvSpPr>
-          <p:cNvPr id="22" name="TextBox 21"/>
+          <p:cNvPr id="30" name="TextBox 29"/>
           <p:cNvSpPr txBox="1"/>
           <p:nvPr/>
         </p:nvSpPr>
@@ -12953,7 +9518,7 @@
                 </a:solidFill>
                 <a:latin typeface="Calibri"/>
               </a:rPr>
-              <a:t>4  /  14</a:t>
+              <a:t>4  /  11</a:t>
             </a:r>
           </a:p>
         </p:txBody>
@@ -13133,7 +9698,7 @@
                 </a:solidFill>
                 <a:latin typeface="Calibri"/>
               </a:rPr>
-              <a:t>WHY THE PROJECT EXISTS</a:t>
+              <a:t>THE APPLICATION</a:t>
             </a:r>
           </a:p>
         </p:txBody>
@@ -13166,7 +9731,7 @@
                 </a:solidFill>
                 <a:latin typeface="Calibri"/>
               </a:rPr>
-              <a:t>The current review remains largely manual</a:t>
+              <a:t>The interface — six functions</a:t>
             </a:r>
           </a:p>
         </p:txBody>
@@ -13199,7 +9764,7 @@
                 </a:solidFill>
                 <a:latin typeface="Calibri"/>
               </a:rPr>
-              <a:t>An OK status in Excel, or a complete TDR presentation, can still hide an inconsistency.</a:t>
+              <a:t>A single browser page. Only the relevant function is used.</a:t>
             </a:r>
           </a:p>
         </p:txBody>
@@ -13212,8 +9777,8 @@
         </p:nvSpPr>
         <p:spPr>
           <a:xfrm>
-            <a:off x="457200" y="1371600"/>
-            <a:ext cx="11247120" cy="1115568"/>
+            <a:off x="411480" y="1389888"/>
+            <a:ext cx="3566160" cy="2194560"/>
           </a:xfrm>
           <a:prstGeom prst="roundRect">
             <a:avLst>
@@ -13259,14 +9824,14 @@
         </p:nvSpPr>
         <p:spPr>
           <a:xfrm>
-            <a:off x="457200" y="1371600"/>
-            <a:ext cx="109728" cy="1115568"/>
+            <a:off x="411480" y="1389888"/>
+            <a:ext cx="3566160" cy="91440"/>
           </a:xfrm>
           <a:prstGeom prst="rect">
             <a:avLst/>
           </a:prstGeom>
           <a:solidFill>
-            <a:srgbClr val="B3261E"/>
+            <a:srgbClr val="1D4ED8"/>
           </a:solidFill>
           <a:ln>
             <a:noFill/>
@@ -13302,8 +9867,8 @@
         </p:nvSpPr>
         <p:spPr>
           <a:xfrm>
-            <a:off x="777240" y="1517904"/>
-            <a:ext cx="10698480" cy="329184"/>
+            <a:off x="612648" y="1645920"/>
+            <a:ext cx="3163824" cy="640080"/>
           </a:xfrm>
           <a:prstGeom prst="rect">
             <a:avLst/>
@@ -13316,13 +9881,13 @@
           <a:p>
             <a:pPr algn="l"/>
             <a:r>
-              <a:rPr sz="1800" b="1">
+              <a:rPr sz="1500" b="1">
                 <a:solidFill>
                   <a:srgbClr val="0B2545"/>
                 </a:solidFill>
                 <a:latin typeface="Calibri"/>
               </a:rPr>
-              <a:t>Review time</a:t>
+              <a:t>Specification validation</a:t>
             </a:r>
           </a:p>
         </p:txBody>
@@ -13335,8 +9900,8 @@
         </p:nvSpPr>
         <p:spPr>
           <a:xfrm>
-            <a:off x="777240" y="1847088"/>
-            <a:ext cx="10698480" cy="530352"/>
+            <a:off x="612648" y="2395728"/>
+            <a:ext cx="3163824" cy="1005840"/>
           </a:xfrm>
           <a:prstGeom prst="rect">
             <a:avLst/>
@@ -13349,13 +9914,13 @@
           <a:p>
             <a:pPr algn="l"/>
             <a:r>
-              <a:rPr sz="1400" b="0">
+              <a:rPr sz="1300" b="0">
                 <a:solidFill>
                   <a:srgbClr val="1C2B3A"/>
                 </a:solidFill>
                 <a:latin typeface="Calibri"/>
               </a:rPr>
-              <a:t>A specification, a matrix of several hundred rows and a TDR of several dozen slides are reviewed mainly by hand.</a:t>
+              <a:t>Checks completeness and writing quality of the CTS before it is issued.</a:t>
             </a:r>
           </a:p>
         </p:txBody>
@@ -13368,8 +9933,8 @@
         </p:nvSpPr>
         <p:spPr>
           <a:xfrm>
-            <a:off x="457200" y="2606040"/>
-            <a:ext cx="11247120" cy="1115568"/>
+            <a:off x="4160520" y="1389888"/>
+            <a:ext cx="3566160" cy="2194560"/>
           </a:xfrm>
           <a:prstGeom prst="roundRect">
             <a:avLst>
@@ -13415,14 +9980,14 @@
         </p:nvSpPr>
         <p:spPr>
           <a:xfrm>
-            <a:off x="457200" y="2606040"/>
-            <a:ext cx="109728" cy="1115568"/>
+            <a:off x="4160520" y="1389888"/>
+            <a:ext cx="3566160" cy="91440"/>
           </a:xfrm>
           <a:prstGeom prst="rect">
             <a:avLst/>
           </a:prstGeom>
           <a:solidFill>
-            <a:srgbClr val="B3261E"/>
+            <a:srgbClr val="9A5B00"/>
           </a:solidFill>
           <a:ln>
             <a:noFill/>
@@ -13458,8 +10023,8 @@
         </p:nvSpPr>
         <p:spPr>
           <a:xfrm>
-            <a:off x="777240" y="2752344"/>
-            <a:ext cx="10698480" cy="329184"/>
+            <a:off x="4361688" y="1645920"/>
+            <a:ext cx="3163824" cy="640080"/>
           </a:xfrm>
           <a:prstGeom prst="rect">
             <a:avLst/>
@@ -13472,13 +10037,13 @@
           <a:p>
             <a:pPr algn="l"/>
             <a:r>
-              <a:rPr sz="1800" b="1">
+              <a:rPr sz="1500" b="1">
                 <a:solidFill>
                   <a:srgbClr val="0B2545"/>
                 </a:solidFill>
                 <a:latin typeface="Calibri"/>
               </a:rPr>
-              <a:t>Incomplete declarations</a:t>
+              <a:t>Conformity matrix</a:t>
             </a:r>
           </a:p>
         </p:txBody>
@@ -13491,8 +10056,8 @@
         </p:nvSpPr>
         <p:spPr>
           <a:xfrm>
-            <a:off x="777240" y="3081528"/>
-            <a:ext cx="10698480" cy="530352"/>
+            <a:off x="4361688" y="2395728"/>
+            <a:ext cx="3163824" cy="1005840"/>
           </a:xfrm>
           <a:prstGeom prst="rect">
             <a:avLst/>
@@ -13505,13 +10070,13 @@
           <a:p>
             <a:pPr algn="l"/>
             <a:r>
-              <a:rPr sz="1400" b="0">
+              <a:rPr sz="1300" b="0">
                 <a:solidFill>
                   <a:srgbClr val="1C2B3A"/>
                 </a:solidFill>
                 <a:latin typeface="Calibri"/>
               </a:rPr>
-              <a:t>A requirement marked OK with a comment such as “pending validation” or “partially covered” is not a confirmed conformity.</a:t>
+              <a:t>Analyses OK / NOK / NA statuses and flags contradictory OK comments.</a:t>
             </a:r>
           </a:p>
         </p:txBody>
@@ -13524,8 +10089,8 @@
         </p:nvSpPr>
         <p:spPr>
           <a:xfrm>
-            <a:off x="457200" y="3840480"/>
-            <a:ext cx="11247120" cy="1115568"/>
+            <a:off x="7909560" y="1389888"/>
+            <a:ext cx="3566160" cy="2194560"/>
           </a:xfrm>
           <a:prstGeom prst="roundRect">
             <a:avLst>
@@ -13571,14 +10136,14 @@
         </p:nvSpPr>
         <p:spPr>
           <a:xfrm>
-            <a:off x="457200" y="3840480"/>
-            <a:ext cx="109728" cy="1115568"/>
+            <a:off x="7909560" y="1389888"/>
+            <a:ext cx="3566160" cy="91440"/>
           </a:xfrm>
           <a:prstGeom prst="rect">
             <a:avLst/>
           </a:prstGeom>
           <a:solidFill>
-            <a:srgbClr val="B3261E"/>
+            <a:srgbClr val="123061"/>
           </a:solidFill>
           <a:ln>
             <a:noFill/>
@@ -13614,8 +10179,8 @@
         </p:nvSpPr>
         <p:spPr>
           <a:xfrm>
-            <a:off x="777240" y="3986784"/>
-            <a:ext cx="10698480" cy="329184"/>
+            <a:off x="8110728" y="1645920"/>
+            <a:ext cx="3163824" cy="640080"/>
           </a:xfrm>
           <a:prstGeom prst="rect">
             <a:avLst/>
@@ -13628,13 +10193,13 @@
           <a:p>
             <a:pPr algn="l"/>
             <a:r>
-              <a:rPr sz="1800" b="1">
+              <a:rPr sz="1500" b="1">
                 <a:solidFill>
                   <a:srgbClr val="0B2545"/>
                 </a:solidFill>
                 <a:latin typeface="Calibri"/>
               </a:rPr>
-              <a:t>Inconsistency between files</a:t>
+              <a:t>Matrix ↔ TDR</a:t>
             </a:r>
           </a:p>
         </p:txBody>
@@ -13647,8 +10212,8 @@
         </p:nvSpPr>
         <p:spPr>
           <a:xfrm>
-            <a:off x="777240" y="4315968"/>
-            <a:ext cx="10698480" cy="530352"/>
+            <a:off x="8110728" y="2395728"/>
+            <a:ext cx="3163824" cy="1005840"/>
           </a:xfrm>
           <a:prstGeom prst="rect">
             <a:avLst/>
@@ -13661,13 +10226,13 @@
           <a:p>
             <a:pPr algn="l"/>
             <a:r>
-              <a:rPr sz="1400" b="0">
+              <a:rPr sz="1300" b="0">
                 <a:solidFill>
                   <a:srgbClr val="1C2B3A"/>
                 </a:solidFill>
                 <a:latin typeface="Calibri"/>
               </a:rPr>
-              <a:t>The matrix may declare OK while the TDR presents a value below the requirement (for example contrast ≥ 400:1 in the specification, 380:1 in the TDR).</a:t>
+              <a:t>Compares the supplier declaration with the evidence in the TDR.</a:t>
             </a:r>
           </a:p>
         </p:txBody>
@@ -13680,8 +10245,8 @@
         </p:nvSpPr>
         <p:spPr>
           <a:xfrm>
-            <a:off x="457200" y="5074920"/>
-            <a:ext cx="11247120" cy="1115568"/>
+            <a:off x="411480" y="3794760"/>
+            <a:ext cx="3566160" cy="2194560"/>
           </a:xfrm>
           <a:prstGeom prst="roundRect">
             <a:avLst>
@@ -13727,14 +10292,14 @@
         </p:nvSpPr>
         <p:spPr>
           <a:xfrm>
-            <a:off x="457200" y="5074920"/>
-            <a:ext cx="109728" cy="1115568"/>
+            <a:off x="411480" y="3794760"/>
+            <a:ext cx="3566160" cy="91440"/>
           </a:xfrm>
           <a:prstGeom prst="rect">
             <a:avLst/>
           </a:prstGeom>
           <a:solidFill>
-            <a:srgbClr val="B3261E"/>
+            <a:srgbClr val="157347"/>
           </a:solidFill>
           <a:ln>
             <a:noFill/>
@@ -13770,8 +10335,8 @@
         </p:nvSpPr>
         <p:spPr>
           <a:xfrm>
-            <a:off x="777240" y="5221224"/>
-            <a:ext cx="10698480" cy="329184"/>
+            <a:off x="612648" y="4050792"/>
+            <a:ext cx="3163824" cy="640080"/>
           </a:xfrm>
           <a:prstGeom prst="rect">
             <a:avLst/>
@@ -13784,13 +10349,13 @@
           <a:p>
             <a:pPr algn="l"/>
             <a:r>
-              <a:rPr sz="1800" b="1">
+              <a:rPr sz="1500" b="1">
                 <a:solidFill>
                   <a:srgbClr val="0B2545"/>
                 </a:solidFill>
                 <a:latin typeface="Calibri"/>
               </a:rPr>
-              <a:t>Comparison of suppliers</a:t>
+              <a:t>TDR benchmark</a:t>
             </a:r>
           </a:p>
         </p:txBody>
@@ -13803,8 +10368,8 @@
         </p:nvSpPr>
         <p:spPr>
           <a:xfrm>
-            <a:off x="777240" y="5550408"/>
-            <a:ext cx="10698480" cy="530352"/>
+            <a:off x="612648" y="4800600"/>
+            <a:ext cx="3163824" cy="1005840"/>
           </a:xfrm>
           <a:prstGeom prst="rect">
             <a:avLst/>
@@ -13817,20 +10382,332 @@
           <a:p>
             <a:pPr algn="l"/>
             <a:r>
-              <a:rPr sz="1400" b="0">
+              <a:rPr sz="1300" b="0">
                 <a:solidFill>
                   <a:srgbClr val="1C2B3A"/>
                 </a:solidFill>
                 <a:latin typeface="Calibri"/>
               </a:rPr>
-              <a:t>Each supplier delivers a different dossier. A structured technical comparison on the same criteria is currently time-consuming.</a:t>
-            </a:r>
-          </a:p>
-        </p:txBody>
-      </p:sp>
-      <p:sp>
-        <p:nvSpPr>
-          <p:cNvPr id="24" name="Rectangle 23"/>
+              <a:t>Compares several suppliers on the same technical criteria, excluding price.</a:t>
+            </a:r>
+          </a:p>
+        </p:txBody>
+      </p:sp>
+      <p:sp>
+        <p:nvSpPr>
+          <p:cNvPr id="24" name="Rounded Rectangle 23"/>
+          <p:cNvSpPr/>
+          <p:nvPr/>
+        </p:nvSpPr>
+        <p:spPr>
+          <a:xfrm>
+            <a:off x="4160520" y="3794760"/>
+            <a:ext cx="3566160" cy="2194560"/>
+          </a:xfrm>
+          <a:prstGeom prst="roundRect">
+            <a:avLst>
+              <a:gd name="adj" fmla="val 8000"/>
+            </a:avLst>
+          </a:prstGeom>
+          <a:solidFill>
+            <a:srgbClr val="FFFFFF"/>
+          </a:solidFill>
+          <a:ln w="12700">
+            <a:solidFill>
+              <a:srgbClr val="DDE3EC"/>
+            </a:solidFill>
+          </a:ln>
+        </p:spPr>
+        <p:style>
+          <a:lnRef idx="1">
+            <a:schemeClr val="accent1"/>
+          </a:lnRef>
+          <a:fillRef idx="3">
+            <a:schemeClr val="accent1"/>
+          </a:fillRef>
+          <a:effectRef idx="2">
+            <a:schemeClr val="accent1"/>
+          </a:effectRef>
+          <a:fontRef idx="minor">
+            <a:schemeClr val="lt1"/>
+          </a:fontRef>
+        </p:style>
+        <p:txBody>
+          <a:bodyPr rtlCol="0" anchor="ctr"/>
+          <a:lstStyle/>
+          <a:p>
+            <a:pPr algn="ctr"/>
+          </a:p>
+        </p:txBody>
+      </p:sp>
+      <p:sp>
+        <p:nvSpPr>
+          <p:cNvPr id="25" name="Rectangle 24"/>
+          <p:cNvSpPr/>
+          <p:nvPr/>
+        </p:nvSpPr>
+        <p:spPr>
+          <a:xfrm>
+            <a:off x="4160520" y="3794760"/>
+            <a:ext cx="3566160" cy="91440"/>
+          </a:xfrm>
+          <a:prstGeom prst="rect">
+            <a:avLst/>
+          </a:prstGeom>
+          <a:solidFill>
+            <a:srgbClr val="5B6B7C"/>
+          </a:solidFill>
+          <a:ln>
+            <a:noFill/>
+          </a:ln>
+        </p:spPr>
+        <p:style>
+          <a:lnRef idx="1">
+            <a:schemeClr val="accent1"/>
+          </a:lnRef>
+          <a:fillRef idx="3">
+            <a:schemeClr val="accent1"/>
+          </a:fillRef>
+          <a:effectRef idx="2">
+            <a:schemeClr val="accent1"/>
+          </a:effectRef>
+          <a:fontRef idx="minor">
+            <a:schemeClr val="lt1"/>
+          </a:fontRef>
+        </p:style>
+        <p:txBody>
+          <a:bodyPr rtlCol="0" anchor="ctr"/>
+          <a:lstStyle/>
+          <a:p>
+            <a:pPr algn="ctr"/>
+          </a:p>
+        </p:txBody>
+      </p:sp>
+      <p:sp>
+        <p:nvSpPr>
+          <p:cNvPr id="26" name="TextBox 25"/>
+          <p:cNvSpPr txBox="1"/>
+          <p:nvPr/>
+        </p:nvSpPr>
+        <p:spPr>
+          <a:xfrm>
+            <a:off x="4361688" y="4050792"/>
+            <a:ext cx="3163824" cy="640080"/>
+          </a:xfrm>
+          <a:prstGeom prst="rect">
+            <a:avLst/>
+          </a:prstGeom>
+          <a:noFill/>
+        </p:spPr>
+        <p:txBody>
+          <a:bodyPr wrap="square" anchor="t"/>
+          <a:lstStyle/>
+          <a:p>
+            <a:pPr algn="l"/>
+            <a:r>
+              <a:rPr sz="1500" b="1">
+                <a:solidFill>
+                  <a:srgbClr val="0B2545"/>
+                </a:solidFill>
+                <a:latin typeface="Calibri"/>
+              </a:rPr>
+              <a:t>Version follow-up</a:t>
+            </a:r>
+          </a:p>
+        </p:txBody>
+      </p:sp>
+      <p:sp>
+        <p:nvSpPr>
+          <p:cNvPr id="27" name="TextBox 26"/>
+          <p:cNvSpPr txBox="1"/>
+          <p:nvPr/>
+        </p:nvSpPr>
+        <p:spPr>
+          <a:xfrm>
+            <a:off x="4361688" y="4800600"/>
+            <a:ext cx="3163824" cy="1005840"/>
+          </a:xfrm>
+          <a:prstGeom prst="rect">
+            <a:avLst/>
+          </a:prstGeom>
+          <a:noFill/>
+        </p:spPr>
+        <p:txBody>
+          <a:bodyPr wrap="square" anchor="t"/>
+          <a:lstStyle/>
+          <a:p>
+            <a:pPr algn="l"/>
+            <a:r>
+              <a:rPr sz="1300" b="0">
+                <a:solidFill>
+                  <a:srgbClr val="1C2B3A"/>
+                </a:solidFill>
+                <a:latin typeface="Calibri"/>
+              </a:rPr>
+              <a:t>Identifies changes between successive versions of the same matrix.</a:t>
+            </a:r>
+          </a:p>
+        </p:txBody>
+      </p:sp>
+      <p:sp>
+        <p:nvSpPr>
+          <p:cNvPr id="28" name="Rounded Rectangle 27"/>
+          <p:cNvSpPr/>
+          <p:nvPr/>
+        </p:nvSpPr>
+        <p:spPr>
+          <a:xfrm>
+            <a:off x="7909560" y="3794760"/>
+            <a:ext cx="3566160" cy="2194560"/>
+          </a:xfrm>
+          <a:prstGeom prst="roundRect">
+            <a:avLst>
+              <a:gd name="adj" fmla="val 8000"/>
+            </a:avLst>
+          </a:prstGeom>
+          <a:solidFill>
+            <a:srgbClr val="FFFFFF"/>
+          </a:solidFill>
+          <a:ln w="12700">
+            <a:solidFill>
+              <a:srgbClr val="DDE3EC"/>
+            </a:solidFill>
+          </a:ln>
+        </p:spPr>
+        <p:style>
+          <a:lnRef idx="1">
+            <a:schemeClr val="accent1"/>
+          </a:lnRef>
+          <a:fillRef idx="3">
+            <a:schemeClr val="accent1"/>
+          </a:fillRef>
+          <a:effectRef idx="2">
+            <a:schemeClr val="accent1"/>
+          </a:effectRef>
+          <a:fontRef idx="minor">
+            <a:schemeClr val="lt1"/>
+          </a:fontRef>
+        </p:style>
+        <p:txBody>
+          <a:bodyPr rtlCol="0" anchor="ctr"/>
+          <a:lstStyle/>
+          <a:p>
+            <a:pPr algn="ctr"/>
+          </a:p>
+        </p:txBody>
+      </p:sp>
+      <p:sp>
+        <p:nvSpPr>
+          <p:cNvPr id="29" name="Rectangle 28"/>
+          <p:cNvSpPr/>
+          <p:nvPr/>
+        </p:nvSpPr>
+        <p:spPr>
+          <a:xfrm>
+            <a:off x="7909560" y="3794760"/>
+            <a:ext cx="3566160" cy="91440"/>
+          </a:xfrm>
+          <a:prstGeom prst="rect">
+            <a:avLst/>
+          </a:prstGeom>
+          <a:solidFill>
+            <a:srgbClr val="1D4ED8"/>
+          </a:solidFill>
+          <a:ln>
+            <a:noFill/>
+          </a:ln>
+        </p:spPr>
+        <p:style>
+          <a:lnRef idx="1">
+            <a:schemeClr val="accent1"/>
+          </a:lnRef>
+          <a:fillRef idx="3">
+            <a:schemeClr val="accent1"/>
+          </a:fillRef>
+          <a:effectRef idx="2">
+            <a:schemeClr val="accent1"/>
+          </a:effectRef>
+          <a:fontRef idx="minor">
+            <a:schemeClr val="lt1"/>
+          </a:fontRef>
+        </p:style>
+        <p:txBody>
+          <a:bodyPr rtlCol="0" anchor="ctr"/>
+          <a:lstStyle/>
+          <a:p>
+            <a:pPr algn="ctr"/>
+          </a:p>
+        </p:txBody>
+      </p:sp>
+      <p:sp>
+        <p:nvSpPr>
+          <p:cNvPr id="30" name="TextBox 29"/>
+          <p:cNvSpPr txBox="1"/>
+          <p:nvPr/>
+        </p:nvSpPr>
+        <p:spPr>
+          <a:xfrm>
+            <a:off x="8110728" y="4050792"/>
+            <a:ext cx="3163824" cy="640080"/>
+          </a:xfrm>
+          <a:prstGeom prst="rect">
+            <a:avLst/>
+          </a:prstGeom>
+          <a:noFill/>
+        </p:spPr>
+        <p:txBody>
+          <a:bodyPr wrap="square" anchor="t"/>
+          <a:lstStyle/>
+          <a:p>
+            <a:pPr algn="l"/>
+            <a:r>
+              <a:rPr sz="1500" b="1">
+                <a:solidFill>
+                  <a:srgbClr val="0B2545"/>
+                </a:solidFill>
+                <a:latin typeface="Calibri"/>
+              </a:rPr>
+              <a:t>Evidence location</a:t>
+            </a:r>
+          </a:p>
+        </p:txBody>
+      </p:sp>
+      <p:sp>
+        <p:nvSpPr>
+          <p:cNvPr id="31" name="TextBox 30"/>
+          <p:cNvSpPr txBox="1"/>
+          <p:nvPr/>
+        </p:nvSpPr>
+        <p:spPr>
+          <a:xfrm>
+            <a:off x="8110728" y="4800600"/>
+            <a:ext cx="3163824" cy="1005840"/>
+          </a:xfrm>
+          <a:prstGeom prst="rect">
+            <a:avLst/>
+          </a:prstGeom>
+          <a:noFill/>
+        </p:spPr>
+        <p:txBody>
+          <a:bodyPr wrap="square" anchor="t"/>
+          <a:lstStyle/>
+          <a:p>
+            <a:pPr algn="l"/>
+            <a:r>
+              <a:rPr sz="1300" b="0">
+                <a:solidFill>
+                  <a:srgbClr val="1C2B3A"/>
+                </a:solidFill>
+                <a:latin typeface="Calibri"/>
+              </a:rPr>
+              <a:t>Associates each requirement with the corresponding page or slide.</a:t>
+            </a:r>
+          </a:p>
+        </p:txBody>
+      </p:sp>
+      <p:sp>
+        <p:nvSpPr>
+          <p:cNvPr id="32" name="Rectangle 31"/>
           <p:cNvSpPr/>
           <p:nvPr/>
         </p:nvSpPr>
@@ -13873,7 +10750,7 @@
       </p:sp>
       <p:sp>
         <p:nvSpPr>
-          <p:cNvPr id="25" name="TextBox 24"/>
+          <p:cNvPr id="33" name="TextBox 32"/>
           <p:cNvSpPr txBox="1"/>
           <p:nvPr/>
         </p:nvSpPr>
@@ -13906,7 +10783,7 @@
       </p:sp>
       <p:sp>
         <p:nvSpPr>
-          <p:cNvPr id="26" name="TextBox 25"/>
+          <p:cNvPr id="34" name="TextBox 33"/>
           <p:cNvSpPr txBox="1"/>
           <p:nvPr/>
         </p:nvSpPr>
@@ -13932,7 +10809,7 @@
                 </a:solidFill>
                 <a:latin typeface="Calibri"/>
               </a:rPr>
-              <a:t>5  /  14</a:t>
+              <a:t>5  /  11</a:t>
             </a:r>
           </a:p>
         </p:txBody>
@@ -14112,7 +10989,7 @@
                 </a:solidFill>
                 <a:latin typeface="Calibri"/>
               </a:rPr>
-              <a:t>THE APPLICATION</a:t>
+              <a:t>WORK COMPLETED</a:t>
             </a:r>
           </a:p>
         </p:txBody>
@@ -14145,7 +11022,7 @@
                 </a:solidFill>
                 <a:latin typeface="Calibri"/>
               </a:rPr>
-              <a:t>What LEON does</a:t>
+              <a:t>Specification and conformity matrix</a:t>
             </a:r>
           </a:p>
         </p:txBody>
@@ -14178,7 +11055,7 @@
                 </a:solidFill>
                 <a:latin typeface="Calibri"/>
               </a:rPr>
-              <a:t>A browser-based application. Documents are uploaded; the first analysis is displayed; the engineer decides.</a:t>
+              <a:t>Two functions already available before opening the TDR.</a:t>
             </a:r>
           </a:p>
         </p:txBody>
@@ -14191,8 +11068,8 @@
         </p:nvSpPr>
         <p:spPr>
           <a:xfrm>
-            <a:off x="411480" y="1417320"/>
-            <a:ext cx="5532120" cy="4892040"/>
+            <a:off x="411480" y="1389888"/>
+            <a:ext cx="5532120" cy="4919472"/>
           </a:xfrm>
           <a:prstGeom prst="roundRect">
             <a:avLst>
@@ -14238,8 +11115,8 @@
         </p:nvSpPr>
         <p:spPr>
           <a:xfrm>
-            <a:off x="411480" y="1417320"/>
-            <a:ext cx="73152" cy="4892040"/>
+            <a:off x="411480" y="1389888"/>
+            <a:ext cx="5532120" cy="475488"/>
           </a:xfrm>
           <a:prstGeom prst="rect">
             <a:avLst/>
@@ -14281,8 +11158,8 @@
         </p:nvSpPr>
         <p:spPr>
           <a:xfrm>
-            <a:off x="612648" y="1545336"/>
-            <a:ext cx="5221224" cy="347472"/>
+            <a:off x="594360" y="1444752"/>
+            <a:ext cx="5212080" cy="384048"/>
           </a:xfrm>
           <a:prstGeom prst="rect">
             <a:avLst/>
@@ -14290,18 +11167,18 @@
           <a:noFill/>
         </p:spPr>
         <p:txBody>
-          <a:bodyPr wrap="square" anchor="t"/>
+          <a:bodyPr wrap="square" anchor="ctr"/>
           <a:lstStyle/>
           <a:p>
             <a:pPr algn="l"/>
             <a:r>
               <a:rPr sz="1800" b="1">
                 <a:solidFill>
-                  <a:srgbClr val="0B2545"/>
+                  <a:srgbClr val="FFFFFF"/>
                 </a:solidFill>
                 <a:latin typeface="Calibri"/>
               </a:rPr>
-              <a:t>Functions</a:t>
+              <a:t>Specification validation</a:t>
             </a:r>
           </a:p>
         </p:txBody>
@@ -14314,8 +11191,8 @@
         </p:nvSpPr>
         <p:spPr>
           <a:xfrm>
-            <a:off x="612648" y="1874520"/>
-            <a:ext cx="5221224" cy="4306824"/>
+            <a:off x="640080" y="2011680"/>
+            <a:ext cx="5074920" cy="4023360"/>
           </a:xfrm>
           <a:prstGeom prst="rect">
             <a:avLst/>
@@ -14328,18 +11205,19 @@
           <a:p>
             <a:pPr algn="l"/>
             <a:r>
-              <a:rPr sz="1400" b="0">
+              <a:rPr sz="1300" b="0">
                 <a:solidFill>
                   <a:srgbClr val="1C2B3A"/>
                 </a:solidFill>
                 <a:latin typeface="Calibri"/>
               </a:rPr>
-              <a:t>Reads the specification, the conformity matrix and the TDR.
-Identifies each requirement and its status (OK / NOK / NA).
-Locates the corresponding evidence in the TDR (page or slide).
-Highlights inconsistencies: contradictory comments, missing evidence, values that do not meet the requirement.
-Produces an Excel report for the review meeting.
-The technical validation remains a human decision.</a:t>
+              <a:t>The CTS file is uploaded (Word, PDF or text).
+LEON verifies:
+• mandatory sections (Purpose, Scope, Requirements…);
+• remaining placeholders (&lt;&lt;name&gt;&gt;, TBD, XXX);
+• requirement identifiers and binding language (“shall”).
+Output: a verdict (compliant / acceptable / not ready) and a Word report.
+The empty conformity matrix can be generated from the specification.</a:t>
             </a:r>
           </a:p>
         </p:txBody>
@@ -14352,8 +11230,8 @@
         </p:nvSpPr>
         <p:spPr>
           <a:xfrm>
-            <a:off x="6172200" y="1417320"/>
-            <a:ext cx="5532120" cy="2286000"/>
+            <a:off x="6172200" y="1389888"/>
+            <a:ext cx="5532120" cy="4919472"/>
           </a:xfrm>
           <a:prstGeom prst="roundRect">
             <a:avLst>
@@ -14399,14 +11277,14 @@
         </p:nvSpPr>
         <p:spPr>
           <a:xfrm>
-            <a:off x="6172200" y="1417320"/>
-            <a:ext cx="73152" cy="2286000"/>
+            <a:off x="6172200" y="1389888"/>
+            <a:ext cx="5532120" cy="475488"/>
           </a:xfrm>
           <a:prstGeom prst="rect">
             <a:avLst/>
           </a:prstGeom>
           <a:solidFill>
-            <a:srgbClr val="B3261E"/>
+            <a:srgbClr val="9A5B00"/>
           </a:solidFill>
           <a:ln>
             <a:noFill/>
@@ -14442,8 +11320,8 @@
         </p:nvSpPr>
         <p:spPr>
           <a:xfrm>
-            <a:off x="6373368" y="1545336"/>
-            <a:ext cx="5221224" cy="347472"/>
+            <a:off x="6355080" y="1444752"/>
+            <a:ext cx="5212080" cy="384048"/>
           </a:xfrm>
           <a:prstGeom prst="rect">
             <a:avLst/>
@@ -14451,18 +11329,18 @@
           <a:noFill/>
         </p:spPr>
         <p:txBody>
-          <a:bodyPr wrap="square" anchor="t"/>
+          <a:bodyPr wrap="square" anchor="ctr"/>
           <a:lstStyle/>
           <a:p>
             <a:pPr algn="l"/>
             <a:r>
               <a:rPr sz="1800" b="1">
                 <a:solidFill>
-                  <a:srgbClr val="0B2545"/>
+                  <a:srgbClr val="FFFFFF"/>
                 </a:solidFill>
                 <a:latin typeface="Calibri"/>
               </a:rPr>
-              <a:t>Out of scope</a:t>
+              <a:t>Conformity matrix analysis</a:t>
             </a:r>
           </a:p>
         </p:txBody>
@@ -14475,8 +11353,8 @@
         </p:nvSpPr>
         <p:spPr>
           <a:xfrm>
-            <a:off x="6373368" y="1874520"/>
-            <a:ext cx="5221224" cy="1700784"/>
+            <a:off x="6400800" y="2011680"/>
+            <a:ext cx="5074920" cy="4023360"/>
           </a:xfrm>
           <a:prstGeom prst="rect">
             <a:avLst/>
@@ -14489,180 +11367,25 @@
           <a:p>
             <a:pPr algn="l"/>
             <a:r>
-              <a:rPr sz="1400" b="0">
+              <a:rPr sz="1300" b="0">
                 <a:solidFill>
                   <a:srgbClr val="1C2B3A"/>
                 </a:solidFill>
                 <a:latin typeface="Calibri"/>
               </a:rPr>
-              <a:t>Automatic approval of a supplier.
-Replacement of Quality, Purchasing or the responsible engineer.
-A certificate of conformity.</a:t>
-            </a:r>
-          </a:p>
-        </p:txBody>
-      </p:sp>
-      <p:sp>
-        <p:nvSpPr>
-          <p:cNvPr id="16" name="Rounded Rectangle 15"/>
-          <p:cNvSpPr/>
-          <p:nvPr/>
-        </p:nvSpPr>
-        <p:spPr>
-          <a:xfrm>
-            <a:off x="6172200" y="3886200"/>
-            <a:ext cx="5532120" cy="2423160"/>
-          </a:xfrm>
-          <a:prstGeom prst="roundRect">
-            <a:avLst>
-              <a:gd name="adj" fmla="val 8000"/>
-            </a:avLst>
-          </a:prstGeom>
-          <a:solidFill>
-            <a:srgbClr val="FFFFFF"/>
-          </a:solidFill>
-          <a:ln w="12700">
-            <a:solidFill>
-              <a:srgbClr val="DDE3EC"/>
-            </a:solidFill>
-          </a:ln>
-        </p:spPr>
-        <p:style>
-          <a:lnRef idx="1">
-            <a:schemeClr val="accent1"/>
-          </a:lnRef>
-          <a:fillRef idx="3">
-            <a:schemeClr val="accent1"/>
-          </a:fillRef>
-          <a:effectRef idx="2">
-            <a:schemeClr val="accent1"/>
-          </a:effectRef>
-          <a:fontRef idx="minor">
-            <a:schemeClr val="lt1"/>
-          </a:fontRef>
-        </p:style>
-        <p:txBody>
-          <a:bodyPr rtlCol="0" anchor="ctr"/>
-          <a:lstStyle/>
-          <a:p>
-            <a:pPr algn="ctr"/>
-          </a:p>
-        </p:txBody>
-      </p:sp>
-      <p:sp>
-        <p:nvSpPr>
-          <p:cNvPr id="17" name="Rectangle 16"/>
-          <p:cNvSpPr/>
-          <p:nvPr/>
-        </p:nvSpPr>
-        <p:spPr>
-          <a:xfrm>
-            <a:off x="6172200" y="3886200"/>
-            <a:ext cx="73152" cy="2423160"/>
-          </a:xfrm>
-          <a:prstGeom prst="rect">
-            <a:avLst/>
-          </a:prstGeom>
-          <a:solidFill>
-            <a:srgbClr val="157347"/>
-          </a:solidFill>
-          <a:ln>
-            <a:noFill/>
-          </a:ln>
-        </p:spPr>
-        <p:style>
-          <a:lnRef idx="1">
-            <a:schemeClr val="accent1"/>
-          </a:lnRef>
-          <a:fillRef idx="3">
-            <a:schemeClr val="accent1"/>
-          </a:fillRef>
-          <a:effectRef idx="2">
-            <a:schemeClr val="accent1"/>
-          </a:effectRef>
-          <a:fontRef idx="minor">
-            <a:schemeClr val="lt1"/>
-          </a:fontRef>
-        </p:style>
-        <p:txBody>
-          <a:bodyPr rtlCol="0" anchor="ctr"/>
-          <a:lstStyle/>
-          <a:p>
-            <a:pPr algn="ctr"/>
-          </a:p>
-        </p:txBody>
-      </p:sp>
-      <p:sp>
-        <p:nvSpPr>
-          <p:cNvPr id="18" name="TextBox 17"/>
-          <p:cNvSpPr txBox="1"/>
-          <p:nvPr/>
-        </p:nvSpPr>
-        <p:spPr>
-          <a:xfrm>
-            <a:off x="6373368" y="4014216"/>
-            <a:ext cx="5221224" cy="347472"/>
-          </a:xfrm>
-          <a:prstGeom prst="rect">
-            <a:avLst/>
-          </a:prstGeom>
-          <a:noFill/>
-        </p:spPr>
-        <p:txBody>
-          <a:bodyPr wrap="square" anchor="t"/>
-          <a:lstStyle/>
-          <a:p>
-            <a:pPr algn="l"/>
-            <a:r>
-              <a:rPr sz="1800" b="1">
-                <a:solidFill>
-                  <a:srgbClr val="0B2545"/>
-                </a:solidFill>
-                <a:latin typeface="Calibri"/>
-              </a:rPr>
-              <a:t>Users</a:t>
-            </a:r>
-          </a:p>
-        </p:txBody>
-      </p:sp>
-      <p:sp>
-        <p:nvSpPr>
-          <p:cNvPr id="19" name="TextBox 18"/>
-          <p:cNvSpPr txBox="1"/>
-          <p:nvPr/>
-        </p:nvSpPr>
-        <p:spPr>
-          <a:xfrm>
-            <a:off x="6373368" y="4343400"/>
-            <a:ext cx="5221224" cy="1837944"/>
-          </a:xfrm>
-          <a:prstGeom prst="rect">
-            <a:avLst/>
-          </a:prstGeom>
-          <a:noFill/>
-        </p:spPr>
-        <p:txBody>
-          <a:bodyPr wrap="square" anchor="t"/>
-          <a:lstStyle/>
-          <a:p>
-            <a:pPr algn="l"/>
-            <a:r>
-              <a:rPr sz="1400" b="0">
-                <a:solidFill>
-                  <a:srgbClr val="1C2B3A"/>
-                </a:solidFill>
-                <a:latin typeface="Calibri"/>
-              </a:rPr>
-              <a:t>Mechatronics engineers in charge of a component.
-Quality / FNR for the analysis of a conformity matrix.
-Participants preparing a TDR review.</a:t>
-            </a:r>
-          </a:p>
-        </p:txBody>
-      </p:sp>
-      <p:sp>
-        <p:nvSpPr>
-          <p:cNvPr id="20" name="Rectangle 19"/>
+              <a:t>The supplier matrix is uploaded (Excel / ODS).
+LEON counts OK / NOK / NA statuses and lists every requirement.
+Each OK comment is reviewed. A point of attention is raised when:
+• the comment contradicts the status;
+• conformity is partial or still pending.
+Output: a colour-coded Excel report for the review meeting.</a:t>
+            </a:r>
+          </a:p>
+        </p:txBody>
+      </p:sp>
+      <p:sp>
+        <p:nvSpPr>
+          <p:cNvPr id="16" name="Rectangle 15"/>
           <p:cNvSpPr/>
           <p:nvPr/>
         </p:nvSpPr>
@@ -14705,7 +11428,7 @@
       </p:sp>
       <p:sp>
         <p:nvSpPr>
-          <p:cNvPr id="21" name="TextBox 20"/>
+          <p:cNvPr id="17" name="TextBox 16"/>
           <p:cNvSpPr txBox="1"/>
           <p:nvPr/>
         </p:nvSpPr>
@@ -14738,7 +11461,7 @@
       </p:sp>
       <p:sp>
         <p:nvSpPr>
-          <p:cNvPr id="22" name="TextBox 21"/>
+          <p:cNvPr id="18" name="TextBox 17"/>
           <p:cNvSpPr txBox="1"/>
           <p:nvPr/>
         </p:nvSpPr>
@@ -14764,7 +11487,7 @@
                 </a:solidFill>
                 <a:latin typeface="Calibri"/>
               </a:rPr>
-              <a:t>6  /  14</a:t>
+              <a:t>6  /  11</a:t>
             </a:r>
           </a:p>
         </p:txBody>
@@ -14944,7 +11667,7 @@
                 </a:solidFill>
                 <a:latin typeface="Calibri"/>
               </a:rPr>
-              <a:t>THE APPLICATION</a:t>
+              <a:t>WORK COMPLETED</a:t>
             </a:r>
           </a:p>
         </p:txBody>
@@ -14977,7 +11700,7 @@
                 </a:solidFill>
                 <a:latin typeface="Calibri"/>
               </a:rPr>
-              <a:t>Six functions in a single interface</a:t>
+              <a:t>Matrix versus TDR, and supplier comparison</a:t>
             </a:r>
           </a:p>
         </p:txBody>
@@ -15010,7 +11733,7 @@
                 </a:solidFill>
                 <a:latin typeface="Calibri"/>
               </a:rPr>
-              <a:t>No installation is required for the reviewer. Only the relevant function is used.</a:t>
+              <a:t>The TDR is the evidence. LEON compares the declaration with that evidence.</a:t>
             </a:r>
           </a:p>
         </p:txBody>
@@ -15023,8 +11746,122 @@
         </p:nvSpPr>
         <p:spPr>
           <a:xfrm>
-            <a:off x="411480" y="1389888"/>
-            <a:ext cx="3566160" cy="2194560"/>
+            <a:off x="411480" y="1353312"/>
+            <a:ext cx="11338560" cy="1170432"/>
+          </a:xfrm>
+          <a:prstGeom prst="roundRect">
+            <a:avLst>
+              <a:gd name="adj" fmla="val 8000"/>
+            </a:avLst>
+          </a:prstGeom>
+          <a:solidFill>
+            <a:srgbClr val="FBF3E6"/>
+          </a:solidFill>
+          <a:ln w="12700">
+            <a:solidFill>
+              <a:srgbClr val="9A5B00"/>
+            </a:solidFill>
+          </a:ln>
+        </p:spPr>
+        <p:style>
+          <a:lnRef idx="1">
+            <a:schemeClr val="accent1"/>
+          </a:lnRef>
+          <a:fillRef idx="3">
+            <a:schemeClr val="accent1"/>
+          </a:fillRef>
+          <a:effectRef idx="2">
+            <a:schemeClr val="accent1"/>
+          </a:effectRef>
+          <a:fontRef idx="minor">
+            <a:schemeClr val="lt1"/>
+          </a:fontRef>
+        </p:style>
+        <p:txBody>
+          <a:bodyPr rtlCol="0" anchor="ctr"/>
+          <a:lstStyle/>
+          <a:p>
+            <a:pPr algn="ctr"/>
+          </a:p>
+        </p:txBody>
+      </p:sp>
+      <p:sp>
+        <p:nvSpPr>
+          <p:cNvPr id="9" name="TextBox 8"/>
+          <p:cNvSpPr txBox="1"/>
+          <p:nvPr/>
+        </p:nvSpPr>
+        <p:spPr>
+          <a:xfrm>
+            <a:off x="640080" y="1426464"/>
+            <a:ext cx="10972800" cy="256032"/>
+          </a:xfrm>
+          <a:prstGeom prst="rect">
+            <a:avLst/>
+          </a:prstGeom>
+          <a:noFill/>
+        </p:spPr>
+        <p:txBody>
+          <a:bodyPr wrap="square" anchor="t"/>
+          <a:lstStyle/>
+          <a:p>
+            <a:pPr algn="l"/>
+            <a:r>
+              <a:rPr sz="1400" b="1">
+                <a:solidFill>
+                  <a:srgbClr val="9A5B00"/>
+                </a:solidFill>
+                <a:latin typeface="Calibri"/>
+              </a:rPr>
+              <a:t>Example of inconsistency — display contrast</a:t>
+            </a:r>
+          </a:p>
+        </p:txBody>
+      </p:sp>
+      <p:sp>
+        <p:nvSpPr>
+          <p:cNvPr id="10" name="TextBox 9"/>
+          <p:cNvSpPr txBox="1"/>
+          <p:nvPr/>
+        </p:nvSpPr>
+        <p:spPr>
+          <a:xfrm>
+            <a:off x="640080" y="1719072"/>
+            <a:ext cx="10972800" cy="640080"/>
+          </a:xfrm>
+          <a:prstGeom prst="rect">
+            <a:avLst/>
+          </a:prstGeom>
+          <a:noFill/>
+        </p:spPr>
+        <p:txBody>
+          <a:bodyPr wrap="square" anchor="t"/>
+          <a:lstStyle/>
+          <a:p>
+            <a:pPr algn="l"/>
+            <a:r>
+              <a:rPr sz="1400" b="0">
+                <a:solidFill>
+                  <a:srgbClr val="1C2B3A"/>
+                </a:solidFill>
+                <a:latin typeface="Calibri"/>
+              </a:rPr>
+              <a:t>Requirement: contrast ≥ 400:1     ·     Matrix: OK     ·     TDR, slide 14: 380:1
+Inconsistencies are presented first. Consistent requirements are not listed by default.</a:t>
+            </a:r>
+          </a:p>
+        </p:txBody>
+      </p:sp>
+      <p:sp>
+        <p:nvSpPr>
+          <p:cNvPr id="11" name="Rounded Rectangle 10"/>
+          <p:cNvSpPr/>
+          <p:nvPr/>
+        </p:nvSpPr>
+        <p:spPr>
+          <a:xfrm>
+            <a:off x="411480" y="2697480"/>
+            <a:ext cx="5532120" cy="3584448"/>
           </a:xfrm>
           <a:prstGeom prst="roundRect">
             <a:avLst>
@@ -15064,20 +11901,20 @@
       </p:sp>
       <p:sp>
         <p:nvSpPr>
-          <p:cNvPr id="9" name="Rectangle 8"/>
+          <p:cNvPr id="12" name="Rectangle 11"/>
           <p:cNvSpPr/>
           <p:nvPr/>
         </p:nvSpPr>
         <p:spPr>
           <a:xfrm>
-            <a:off x="411480" y="1389888"/>
-            <a:ext cx="3566160" cy="91440"/>
+            <a:off x="411480" y="2697480"/>
+            <a:ext cx="73152" cy="3584448"/>
           </a:xfrm>
           <a:prstGeom prst="rect">
             <a:avLst/>
           </a:prstGeom>
           <a:solidFill>
-            <a:srgbClr val="1D4ED8"/>
+            <a:srgbClr val="123061"/>
           </a:solidFill>
           <a:ln>
             <a:noFill/>
@@ -15107,14 +11944,14 @@
       </p:sp>
       <p:sp>
         <p:nvSpPr>
-          <p:cNvPr id="10" name="TextBox 9"/>
+          <p:cNvPr id="13" name="TextBox 12"/>
           <p:cNvSpPr txBox="1"/>
           <p:nvPr/>
         </p:nvSpPr>
         <p:spPr>
           <a:xfrm>
-            <a:off x="612648" y="1645920"/>
-            <a:ext cx="3163824" cy="640080"/>
+            <a:off x="612648" y="2825496"/>
+            <a:ext cx="5221224" cy="347472"/>
           </a:xfrm>
           <a:prstGeom prst="rect">
             <a:avLst/>
@@ -15127,27 +11964,27 @@
           <a:p>
             <a:pPr algn="l"/>
             <a:r>
-              <a:rPr sz="1500" b="1">
+              <a:rPr sz="1600" b="1">
                 <a:solidFill>
                   <a:srgbClr val="0B2545"/>
                 </a:solidFill>
                 <a:latin typeface="Calibri"/>
               </a:rPr>
-              <a:t>Specification validation</a:t>
-            </a:r>
-          </a:p>
-        </p:txBody>
-      </p:sp>
-      <p:sp>
-        <p:nvSpPr>
-          <p:cNvPr id="11" name="TextBox 10"/>
+              <a:t>Matrix ↔ TDR</a:t>
+            </a:r>
+          </a:p>
+        </p:txBody>
+      </p:sp>
+      <p:sp>
+        <p:nvSpPr>
+          <p:cNvPr id="14" name="TextBox 13"/>
           <p:cNvSpPr txBox="1"/>
           <p:nvPr/>
         </p:nvSpPr>
         <p:spPr>
           <a:xfrm>
-            <a:off x="612648" y="2395728"/>
-            <a:ext cx="3163824" cy="1005840"/>
+            <a:off x="612648" y="3154680"/>
+            <a:ext cx="5221224" cy="2999232"/>
           </a:xfrm>
           <a:prstGeom prst="rect">
             <a:avLst/>
@@ -15166,21 +12003,23 @@
                 </a:solidFill>
                 <a:latin typeface="Calibri"/>
               </a:rPr>
-              <a:t>Checks completeness and writing quality of the CTS before it is issued.</a:t>
-            </a:r>
-          </a:p>
-        </p:txBody>
-      </p:sp>
-      <p:sp>
-        <p:nvSpPr>
-          <p:cNvPr id="12" name="Rounded Rectangle 11"/>
+              <a:t>The matrix and the TDR (PowerPoint, PDF or Word) are uploaded together.
+For each requirement: the Stellantis requirement, the matrix declaration, the TDR statement, and the source page or slide.
+The engineer confirms, corrects or requests additional evidence. No result is accepted automatically.</a:t>
+            </a:r>
+          </a:p>
+        </p:txBody>
+      </p:sp>
+      <p:sp>
+        <p:nvSpPr>
+          <p:cNvPr id="15" name="Rounded Rectangle 14"/>
           <p:cNvSpPr/>
           <p:nvPr/>
         </p:nvSpPr>
         <p:spPr>
           <a:xfrm>
-            <a:off x="4160520" y="1389888"/>
-            <a:ext cx="3566160" cy="2194560"/>
+            <a:off x="6172200" y="2697480"/>
+            <a:ext cx="5532120" cy="3584448"/>
           </a:xfrm>
           <a:prstGeom prst="roundRect">
             <a:avLst>
@@ -15220,326 +12059,14 @@
       </p:sp>
       <p:sp>
         <p:nvSpPr>
-          <p:cNvPr id="13" name="Rectangle 12"/>
+          <p:cNvPr id="16" name="Rectangle 15"/>
           <p:cNvSpPr/>
           <p:nvPr/>
         </p:nvSpPr>
         <p:spPr>
           <a:xfrm>
-            <a:off x="4160520" y="1389888"/>
-            <a:ext cx="3566160" cy="91440"/>
-          </a:xfrm>
-          <a:prstGeom prst="rect">
-            <a:avLst/>
-          </a:prstGeom>
-          <a:solidFill>
-            <a:srgbClr val="9A5B00"/>
-          </a:solidFill>
-          <a:ln>
-            <a:noFill/>
-          </a:ln>
-        </p:spPr>
-        <p:style>
-          <a:lnRef idx="1">
-            <a:schemeClr val="accent1"/>
-          </a:lnRef>
-          <a:fillRef idx="3">
-            <a:schemeClr val="accent1"/>
-          </a:fillRef>
-          <a:effectRef idx="2">
-            <a:schemeClr val="accent1"/>
-          </a:effectRef>
-          <a:fontRef idx="minor">
-            <a:schemeClr val="lt1"/>
-          </a:fontRef>
-        </p:style>
-        <p:txBody>
-          <a:bodyPr rtlCol="0" anchor="ctr"/>
-          <a:lstStyle/>
-          <a:p>
-            <a:pPr algn="ctr"/>
-          </a:p>
-        </p:txBody>
-      </p:sp>
-      <p:sp>
-        <p:nvSpPr>
-          <p:cNvPr id="14" name="TextBox 13"/>
-          <p:cNvSpPr txBox="1"/>
-          <p:nvPr/>
-        </p:nvSpPr>
-        <p:spPr>
-          <a:xfrm>
-            <a:off x="4361688" y="1645920"/>
-            <a:ext cx="3163824" cy="640080"/>
-          </a:xfrm>
-          <a:prstGeom prst="rect">
-            <a:avLst/>
-          </a:prstGeom>
-          <a:noFill/>
-        </p:spPr>
-        <p:txBody>
-          <a:bodyPr wrap="square" anchor="t"/>
-          <a:lstStyle/>
-          <a:p>
-            <a:pPr algn="l"/>
-            <a:r>
-              <a:rPr sz="1500" b="1">
-                <a:solidFill>
-                  <a:srgbClr val="0B2545"/>
-                </a:solidFill>
-                <a:latin typeface="Calibri"/>
-              </a:rPr>
-              <a:t>Conformity matrix</a:t>
-            </a:r>
-          </a:p>
-        </p:txBody>
-      </p:sp>
-      <p:sp>
-        <p:nvSpPr>
-          <p:cNvPr id="15" name="TextBox 14"/>
-          <p:cNvSpPr txBox="1"/>
-          <p:nvPr/>
-        </p:nvSpPr>
-        <p:spPr>
-          <a:xfrm>
-            <a:off x="4361688" y="2395728"/>
-            <a:ext cx="3163824" cy="1005840"/>
-          </a:xfrm>
-          <a:prstGeom prst="rect">
-            <a:avLst/>
-          </a:prstGeom>
-          <a:noFill/>
-        </p:spPr>
-        <p:txBody>
-          <a:bodyPr wrap="square" anchor="t"/>
-          <a:lstStyle/>
-          <a:p>
-            <a:pPr algn="l"/>
-            <a:r>
-              <a:rPr sz="1300" b="0">
-                <a:solidFill>
-                  <a:srgbClr val="1C2B3A"/>
-                </a:solidFill>
-                <a:latin typeface="Calibri"/>
-              </a:rPr>
-              <a:t>Analyses supplier OK / NOK / NA statuses and flags inconsistent OK comments.</a:t>
-            </a:r>
-          </a:p>
-        </p:txBody>
-      </p:sp>
-      <p:sp>
-        <p:nvSpPr>
-          <p:cNvPr id="16" name="Rounded Rectangle 15"/>
-          <p:cNvSpPr/>
-          <p:nvPr/>
-        </p:nvSpPr>
-        <p:spPr>
-          <a:xfrm>
-            <a:off x="7909560" y="1389888"/>
-            <a:ext cx="3566160" cy="2194560"/>
-          </a:xfrm>
-          <a:prstGeom prst="roundRect">
-            <a:avLst>
-              <a:gd name="adj" fmla="val 8000"/>
-            </a:avLst>
-          </a:prstGeom>
-          <a:solidFill>
-            <a:srgbClr val="FFFFFF"/>
-          </a:solidFill>
-          <a:ln w="12700">
-            <a:solidFill>
-              <a:srgbClr val="DDE3EC"/>
-            </a:solidFill>
-          </a:ln>
-        </p:spPr>
-        <p:style>
-          <a:lnRef idx="1">
-            <a:schemeClr val="accent1"/>
-          </a:lnRef>
-          <a:fillRef idx="3">
-            <a:schemeClr val="accent1"/>
-          </a:fillRef>
-          <a:effectRef idx="2">
-            <a:schemeClr val="accent1"/>
-          </a:effectRef>
-          <a:fontRef idx="minor">
-            <a:schemeClr val="lt1"/>
-          </a:fontRef>
-        </p:style>
-        <p:txBody>
-          <a:bodyPr rtlCol="0" anchor="ctr"/>
-          <a:lstStyle/>
-          <a:p>
-            <a:pPr algn="ctr"/>
-          </a:p>
-        </p:txBody>
-      </p:sp>
-      <p:sp>
-        <p:nvSpPr>
-          <p:cNvPr id="17" name="Rectangle 16"/>
-          <p:cNvSpPr/>
-          <p:nvPr/>
-        </p:nvSpPr>
-        <p:spPr>
-          <a:xfrm>
-            <a:off x="7909560" y="1389888"/>
-            <a:ext cx="3566160" cy="91440"/>
-          </a:xfrm>
-          <a:prstGeom prst="rect">
-            <a:avLst/>
-          </a:prstGeom>
-          <a:solidFill>
-            <a:srgbClr val="123061"/>
-          </a:solidFill>
-          <a:ln>
-            <a:noFill/>
-          </a:ln>
-        </p:spPr>
-        <p:style>
-          <a:lnRef idx="1">
-            <a:schemeClr val="accent1"/>
-          </a:lnRef>
-          <a:fillRef idx="3">
-            <a:schemeClr val="accent1"/>
-          </a:fillRef>
-          <a:effectRef idx="2">
-            <a:schemeClr val="accent1"/>
-          </a:effectRef>
-          <a:fontRef idx="minor">
-            <a:schemeClr val="lt1"/>
-          </a:fontRef>
-        </p:style>
-        <p:txBody>
-          <a:bodyPr rtlCol="0" anchor="ctr"/>
-          <a:lstStyle/>
-          <a:p>
-            <a:pPr algn="ctr"/>
-          </a:p>
-        </p:txBody>
-      </p:sp>
-      <p:sp>
-        <p:nvSpPr>
-          <p:cNvPr id="18" name="TextBox 17"/>
-          <p:cNvSpPr txBox="1"/>
-          <p:nvPr/>
-        </p:nvSpPr>
-        <p:spPr>
-          <a:xfrm>
-            <a:off x="8110728" y="1645920"/>
-            <a:ext cx="3163824" cy="640080"/>
-          </a:xfrm>
-          <a:prstGeom prst="rect">
-            <a:avLst/>
-          </a:prstGeom>
-          <a:noFill/>
-        </p:spPr>
-        <p:txBody>
-          <a:bodyPr wrap="square" anchor="t"/>
-          <a:lstStyle/>
-          <a:p>
-            <a:pPr algn="l"/>
-            <a:r>
-              <a:rPr sz="1500" b="1">
-                <a:solidFill>
-                  <a:srgbClr val="0B2545"/>
-                </a:solidFill>
-                <a:latin typeface="Calibri"/>
-              </a:rPr>
-              <a:t>Matrix ↔ TDR</a:t>
-            </a:r>
-          </a:p>
-        </p:txBody>
-      </p:sp>
-      <p:sp>
-        <p:nvSpPr>
-          <p:cNvPr id="19" name="TextBox 18"/>
-          <p:cNvSpPr txBox="1"/>
-          <p:nvPr/>
-        </p:nvSpPr>
-        <p:spPr>
-          <a:xfrm>
-            <a:off x="8110728" y="2395728"/>
-            <a:ext cx="3163824" cy="1005840"/>
-          </a:xfrm>
-          <a:prstGeom prst="rect">
-            <a:avLst/>
-          </a:prstGeom>
-          <a:noFill/>
-        </p:spPr>
-        <p:txBody>
-          <a:bodyPr wrap="square" anchor="t"/>
-          <a:lstStyle/>
-          <a:p>
-            <a:pPr algn="l"/>
-            <a:r>
-              <a:rPr sz="1300" b="0">
-                <a:solidFill>
-                  <a:srgbClr val="1C2B3A"/>
-                </a:solidFill>
-                <a:latin typeface="Calibri"/>
-              </a:rPr>
-              <a:t>Compares the declaration in the matrix with the evidence in the TDR.</a:t>
-            </a:r>
-          </a:p>
-        </p:txBody>
-      </p:sp>
-      <p:sp>
-        <p:nvSpPr>
-          <p:cNvPr id="20" name="Rounded Rectangle 19"/>
-          <p:cNvSpPr/>
-          <p:nvPr/>
-        </p:nvSpPr>
-        <p:spPr>
-          <a:xfrm>
-            <a:off x="411480" y="3794760"/>
-            <a:ext cx="3566160" cy="2194560"/>
-          </a:xfrm>
-          <a:prstGeom prst="roundRect">
-            <a:avLst>
-              <a:gd name="adj" fmla="val 8000"/>
-            </a:avLst>
-          </a:prstGeom>
-          <a:solidFill>
-            <a:srgbClr val="FFFFFF"/>
-          </a:solidFill>
-          <a:ln w="12700">
-            <a:solidFill>
-              <a:srgbClr val="DDE3EC"/>
-            </a:solidFill>
-          </a:ln>
-        </p:spPr>
-        <p:style>
-          <a:lnRef idx="1">
-            <a:schemeClr val="accent1"/>
-          </a:lnRef>
-          <a:fillRef idx="3">
-            <a:schemeClr val="accent1"/>
-          </a:fillRef>
-          <a:effectRef idx="2">
-            <a:schemeClr val="accent1"/>
-          </a:effectRef>
-          <a:fontRef idx="minor">
-            <a:schemeClr val="lt1"/>
-          </a:fontRef>
-        </p:style>
-        <p:txBody>
-          <a:bodyPr rtlCol="0" anchor="ctr"/>
-          <a:lstStyle/>
-          <a:p>
-            <a:pPr algn="ctr"/>
-          </a:p>
-        </p:txBody>
-      </p:sp>
-      <p:sp>
-        <p:nvSpPr>
-          <p:cNvPr id="21" name="Rectangle 20"/>
-          <p:cNvSpPr/>
-          <p:nvPr/>
-        </p:nvSpPr>
-        <p:spPr>
-          <a:xfrm>
-            <a:off x="411480" y="3794760"/>
-            <a:ext cx="3566160" cy="91440"/>
+            <a:off x="6172200" y="2697480"/>
+            <a:ext cx="73152" cy="3584448"/>
           </a:xfrm>
           <a:prstGeom prst="rect">
             <a:avLst/>
@@ -15575,14 +12102,14 @@
       </p:sp>
       <p:sp>
         <p:nvSpPr>
-          <p:cNvPr id="22" name="TextBox 21"/>
+          <p:cNvPr id="17" name="TextBox 16"/>
           <p:cNvSpPr txBox="1"/>
           <p:nvPr/>
         </p:nvSpPr>
         <p:spPr>
           <a:xfrm>
-            <a:off x="612648" y="4050792"/>
-            <a:ext cx="3163824" cy="640080"/>
+            <a:off x="6373368" y="2825496"/>
+            <a:ext cx="5221224" cy="347472"/>
           </a:xfrm>
           <a:prstGeom prst="rect">
             <a:avLst/>
@@ -15595,7 +12122,7 @@
           <a:p>
             <a:pPr algn="l"/>
             <a:r>
-              <a:rPr sz="1500" b="1">
+              <a:rPr sz="1600" b="1">
                 <a:solidFill>
                   <a:srgbClr val="0B2545"/>
                 </a:solidFill>
@@ -15608,14 +12135,14 @@
       </p:sp>
       <p:sp>
         <p:nvSpPr>
-          <p:cNvPr id="23" name="TextBox 22"/>
+          <p:cNvPr id="18" name="TextBox 17"/>
           <p:cNvSpPr txBox="1"/>
           <p:nvPr/>
         </p:nvSpPr>
         <p:spPr>
           <a:xfrm>
-            <a:off x="612648" y="4800600"/>
-            <a:ext cx="3163824" cy="1005840"/>
+            <a:off x="6373368" y="3154680"/>
+            <a:ext cx="5221224" cy="2999232"/>
           </a:xfrm>
           <a:prstGeom prst="rect">
             <a:avLst/>
@@ -15634,326 +12161,16 @@
                 </a:solidFill>
                 <a:latin typeface="Calibri"/>
               </a:rPr>
-              <a:t>Compares several suppliers on the same technical criteria, excluding price.</a:t>
-            </a:r>
-          </a:p>
-        </p:txBody>
-      </p:sp>
-      <p:sp>
-        <p:nvSpPr>
-          <p:cNvPr id="24" name="Rounded Rectangle 23"/>
-          <p:cNvSpPr/>
-          <p:nvPr/>
-        </p:nvSpPr>
-        <p:spPr>
-          <a:xfrm>
-            <a:off x="4160520" y="3794760"/>
-            <a:ext cx="3566160" cy="2194560"/>
-          </a:xfrm>
-          <a:prstGeom prst="roundRect">
-            <a:avLst>
-              <a:gd name="adj" fmla="val 8000"/>
-            </a:avLst>
-          </a:prstGeom>
-          <a:solidFill>
-            <a:srgbClr val="FFFFFF"/>
-          </a:solidFill>
-          <a:ln w="12700">
-            <a:solidFill>
-              <a:srgbClr val="DDE3EC"/>
-            </a:solidFill>
-          </a:ln>
-        </p:spPr>
-        <p:style>
-          <a:lnRef idx="1">
-            <a:schemeClr val="accent1"/>
-          </a:lnRef>
-          <a:fillRef idx="3">
-            <a:schemeClr val="accent1"/>
-          </a:fillRef>
-          <a:effectRef idx="2">
-            <a:schemeClr val="accent1"/>
-          </a:effectRef>
-          <a:fontRef idx="minor">
-            <a:schemeClr val="lt1"/>
-          </a:fontRef>
-        </p:style>
-        <p:txBody>
-          <a:bodyPr rtlCol="0" anchor="ctr"/>
-          <a:lstStyle/>
-          <a:p>
-            <a:pPr algn="ctr"/>
-          </a:p>
-        </p:txBody>
-      </p:sp>
-      <p:sp>
-        <p:nvSpPr>
-          <p:cNvPr id="25" name="Rectangle 24"/>
-          <p:cNvSpPr/>
-          <p:nvPr/>
-        </p:nvSpPr>
-        <p:spPr>
-          <a:xfrm>
-            <a:off x="4160520" y="3794760"/>
-            <a:ext cx="3566160" cy="91440"/>
-          </a:xfrm>
-          <a:prstGeom prst="rect">
-            <a:avLst/>
-          </a:prstGeom>
-          <a:solidFill>
-            <a:srgbClr val="5B6B7C"/>
-          </a:solidFill>
-          <a:ln>
-            <a:noFill/>
-          </a:ln>
-        </p:spPr>
-        <p:style>
-          <a:lnRef idx="1">
-            <a:schemeClr val="accent1"/>
-          </a:lnRef>
-          <a:fillRef idx="3">
-            <a:schemeClr val="accent1"/>
-          </a:fillRef>
-          <a:effectRef idx="2">
-            <a:schemeClr val="accent1"/>
-          </a:effectRef>
-          <a:fontRef idx="minor">
-            <a:schemeClr val="lt1"/>
-          </a:fontRef>
-        </p:style>
-        <p:txBody>
-          <a:bodyPr rtlCol="0" anchor="ctr"/>
-          <a:lstStyle/>
-          <a:p>
-            <a:pPr algn="ctr"/>
-          </a:p>
-        </p:txBody>
-      </p:sp>
-      <p:sp>
-        <p:nvSpPr>
-          <p:cNvPr id="26" name="TextBox 25"/>
-          <p:cNvSpPr txBox="1"/>
-          <p:nvPr/>
-        </p:nvSpPr>
-        <p:spPr>
-          <a:xfrm>
-            <a:off x="4361688" y="4050792"/>
-            <a:ext cx="3163824" cy="640080"/>
-          </a:xfrm>
-          <a:prstGeom prst="rect">
-            <a:avLst/>
-          </a:prstGeom>
-          <a:noFill/>
-        </p:spPr>
-        <p:txBody>
-          <a:bodyPr wrap="square" anchor="t"/>
-          <a:lstStyle/>
-          <a:p>
-            <a:pPr algn="l"/>
-            <a:r>
-              <a:rPr sz="1500" b="1">
-                <a:solidFill>
-                  <a:srgbClr val="0B2545"/>
-                </a:solidFill>
-                <a:latin typeface="Calibri"/>
-              </a:rPr>
-              <a:t>Version follow-up</a:t>
-            </a:r>
-          </a:p>
-        </p:txBody>
-      </p:sp>
-      <p:sp>
-        <p:nvSpPr>
-          <p:cNvPr id="27" name="TextBox 26"/>
-          <p:cNvSpPr txBox="1"/>
-          <p:nvPr/>
-        </p:nvSpPr>
-        <p:spPr>
-          <a:xfrm>
-            <a:off x="4361688" y="4800600"/>
-            <a:ext cx="3163824" cy="1005840"/>
-          </a:xfrm>
-          <a:prstGeom prst="rect">
-            <a:avLst/>
-          </a:prstGeom>
-          <a:noFill/>
-        </p:spPr>
-        <p:txBody>
-          <a:bodyPr wrap="square" anchor="t"/>
-          <a:lstStyle/>
-          <a:p>
-            <a:pPr algn="l"/>
-            <a:r>
-              <a:rPr sz="1300" b="0">
-                <a:solidFill>
-                  <a:srgbClr val="1C2B3A"/>
-                </a:solidFill>
-                <a:latin typeface="Calibri"/>
-              </a:rPr>
-              <a:t>Identifies status and comment changes between successive matrix versions.</a:t>
-            </a:r>
-          </a:p>
-        </p:txBody>
-      </p:sp>
-      <p:sp>
-        <p:nvSpPr>
-          <p:cNvPr id="28" name="Rounded Rectangle 27"/>
-          <p:cNvSpPr/>
-          <p:nvPr/>
-        </p:nvSpPr>
-        <p:spPr>
-          <a:xfrm>
-            <a:off x="7909560" y="3794760"/>
-            <a:ext cx="3566160" cy="2194560"/>
-          </a:xfrm>
-          <a:prstGeom prst="roundRect">
-            <a:avLst>
-              <a:gd name="adj" fmla="val 8000"/>
-            </a:avLst>
-          </a:prstGeom>
-          <a:solidFill>
-            <a:srgbClr val="FFFFFF"/>
-          </a:solidFill>
-          <a:ln w="12700">
-            <a:solidFill>
-              <a:srgbClr val="DDE3EC"/>
-            </a:solidFill>
-          </a:ln>
-        </p:spPr>
-        <p:style>
-          <a:lnRef idx="1">
-            <a:schemeClr val="accent1"/>
-          </a:lnRef>
-          <a:fillRef idx="3">
-            <a:schemeClr val="accent1"/>
-          </a:fillRef>
-          <a:effectRef idx="2">
-            <a:schemeClr val="accent1"/>
-          </a:effectRef>
-          <a:fontRef idx="minor">
-            <a:schemeClr val="lt1"/>
-          </a:fontRef>
-        </p:style>
-        <p:txBody>
-          <a:bodyPr rtlCol="0" anchor="ctr"/>
-          <a:lstStyle/>
-          <a:p>
-            <a:pPr algn="ctr"/>
-          </a:p>
-        </p:txBody>
-      </p:sp>
-      <p:sp>
-        <p:nvSpPr>
-          <p:cNvPr id="29" name="Rectangle 28"/>
-          <p:cNvSpPr/>
-          <p:nvPr/>
-        </p:nvSpPr>
-        <p:spPr>
-          <a:xfrm>
-            <a:off x="7909560" y="3794760"/>
-            <a:ext cx="3566160" cy="91440"/>
-          </a:xfrm>
-          <a:prstGeom prst="rect">
-            <a:avLst/>
-          </a:prstGeom>
-          <a:solidFill>
-            <a:srgbClr val="1D4ED8"/>
-          </a:solidFill>
-          <a:ln>
-            <a:noFill/>
-          </a:ln>
-        </p:spPr>
-        <p:style>
-          <a:lnRef idx="1">
-            <a:schemeClr val="accent1"/>
-          </a:lnRef>
-          <a:fillRef idx="3">
-            <a:schemeClr val="accent1"/>
-          </a:fillRef>
-          <a:effectRef idx="2">
-            <a:schemeClr val="accent1"/>
-          </a:effectRef>
-          <a:fontRef idx="minor">
-            <a:schemeClr val="lt1"/>
-          </a:fontRef>
-        </p:style>
-        <p:txBody>
-          <a:bodyPr rtlCol="0" anchor="ctr"/>
-          <a:lstStyle/>
-          <a:p>
-            <a:pPr algn="ctr"/>
-          </a:p>
-        </p:txBody>
-      </p:sp>
-      <p:sp>
-        <p:nvSpPr>
-          <p:cNvPr id="30" name="TextBox 29"/>
-          <p:cNvSpPr txBox="1"/>
-          <p:nvPr/>
-        </p:nvSpPr>
-        <p:spPr>
-          <a:xfrm>
-            <a:off x="8110728" y="4050792"/>
-            <a:ext cx="3163824" cy="640080"/>
-          </a:xfrm>
-          <a:prstGeom prst="rect">
-            <a:avLst/>
-          </a:prstGeom>
-          <a:noFill/>
-        </p:spPr>
-        <p:txBody>
-          <a:bodyPr wrap="square" anchor="t"/>
-          <a:lstStyle/>
-          <a:p>
-            <a:pPr algn="l"/>
-            <a:r>
-              <a:rPr sz="1500" b="1">
-                <a:solidFill>
-                  <a:srgbClr val="0B2545"/>
-                </a:solidFill>
-                <a:latin typeface="Calibri"/>
-              </a:rPr>
-              <a:t>Evidence location</a:t>
-            </a:r>
-          </a:p>
-        </p:txBody>
-      </p:sp>
-      <p:sp>
-        <p:nvSpPr>
-          <p:cNvPr id="31" name="TextBox 30"/>
-          <p:cNvSpPr txBox="1"/>
-          <p:nvPr/>
-        </p:nvSpPr>
-        <p:spPr>
-          <a:xfrm>
-            <a:off x="8110728" y="4800600"/>
-            <a:ext cx="3163824" cy="1005840"/>
-          </a:xfrm>
-          <a:prstGeom prst="rect">
-            <a:avLst/>
-          </a:prstGeom>
-          <a:noFill/>
-        </p:spPr>
-        <p:txBody>
-          <a:bodyPr wrap="square" anchor="t"/>
-          <a:lstStyle/>
-          <a:p>
-            <a:pPr algn="l"/>
-            <a:r>
-              <a:rPr sz="1300" b="0">
-                <a:solidFill>
-                  <a:srgbClr val="1C2B3A"/>
-                </a:solidFill>
-                <a:latin typeface="Calibri"/>
-              </a:rPr>
-              <a:t>Associates each requirement with the corresponding page or slide in the dossier.</a:t>
-            </a:r>
-          </a:p>
-        </p:txBody>
-      </p:sp>
-      <p:sp>
-        <p:nvSpPr>
-          <p:cNvPr id="32" name="Rectangle 31"/>
+              <a:t>Several supplier dossiers are compared on the same technical domains (mechanics, display, electronics, safety, software, validation, industrialisation).
+Commercial content is excluded.
+Supplier selection remains a human decision.</a:t>
+            </a:r>
+          </a:p>
+        </p:txBody>
+      </p:sp>
+      <p:sp>
+        <p:nvSpPr>
+          <p:cNvPr id="19" name="Rectangle 18"/>
           <p:cNvSpPr/>
           <p:nvPr/>
         </p:nvSpPr>
@@ -15996,7 +12213,7 @@
       </p:sp>
       <p:sp>
         <p:nvSpPr>
-          <p:cNvPr id="33" name="TextBox 32"/>
+          <p:cNvPr id="20" name="TextBox 19"/>
           <p:cNvSpPr txBox="1"/>
           <p:nvPr/>
         </p:nvSpPr>
@@ -16029,7 +12246,7 @@
       </p:sp>
       <p:sp>
         <p:nvSpPr>
-          <p:cNvPr id="34" name="TextBox 33"/>
+          <p:cNvPr id="21" name="TextBox 20"/>
           <p:cNvSpPr txBox="1"/>
           <p:nvPr/>
         </p:nvSpPr>
@@ -16055,7 +12272,7 @@
                 </a:solidFill>
                 <a:latin typeface="Calibri"/>
               </a:rPr>
-              <a:t>7  /  14</a:t>
+              <a:t>7  /  11</a:t>
             </a:r>
           </a:p>
         </p:txBody>
@@ -16235,7 +12452,7 @@
                 </a:solidFill>
                 <a:latin typeface="Calibri"/>
               </a:rPr>
-              <a:t>PROJECT FUNCTIONS</a:t>
+              <a:t>COLLABORATION</a:t>
             </a:r>
           </a:p>
         </p:txBody>
@@ -16268,7 +12485,7 @@
                 </a:solidFill>
                 <a:latin typeface="Calibri"/>
               </a:rPr>
-              <a:t>Specification and conformity matrix</a:t>
+              <a:t>Working arrangement</a:t>
             </a:r>
           </a:p>
         </p:txBody>
@@ -16301,7 +12518,7 @@
                 </a:solidFill>
                 <a:latin typeface="Calibri"/>
               </a:rPr>
-              <a:t>Two analyses available before opening the TDR.</a:t>
+              <a:t>Imane El Brouji and Patrick Garcia provide the mechatronics expertise. I implement LEON.</a:t>
             </a:r>
           </a:p>
         </p:txBody>
@@ -16315,7 +12532,7 @@
         <p:spPr>
           <a:xfrm>
             <a:off x="411480" y="1389888"/>
-            <a:ext cx="5532120" cy="4919472"/>
+            <a:ext cx="5532120" cy="3108960"/>
           </a:xfrm>
           <a:prstGeom prst="roundRect">
             <a:avLst>
@@ -16362,7 +12579,7 @@
         <p:spPr>
           <a:xfrm>
             <a:off x="411480" y="1389888"/>
-            <a:ext cx="5532120" cy="475488"/>
+            <a:ext cx="5532120" cy="109728"/>
           </a:xfrm>
           <a:prstGeom prst="rect">
             <a:avLst/>
@@ -16404,8 +12621,8 @@
         </p:nvSpPr>
         <p:spPr>
           <a:xfrm>
-            <a:off x="594360" y="1444752"/>
-            <a:ext cx="5212080" cy="384048"/>
+            <a:off x="640080" y="1645920"/>
+            <a:ext cx="5074920" cy="365760"/>
           </a:xfrm>
           <a:prstGeom prst="rect">
             <a:avLst/>
@@ -16413,18 +12630,18 @@
           <a:noFill/>
         </p:spPr>
         <p:txBody>
-          <a:bodyPr wrap="square" anchor="ctr"/>
+          <a:bodyPr wrap="square" anchor="t"/>
           <a:lstStyle/>
           <a:p>
             <a:pPr algn="l"/>
             <a:r>
-              <a:rPr sz="1800" b="1">
-                <a:solidFill>
-                  <a:srgbClr val="FFFFFF"/>
+              <a:rPr sz="2200" b="1">
+                <a:solidFill>
+                  <a:srgbClr val="0B2545"/>
                 </a:solidFill>
                 <a:latin typeface="Calibri"/>
               </a:rPr>
-              <a:t>Specification validation</a:t>
+              <a:t>Imane El Brouji</a:t>
             </a:r>
           </a:p>
         </p:txBody>
@@ -16437,8 +12654,8 @@
         </p:nvSpPr>
         <p:spPr>
           <a:xfrm>
-            <a:off x="640080" y="2011680"/>
-            <a:ext cx="5074920" cy="4023360"/>
+            <a:off x="640080" y="2084831"/>
+            <a:ext cx="5074920" cy="292608"/>
           </a:xfrm>
           <a:prstGeom prst="rect">
             <a:avLst/>
@@ -16451,33 +12668,60 @@
           <a:p>
             <a:pPr algn="l"/>
             <a:r>
-              <a:rPr sz="1300" b="0">
-                <a:solidFill>
-                  <a:srgbClr val="1C2B3A"/>
+              <a:rPr sz="1400" b="1">
+                <a:solidFill>
+                  <a:srgbClr val="1D4ED8"/>
                 </a:solidFill>
                 <a:latin typeface="Calibri"/>
               </a:rPr>
-              <a:t>The CTS file is uploaded (Word, PDF or text).
-LEON verifies:
-• presence of mandatory sections (Purpose, Scope, Requirements…);
-• remaining template placeholders (&lt;&lt;name&gt;&gt;, TBD, XXX);
-• requirement identifiers and binding language (“shall”).
-Output: a verdict (compliant / acceptable / not ready) and a Word report.
-The empty conformity matrix can be generated from the specification, so that the supplier does not recreate the requirement list.</a:t>
-            </a:r>
-          </a:p>
-        </p:txBody>
-      </p:sp>
-      <p:sp>
-        <p:nvSpPr>
-          <p:cNvPr id="12" name="Rounded Rectangle 11"/>
+              <a:t>Mechatronics Engineering</a:t>
+            </a:r>
+          </a:p>
+        </p:txBody>
+      </p:sp>
+      <p:sp>
+        <p:nvSpPr>
+          <p:cNvPr id="12" name="TextBox 11"/>
+          <p:cNvSpPr txBox="1"/>
+          <p:nvPr/>
+        </p:nvSpPr>
+        <p:spPr>
+          <a:xfrm>
+            <a:off x="640080" y="2514600"/>
+            <a:ext cx="5074920" cy="1691640"/>
+          </a:xfrm>
+          <a:prstGeom prst="rect">
+            <a:avLst/>
+          </a:prstGeom>
+          <a:noFill/>
+        </p:spPr>
+        <p:txBody>
+          <a:bodyPr wrap="square" anchor="t"/>
+          <a:lstStyle/>
+          <a:p>
+            <a:pPr algn="l"/>
+            <a:r>
+              <a:rPr sz="1500" b="0">
+                <a:solidFill>
+                  <a:srgbClr val="1C2B3A"/>
+                </a:solidFill>
+                <a:latin typeface="Calibri"/>
+              </a:rPr>
+              <a:t>Defines the operational needs of the team, the documents received, and the analyses that are useful during a review.</a:t>
+            </a:r>
+          </a:p>
+        </p:txBody>
+      </p:sp>
+      <p:sp>
+        <p:nvSpPr>
+          <p:cNvPr id="13" name="Rounded Rectangle 12"/>
           <p:cNvSpPr/>
           <p:nvPr/>
         </p:nvSpPr>
         <p:spPr>
           <a:xfrm>
             <a:off x="6172200" y="1389888"/>
-            <a:ext cx="5532120" cy="4919472"/>
+            <a:ext cx="5532120" cy="3108960"/>
           </a:xfrm>
           <a:prstGeom prst="roundRect">
             <a:avLst>
@@ -16517,20 +12761,20 @@
       </p:sp>
       <p:sp>
         <p:nvSpPr>
-          <p:cNvPr id="13" name="Rectangle 12"/>
+          <p:cNvPr id="14" name="Rectangle 13"/>
           <p:cNvSpPr/>
           <p:nvPr/>
         </p:nvSpPr>
         <p:spPr>
           <a:xfrm>
             <a:off x="6172200" y="1389888"/>
-            <a:ext cx="5532120" cy="475488"/>
+            <a:ext cx="5532120" cy="109728"/>
           </a:xfrm>
           <a:prstGeom prst="rect">
             <a:avLst/>
           </a:prstGeom>
           <a:solidFill>
-            <a:srgbClr val="9A5B00"/>
+            <a:srgbClr val="157347"/>
           </a:solidFill>
           <a:ln>
             <a:noFill/>
@@ -16560,14 +12804,14 @@
       </p:sp>
       <p:sp>
         <p:nvSpPr>
-          <p:cNvPr id="14" name="TextBox 13"/>
+          <p:cNvPr id="15" name="TextBox 14"/>
           <p:cNvSpPr txBox="1"/>
           <p:nvPr/>
         </p:nvSpPr>
         <p:spPr>
           <a:xfrm>
-            <a:off x="6355080" y="1444752"/>
-            <a:ext cx="5212080" cy="384048"/>
+            <a:off x="6400800" y="1645920"/>
+            <a:ext cx="5074920" cy="365760"/>
           </a:xfrm>
           <a:prstGeom prst="rect">
             <a:avLst/>
@@ -16575,32 +12819,32 @@
           <a:noFill/>
         </p:spPr>
         <p:txBody>
-          <a:bodyPr wrap="square" anchor="ctr"/>
+          <a:bodyPr wrap="square" anchor="t"/>
           <a:lstStyle/>
           <a:p>
             <a:pPr algn="l"/>
             <a:r>
-              <a:rPr sz="1800" b="1">
-                <a:solidFill>
-                  <a:srgbClr val="FFFFFF"/>
+              <a:rPr sz="2200" b="1">
+                <a:solidFill>
+                  <a:srgbClr val="0B2545"/>
                 </a:solidFill>
                 <a:latin typeface="Calibri"/>
               </a:rPr>
-              <a:t>Conformity matrix analysis</a:t>
-            </a:r>
-          </a:p>
-        </p:txBody>
-      </p:sp>
-      <p:sp>
-        <p:nvSpPr>
-          <p:cNvPr id="15" name="TextBox 14"/>
+              <a:t>Patrick Garcia</a:t>
+            </a:r>
+          </a:p>
+        </p:txBody>
+      </p:sp>
+      <p:sp>
+        <p:nvSpPr>
+          <p:cNvPr id="16" name="TextBox 15"/>
           <p:cNvSpPr txBox="1"/>
           <p:nvPr/>
         </p:nvSpPr>
         <p:spPr>
           <a:xfrm>
-            <a:off x="6400800" y="2011680"/>
-            <a:ext cx="5074920" cy="4023360"/>
+            <a:off x="6400800" y="2084831"/>
+            <a:ext cx="5074920" cy="292608"/>
           </a:xfrm>
           <a:prstGeom prst="rect">
             <a:avLst/>
@@ -16613,25 +12857,209 @@
           <a:p>
             <a:pPr algn="l"/>
             <a:r>
-              <a:rPr sz="1300" b="0">
-                <a:solidFill>
-                  <a:srgbClr val="1C2B3A"/>
+              <a:rPr sz="1400" b="1">
+                <a:solidFill>
+                  <a:srgbClr val="157347"/>
                 </a:solidFill>
                 <a:latin typeface="Calibri"/>
               </a:rPr>
-              <a:t>The supplier matrix is uploaded (Excel / ODS), including files with renamed columns.
-LEON counts OK / NOK / NA statuses and presents the full requirement list.
-Each OK comment is reviewed. A point of attention is raised when:
-• the comment contradicts the status;
-• conformity is partial or still pending.
-Output: a colour-coded Excel report (green / red / grey) for the meeting.</a:t>
-            </a:r>
-          </a:p>
-        </p:txBody>
-      </p:sp>
-      <p:sp>
-        <p:nvSpPr>
-          <p:cNvPr id="16" name="Rectangle 15"/>
+              <a:t>Mechatronics Engineering</a:t>
+            </a:r>
+          </a:p>
+        </p:txBody>
+      </p:sp>
+      <p:sp>
+        <p:nvSpPr>
+          <p:cNvPr id="17" name="TextBox 16"/>
+          <p:cNvSpPr txBox="1"/>
+          <p:nvPr/>
+        </p:nvSpPr>
+        <p:spPr>
+          <a:xfrm>
+            <a:off x="6400800" y="2514600"/>
+            <a:ext cx="5074920" cy="1691640"/>
+          </a:xfrm>
+          <a:prstGeom prst="rect">
+            <a:avLst/>
+          </a:prstGeom>
+          <a:noFill/>
+        </p:spPr>
+        <p:txBody>
+          <a:bodyPr wrap="square" anchor="t"/>
+          <a:lstStyle/>
+          <a:p>
+            <a:pPr algn="l"/>
+            <a:r>
+              <a:rPr sz="1500" b="0">
+                <a:solidFill>
+                  <a:srgbClr val="1C2B3A"/>
+                </a:solidFill>
+                <a:latin typeface="Calibri"/>
+              </a:rPr>
+              <a:t>Explains the mechatronics context: how the specification, the matrix and the TDR are used, and what a technical review must cover.</a:t>
+            </a:r>
+          </a:p>
+        </p:txBody>
+      </p:sp>
+      <p:sp>
+        <p:nvSpPr>
+          <p:cNvPr id="18" name="Rounded Rectangle 17"/>
+          <p:cNvSpPr/>
+          <p:nvPr/>
+        </p:nvSpPr>
+        <p:spPr>
+          <a:xfrm>
+            <a:off x="411480" y="4681728"/>
+            <a:ext cx="11292840" cy="1664208"/>
+          </a:xfrm>
+          <a:prstGeom prst="roundRect">
+            <a:avLst>
+              <a:gd name="adj" fmla="val 8000"/>
+            </a:avLst>
+          </a:prstGeom>
+          <a:solidFill>
+            <a:srgbClr val="FFFFFF"/>
+          </a:solidFill>
+          <a:ln w="12700">
+            <a:solidFill>
+              <a:srgbClr val="DDE3EC"/>
+            </a:solidFill>
+          </a:ln>
+        </p:spPr>
+        <p:style>
+          <a:lnRef idx="1">
+            <a:schemeClr val="accent1"/>
+          </a:lnRef>
+          <a:fillRef idx="3">
+            <a:schemeClr val="accent1"/>
+          </a:fillRef>
+          <a:effectRef idx="2">
+            <a:schemeClr val="accent1"/>
+          </a:effectRef>
+          <a:fontRef idx="minor">
+            <a:schemeClr val="lt1"/>
+          </a:fontRef>
+        </p:style>
+        <p:txBody>
+          <a:bodyPr rtlCol="0" anchor="ctr"/>
+          <a:lstStyle/>
+          <a:p>
+            <a:pPr algn="ctr"/>
+          </a:p>
+        </p:txBody>
+      </p:sp>
+      <p:sp>
+        <p:nvSpPr>
+          <p:cNvPr id="19" name="Rectangle 18"/>
+          <p:cNvSpPr/>
+          <p:nvPr/>
+        </p:nvSpPr>
+        <p:spPr>
+          <a:xfrm>
+            <a:off x="411480" y="4681728"/>
+            <a:ext cx="109728" cy="1664208"/>
+          </a:xfrm>
+          <a:prstGeom prst="rect">
+            <a:avLst/>
+          </a:prstGeom>
+          <a:solidFill>
+            <a:srgbClr val="123061"/>
+          </a:solidFill>
+          <a:ln>
+            <a:noFill/>
+          </a:ln>
+        </p:spPr>
+        <p:style>
+          <a:lnRef idx="1">
+            <a:schemeClr val="accent1"/>
+          </a:lnRef>
+          <a:fillRef idx="3">
+            <a:schemeClr val="accent1"/>
+          </a:fillRef>
+          <a:effectRef idx="2">
+            <a:schemeClr val="accent1"/>
+          </a:effectRef>
+          <a:fontRef idx="minor">
+            <a:schemeClr val="lt1"/>
+          </a:fontRef>
+        </p:style>
+        <p:txBody>
+          <a:bodyPr rtlCol="0" anchor="ctr"/>
+          <a:lstStyle/>
+          <a:p>
+            <a:pPr algn="ctr"/>
+          </a:p>
+        </p:txBody>
+      </p:sp>
+      <p:sp>
+        <p:nvSpPr>
+          <p:cNvPr id="20" name="TextBox 19"/>
+          <p:cNvSpPr txBox="1"/>
+          <p:nvPr/>
+        </p:nvSpPr>
+        <p:spPr>
+          <a:xfrm>
+            <a:off x="731520" y="4828032"/>
+            <a:ext cx="10698480" cy="329184"/>
+          </a:xfrm>
+          <a:prstGeom prst="rect">
+            <a:avLst/>
+          </a:prstGeom>
+          <a:noFill/>
+        </p:spPr>
+        <p:txBody>
+          <a:bodyPr wrap="square" anchor="t"/>
+          <a:lstStyle/>
+          <a:p>
+            <a:pPr algn="l"/>
+            <a:r>
+              <a:rPr sz="1600" b="1">
+                <a:solidFill>
+                  <a:srgbClr val="0B2545"/>
+                </a:solidFill>
+                <a:latin typeface="Calibri"/>
+              </a:rPr>
+              <a:t>Division of roles</a:t>
+            </a:r>
+          </a:p>
+        </p:txBody>
+      </p:sp>
+      <p:sp>
+        <p:nvSpPr>
+          <p:cNvPr id="21" name="TextBox 20"/>
+          <p:cNvSpPr txBox="1"/>
+          <p:nvPr/>
+        </p:nvSpPr>
+        <p:spPr>
+          <a:xfrm>
+            <a:off x="731520" y="5212080"/>
+            <a:ext cx="10698480" cy="914400"/>
+          </a:xfrm>
+          <a:prstGeom prst="rect">
+            <a:avLst/>
+          </a:prstGeom>
+          <a:noFill/>
+        </p:spPr>
+        <p:txBody>
+          <a:bodyPr wrap="square" anchor="t"/>
+          <a:lstStyle/>
+          <a:p>
+            <a:pPr algn="l"/>
+            <a:r>
+              <a:rPr sz="1500" b="0">
+                <a:solidFill>
+                  <a:srgbClr val="1C2B3A"/>
+                </a:solidFill>
+                <a:latin typeface="Calibri"/>
+              </a:rPr>
+              <a:t>They provide the ideas and the technical meaning on the mechatronics side. I develop and iterate on LEON. The application is designed from engineering practice, not as a standalone IT development.</a:t>
+            </a:r>
+          </a:p>
+        </p:txBody>
+      </p:sp>
+      <p:sp>
+        <p:nvSpPr>
+          <p:cNvPr id="22" name="Rectangle 21"/>
           <p:cNvSpPr/>
           <p:nvPr/>
         </p:nvSpPr>
@@ -16674,7 +13102,7 @@
       </p:sp>
       <p:sp>
         <p:nvSpPr>
-          <p:cNvPr id="17" name="TextBox 16"/>
+          <p:cNvPr id="23" name="TextBox 22"/>
           <p:cNvSpPr txBox="1"/>
           <p:nvPr/>
         </p:nvSpPr>
@@ -16707,7 +13135,7 @@
       </p:sp>
       <p:sp>
         <p:nvSpPr>
-          <p:cNvPr id="18" name="TextBox 17"/>
+          <p:cNvPr id="24" name="TextBox 23"/>
           <p:cNvSpPr txBox="1"/>
           <p:nvPr/>
         </p:nvSpPr>
@@ -16733,7 +13161,7 @@
                 </a:solidFill>
                 <a:latin typeface="Calibri"/>
               </a:rPr>
-              <a:t>8  /  14</a:t>
+              <a:t>8  /  11</a:t>
             </a:r>
           </a:p>
         </p:txBody>
@@ -16913,7 +13341,7 @@
                 </a:solidFill>
                 <a:latin typeface="Calibri"/>
               </a:rPr>
-              <a:t>PROJECT FUNCTIONS</a:t>
+              <a:t>STATUS</a:t>
             </a:r>
           </a:p>
         </p:txBody>
@@ -16946,7 +13374,7 @@
                 </a:solidFill>
                 <a:latin typeface="Calibri"/>
               </a:rPr>
-              <a:t>Matrix versus TDR, and supplier comparison</a:t>
+              <a:t>Development in progress — then team deployment</a:t>
             </a:r>
           </a:p>
         </p:txBody>
@@ -16979,7 +13407,7 @@
                 </a:solidFill>
                 <a:latin typeface="Calibri"/>
               </a:rPr>
-              <a:t>The TDR is the evidence. LEON compares the declaration with that evidence.</a:t>
+              <a:t>The whole team will have access once this phase is completed.</a:t>
             </a:r>
           </a:p>
         </p:txBody>
@@ -16992,122 +13420,8 @@
         </p:nvSpPr>
         <p:spPr>
           <a:xfrm>
-            <a:off x="411480" y="1353312"/>
-            <a:ext cx="11338560" cy="1234440"/>
-          </a:xfrm>
-          <a:prstGeom prst="roundRect">
-            <a:avLst>
-              <a:gd name="adj" fmla="val 8000"/>
-            </a:avLst>
-          </a:prstGeom>
-          <a:solidFill>
-            <a:srgbClr val="FBF3E6"/>
-          </a:solidFill>
-          <a:ln w="12700">
-            <a:solidFill>
-              <a:srgbClr val="9A5B00"/>
-            </a:solidFill>
-          </a:ln>
-        </p:spPr>
-        <p:style>
-          <a:lnRef idx="1">
-            <a:schemeClr val="accent1"/>
-          </a:lnRef>
-          <a:fillRef idx="3">
-            <a:schemeClr val="accent1"/>
-          </a:fillRef>
-          <a:effectRef idx="2">
-            <a:schemeClr val="accent1"/>
-          </a:effectRef>
-          <a:fontRef idx="minor">
-            <a:schemeClr val="lt1"/>
-          </a:fontRef>
-        </p:style>
-        <p:txBody>
-          <a:bodyPr rtlCol="0" anchor="ctr"/>
-          <a:lstStyle/>
-          <a:p>
-            <a:pPr algn="ctr"/>
-          </a:p>
-        </p:txBody>
-      </p:sp>
-      <p:sp>
-        <p:nvSpPr>
-          <p:cNvPr id="9" name="TextBox 8"/>
-          <p:cNvSpPr txBox="1"/>
-          <p:nvPr/>
-        </p:nvSpPr>
-        <p:spPr>
-          <a:xfrm>
-            <a:off x="640080" y="1444752"/>
-            <a:ext cx="10972800" cy="292608"/>
-          </a:xfrm>
-          <a:prstGeom prst="rect">
-            <a:avLst/>
-          </a:prstGeom>
-          <a:noFill/>
-        </p:spPr>
-        <p:txBody>
-          <a:bodyPr wrap="square" anchor="t"/>
-          <a:lstStyle/>
-          <a:p>
-            <a:pPr algn="l"/>
-            <a:r>
-              <a:rPr sz="1400" b="1">
-                <a:solidFill>
-                  <a:srgbClr val="9A5B00"/>
-                </a:solidFill>
-                <a:latin typeface="Calibri"/>
-              </a:rPr>
-              <a:t>Example of inconsistency  —  display contrast</a:t>
-            </a:r>
-          </a:p>
-        </p:txBody>
-      </p:sp>
-      <p:sp>
-        <p:nvSpPr>
-          <p:cNvPr id="10" name="TextBox 9"/>
-          <p:cNvSpPr txBox="1"/>
-          <p:nvPr/>
-        </p:nvSpPr>
-        <p:spPr>
-          <a:xfrm>
-            <a:off x="640080" y="1755648"/>
-            <a:ext cx="10972800" cy="658368"/>
-          </a:xfrm>
-          <a:prstGeom prst="rect">
-            <a:avLst/>
-          </a:prstGeom>
-          <a:noFill/>
-        </p:spPr>
-        <p:txBody>
-          <a:bodyPr wrap="square" anchor="t"/>
-          <a:lstStyle/>
-          <a:p>
-            <a:pPr algn="l"/>
-            <a:r>
-              <a:rPr sz="1400" b="0">
-                <a:solidFill>
-                  <a:srgbClr val="1C2B3A"/>
-                </a:solidFill>
-                <a:latin typeface="Calibri"/>
-              </a:rPr>
-              <a:t>Requirement: contrast ≥ 400:1     ·     Matrix: OK     ·     TDR, slide 14: 380:1
-LEON presents this type of inconsistency first. Consistent requirements are not listed by default.</a:t>
-            </a:r>
-          </a:p>
-        </p:txBody>
-      </p:sp>
-      <p:sp>
-        <p:nvSpPr>
-          <p:cNvPr id="11" name="Rounded Rectangle 10"/>
-          <p:cNvSpPr/>
-          <p:nvPr/>
-        </p:nvSpPr>
-        <p:spPr>
-          <a:xfrm>
-            <a:off x="411480" y="2761488"/>
-            <a:ext cx="5532120" cy="3520440"/>
+            <a:off x="411480" y="1417320"/>
+            <a:ext cx="3703320" cy="3657600"/>
           </a:xfrm>
           <a:prstGeom prst="roundRect">
             <a:avLst>
@@ -17147,20 +13461,20 @@
       </p:sp>
       <p:sp>
         <p:nvSpPr>
-          <p:cNvPr id="12" name="Rectangle 11"/>
+          <p:cNvPr id="9" name="Rectangle 8"/>
           <p:cNvSpPr/>
           <p:nvPr/>
         </p:nvSpPr>
         <p:spPr>
           <a:xfrm>
-            <a:off x="411480" y="2761488"/>
-            <a:ext cx="73152" cy="3520440"/>
+            <a:off x="411480" y="1417320"/>
+            <a:ext cx="3703320" cy="109728"/>
           </a:xfrm>
           <a:prstGeom prst="rect">
             <a:avLst/>
           </a:prstGeom>
           <a:solidFill>
-            <a:srgbClr val="123061"/>
+            <a:srgbClr val="1D4ED8"/>
           </a:solidFill>
           <a:ln>
             <a:noFill/>
@@ -17190,14 +13504,14 @@
       </p:sp>
       <p:sp>
         <p:nvSpPr>
-          <p:cNvPr id="13" name="TextBox 12"/>
+          <p:cNvPr id="10" name="TextBox 9"/>
           <p:cNvSpPr txBox="1"/>
           <p:nvPr/>
         </p:nvSpPr>
         <p:spPr>
           <a:xfrm>
-            <a:off x="612648" y="2889504"/>
-            <a:ext cx="5221224" cy="347472"/>
+            <a:off x="640080" y="1691640"/>
+            <a:ext cx="3246120" cy="329184"/>
           </a:xfrm>
           <a:prstGeom prst="rect">
             <a:avLst/>
@@ -17210,27 +13524,27 @@
           <a:p>
             <a:pPr algn="l"/>
             <a:r>
-              <a:rPr sz="1600" b="1">
-                <a:solidFill>
-                  <a:srgbClr val="0B2545"/>
+              <a:rPr sz="1300" b="1">
+                <a:solidFill>
+                  <a:srgbClr val="1D4ED8"/>
                 </a:solidFill>
                 <a:latin typeface="Calibri"/>
               </a:rPr>
-              <a:t>Matrix ↔ TDR</a:t>
-            </a:r>
-          </a:p>
-        </p:txBody>
-      </p:sp>
-      <p:sp>
-        <p:nvSpPr>
-          <p:cNvPr id="14" name="TextBox 13"/>
+              <a:t>01  Now</a:t>
+            </a:r>
+          </a:p>
+        </p:txBody>
+      </p:sp>
+      <p:sp>
+        <p:nvSpPr>
+          <p:cNvPr id="11" name="TextBox 10"/>
           <p:cNvSpPr txBox="1"/>
           <p:nvPr/>
         </p:nvSpPr>
         <p:spPr>
           <a:xfrm>
-            <a:off x="612648" y="3218688"/>
-            <a:ext cx="5221224" cy="2935224"/>
+            <a:off x="640080" y="2084831"/>
+            <a:ext cx="3246120" cy="731520"/>
           </a:xfrm>
           <a:prstGeom prst="rect">
             <a:avLst/>
@@ -17243,29 +13557,60 @@
           <a:p>
             <a:pPr algn="l"/>
             <a:r>
-              <a:rPr sz="1300" b="0">
-                <a:solidFill>
-                  <a:srgbClr val="1C2B3A"/>
+              <a:rPr sz="2200" b="1">
+                <a:solidFill>
+                  <a:srgbClr val="0B2545"/>
                 </a:solidFill>
                 <a:latin typeface="Calibri"/>
               </a:rPr>
-              <a:t>The matrix and the TDR (PowerPoint, PDF or Word) are uploaded together.
-For each requirement, four elements are displayed: the Stellantis requirement, the matrix declaration, the TDR statement, and the source page or slide.
-The engineer confirms, corrects or requests additional evidence. No result is accepted automatically.</a:t>
-            </a:r>
-          </a:p>
-        </p:txBody>
-      </p:sp>
-      <p:sp>
-        <p:nvSpPr>
-          <p:cNvPr id="15" name="Rounded Rectangle 14"/>
+              <a:t>In progress</a:t>
+            </a:r>
+          </a:p>
+        </p:txBody>
+      </p:sp>
+      <p:sp>
+        <p:nvSpPr>
+          <p:cNvPr id="12" name="TextBox 11"/>
+          <p:cNvSpPr txBox="1"/>
+          <p:nvPr/>
+        </p:nvSpPr>
+        <p:spPr>
+          <a:xfrm>
+            <a:off x="640080" y="2926080"/>
+            <a:ext cx="3246120" cy="1874519"/>
+          </a:xfrm>
+          <a:prstGeom prst="rect">
+            <a:avLst/>
+          </a:prstGeom>
+          <a:noFill/>
+        </p:spPr>
+        <p:txBody>
+          <a:bodyPr wrap="square" anchor="t"/>
+          <a:lstStyle/>
+          <a:p>
+            <a:pPr algn="l"/>
+            <a:r>
+              <a:rPr sz="1400" b="0">
+                <a:solidFill>
+                  <a:srgbClr val="1C2B3A"/>
+                </a:solidFill>
+                <a:latin typeface="Calibri"/>
+              </a:rPr>
+              <a:t>Completion of the functions presented: specification, matrix, Matrix ↔ TDR and TDR benchmark.</a:t>
+            </a:r>
+          </a:p>
+        </p:txBody>
+      </p:sp>
+      <p:sp>
+        <p:nvSpPr>
+          <p:cNvPr id="13" name="Rounded Rectangle 12"/>
           <p:cNvSpPr/>
           <p:nvPr/>
         </p:nvSpPr>
         <p:spPr>
           <a:xfrm>
-            <a:off x="6172200" y="2761488"/>
-            <a:ext cx="5532120" cy="3520440"/>
+            <a:off x="4251960" y="1417320"/>
+            <a:ext cx="3703320" cy="3657600"/>
           </a:xfrm>
           <a:prstGeom prst="roundRect">
             <a:avLst>
@@ -17305,14 +13650,203 @@
       </p:sp>
       <p:sp>
         <p:nvSpPr>
-          <p:cNvPr id="16" name="Rectangle 15"/>
+          <p:cNvPr id="14" name="Rectangle 13"/>
           <p:cNvSpPr/>
           <p:nvPr/>
         </p:nvSpPr>
         <p:spPr>
           <a:xfrm>
-            <a:off x="6172200" y="2761488"/>
-            <a:ext cx="73152" cy="3520440"/>
+            <a:off x="4251960" y="1417320"/>
+            <a:ext cx="3703320" cy="109728"/>
+          </a:xfrm>
+          <a:prstGeom prst="rect">
+            <a:avLst/>
+          </a:prstGeom>
+          <a:solidFill>
+            <a:srgbClr val="9A5B00"/>
+          </a:solidFill>
+          <a:ln>
+            <a:noFill/>
+          </a:ln>
+        </p:spPr>
+        <p:style>
+          <a:lnRef idx="1">
+            <a:schemeClr val="accent1"/>
+          </a:lnRef>
+          <a:fillRef idx="3">
+            <a:schemeClr val="accent1"/>
+          </a:fillRef>
+          <a:effectRef idx="2">
+            <a:schemeClr val="accent1"/>
+          </a:effectRef>
+          <a:fontRef idx="minor">
+            <a:schemeClr val="lt1"/>
+          </a:fontRef>
+        </p:style>
+        <p:txBody>
+          <a:bodyPr rtlCol="0" anchor="ctr"/>
+          <a:lstStyle/>
+          <a:p>
+            <a:pPr algn="ctr"/>
+          </a:p>
+        </p:txBody>
+      </p:sp>
+      <p:sp>
+        <p:nvSpPr>
+          <p:cNvPr id="15" name="TextBox 14"/>
+          <p:cNvSpPr txBox="1"/>
+          <p:nvPr/>
+        </p:nvSpPr>
+        <p:spPr>
+          <a:xfrm>
+            <a:off x="4480560" y="1691640"/>
+            <a:ext cx="3246120" cy="329184"/>
+          </a:xfrm>
+          <a:prstGeom prst="rect">
+            <a:avLst/>
+          </a:prstGeom>
+          <a:noFill/>
+        </p:spPr>
+        <p:txBody>
+          <a:bodyPr wrap="square" anchor="t"/>
+          <a:lstStyle/>
+          <a:p>
+            <a:pPr algn="l"/>
+            <a:r>
+              <a:rPr sz="1300" b="1">
+                <a:solidFill>
+                  <a:srgbClr val="9A5B00"/>
+                </a:solidFill>
+                <a:latin typeface="Calibri"/>
+              </a:rPr>
+              <a:t>02  Next</a:t>
+            </a:r>
+          </a:p>
+        </p:txBody>
+      </p:sp>
+      <p:sp>
+        <p:nvSpPr>
+          <p:cNvPr id="16" name="TextBox 15"/>
+          <p:cNvSpPr txBox="1"/>
+          <p:nvPr/>
+        </p:nvSpPr>
+        <p:spPr>
+          <a:xfrm>
+            <a:off x="4480560" y="2084831"/>
+            <a:ext cx="3246120" cy="731520"/>
+          </a:xfrm>
+          <a:prstGeom prst="rect">
+            <a:avLst/>
+          </a:prstGeom>
+          <a:noFill/>
+        </p:spPr>
+        <p:txBody>
+          <a:bodyPr wrap="square" anchor="t"/>
+          <a:lstStyle/>
+          <a:p>
+            <a:pPr algn="l"/>
+            <a:r>
+              <a:rPr sz="2200" b="1">
+                <a:solidFill>
+                  <a:srgbClr val="0B2545"/>
+                </a:solidFill>
+                <a:latin typeface="Calibri"/>
+              </a:rPr>
+              <a:t>Close this phase</a:t>
+            </a:r>
+          </a:p>
+        </p:txBody>
+      </p:sp>
+      <p:sp>
+        <p:nvSpPr>
+          <p:cNvPr id="17" name="TextBox 16"/>
+          <p:cNvSpPr txBox="1"/>
+          <p:nvPr/>
+        </p:nvSpPr>
+        <p:spPr>
+          <a:xfrm>
+            <a:off x="4480560" y="2926080"/>
+            <a:ext cx="3246120" cy="1874519"/>
+          </a:xfrm>
+          <a:prstGeom prst="rect">
+            <a:avLst/>
+          </a:prstGeom>
+          <a:noFill/>
+        </p:spPr>
+        <p:txBody>
+          <a:bodyPr wrap="square" anchor="t"/>
+          <a:lstStyle/>
+          <a:p>
+            <a:pPr algn="l"/>
+            <a:r>
+              <a:rPr sz="1400" b="0">
+                <a:solidFill>
+                  <a:srgbClr val="1C2B3A"/>
+                </a:solidFill>
+                <a:latin typeface="Calibri"/>
+              </a:rPr>
+              <a:t>Remaining development, tests on representative files, alignment with Imane El Brouji and Patrick Garcia.</a:t>
+            </a:r>
+          </a:p>
+        </p:txBody>
+      </p:sp>
+      <p:sp>
+        <p:nvSpPr>
+          <p:cNvPr id="18" name="Rounded Rectangle 17"/>
+          <p:cNvSpPr/>
+          <p:nvPr/>
+        </p:nvSpPr>
+        <p:spPr>
+          <a:xfrm>
+            <a:off x="8092440" y="1417320"/>
+            <a:ext cx="3703320" cy="3657600"/>
+          </a:xfrm>
+          <a:prstGeom prst="roundRect">
+            <a:avLst>
+              <a:gd name="adj" fmla="val 8000"/>
+            </a:avLst>
+          </a:prstGeom>
+          <a:solidFill>
+            <a:srgbClr val="FFFFFF"/>
+          </a:solidFill>
+          <a:ln w="12700">
+            <a:solidFill>
+              <a:srgbClr val="DDE3EC"/>
+            </a:solidFill>
+          </a:ln>
+        </p:spPr>
+        <p:style>
+          <a:lnRef idx="1">
+            <a:schemeClr val="accent1"/>
+          </a:lnRef>
+          <a:fillRef idx="3">
+            <a:schemeClr val="accent1"/>
+          </a:fillRef>
+          <a:effectRef idx="2">
+            <a:schemeClr val="accent1"/>
+          </a:effectRef>
+          <a:fontRef idx="minor">
+            <a:schemeClr val="lt1"/>
+          </a:fontRef>
+        </p:style>
+        <p:txBody>
+          <a:bodyPr rtlCol="0" anchor="ctr"/>
+          <a:lstStyle/>
+          <a:p>
+            <a:pPr algn="ctr"/>
+          </a:p>
+        </p:txBody>
+      </p:sp>
+      <p:sp>
+        <p:nvSpPr>
+          <p:cNvPr id="19" name="Rectangle 18"/>
+          <p:cNvSpPr/>
+          <p:nvPr/>
+        </p:nvSpPr>
+        <p:spPr>
+          <a:xfrm>
+            <a:off x="8092440" y="1417320"/>
+            <a:ext cx="3703320" cy="109728"/>
           </a:xfrm>
           <a:prstGeom prst="rect">
             <a:avLst/>
@@ -17348,14 +13882,14 @@
       </p:sp>
       <p:sp>
         <p:nvSpPr>
-          <p:cNvPr id="17" name="TextBox 16"/>
+          <p:cNvPr id="20" name="TextBox 19"/>
           <p:cNvSpPr txBox="1"/>
           <p:nvPr/>
         </p:nvSpPr>
         <p:spPr>
           <a:xfrm>
-            <a:off x="6373368" y="2889504"/>
-            <a:ext cx="5221224" cy="347472"/>
+            <a:off x="8321040" y="1691640"/>
+            <a:ext cx="3246120" cy="329184"/>
           </a:xfrm>
           <a:prstGeom prst="rect">
             <a:avLst/>
@@ -17368,27 +13902,27 @@
           <a:p>
             <a:pPr algn="l"/>
             <a:r>
-              <a:rPr sz="1600" b="1">
-                <a:solidFill>
-                  <a:srgbClr val="0B2545"/>
+              <a:rPr sz="1300" b="1">
+                <a:solidFill>
+                  <a:srgbClr val="157347"/>
                 </a:solidFill>
                 <a:latin typeface="Calibri"/>
               </a:rPr>
-              <a:t>TDR benchmark</a:t>
-            </a:r>
-          </a:p>
-        </p:txBody>
-      </p:sp>
-      <p:sp>
-        <p:nvSpPr>
-          <p:cNvPr id="18" name="TextBox 17"/>
+              <a:t>03  Then</a:t>
+            </a:r>
+          </a:p>
+        </p:txBody>
+      </p:sp>
+      <p:sp>
+        <p:nvSpPr>
+          <p:cNvPr id="21" name="TextBox 20"/>
           <p:cNvSpPr txBox="1"/>
           <p:nvPr/>
         </p:nvSpPr>
         <p:spPr>
           <a:xfrm>
-            <a:off x="6373368" y="3218688"/>
-            <a:ext cx="5221224" cy="2935224"/>
+            <a:off x="8321040" y="2084831"/>
+            <a:ext cx="3246120" cy="731520"/>
           </a:xfrm>
           <a:prstGeom prst="rect">
             <a:avLst/>
@@ -17401,22 +13935,133 @@
           <a:p>
             <a:pPr algn="l"/>
             <a:r>
-              <a:rPr sz="1300" b="0">
-                <a:solidFill>
-                  <a:srgbClr val="1C2B3A"/>
+              <a:rPr sz="2200" b="1">
+                <a:solidFill>
+                  <a:srgbClr val="0B2545"/>
                 </a:solidFill>
                 <a:latin typeface="Calibri"/>
               </a:rPr>
-              <a:t>Several supplier dossiers are compared on the same technical domains (mechanics, display, electronics, safety, software, validation, industrialisation).
-Commercial content is excluded.
-The output is a structured comparison of strengths, gaps and open points. Supplier selection remains a human decision.</a:t>
-            </a:r>
-          </a:p>
-        </p:txBody>
-      </p:sp>
-      <p:sp>
-        <p:nvSpPr>
-          <p:cNvPr id="19" name="Rectangle 18"/>
+              <a:t>Deployment</a:t>
+            </a:r>
+          </a:p>
+        </p:txBody>
+      </p:sp>
+      <p:sp>
+        <p:nvSpPr>
+          <p:cNvPr id="22" name="TextBox 21"/>
+          <p:cNvSpPr txBox="1"/>
+          <p:nvPr/>
+        </p:nvSpPr>
+        <p:spPr>
+          <a:xfrm>
+            <a:off x="8321040" y="2926080"/>
+            <a:ext cx="3246120" cy="1874519"/>
+          </a:xfrm>
+          <a:prstGeom prst="rect">
+            <a:avLst/>
+          </a:prstGeom>
+          <a:noFill/>
+        </p:spPr>
+        <p:txBody>
+          <a:bodyPr wrap="square" anchor="t"/>
+          <a:lstStyle/>
+          <a:p>
+            <a:pPr algn="l"/>
+            <a:r>
+              <a:rPr sz="1400" b="0">
+                <a:solidFill>
+                  <a:srgbClr val="1C2B3A"/>
+                </a:solidFill>
+                <a:latin typeface="Calibri"/>
+              </a:rPr>
+              <a:t>Deployment will start so that Mechatronics Engineering can open LEON in a browser, without installation.</a:t>
+            </a:r>
+          </a:p>
+        </p:txBody>
+      </p:sp>
+      <p:sp>
+        <p:nvSpPr>
+          <p:cNvPr id="23" name="Rounded Rectangle 22"/>
+          <p:cNvSpPr/>
+          <p:nvPr/>
+        </p:nvSpPr>
+        <p:spPr>
+          <a:xfrm>
+            <a:off x="411480" y="5257800"/>
+            <a:ext cx="11292840" cy="1097280"/>
+          </a:xfrm>
+          <a:prstGeom prst="roundRect">
+            <a:avLst>
+              <a:gd name="adj" fmla="val 8000"/>
+            </a:avLst>
+          </a:prstGeom>
+          <a:solidFill>
+            <a:srgbClr val="E8F5EE"/>
+          </a:solidFill>
+          <a:ln w="12700">
+            <a:solidFill>
+              <a:srgbClr val="157347"/>
+            </a:solidFill>
+          </a:ln>
+        </p:spPr>
+        <p:style>
+          <a:lnRef idx="1">
+            <a:schemeClr val="accent1"/>
+          </a:lnRef>
+          <a:fillRef idx="3">
+            <a:schemeClr val="accent1"/>
+          </a:fillRef>
+          <a:effectRef idx="2">
+            <a:schemeClr val="accent1"/>
+          </a:effectRef>
+          <a:fontRef idx="minor">
+            <a:schemeClr val="lt1"/>
+          </a:fontRef>
+        </p:style>
+        <p:txBody>
+          <a:bodyPr rtlCol="0" anchor="ctr"/>
+          <a:lstStyle/>
+          <a:p>
+            <a:pPr algn="ctr"/>
+          </a:p>
+        </p:txBody>
+      </p:sp>
+      <p:sp>
+        <p:nvSpPr>
+          <p:cNvPr id="24" name="TextBox 23"/>
+          <p:cNvSpPr txBox="1"/>
+          <p:nvPr/>
+        </p:nvSpPr>
+        <p:spPr>
+          <a:xfrm>
+            <a:off x="640080" y="5413248"/>
+            <a:ext cx="10881360" cy="822960"/>
+          </a:xfrm>
+          <a:prstGeom prst="rect">
+            <a:avLst/>
+          </a:prstGeom>
+          <a:noFill/>
+        </p:spPr>
+        <p:txBody>
+          <a:bodyPr wrap="square" anchor="t"/>
+          <a:lstStyle/>
+          <a:p>
+            <a:pPr algn="l"/>
+            <a:r>
+              <a:rPr sz="1600" b="1">
+                <a:solidFill>
+                  <a:srgbClr val="0B2545"/>
+                </a:solidFill>
+                <a:latin typeface="Calibri"/>
+              </a:rPr>
+              <a:t>Target: any colleague who reviews a specification, a matrix or a TDR can use LEON.</a:t>
+            </a:r>
+          </a:p>
+        </p:txBody>
+      </p:sp>
+      <p:sp>
+        <p:nvSpPr>
+          <p:cNvPr id="25" name="Rectangle 24"/>
           <p:cNvSpPr/>
           <p:nvPr/>
         </p:nvSpPr>
@@ -17459,7 +14104,7 @@
       </p:sp>
       <p:sp>
         <p:nvSpPr>
-          <p:cNvPr id="20" name="TextBox 19"/>
+          <p:cNvPr id="26" name="TextBox 25"/>
           <p:cNvSpPr txBox="1"/>
           <p:nvPr/>
         </p:nvSpPr>
@@ -17492,7 +14137,7 @@
       </p:sp>
       <p:sp>
         <p:nvSpPr>
-          <p:cNvPr id="21" name="TextBox 20"/>
+          <p:cNvPr id="27" name="TextBox 26"/>
           <p:cNvSpPr txBox="1"/>
           <p:nvPr/>
         </p:nvSpPr>
@@ -17518,7 +14163,7 @@
                 </a:solidFill>
                 <a:latin typeface="Calibri"/>
               </a:rPr>
-              <a:t>9  /  14</a:t>
+              <a:t>9  /  11</a:t>
             </a:r>
           </a:p>
         </p:txBody>

--- a/docs/LEON_intro_for_non_specialists.pptx
+++ b/docs/LEON_intro_for_non_specialists.pptx
@@ -3861,8 +3861,8 @@
         </p:nvSpPr>
         <p:spPr>
           <a:xfrm>
-            <a:off x="640080" y="1389888"/>
-            <a:ext cx="10972800" cy="566928"/>
+            <a:off x="640080" y="1417320"/>
+            <a:ext cx="10972800" cy="640080"/>
           </a:xfrm>
           <a:prstGeom prst="rect">
             <a:avLst/>
@@ -3875,13 +3875,13 @@
           <a:p>
             <a:pPr algn="l"/>
             <a:r>
-              <a:rPr sz="3800" b="1">
+              <a:rPr sz="4800" b="1">
                 <a:solidFill>
                   <a:srgbClr val="FFFFFF"/>
                 </a:solidFill>
                 <a:latin typeface="Calibri"/>
               </a:rPr>
-              <a:t>Khadija Benhamida</a:t>
+              <a:t>AERIS</a:t>
             </a:r>
           </a:p>
         </p:txBody>
@@ -3894,8 +3894,8 @@
         </p:nvSpPr>
         <p:spPr>
           <a:xfrm>
-            <a:off x="640080" y="1993392"/>
-            <a:ext cx="10972800" cy="502920"/>
+            <a:off x="640080" y="2084831"/>
+            <a:ext cx="10972800" cy="384048"/>
           </a:xfrm>
           <a:prstGeom prst="rect">
             <a:avLst/>
@@ -3908,13 +3908,13 @@
           <a:p>
             <a:pPr algn="l"/>
             <a:r>
-              <a:rPr sz="2600" b="1">
+              <a:rPr sz="1800" b="1">
                 <a:solidFill>
                   <a:srgbClr val="E8EEFB"/>
                 </a:solidFill>
                 <a:latin typeface="Calibri"/>
               </a:rPr>
-              <a:t>LEON — Quality Analysis</a:t>
+              <a:t>Automated Engineering Review &amp; Integrity System</a:t>
             </a:r>
           </a:p>
         </p:txBody>
@@ -3927,7 +3927,7 @@
         </p:nvSpPr>
         <p:spPr>
           <a:xfrm>
-            <a:off x="640080" y="2560320"/>
+            <a:off x="640080" y="2542032"/>
             <a:ext cx="10789920" cy="640080"/>
           </a:xfrm>
           <a:prstGeom prst="rect">
@@ -3961,7 +3961,7 @@
         </p:nvSpPr>
         <p:spPr>
           <a:xfrm>
-            <a:off x="640080" y="3310128"/>
+            <a:off x="640080" y="3273552"/>
             <a:ext cx="3108960" cy="64008"/>
           </a:xfrm>
           <a:prstGeom prst="rect">
@@ -4004,7 +4004,7 @@
         </p:nvSpPr>
         <p:spPr>
           <a:xfrm>
-            <a:off x="640080" y="3493008"/>
+            <a:off x="640080" y="3456432"/>
             <a:ext cx="10789920" cy="640080"/>
           </a:xfrm>
           <a:prstGeom prst="rect">
@@ -4924,7 +4924,7 @@
                 <a:latin typeface="Calibri"/>
               </a:rPr>
               <a:t>Clarify what AI can and cannot do on specifications, matrices and TDR files.
-Position LEON as a first analysis, not as a substitute for the engineer.
+Position AERIS as a first analysis, not as a substitute for the engineer.
 Establish a common practice: where AI reduces review time, and where a technical decision is required.
 Use examples drawn from mechatronics documents.</a:t>
             </a:r>
@@ -6415,7 +6415,7 @@
                 </a:solidFill>
                 <a:latin typeface="Calibri"/>
               </a:rPr>
-              <a:t>Purpose of LEON, the three documents (specification, matrix, TDR) and the application.</a:t>
+              <a:t>Purpose of AERIS, the three documents (specification, matrix, TDR) and the application.</a:t>
             </a:r>
           </a:p>
         </p:txBody>
@@ -7715,7 +7715,7 @@
                 </a:solidFill>
                 <a:latin typeface="Calibri"/>
               </a:rPr>
-              <a:t>LEON supports Mechatronics Engineering in the review of three documents that must remain consistent.</a:t>
+              <a:t>AERIS supports Mechatronics Engineering in the review of three documents that must remain consistent.</a:t>
             </a:r>
           </a:p>
         </p:txBody>
@@ -7796,7 +7796,7 @@
                 <a:latin typeface="Calibri"/>
               </a:rPr>
               <a:t>Objective: provide a structured first analysis of supplier files, reduce review time and highlight inconsistencies — while the engineer remains responsible for the technical decision.
-LEON does not approve a supplier and does not replace Quality or Purchasing.</a:t>
+AERIS does not approve a supplier and does not replace Quality or Purchasing.</a:t>
             </a:r>
           </a:p>
         </p:txBody>
@@ -8592,7 +8592,7 @@
                 </a:solidFill>
                 <a:latin typeface="Calibri"/>
               </a:rPr>
-              <a:t>Why LEON exists, and what it does</a:t>
+              <a:t>Why AERIS exists, and what it does</a:t>
             </a:r>
           </a:p>
         </p:txBody>
@@ -8625,7 +8625,7 @@
                 </a:solidFill>
                 <a:latin typeface="Calibri"/>
               </a:rPr>
-              <a:t>The review is still largely manual. LEON performs a first reading of the files in a browser.</a:t>
+              <a:t>The review is still largely manual. AERIS performs a first reading of the files in a browser.</a:t>
             </a:r>
           </a:p>
         </p:txBody>
@@ -9372,7 +9372,7 @@
                 </a:solidFill>
                 <a:latin typeface="Calibri"/>
               </a:rPr>
-              <a:t>What LEON does</a:t>
+              <a:t>What AERIS does</a:t>
             </a:r>
           </a:p>
         </p:txBody>
@@ -9409,7 +9409,7 @@
 The application identifies each requirement, its status, and the matching page or slide in the TDR.
 It highlights inconsistencies and produces a colour-coded Excel report for the review meeting.
 No installation is required for the reviewer.
-The technical decision remains human. LEON does not issue a certificate of conformity.</a:t>
+The technical decision remains human. AERIS does not issue a certificate of conformity.</a:t>
             </a:r>
           </a:p>
         </p:txBody>
@@ -11212,7 +11212,7 @@
                 <a:latin typeface="Calibri"/>
               </a:rPr>
               <a:t>The CTS file is uploaded (Word, PDF or text).
-LEON verifies:
+AERIS verifies:
 • mandatory sections (Purpose, Scope, Requirements…);
 • remaining placeholders (&lt;&lt;name&gt;&gt;, TBD, XXX);
 • requirement identifiers and binding language (“shall”).
@@ -11374,7 +11374,7 @@
                 <a:latin typeface="Calibri"/>
               </a:rPr>
               <a:t>The supplier matrix is uploaded (Excel / ODS).
-LEON counts OK / NOK / NA statuses and lists every requirement.
+AERIS counts OK / NOK / NA statuses and lists every requirement.
 Each OK comment is reviewed. A point of attention is raised when:
 • the comment contradicts the status;
 • conformity is partial or still pending.
@@ -11733,7 +11733,7 @@
                 </a:solidFill>
                 <a:latin typeface="Calibri"/>
               </a:rPr>
-              <a:t>The TDR is the evidence. LEON compares the declaration with that evidence.</a:t>
+              <a:t>The TDR is the evidence. AERIS compares the declaration with that evidence.</a:t>
             </a:r>
           </a:p>
         </p:txBody>
@@ -12518,7 +12518,7 @@
                 </a:solidFill>
                 <a:latin typeface="Calibri"/>
               </a:rPr>
-              <a:t>Imane El Brouji and Patrick Garcia provide the mechatronics expertise. I implement LEON.</a:t>
+              <a:t>Imane El Brouji and Patrick Garcia provide the mechatronics expertise. I implement AERIS.</a:t>
             </a:r>
           </a:p>
         </p:txBody>
@@ -13052,7 +13052,7 @@
                 </a:solidFill>
                 <a:latin typeface="Calibri"/>
               </a:rPr>
-              <a:t>They provide the ideas and the technical meaning on the mechatronics side. I develop and iterate on LEON. The application is designed from engineering practice, not as a standalone IT development.</a:t>
+              <a:t>They provide the ideas and the technical meaning on the mechatronics side. I develop and iterate on AERIS. The application is designed from engineering practice, not as a standalone IT development.</a:t>
             </a:r>
           </a:p>
         </p:txBody>
@@ -13974,7 +13974,7 @@
                 </a:solidFill>
                 <a:latin typeface="Calibri"/>
               </a:rPr>
-              <a:t>Deployment will start so that Mechatronics Engineering can open LEON in a browser, without installation.</a:t>
+              <a:t>Deployment will start so that Mechatronics Engineering can open AERIS in a browser, without installation.</a:t>
             </a:r>
           </a:p>
         </p:txBody>
@@ -14054,7 +14054,7 @@
                 </a:solidFill>
                 <a:latin typeface="Calibri"/>
               </a:rPr>
-              <a:t>Target: any colleague who reviews a specification, a matrix or a TDR can use LEON.</a:t>
+              <a:t>Target: any colleague who reviews a specification, a matrix or a TDR can use AERIS.</a:t>
             </a:r>
           </a:p>
         </p:txBody>
